--- a/operator_hypothesis_lab/presentations/return_geometry_edge_promotion_huddle.pptx
+++ b/operator_hypothesis_lab/presentations/return_geometry_edge_promotion_huddle.pptx
@@ -2,19 +2,26 @@
 <file path=ppt/presentation.xml><?xml version="1.0" encoding="utf-8"?>
 <p:presentation xmlns:p="http://schemas.openxmlformats.org/presentationml/2006/main">
   <p:sldMasterIdLst>
-    <p:sldMasterId xmlns:r="http://schemas.openxmlformats.org/officeDocument/2006/relationships" id="2147483648" r:id="R4b222f6b5c534970"/>
+    <p:sldMasterId xmlns:r="http://schemas.openxmlformats.org/officeDocument/2006/relationships" id="2147483648" r:id="Rfbe7c072e9ce4e46"/>
   </p:sldMasterIdLst>
   <p:notesMasterIdLst>
-    <p:notesMasterId xmlns:r="http://schemas.openxmlformats.org/officeDocument/2006/relationships" r:id="R4e3d0d9f42fa402f"/>
+    <p:notesMasterId xmlns:r="http://schemas.openxmlformats.org/officeDocument/2006/relationships" r:id="R232e0113f1684ade"/>
   </p:notesMasterIdLst>
   <p:sldIdLst>
-    <p:sldId xmlns:r="http://schemas.openxmlformats.org/officeDocument/2006/relationships" id="256" r:id="R69ded19b35a74389"/>
-    <p:sldId xmlns:r="http://schemas.openxmlformats.org/officeDocument/2006/relationships" id="257" r:id="R9576d139b21642bb"/>
-    <p:sldId xmlns:r="http://schemas.openxmlformats.org/officeDocument/2006/relationships" id="258" r:id="R032b98ce54084791"/>
-    <p:sldId xmlns:r="http://schemas.openxmlformats.org/officeDocument/2006/relationships" id="259" r:id="R3c6e8fa3063042fa"/>
-    <p:sldId xmlns:r="http://schemas.openxmlformats.org/officeDocument/2006/relationships" id="260" r:id="R419b3fe2c4724ab1"/>
-    <p:sldId xmlns:r="http://schemas.openxmlformats.org/officeDocument/2006/relationships" id="261" r:id="R257747df4d004e9b"/>
-    <p:sldId xmlns:r="http://schemas.openxmlformats.org/officeDocument/2006/relationships" id="262" r:id="Rb6fbcab2f0094555"/>
+    <p:sldId xmlns:r="http://schemas.openxmlformats.org/officeDocument/2006/relationships" id="256" r:id="Rbc00210236524d10"/>
+    <p:sldId xmlns:r="http://schemas.openxmlformats.org/officeDocument/2006/relationships" id="257" r:id="R4fe5cfbf5b4f4f74"/>
+    <p:sldId xmlns:r="http://schemas.openxmlformats.org/officeDocument/2006/relationships" id="258" r:id="R248db14013ba4ea4"/>
+    <p:sldId xmlns:r="http://schemas.openxmlformats.org/officeDocument/2006/relationships" id="259" r:id="Rd73a275feeb04466"/>
+    <p:sldId xmlns:r="http://schemas.openxmlformats.org/officeDocument/2006/relationships" id="260" r:id="R365ec315b88e4a48"/>
+    <p:sldId xmlns:r="http://schemas.openxmlformats.org/officeDocument/2006/relationships" id="261" r:id="R5608bb0b1a404037"/>
+    <p:sldId xmlns:r="http://schemas.openxmlformats.org/officeDocument/2006/relationships" id="262" r:id="R5b26d08f004c40e8"/>
+    <p:sldId xmlns:r="http://schemas.openxmlformats.org/officeDocument/2006/relationships" id="263" r:id="R62f4c2bec2ac458d"/>
+    <p:sldId xmlns:r="http://schemas.openxmlformats.org/officeDocument/2006/relationships" id="264" r:id="Re3aab716c99f4e67"/>
+    <p:sldId xmlns:r="http://schemas.openxmlformats.org/officeDocument/2006/relationships" id="265" r:id="R3b5b8d5ffad449d8"/>
+    <p:sldId xmlns:r="http://schemas.openxmlformats.org/officeDocument/2006/relationships" id="266" r:id="R39378f0773904102"/>
+    <p:sldId xmlns:r="http://schemas.openxmlformats.org/officeDocument/2006/relationships" id="267" r:id="R5fc95116e12a4d63"/>
+    <p:sldId xmlns:r="http://schemas.openxmlformats.org/officeDocument/2006/relationships" id="268" r:id="R86f884fd8e9a4f85"/>
+    <p:sldId xmlns:r="http://schemas.openxmlformats.org/officeDocument/2006/relationships" id="269" r:id="R943917c6f8af4aa3"/>
   </p:sldIdLst>
   <p:sldSz cx="12192000" cy="6858000"/>
   <p:notesSz cx="6858000" cy="9144000"/>
@@ -508,6 +515,531 @@
 </p:notes>
 </file>
 
+<file path=ppt/notesSlides/notesSlide10.xml><?xml version="1.0" encoding="utf-8"?>
+<p:notes xmlns:p="http://schemas.openxmlformats.org/presentationml/2006/main">
+  <p:cSld>
+    <p:spTree>
+      <p:nvGrpSpPr>
+        <p:cNvPr id="1" name=""/>
+        <p:cNvGrpSpPr/>
+        <p:nvPr/>
+      </p:nvGrpSpPr>
+      <p:grpSpPr>
+        <a:xfrm xmlns:a="http://schemas.openxmlformats.org/drawingml/2006/main"/>
+      </p:grpSpPr>
+      <p:sp>
+        <p:nvSpPr>
+          <p:cNvPr id="2" name="Slide Image Placeholder 1"/>
+          <p:cNvSpPr>
+            <a:spLocks xmlns:a="http://schemas.openxmlformats.org/drawingml/2006/main" noGrp="1"/>
+          </p:cNvSpPr>
+          <p:nvPr>
+            <p:ph type="sldImg" idx="0"/>
+          </p:nvPr>
+        </p:nvSpPr>
+        <p:spPr/>
+      </p:sp>
+      <p:sp>
+        <p:nvSpPr>
+          <p:cNvPr id="3" name="Notes Placeholder 2"/>
+          <p:cNvSpPr>
+            <a:spLocks xmlns:a="http://schemas.openxmlformats.org/drawingml/2006/main" noGrp="1"/>
+          </p:cNvSpPr>
+          <p:nvPr>
+            <p:ph type="body" idx="1"/>
+          </p:nvPr>
+        </p:nvSpPr>
+        <p:spPr/>
+        <p:txBody>
+          <a:bodyPr xmlns:a="http://schemas.openxmlformats.org/drawingml/2006/main"/>
+          <a:lstStyle xmlns:a="http://schemas.openxmlformats.org/drawingml/2006/main"/>
+          <a:p xmlns:a="http://schemas.openxmlformats.org/drawingml/2006/main">
+            <a:r>
+              <a:t>The cumulative line remains strongly negative because it carries earlier blocks. The incremental line shows where new covariance arrives: it is negative in every block, but its strength is uneven. The 41-60 block is especially distinct; the 61-100 block is weak and the unfiltered-loss comparator is near zero there.</a:t>
+            </a:r>
+          </a:p>
+          <a:p xmlns:a="http://schemas.openxmlformats.org/drawingml/2006/main">
+            <a:r>
+              <a:t/>
+            </a:r>
+          </a:p>
+          <a:p xmlns:a="http://schemas.openxmlformats.org/drawingml/2006/main">
+            <a:r>
+              <a:t>[Sources]</a:t>
+            </a:r>
+          </a:p>
+          <a:p xmlns:a="http://schemas.openxmlformats.org/drawingml/2006/main">
+            <a:r>
+              <a:t>- Codex thread 01a0226e-2fa2-7222-a6d9-79ab971ac616 (2026-08-27), operator-authorized incremental forward-return decomposition slice.</a:t>
+            </a:r>
+          </a:p>
+          <a:p xmlns:a="http://schemas.openxmlformats.org/drawingml/2006/main">
+            <a:r>
+              <a:t>- runs/research_workbench/operator_hypothesis_lab/return_geometry_incremental_forward_decomposition_20260827/equal_sector_block_summary.csv</a:t>
+            </a:r>
+          </a:p>
+          <a:p xmlns:a="http://schemas.openxmlformats.org/drawingml/2006/main">
+            <a:r>
+              <a:t>- runs/research_workbench/operator_hypothesis_lab/return_geometry_incremental_forward_decomposition_20260827/report.md</a:t>
+            </a:r>
+          </a:p>
+          <a:p xmlns:a="http://schemas.openxmlformats.org/drawingml/2006/main">
+            <a:r>
+              <a:t>- runs/research_workbench/operator_hypothesis_lab/return_geometry_incremental_forward_decomposition_20260827/visuals/cumulative_vs_incremental_correlation.png</a:t>
+            </a:r>
+          </a:p>
+          <a:p xmlns:a="http://schemas.openxmlformats.org/drawingml/2006/main">
+            <a:r>
+              <a:t>[/Sources]</a:t>
+            </a:r>
+          </a:p>
+        </p:txBody>
+      </p:sp>
+      <p:sp>
+        <p:nvSpPr>
+          <p:cNvPr id="4" name="Slide Number Placeholder 3"/>
+          <p:cNvSpPr>
+            <a:spLocks xmlns:a="http://schemas.openxmlformats.org/drawingml/2006/main" noGrp="1"/>
+          </p:cNvSpPr>
+          <p:nvPr>
+            <p:ph type="sldNum" idx="5"/>
+          </p:nvPr>
+        </p:nvSpPr>
+        <p:spPr/>
+        <p:txBody>
+          <a:bodyPr xmlns:a="http://schemas.openxmlformats.org/drawingml/2006/main"/>
+          <a:lstStyle xmlns:a="http://schemas.openxmlformats.org/drawingml/2006/main"/>
+          <a:p xmlns:a="http://schemas.openxmlformats.org/drawingml/2006/main"/>
+        </p:txBody>
+      </p:sp>
+    </p:spTree>
+  </p:cSld>
+  <p:clrMapOvr>
+    <a:masterClrMapping xmlns:a="http://schemas.openxmlformats.org/drawingml/2006/main"/>
+  </p:clrMapOvr>
+</p:notes>
+</file>
+
+<file path=ppt/notesSlides/notesSlide11.xml><?xml version="1.0" encoding="utf-8"?>
+<p:notes xmlns:p="http://schemas.openxmlformats.org/presentationml/2006/main">
+  <p:cSld>
+    <p:spTree>
+      <p:nvGrpSpPr>
+        <p:cNvPr id="1" name=""/>
+        <p:cNvGrpSpPr/>
+        <p:nvPr/>
+      </p:nvGrpSpPr>
+      <p:grpSpPr>
+        <a:xfrm xmlns:a="http://schemas.openxmlformats.org/drawingml/2006/main"/>
+      </p:grpSpPr>
+      <p:sp>
+        <p:nvSpPr>
+          <p:cNvPr id="2" name="Slide Image Placeholder 1"/>
+          <p:cNvSpPr>
+            <a:spLocks xmlns:a="http://schemas.openxmlformats.org/drawingml/2006/main" noGrp="1"/>
+          </p:cNvSpPr>
+          <p:nvPr>
+            <p:ph type="sldImg" idx="0"/>
+          </p:nvPr>
+        </p:nvSpPr>
+        <p:spPr/>
+      </p:sp>
+      <p:sp>
+        <p:nvSpPr>
+          <p:cNvPr id="3" name="Notes Placeholder 2"/>
+          <p:cNvSpPr>
+            <a:spLocks xmlns:a="http://schemas.openxmlformats.org/drawingml/2006/main" noGrp="1"/>
+          </p:cNvSpPr>
+          <p:nvPr>
+            <p:ph type="body" idx="1"/>
+          </p:nvPr>
+        </p:nvSpPr>
+        <p:spPr/>
+        <p:txBody>
+          <a:bodyPr xmlns:a="http://schemas.openxmlformats.org/drawingml/2006/main"/>
+          <a:lstStyle xmlns:a="http://schemas.openxmlformats.org/drawingml/2006/main"/>
+          <a:p xmlns:a="http://schemas.openxmlformats.org/drawingml/2006/main">
+            <a:r>
+              <a:t>Ten of 11 sector medians are negative in both 21-40 and 41-60. Breadth falls to 7 of 11 in 61-100, where Utilities, Real Estate, Financials, and Energy turn positive. This is broad morphology with real heterogeneity, not a universal asset law.</a:t>
+            </a:r>
+          </a:p>
+          <a:p xmlns:a="http://schemas.openxmlformats.org/drawingml/2006/main">
+            <a:r>
+              <a:t/>
+            </a:r>
+          </a:p>
+          <a:p xmlns:a="http://schemas.openxmlformats.org/drawingml/2006/main">
+            <a:r>
+              <a:t>[Sources]</a:t>
+            </a:r>
+          </a:p>
+          <a:p xmlns:a="http://schemas.openxmlformats.org/drawingml/2006/main">
+            <a:r>
+              <a:t>- Codex thread 01a0226e-2fa2-7222-a6d9-79ab971ac616 (2026-08-27), operator-authorized incremental forward-return decomposition slice.</a:t>
+            </a:r>
+          </a:p>
+          <a:p xmlns:a="http://schemas.openxmlformats.org/drawingml/2006/main">
+            <a:r>
+              <a:t>- runs/research_workbench/operator_hypothesis_lab/return_geometry_incremental_forward_decomposition_20260827/core_sector_block_summary.csv</a:t>
+            </a:r>
+          </a:p>
+          <a:p xmlns:a="http://schemas.openxmlformats.org/drawingml/2006/main">
+            <a:r>
+              <a:t>- runs/research_workbench/operator_hypothesis_lab/return_geometry_incremental_forward_decomposition_20260827/equal_sector_block_summary.csv</a:t>
+            </a:r>
+          </a:p>
+          <a:p xmlns:a="http://schemas.openxmlformats.org/drawingml/2006/main">
+            <a:r>
+              <a:t>- runs/research_workbench/operator_hypothesis_lab/return_geometry_incremental_forward_decomposition_20260827/visuals/incremental_sector_heatmap.png</a:t>
+            </a:r>
+          </a:p>
+          <a:p xmlns:a="http://schemas.openxmlformats.org/drawingml/2006/main">
+            <a:r>
+              <a:t>[/Sources]</a:t>
+            </a:r>
+          </a:p>
+        </p:txBody>
+      </p:sp>
+      <p:sp>
+        <p:nvSpPr>
+          <p:cNvPr id="4" name="Slide Number Placeholder 3"/>
+          <p:cNvSpPr>
+            <a:spLocks xmlns:a="http://schemas.openxmlformats.org/drawingml/2006/main" noGrp="1"/>
+          </p:cNvSpPr>
+          <p:nvPr>
+            <p:ph type="sldNum" idx="5"/>
+          </p:nvPr>
+        </p:nvSpPr>
+        <p:spPr/>
+        <p:txBody>
+          <a:bodyPr xmlns:a="http://schemas.openxmlformats.org/drawingml/2006/main"/>
+          <a:lstStyle xmlns:a="http://schemas.openxmlformats.org/drawingml/2006/main"/>
+          <a:p xmlns:a="http://schemas.openxmlformats.org/drawingml/2006/main"/>
+        </p:txBody>
+      </p:sp>
+    </p:spTree>
+  </p:cSld>
+  <p:clrMapOvr>
+    <a:masterClrMapping xmlns:a="http://schemas.openxmlformats.org/drawingml/2006/main"/>
+  </p:clrMapOvr>
+</p:notes>
+</file>
+
+<file path=ppt/notesSlides/notesSlide12.xml><?xml version="1.0" encoding="utf-8"?>
+<p:notes xmlns:p="http://schemas.openxmlformats.org/presentationml/2006/main">
+  <p:cSld>
+    <p:spTree>
+      <p:nvGrpSpPr>
+        <p:cNvPr id="1" name=""/>
+        <p:cNvGrpSpPr/>
+        <p:nvPr/>
+      </p:nvGrpSpPr>
+      <p:grpSpPr>
+        <a:xfrm xmlns:a="http://schemas.openxmlformats.org/drawingml/2006/main"/>
+      </p:grpSpPr>
+      <p:sp>
+        <p:nvSpPr>
+          <p:cNvPr id="2" name="Slide Image Placeholder 1"/>
+          <p:cNvSpPr>
+            <a:spLocks xmlns:a="http://schemas.openxmlformats.org/drawingml/2006/main" noGrp="1"/>
+          </p:cNvSpPr>
+          <p:nvPr>
+            <p:ph type="sldImg" idx="0"/>
+          </p:nvPr>
+        </p:nvSpPr>
+        <p:spPr/>
+      </p:sp>
+      <p:sp>
+        <p:nvSpPr>
+          <p:cNvPr id="3" name="Notes Placeholder 2"/>
+          <p:cNvSpPr>
+            <a:spLocks xmlns:a="http://schemas.openxmlformats.org/drawingml/2006/main" noGrp="1"/>
+          </p:cNvSpPr>
+          <p:nvPr>
+            <p:ph type="body" idx="1"/>
+          </p:nvPr>
+        </p:nvSpPr>
+        <p:spPr/>
+        <p:txBody>
+          <a:bodyPr xmlns:a="http://schemas.openxmlformats.org/drawingml/2006/main"/>
+          <a:lstStyle xmlns:a="http://schemas.openxmlformats.org/drawingml/2006/main"/>
+          <a:p xmlns:a="http://schemas.openxmlformats.org/drawingml/2006/main">
+            <a:r>
+              <a:t>The asset distributions show why the equal-sector median should not be read as a universal prediction. The median is negative through 41-60, while individual assets span both signs. The 61-100 median approaches zero and its interquartile range crosses well into positive territory.</a:t>
+            </a:r>
+          </a:p>
+          <a:p xmlns:a="http://schemas.openxmlformats.org/drawingml/2006/main">
+            <a:r>
+              <a:t/>
+            </a:r>
+          </a:p>
+          <a:p xmlns:a="http://schemas.openxmlformats.org/drawingml/2006/main">
+            <a:r>
+              <a:t>[Sources]</a:t>
+            </a:r>
+          </a:p>
+          <a:p xmlns:a="http://schemas.openxmlformats.org/drawingml/2006/main">
+            <a:r>
+              <a:t>- Codex thread 01a0226e-2fa2-7222-a6d9-79ab971ac616 (2026-08-27), operator-authorized incremental forward-return decomposition slice.</a:t>
+            </a:r>
+          </a:p>
+          <a:p xmlns:a="http://schemas.openxmlformats.org/drawingml/2006/main">
+            <a:r>
+              <a:t>- runs/research_workbench/operator_hypothesis_lab/return_geometry_incremental_forward_decomposition_20260827/asset_block_metrics.csv</a:t>
+            </a:r>
+          </a:p>
+          <a:p xmlns:a="http://schemas.openxmlformats.org/drawingml/2006/main">
+            <a:r>
+              <a:t>- runs/research_workbench/operator_hypothesis_lab/return_geometry_incremental_forward_decomposition_20260827/equal_sector_block_summary.csv</a:t>
+            </a:r>
+          </a:p>
+          <a:p xmlns:a="http://schemas.openxmlformats.org/drawingml/2006/main">
+            <a:r>
+              <a:t>- runs/research_workbench/operator_hypothesis_lab/return_geometry_incremental_forward_decomposition_20260827/visuals/incremental_asset_distribution.png</a:t>
+            </a:r>
+          </a:p>
+          <a:p xmlns:a="http://schemas.openxmlformats.org/drawingml/2006/main">
+            <a:r>
+              <a:t>[/Sources]</a:t>
+            </a:r>
+          </a:p>
+        </p:txBody>
+      </p:sp>
+      <p:sp>
+        <p:nvSpPr>
+          <p:cNvPr id="4" name="Slide Number Placeholder 3"/>
+          <p:cNvSpPr>
+            <a:spLocks xmlns:a="http://schemas.openxmlformats.org/drawingml/2006/main" noGrp="1"/>
+          </p:cNvSpPr>
+          <p:nvPr>
+            <p:ph type="sldNum" idx="5"/>
+          </p:nvPr>
+        </p:nvSpPr>
+        <p:spPr/>
+        <p:txBody>
+          <a:bodyPr xmlns:a="http://schemas.openxmlformats.org/drawingml/2006/main"/>
+          <a:lstStyle xmlns:a="http://schemas.openxmlformats.org/drawingml/2006/main"/>
+          <a:p xmlns:a="http://schemas.openxmlformats.org/drawingml/2006/main"/>
+        </p:txBody>
+      </p:sp>
+    </p:spTree>
+  </p:cSld>
+  <p:clrMapOvr>
+    <a:masterClrMapping xmlns:a="http://schemas.openxmlformats.org/drawingml/2006/main"/>
+  </p:clrMapOvr>
+</p:notes>
+</file>
+
+<file path=ppt/notesSlides/notesSlide13.xml><?xml version="1.0" encoding="utf-8"?>
+<p:notes xmlns:p="http://schemas.openxmlformats.org/presentationml/2006/main">
+  <p:cSld>
+    <p:spTree>
+      <p:nvGrpSpPr>
+        <p:cNvPr id="1" name=""/>
+        <p:cNvGrpSpPr/>
+        <p:nvPr/>
+      </p:nvGrpSpPr>
+      <p:grpSpPr>
+        <a:xfrm xmlns:a="http://schemas.openxmlformats.org/drawingml/2006/main"/>
+      </p:grpSpPr>
+      <p:sp>
+        <p:nvSpPr>
+          <p:cNvPr id="2" name="Slide Image Placeholder 1"/>
+          <p:cNvSpPr>
+            <a:spLocks xmlns:a="http://schemas.openxmlformats.org/drawingml/2006/main" noGrp="1"/>
+          </p:cNvSpPr>
+          <p:nvPr>
+            <p:ph type="sldImg" idx="0"/>
+          </p:nvPr>
+        </p:nvSpPr>
+        <p:spPr/>
+      </p:sp>
+      <p:sp>
+        <p:nvSpPr>
+          <p:cNvPr id="3" name="Notes Placeholder 2"/>
+          <p:cNvSpPr>
+            <a:spLocks xmlns:a="http://schemas.openxmlformats.org/drawingml/2006/main" noGrp="1"/>
+          </p:cNvSpPr>
+          <p:nvPr>
+            <p:ph type="body" idx="1"/>
+          </p:nvPr>
+        </p:nvSpPr>
+        <p:spPr/>
+        <p:txBody>
+          <a:bodyPr xmlns:a="http://schemas.openxmlformats.org/drawingml/2006/main"/>
+          <a:lstStyle xmlns:a="http://schemas.openxmlformats.org/drawingml/2006/main"/>
+          <a:p xmlns:a="http://schemas.openxmlformats.org/drawingml/2006/main">
+            <a:r>
+              <a:t>Drift-adjusted return is positive from sessions 1 through 60, peaking at 7.07 bp per session in 11-20 and remaining 4.47 bp in 21-40. It falls to 0.72 bp in 41-60 and turns negative at -0.90 bp in 61-100; only 3 of 11 sector medians remain positive in that final block. This is descriptive and not cost-, overlap-, or path-adjusted.</a:t>
+            </a:r>
+          </a:p>
+          <a:p xmlns:a="http://schemas.openxmlformats.org/drawingml/2006/main">
+            <a:r>
+              <a:t/>
+            </a:r>
+          </a:p>
+          <a:p xmlns:a="http://schemas.openxmlformats.org/drawingml/2006/main">
+            <a:r>
+              <a:t>[Sources]</a:t>
+            </a:r>
+          </a:p>
+          <a:p xmlns:a="http://schemas.openxmlformats.org/drawingml/2006/main">
+            <a:r>
+              <a:t>- Codex thread 01a0226e-2fa2-7222-a6d9-79ab971ac616 (2026-08-27), operator-authorized incremental forward-return decomposition slice.</a:t>
+            </a:r>
+          </a:p>
+          <a:p xmlns:a="http://schemas.openxmlformats.org/drawingml/2006/main">
+            <a:r>
+              <a:t>- runs/research_workbench/operator_hypothesis_lab/return_geometry_incremental_forward_decomposition_20260827/equal_sector_block_summary.csv</a:t>
+            </a:r>
+          </a:p>
+          <a:p xmlns:a="http://schemas.openxmlformats.org/drawingml/2006/main">
+            <a:r>
+              <a:t>- runs/research_workbench/operator_hypothesis_lab/return_geometry_incremental_forward_decomposition_20260827/report.md</a:t>
+            </a:r>
+          </a:p>
+          <a:p xmlns:a="http://schemas.openxmlformats.org/drawingml/2006/main">
+            <a:r>
+              <a:t>- runs/research_workbench/operator_hypothesis_lab/return_geometry_incremental_forward_decomposition_20260827/visuals/incremental_excess_bp_per_session.png</a:t>
+            </a:r>
+          </a:p>
+          <a:p xmlns:a="http://schemas.openxmlformats.org/drawingml/2006/main">
+            <a:r>
+              <a:t>[/Sources]</a:t>
+            </a:r>
+          </a:p>
+        </p:txBody>
+      </p:sp>
+      <p:sp>
+        <p:nvSpPr>
+          <p:cNvPr id="4" name="Slide Number Placeholder 3"/>
+          <p:cNvSpPr>
+            <a:spLocks xmlns:a="http://schemas.openxmlformats.org/drawingml/2006/main" noGrp="1"/>
+          </p:cNvSpPr>
+          <p:nvPr>
+            <p:ph type="sldNum" idx="5"/>
+          </p:nvPr>
+        </p:nvSpPr>
+        <p:spPr/>
+        <p:txBody>
+          <a:bodyPr xmlns:a="http://schemas.openxmlformats.org/drawingml/2006/main"/>
+          <a:lstStyle xmlns:a="http://schemas.openxmlformats.org/drawingml/2006/main"/>
+          <a:p xmlns:a="http://schemas.openxmlformats.org/drawingml/2006/main"/>
+        </p:txBody>
+      </p:sp>
+    </p:spTree>
+  </p:cSld>
+  <p:clrMapOvr>
+    <a:masterClrMapping xmlns:a="http://schemas.openxmlformats.org/drawingml/2006/main"/>
+  </p:clrMapOvr>
+</p:notes>
+</file>
+
+<file path=ppt/notesSlides/notesSlide14.xml><?xml version="1.0" encoding="utf-8"?>
+<p:notes xmlns:p="http://schemas.openxmlformats.org/presentationml/2006/main">
+  <p:cSld>
+    <p:spTree>
+      <p:nvGrpSpPr>
+        <p:cNvPr id="1" name=""/>
+        <p:cNvGrpSpPr/>
+        <p:nvPr/>
+      </p:nvGrpSpPr>
+      <p:grpSpPr>
+        <a:xfrm xmlns:a="http://schemas.openxmlformats.org/drawingml/2006/main"/>
+      </p:grpSpPr>
+      <p:sp>
+        <p:nvSpPr>
+          <p:cNvPr id="2" name="Slide Image Placeholder 1"/>
+          <p:cNvSpPr>
+            <a:spLocks xmlns:a="http://schemas.openxmlformats.org/drawingml/2006/main" noGrp="1"/>
+          </p:cNvSpPr>
+          <p:nvPr>
+            <p:ph type="sldImg" idx="0"/>
+          </p:nvPr>
+        </p:nvSpPr>
+        <p:spPr/>
+      </p:sp>
+      <p:sp>
+        <p:nvSpPr>
+          <p:cNvPr id="3" name="Notes Placeholder 2"/>
+          <p:cNvSpPr>
+            <a:spLocks xmlns:a="http://schemas.openxmlformats.org/drawingml/2006/main" noGrp="1"/>
+          </p:cNvSpPr>
+          <p:nvPr>
+            <p:ph type="body" idx="1"/>
+          </p:nvPr>
+        </p:nvSpPr>
+        <p:spPr/>
+        <p:txBody>
+          <a:bodyPr xmlns:a="http://schemas.openxmlformats.org/drawingml/2006/main"/>
+          <a:lstStyle xmlns:a="http://schemas.openxmlformats.org/drawingml/2006/main"/>
+          <a:p xmlns:a="http://schemas.openxmlformats.org/drawingml/2006/main">
+            <a:r>
+              <a:t>The predeclared descriptive rule required at least two of three late blocks to have negative equal-sector correlation, at least 7 of 11 negative sector medians, and positive drift-adjusted return per session. The 21-40 and 41-60 blocks pass; 61-100 fails on drift-adjusted accrual. Preserve LATE_INCREMENTAL_DURATION_RETAINS_DESCRIPTIVE_SUPPORT without converting it into a 60-session holding recommendation.</a:t>
+            </a:r>
+          </a:p>
+          <a:p xmlns:a="http://schemas.openxmlformats.org/drawingml/2006/main">
+            <a:r>
+              <a:t/>
+            </a:r>
+          </a:p>
+          <a:p xmlns:a="http://schemas.openxmlformats.org/drawingml/2006/main">
+            <a:r>
+              <a:t>[Sources]</a:t>
+            </a:r>
+          </a:p>
+          <a:p xmlns:a="http://schemas.openxmlformats.org/drawingml/2006/main">
+            <a:r>
+              <a:t>- Codex thread 01a0226e-2fa2-7222-a6d9-79ab971ac616 (2026-08-27), operator-authorized incremental forward-return decomposition slice.</a:t>
+            </a:r>
+          </a:p>
+          <a:p xmlns:a="http://schemas.openxmlformats.org/drawingml/2006/main">
+            <a:r>
+              <a:t>- runs/research_workbench/operator_hypothesis_lab/return_geometry_incremental_forward_decomposition_20260827/report.md</a:t>
+            </a:r>
+          </a:p>
+          <a:p xmlns:a="http://schemas.openxmlformats.org/drawingml/2006/main">
+            <a:r>
+              <a:t>- runs/research_workbench/operator_hypothesis_lab/return_geometry_incremental_forward_decomposition_20260827/late_block_readout.csv</a:t>
+            </a:r>
+          </a:p>
+          <a:p xmlns:a="http://schemas.openxmlformats.org/drawingml/2006/main">
+            <a:r>
+              <a:t>- runs/research_workbench/operator_hypothesis_lab/return_geometry_incremental_forward_decomposition_20260827/status.csv</a:t>
+            </a:r>
+          </a:p>
+          <a:p xmlns:a="http://schemas.openxmlformats.org/drawingml/2006/main">
+            <a:r>
+              <a:t>[/Sources]</a:t>
+            </a:r>
+          </a:p>
+        </p:txBody>
+      </p:sp>
+      <p:sp>
+        <p:nvSpPr>
+          <p:cNvPr id="4" name="Slide Number Placeholder 3"/>
+          <p:cNvSpPr>
+            <a:spLocks xmlns:a="http://schemas.openxmlformats.org/drawingml/2006/main" noGrp="1"/>
+          </p:cNvSpPr>
+          <p:nvPr>
+            <p:ph type="sldNum" idx="5"/>
+          </p:nvPr>
+        </p:nvSpPr>
+        <p:spPr/>
+        <p:txBody>
+          <a:bodyPr xmlns:a="http://schemas.openxmlformats.org/drawingml/2006/main"/>
+          <a:lstStyle xmlns:a="http://schemas.openxmlformats.org/drawingml/2006/main"/>
+          <a:p xmlns:a="http://schemas.openxmlformats.org/drawingml/2006/main"/>
+        </p:txBody>
+      </p:sp>
+    </p:spTree>
+  </p:cSld>
+  <p:clrMapOvr>
+    <a:masterClrMapping xmlns:a="http://schemas.openxmlformats.org/drawingml/2006/main"/>
+  </p:clrMapOvr>
+</p:notes>
+</file>
+
 <file path=ppt/notesSlides/notesSlide2.xml><?xml version="1.0" encoding="utf-8"?>
 <p:notes xmlns:p="http://schemas.openxmlformats.org/presentationml/2006/main">
   <p:cSld>
@@ -1064,6 +1596,206 @@
           <a:p xmlns:a="http://schemas.openxmlformats.org/drawingml/2006/main">
             <a:r>
               <a:t>- operator_hypothesis_lab/docs/OWN_ASSET_RETURN_GEOMETRY_WORKFLOW_ROADMAP.md</a:t>
+            </a:r>
+          </a:p>
+          <a:p xmlns:a="http://schemas.openxmlformats.org/drawingml/2006/main">
+            <a:r>
+              <a:t>[/Sources]</a:t>
+            </a:r>
+          </a:p>
+        </p:txBody>
+      </p:sp>
+      <p:sp>
+        <p:nvSpPr>
+          <p:cNvPr id="4" name="Slide Number Placeholder 3"/>
+          <p:cNvSpPr>
+            <a:spLocks xmlns:a="http://schemas.openxmlformats.org/drawingml/2006/main" noGrp="1"/>
+          </p:cNvSpPr>
+          <p:nvPr>
+            <p:ph type="sldNum" idx="5"/>
+          </p:nvPr>
+        </p:nvSpPr>
+        <p:spPr/>
+        <p:txBody>
+          <a:bodyPr xmlns:a="http://schemas.openxmlformats.org/drawingml/2006/main"/>
+          <a:lstStyle xmlns:a="http://schemas.openxmlformats.org/drawingml/2006/main"/>
+          <a:p xmlns:a="http://schemas.openxmlformats.org/drawingml/2006/main"/>
+        </p:txBody>
+      </p:sp>
+    </p:spTree>
+  </p:cSld>
+  <p:clrMapOvr>
+    <a:masterClrMapping xmlns:a="http://schemas.openxmlformats.org/drawingml/2006/main"/>
+  </p:clrMapOvr>
+</p:notes>
+</file>
+
+<file path=ppt/notesSlides/notesSlide8.xml><?xml version="1.0" encoding="utf-8"?>
+<p:notes xmlns:p="http://schemas.openxmlformats.org/presentationml/2006/main">
+  <p:cSld>
+    <p:spTree>
+      <p:nvGrpSpPr>
+        <p:cNvPr id="1" name=""/>
+        <p:cNvGrpSpPr/>
+        <p:nvPr/>
+      </p:nvGrpSpPr>
+      <p:grpSpPr>
+        <a:xfrm xmlns:a="http://schemas.openxmlformats.org/drawingml/2006/main"/>
+      </p:grpSpPr>
+      <p:sp>
+        <p:nvSpPr>
+          <p:cNvPr id="2" name="Slide Image Placeholder 1"/>
+          <p:cNvSpPr>
+            <a:spLocks xmlns:a="http://schemas.openxmlformats.org/drawingml/2006/main" noGrp="1"/>
+          </p:cNvSpPr>
+          <p:nvPr>
+            <p:ph type="sldImg" idx="0"/>
+          </p:nvPr>
+        </p:nvSpPr>
+        <p:spPr/>
+      </p:sp>
+      <p:sp>
+        <p:nvSpPr>
+          <p:cNvPr id="3" name="Notes Placeholder 2"/>
+          <p:cNvSpPr>
+            <a:spLocks xmlns:a="http://schemas.openxmlformats.org/drawingml/2006/main" noGrp="1"/>
+          </p:cNvSpPr>
+          <p:nvPr>
+            <p:ph type="body" idx="1"/>
+          </p:nvPr>
+        </p:nvSpPr>
+        <p:spPr/>
+        <p:txBody>
+          <a:bodyPr xmlns:a="http://schemas.openxmlformats.org/drawingml/2006/main"/>
+          <a:lstStyle xmlns:a="http://schemas.openxmlformats.org/drawingml/2006/main"/>
+          <a:p xmlns:a="http://schemas.openxmlformats.org/drawingml/2006/main">
+            <a:r>
+              <a:t>This slide freezes the only outcome subset under the microscope. The primary state is signed ER20 DOWN_TREND at a 20-session negative-prior anchor. The 88-stock GICS core forms the equal-sector headline; other cohorts cannot alter it.</a:t>
+            </a:r>
+          </a:p>
+          <a:p xmlns:a="http://schemas.openxmlformats.org/drawingml/2006/main">
+            <a:r>
+              <a:t/>
+            </a:r>
+          </a:p>
+          <a:p xmlns:a="http://schemas.openxmlformats.org/drawingml/2006/main">
+            <a:r>
+              <a:t>[Sources]</a:t>
+            </a:r>
+          </a:p>
+          <a:p xmlns:a="http://schemas.openxmlformats.org/drawingml/2006/main">
+            <a:r>
+              <a:t>- Codex thread 01a0226e-2fa2-7222-a6d9-79ab971ac616 (2026-08-27), operator-authorized incremental forward-return decomposition slice.</a:t>
+            </a:r>
+          </a:p>
+          <a:p xmlns:a="http://schemas.openxmlformats.org/drawingml/2006/main">
+            <a:r>
+              <a:t>- runs/research_workbench/operator_hypothesis_lab/return_geometry_incremental_forward_decomposition_20260827/run_spec.csv</a:t>
+            </a:r>
+          </a:p>
+          <a:p xmlns:a="http://schemas.openxmlformats.org/drawingml/2006/main">
+            <a:r>
+              <a:t>- operator_hypothesis_lab/docs/RETURN_GEOMETRY_EDGE_PROMOTION_HUDDLE.md</a:t>
+            </a:r>
+          </a:p>
+          <a:p xmlns:a="http://schemas.openxmlformats.org/drawingml/2006/main">
+            <a:r>
+              <a:t>[/Sources]</a:t>
+            </a:r>
+          </a:p>
+        </p:txBody>
+      </p:sp>
+      <p:sp>
+        <p:nvSpPr>
+          <p:cNvPr id="4" name="Slide Number Placeholder 3"/>
+          <p:cNvSpPr>
+            <a:spLocks xmlns:a="http://schemas.openxmlformats.org/drawingml/2006/main" noGrp="1"/>
+          </p:cNvSpPr>
+          <p:nvPr>
+            <p:ph type="sldNum" idx="5"/>
+          </p:nvPr>
+        </p:nvSpPr>
+        <p:spPr/>
+        <p:txBody>
+          <a:bodyPr xmlns:a="http://schemas.openxmlformats.org/drawingml/2006/main"/>
+          <a:lstStyle xmlns:a="http://schemas.openxmlformats.org/drawingml/2006/main"/>
+          <a:p xmlns:a="http://schemas.openxmlformats.org/drawingml/2006/main"/>
+        </p:txBody>
+      </p:sp>
+    </p:spTree>
+  </p:cSld>
+  <p:clrMapOvr>
+    <a:masterClrMapping xmlns:a="http://schemas.openxmlformats.org/drawingml/2006/main"/>
+  </p:clrMapOvr>
+</p:notes>
+</file>
+
+<file path=ppt/notesSlides/notesSlide9.xml><?xml version="1.0" encoding="utf-8"?>
+<p:notes xmlns:p="http://schemas.openxmlformats.org/presentationml/2006/main">
+  <p:cSld>
+    <p:spTree>
+      <p:nvGrpSpPr>
+        <p:cNvPr id="1" name=""/>
+        <p:cNvGrpSpPr/>
+        <p:nvPr/>
+      </p:nvGrpSpPr>
+      <p:grpSpPr>
+        <a:xfrm xmlns:a="http://schemas.openxmlformats.org/drawingml/2006/main"/>
+      </p:grpSpPr>
+      <p:sp>
+        <p:nvSpPr>
+          <p:cNvPr id="2" name="Slide Image Placeholder 1"/>
+          <p:cNvSpPr>
+            <a:spLocks xmlns:a="http://schemas.openxmlformats.org/drawingml/2006/main" noGrp="1"/>
+          </p:cNvSpPr>
+          <p:nvPr>
+            <p:ph type="sldImg" idx="0"/>
+          </p:nvPr>
+        </p:nvSpPr>
+        <p:spPr/>
+      </p:sp>
+      <p:sp>
+        <p:nvSpPr>
+          <p:cNvPr id="3" name="Notes Placeholder 2"/>
+          <p:cNvSpPr>
+            <a:spLocks xmlns:a="http://schemas.openxmlformats.org/drawingml/2006/main" noGrp="1"/>
+          </p:cNvSpPr>
+          <p:nvPr>
+            <p:ph type="body" idx="1"/>
+          </p:nvPr>
+        </p:nvSpPr>
+        <p:spPr/>
+        <p:txBody>
+          <a:bodyPr xmlns:a="http://schemas.openxmlformats.org/drawingml/2006/main"/>
+          <a:lstStyle xmlns:a="http://schemas.openxmlformats.org/drawingml/2006/main"/>
+          <a:p xmlns:a="http://schemas.openxmlformats.org/drawingml/2006/main">
+            <a:r>
+              <a:t>All blocks are evaluated on anchors that have the full subsequent 100 sessions available. The construction audit verifies that the six incremental returns sum to R(1:100) with maximum absolute error below 7e-16 and reproduces shared cumulative cells below 6e-16.</a:t>
+            </a:r>
+          </a:p>
+          <a:p xmlns:a="http://schemas.openxmlformats.org/drawingml/2006/main">
+            <a:r>
+              <a:t/>
+            </a:r>
+          </a:p>
+          <a:p xmlns:a="http://schemas.openxmlformats.org/drawingml/2006/main">
+            <a:r>
+              <a:t>[Sources]</a:t>
+            </a:r>
+          </a:p>
+          <a:p xmlns:a="http://schemas.openxmlformats.org/drawingml/2006/main">
+            <a:r>
+              <a:t>- Codex thread 01a0226e-2fa2-7222-a6d9-79ab971ac616 (2026-08-27), operator-authorized incremental forward-return decomposition slice.</a:t>
+            </a:r>
+          </a:p>
+          <a:p xmlns:a="http://schemas.openxmlformats.org/drawingml/2006/main">
+            <a:r>
+              <a:t>- runs/research_workbench/operator_hypothesis_lab/return_geometry_incremental_forward_decomposition_20260827/run_spec.csv</a:t>
+            </a:r>
+          </a:p>
+          <a:p xmlns:a="http://schemas.openxmlformats.org/drawingml/2006/main">
+            <a:r>
+              <a:t>- runs/research_workbench/operator_hypothesis_lab/return_geometry_incremental_forward_decomposition_20260827/decomposition_checks.csv</a:t>
             </a:r>
           </a:p>
           <a:p xmlns:a="http://schemas.openxmlformats.org/drawingml/2006/main">
@@ -1136,7 +1868,7 @@
   </p:cSld>
   <p:clrMap bg1="lt1" tx1="dk1" bg2="lt2" tx2="dk2" accent1="accent1" accent2="accent2" accent3="accent3" accent4="accent4" accent5="accent5" accent6="accent6" hlink="hlink" folHlink="folHlink"/>
   <p:sldLayoutIdLst>
-    <p:sldLayoutId xmlns:r="http://schemas.openxmlformats.org/officeDocument/2006/relationships" id="2147483649" r:id="Rdfd14e4b1c7d4ef2"/>
+    <p:sldLayoutId xmlns:r="http://schemas.openxmlformats.org/officeDocument/2006/relationships" id="2147483649" r:id="Rc3bd7254ee25416f"/>
   </p:sldLayoutIdLst>
   <p:txStyles>
     <p:titleStyle>
@@ -1980,6 +2712,2464 @@
 </p:sld>
 </file>
 
+<file path=ppt/slides/slide10.xml><?xml version="1.0" encoding="utf-8"?>
+<p:sld xmlns:p="http://schemas.openxmlformats.org/presentationml/2006/main">
+  <p:cSld>
+    <p:bg>
+      <p:bgPr>
+        <a:solidFill xmlns:a="http://schemas.openxmlformats.org/drawingml/2006/main">
+          <a:srgbClr val="FFFFFF"/>
+        </a:solidFill>
+      </p:bgPr>
+    </p:bg>
+    <p:spTree>
+      <p:nvGrpSpPr>
+        <p:cNvPr id="1" name=""/>
+        <p:cNvGrpSpPr/>
+        <p:nvPr/>
+      </p:nvGrpSpPr>
+      <p:grpSpPr>
+        <a:xfrm xmlns:a="http://schemas.openxmlformats.org/drawingml/2006/main"/>
+      </p:grpSpPr>
+      <p:sp>
+        <p:nvSpPr>
+          <p:cNvPr id="24" name="section-11">
+            <a:extLst xmlns:a="http://schemas.openxmlformats.org/drawingml/2006/main">
+              <a:ext uri="{FF2B5EF4-FFF2-40B4-BE49-F238E27FC236}">
+                <a16:creationId xmlns:a16="http://schemas.microsoft.com/office/drawing/2014/main" id="{272ED433-B59C-436C-9DFB-4D317B90A13F}"/>
+              </a:ext>
+            </a:extLst>
+          </p:cNvPr>
+          <p:cNvSpPr>
+            <a:spLocks xmlns:a="http://schemas.openxmlformats.org/drawingml/2006/main" noGrp="1"/>
+          </p:cNvSpPr>
+          <p:nvPr/>
+        </p:nvSpPr>
+        <p:spPr>
+          <a:xfrm xmlns:a="http://schemas.openxmlformats.org/drawingml/2006/main">
+            <a:off x="457200" y="228600"/>
+            <a:ext cx="4191000" cy="228600"/>
+          </a:xfrm>
+          <a:prstGeom xmlns:a="http://schemas.openxmlformats.org/drawingml/2006/main" prst="rect">
+            <a:avLst/>
+          </a:prstGeom>
+          <a:noFill xmlns:a="http://schemas.openxmlformats.org/drawingml/2006/main"/>
+          <a:ln xmlns:a="http://schemas.openxmlformats.org/drawingml/2006/main" w="0">
+            <a:noFill/>
+            <a:prstDash val="solid"/>
+          </a:ln>
+        </p:spPr>
+        <p:txBody>
+          <a:bodyPr xmlns:a="http://schemas.openxmlformats.org/drawingml/2006/main" wrap="square" lIns="0" tIns="0" rIns="0" bIns="0" anchor="t">
+            <a:normAutofit fontScale="100000"/>
+          </a:bodyPr>
+          <a:lstStyle xmlns:a="http://schemas.openxmlformats.org/drawingml/2006/main"/>
+          <a:p xmlns:a="http://schemas.openxmlformats.org/drawingml/2006/main">
+            <a:pPr algn="l">
+              <a:buNone/>
+              <a:defRPr sz="1200" b="1">
+                <a:solidFill>
+                  <a:srgbClr val="667384"/>
+                </a:solidFill>
+                <a:latin typeface="Arial"/>
+                <a:ea typeface="Arial"/>
+                <a:cs typeface="Arial"/>
+              </a:defRPr>
+            </a:pPr>
+            <a:r>
+              <a:rPr sz="1200" b="1">
+                <a:solidFill>
+                  <a:srgbClr val="667384"/>
+                </a:solidFill>
+                <a:latin typeface="Arial"/>
+                <a:ea typeface="Arial"/>
+                <a:cs typeface="Arial"/>
+              </a:rPr>
+              <a:t>TIMING RESULT</a:t>
+            </a:r>
+          </a:p>
+        </p:txBody>
+      </p:sp>
+      <p:sp>
+        <p:nvSpPr>
+          <p:cNvPr id="2" name="title-11">
+            <a:extLst xmlns:a="http://schemas.openxmlformats.org/drawingml/2006/main">
+              <a:ext uri="{FF2B5EF4-FFF2-40B4-BE49-F238E27FC236}">
+                <a16:creationId xmlns:a16="http://schemas.microsoft.com/office/drawing/2014/main" id="{3EC40708-7E00-432C-8ECE-907FA5705292}"/>
+              </a:ext>
+            </a:extLst>
+          </p:cNvPr>
+          <p:cNvSpPr>
+            <a:spLocks xmlns:a="http://schemas.openxmlformats.org/drawingml/2006/main" noGrp="1"/>
+          </p:cNvSpPr>
+          <p:nvPr/>
+        </p:nvSpPr>
+        <p:spPr>
+          <a:xfrm xmlns:a="http://schemas.openxmlformats.org/drawingml/2006/main">
+            <a:off x="457200" y="533400"/>
+            <a:ext cx="11277600" cy="628650"/>
+          </a:xfrm>
+          <a:prstGeom xmlns:a="http://schemas.openxmlformats.org/drawingml/2006/main" prst="rect">
+            <a:avLst/>
+          </a:prstGeom>
+          <a:noFill xmlns:a="http://schemas.openxmlformats.org/drawingml/2006/main"/>
+          <a:ln xmlns:a="http://schemas.openxmlformats.org/drawingml/2006/main" w="0">
+            <a:noFill/>
+            <a:prstDash val="solid"/>
+          </a:ln>
+        </p:spPr>
+        <p:txBody>
+          <a:bodyPr xmlns:a="http://schemas.openxmlformats.org/drawingml/2006/main" wrap="square" lIns="0" tIns="0" rIns="0" bIns="0" anchor="t">
+            <a:normAutofit fontScale="100000"/>
+          </a:bodyPr>
+          <a:lstStyle xmlns:a="http://schemas.openxmlformats.org/drawingml/2006/main"/>
+          <a:p xmlns:a="http://schemas.openxmlformats.org/drawingml/2006/main">
+            <a:pPr algn="l">
+              <a:buNone/>
+              <a:defRPr sz="3525" b="1">
+                <a:solidFill>
+                  <a:srgbClr val="000000"/>
+                </a:solidFill>
+                <a:latin typeface="Arial"/>
+                <a:ea typeface="Arial"/>
+                <a:cs typeface="Arial"/>
+              </a:defRPr>
+            </a:pPr>
+            <a:r>
+              <a:rPr sz="3525" b="1">
+                <a:solidFill>
+                  <a:srgbClr val="000000"/>
+                </a:solidFill>
+                <a:latin typeface="Arial"/>
+                <a:ea typeface="Arial"/>
+                <a:cs typeface="Arial"/>
+              </a:rPr>
+              <a:t>Cumulative strength hides a non-uniform response</a:t>
+            </a:r>
+          </a:p>
+        </p:txBody>
+      </p:sp>
+      <p:sp>
+        <p:nvSpPr>
+          <p:cNvPr id="3" name="">
+            <a:extLst xmlns:a="http://schemas.openxmlformats.org/drawingml/2006/main">
+              <a:ext uri="{FF2B5EF4-FFF2-40B4-BE49-F238E27FC236}">
+                <a16:creationId xmlns:a16="http://schemas.microsoft.com/office/drawing/2014/main" id="{D5CA0FCE-75E8-41EF-A76A-23E9E2120C6A}"/>
+              </a:ext>
+            </a:extLst>
+          </p:cNvPr>
+          <p:cNvSpPr>
+            <a:spLocks xmlns:a="http://schemas.openxmlformats.org/drawingml/2006/main" noGrp="1"/>
+          </p:cNvSpPr>
+          <p:nvPr/>
+        </p:nvSpPr>
+        <p:spPr>
+          <a:xfrm xmlns:a="http://schemas.openxmlformats.org/drawingml/2006/main">
+            <a:off x="457200" y="1200150"/>
+            <a:ext cx="11277600" cy="19050"/>
+          </a:xfrm>
+          <a:prstGeom xmlns:a="http://schemas.openxmlformats.org/drawingml/2006/main" prst="rect">
+            <a:avLst/>
+          </a:prstGeom>
+          <a:solidFill xmlns:a="http://schemas.openxmlformats.org/drawingml/2006/main">
+            <a:srgbClr val="B8BCC4"/>
+          </a:solidFill>
+          <a:ln xmlns:a="http://schemas.openxmlformats.org/drawingml/2006/main" w="0">
+            <a:solidFill>
+              <a:srgbClr val="B8BCC4"/>
+            </a:solidFill>
+            <a:prstDash val="solid"/>
+          </a:ln>
+        </p:spPr>
+      </p:sp>
+      <p:sp>
+        <p:nvSpPr>
+          <p:cNvPr id="4" name="footer-left-11">
+            <a:extLst xmlns:a="http://schemas.openxmlformats.org/drawingml/2006/main">
+              <a:ext uri="{FF2B5EF4-FFF2-40B4-BE49-F238E27FC236}">
+                <a16:creationId xmlns:a16="http://schemas.microsoft.com/office/drawing/2014/main" id="{700DA765-80E0-4197-8700-00D867B86FA2}"/>
+              </a:ext>
+            </a:extLst>
+          </p:cNvPr>
+          <p:cNvSpPr>
+            <a:spLocks xmlns:a="http://schemas.openxmlformats.org/drawingml/2006/main" noGrp="1"/>
+          </p:cNvSpPr>
+          <p:nvPr/>
+        </p:nvSpPr>
+        <p:spPr>
+          <a:xfrm xmlns:a="http://schemas.openxmlformats.org/drawingml/2006/main">
+            <a:off x="457200" y="6515100"/>
+            <a:ext cx="3429000" cy="171450"/>
+          </a:xfrm>
+          <a:prstGeom xmlns:a="http://schemas.openxmlformats.org/drawingml/2006/main" prst="rect">
+            <a:avLst/>
+          </a:prstGeom>
+          <a:noFill xmlns:a="http://schemas.openxmlformats.org/drawingml/2006/main"/>
+          <a:ln xmlns:a="http://schemas.openxmlformats.org/drawingml/2006/main" w="0">
+            <a:noFill/>
+            <a:prstDash val="solid"/>
+          </a:ln>
+        </p:spPr>
+        <p:txBody>
+          <a:bodyPr xmlns:a="http://schemas.openxmlformats.org/drawingml/2006/main" wrap="square" lIns="0" tIns="0" rIns="0" bIns="0" anchor="t">
+            <a:normAutofit fontScale="100000"/>
+          </a:bodyPr>
+          <a:lstStyle xmlns:a="http://schemas.openxmlformats.org/drawingml/2006/main"/>
+          <a:p xmlns:a="http://schemas.openxmlformats.org/drawingml/2006/main">
+            <a:pPr algn="l">
+              <a:buNone/>
+              <a:defRPr sz="825" b="0">
+                <a:solidFill>
+                  <a:srgbClr val="64748B"/>
+                </a:solidFill>
+                <a:latin typeface="Arial"/>
+                <a:ea typeface="Arial"/>
+                <a:cs typeface="Arial"/>
+              </a:defRPr>
+            </a:pPr>
+            <a:r>
+              <a:rPr sz="825" b="0">
+                <a:solidFill>
+                  <a:srgbClr val="64748B"/>
+                </a:solidFill>
+                <a:latin typeface="Arial"/>
+                <a:ea typeface="Arial"/>
+                <a:cs typeface="Arial"/>
+              </a:rPr>
+              <a:t>Return geometry | equal-sector timing</a:t>
+            </a:r>
+          </a:p>
+        </p:txBody>
+      </p:sp>
+      <p:sp>
+        <p:nvSpPr>
+          <p:cNvPr id="5" name="footer-number-11">
+            <a:extLst xmlns:a="http://schemas.openxmlformats.org/drawingml/2006/main">
+              <a:ext uri="{FF2B5EF4-FFF2-40B4-BE49-F238E27FC236}">
+                <a16:creationId xmlns:a16="http://schemas.microsoft.com/office/drawing/2014/main" id="{83896276-4112-4532-AF7C-776C67C58B77}"/>
+              </a:ext>
+            </a:extLst>
+          </p:cNvPr>
+          <p:cNvSpPr>
+            <a:spLocks xmlns:a="http://schemas.openxmlformats.org/drawingml/2006/main" noGrp="1"/>
+          </p:cNvSpPr>
+          <p:nvPr/>
+        </p:nvSpPr>
+        <p:spPr>
+          <a:xfrm xmlns:a="http://schemas.openxmlformats.org/drawingml/2006/main">
+            <a:off x="10477500" y="6496050"/>
+            <a:ext cx="1257300" cy="190500"/>
+          </a:xfrm>
+          <a:prstGeom xmlns:a="http://schemas.openxmlformats.org/drawingml/2006/main" prst="rect">
+            <a:avLst/>
+          </a:prstGeom>
+          <a:noFill xmlns:a="http://schemas.openxmlformats.org/drawingml/2006/main"/>
+          <a:ln xmlns:a="http://schemas.openxmlformats.org/drawingml/2006/main" w="0">
+            <a:noFill/>
+            <a:prstDash val="solid"/>
+          </a:ln>
+        </p:spPr>
+        <p:txBody>
+          <a:bodyPr xmlns:a="http://schemas.openxmlformats.org/drawingml/2006/main" wrap="square" lIns="0" tIns="0" rIns="0" bIns="0" anchor="t">
+            <a:normAutofit fontScale="100000"/>
+          </a:bodyPr>
+          <a:lstStyle xmlns:a="http://schemas.openxmlformats.org/drawingml/2006/main"/>
+          <a:p xmlns:a="http://schemas.openxmlformats.org/drawingml/2006/main">
+            <a:pPr algn="r">
+              <a:buNone/>
+              <a:defRPr sz="1050" b="0">
+                <a:solidFill>
+                  <a:srgbClr val="667384"/>
+                </a:solidFill>
+                <a:latin typeface="Arial"/>
+                <a:ea typeface="Arial"/>
+                <a:cs typeface="Arial"/>
+              </a:defRPr>
+            </a:pPr>
+            <a:r>
+              <a:rPr sz="1050" b="0">
+                <a:solidFill>
+                  <a:srgbClr val="667384"/>
+                </a:solidFill>
+                <a:latin typeface="Arial"/>
+                <a:ea typeface="Arial"/>
+                <a:cs typeface="Arial"/>
+              </a:rPr>
+              <a:t>10</a:t>
+            </a:r>
+          </a:p>
+        </p:txBody>
+      </p:sp>
+      <p:pic>
+        <p:nvPicPr>
+          <p:cNvPr id="31" name=""/>
+          <p:cNvPicPr>
+            <a:picLocks xmlns:a="http://schemas.openxmlformats.org/drawingml/2006/main" noChangeAspect="1"/>
+          </p:cNvPicPr>
+          <p:nvPr/>
+        </p:nvPicPr>
+        <p:blipFill>
+          <a:blip xmlns:r="http://schemas.openxmlformats.org/officeDocument/2006/relationships" xmlns:a="http://schemas.openxmlformats.org/drawingml/2006/main" r:embed="R3c6a4bbcc8a9404e"/>
+          <a:stretch xmlns:a="http://schemas.openxmlformats.org/drawingml/2006/main"/>
+        </p:blipFill>
+        <p:spPr>
+          <a:xfrm xmlns:a="http://schemas.openxmlformats.org/drawingml/2006/main">
+            <a:off x="1771650" y="1335087"/>
+            <a:ext cx="8648700" cy="5045075"/>
+          </a:xfrm>
+          <a:prstGeom xmlns:a="http://schemas.openxmlformats.org/drawingml/2006/main" prst="rect">
+            <a:avLst/>
+          </a:prstGeom>
+        </p:spPr>
+      </p:pic>
+    </p:spTree>
+    <p:extLst>
+      <p:ext uri="{BB962C8B-B14F-4D97-AF65-F5344CB8AC3E}">
+        <p14:creationId xmlns:p14="http://schemas.microsoft.com/office/powerpoint/2010/main" val="666536286"/>
+      </p:ext>
+    </p:extLst>
+  </p:cSld>
+</p:sld>
+</file>
+
+<file path=ppt/slides/slide11.xml><?xml version="1.0" encoding="utf-8"?>
+<p:sld xmlns:p="http://schemas.openxmlformats.org/presentationml/2006/main">
+  <p:cSld>
+    <p:bg>
+      <p:bgPr>
+        <a:solidFill xmlns:a="http://schemas.openxmlformats.org/drawingml/2006/main">
+          <a:srgbClr val="FFFFFF"/>
+        </a:solidFill>
+      </p:bgPr>
+    </p:bg>
+    <p:spTree>
+      <p:nvGrpSpPr>
+        <p:cNvPr id="1" name=""/>
+        <p:cNvGrpSpPr/>
+        <p:nvPr/>
+      </p:nvGrpSpPr>
+      <p:grpSpPr>
+        <a:xfrm xmlns:a="http://schemas.openxmlformats.org/drawingml/2006/main"/>
+      </p:grpSpPr>
+      <p:sp>
+        <p:nvSpPr>
+          <p:cNvPr id="24" name="section-11">
+            <a:extLst xmlns:a="http://schemas.openxmlformats.org/drawingml/2006/main">
+              <a:ext uri="{FF2B5EF4-FFF2-40B4-BE49-F238E27FC236}">
+                <a16:creationId xmlns:a16="http://schemas.microsoft.com/office/drawing/2014/main" id="{272ED433-B59C-436C-9DFB-4D317B90A13F}"/>
+              </a:ext>
+            </a:extLst>
+          </p:cNvPr>
+          <p:cNvSpPr>
+            <a:spLocks xmlns:a="http://schemas.openxmlformats.org/drawingml/2006/main" noGrp="1"/>
+          </p:cNvSpPr>
+          <p:nvPr/>
+        </p:nvSpPr>
+        <p:spPr>
+          <a:xfrm xmlns:a="http://schemas.openxmlformats.org/drawingml/2006/main">
+            <a:off x="457200" y="228600"/>
+            <a:ext cx="4191000" cy="228600"/>
+          </a:xfrm>
+          <a:prstGeom xmlns:a="http://schemas.openxmlformats.org/drawingml/2006/main" prst="rect">
+            <a:avLst/>
+          </a:prstGeom>
+          <a:noFill xmlns:a="http://schemas.openxmlformats.org/drawingml/2006/main"/>
+          <a:ln xmlns:a="http://schemas.openxmlformats.org/drawingml/2006/main" w="0">
+            <a:noFill/>
+            <a:prstDash val="solid"/>
+          </a:ln>
+        </p:spPr>
+        <p:txBody>
+          <a:bodyPr xmlns:a="http://schemas.openxmlformats.org/drawingml/2006/main" wrap="square" lIns="0" tIns="0" rIns="0" bIns="0" anchor="t">
+            <a:normAutofit fontScale="100000"/>
+          </a:bodyPr>
+          <a:lstStyle xmlns:a="http://schemas.openxmlformats.org/drawingml/2006/main"/>
+          <a:p xmlns:a="http://schemas.openxmlformats.org/drawingml/2006/main">
+            <a:pPr algn="l">
+              <a:buNone/>
+              <a:defRPr sz="1200" b="1">
+                <a:solidFill>
+                  <a:srgbClr val="667384"/>
+                </a:solidFill>
+                <a:latin typeface="Arial"/>
+                <a:ea typeface="Arial"/>
+                <a:cs typeface="Arial"/>
+              </a:defRPr>
+            </a:pPr>
+            <a:r>
+              <a:rPr sz="1200" b="1">
+                <a:solidFill>
+                  <a:srgbClr val="667384"/>
+                </a:solidFill>
+                <a:latin typeface="Arial"/>
+                <a:ea typeface="Arial"/>
+                <a:cs typeface="Arial"/>
+              </a:rPr>
+              <a:t>SECTOR BREADTH</a:t>
+            </a:r>
+          </a:p>
+        </p:txBody>
+      </p:sp>
+      <p:sp>
+        <p:nvSpPr>
+          <p:cNvPr id="2" name="title-11">
+            <a:extLst xmlns:a="http://schemas.openxmlformats.org/drawingml/2006/main">
+              <a:ext uri="{FF2B5EF4-FFF2-40B4-BE49-F238E27FC236}">
+                <a16:creationId xmlns:a16="http://schemas.microsoft.com/office/drawing/2014/main" id="{3EC40708-7E00-432C-8ECE-907FA5705292}"/>
+              </a:ext>
+            </a:extLst>
+          </p:cNvPr>
+          <p:cNvSpPr>
+            <a:spLocks xmlns:a="http://schemas.openxmlformats.org/drawingml/2006/main" noGrp="1"/>
+          </p:cNvSpPr>
+          <p:nvPr/>
+        </p:nvSpPr>
+        <p:spPr>
+          <a:xfrm xmlns:a="http://schemas.openxmlformats.org/drawingml/2006/main">
+            <a:off x="457200" y="533400"/>
+            <a:ext cx="11277600" cy="628650"/>
+          </a:xfrm>
+          <a:prstGeom xmlns:a="http://schemas.openxmlformats.org/drawingml/2006/main" prst="rect">
+            <a:avLst/>
+          </a:prstGeom>
+          <a:noFill xmlns:a="http://schemas.openxmlformats.org/drawingml/2006/main"/>
+          <a:ln xmlns:a="http://schemas.openxmlformats.org/drawingml/2006/main" w="0">
+            <a:noFill/>
+            <a:prstDash val="solid"/>
+          </a:ln>
+        </p:spPr>
+        <p:txBody>
+          <a:bodyPr xmlns:a="http://schemas.openxmlformats.org/drawingml/2006/main" wrap="square" lIns="0" tIns="0" rIns="0" bIns="0" anchor="t">
+            <a:normAutofit fontScale="99556"/>
+          </a:bodyPr>
+          <a:lstStyle xmlns:a="http://schemas.openxmlformats.org/drawingml/2006/main"/>
+          <a:p xmlns:a="http://schemas.openxmlformats.org/drawingml/2006/main">
+            <a:pPr algn="l">
+              <a:buNone/>
+              <a:defRPr sz="3525" b="1">
+                <a:solidFill>
+                  <a:srgbClr val="000000"/>
+                </a:solidFill>
+                <a:latin typeface="Arial"/>
+                <a:ea typeface="Arial"/>
+                <a:cs typeface="Arial"/>
+              </a:defRPr>
+            </a:pPr>
+            <a:r>
+              <a:rPr sz="3525" b="1">
+                <a:solidFill>
+                  <a:srgbClr val="000000"/>
+                </a:solidFill>
+                <a:latin typeface="Arial"/>
+                <a:ea typeface="Arial"/>
+                <a:cs typeface="Arial"/>
+              </a:rPr>
+              <a:t>The response remains broad through sessions 41–60</a:t>
+            </a:r>
+          </a:p>
+        </p:txBody>
+      </p:sp>
+      <p:sp>
+        <p:nvSpPr>
+          <p:cNvPr id="3" name="">
+            <a:extLst xmlns:a="http://schemas.openxmlformats.org/drawingml/2006/main">
+              <a:ext uri="{FF2B5EF4-FFF2-40B4-BE49-F238E27FC236}">
+                <a16:creationId xmlns:a16="http://schemas.microsoft.com/office/drawing/2014/main" id="{D5CA0FCE-75E8-41EF-A76A-23E9E2120C6A}"/>
+              </a:ext>
+            </a:extLst>
+          </p:cNvPr>
+          <p:cNvSpPr>
+            <a:spLocks xmlns:a="http://schemas.openxmlformats.org/drawingml/2006/main" noGrp="1"/>
+          </p:cNvSpPr>
+          <p:nvPr/>
+        </p:nvSpPr>
+        <p:spPr>
+          <a:xfrm xmlns:a="http://schemas.openxmlformats.org/drawingml/2006/main">
+            <a:off x="457200" y="1200150"/>
+            <a:ext cx="11277600" cy="19050"/>
+          </a:xfrm>
+          <a:prstGeom xmlns:a="http://schemas.openxmlformats.org/drawingml/2006/main" prst="rect">
+            <a:avLst/>
+          </a:prstGeom>
+          <a:solidFill xmlns:a="http://schemas.openxmlformats.org/drawingml/2006/main">
+            <a:srgbClr val="B8BCC4"/>
+          </a:solidFill>
+          <a:ln xmlns:a="http://schemas.openxmlformats.org/drawingml/2006/main" w="0">
+            <a:solidFill>
+              <a:srgbClr val="B8BCC4"/>
+            </a:solidFill>
+            <a:prstDash val="solid"/>
+          </a:ln>
+        </p:spPr>
+      </p:sp>
+      <p:sp>
+        <p:nvSpPr>
+          <p:cNvPr id="4" name="footer-left-11">
+            <a:extLst xmlns:a="http://schemas.openxmlformats.org/drawingml/2006/main">
+              <a:ext uri="{FF2B5EF4-FFF2-40B4-BE49-F238E27FC236}">
+                <a16:creationId xmlns:a16="http://schemas.microsoft.com/office/drawing/2014/main" id="{700DA765-80E0-4197-8700-00D867B86FA2}"/>
+              </a:ext>
+            </a:extLst>
+          </p:cNvPr>
+          <p:cNvSpPr>
+            <a:spLocks xmlns:a="http://schemas.openxmlformats.org/drawingml/2006/main" noGrp="1"/>
+          </p:cNvSpPr>
+          <p:nvPr/>
+        </p:nvSpPr>
+        <p:spPr>
+          <a:xfrm xmlns:a="http://schemas.openxmlformats.org/drawingml/2006/main">
+            <a:off x="457200" y="6515100"/>
+            <a:ext cx="3429000" cy="171450"/>
+          </a:xfrm>
+          <a:prstGeom xmlns:a="http://schemas.openxmlformats.org/drawingml/2006/main" prst="rect">
+            <a:avLst/>
+          </a:prstGeom>
+          <a:noFill xmlns:a="http://schemas.openxmlformats.org/drawingml/2006/main"/>
+          <a:ln xmlns:a="http://schemas.openxmlformats.org/drawingml/2006/main" w="0">
+            <a:noFill/>
+            <a:prstDash val="solid"/>
+          </a:ln>
+        </p:spPr>
+        <p:txBody>
+          <a:bodyPr xmlns:a="http://schemas.openxmlformats.org/drawingml/2006/main" wrap="square" lIns="0" tIns="0" rIns="0" bIns="0" anchor="t">
+            <a:normAutofit fontScale="100000"/>
+          </a:bodyPr>
+          <a:lstStyle xmlns:a="http://schemas.openxmlformats.org/drawingml/2006/main"/>
+          <a:p xmlns:a="http://schemas.openxmlformats.org/drawingml/2006/main">
+            <a:pPr algn="l">
+              <a:buNone/>
+              <a:defRPr sz="825" b="0">
+                <a:solidFill>
+                  <a:srgbClr val="64748B"/>
+                </a:solidFill>
+                <a:latin typeface="Arial"/>
+                <a:ea typeface="Arial"/>
+                <a:cs typeface="Arial"/>
+              </a:defRPr>
+            </a:pPr>
+            <a:r>
+              <a:rPr sz="825" b="0">
+                <a:solidFill>
+                  <a:srgbClr val="64748B"/>
+                </a:solidFill>
+                <a:latin typeface="Arial"/>
+                <a:ea typeface="Arial"/>
+                <a:cs typeface="Arial"/>
+              </a:rPr>
+              <a:t>Return geometry | sector timing map</a:t>
+            </a:r>
+          </a:p>
+        </p:txBody>
+      </p:sp>
+      <p:sp>
+        <p:nvSpPr>
+          <p:cNvPr id="5" name="footer-number-11">
+            <a:extLst xmlns:a="http://schemas.openxmlformats.org/drawingml/2006/main">
+              <a:ext uri="{FF2B5EF4-FFF2-40B4-BE49-F238E27FC236}">
+                <a16:creationId xmlns:a16="http://schemas.microsoft.com/office/drawing/2014/main" id="{83896276-4112-4532-AF7C-776C67C58B77}"/>
+              </a:ext>
+            </a:extLst>
+          </p:cNvPr>
+          <p:cNvSpPr>
+            <a:spLocks xmlns:a="http://schemas.openxmlformats.org/drawingml/2006/main" noGrp="1"/>
+          </p:cNvSpPr>
+          <p:nvPr/>
+        </p:nvSpPr>
+        <p:spPr>
+          <a:xfrm xmlns:a="http://schemas.openxmlformats.org/drawingml/2006/main">
+            <a:off x="10477500" y="6496050"/>
+            <a:ext cx="1257300" cy="190500"/>
+          </a:xfrm>
+          <a:prstGeom xmlns:a="http://schemas.openxmlformats.org/drawingml/2006/main" prst="rect">
+            <a:avLst/>
+          </a:prstGeom>
+          <a:noFill xmlns:a="http://schemas.openxmlformats.org/drawingml/2006/main"/>
+          <a:ln xmlns:a="http://schemas.openxmlformats.org/drawingml/2006/main" w="0">
+            <a:noFill/>
+            <a:prstDash val="solid"/>
+          </a:ln>
+        </p:spPr>
+        <p:txBody>
+          <a:bodyPr xmlns:a="http://schemas.openxmlformats.org/drawingml/2006/main" wrap="square" lIns="0" tIns="0" rIns="0" bIns="0" anchor="t">
+            <a:normAutofit fontScale="100000"/>
+          </a:bodyPr>
+          <a:lstStyle xmlns:a="http://schemas.openxmlformats.org/drawingml/2006/main"/>
+          <a:p xmlns:a="http://schemas.openxmlformats.org/drawingml/2006/main">
+            <a:pPr algn="r">
+              <a:buNone/>
+              <a:defRPr sz="1050" b="0">
+                <a:solidFill>
+                  <a:srgbClr val="667384"/>
+                </a:solidFill>
+                <a:latin typeface="Arial"/>
+                <a:ea typeface="Arial"/>
+                <a:cs typeface="Arial"/>
+              </a:defRPr>
+            </a:pPr>
+            <a:r>
+              <a:rPr sz="1050" b="0">
+                <a:solidFill>
+                  <a:srgbClr val="667384"/>
+                </a:solidFill>
+                <a:latin typeface="Arial"/>
+                <a:ea typeface="Arial"/>
+                <a:cs typeface="Arial"/>
+              </a:rPr>
+              <a:t>11</a:t>
+            </a:r>
+          </a:p>
+        </p:txBody>
+      </p:sp>
+      <p:pic>
+        <p:nvPicPr>
+          <p:cNvPr id="31" name=""/>
+          <p:cNvPicPr>
+            <a:picLocks xmlns:a="http://schemas.openxmlformats.org/drawingml/2006/main" noChangeAspect="1"/>
+          </p:cNvPicPr>
+          <p:nvPr/>
+        </p:nvPicPr>
+        <p:blipFill>
+          <a:blip xmlns:r="http://schemas.openxmlformats.org/officeDocument/2006/relationships" xmlns:a="http://schemas.openxmlformats.org/drawingml/2006/main" r:embed="Rc6c075b1341f4bb5"/>
+          <a:stretch xmlns:a="http://schemas.openxmlformats.org/drawingml/2006/main"/>
+        </p:blipFill>
+        <p:spPr>
+          <a:xfrm xmlns:a="http://schemas.openxmlformats.org/drawingml/2006/main">
+            <a:off x="2309813" y="1333500"/>
+            <a:ext cx="7572375" cy="5048250"/>
+          </a:xfrm>
+          <a:prstGeom xmlns:a="http://schemas.openxmlformats.org/drawingml/2006/main" prst="rect">
+            <a:avLst/>
+          </a:prstGeom>
+        </p:spPr>
+      </p:pic>
+    </p:spTree>
+    <p:extLst>
+      <p:ext uri="{BB962C8B-B14F-4D97-AF65-F5344CB8AC3E}">
+        <p14:creationId xmlns:p14="http://schemas.microsoft.com/office/powerpoint/2010/main" val="666536286"/>
+      </p:ext>
+    </p:extLst>
+  </p:cSld>
+</p:sld>
+</file>
+
+<file path=ppt/slides/slide12.xml><?xml version="1.0" encoding="utf-8"?>
+<p:sld xmlns:p="http://schemas.openxmlformats.org/presentationml/2006/main">
+  <p:cSld>
+    <p:bg>
+      <p:bgPr>
+        <a:solidFill xmlns:a="http://schemas.openxmlformats.org/drawingml/2006/main">
+          <a:srgbClr val="FFFFFF"/>
+        </a:solidFill>
+      </p:bgPr>
+    </p:bg>
+    <p:spTree>
+      <p:nvGrpSpPr>
+        <p:cNvPr id="1" name=""/>
+        <p:cNvGrpSpPr/>
+        <p:nvPr/>
+      </p:nvGrpSpPr>
+      <p:grpSpPr>
+        <a:xfrm xmlns:a="http://schemas.openxmlformats.org/drawingml/2006/main"/>
+      </p:grpSpPr>
+      <p:sp>
+        <p:nvSpPr>
+          <p:cNvPr id="24" name="section-11">
+            <a:extLst xmlns:a="http://schemas.openxmlformats.org/drawingml/2006/main">
+              <a:ext uri="{FF2B5EF4-FFF2-40B4-BE49-F238E27FC236}">
+                <a16:creationId xmlns:a16="http://schemas.microsoft.com/office/drawing/2014/main" id="{272ED433-B59C-436C-9DFB-4D317B90A13F}"/>
+              </a:ext>
+            </a:extLst>
+          </p:cNvPr>
+          <p:cNvSpPr>
+            <a:spLocks xmlns:a="http://schemas.openxmlformats.org/drawingml/2006/main" noGrp="1"/>
+          </p:cNvSpPr>
+          <p:nvPr/>
+        </p:nvSpPr>
+        <p:spPr>
+          <a:xfrm xmlns:a="http://schemas.openxmlformats.org/drawingml/2006/main">
+            <a:off x="457200" y="228600"/>
+            <a:ext cx="4191000" cy="228600"/>
+          </a:xfrm>
+          <a:prstGeom xmlns:a="http://schemas.openxmlformats.org/drawingml/2006/main" prst="rect">
+            <a:avLst/>
+          </a:prstGeom>
+          <a:noFill xmlns:a="http://schemas.openxmlformats.org/drawingml/2006/main"/>
+          <a:ln xmlns:a="http://schemas.openxmlformats.org/drawingml/2006/main" w="0">
+            <a:noFill/>
+            <a:prstDash val="solid"/>
+          </a:ln>
+        </p:spPr>
+        <p:txBody>
+          <a:bodyPr xmlns:a="http://schemas.openxmlformats.org/drawingml/2006/main" wrap="square" lIns="0" tIns="0" rIns="0" bIns="0" anchor="t">
+            <a:normAutofit fontScale="100000"/>
+          </a:bodyPr>
+          <a:lstStyle xmlns:a="http://schemas.openxmlformats.org/drawingml/2006/main"/>
+          <a:p xmlns:a="http://schemas.openxmlformats.org/drawingml/2006/main">
+            <a:pPr algn="l">
+              <a:buNone/>
+              <a:defRPr sz="1200" b="1">
+                <a:solidFill>
+                  <a:srgbClr val="667384"/>
+                </a:solidFill>
+                <a:latin typeface="Arial"/>
+                <a:ea typeface="Arial"/>
+                <a:cs typeface="Arial"/>
+              </a:defRPr>
+            </a:pPr>
+            <a:r>
+              <a:rPr sz="1200" b="1">
+                <a:solidFill>
+                  <a:srgbClr val="667384"/>
+                </a:solidFill>
+                <a:latin typeface="Arial"/>
+                <a:ea typeface="Arial"/>
+                <a:cs typeface="Arial"/>
+              </a:rPr>
+              <a:t>CROSS-ASSET SHAPE</a:t>
+            </a:r>
+          </a:p>
+        </p:txBody>
+      </p:sp>
+      <p:sp>
+        <p:nvSpPr>
+          <p:cNvPr id="2" name="title-11">
+            <a:extLst xmlns:a="http://schemas.openxmlformats.org/drawingml/2006/main">
+              <a:ext uri="{FF2B5EF4-FFF2-40B4-BE49-F238E27FC236}">
+                <a16:creationId xmlns:a16="http://schemas.microsoft.com/office/drawing/2014/main" id="{3EC40708-7E00-432C-8ECE-907FA5705292}"/>
+              </a:ext>
+            </a:extLst>
+          </p:cNvPr>
+          <p:cNvSpPr>
+            <a:spLocks xmlns:a="http://schemas.openxmlformats.org/drawingml/2006/main" noGrp="1"/>
+          </p:cNvSpPr>
+          <p:nvPr/>
+        </p:nvSpPr>
+        <p:spPr>
+          <a:xfrm xmlns:a="http://schemas.openxmlformats.org/drawingml/2006/main">
+            <a:off x="457200" y="533400"/>
+            <a:ext cx="11277600" cy="628650"/>
+          </a:xfrm>
+          <a:prstGeom xmlns:a="http://schemas.openxmlformats.org/drawingml/2006/main" prst="rect">
+            <a:avLst/>
+          </a:prstGeom>
+          <a:noFill xmlns:a="http://schemas.openxmlformats.org/drawingml/2006/main"/>
+          <a:ln xmlns:a="http://schemas.openxmlformats.org/drawingml/2006/main" w="0">
+            <a:noFill/>
+            <a:prstDash val="solid"/>
+          </a:ln>
+        </p:spPr>
+        <p:txBody>
+          <a:bodyPr xmlns:a="http://schemas.openxmlformats.org/drawingml/2006/main" wrap="square" lIns="0" tIns="0" rIns="0" bIns="0" anchor="t">
+            <a:normAutofit fontScale="100000"/>
+          </a:bodyPr>
+          <a:lstStyle xmlns:a="http://schemas.openxmlformats.org/drawingml/2006/main"/>
+          <a:p xmlns:a="http://schemas.openxmlformats.org/drawingml/2006/main">
+            <a:pPr algn="l">
+              <a:buNone/>
+              <a:defRPr sz="3525" b="1">
+                <a:solidFill>
+                  <a:srgbClr val="000000"/>
+                </a:solidFill>
+                <a:latin typeface="Arial"/>
+                <a:ea typeface="Arial"/>
+                <a:cs typeface="Arial"/>
+              </a:defRPr>
+            </a:pPr>
+            <a:r>
+              <a:rPr sz="3525" b="1">
+                <a:solidFill>
+                  <a:srgbClr val="000000"/>
+                </a:solidFill>
+                <a:latin typeface="Arial"/>
+                <a:ea typeface="Arial"/>
+                <a:cs typeface="Arial"/>
+              </a:rPr>
+              <a:t>Late support is broad—but visibly heterogeneous</a:t>
+            </a:r>
+          </a:p>
+        </p:txBody>
+      </p:sp>
+      <p:sp>
+        <p:nvSpPr>
+          <p:cNvPr id="3" name="">
+            <a:extLst xmlns:a="http://schemas.openxmlformats.org/drawingml/2006/main">
+              <a:ext uri="{FF2B5EF4-FFF2-40B4-BE49-F238E27FC236}">
+                <a16:creationId xmlns:a16="http://schemas.microsoft.com/office/drawing/2014/main" id="{D5CA0FCE-75E8-41EF-A76A-23E9E2120C6A}"/>
+              </a:ext>
+            </a:extLst>
+          </p:cNvPr>
+          <p:cNvSpPr>
+            <a:spLocks xmlns:a="http://schemas.openxmlformats.org/drawingml/2006/main" noGrp="1"/>
+          </p:cNvSpPr>
+          <p:nvPr/>
+        </p:nvSpPr>
+        <p:spPr>
+          <a:xfrm xmlns:a="http://schemas.openxmlformats.org/drawingml/2006/main">
+            <a:off x="457200" y="1200150"/>
+            <a:ext cx="11277600" cy="19050"/>
+          </a:xfrm>
+          <a:prstGeom xmlns:a="http://schemas.openxmlformats.org/drawingml/2006/main" prst="rect">
+            <a:avLst/>
+          </a:prstGeom>
+          <a:solidFill xmlns:a="http://schemas.openxmlformats.org/drawingml/2006/main">
+            <a:srgbClr val="B8BCC4"/>
+          </a:solidFill>
+          <a:ln xmlns:a="http://schemas.openxmlformats.org/drawingml/2006/main" w="0">
+            <a:solidFill>
+              <a:srgbClr val="B8BCC4"/>
+            </a:solidFill>
+            <a:prstDash val="solid"/>
+          </a:ln>
+        </p:spPr>
+      </p:sp>
+      <p:sp>
+        <p:nvSpPr>
+          <p:cNvPr id="4" name="footer-left-11">
+            <a:extLst xmlns:a="http://schemas.openxmlformats.org/drawingml/2006/main">
+              <a:ext uri="{FF2B5EF4-FFF2-40B4-BE49-F238E27FC236}">
+                <a16:creationId xmlns:a16="http://schemas.microsoft.com/office/drawing/2014/main" id="{700DA765-80E0-4197-8700-00D867B86FA2}"/>
+              </a:ext>
+            </a:extLst>
+          </p:cNvPr>
+          <p:cNvSpPr>
+            <a:spLocks xmlns:a="http://schemas.openxmlformats.org/drawingml/2006/main" noGrp="1"/>
+          </p:cNvSpPr>
+          <p:nvPr/>
+        </p:nvSpPr>
+        <p:spPr>
+          <a:xfrm xmlns:a="http://schemas.openxmlformats.org/drawingml/2006/main">
+            <a:off x="457200" y="6515100"/>
+            <a:ext cx="3429000" cy="171450"/>
+          </a:xfrm>
+          <a:prstGeom xmlns:a="http://schemas.openxmlformats.org/drawingml/2006/main" prst="rect">
+            <a:avLst/>
+          </a:prstGeom>
+          <a:noFill xmlns:a="http://schemas.openxmlformats.org/drawingml/2006/main"/>
+          <a:ln xmlns:a="http://schemas.openxmlformats.org/drawingml/2006/main" w="0">
+            <a:noFill/>
+            <a:prstDash val="solid"/>
+          </a:ln>
+        </p:spPr>
+        <p:txBody>
+          <a:bodyPr xmlns:a="http://schemas.openxmlformats.org/drawingml/2006/main" wrap="square" lIns="0" tIns="0" rIns="0" bIns="0" anchor="t">
+            <a:normAutofit fontScale="100000"/>
+          </a:bodyPr>
+          <a:lstStyle xmlns:a="http://schemas.openxmlformats.org/drawingml/2006/main"/>
+          <a:p xmlns:a="http://schemas.openxmlformats.org/drawingml/2006/main">
+            <a:pPr algn="l">
+              <a:buNone/>
+              <a:defRPr sz="825" b="0">
+                <a:solidFill>
+                  <a:srgbClr val="64748B"/>
+                </a:solidFill>
+                <a:latin typeface="Arial"/>
+                <a:ea typeface="Arial"/>
+                <a:cs typeface="Arial"/>
+              </a:defRPr>
+            </a:pPr>
+            <a:r>
+              <a:rPr sz="825" b="0">
+                <a:solidFill>
+                  <a:srgbClr val="64748B"/>
+                </a:solidFill>
+                <a:latin typeface="Arial"/>
+                <a:ea typeface="Arial"/>
+                <a:cs typeface="Arial"/>
+              </a:rPr>
+              <a:t>Return geometry | 88-stock core distribution</a:t>
+            </a:r>
+          </a:p>
+        </p:txBody>
+      </p:sp>
+      <p:sp>
+        <p:nvSpPr>
+          <p:cNvPr id="5" name="footer-number-11">
+            <a:extLst xmlns:a="http://schemas.openxmlformats.org/drawingml/2006/main">
+              <a:ext uri="{FF2B5EF4-FFF2-40B4-BE49-F238E27FC236}">
+                <a16:creationId xmlns:a16="http://schemas.microsoft.com/office/drawing/2014/main" id="{83896276-4112-4532-AF7C-776C67C58B77}"/>
+              </a:ext>
+            </a:extLst>
+          </p:cNvPr>
+          <p:cNvSpPr>
+            <a:spLocks xmlns:a="http://schemas.openxmlformats.org/drawingml/2006/main" noGrp="1"/>
+          </p:cNvSpPr>
+          <p:nvPr/>
+        </p:nvSpPr>
+        <p:spPr>
+          <a:xfrm xmlns:a="http://schemas.openxmlformats.org/drawingml/2006/main">
+            <a:off x="10477500" y="6496050"/>
+            <a:ext cx="1257300" cy="190500"/>
+          </a:xfrm>
+          <a:prstGeom xmlns:a="http://schemas.openxmlformats.org/drawingml/2006/main" prst="rect">
+            <a:avLst/>
+          </a:prstGeom>
+          <a:noFill xmlns:a="http://schemas.openxmlformats.org/drawingml/2006/main"/>
+          <a:ln xmlns:a="http://schemas.openxmlformats.org/drawingml/2006/main" w="0">
+            <a:noFill/>
+            <a:prstDash val="solid"/>
+          </a:ln>
+        </p:spPr>
+        <p:txBody>
+          <a:bodyPr xmlns:a="http://schemas.openxmlformats.org/drawingml/2006/main" wrap="square" lIns="0" tIns="0" rIns="0" bIns="0" anchor="t">
+            <a:normAutofit fontScale="100000"/>
+          </a:bodyPr>
+          <a:lstStyle xmlns:a="http://schemas.openxmlformats.org/drawingml/2006/main"/>
+          <a:p xmlns:a="http://schemas.openxmlformats.org/drawingml/2006/main">
+            <a:pPr algn="r">
+              <a:buNone/>
+              <a:defRPr sz="1050" b="0">
+                <a:solidFill>
+                  <a:srgbClr val="667384"/>
+                </a:solidFill>
+                <a:latin typeface="Arial"/>
+                <a:ea typeface="Arial"/>
+                <a:cs typeface="Arial"/>
+              </a:defRPr>
+            </a:pPr>
+            <a:r>
+              <a:rPr sz="1050" b="0">
+                <a:solidFill>
+                  <a:srgbClr val="667384"/>
+                </a:solidFill>
+                <a:latin typeface="Arial"/>
+                <a:ea typeface="Arial"/>
+                <a:cs typeface="Arial"/>
+              </a:rPr>
+              <a:t>12</a:t>
+            </a:r>
+          </a:p>
+        </p:txBody>
+      </p:sp>
+      <p:pic>
+        <p:nvPicPr>
+          <p:cNvPr id="31" name=""/>
+          <p:cNvPicPr>
+            <a:picLocks xmlns:a="http://schemas.openxmlformats.org/drawingml/2006/main" noChangeAspect="1"/>
+          </p:cNvPicPr>
+          <p:nvPr/>
+        </p:nvPicPr>
+        <p:blipFill>
+          <a:blip xmlns:r="http://schemas.openxmlformats.org/officeDocument/2006/relationships" xmlns:a="http://schemas.openxmlformats.org/drawingml/2006/main" r:embed="Rd80499b1559a4104"/>
+          <a:stretch xmlns:a="http://schemas.openxmlformats.org/drawingml/2006/main"/>
+        </p:blipFill>
+        <p:spPr>
+          <a:xfrm xmlns:a="http://schemas.openxmlformats.org/drawingml/2006/main">
+            <a:off x="1771650" y="1335087"/>
+            <a:ext cx="8648700" cy="5045075"/>
+          </a:xfrm>
+          <a:prstGeom xmlns:a="http://schemas.openxmlformats.org/drawingml/2006/main" prst="rect">
+            <a:avLst/>
+          </a:prstGeom>
+        </p:spPr>
+      </p:pic>
+    </p:spTree>
+    <p:extLst>
+      <p:ext uri="{BB962C8B-B14F-4D97-AF65-F5344CB8AC3E}">
+        <p14:creationId xmlns:p14="http://schemas.microsoft.com/office/powerpoint/2010/main" val="666536286"/>
+      </p:ext>
+    </p:extLst>
+  </p:cSld>
+</p:sld>
+</file>
+
+<file path=ppt/slides/slide13.xml><?xml version="1.0" encoding="utf-8"?>
+<p:sld xmlns:p="http://schemas.openxmlformats.org/presentationml/2006/main">
+  <p:cSld>
+    <p:bg>
+      <p:bgPr>
+        <a:solidFill xmlns:a="http://schemas.openxmlformats.org/drawingml/2006/main">
+          <a:srgbClr val="FFFFFF"/>
+        </a:solidFill>
+      </p:bgPr>
+    </p:bg>
+    <p:spTree>
+      <p:nvGrpSpPr>
+        <p:cNvPr id="1" name=""/>
+        <p:cNvGrpSpPr/>
+        <p:nvPr/>
+      </p:nvGrpSpPr>
+      <p:grpSpPr>
+        <a:xfrm xmlns:a="http://schemas.openxmlformats.org/drawingml/2006/main"/>
+      </p:grpSpPr>
+      <p:sp>
+        <p:nvSpPr>
+          <p:cNvPr id="24" name="section-11">
+            <a:extLst xmlns:a="http://schemas.openxmlformats.org/drawingml/2006/main">
+              <a:ext uri="{FF2B5EF4-FFF2-40B4-BE49-F238E27FC236}">
+                <a16:creationId xmlns:a16="http://schemas.microsoft.com/office/drawing/2014/main" id="{272ED433-B59C-436C-9DFB-4D317B90A13F}"/>
+              </a:ext>
+            </a:extLst>
+          </p:cNvPr>
+          <p:cNvSpPr>
+            <a:spLocks xmlns:a="http://schemas.openxmlformats.org/drawingml/2006/main" noGrp="1"/>
+          </p:cNvSpPr>
+          <p:nvPr/>
+        </p:nvSpPr>
+        <p:spPr>
+          <a:xfrm xmlns:a="http://schemas.openxmlformats.org/drawingml/2006/main">
+            <a:off x="457200" y="228600"/>
+            <a:ext cx="4191000" cy="228600"/>
+          </a:xfrm>
+          <a:prstGeom xmlns:a="http://schemas.openxmlformats.org/drawingml/2006/main" prst="rect">
+            <a:avLst/>
+          </a:prstGeom>
+          <a:noFill xmlns:a="http://schemas.openxmlformats.org/drawingml/2006/main"/>
+          <a:ln xmlns:a="http://schemas.openxmlformats.org/drawingml/2006/main" w="0">
+            <a:noFill/>
+            <a:prstDash val="solid"/>
+          </a:ln>
+        </p:spPr>
+        <p:txBody>
+          <a:bodyPr xmlns:a="http://schemas.openxmlformats.org/drawingml/2006/main" wrap="square" lIns="0" tIns="0" rIns="0" bIns="0" anchor="t">
+            <a:normAutofit fontScale="100000"/>
+          </a:bodyPr>
+          <a:lstStyle xmlns:a="http://schemas.openxmlformats.org/drawingml/2006/main"/>
+          <a:p xmlns:a="http://schemas.openxmlformats.org/drawingml/2006/main">
+            <a:pPr algn="l">
+              <a:buNone/>
+              <a:defRPr sz="1200" b="1">
+                <a:solidFill>
+                  <a:srgbClr val="667384"/>
+                </a:solidFill>
+                <a:latin typeface="Arial"/>
+                <a:ea typeface="Arial"/>
+                <a:cs typeface="Arial"/>
+              </a:defRPr>
+            </a:pPr>
+            <a:r>
+              <a:rPr sz="1200" b="1">
+                <a:solidFill>
+                  <a:srgbClr val="667384"/>
+                </a:solidFill>
+                <a:latin typeface="Arial"/>
+                <a:ea typeface="Arial"/>
+                <a:cs typeface="Arial"/>
+              </a:rPr>
+              <a:t>DRIFT-ADJUSTED ACCRUAL</a:t>
+            </a:r>
+          </a:p>
+        </p:txBody>
+      </p:sp>
+      <p:sp>
+        <p:nvSpPr>
+          <p:cNvPr id="2" name="title-11">
+            <a:extLst xmlns:a="http://schemas.openxmlformats.org/drawingml/2006/main">
+              <a:ext uri="{FF2B5EF4-FFF2-40B4-BE49-F238E27FC236}">
+                <a16:creationId xmlns:a16="http://schemas.microsoft.com/office/drawing/2014/main" id="{3EC40708-7E00-432C-8ECE-907FA5705292}"/>
+              </a:ext>
+            </a:extLst>
+          </p:cNvPr>
+          <p:cNvSpPr>
+            <a:spLocks xmlns:a="http://schemas.openxmlformats.org/drawingml/2006/main" noGrp="1"/>
+          </p:cNvSpPr>
+          <p:nvPr/>
+        </p:nvSpPr>
+        <p:spPr>
+          <a:xfrm xmlns:a="http://schemas.openxmlformats.org/drawingml/2006/main">
+            <a:off x="457200" y="533400"/>
+            <a:ext cx="11277600" cy="628650"/>
+          </a:xfrm>
+          <a:prstGeom xmlns:a="http://schemas.openxmlformats.org/drawingml/2006/main" prst="rect">
+            <a:avLst/>
+          </a:prstGeom>
+          <a:noFill xmlns:a="http://schemas.openxmlformats.org/drawingml/2006/main"/>
+          <a:ln xmlns:a="http://schemas.openxmlformats.org/drawingml/2006/main" w="0">
+            <a:noFill/>
+            <a:prstDash val="solid"/>
+          </a:ln>
+        </p:spPr>
+        <p:txBody>
+          <a:bodyPr xmlns:a="http://schemas.openxmlformats.org/drawingml/2006/main" wrap="square" lIns="0" tIns="0" rIns="0" bIns="0" anchor="t">
+            <a:normAutofit fontScale="100000"/>
+          </a:bodyPr>
+          <a:lstStyle xmlns:a="http://schemas.openxmlformats.org/drawingml/2006/main"/>
+          <a:p xmlns:a="http://schemas.openxmlformats.org/drawingml/2006/main">
+            <a:pPr algn="l">
+              <a:buNone/>
+              <a:defRPr sz="3525" b="1">
+                <a:solidFill>
+                  <a:srgbClr val="000000"/>
+                </a:solidFill>
+                <a:latin typeface="Arial"/>
+                <a:ea typeface="Arial"/>
+                <a:cs typeface="Arial"/>
+              </a:defRPr>
+            </a:pPr>
+            <a:r>
+              <a:rPr sz="3525" b="1">
+                <a:solidFill>
+                  <a:srgbClr val="000000"/>
+                </a:solidFill>
+                <a:latin typeface="Arial"/>
+                <a:ea typeface="Arial"/>
+                <a:cs typeface="Arial"/>
+              </a:rPr>
+              <a:t>Return advantage fades after session 60</a:t>
+            </a:r>
+          </a:p>
+        </p:txBody>
+      </p:sp>
+      <p:sp>
+        <p:nvSpPr>
+          <p:cNvPr id="3" name="">
+            <a:extLst xmlns:a="http://schemas.openxmlformats.org/drawingml/2006/main">
+              <a:ext uri="{FF2B5EF4-FFF2-40B4-BE49-F238E27FC236}">
+                <a16:creationId xmlns:a16="http://schemas.microsoft.com/office/drawing/2014/main" id="{D5CA0FCE-75E8-41EF-A76A-23E9E2120C6A}"/>
+              </a:ext>
+            </a:extLst>
+          </p:cNvPr>
+          <p:cNvSpPr>
+            <a:spLocks xmlns:a="http://schemas.openxmlformats.org/drawingml/2006/main" noGrp="1"/>
+          </p:cNvSpPr>
+          <p:nvPr/>
+        </p:nvSpPr>
+        <p:spPr>
+          <a:xfrm xmlns:a="http://schemas.openxmlformats.org/drawingml/2006/main">
+            <a:off x="457200" y="1200150"/>
+            <a:ext cx="11277600" cy="19050"/>
+          </a:xfrm>
+          <a:prstGeom xmlns:a="http://schemas.openxmlformats.org/drawingml/2006/main" prst="rect">
+            <a:avLst/>
+          </a:prstGeom>
+          <a:solidFill xmlns:a="http://schemas.openxmlformats.org/drawingml/2006/main">
+            <a:srgbClr val="B8BCC4"/>
+          </a:solidFill>
+          <a:ln xmlns:a="http://schemas.openxmlformats.org/drawingml/2006/main" w="0">
+            <a:solidFill>
+              <a:srgbClr val="B8BCC4"/>
+            </a:solidFill>
+            <a:prstDash val="solid"/>
+          </a:ln>
+        </p:spPr>
+      </p:sp>
+      <p:sp>
+        <p:nvSpPr>
+          <p:cNvPr id="4" name="footer-left-11">
+            <a:extLst xmlns:a="http://schemas.openxmlformats.org/drawingml/2006/main">
+              <a:ext uri="{FF2B5EF4-FFF2-40B4-BE49-F238E27FC236}">
+                <a16:creationId xmlns:a16="http://schemas.microsoft.com/office/drawing/2014/main" id="{700DA765-80E0-4197-8700-00D867B86FA2}"/>
+              </a:ext>
+            </a:extLst>
+          </p:cNvPr>
+          <p:cNvSpPr>
+            <a:spLocks xmlns:a="http://schemas.openxmlformats.org/drawingml/2006/main" noGrp="1"/>
+          </p:cNvSpPr>
+          <p:nvPr/>
+        </p:nvSpPr>
+        <p:spPr>
+          <a:xfrm xmlns:a="http://schemas.openxmlformats.org/drawingml/2006/main">
+            <a:off x="457200" y="6515100"/>
+            <a:ext cx="3429000" cy="171450"/>
+          </a:xfrm>
+          <a:prstGeom xmlns:a="http://schemas.openxmlformats.org/drawingml/2006/main" prst="rect">
+            <a:avLst/>
+          </a:prstGeom>
+          <a:noFill xmlns:a="http://schemas.openxmlformats.org/drawingml/2006/main"/>
+          <a:ln xmlns:a="http://schemas.openxmlformats.org/drawingml/2006/main" w="0">
+            <a:noFill/>
+            <a:prstDash val="solid"/>
+          </a:ln>
+        </p:spPr>
+        <p:txBody>
+          <a:bodyPr xmlns:a="http://schemas.openxmlformats.org/drawingml/2006/main" wrap="square" lIns="0" tIns="0" rIns="0" bIns="0" anchor="t">
+            <a:normAutofit fontScale="100000"/>
+          </a:bodyPr>
+          <a:lstStyle xmlns:a="http://schemas.openxmlformats.org/drawingml/2006/main"/>
+          <a:p xmlns:a="http://schemas.openxmlformats.org/drawingml/2006/main">
+            <a:pPr algn="l">
+              <a:buNone/>
+              <a:defRPr sz="825" b="0">
+                <a:solidFill>
+                  <a:srgbClr val="64748B"/>
+                </a:solidFill>
+                <a:latin typeface="Arial"/>
+                <a:ea typeface="Arial"/>
+                <a:cs typeface="Arial"/>
+              </a:defRPr>
+            </a:pPr>
+            <a:r>
+              <a:rPr sz="825" b="0">
+                <a:solidFill>
+                  <a:srgbClr val="64748B"/>
+                </a:solidFill>
+                <a:latin typeface="Arial"/>
+                <a:ea typeface="Arial"/>
+                <a:cs typeface="Arial"/>
+              </a:rPr>
+              <a:t>Return geometry | conditional minus unconditional drift</a:t>
+            </a:r>
+          </a:p>
+        </p:txBody>
+      </p:sp>
+      <p:sp>
+        <p:nvSpPr>
+          <p:cNvPr id="5" name="footer-number-11">
+            <a:extLst xmlns:a="http://schemas.openxmlformats.org/drawingml/2006/main">
+              <a:ext uri="{FF2B5EF4-FFF2-40B4-BE49-F238E27FC236}">
+                <a16:creationId xmlns:a16="http://schemas.microsoft.com/office/drawing/2014/main" id="{83896276-4112-4532-AF7C-776C67C58B77}"/>
+              </a:ext>
+            </a:extLst>
+          </p:cNvPr>
+          <p:cNvSpPr>
+            <a:spLocks xmlns:a="http://schemas.openxmlformats.org/drawingml/2006/main" noGrp="1"/>
+          </p:cNvSpPr>
+          <p:nvPr/>
+        </p:nvSpPr>
+        <p:spPr>
+          <a:xfrm xmlns:a="http://schemas.openxmlformats.org/drawingml/2006/main">
+            <a:off x="10477500" y="6496050"/>
+            <a:ext cx="1257300" cy="190500"/>
+          </a:xfrm>
+          <a:prstGeom xmlns:a="http://schemas.openxmlformats.org/drawingml/2006/main" prst="rect">
+            <a:avLst/>
+          </a:prstGeom>
+          <a:noFill xmlns:a="http://schemas.openxmlformats.org/drawingml/2006/main"/>
+          <a:ln xmlns:a="http://schemas.openxmlformats.org/drawingml/2006/main" w="0">
+            <a:noFill/>
+            <a:prstDash val="solid"/>
+          </a:ln>
+        </p:spPr>
+        <p:txBody>
+          <a:bodyPr xmlns:a="http://schemas.openxmlformats.org/drawingml/2006/main" wrap="square" lIns="0" tIns="0" rIns="0" bIns="0" anchor="t">
+            <a:normAutofit fontScale="100000"/>
+          </a:bodyPr>
+          <a:lstStyle xmlns:a="http://schemas.openxmlformats.org/drawingml/2006/main"/>
+          <a:p xmlns:a="http://schemas.openxmlformats.org/drawingml/2006/main">
+            <a:pPr algn="r">
+              <a:buNone/>
+              <a:defRPr sz="1050" b="0">
+                <a:solidFill>
+                  <a:srgbClr val="667384"/>
+                </a:solidFill>
+                <a:latin typeface="Arial"/>
+                <a:ea typeface="Arial"/>
+                <a:cs typeface="Arial"/>
+              </a:defRPr>
+            </a:pPr>
+            <a:r>
+              <a:rPr sz="1050" b="0">
+                <a:solidFill>
+                  <a:srgbClr val="667384"/>
+                </a:solidFill>
+                <a:latin typeface="Arial"/>
+                <a:ea typeface="Arial"/>
+                <a:cs typeface="Arial"/>
+              </a:rPr>
+              <a:t>13</a:t>
+            </a:r>
+          </a:p>
+        </p:txBody>
+      </p:sp>
+      <p:pic>
+        <p:nvPicPr>
+          <p:cNvPr id="31" name=""/>
+          <p:cNvPicPr>
+            <a:picLocks xmlns:a="http://schemas.openxmlformats.org/drawingml/2006/main" noChangeAspect="1"/>
+          </p:cNvPicPr>
+          <p:nvPr/>
+        </p:nvPicPr>
+        <p:blipFill>
+          <a:blip xmlns:r="http://schemas.openxmlformats.org/officeDocument/2006/relationships" xmlns:a="http://schemas.openxmlformats.org/drawingml/2006/main" r:embed="R06a8940d53f9429a"/>
+          <a:stretch xmlns:a="http://schemas.openxmlformats.org/drawingml/2006/main"/>
+        </p:blipFill>
+        <p:spPr>
+          <a:xfrm xmlns:a="http://schemas.openxmlformats.org/drawingml/2006/main">
+            <a:off x="1771650" y="1335087"/>
+            <a:ext cx="8648700" cy="5045075"/>
+          </a:xfrm>
+          <a:prstGeom xmlns:a="http://schemas.openxmlformats.org/drawingml/2006/main" prst="rect">
+            <a:avLst/>
+          </a:prstGeom>
+        </p:spPr>
+      </p:pic>
+    </p:spTree>
+    <p:extLst>
+      <p:ext uri="{BB962C8B-B14F-4D97-AF65-F5344CB8AC3E}">
+        <p14:creationId xmlns:p14="http://schemas.microsoft.com/office/powerpoint/2010/main" val="666536286"/>
+      </p:ext>
+    </p:extLst>
+  </p:cSld>
+</p:sld>
+</file>
+
+<file path=ppt/slides/slide14.xml><?xml version="1.0" encoding="utf-8"?>
+<p:sld xmlns:p="http://schemas.openxmlformats.org/presentationml/2006/main">
+  <p:cSld>
+    <p:bg>
+      <p:bgPr>
+        <a:solidFill xmlns:a="http://schemas.openxmlformats.org/drawingml/2006/main">
+          <a:srgbClr val="FFFFFF"/>
+        </a:solidFill>
+      </p:bgPr>
+    </p:bg>
+    <p:spTree>
+      <p:nvGrpSpPr>
+        <p:cNvPr id="1" name=""/>
+        <p:cNvGrpSpPr/>
+        <p:nvPr/>
+      </p:nvGrpSpPr>
+      <p:grpSpPr>
+        <a:xfrm xmlns:a="http://schemas.openxmlformats.org/drawingml/2006/main"/>
+      </p:grpSpPr>
+      <p:sp>
+        <p:nvSpPr>
+          <p:cNvPr id="24" name="section-11">
+            <a:extLst xmlns:a="http://schemas.openxmlformats.org/drawingml/2006/main">
+              <a:ext uri="{FF2B5EF4-FFF2-40B4-BE49-F238E27FC236}">
+                <a16:creationId xmlns:a16="http://schemas.microsoft.com/office/drawing/2014/main" id="{272ED433-B59C-436C-9DFB-4D317B90A13F}"/>
+              </a:ext>
+            </a:extLst>
+          </p:cNvPr>
+          <p:cNvSpPr>
+            <a:spLocks xmlns:a="http://schemas.openxmlformats.org/drawingml/2006/main" noGrp="1"/>
+          </p:cNvSpPr>
+          <p:nvPr/>
+        </p:nvSpPr>
+        <p:spPr>
+          <a:xfrm xmlns:a="http://schemas.openxmlformats.org/drawingml/2006/main">
+            <a:off x="457200" y="228600"/>
+            <a:ext cx="4191000" cy="228600"/>
+          </a:xfrm>
+          <a:prstGeom xmlns:a="http://schemas.openxmlformats.org/drawingml/2006/main" prst="rect">
+            <a:avLst/>
+          </a:prstGeom>
+          <a:noFill xmlns:a="http://schemas.openxmlformats.org/drawingml/2006/main"/>
+          <a:ln xmlns:a="http://schemas.openxmlformats.org/drawingml/2006/main" w="0">
+            <a:noFill/>
+            <a:prstDash val="solid"/>
+          </a:ln>
+        </p:spPr>
+        <p:txBody>
+          <a:bodyPr xmlns:a="http://schemas.openxmlformats.org/drawingml/2006/main" wrap="square" lIns="0" tIns="0" rIns="0" bIns="0" anchor="t">
+            <a:normAutofit fontScale="100000"/>
+          </a:bodyPr>
+          <a:lstStyle xmlns:a="http://schemas.openxmlformats.org/drawingml/2006/main"/>
+          <a:p xmlns:a="http://schemas.openxmlformats.org/drawingml/2006/main">
+            <a:pPr algn="l">
+              <a:buNone/>
+              <a:defRPr sz="1200" b="1">
+                <a:solidFill>
+                  <a:srgbClr val="667384"/>
+                </a:solidFill>
+                <a:latin typeface="Arial"/>
+                <a:ea typeface="Arial"/>
+                <a:cs typeface="Arial"/>
+              </a:defRPr>
+            </a:pPr>
+            <a:r>
+              <a:rPr sz="1200" b="1">
+                <a:solidFill>
+                  <a:srgbClr val="667384"/>
+                </a:solidFill>
+                <a:latin typeface="Arial"/>
+                <a:ea typeface="Arial"/>
+                <a:cs typeface="Arial"/>
+              </a:rPr>
+              <a:t>SLICE DECISION</a:t>
+            </a:r>
+          </a:p>
+        </p:txBody>
+      </p:sp>
+      <p:sp>
+        <p:nvSpPr>
+          <p:cNvPr id="2" name="title-11">
+            <a:extLst xmlns:a="http://schemas.openxmlformats.org/drawingml/2006/main">
+              <a:ext uri="{FF2B5EF4-FFF2-40B4-BE49-F238E27FC236}">
+                <a16:creationId xmlns:a16="http://schemas.microsoft.com/office/drawing/2014/main" id="{3EC40708-7E00-432C-8ECE-907FA5705292}"/>
+              </a:ext>
+            </a:extLst>
+          </p:cNvPr>
+          <p:cNvSpPr>
+            <a:spLocks xmlns:a="http://schemas.openxmlformats.org/drawingml/2006/main" noGrp="1"/>
+          </p:cNvSpPr>
+          <p:nvPr/>
+        </p:nvSpPr>
+        <p:spPr>
+          <a:xfrm xmlns:a="http://schemas.openxmlformats.org/drawingml/2006/main">
+            <a:off x="457200" y="533400"/>
+            <a:ext cx="11277600" cy="628650"/>
+          </a:xfrm>
+          <a:prstGeom xmlns:a="http://schemas.openxmlformats.org/drawingml/2006/main" prst="rect">
+            <a:avLst/>
+          </a:prstGeom>
+          <a:noFill xmlns:a="http://schemas.openxmlformats.org/drawingml/2006/main"/>
+          <a:ln xmlns:a="http://schemas.openxmlformats.org/drawingml/2006/main" w="0">
+            <a:noFill/>
+            <a:prstDash val="solid"/>
+          </a:ln>
+        </p:spPr>
+        <p:txBody>
+          <a:bodyPr xmlns:a="http://schemas.openxmlformats.org/drawingml/2006/main" wrap="square" lIns="0" tIns="0" rIns="0" bIns="0" anchor="t">
+            <a:normAutofit fontScale="100000"/>
+          </a:bodyPr>
+          <a:lstStyle xmlns:a="http://schemas.openxmlformats.org/drawingml/2006/main"/>
+          <a:p xmlns:a="http://schemas.openxmlformats.org/drawingml/2006/main">
+            <a:pPr algn="l">
+              <a:buNone/>
+              <a:defRPr sz="3525" b="1">
+                <a:solidFill>
+                  <a:srgbClr val="000000"/>
+                </a:solidFill>
+                <a:latin typeface="Arial"/>
+                <a:ea typeface="Arial"/>
+                <a:cs typeface="Arial"/>
+              </a:defRPr>
+            </a:pPr>
+            <a:r>
+              <a:rPr sz="3525" b="1">
+                <a:solidFill>
+                  <a:srgbClr val="000000"/>
+                </a:solidFill>
+                <a:latin typeface="Arial"/>
+                <a:ea typeface="Arial"/>
+                <a:cs typeface="Arial"/>
+              </a:rPr>
+              <a:t>Duration survives to 60 sessions—not to 100</a:t>
+            </a:r>
+          </a:p>
+        </p:txBody>
+      </p:sp>
+      <p:sp>
+        <p:nvSpPr>
+          <p:cNvPr id="3" name="">
+            <a:extLst xmlns:a="http://schemas.openxmlformats.org/drawingml/2006/main">
+              <a:ext uri="{FF2B5EF4-FFF2-40B4-BE49-F238E27FC236}">
+                <a16:creationId xmlns:a16="http://schemas.microsoft.com/office/drawing/2014/main" id="{D5CA0FCE-75E8-41EF-A76A-23E9E2120C6A}"/>
+              </a:ext>
+            </a:extLst>
+          </p:cNvPr>
+          <p:cNvSpPr>
+            <a:spLocks xmlns:a="http://schemas.openxmlformats.org/drawingml/2006/main" noGrp="1"/>
+          </p:cNvSpPr>
+          <p:nvPr/>
+        </p:nvSpPr>
+        <p:spPr>
+          <a:xfrm xmlns:a="http://schemas.openxmlformats.org/drawingml/2006/main">
+            <a:off x="457200" y="1200150"/>
+            <a:ext cx="11277600" cy="19050"/>
+          </a:xfrm>
+          <a:prstGeom xmlns:a="http://schemas.openxmlformats.org/drawingml/2006/main" prst="rect">
+            <a:avLst/>
+          </a:prstGeom>
+          <a:solidFill xmlns:a="http://schemas.openxmlformats.org/drawingml/2006/main">
+            <a:srgbClr val="B8BCC4"/>
+          </a:solidFill>
+          <a:ln xmlns:a="http://schemas.openxmlformats.org/drawingml/2006/main" w="0">
+            <a:solidFill>
+              <a:srgbClr val="B8BCC4"/>
+            </a:solidFill>
+            <a:prstDash val="solid"/>
+          </a:ln>
+        </p:spPr>
+      </p:sp>
+      <p:sp>
+        <p:nvSpPr>
+          <p:cNvPr id="4" name="footer-left-11">
+            <a:extLst xmlns:a="http://schemas.openxmlformats.org/drawingml/2006/main">
+              <a:ext uri="{FF2B5EF4-FFF2-40B4-BE49-F238E27FC236}">
+                <a16:creationId xmlns:a16="http://schemas.microsoft.com/office/drawing/2014/main" id="{700DA765-80E0-4197-8700-00D867B86FA2}"/>
+              </a:ext>
+            </a:extLst>
+          </p:cNvPr>
+          <p:cNvSpPr>
+            <a:spLocks xmlns:a="http://schemas.openxmlformats.org/drawingml/2006/main" noGrp="1"/>
+          </p:cNvSpPr>
+          <p:nvPr/>
+        </p:nvSpPr>
+        <p:spPr>
+          <a:xfrm xmlns:a="http://schemas.openxmlformats.org/drawingml/2006/main">
+            <a:off x="457200" y="6515100"/>
+            <a:ext cx="3429000" cy="171450"/>
+          </a:xfrm>
+          <a:prstGeom xmlns:a="http://schemas.openxmlformats.org/drawingml/2006/main" prst="rect">
+            <a:avLst/>
+          </a:prstGeom>
+          <a:noFill xmlns:a="http://schemas.openxmlformats.org/drawingml/2006/main"/>
+          <a:ln xmlns:a="http://schemas.openxmlformats.org/drawingml/2006/main" w="0">
+            <a:noFill/>
+            <a:prstDash val="solid"/>
+          </a:ln>
+        </p:spPr>
+        <p:txBody>
+          <a:bodyPr xmlns:a="http://schemas.openxmlformats.org/drawingml/2006/main" wrap="square" lIns="0" tIns="0" rIns="0" bIns="0" anchor="t">
+            <a:normAutofit fontScale="100000"/>
+          </a:bodyPr>
+          <a:lstStyle xmlns:a="http://schemas.openxmlformats.org/drawingml/2006/main"/>
+          <a:p xmlns:a="http://schemas.openxmlformats.org/drawingml/2006/main">
+            <a:pPr algn="l">
+              <a:buNone/>
+              <a:defRPr sz="825" b="0">
+                <a:solidFill>
+                  <a:srgbClr val="64748B"/>
+                </a:solidFill>
+                <a:latin typeface="Arial"/>
+                <a:ea typeface="Arial"/>
+                <a:cs typeface="Arial"/>
+              </a:defRPr>
+            </a:pPr>
+            <a:r>
+              <a:rPr sz="825" b="0">
+                <a:solidFill>
+                  <a:srgbClr val="64748B"/>
+                </a:solidFill>
+                <a:latin typeface="Arial"/>
+                <a:ea typeface="Arial"/>
+                <a:cs typeface="Arial"/>
+              </a:rPr>
+              <a:t>Return geometry | incremental timing decision</a:t>
+            </a:r>
+          </a:p>
+        </p:txBody>
+      </p:sp>
+      <p:sp>
+        <p:nvSpPr>
+          <p:cNvPr id="5" name="footer-number-11">
+            <a:extLst xmlns:a="http://schemas.openxmlformats.org/drawingml/2006/main">
+              <a:ext uri="{FF2B5EF4-FFF2-40B4-BE49-F238E27FC236}">
+                <a16:creationId xmlns:a16="http://schemas.microsoft.com/office/drawing/2014/main" id="{83896276-4112-4532-AF7C-776C67C58B77}"/>
+              </a:ext>
+            </a:extLst>
+          </p:cNvPr>
+          <p:cNvSpPr>
+            <a:spLocks xmlns:a="http://schemas.openxmlformats.org/drawingml/2006/main" noGrp="1"/>
+          </p:cNvSpPr>
+          <p:nvPr/>
+        </p:nvSpPr>
+        <p:spPr>
+          <a:xfrm xmlns:a="http://schemas.openxmlformats.org/drawingml/2006/main">
+            <a:off x="10477500" y="6496050"/>
+            <a:ext cx="1257300" cy="190500"/>
+          </a:xfrm>
+          <a:prstGeom xmlns:a="http://schemas.openxmlformats.org/drawingml/2006/main" prst="rect">
+            <a:avLst/>
+          </a:prstGeom>
+          <a:noFill xmlns:a="http://schemas.openxmlformats.org/drawingml/2006/main"/>
+          <a:ln xmlns:a="http://schemas.openxmlformats.org/drawingml/2006/main" w="0">
+            <a:noFill/>
+            <a:prstDash val="solid"/>
+          </a:ln>
+        </p:spPr>
+        <p:txBody>
+          <a:bodyPr xmlns:a="http://schemas.openxmlformats.org/drawingml/2006/main" wrap="square" lIns="0" tIns="0" rIns="0" bIns="0" anchor="t">
+            <a:normAutofit fontScale="100000"/>
+          </a:bodyPr>
+          <a:lstStyle xmlns:a="http://schemas.openxmlformats.org/drawingml/2006/main"/>
+          <a:p xmlns:a="http://schemas.openxmlformats.org/drawingml/2006/main">
+            <a:pPr algn="r">
+              <a:buNone/>
+              <a:defRPr sz="1050" b="0">
+                <a:solidFill>
+                  <a:srgbClr val="667384"/>
+                </a:solidFill>
+                <a:latin typeface="Arial"/>
+                <a:ea typeface="Arial"/>
+                <a:cs typeface="Arial"/>
+              </a:defRPr>
+            </a:pPr>
+            <a:r>
+              <a:rPr sz="1050" b="0">
+                <a:solidFill>
+                  <a:srgbClr val="667384"/>
+                </a:solidFill>
+                <a:latin typeface="Arial"/>
+                <a:ea typeface="Arial"/>
+                <a:cs typeface="Arial"/>
+              </a:rPr>
+              <a:t>14</a:t>
+            </a:r>
+          </a:p>
+        </p:txBody>
+      </p:sp>
+      <p:sp>
+        <p:nvSpPr>
+          <p:cNvPr id="6" name="">
+            <a:extLst xmlns:a="http://schemas.openxmlformats.org/drawingml/2006/main">
+              <a:ext uri="{FF2B5EF4-FFF2-40B4-BE49-F238E27FC236}">
+                <a16:creationId xmlns:a16="http://schemas.microsoft.com/office/drawing/2014/main" id="{10F4BA85-46C5-47BD-BA74-EC806E663D58}"/>
+              </a:ext>
+            </a:extLst>
+          </p:cNvPr>
+          <p:cNvSpPr>
+            <a:spLocks xmlns:a="http://schemas.openxmlformats.org/drawingml/2006/main" noGrp="1"/>
+          </p:cNvSpPr>
+          <p:nvPr/>
+        </p:nvSpPr>
+        <p:spPr>
+          <a:xfrm xmlns:a="http://schemas.openxmlformats.org/drawingml/2006/main">
+            <a:off x="552450" y="1600200"/>
+            <a:ext cx="95250" cy="895350"/>
+          </a:xfrm>
+          <a:prstGeom xmlns:a="http://schemas.openxmlformats.org/drawingml/2006/main" prst="rect">
+            <a:avLst/>
+          </a:prstGeom>
+          <a:solidFill xmlns:a="http://schemas.openxmlformats.org/drawingml/2006/main">
+            <a:srgbClr val="E45756"/>
+          </a:solidFill>
+          <a:ln xmlns:a="http://schemas.openxmlformats.org/drawingml/2006/main" w="0">
+            <a:solidFill>
+              <a:srgbClr val="E45756"/>
+            </a:solidFill>
+            <a:prstDash val="solid"/>
+          </a:ln>
+        </p:spPr>
+      </p:sp>
+      <p:sp>
+        <p:nvSpPr>
+          <p:cNvPr id="7" name="">
+            <a:extLst xmlns:a="http://schemas.openxmlformats.org/drawingml/2006/main">
+              <a:ext uri="{FF2B5EF4-FFF2-40B4-BE49-F238E27FC236}">
+                <a16:creationId xmlns:a16="http://schemas.microsoft.com/office/drawing/2014/main" id="{7EF5B945-9D04-48FA-BA66-96DE813A9715}"/>
+              </a:ext>
+            </a:extLst>
+          </p:cNvPr>
+          <p:cNvSpPr>
+            <a:spLocks xmlns:a="http://schemas.openxmlformats.org/drawingml/2006/main" noGrp="1"/>
+          </p:cNvSpPr>
+          <p:nvPr/>
+        </p:nvSpPr>
+        <p:spPr>
+          <a:xfrm xmlns:a="http://schemas.openxmlformats.org/drawingml/2006/main">
+            <a:off x="876300" y="1581150"/>
+            <a:ext cx="2095500" cy="285750"/>
+          </a:xfrm>
+          <a:prstGeom xmlns:a="http://schemas.openxmlformats.org/drawingml/2006/main" prst="rect">
+            <a:avLst/>
+          </a:prstGeom>
+          <a:noFill xmlns:a="http://schemas.openxmlformats.org/drawingml/2006/main"/>
+          <a:ln xmlns:a="http://schemas.openxmlformats.org/drawingml/2006/main" w="0">
+            <a:noFill/>
+            <a:prstDash val="solid"/>
+          </a:ln>
+        </p:spPr>
+        <p:txBody>
+          <a:bodyPr xmlns:a="http://schemas.openxmlformats.org/drawingml/2006/main" wrap="square" lIns="0" tIns="0" rIns="0" bIns="0" anchor="t">
+            <a:normAutofit fontScale="100000"/>
+          </a:bodyPr>
+          <a:lstStyle xmlns:a="http://schemas.openxmlformats.org/drawingml/2006/main"/>
+          <a:p xmlns:a="http://schemas.openxmlformats.org/drawingml/2006/main">
+            <a:pPr algn="l">
+              <a:buNone/>
+              <a:defRPr sz="1350" b="1">
+                <a:solidFill>
+                  <a:srgbClr val="E45756"/>
+                </a:solidFill>
+                <a:latin typeface="Arial"/>
+                <a:ea typeface="Arial"/>
+                <a:cs typeface="Arial"/>
+              </a:defRPr>
+            </a:pPr>
+            <a:r>
+              <a:rPr sz="1350" b="1">
+                <a:solidFill>
+                  <a:srgbClr val="E45756"/>
+                </a:solidFill>
+                <a:latin typeface="Arial"/>
+                <a:ea typeface="Arial"/>
+                <a:cs typeface="Arial"/>
+              </a:rPr>
+              <a:t>FOUND</a:t>
+            </a:r>
+          </a:p>
+        </p:txBody>
+      </p:sp>
+      <p:sp>
+        <p:nvSpPr>
+          <p:cNvPr id="8" name="">
+            <a:extLst xmlns:a="http://schemas.openxmlformats.org/drawingml/2006/main">
+              <a:ext uri="{FF2B5EF4-FFF2-40B4-BE49-F238E27FC236}">
+                <a16:creationId xmlns:a16="http://schemas.microsoft.com/office/drawing/2014/main" id="{655CF75D-5F23-4C7F-BE9C-764036D0B9E8}"/>
+              </a:ext>
+            </a:extLst>
+          </p:cNvPr>
+          <p:cNvSpPr>
+            <a:spLocks xmlns:a="http://schemas.openxmlformats.org/drawingml/2006/main" noGrp="1"/>
+          </p:cNvSpPr>
+          <p:nvPr/>
+        </p:nvSpPr>
+        <p:spPr>
+          <a:xfrm xmlns:a="http://schemas.openxmlformats.org/drawingml/2006/main">
+            <a:off x="3105150" y="1562100"/>
+            <a:ext cx="4762500" cy="419100"/>
+          </a:xfrm>
+          <a:prstGeom xmlns:a="http://schemas.openxmlformats.org/drawingml/2006/main" prst="rect">
+            <a:avLst/>
+          </a:prstGeom>
+          <a:noFill xmlns:a="http://schemas.openxmlformats.org/drawingml/2006/main"/>
+          <a:ln xmlns:a="http://schemas.openxmlformats.org/drawingml/2006/main" w="0">
+            <a:noFill/>
+            <a:prstDash val="solid"/>
+          </a:ln>
+        </p:spPr>
+        <p:txBody>
+          <a:bodyPr xmlns:a="http://schemas.openxmlformats.org/drawingml/2006/main" wrap="square" lIns="0" tIns="0" rIns="0" bIns="0" anchor="t">
+            <a:normAutofit fontScale="100000"/>
+          </a:bodyPr>
+          <a:lstStyle xmlns:a="http://schemas.openxmlformats.org/drawingml/2006/main"/>
+          <a:p xmlns:a="http://schemas.openxmlformats.org/drawingml/2006/main">
+            <a:pPr algn="l">
+              <a:buNone/>
+              <a:defRPr sz="1950" b="1">
+                <a:solidFill>
+                  <a:srgbClr val="273548"/>
+                </a:solidFill>
+                <a:latin typeface="Arial"/>
+                <a:ea typeface="Arial"/>
+                <a:cs typeface="Arial"/>
+              </a:defRPr>
+            </a:pPr>
+            <a:r>
+              <a:rPr sz="1950" b="1">
+                <a:solidFill>
+                  <a:srgbClr val="273548"/>
+                </a:solidFill>
+                <a:latin typeface="Arial"/>
+                <a:ea typeface="Arial"/>
+                <a:cs typeface="Arial"/>
+              </a:rPr>
+              <a:t>Late incremental support</a:t>
+            </a:r>
+          </a:p>
+        </p:txBody>
+      </p:sp>
+      <p:sp>
+        <p:nvSpPr>
+          <p:cNvPr id="9" name="">
+            <a:extLst xmlns:a="http://schemas.openxmlformats.org/drawingml/2006/main">
+              <a:ext uri="{FF2B5EF4-FFF2-40B4-BE49-F238E27FC236}">
+                <a16:creationId xmlns:a16="http://schemas.microsoft.com/office/drawing/2014/main" id="{3E0B76F2-4514-4DD8-934B-ABE42A34E950}"/>
+              </a:ext>
+            </a:extLst>
+          </p:cNvPr>
+          <p:cNvSpPr>
+            <a:spLocks xmlns:a="http://schemas.openxmlformats.org/drawingml/2006/main" noGrp="1"/>
+          </p:cNvSpPr>
+          <p:nvPr/>
+        </p:nvSpPr>
+        <p:spPr>
+          <a:xfrm xmlns:a="http://schemas.openxmlformats.org/drawingml/2006/main">
+            <a:off x="8096250" y="1581150"/>
+            <a:ext cx="3333750" cy="704850"/>
+          </a:xfrm>
+          <a:prstGeom xmlns:a="http://schemas.openxmlformats.org/drawingml/2006/main" prst="rect">
+            <a:avLst/>
+          </a:prstGeom>
+          <a:noFill xmlns:a="http://schemas.openxmlformats.org/drawingml/2006/main"/>
+          <a:ln xmlns:a="http://schemas.openxmlformats.org/drawingml/2006/main" w="0">
+            <a:noFill/>
+            <a:prstDash val="solid"/>
+          </a:ln>
+        </p:spPr>
+        <p:txBody>
+          <a:bodyPr xmlns:a="http://schemas.openxmlformats.org/drawingml/2006/main" wrap="square" lIns="0" tIns="0" rIns="0" bIns="0" anchor="t">
+            <a:normAutofit fontScale="100000"/>
+          </a:bodyPr>
+          <a:lstStyle xmlns:a="http://schemas.openxmlformats.org/drawingml/2006/main"/>
+          <a:p xmlns:a="http://schemas.openxmlformats.org/drawingml/2006/main">
+            <a:pPr algn="l">
+              <a:buNone/>
+              <a:defRPr sz="1425" b="0">
+                <a:solidFill>
+                  <a:srgbClr val="667384"/>
+                </a:solidFill>
+                <a:latin typeface="Arial"/>
+                <a:ea typeface="Arial"/>
+                <a:cs typeface="Arial"/>
+              </a:defRPr>
+            </a:pPr>
+            <a:r>
+              <a:rPr sz="1425" b="0">
+                <a:solidFill>
+                  <a:srgbClr val="667384"/>
+                </a:solidFill>
+                <a:latin typeface="Arial"/>
+                <a:ea typeface="Arial"/>
+                <a:cs typeface="Arial"/>
+              </a:rPr>
+              <a:t>21–40 and 41–60 pass</a:t>
+            </a:r>
+          </a:p>
+        </p:txBody>
+      </p:sp>
+      <p:sp>
+        <p:nvSpPr>
+          <p:cNvPr id="10" name="">
+            <a:extLst xmlns:a="http://schemas.openxmlformats.org/drawingml/2006/main">
+              <a:ext uri="{FF2B5EF4-FFF2-40B4-BE49-F238E27FC236}">
+                <a16:creationId xmlns:a16="http://schemas.microsoft.com/office/drawing/2014/main" id="{294777C3-6D2F-4277-840E-7E984FB4554D}"/>
+              </a:ext>
+            </a:extLst>
+          </p:cNvPr>
+          <p:cNvSpPr>
+            <a:spLocks xmlns:a="http://schemas.openxmlformats.org/drawingml/2006/main" noGrp="1"/>
+          </p:cNvSpPr>
+          <p:nvPr/>
+        </p:nvSpPr>
+        <p:spPr>
+          <a:xfrm xmlns:a="http://schemas.openxmlformats.org/drawingml/2006/main">
+            <a:off x="876300" y="2590800"/>
+            <a:ext cx="10553700" cy="9525"/>
+          </a:xfrm>
+          <a:prstGeom xmlns:a="http://schemas.openxmlformats.org/drawingml/2006/main" prst="rect">
+            <a:avLst/>
+          </a:prstGeom>
+          <a:solidFill xmlns:a="http://schemas.openxmlformats.org/drawingml/2006/main">
+            <a:srgbClr val="B8BCC4"/>
+          </a:solidFill>
+          <a:ln xmlns:a="http://schemas.openxmlformats.org/drawingml/2006/main" w="0">
+            <a:solidFill>
+              <a:srgbClr val="B8BCC4"/>
+            </a:solidFill>
+            <a:prstDash val="solid"/>
+          </a:ln>
+        </p:spPr>
+      </p:sp>
+      <p:sp>
+        <p:nvSpPr>
+          <p:cNvPr id="11" name="">
+            <a:extLst xmlns:a="http://schemas.openxmlformats.org/drawingml/2006/main">
+              <a:ext uri="{FF2B5EF4-FFF2-40B4-BE49-F238E27FC236}">
+                <a16:creationId xmlns:a16="http://schemas.microsoft.com/office/drawing/2014/main" id="{F894CF3F-AD63-423C-8F01-64C507896579}"/>
+              </a:ext>
+            </a:extLst>
+          </p:cNvPr>
+          <p:cNvSpPr>
+            <a:spLocks xmlns:a="http://schemas.openxmlformats.org/drawingml/2006/main" noGrp="1"/>
+          </p:cNvSpPr>
+          <p:nvPr/>
+        </p:nvSpPr>
+        <p:spPr>
+          <a:xfrm xmlns:a="http://schemas.openxmlformats.org/drawingml/2006/main">
+            <a:off x="552450" y="2800350"/>
+            <a:ext cx="95250" cy="895350"/>
+          </a:xfrm>
+          <a:prstGeom xmlns:a="http://schemas.openxmlformats.org/drawingml/2006/main" prst="rect">
+            <a:avLst/>
+          </a:prstGeom>
+          <a:solidFill xmlns:a="http://schemas.openxmlformats.org/drawingml/2006/main">
+            <a:srgbClr val="2A9D6F"/>
+          </a:solidFill>
+          <a:ln xmlns:a="http://schemas.openxmlformats.org/drawingml/2006/main" w="0">
+            <a:solidFill>
+              <a:srgbClr val="2A9D6F"/>
+            </a:solidFill>
+            <a:prstDash val="solid"/>
+          </a:ln>
+        </p:spPr>
+      </p:sp>
+      <p:sp>
+        <p:nvSpPr>
+          <p:cNvPr id="12" name="">
+            <a:extLst xmlns:a="http://schemas.openxmlformats.org/drawingml/2006/main">
+              <a:ext uri="{FF2B5EF4-FFF2-40B4-BE49-F238E27FC236}">
+                <a16:creationId xmlns:a16="http://schemas.microsoft.com/office/drawing/2014/main" id="{D3953D03-6A7A-4FEE-B242-02BF0319C169}"/>
+              </a:ext>
+            </a:extLst>
+          </p:cNvPr>
+          <p:cNvSpPr>
+            <a:spLocks xmlns:a="http://schemas.openxmlformats.org/drawingml/2006/main" noGrp="1"/>
+          </p:cNvSpPr>
+          <p:nvPr/>
+        </p:nvSpPr>
+        <p:spPr>
+          <a:xfrm xmlns:a="http://schemas.openxmlformats.org/drawingml/2006/main">
+            <a:off x="876300" y="2781300"/>
+            <a:ext cx="2095500" cy="285750"/>
+          </a:xfrm>
+          <a:prstGeom xmlns:a="http://schemas.openxmlformats.org/drawingml/2006/main" prst="rect">
+            <a:avLst/>
+          </a:prstGeom>
+          <a:noFill xmlns:a="http://schemas.openxmlformats.org/drawingml/2006/main"/>
+          <a:ln xmlns:a="http://schemas.openxmlformats.org/drawingml/2006/main" w="0">
+            <a:noFill/>
+            <a:prstDash val="solid"/>
+          </a:ln>
+        </p:spPr>
+        <p:txBody>
+          <a:bodyPr xmlns:a="http://schemas.openxmlformats.org/drawingml/2006/main" wrap="square" lIns="0" tIns="0" rIns="0" bIns="0" anchor="t">
+            <a:normAutofit fontScale="100000"/>
+          </a:bodyPr>
+          <a:lstStyle xmlns:a="http://schemas.openxmlformats.org/drawingml/2006/main"/>
+          <a:p xmlns:a="http://schemas.openxmlformats.org/drawingml/2006/main">
+            <a:pPr algn="l">
+              <a:buNone/>
+              <a:defRPr sz="1350" b="1">
+                <a:solidFill>
+                  <a:srgbClr val="2A9D6F"/>
+                </a:solidFill>
+                <a:latin typeface="Arial"/>
+                <a:ea typeface="Arial"/>
+                <a:cs typeface="Arial"/>
+              </a:defRPr>
+            </a:pPr>
+            <a:r>
+              <a:rPr sz="1350" b="1">
+                <a:solidFill>
+                  <a:srgbClr val="2A9D6F"/>
+                </a:solidFill>
+                <a:latin typeface="Arial"/>
+                <a:ea typeface="Arial"/>
+                <a:cs typeface="Arial"/>
+              </a:rPr>
+              <a:t>FADES</a:t>
+            </a:r>
+          </a:p>
+        </p:txBody>
+      </p:sp>
+      <p:sp>
+        <p:nvSpPr>
+          <p:cNvPr id="13" name="">
+            <a:extLst xmlns:a="http://schemas.openxmlformats.org/drawingml/2006/main">
+              <a:ext uri="{FF2B5EF4-FFF2-40B4-BE49-F238E27FC236}">
+                <a16:creationId xmlns:a16="http://schemas.microsoft.com/office/drawing/2014/main" id="{52D1DBE8-EAF6-4492-89E7-5C97A3A6A395}"/>
+              </a:ext>
+            </a:extLst>
+          </p:cNvPr>
+          <p:cNvSpPr>
+            <a:spLocks xmlns:a="http://schemas.openxmlformats.org/drawingml/2006/main" noGrp="1"/>
+          </p:cNvSpPr>
+          <p:nvPr/>
+        </p:nvSpPr>
+        <p:spPr>
+          <a:xfrm xmlns:a="http://schemas.openxmlformats.org/drawingml/2006/main">
+            <a:off x="3105150" y="2762250"/>
+            <a:ext cx="4762500" cy="419100"/>
+          </a:xfrm>
+          <a:prstGeom xmlns:a="http://schemas.openxmlformats.org/drawingml/2006/main" prst="rect">
+            <a:avLst/>
+          </a:prstGeom>
+          <a:noFill xmlns:a="http://schemas.openxmlformats.org/drawingml/2006/main"/>
+          <a:ln xmlns:a="http://schemas.openxmlformats.org/drawingml/2006/main" w="0">
+            <a:noFill/>
+            <a:prstDash val="solid"/>
+          </a:ln>
+        </p:spPr>
+        <p:txBody>
+          <a:bodyPr xmlns:a="http://schemas.openxmlformats.org/drawingml/2006/main" wrap="square" lIns="0" tIns="0" rIns="0" bIns="0" anchor="t">
+            <a:normAutofit fontScale="100000"/>
+          </a:bodyPr>
+          <a:lstStyle xmlns:a="http://schemas.openxmlformats.org/drawingml/2006/main"/>
+          <a:p xmlns:a="http://schemas.openxmlformats.org/drawingml/2006/main">
+            <a:pPr algn="l">
+              <a:buNone/>
+              <a:defRPr sz="1950" b="1">
+                <a:solidFill>
+                  <a:srgbClr val="273548"/>
+                </a:solidFill>
+                <a:latin typeface="Arial"/>
+                <a:ea typeface="Arial"/>
+                <a:cs typeface="Arial"/>
+              </a:defRPr>
+            </a:pPr>
+            <a:r>
+              <a:rPr sz="1950" b="1">
+                <a:solidFill>
+                  <a:srgbClr val="273548"/>
+                </a:solidFill>
+                <a:latin typeface="Arial"/>
+                <a:ea typeface="Arial"/>
+                <a:cs typeface="Arial"/>
+              </a:rPr>
+              <a:t>Final block loses accrual</a:t>
+            </a:r>
+          </a:p>
+        </p:txBody>
+      </p:sp>
+      <p:sp>
+        <p:nvSpPr>
+          <p:cNvPr id="14" name="">
+            <a:extLst xmlns:a="http://schemas.openxmlformats.org/drawingml/2006/main">
+              <a:ext uri="{FF2B5EF4-FFF2-40B4-BE49-F238E27FC236}">
+                <a16:creationId xmlns:a16="http://schemas.microsoft.com/office/drawing/2014/main" id="{2CAF0156-C9E6-4210-8A8A-BFEDD044631B}"/>
+              </a:ext>
+            </a:extLst>
+          </p:cNvPr>
+          <p:cNvSpPr>
+            <a:spLocks xmlns:a="http://schemas.openxmlformats.org/drawingml/2006/main" noGrp="1"/>
+          </p:cNvSpPr>
+          <p:nvPr/>
+        </p:nvSpPr>
+        <p:spPr>
+          <a:xfrm xmlns:a="http://schemas.openxmlformats.org/drawingml/2006/main">
+            <a:off x="8096250" y="2781300"/>
+            <a:ext cx="3333750" cy="704850"/>
+          </a:xfrm>
+          <a:prstGeom xmlns:a="http://schemas.openxmlformats.org/drawingml/2006/main" prst="rect">
+            <a:avLst/>
+          </a:prstGeom>
+          <a:noFill xmlns:a="http://schemas.openxmlformats.org/drawingml/2006/main"/>
+          <a:ln xmlns:a="http://schemas.openxmlformats.org/drawingml/2006/main" w="0">
+            <a:noFill/>
+            <a:prstDash val="solid"/>
+          </a:ln>
+        </p:spPr>
+        <p:txBody>
+          <a:bodyPr xmlns:a="http://schemas.openxmlformats.org/drawingml/2006/main" wrap="square" lIns="0" tIns="0" rIns="0" bIns="0" anchor="t">
+            <a:normAutofit fontScale="100000"/>
+          </a:bodyPr>
+          <a:lstStyle xmlns:a="http://schemas.openxmlformats.org/drawingml/2006/main"/>
+          <a:p xmlns:a="http://schemas.openxmlformats.org/drawingml/2006/main">
+            <a:pPr algn="l">
+              <a:buNone/>
+              <a:defRPr sz="1425" b="0">
+                <a:solidFill>
+                  <a:srgbClr val="667384"/>
+                </a:solidFill>
+                <a:latin typeface="Arial"/>
+                <a:ea typeface="Arial"/>
+                <a:cs typeface="Arial"/>
+              </a:defRPr>
+            </a:pPr>
+            <a:r>
+              <a:rPr sz="1425" b="0">
+                <a:solidFill>
+                  <a:srgbClr val="667384"/>
+                </a:solidFill>
+                <a:latin typeface="Arial"/>
+                <a:ea typeface="Arial"/>
+                <a:cs typeface="Arial"/>
+              </a:rPr>
+              <a:t>61–100 = −0.90 bp/session</a:t>
+            </a:r>
+          </a:p>
+        </p:txBody>
+      </p:sp>
+      <p:sp>
+        <p:nvSpPr>
+          <p:cNvPr id="15" name="">
+            <a:extLst xmlns:a="http://schemas.openxmlformats.org/drawingml/2006/main">
+              <a:ext uri="{FF2B5EF4-FFF2-40B4-BE49-F238E27FC236}">
+                <a16:creationId xmlns:a16="http://schemas.microsoft.com/office/drawing/2014/main" id="{B126165D-5B65-44DB-99BD-15ED33F9B90F}"/>
+              </a:ext>
+            </a:extLst>
+          </p:cNvPr>
+          <p:cNvSpPr>
+            <a:spLocks xmlns:a="http://schemas.openxmlformats.org/drawingml/2006/main" noGrp="1"/>
+          </p:cNvSpPr>
+          <p:nvPr/>
+        </p:nvSpPr>
+        <p:spPr>
+          <a:xfrm xmlns:a="http://schemas.openxmlformats.org/drawingml/2006/main">
+            <a:off x="876300" y="3790950"/>
+            <a:ext cx="10553700" cy="9525"/>
+          </a:xfrm>
+          <a:prstGeom xmlns:a="http://schemas.openxmlformats.org/drawingml/2006/main" prst="rect">
+            <a:avLst/>
+          </a:prstGeom>
+          <a:solidFill xmlns:a="http://schemas.openxmlformats.org/drawingml/2006/main">
+            <a:srgbClr val="B8BCC4"/>
+          </a:solidFill>
+          <a:ln xmlns:a="http://schemas.openxmlformats.org/drawingml/2006/main" w="0">
+            <a:solidFill>
+              <a:srgbClr val="B8BCC4"/>
+            </a:solidFill>
+            <a:prstDash val="solid"/>
+          </a:ln>
+        </p:spPr>
+      </p:sp>
+      <p:sp>
+        <p:nvSpPr>
+          <p:cNvPr id="16" name="">
+            <a:extLst xmlns:a="http://schemas.openxmlformats.org/drawingml/2006/main">
+              <a:ext uri="{FF2B5EF4-FFF2-40B4-BE49-F238E27FC236}">
+                <a16:creationId xmlns:a16="http://schemas.microsoft.com/office/drawing/2014/main" id="{7DC0911F-9587-4B19-84C6-11974DB2A91C}"/>
+              </a:ext>
+            </a:extLst>
+          </p:cNvPr>
+          <p:cNvSpPr>
+            <a:spLocks xmlns:a="http://schemas.openxmlformats.org/drawingml/2006/main" noGrp="1"/>
+          </p:cNvSpPr>
+          <p:nvPr/>
+        </p:nvSpPr>
+        <p:spPr>
+          <a:xfrm xmlns:a="http://schemas.openxmlformats.org/drawingml/2006/main">
+            <a:off x="552450" y="4000500"/>
+            <a:ext cx="95250" cy="895350"/>
+          </a:xfrm>
+          <a:prstGeom xmlns:a="http://schemas.openxmlformats.org/drawingml/2006/main" prst="rect">
+            <a:avLst/>
+          </a:prstGeom>
+          <a:solidFill xmlns:a="http://schemas.openxmlformats.org/drawingml/2006/main">
+            <a:srgbClr val="3D8DFF"/>
+          </a:solidFill>
+          <a:ln xmlns:a="http://schemas.openxmlformats.org/drawingml/2006/main" w="0">
+            <a:solidFill>
+              <a:srgbClr val="3D8DFF"/>
+            </a:solidFill>
+            <a:prstDash val="solid"/>
+          </a:ln>
+        </p:spPr>
+      </p:sp>
+      <p:sp>
+        <p:nvSpPr>
+          <p:cNvPr id="17" name="">
+            <a:extLst xmlns:a="http://schemas.openxmlformats.org/drawingml/2006/main">
+              <a:ext uri="{FF2B5EF4-FFF2-40B4-BE49-F238E27FC236}">
+                <a16:creationId xmlns:a16="http://schemas.microsoft.com/office/drawing/2014/main" id="{DAB53991-F50C-4B95-9F23-DAE86BCEDF3B}"/>
+              </a:ext>
+            </a:extLst>
+          </p:cNvPr>
+          <p:cNvSpPr>
+            <a:spLocks xmlns:a="http://schemas.openxmlformats.org/drawingml/2006/main" noGrp="1"/>
+          </p:cNvSpPr>
+          <p:nvPr/>
+        </p:nvSpPr>
+        <p:spPr>
+          <a:xfrm xmlns:a="http://schemas.openxmlformats.org/drawingml/2006/main">
+            <a:off x="876300" y="3981450"/>
+            <a:ext cx="2095500" cy="285750"/>
+          </a:xfrm>
+          <a:prstGeom xmlns:a="http://schemas.openxmlformats.org/drawingml/2006/main" prst="rect">
+            <a:avLst/>
+          </a:prstGeom>
+          <a:noFill xmlns:a="http://schemas.openxmlformats.org/drawingml/2006/main"/>
+          <a:ln xmlns:a="http://schemas.openxmlformats.org/drawingml/2006/main" w="0">
+            <a:noFill/>
+            <a:prstDash val="solid"/>
+          </a:ln>
+        </p:spPr>
+        <p:txBody>
+          <a:bodyPr xmlns:a="http://schemas.openxmlformats.org/drawingml/2006/main" wrap="square" lIns="0" tIns="0" rIns="0" bIns="0" anchor="t">
+            <a:normAutofit fontScale="100000"/>
+          </a:bodyPr>
+          <a:lstStyle xmlns:a="http://schemas.openxmlformats.org/drawingml/2006/main"/>
+          <a:p xmlns:a="http://schemas.openxmlformats.org/drawingml/2006/main">
+            <a:pPr algn="l">
+              <a:buNone/>
+              <a:defRPr sz="1350" b="1">
+                <a:solidFill>
+                  <a:srgbClr val="3D8DFF"/>
+                </a:solidFill>
+                <a:latin typeface="Arial"/>
+                <a:ea typeface="Arial"/>
+                <a:cs typeface="Arial"/>
+              </a:defRPr>
+            </a:pPr>
+            <a:r>
+              <a:rPr sz="1350" b="1">
+                <a:solidFill>
+                  <a:srgbClr val="3D8DFF"/>
+                </a:solidFill>
+                <a:latin typeface="Arial"/>
+                <a:ea typeface="Arial"/>
+                <a:cs typeface="Arial"/>
+              </a:rPr>
+              <a:t>DOES NOT EARN</a:t>
+            </a:r>
+          </a:p>
+        </p:txBody>
+      </p:sp>
+      <p:sp>
+        <p:nvSpPr>
+          <p:cNvPr id="18" name="">
+            <a:extLst xmlns:a="http://schemas.openxmlformats.org/drawingml/2006/main">
+              <a:ext uri="{FF2B5EF4-FFF2-40B4-BE49-F238E27FC236}">
+                <a16:creationId xmlns:a16="http://schemas.microsoft.com/office/drawing/2014/main" id="{5DFACF3B-08BC-4148-A40A-2004DFB81D71}"/>
+              </a:ext>
+            </a:extLst>
+          </p:cNvPr>
+          <p:cNvSpPr>
+            <a:spLocks xmlns:a="http://schemas.openxmlformats.org/drawingml/2006/main" noGrp="1"/>
+          </p:cNvSpPr>
+          <p:nvPr/>
+        </p:nvSpPr>
+        <p:spPr>
+          <a:xfrm xmlns:a="http://schemas.openxmlformats.org/drawingml/2006/main">
+            <a:off x="3105150" y="3962400"/>
+            <a:ext cx="4762500" cy="419100"/>
+          </a:xfrm>
+          <a:prstGeom xmlns:a="http://schemas.openxmlformats.org/drawingml/2006/main" prst="rect">
+            <a:avLst/>
+          </a:prstGeom>
+          <a:noFill xmlns:a="http://schemas.openxmlformats.org/drawingml/2006/main"/>
+          <a:ln xmlns:a="http://schemas.openxmlformats.org/drawingml/2006/main" w="0">
+            <a:noFill/>
+            <a:prstDash val="solid"/>
+          </a:ln>
+        </p:spPr>
+        <p:txBody>
+          <a:bodyPr xmlns:a="http://schemas.openxmlformats.org/drawingml/2006/main" wrap="square" lIns="0" tIns="0" rIns="0" bIns="0" anchor="t">
+            <a:normAutofit fontScale="100000"/>
+          </a:bodyPr>
+          <a:lstStyle xmlns:a="http://schemas.openxmlformats.org/drawingml/2006/main"/>
+          <a:p xmlns:a="http://schemas.openxmlformats.org/drawingml/2006/main">
+            <a:pPr algn="l">
+              <a:buNone/>
+              <a:defRPr sz="1950" b="1">
+                <a:solidFill>
+                  <a:srgbClr val="273548"/>
+                </a:solidFill>
+                <a:latin typeface="Arial"/>
+                <a:ea typeface="Arial"/>
+                <a:cs typeface="Arial"/>
+              </a:defRPr>
+            </a:pPr>
+            <a:r>
+              <a:rPr sz="1950" b="1">
+                <a:solidFill>
+                  <a:srgbClr val="273548"/>
+                </a:solidFill>
+                <a:latin typeface="Arial"/>
+                <a:ea typeface="Arial"/>
+                <a:cs typeface="Arial"/>
+              </a:rPr>
+              <a:t>A holding rule</a:t>
+            </a:r>
+          </a:p>
+        </p:txBody>
+      </p:sp>
+      <p:sp>
+        <p:nvSpPr>
+          <p:cNvPr id="19" name="">
+            <a:extLst xmlns:a="http://schemas.openxmlformats.org/drawingml/2006/main">
+              <a:ext uri="{FF2B5EF4-FFF2-40B4-BE49-F238E27FC236}">
+                <a16:creationId xmlns:a16="http://schemas.microsoft.com/office/drawing/2014/main" id="{C907D23B-44A2-43C4-9658-4C6E38430BF5}"/>
+              </a:ext>
+            </a:extLst>
+          </p:cNvPr>
+          <p:cNvSpPr>
+            <a:spLocks xmlns:a="http://schemas.openxmlformats.org/drawingml/2006/main" noGrp="1"/>
+          </p:cNvSpPr>
+          <p:nvPr/>
+        </p:nvSpPr>
+        <p:spPr>
+          <a:xfrm xmlns:a="http://schemas.openxmlformats.org/drawingml/2006/main">
+            <a:off x="8096250" y="3981450"/>
+            <a:ext cx="3333750" cy="704850"/>
+          </a:xfrm>
+          <a:prstGeom xmlns:a="http://schemas.openxmlformats.org/drawingml/2006/main" prst="rect">
+            <a:avLst/>
+          </a:prstGeom>
+          <a:noFill xmlns:a="http://schemas.openxmlformats.org/drawingml/2006/main"/>
+          <a:ln xmlns:a="http://schemas.openxmlformats.org/drawingml/2006/main" w="0">
+            <a:noFill/>
+            <a:prstDash val="solid"/>
+          </a:ln>
+        </p:spPr>
+        <p:txBody>
+          <a:bodyPr xmlns:a="http://schemas.openxmlformats.org/drawingml/2006/main" wrap="square" lIns="0" tIns="0" rIns="0" bIns="0" anchor="t">
+            <a:normAutofit fontScale="100000"/>
+          </a:bodyPr>
+          <a:lstStyle xmlns:a="http://schemas.openxmlformats.org/drawingml/2006/main"/>
+          <a:p xmlns:a="http://schemas.openxmlformats.org/drawingml/2006/main">
+            <a:pPr algn="l">
+              <a:buNone/>
+              <a:defRPr sz="1425" b="0">
+                <a:solidFill>
+                  <a:srgbClr val="667384"/>
+                </a:solidFill>
+                <a:latin typeface="Arial"/>
+                <a:ea typeface="Arial"/>
+                <a:cs typeface="Arial"/>
+              </a:defRPr>
+            </a:pPr>
+            <a:r>
+              <a:rPr sz="1425" b="0">
+                <a:solidFill>
+                  <a:srgbClr val="667384"/>
+                </a:solidFill>
+                <a:latin typeface="Arial"/>
+                <a:ea typeface="Arial"/>
+                <a:cs typeface="Arial"/>
+              </a:rPr>
+              <a:t>overlap and time transport unresolved</a:t>
+            </a:r>
+          </a:p>
+        </p:txBody>
+      </p:sp>
+      <p:sp>
+        <p:nvSpPr>
+          <p:cNvPr id="20" name="">
+            <a:extLst xmlns:a="http://schemas.openxmlformats.org/drawingml/2006/main">
+              <a:ext uri="{FF2B5EF4-FFF2-40B4-BE49-F238E27FC236}">
+                <a16:creationId xmlns:a16="http://schemas.microsoft.com/office/drawing/2014/main" id="{8042DFC4-7E22-47E6-8C53-1E63A8411C3A}"/>
+              </a:ext>
+            </a:extLst>
+          </p:cNvPr>
+          <p:cNvSpPr>
+            <a:spLocks xmlns:a="http://schemas.openxmlformats.org/drawingml/2006/main" noGrp="1"/>
+          </p:cNvSpPr>
+          <p:nvPr/>
+        </p:nvSpPr>
+        <p:spPr>
+          <a:xfrm xmlns:a="http://schemas.openxmlformats.org/drawingml/2006/main">
+            <a:off x="876300" y="4991100"/>
+            <a:ext cx="10553700" cy="9525"/>
+          </a:xfrm>
+          <a:prstGeom xmlns:a="http://schemas.openxmlformats.org/drawingml/2006/main" prst="rect">
+            <a:avLst/>
+          </a:prstGeom>
+          <a:solidFill xmlns:a="http://schemas.openxmlformats.org/drawingml/2006/main">
+            <a:srgbClr val="B8BCC4"/>
+          </a:solidFill>
+          <a:ln xmlns:a="http://schemas.openxmlformats.org/drawingml/2006/main" w="0">
+            <a:solidFill>
+              <a:srgbClr val="B8BCC4"/>
+            </a:solidFill>
+            <a:prstDash val="solid"/>
+          </a:ln>
+        </p:spPr>
+      </p:sp>
+      <p:sp>
+        <p:nvSpPr>
+          <p:cNvPr id="21" name="">
+            <a:extLst xmlns:a="http://schemas.openxmlformats.org/drawingml/2006/main">
+              <a:ext uri="{FF2B5EF4-FFF2-40B4-BE49-F238E27FC236}">
+                <a16:creationId xmlns:a16="http://schemas.microsoft.com/office/drawing/2014/main" id="{F4066D54-676B-4D0F-93B6-2152B57E41AF}"/>
+              </a:ext>
+            </a:extLst>
+          </p:cNvPr>
+          <p:cNvSpPr>
+            <a:spLocks xmlns:a="http://schemas.openxmlformats.org/drawingml/2006/main" noGrp="1"/>
+          </p:cNvSpPr>
+          <p:nvPr/>
+        </p:nvSpPr>
+        <p:spPr>
+          <a:xfrm xmlns:a="http://schemas.openxmlformats.org/drawingml/2006/main">
+            <a:off x="552450" y="5353050"/>
+            <a:ext cx="10877550" cy="781050"/>
+          </a:xfrm>
+          <a:prstGeom xmlns:a="http://schemas.openxmlformats.org/drawingml/2006/main" prst="rect">
+            <a:avLst/>
+          </a:prstGeom>
+          <a:solidFill xmlns:a="http://schemas.openxmlformats.org/drawingml/2006/main">
+            <a:srgbClr val="EAF5FB"/>
+          </a:solidFill>
+          <a:ln xmlns:a="http://schemas.openxmlformats.org/drawingml/2006/main" w="0">
+            <a:solidFill>
+              <a:srgbClr val="EAF5FB"/>
+            </a:solidFill>
+            <a:prstDash val="solid"/>
+          </a:ln>
+        </p:spPr>
+      </p:sp>
+      <p:sp>
+        <p:nvSpPr>
+          <p:cNvPr id="22" name="">
+            <a:extLst xmlns:a="http://schemas.openxmlformats.org/drawingml/2006/main">
+              <a:ext uri="{FF2B5EF4-FFF2-40B4-BE49-F238E27FC236}">
+                <a16:creationId xmlns:a16="http://schemas.microsoft.com/office/drawing/2014/main" id="{6E4C79AE-EB98-4B5B-B3D3-11ED0D4C729B}"/>
+              </a:ext>
+            </a:extLst>
+          </p:cNvPr>
+          <p:cNvSpPr>
+            <a:spLocks xmlns:a="http://schemas.openxmlformats.org/drawingml/2006/main" noGrp="1"/>
+          </p:cNvSpPr>
+          <p:nvPr/>
+        </p:nvSpPr>
+        <p:spPr>
+          <a:xfrm xmlns:a="http://schemas.openxmlformats.org/drawingml/2006/main">
+            <a:off x="781050" y="5524500"/>
+            <a:ext cx="2476500" cy="323850"/>
+          </a:xfrm>
+          <a:prstGeom xmlns:a="http://schemas.openxmlformats.org/drawingml/2006/main" prst="rect">
+            <a:avLst/>
+          </a:prstGeom>
+          <a:noFill xmlns:a="http://schemas.openxmlformats.org/drawingml/2006/main"/>
+          <a:ln xmlns:a="http://schemas.openxmlformats.org/drawingml/2006/main" w="0">
+            <a:noFill/>
+            <a:prstDash val="solid"/>
+          </a:ln>
+        </p:spPr>
+        <p:txBody>
+          <a:bodyPr xmlns:a="http://schemas.openxmlformats.org/drawingml/2006/main" wrap="square" lIns="0" tIns="0" rIns="0" bIns="0" anchor="t">
+            <a:normAutofit fontScale="100000"/>
+          </a:bodyPr>
+          <a:lstStyle xmlns:a="http://schemas.openxmlformats.org/drawingml/2006/main"/>
+          <a:p xmlns:a="http://schemas.openxmlformats.org/drawingml/2006/main">
+            <a:pPr algn="l">
+              <a:buNone/>
+              <a:defRPr sz="1725" b="1">
+                <a:solidFill>
+                  <a:srgbClr val="3D8DFF"/>
+                </a:solidFill>
+                <a:latin typeface="Arial"/>
+                <a:ea typeface="Arial"/>
+                <a:cs typeface="Arial"/>
+              </a:defRPr>
+            </a:pPr>
+            <a:r>
+              <a:rPr sz="1725" b="1">
+                <a:solidFill>
+                  <a:srgbClr val="3D8DFF"/>
+                </a:solidFill>
+                <a:latin typeface="Arial"/>
+                <a:ea typeface="Arial"/>
+                <a:cs typeface="Arial"/>
+              </a:rPr>
+              <a:t>STOP</a:t>
+            </a:r>
+          </a:p>
+        </p:txBody>
+      </p:sp>
+      <p:sp>
+        <p:nvSpPr>
+          <p:cNvPr id="23" name="">
+            <a:extLst xmlns:a="http://schemas.openxmlformats.org/drawingml/2006/main">
+              <a:ext uri="{FF2B5EF4-FFF2-40B4-BE49-F238E27FC236}">
+                <a16:creationId xmlns:a16="http://schemas.microsoft.com/office/drawing/2014/main" id="{3320D60E-6067-4236-80ED-A898A863026E}"/>
+              </a:ext>
+            </a:extLst>
+          </p:cNvPr>
+          <p:cNvSpPr>
+            <a:spLocks xmlns:a="http://schemas.openxmlformats.org/drawingml/2006/main" noGrp="1"/>
+          </p:cNvSpPr>
+          <p:nvPr/>
+        </p:nvSpPr>
+        <p:spPr>
+          <a:xfrm xmlns:a="http://schemas.openxmlformats.org/drawingml/2006/main">
+            <a:off x="3333750" y="5486400"/>
+            <a:ext cx="7810500" cy="419100"/>
+          </a:xfrm>
+          <a:prstGeom xmlns:a="http://schemas.openxmlformats.org/drawingml/2006/main" prst="rect">
+            <a:avLst/>
+          </a:prstGeom>
+          <a:noFill xmlns:a="http://schemas.openxmlformats.org/drawingml/2006/main"/>
+          <a:ln xmlns:a="http://schemas.openxmlformats.org/drawingml/2006/main" w="0">
+            <a:noFill/>
+            <a:prstDash val="solid"/>
+          </a:ln>
+        </p:spPr>
+        <p:txBody>
+          <a:bodyPr xmlns:a="http://schemas.openxmlformats.org/drawingml/2006/main" wrap="square" lIns="0" tIns="0" rIns="0" bIns="0" anchor="t">
+            <a:normAutofit fontScale="76389"/>
+          </a:bodyPr>
+          <a:lstStyle xmlns:a="http://schemas.openxmlformats.org/drawingml/2006/main"/>
+          <a:p xmlns:a="http://schemas.openxmlformats.org/drawingml/2006/main">
+            <a:pPr algn="l">
+              <a:buNone/>
+              <a:defRPr sz="1800" b="1">
+                <a:solidFill>
+                  <a:srgbClr val="273548"/>
+                </a:solidFill>
+                <a:latin typeface="Arial"/>
+                <a:ea typeface="Arial"/>
+                <a:cs typeface="Arial"/>
+              </a:defRPr>
+            </a:pPr>
+            <a:r>
+              <a:rPr sz="1800" b="1">
+                <a:solidFill>
+                  <a:srgbClr val="273548"/>
+                </a:solidFill>
+                <a:latin typeface="Arial"/>
+                <a:ea typeface="Arial"/>
+                <a:cs typeface="Arial"/>
+              </a:rPr>
+              <a:t>Freeze this timing morphology. Do not retune blocks or open post-2023 outcomes until the next gate is designed.</a:t>
+            </a:r>
+          </a:p>
+        </p:txBody>
+      </p:sp>
+    </p:spTree>
+    <p:extLst>
+      <p:ext uri="{BB962C8B-B14F-4D97-AF65-F5344CB8AC3E}">
+        <p14:creationId xmlns:p14="http://schemas.microsoft.com/office/powerpoint/2010/main" val="666536286"/>
+      </p:ext>
+    </p:extLst>
+  </p:cSld>
+</p:sld>
+</file>
+
 <file path=ppt/slides/slide2.xml><?xml version="1.0" encoding="utf-8"?>
 <p:sld xmlns:p="http://schemas.openxmlformats.org/presentationml/2006/main">
   <p:cSld>
@@ -8916,6 +12106,2362 @@
                 <a:cs typeface="Arial"/>
               </a:rPr>
               <a:t>Use the original 20-session prior anchor and decompose future returns before opening post-2023 data.</a:t>
+            </a:r>
+          </a:p>
+        </p:txBody>
+      </p:sp>
+    </p:spTree>
+    <p:extLst>
+      <p:ext uri="{BB962C8B-B14F-4D97-AF65-F5344CB8AC3E}">
+        <p14:creationId xmlns:p14="http://schemas.microsoft.com/office/powerpoint/2010/main" val="666536286"/>
+      </p:ext>
+    </p:extLst>
+  </p:cSld>
+</p:sld>
+</file>
+
+<file path=ppt/slides/slide8.xml><?xml version="1.0" encoding="utf-8"?>
+<p:sld xmlns:p="http://schemas.openxmlformats.org/presentationml/2006/main">
+  <p:cSld>
+    <p:bg>
+      <p:bgPr>
+        <a:solidFill xmlns:a="http://schemas.openxmlformats.org/drawingml/2006/main">
+          <a:srgbClr val="FFFFFF"/>
+        </a:solidFill>
+      </p:bgPr>
+    </p:bg>
+    <p:spTree>
+      <p:nvGrpSpPr>
+        <p:cNvPr id="1" name=""/>
+        <p:cNvGrpSpPr/>
+        <p:nvPr/>
+      </p:nvGrpSpPr>
+      <p:grpSpPr>
+        <a:xfrm xmlns:a="http://schemas.openxmlformats.org/drawingml/2006/main"/>
+      </p:grpSpPr>
+      <p:sp>
+        <p:nvSpPr>
+          <p:cNvPr id="24" name="section-11">
+            <a:extLst xmlns:a="http://schemas.openxmlformats.org/drawingml/2006/main">
+              <a:ext uri="{FF2B5EF4-FFF2-40B4-BE49-F238E27FC236}">
+                <a16:creationId xmlns:a16="http://schemas.microsoft.com/office/drawing/2014/main" id="{272ED433-B59C-436C-9DFB-4D317B90A13F}"/>
+              </a:ext>
+            </a:extLst>
+          </p:cNvPr>
+          <p:cNvSpPr>
+            <a:spLocks xmlns:a="http://schemas.openxmlformats.org/drawingml/2006/main" noGrp="1"/>
+          </p:cNvSpPr>
+          <p:nvPr/>
+        </p:nvSpPr>
+        <p:spPr>
+          <a:xfrm xmlns:a="http://schemas.openxmlformats.org/drawingml/2006/main">
+            <a:off x="457200" y="228600"/>
+            <a:ext cx="4191000" cy="228600"/>
+          </a:xfrm>
+          <a:prstGeom xmlns:a="http://schemas.openxmlformats.org/drawingml/2006/main" prst="rect">
+            <a:avLst/>
+          </a:prstGeom>
+          <a:noFill xmlns:a="http://schemas.openxmlformats.org/drawingml/2006/main"/>
+          <a:ln xmlns:a="http://schemas.openxmlformats.org/drawingml/2006/main" w="0">
+            <a:noFill/>
+            <a:prstDash val="solid"/>
+          </a:ln>
+        </p:spPr>
+        <p:txBody>
+          <a:bodyPr xmlns:a="http://schemas.openxmlformats.org/drawingml/2006/main" wrap="square" lIns="0" tIns="0" rIns="0" bIns="0" anchor="t">
+            <a:normAutofit fontScale="100000"/>
+          </a:bodyPr>
+          <a:lstStyle xmlns:a="http://schemas.openxmlformats.org/drawingml/2006/main"/>
+          <a:p xmlns:a="http://schemas.openxmlformats.org/drawingml/2006/main">
+            <a:pPr algn="l">
+              <a:buNone/>
+              <a:defRPr sz="1200" b="1">
+                <a:solidFill>
+                  <a:srgbClr val="667384"/>
+                </a:solidFill>
+                <a:latin typeface="Arial"/>
+                <a:ea typeface="Arial"/>
+                <a:cs typeface="Arial"/>
+              </a:defRPr>
+            </a:pPr>
+            <a:r>
+              <a:rPr sz="1200" b="1">
+                <a:solidFill>
+                  <a:srgbClr val="667384"/>
+                </a:solidFill>
+                <a:latin typeface="Arial"/>
+                <a:ea typeface="Arial"/>
+                <a:cs typeface="Arial"/>
+              </a:rPr>
+              <a:t>FROZEN MICROSCOPE</a:t>
+            </a:r>
+          </a:p>
+        </p:txBody>
+      </p:sp>
+      <p:sp>
+        <p:nvSpPr>
+          <p:cNvPr id="2" name="title-11">
+            <a:extLst xmlns:a="http://schemas.openxmlformats.org/drawingml/2006/main">
+              <a:ext uri="{FF2B5EF4-FFF2-40B4-BE49-F238E27FC236}">
+                <a16:creationId xmlns:a16="http://schemas.microsoft.com/office/drawing/2014/main" id="{3EC40708-7E00-432C-8ECE-907FA5705292}"/>
+              </a:ext>
+            </a:extLst>
+          </p:cNvPr>
+          <p:cNvSpPr>
+            <a:spLocks xmlns:a="http://schemas.openxmlformats.org/drawingml/2006/main" noGrp="1"/>
+          </p:cNvSpPr>
+          <p:nvPr/>
+        </p:nvSpPr>
+        <p:spPr>
+          <a:xfrm xmlns:a="http://schemas.openxmlformats.org/drawingml/2006/main">
+            <a:off x="457200" y="533400"/>
+            <a:ext cx="11277600" cy="628650"/>
+          </a:xfrm>
+          <a:prstGeom xmlns:a="http://schemas.openxmlformats.org/drawingml/2006/main" prst="rect">
+            <a:avLst/>
+          </a:prstGeom>
+          <a:noFill xmlns:a="http://schemas.openxmlformats.org/drawingml/2006/main"/>
+          <a:ln xmlns:a="http://schemas.openxmlformats.org/drawingml/2006/main" w="0">
+            <a:noFill/>
+            <a:prstDash val="solid"/>
+          </a:ln>
+        </p:spPr>
+        <p:txBody>
+          <a:bodyPr xmlns:a="http://schemas.openxmlformats.org/drawingml/2006/main" wrap="square" lIns="0" tIns="0" rIns="0" bIns="0" anchor="t">
+            <a:normAutofit fontScale="100000"/>
+          </a:bodyPr>
+          <a:lstStyle xmlns:a="http://schemas.openxmlformats.org/drawingml/2006/main"/>
+          <a:p xmlns:a="http://schemas.openxmlformats.org/drawingml/2006/main">
+            <a:pPr algn="l">
+              <a:buNone/>
+              <a:defRPr sz="3525" b="1">
+                <a:solidFill>
+                  <a:srgbClr val="000000"/>
+                </a:solidFill>
+                <a:latin typeface="Arial"/>
+                <a:ea typeface="Arial"/>
+                <a:cs typeface="Arial"/>
+              </a:defRPr>
+            </a:pPr>
+            <a:r>
+              <a:rPr sz="3525" b="1">
+                <a:solidFill>
+                  <a:srgbClr val="000000"/>
+                </a:solidFill>
+                <a:latin typeface="Arial"/>
+                <a:ea typeface="Arial"/>
+                <a:cs typeface="Arial"/>
+              </a:rPr>
+              <a:t>One narrow slice asks when the rebound arrives</a:t>
+            </a:r>
+          </a:p>
+        </p:txBody>
+      </p:sp>
+      <p:sp>
+        <p:nvSpPr>
+          <p:cNvPr id="3" name="">
+            <a:extLst xmlns:a="http://schemas.openxmlformats.org/drawingml/2006/main">
+              <a:ext uri="{FF2B5EF4-FFF2-40B4-BE49-F238E27FC236}">
+                <a16:creationId xmlns:a16="http://schemas.microsoft.com/office/drawing/2014/main" id="{D5CA0FCE-75E8-41EF-A76A-23E9E2120C6A}"/>
+              </a:ext>
+            </a:extLst>
+          </p:cNvPr>
+          <p:cNvSpPr>
+            <a:spLocks xmlns:a="http://schemas.openxmlformats.org/drawingml/2006/main" noGrp="1"/>
+          </p:cNvSpPr>
+          <p:nvPr/>
+        </p:nvSpPr>
+        <p:spPr>
+          <a:xfrm xmlns:a="http://schemas.openxmlformats.org/drawingml/2006/main">
+            <a:off x="457200" y="1200150"/>
+            <a:ext cx="11277600" cy="19050"/>
+          </a:xfrm>
+          <a:prstGeom xmlns:a="http://schemas.openxmlformats.org/drawingml/2006/main" prst="rect">
+            <a:avLst/>
+          </a:prstGeom>
+          <a:solidFill xmlns:a="http://schemas.openxmlformats.org/drawingml/2006/main">
+            <a:srgbClr val="B8BCC4"/>
+          </a:solidFill>
+          <a:ln xmlns:a="http://schemas.openxmlformats.org/drawingml/2006/main" w="0">
+            <a:solidFill>
+              <a:srgbClr val="B8BCC4"/>
+            </a:solidFill>
+            <a:prstDash val="solid"/>
+          </a:ln>
+        </p:spPr>
+      </p:sp>
+      <p:sp>
+        <p:nvSpPr>
+          <p:cNvPr id="4" name="footer-left-11">
+            <a:extLst xmlns:a="http://schemas.openxmlformats.org/drawingml/2006/main">
+              <a:ext uri="{FF2B5EF4-FFF2-40B4-BE49-F238E27FC236}">
+                <a16:creationId xmlns:a16="http://schemas.microsoft.com/office/drawing/2014/main" id="{700DA765-80E0-4197-8700-00D867B86FA2}"/>
+              </a:ext>
+            </a:extLst>
+          </p:cNvPr>
+          <p:cNvSpPr>
+            <a:spLocks xmlns:a="http://schemas.openxmlformats.org/drawingml/2006/main" noGrp="1"/>
+          </p:cNvSpPr>
+          <p:nvPr/>
+        </p:nvSpPr>
+        <p:spPr>
+          <a:xfrm xmlns:a="http://schemas.openxmlformats.org/drawingml/2006/main">
+            <a:off x="457200" y="6515100"/>
+            <a:ext cx="3429000" cy="171450"/>
+          </a:xfrm>
+          <a:prstGeom xmlns:a="http://schemas.openxmlformats.org/drawingml/2006/main" prst="rect">
+            <a:avLst/>
+          </a:prstGeom>
+          <a:noFill xmlns:a="http://schemas.openxmlformats.org/drawingml/2006/main"/>
+          <a:ln xmlns:a="http://schemas.openxmlformats.org/drawingml/2006/main" w="0">
+            <a:noFill/>
+            <a:prstDash val="solid"/>
+          </a:ln>
+        </p:spPr>
+        <p:txBody>
+          <a:bodyPr xmlns:a="http://schemas.openxmlformats.org/drawingml/2006/main" wrap="square" lIns="0" tIns="0" rIns="0" bIns="0" anchor="t">
+            <a:normAutofit fontScale="100000"/>
+          </a:bodyPr>
+          <a:lstStyle xmlns:a="http://schemas.openxmlformats.org/drawingml/2006/main"/>
+          <a:p xmlns:a="http://schemas.openxmlformats.org/drawingml/2006/main">
+            <a:pPr algn="l">
+              <a:buNone/>
+              <a:defRPr sz="825" b="0">
+                <a:solidFill>
+                  <a:srgbClr val="64748B"/>
+                </a:solidFill>
+                <a:latin typeface="Arial"/>
+                <a:ea typeface="Arial"/>
+                <a:cs typeface="Arial"/>
+              </a:defRPr>
+            </a:pPr>
+            <a:r>
+              <a:rPr sz="825" b="0">
+                <a:solidFill>
+                  <a:srgbClr val="64748B"/>
+                </a:solidFill>
+                <a:latin typeface="Arial"/>
+                <a:ea typeface="Arial"/>
+                <a:cs typeface="Arial"/>
+              </a:rPr>
+              <a:t>Return geometry | incremental forward decomposition</a:t>
+            </a:r>
+          </a:p>
+        </p:txBody>
+      </p:sp>
+      <p:sp>
+        <p:nvSpPr>
+          <p:cNvPr id="5" name="footer-number-11">
+            <a:extLst xmlns:a="http://schemas.openxmlformats.org/drawingml/2006/main">
+              <a:ext uri="{FF2B5EF4-FFF2-40B4-BE49-F238E27FC236}">
+                <a16:creationId xmlns:a16="http://schemas.microsoft.com/office/drawing/2014/main" id="{83896276-4112-4532-AF7C-776C67C58B77}"/>
+              </a:ext>
+            </a:extLst>
+          </p:cNvPr>
+          <p:cNvSpPr>
+            <a:spLocks xmlns:a="http://schemas.openxmlformats.org/drawingml/2006/main" noGrp="1"/>
+          </p:cNvSpPr>
+          <p:nvPr/>
+        </p:nvSpPr>
+        <p:spPr>
+          <a:xfrm xmlns:a="http://schemas.openxmlformats.org/drawingml/2006/main">
+            <a:off x="10477500" y="6496050"/>
+            <a:ext cx="1257300" cy="190500"/>
+          </a:xfrm>
+          <a:prstGeom xmlns:a="http://schemas.openxmlformats.org/drawingml/2006/main" prst="rect">
+            <a:avLst/>
+          </a:prstGeom>
+          <a:noFill xmlns:a="http://schemas.openxmlformats.org/drawingml/2006/main"/>
+          <a:ln xmlns:a="http://schemas.openxmlformats.org/drawingml/2006/main" w="0">
+            <a:noFill/>
+            <a:prstDash val="solid"/>
+          </a:ln>
+        </p:spPr>
+        <p:txBody>
+          <a:bodyPr xmlns:a="http://schemas.openxmlformats.org/drawingml/2006/main" wrap="square" lIns="0" tIns="0" rIns="0" bIns="0" anchor="t">
+            <a:normAutofit fontScale="100000"/>
+          </a:bodyPr>
+          <a:lstStyle xmlns:a="http://schemas.openxmlformats.org/drawingml/2006/main"/>
+          <a:p xmlns:a="http://schemas.openxmlformats.org/drawingml/2006/main">
+            <a:pPr algn="r">
+              <a:buNone/>
+              <a:defRPr sz="1050" b="0">
+                <a:solidFill>
+                  <a:srgbClr val="667384"/>
+                </a:solidFill>
+                <a:latin typeface="Arial"/>
+                <a:ea typeface="Arial"/>
+                <a:cs typeface="Arial"/>
+              </a:defRPr>
+            </a:pPr>
+            <a:r>
+              <a:rPr sz="1050" b="0">
+                <a:solidFill>
+                  <a:srgbClr val="667384"/>
+                </a:solidFill>
+                <a:latin typeface="Arial"/>
+                <a:ea typeface="Arial"/>
+                <a:cs typeface="Arial"/>
+              </a:rPr>
+              <a:t>8</a:t>
+            </a:r>
+          </a:p>
+        </p:txBody>
+      </p:sp>
+      <p:sp>
+        <p:nvSpPr>
+          <p:cNvPr id="6" name="">
+            <a:extLst xmlns:a="http://schemas.openxmlformats.org/drawingml/2006/main">
+              <a:ext uri="{FF2B5EF4-FFF2-40B4-BE49-F238E27FC236}">
+                <a16:creationId xmlns:a16="http://schemas.microsoft.com/office/drawing/2014/main" id="{10F4BA85-46C5-47BD-BA74-EC806E663D58}"/>
+              </a:ext>
+            </a:extLst>
+          </p:cNvPr>
+          <p:cNvSpPr>
+            <a:spLocks xmlns:a="http://schemas.openxmlformats.org/drawingml/2006/main" noGrp="1"/>
+          </p:cNvSpPr>
+          <p:nvPr/>
+        </p:nvSpPr>
+        <p:spPr>
+          <a:xfrm xmlns:a="http://schemas.openxmlformats.org/drawingml/2006/main">
+            <a:off x="552450" y="1600200"/>
+            <a:ext cx="95250" cy="895350"/>
+          </a:xfrm>
+          <a:prstGeom xmlns:a="http://schemas.openxmlformats.org/drawingml/2006/main" prst="rect">
+            <a:avLst/>
+          </a:prstGeom>
+          <a:solidFill xmlns:a="http://schemas.openxmlformats.org/drawingml/2006/main">
+            <a:srgbClr val="E45756"/>
+          </a:solidFill>
+          <a:ln xmlns:a="http://schemas.openxmlformats.org/drawingml/2006/main" w="0">
+            <a:solidFill>
+              <a:srgbClr val="E45756"/>
+            </a:solidFill>
+            <a:prstDash val="solid"/>
+          </a:ln>
+        </p:spPr>
+      </p:sp>
+      <p:sp>
+        <p:nvSpPr>
+          <p:cNvPr id="7" name="">
+            <a:extLst xmlns:a="http://schemas.openxmlformats.org/drawingml/2006/main">
+              <a:ext uri="{FF2B5EF4-FFF2-40B4-BE49-F238E27FC236}">
+                <a16:creationId xmlns:a16="http://schemas.microsoft.com/office/drawing/2014/main" id="{7EF5B945-9D04-48FA-BA66-96DE813A9715}"/>
+              </a:ext>
+            </a:extLst>
+          </p:cNvPr>
+          <p:cNvSpPr>
+            <a:spLocks xmlns:a="http://schemas.openxmlformats.org/drawingml/2006/main" noGrp="1"/>
+          </p:cNvSpPr>
+          <p:nvPr/>
+        </p:nvSpPr>
+        <p:spPr>
+          <a:xfrm xmlns:a="http://schemas.openxmlformats.org/drawingml/2006/main">
+            <a:off x="876300" y="1581150"/>
+            <a:ext cx="2095500" cy="285750"/>
+          </a:xfrm>
+          <a:prstGeom xmlns:a="http://schemas.openxmlformats.org/drawingml/2006/main" prst="rect">
+            <a:avLst/>
+          </a:prstGeom>
+          <a:noFill xmlns:a="http://schemas.openxmlformats.org/drawingml/2006/main"/>
+          <a:ln xmlns:a="http://schemas.openxmlformats.org/drawingml/2006/main" w="0">
+            <a:noFill/>
+            <a:prstDash val="solid"/>
+          </a:ln>
+        </p:spPr>
+        <p:txBody>
+          <a:bodyPr xmlns:a="http://schemas.openxmlformats.org/drawingml/2006/main" wrap="square" lIns="0" tIns="0" rIns="0" bIns="0" anchor="t">
+            <a:normAutofit fontScale="100000"/>
+          </a:bodyPr>
+          <a:lstStyle xmlns:a="http://schemas.openxmlformats.org/drawingml/2006/main"/>
+          <a:p xmlns:a="http://schemas.openxmlformats.org/drawingml/2006/main">
+            <a:pPr algn="l">
+              <a:buNone/>
+              <a:defRPr sz="1350" b="1">
+                <a:solidFill>
+                  <a:srgbClr val="E45756"/>
+                </a:solidFill>
+                <a:latin typeface="Arial"/>
+                <a:ea typeface="Arial"/>
+                <a:cs typeface="Arial"/>
+              </a:defRPr>
+            </a:pPr>
+            <a:r>
+              <a:rPr sz="1350" b="1">
+                <a:solidFill>
+                  <a:srgbClr val="E45756"/>
+                </a:solidFill>
+                <a:latin typeface="Arial"/>
+                <a:ea typeface="Arial"/>
+                <a:cs typeface="Arial"/>
+              </a:rPr>
+              <a:t>ANCHOR</a:t>
+            </a:r>
+          </a:p>
+        </p:txBody>
+      </p:sp>
+      <p:sp>
+        <p:nvSpPr>
+          <p:cNvPr id="8" name="">
+            <a:extLst xmlns:a="http://schemas.openxmlformats.org/drawingml/2006/main">
+              <a:ext uri="{FF2B5EF4-FFF2-40B4-BE49-F238E27FC236}">
+                <a16:creationId xmlns:a16="http://schemas.microsoft.com/office/drawing/2014/main" id="{655CF75D-5F23-4C7F-BE9C-764036D0B9E8}"/>
+              </a:ext>
+            </a:extLst>
+          </p:cNvPr>
+          <p:cNvSpPr>
+            <a:spLocks xmlns:a="http://schemas.openxmlformats.org/drawingml/2006/main" noGrp="1"/>
+          </p:cNvSpPr>
+          <p:nvPr/>
+        </p:nvSpPr>
+        <p:spPr>
+          <a:xfrm xmlns:a="http://schemas.openxmlformats.org/drawingml/2006/main">
+            <a:off x="3105150" y="1562100"/>
+            <a:ext cx="4762500" cy="419100"/>
+          </a:xfrm>
+          <a:prstGeom xmlns:a="http://schemas.openxmlformats.org/drawingml/2006/main" prst="rect">
+            <a:avLst/>
+          </a:prstGeom>
+          <a:noFill xmlns:a="http://schemas.openxmlformats.org/drawingml/2006/main"/>
+          <a:ln xmlns:a="http://schemas.openxmlformats.org/drawingml/2006/main" w="0">
+            <a:noFill/>
+            <a:prstDash val="solid"/>
+          </a:ln>
+        </p:spPr>
+        <p:txBody>
+          <a:bodyPr xmlns:a="http://schemas.openxmlformats.org/drawingml/2006/main" wrap="square" lIns="0" tIns="0" rIns="0" bIns="0" anchor="t">
+            <a:normAutofit fontScale="100000"/>
+          </a:bodyPr>
+          <a:lstStyle xmlns:a="http://schemas.openxmlformats.org/drawingml/2006/main"/>
+          <a:p xmlns:a="http://schemas.openxmlformats.org/drawingml/2006/main">
+            <a:pPr algn="l">
+              <a:buNone/>
+              <a:defRPr sz="1950" b="1">
+                <a:solidFill>
+                  <a:srgbClr val="273548"/>
+                </a:solidFill>
+                <a:latin typeface="Arial"/>
+                <a:ea typeface="Arial"/>
+                <a:cs typeface="Arial"/>
+              </a:defRPr>
+            </a:pPr>
+            <a:r>
+              <a:rPr sz="1950" b="1">
+                <a:solidFill>
+                  <a:srgbClr val="273548"/>
+                </a:solidFill>
+                <a:latin typeface="Arial"/>
+                <a:ea typeface="Arial"/>
+                <a:cs typeface="Arial"/>
+              </a:rPr>
+              <a:t>20 prior sessions</a:t>
+            </a:r>
+          </a:p>
+        </p:txBody>
+      </p:sp>
+      <p:sp>
+        <p:nvSpPr>
+          <p:cNvPr id="9" name="">
+            <a:extLst xmlns:a="http://schemas.openxmlformats.org/drawingml/2006/main">
+              <a:ext uri="{FF2B5EF4-FFF2-40B4-BE49-F238E27FC236}">
+                <a16:creationId xmlns:a16="http://schemas.microsoft.com/office/drawing/2014/main" id="{3E0B76F2-4514-4DD8-934B-ABE42A34E950}"/>
+              </a:ext>
+            </a:extLst>
+          </p:cNvPr>
+          <p:cNvSpPr>
+            <a:spLocks xmlns:a="http://schemas.openxmlformats.org/drawingml/2006/main" noGrp="1"/>
+          </p:cNvSpPr>
+          <p:nvPr/>
+        </p:nvSpPr>
+        <p:spPr>
+          <a:xfrm xmlns:a="http://schemas.openxmlformats.org/drawingml/2006/main">
+            <a:off x="8096250" y="1581150"/>
+            <a:ext cx="3333750" cy="704850"/>
+          </a:xfrm>
+          <a:prstGeom xmlns:a="http://schemas.openxmlformats.org/drawingml/2006/main" prst="rect">
+            <a:avLst/>
+          </a:prstGeom>
+          <a:noFill xmlns:a="http://schemas.openxmlformats.org/drawingml/2006/main"/>
+          <a:ln xmlns:a="http://schemas.openxmlformats.org/drawingml/2006/main" w="0">
+            <a:noFill/>
+            <a:prstDash val="solid"/>
+          </a:ln>
+        </p:spPr>
+        <p:txBody>
+          <a:bodyPr xmlns:a="http://schemas.openxmlformats.org/drawingml/2006/main" wrap="square" lIns="0" tIns="0" rIns="0" bIns="0" anchor="t">
+            <a:normAutofit fontScale="100000"/>
+          </a:bodyPr>
+          <a:lstStyle xmlns:a="http://schemas.openxmlformats.org/drawingml/2006/main"/>
+          <a:p xmlns:a="http://schemas.openxmlformats.org/drawingml/2006/main">
+            <a:pPr algn="l">
+              <a:buNone/>
+              <a:defRPr sz="1425" b="0">
+                <a:solidFill>
+                  <a:srgbClr val="667384"/>
+                </a:solidFill>
+                <a:latin typeface="Arial"/>
+                <a:ea typeface="Arial"/>
+                <a:cs typeface="Arial"/>
+              </a:defRPr>
+            </a:pPr>
+            <a:r>
+              <a:rPr sz="1425" b="0">
+                <a:solidFill>
+                  <a:srgbClr val="667384"/>
+                </a:solidFill>
+                <a:latin typeface="Arial"/>
+                <a:ea typeface="Arial"/>
+                <a:cs typeface="Arial"/>
+              </a:rPr>
+              <a:t>negative cumulative log return</a:t>
+            </a:r>
+          </a:p>
+        </p:txBody>
+      </p:sp>
+      <p:sp>
+        <p:nvSpPr>
+          <p:cNvPr id="10" name="">
+            <a:extLst xmlns:a="http://schemas.openxmlformats.org/drawingml/2006/main">
+              <a:ext uri="{FF2B5EF4-FFF2-40B4-BE49-F238E27FC236}">
+                <a16:creationId xmlns:a16="http://schemas.microsoft.com/office/drawing/2014/main" id="{294777C3-6D2F-4277-840E-7E984FB4554D}"/>
+              </a:ext>
+            </a:extLst>
+          </p:cNvPr>
+          <p:cNvSpPr>
+            <a:spLocks xmlns:a="http://schemas.openxmlformats.org/drawingml/2006/main" noGrp="1"/>
+          </p:cNvSpPr>
+          <p:nvPr/>
+        </p:nvSpPr>
+        <p:spPr>
+          <a:xfrm xmlns:a="http://schemas.openxmlformats.org/drawingml/2006/main">
+            <a:off x="876300" y="2590800"/>
+            <a:ext cx="10553700" cy="9525"/>
+          </a:xfrm>
+          <a:prstGeom xmlns:a="http://schemas.openxmlformats.org/drawingml/2006/main" prst="rect">
+            <a:avLst/>
+          </a:prstGeom>
+          <a:solidFill xmlns:a="http://schemas.openxmlformats.org/drawingml/2006/main">
+            <a:srgbClr val="B8BCC4"/>
+          </a:solidFill>
+          <a:ln xmlns:a="http://schemas.openxmlformats.org/drawingml/2006/main" w="0">
+            <a:solidFill>
+              <a:srgbClr val="B8BCC4"/>
+            </a:solidFill>
+            <a:prstDash val="solid"/>
+          </a:ln>
+        </p:spPr>
+      </p:sp>
+      <p:sp>
+        <p:nvSpPr>
+          <p:cNvPr id="11" name="">
+            <a:extLst xmlns:a="http://schemas.openxmlformats.org/drawingml/2006/main">
+              <a:ext uri="{FF2B5EF4-FFF2-40B4-BE49-F238E27FC236}">
+                <a16:creationId xmlns:a16="http://schemas.microsoft.com/office/drawing/2014/main" id="{F894CF3F-AD63-423C-8F01-64C507896579}"/>
+              </a:ext>
+            </a:extLst>
+          </p:cNvPr>
+          <p:cNvSpPr>
+            <a:spLocks xmlns:a="http://schemas.openxmlformats.org/drawingml/2006/main" noGrp="1"/>
+          </p:cNvSpPr>
+          <p:nvPr/>
+        </p:nvSpPr>
+        <p:spPr>
+          <a:xfrm xmlns:a="http://schemas.openxmlformats.org/drawingml/2006/main">
+            <a:off x="552450" y="2800350"/>
+            <a:ext cx="95250" cy="895350"/>
+          </a:xfrm>
+          <a:prstGeom xmlns:a="http://schemas.openxmlformats.org/drawingml/2006/main" prst="rect">
+            <a:avLst/>
+          </a:prstGeom>
+          <a:solidFill xmlns:a="http://schemas.openxmlformats.org/drawingml/2006/main">
+            <a:srgbClr val="2A9D6F"/>
+          </a:solidFill>
+          <a:ln xmlns:a="http://schemas.openxmlformats.org/drawingml/2006/main" w="0">
+            <a:solidFill>
+              <a:srgbClr val="2A9D6F"/>
+            </a:solidFill>
+            <a:prstDash val="solid"/>
+          </a:ln>
+        </p:spPr>
+      </p:sp>
+      <p:sp>
+        <p:nvSpPr>
+          <p:cNvPr id="12" name="">
+            <a:extLst xmlns:a="http://schemas.openxmlformats.org/drawingml/2006/main">
+              <a:ext uri="{FF2B5EF4-FFF2-40B4-BE49-F238E27FC236}">
+                <a16:creationId xmlns:a16="http://schemas.microsoft.com/office/drawing/2014/main" id="{D3953D03-6A7A-4FEE-B242-02BF0319C169}"/>
+              </a:ext>
+            </a:extLst>
+          </p:cNvPr>
+          <p:cNvSpPr>
+            <a:spLocks xmlns:a="http://schemas.openxmlformats.org/drawingml/2006/main" noGrp="1"/>
+          </p:cNvSpPr>
+          <p:nvPr/>
+        </p:nvSpPr>
+        <p:spPr>
+          <a:xfrm xmlns:a="http://schemas.openxmlformats.org/drawingml/2006/main">
+            <a:off x="876300" y="2781300"/>
+            <a:ext cx="2095500" cy="285750"/>
+          </a:xfrm>
+          <a:prstGeom xmlns:a="http://schemas.openxmlformats.org/drawingml/2006/main" prst="rect">
+            <a:avLst/>
+          </a:prstGeom>
+          <a:noFill xmlns:a="http://schemas.openxmlformats.org/drawingml/2006/main"/>
+          <a:ln xmlns:a="http://schemas.openxmlformats.org/drawingml/2006/main" w="0">
+            <a:noFill/>
+            <a:prstDash val="solid"/>
+          </a:ln>
+        </p:spPr>
+        <p:txBody>
+          <a:bodyPr xmlns:a="http://schemas.openxmlformats.org/drawingml/2006/main" wrap="square" lIns="0" tIns="0" rIns="0" bIns="0" anchor="t">
+            <a:normAutofit fontScale="100000"/>
+          </a:bodyPr>
+          <a:lstStyle xmlns:a="http://schemas.openxmlformats.org/drawingml/2006/main"/>
+          <a:p xmlns:a="http://schemas.openxmlformats.org/drawingml/2006/main">
+            <a:pPr algn="l">
+              <a:buNone/>
+              <a:defRPr sz="1350" b="1">
+                <a:solidFill>
+                  <a:srgbClr val="2A9D6F"/>
+                </a:solidFill>
+                <a:latin typeface="Arial"/>
+                <a:ea typeface="Arial"/>
+                <a:cs typeface="Arial"/>
+              </a:defRPr>
+            </a:pPr>
+            <a:r>
+              <a:rPr sz="1350" b="1">
+                <a:solidFill>
+                  <a:srgbClr val="2A9D6F"/>
+                </a:solidFill>
+                <a:latin typeface="Arial"/>
+                <a:ea typeface="Arial"/>
+                <a:cs typeface="Arial"/>
+              </a:rPr>
+              <a:t>STATE</a:t>
+            </a:r>
+          </a:p>
+        </p:txBody>
+      </p:sp>
+      <p:sp>
+        <p:nvSpPr>
+          <p:cNvPr id="13" name="">
+            <a:extLst xmlns:a="http://schemas.openxmlformats.org/drawingml/2006/main">
+              <a:ext uri="{FF2B5EF4-FFF2-40B4-BE49-F238E27FC236}">
+                <a16:creationId xmlns:a16="http://schemas.microsoft.com/office/drawing/2014/main" id="{52D1DBE8-EAF6-4492-89E7-5C97A3A6A395}"/>
+              </a:ext>
+            </a:extLst>
+          </p:cNvPr>
+          <p:cNvSpPr>
+            <a:spLocks xmlns:a="http://schemas.openxmlformats.org/drawingml/2006/main" noGrp="1"/>
+          </p:cNvSpPr>
+          <p:nvPr/>
+        </p:nvSpPr>
+        <p:spPr>
+          <a:xfrm xmlns:a="http://schemas.openxmlformats.org/drawingml/2006/main">
+            <a:off x="3105150" y="2762250"/>
+            <a:ext cx="4762500" cy="419100"/>
+          </a:xfrm>
+          <a:prstGeom xmlns:a="http://schemas.openxmlformats.org/drawingml/2006/main" prst="rect">
+            <a:avLst/>
+          </a:prstGeom>
+          <a:noFill xmlns:a="http://schemas.openxmlformats.org/drawingml/2006/main"/>
+          <a:ln xmlns:a="http://schemas.openxmlformats.org/drawingml/2006/main" w="0">
+            <a:noFill/>
+            <a:prstDash val="solid"/>
+          </a:ln>
+        </p:spPr>
+        <p:txBody>
+          <a:bodyPr xmlns:a="http://schemas.openxmlformats.org/drawingml/2006/main" wrap="square" lIns="0" tIns="0" rIns="0" bIns="0" anchor="t">
+            <a:normAutofit fontScale="100000"/>
+          </a:bodyPr>
+          <a:lstStyle xmlns:a="http://schemas.openxmlformats.org/drawingml/2006/main"/>
+          <a:p xmlns:a="http://schemas.openxmlformats.org/drawingml/2006/main">
+            <a:pPr algn="l">
+              <a:buNone/>
+              <a:defRPr sz="1950" b="1">
+                <a:solidFill>
+                  <a:srgbClr val="273548"/>
+                </a:solidFill>
+                <a:latin typeface="Arial"/>
+                <a:ea typeface="Arial"/>
+                <a:cs typeface="Arial"/>
+              </a:defRPr>
+            </a:pPr>
+            <a:r>
+              <a:rPr sz="1950" b="1">
+                <a:solidFill>
+                  <a:srgbClr val="273548"/>
+                </a:solidFill>
+                <a:latin typeface="Arial"/>
+                <a:ea typeface="Arial"/>
+                <a:cs typeface="Arial"/>
+              </a:rPr>
+              <a:t>Signed ER20 down</a:t>
+            </a:r>
+          </a:p>
+        </p:txBody>
+      </p:sp>
+      <p:sp>
+        <p:nvSpPr>
+          <p:cNvPr id="14" name="">
+            <a:extLst xmlns:a="http://schemas.openxmlformats.org/drawingml/2006/main">
+              <a:ext uri="{FF2B5EF4-FFF2-40B4-BE49-F238E27FC236}">
+                <a16:creationId xmlns:a16="http://schemas.microsoft.com/office/drawing/2014/main" id="{2CAF0156-C9E6-4210-8A8A-BFEDD044631B}"/>
+              </a:ext>
+            </a:extLst>
+          </p:cNvPr>
+          <p:cNvSpPr>
+            <a:spLocks xmlns:a="http://schemas.openxmlformats.org/drawingml/2006/main" noGrp="1"/>
+          </p:cNvSpPr>
+          <p:nvPr/>
+        </p:nvSpPr>
+        <p:spPr>
+          <a:xfrm xmlns:a="http://schemas.openxmlformats.org/drawingml/2006/main">
+            <a:off x="8096250" y="2781300"/>
+            <a:ext cx="3333750" cy="704850"/>
+          </a:xfrm>
+          <a:prstGeom xmlns:a="http://schemas.openxmlformats.org/drawingml/2006/main" prst="rect">
+            <a:avLst/>
+          </a:prstGeom>
+          <a:noFill xmlns:a="http://schemas.openxmlformats.org/drawingml/2006/main"/>
+          <a:ln xmlns:a="http://schemas.openxmlformats.org/drawingml/2006/main" w="0">
+            <a:noFill/>
+            <a:prstDash val="solid"/>
+          </a:ln>
+        </p:spPr>
+        <p:txBody>
+          <a:bodyPr xmlns:a="http://schemas.openxmlformats.org/drawingml/2006/main" wrap="square" lIns="0" tIns="0" rIns="0" bIns="0" anchor="t">
+            <a:normAutofit fontScale="100000"/>
+          </a:bodyPr>
+          <a:lstStyle xmlns:a="http://schemas.openxmlformats.org/drawingml/2006/main"/>
+          <a:p xmlns:a="http://schemas.openxmlformats.org/drawingml/2006/main">
+            <a:pPr algn="l">
+              <a:buNone/>
+              <a:defRPr sz="1425" b="0">
+                <a:solidFill>
+                  <a:srgbClr val="667384"/>
+                </a:solidFill>
+                <a:latin typeface="Arial"/>
+                <a:ea typeface="Arial"/>
+                <a:cs typeface="Arial"/>
+              </a:defRPr>
+            </a:pPr>
+            <a:r>
+              <a:rPr sz="1425" b="0">
+                <a:solidFill>
+                  <a:srgbClr val="667384"/>
+                </a:solidFill>
+                <a:latin typeface="Arial"/>
+                <a:ea typeface="Arial"/>
+                <a:cs typeface="Arial"/>
+              </a:rPr>
+              <a:t>known at the anchor</a:t>
+            </a:r>
+          </a:p>
+        </p:txBody>
+      </p:sp>
+      <p:sp>
+        <p:nvSpPr>
+          <p:cNvPr id="15" name="">
+            <a:extLst xmlns:a="http://schemas.openxmlformats.org/drawingml/2006/main">
+              <a:ext uri="{FF2B5EF4-FFF2-40B4-BE49-F238E27FC236}">
+                <a16:creationId xmlns:a16="http://schemas.microsoft.com/office/drawing/2014/main" id="{B126165D-5B65-44DB-99BD-15ED33F9B90F}"/>
+              </a:ext>
+            </a:extLst>
+          </p:cNvPr>
+          <p:cNvSpPr>
+            <a:spLocks xmlns:a="http://schemas.openxmlformats.org/drawingml/2006/main" noGrp="1"/>
+          </p:cNvSpPr>
+          <p:nvPr/>
+        </p:nvSpPr>
+        <p:spPr>
+          <a:xfrm xmlns:a="http://schemas.openxmlformats.org/drawingml/2006/main">
+            <a:off x="876300" y="3790950"/>
+            <a:ext cx="10553700" cy="9525"/>
+          </a:xfrm>
+          <a:prstGeom xmlns:a="http://schemas.openxmlformats.org/drawingml/2006/main" prst="rect">
+            <a:avLst/>
+          </a:prstGeom>
+          <a:solidFill xmlns:a="http://schemas.openxmlformats.org/drawingml/2006/main">
+            <a:srgbClr val="B8BCC4"/>
+          </a:solidFill>
+          <a:ln xmlns:a="http://schemas.openxmlformats.org/drawingml/2006/main" w="0">
+            <a:solidFill>
+              <a:srgbClr val="B8BCC4"/>
+            </a:solidFill>
+            <a:prstDash val="solid"/>
+          </a:ln>
+        </p:spPr>
+      </p:sp>
+      <p:sp>
+        <p:nvSpPr>
+          <p:cNvPr id="16" name="">
+            <a:extLst xmlns:a="http://schemas.openxmlformats.org/drawingml/2006/main">
+              <a:ext uri="{FF2B5EF4-FFF2-40B4-BE49-F238E27FC236}">
+                <a16:creationId xmlns:a16="http://schemas.microsoft.com/office/drawing/2014/main" id="{7DC0911F-9587-4B19-84C6-11974DB2A91C}"/>
+              </a:ext>
+            </a:extLst>
+          </p:cNvPr>
+          <p:cNvSpPr>
+            <a:spLocks xmlns:a="http://schemas.openxmlformats.org/drawingml/2006/main" noGrp="1"/>
+          </p:cNvSpPr>
+          <p:nvPr/>
+        </p:nvSpPr>
+        <p:spPr>
+          <a:xfrm xmlns:a="http://schemas.openxmlformats.org/drawingml/2006/main">
+            <a:off x="552450" y="4000500"/>
+            <a:ext cx="95250" cy="895350"/>
+          </a:xfrm>
+          <a:prstGeom xmlns:a="http://schemas.openxmlformats.org/drawingml/2006/main" prst="rect">
+            <a:avLst/>
+          </a:prstGeom>
+          <a:solidFill xmlns:a="http://schemas.openxmlformats.org/drawingml/2006/main">
+            <a:srgbClr val="3D8DFF"/>
+          </a:solidFill>
+          <a:ln xmlns:a="http://schemas.openxmlformats.org/drawingml/2006/main" w="0">
+            <a:solidFill>
+              <a:srgbClr val="3D8DFF"/>
+            </a:solidFill>
+            <a:prstDash val="solid"/>
+          </a:ln>
+        </p:spPr>
+      </p:sp>
+      <p:sp>
+        <p:nvSpPr>
+          <p:cNvPr id="17" name="">
+            <a:extLst xmlns:a="http://schemas.openxmlformats.org/drawingml/2006/main">
+              <a:ext uri="{FF2B5EF4-FFF2-40B4-BE49-F238E27FC236}">
+                <a16:creationId xmlns:a16="http://schemas.microsoft.com/office/drawing/2014/main" id="{DAB53991-F50C-4B95-9F23-DAE86BCEDF3B}"/>
+              </a:ext>
+            </a:extLst>
+          </p:cNvPr>
+          <p:cNvSpPr>
+            <a:spLocks xmlns:a="http://schemas.openxmlformats.org/drawingml/2006/main" noGrp="1"/>
+          </p:cNvSpPr>
+          <p:nvPr/>
+        </p:nvSpPr>
+        <p:spPr>
+          <a:xfrm xmlns:a="http://schemas.openxmlformats.org/drawingml/2006/main">
+            <a:off x="876300" y="3981450"/>
+            <a:ext cx="2095500" cy="285750"/>
+          </a:xfrm>
+          <a:prstGeom xmlns:a="http://schemas.openxmlformats.org/drawingml/2006/main" prst="rect">
+            <a:avLst/>
+          </a:prstGeom>
+          <a:noFill xmlns:a="http://schemas.openxmlformats.org/drawingml/2006/main"/>
+          <a:ln xmlns:a="http://schemas.openxmlformats.org/drawingml/2006/main" w="0">
+            <a:noFill/>
+            <a:prstDash val="solid"/>
+          </a:ln>
+        </p:spPr>
+        <p:txBody>
+          <a:bodyPr xmlns:a="http://schemas.openxmlformats.org/drawingml/2006/main" wrap="square" lIns="0" tIns="0" rIns="0" bIns="0" anchor="t">
+            <a:normAutofit fontScale="100000"/>
+          </a:bodyPr>
+          <a:lstStyle xmlns:a="http://schemas.openxmlformats.org/drawingml/2006/main"/>
+          <a:p xmlns:a="http://schemas.openxmlformats.org/drawingml/2006/main">
+            <a:pPr algn="l">
+              <a:buNone/>
+              <a:defRPr sz="1350" b="1">
+                <a:solidFill>
+                  <a:srgbClr val="3D8DFF"/>
+                </a:solidFill>
+                <a:latin typeface="Arial"/>
+                <a:ea typeface="Arial"/>
+                <a:cs typeface="Arial"/>
+              </a:defRPr>
+            </a:pPr>
+            <a:r>
+              <a:rPr sz="1350" b="1">
+                <a:solidFill>
+                  <a:srgbClr val="3D8DFF"/>
+                </a:solidFill>
+                <a:latin typeface="Arial"/>
+                <a:ea typeface="Arial"/>
+                <a:cs typeface="Arial"/>
+              </a:rPr>
+              <a:t>FUTURE</a:t>
+            </a:r>
+          </a:p>
+        </p:txBody>
+      </p:sp>
+      <p:sp>
+        <p:nvSpPr>
+          <p:cNvPr id="18" name="">
+            <a:extLst xmlns:a="http://schemas.openxmlformats.org/drawingml/2006/main">
+              <a:ext uri="{FF2B5EF4-FFF2-40B4-BE49-F238E27FC236}">
+                <a16:creationId xmlns:a16="http://schemas.microsoft.com/office/drawing/2014/main" id="{5DFACF3B-08BC-4148-A40A-2004DFB81D71}"/>
+              </a:ext>
+            </a:extLst>
+          </p:cNvPr>
+          <p:cNvSpPr>
+            <a:spLocks xmlns:a="http://schemas.openxmlformats.org/drawingml/2006/main" noGrp="1"/>
+          </p:cNvSpPr>
+          <p:nvPr/>
+        </p:nvSpPr>
+        <p:spPr>
+          <a:xfrm xmlns:a="http://schemas.openxmlformats.org/drawingml/2006/main">
+            <a:off x="3105150" y="3962400"/>
+            <a:ext cx="4762500" cy="419100"/>
+          </a:xfrm>
+          <a:prstGeom xmlns:a="http://schemas.openxmlformats.org/drawingml/2006/main" prst="rect">
+            <a:avLst/>
+          </a:prstGeom>
+          <a:noFill xmlns:a="http://schemas.openxmlformats.org/drawingml/2006/main"/>
+          <a:ln xmlns:a="http://schemas.openxmlformats.org/drawingml/2006/main" w="0">
+            <a:noFill/>
+            <a:prstDash val="solid"/>
+          </a:ln>
+        </p:spPr>
+        <p:txBody>
+          <a:bodyPr xmlns:a="http://schemas.openxmlformats.org/drawingml/2006/main" wrap="square" lIns="0" tIns="0" rIns="0" bIns="0" anchor="t">
+            <a:normAutofit fontScale="100000"/>
+          </a:bodyPr>
+          <a:lstStyle xmlns:a="http://schemas.openxmlformats.org/drawingml/2006/main"/>
+          <a:p xmlns:a="http://schemas.openxmlformats.org/drawingml/2006/main">
+            <a:pPr algn="l">
+              <a:buNone/>
+              <a:defRPr sz="1950" b="1">
+                <a:solidFill>
+                  <a:srgbClr val="273548"/>
+                </a:solidFill>
+                <a:latin typeface="Arial"/>
+                <a:ea typeface="Arial"/>
+                <a:cs typeface="Arial"/>
+              </a:defRPr>
+            </a:pPr>
+            <a:r>
+              <a:rPr sz="1950" b="1">
+                <a:solidFill>
+                  <a:srgbClr val="273548"/>
+                </a:solidFill>
+                <a:latin typeface="Arial"/>
+                <a:ea typeface="Arial"/>
+                <a:cs typeface="Arial"/>
+              </a:rPr>
+              <a:t>Six disjoint blocks</a:t>
+            </a:r>
+          </a:p>
+        </p:txBody>
+      </p:sp>
+      <p:sp>
+        <p:nvSpPr>
+          <p:cNvPr id="19" name="">
+            <a:extLst xmlns:a="http://schemas.openxmlformats.org/drawingml/2006/main">
+              <a:ext uri="{FF2B5EF4-FFF2-40B4-BE49-F238E27FC236}">
+                <a16:creationId xmlns:a16="http://schemas.microsoft.com/office/drawing/2014/main" id="{C907D23B-44A2-43C4-9658-4C6E38430BF5}"/>
+              </a:ext>
+            </a:extLst>
+          </p:cNvPr>
+          <p:cNvSpPr>
+            <a:spLocks xmlns:a="http://schemas.openxmlformats.org/drawingml/2006/main" noGrp="1"/>
+          </p:cNvSpPr>
+          <p:nvPr/>
+        </p:nvSpPr>
+        <p:spPr>
+          <a:xfrm xmlns:a="http://schemas.openxmlformats.org/drawingml/2006/main">
+            <a:off x="8096250" y="3981450"/>
+            <a:ext cx="3333750" cy="704850"/>
+          </a:xfrm>
+          <a:prstGeom xmlns:a="http://schemas.openxmlformats.org/drawingml/2006/main" prst="rect">
+            <a:avLst/>
+          </a:prstGeom>
+          <a:noFill xmlns:a="http://schemas.openxmlformats.org/drawingml/2006/main"/>
+          <a:ln xmlns:a="http://schemas.openxmlformats.org/drawingml/2006/main" w="0">
+            <a:noFill/>
+            <a:prstDash val="solid"/>
+          </a:ln>
+        </p:spPr>
+        <p:txBody>
+          <a:bodyPr xmlns:a="http://schemas.openxmlformats.org/drawingml/2006/main" wrap="square" lIns="0" tIns="0" rIns="0" bIns="0" anchor="t">
+            <a:normAutofit fontScale="100000"/>
+          </a:bodyPr>
+          <a:lstStyle xmlns:a="http://schemas.openxmlformats.org/drawingml/2006/main"/>
+          <a:p xmlns:a="http://schemas.openxmlformats.org/drawingml/2006/main">
+            <a:pPr algn="l">
+              <a:buNone/>
+              <a:defRPr sz="1425" b="0">
+                <a:solidFill>
+                  <a:srgbClr val="667384"/>
+                </a:solidFill>
+                <a:latin typeface="Arial"/>
+                <a:ea typeface="Arial"/>
+                <a:cs typeface="Arial"/>
+              </a:defRPr>
+            </a:pPr>
+            <a:r>
+              <a:rPr sz="1425" b="0">
+                <a:solidFill>
+                  <a:srgbClr val="667384"/>
+                </a:solidFill>
+                <a:latin typeface="Arial"/>
+                <a:ea typeface="Arial"/>
+                <a:cs typeface="Arial"/>
+              </a:rPr>
+              <a:t>sessions 1 through 100</a:t>
+            </a:r>
+          </a:p>
+        </p:txBody>
+      </p:sp>
+      <p:sp>
+        <p:nvSpPr>
+          <p:cNvPr id="20" name="">
+            <a:extLst xmlns:a="http://schemas.openxmlformats.org/drawingml/2006/main">
+              <a:ext uri="{FF2B5EF4-FFF2-40B4-BE49-F238E27FC236}">
+                <a16:creationId xmlns:a16="http://schemas.microsoft.com/office/drawing/2014/main" id="{8042DFC4-7E22-47E6-8C53-1E63A8411C3A}"/>
+              </a:ext>
+            </a:extLst>
+          </p:cNvPr>
+          <p:cNvSpPr>
+            <a:spLocks xmlns:a="http://schemas.openxmlformats.org/drawingml/2006/main" noGrp="1"/>
+          </p:cNvSpPr>
+          <p:nvPr/>
+        </p:nvSpPr>
+        <p:spPr>
+          <a:xfrm xmlns:a="http://schemas.openxmlformats.org/drawingml/2006/main">
+            <a:off x="876300" y="4991100"/>
+            <a:ext cx="10553700" cy="9525"/>
+          </a:xfrm>
+          <a:prstGeom xmlns:a="http://schemas.openxmlformats.org/drawingml/2006/main" prst="rect">
+            <a:avLst/>
+          </a:prstGeom>
+          <a:solidFill xmlns:a="http://schemas.openxmlformats.org/drawingml/2006/main">
+            <a:srgbClr val="B8BCC4"/>
+          </a:solidFill>
+          <a:ln xmlns:a="http://schemas.openxmlformats.org/drawingml/2006/main" w="0">
+            <a:solidFill>
+              <a:srgbClr val="B8BCC4"/>
+            </a:solidFill>
+            <a:prstDash val="solid"/>
+          </a:ln>
+        </p:spPr>
+      </p:sp>
+      <p:sp>
+        <p:nvSpPr>
+          <p:cNvPr id="21" name="">
+            <a:extLst xmlns:a="http://schemas.openxmlformats.org/drawingml/2006/main">
+              <a:ext uri="{FF2B5EF4-FFF2-40B4-BE49-F238E27FC236}">
+                <a16:creationId xmlns:a16="http://schemas.microsoft.com/office/drawing/2014/main" id="{F4066D54-676B-4D0F-93B6-2152B57E41AF}"/>
+              </a:ext>
+            </a:extLst>
+          </p:cNvPr>
+          <p:cNvSpPr>
+            <a:spLocks xmlns:a="http://schemas.openxmlformats.org/drawingml/2006/main" noGrp="1"/>
+          </p:cNvSpPr>
+          <p:nvPr/>
+        </p:nvSpPr>
+        <p:spPr>
+          <a:xfrm xmlns:a="http://schemas.openxmlformats.org/drawingml/2006/main">
+            <a:off x="552450" y="5353050"/>
+            <a:ext cx="10877550" cy="781050"/>
+          </a:xfrm>
+          <a:prstGeom xmlns:a="http://schemas.openxmlformats.org/drawingml/2006/main" prst="rect">
+            <a:avLst/>
+          </a:prstGeom>
+          <a:solidFill xmlns:a="http://schemas.openxmlformats.org/drawingml/2006/main">
+            <a:srgbClr val="EAF5FB"/>
+          </a:solidFill>
+          <a:ln xmlns:a="http://schemas.openxmlformats.org/drawingml/2006/main" w="0">
+            <a:solidFill>
+              <a:srgbClr val="EAF5FB"/>
+            </a:solidFill>
+            <a:prstDash val="solid"/>
+          </a:ln>
+        </p:spPr>
+      </p:sp>
+      <p:sp>
+        <p:nvSpPr>
+          <p:cNvPr id="22" name="">
+            <a:extLst xmlns:a="http://schemas.openxmlformats.org/drawingml/2006/main">
+              <a:ext uri="{FF2B5EF4-FFF2-40B4-BE49-F238E27FC236}">
+                <a16:creationId xmlns:a16="http://schemas.microsoft.com/office/drawing/2014/main" id="{6E4C79AE-EB98-4B5B-B3D3-11ED0D4C729B}"/>
+              </a:ext>
+            </a:extLst>
+          </p:cNvPr>
+          <p:cNvSpPr>
+            <a:spLocks xmlns:a="http://schemas.openxmlformats.org/drawingml/2006/main" noGrp="1"/>
+          </p:cNvSpPr>
+          <p:nvPr/>
+        </p:nvSpPr>
+        <p:spPr>
+          <a:xfrm xmlns:a="http://schemas.openxmlformats.org/drawingml/2006/main">
+            <a:off x="781050" y="5524500"/>
+            <a:ext cx="2476500" cy="323850"/>
+          </a:xfrm>
+          <a:prstGeom xmlns:a="http://schemas.openxmlformats.org/drawingml/2006/main" prst="rect">
+            <a:avLst/>
+          </a:prstGeom>
+          <a:noFill xmlns:a="http://schemas.openxmlformats.org/drawingml/2006/main"/>
+          <a:ln xmlns:a="http://schemas.openxmlformats.org/drawingml/2006/main" w="0">
+            <a:noFill/>
+            <a:prstDash val="solid"/>
+          </a:ln>
+        </p:spPr>
+        <p:txBody>
+          <a:bodyPr xmlns:a="http://schemas.openxmlformats.org/drawingml/2006/main" wrap="square" lIns="0" tIns="0" rIns="0" bIns="0" anchor="t">
+            <a:normAutofit fontScale="100000"/>
+          </a:bodyPr>
+          <a:lstStyle xmlns:a="http://schemas.openxmlformats.org/drawingml/2006/main"/>
+          <a:p xmlns:a="http://schemas.openxmlformats.org/drawingml/2006/main">
+            <a:pPr algn="l">
+              <a:buNone/>
+              <a:defRPr sz="1725" b="1">
+                <a:solidFill>
+                  <a:srgbClr val="3D8DFF"/>
+                </a:solidFill>
+                <a:latin typeface="Arial"/>
+                <a:ea typeface="Arial"/>
+                <a:cs typeface="Arial"/>
+              </a:defRPr>
+            </a:pPr>
+            <a:r>
+              <a:rPr sz="1725" b="1">
+                <a:solidFill>
+                  <a:srgbClr val="3D8DFF"/>
+                </a:solidFill>
+                <a:latin typeface="Arial"/>
+                <a:ea typeface="Arial"/>
+                <a:cs typeface="Arial"/>
+              </a:rPr>
+              <a:t>Primary surface</a:t>
+            </a:r>
+          </a:p>
+        </p:txBody>
+      </p:sp>
+      <p:sp>
+        <p:nvSpPr>
+          <p:cNvPr id="23" name="">
+            <a:extLst xmlns:a="http://schemas.openxmlformats.org/drawingml/2006/main">
+              <a:ext uri="{FF2B5EF4-FFF2-40B4-BE49-F238E27FC236}">
+                <a16:creationId xmlns:a16="http://schemas.microsoft.com/office/drawing/2014/main" id="{3320D60E-6067-4236-80ED-A898A863026E}"/>
+              </a:ext>
+            </a:extLst>
+          </p:cNvPr>
+          <p:cNvSpPr>
+            <a:spLocks xmlns:a="http://schemas.openxmlformats.org/drawingml/2006/main" noGrp="1"/>
+          </p:cNvSpPr>
+          <p:nvPr/>
+        </p:nvSpPr>
+        <p:spPr>
+          <a:xfrm xmlns:a="http://schemas.openxmlformats.org/drawingml/2006/main">
+            <a:off x="3333750" y="5486400"/>
+            <a:ext cx="7810500" cy="419100"/>
+          </a:xfrm>
+          <a:prstGeom xmlns:a="http://schemas.openxmlformats.org/drawingml/2006/main" prst="rect">
+            <a:avLst/>
+          </a:prstGeom>
+          <a:noFill xmlns:a="http://schemas.openxmlformats.org/drawingml/2006/main"/>
+          <a:ln xmlns:a="http://schemas.openxmlformats.org/drawingml/2006/main" w="0">
+            <a:noFill/>
+            <a:prstDash val="solid"/>
+          </a:ln>
+        </p:spPr>
+        <p:txBody>
+          <a:bodyPr xmlns:a="http://schemas.openxmlformats.org/drawingml/2006/main" wrap="square" lIns="0" tIns="0" rIns="0" bIns="0" anchor="t">
+            <a:normAutofit fontScale="76389"/>
+          </a:bodyPr>
+          <a:lstStyle xmlns:a="http://schemas.openxmlformats.org/drawingml/2006/main"/>
+          <a:p xmlns:a="http://schemas.openxmlformats.org/drawingml/2006/main">
+            <a:pPr algn="l">
+              <a:buNone/>
+              <a:defRPr sz="1800" b="1">
+                <a:solidFill>
+                  <a:srgbClr val="273548"/>
+                </a:solidFill>
+                <a:latin typeface="Arial"/>
+                <a:ea typeface="Arial"/>
+                <a:cs typeface="Arial"/>
+              </a:defRPr>
+            </a:pPr>
+            <a:r>
+              <a:rPr sz="1800" b="1">
+                <a:solidFill>
+                  <a:srgbClr val="273548"/>
+                </a:solidFill>
+                <a:latin typeface="Arial"/>
+                <a:ea typeface="Arial"/>
+                <a:cs typeface="Arial"/>
+              </a:rPr>
+              <a:t>88 full-history stocks, equal-sector weighted. All 129 assets remain diagnostic; post-2023 stays sealed.</a:t>
+            </a:r>
+          </a:p>
+        </p:txBody>
+      </p:sp>
+    </p:spTree>
+    <p:extLst>
+      <p:ext uri="{BB962C8B-B14F-4D97-AF65-F5344CB8AC3E}">
+        <p14:creationId xmlns:p14="http://schemas.microsoft.com/office/powerpoint/2010/main" val="666536286"/>
+      </p:ext>
+    </p:extLst>
+  </p:cSld>
+</p:sld>
+</file>
+
+<file path=ppt/slides/slide9.xml><?xml version="1.0" encoding="utf-8"?>
+<p:sld xmlns:p="http://schemas.openxmlformats.org/presentationml/2006/main">
+  <p:cSld>
+    <p:bg>
+      <p:bgPr>
+        <a:solidFill xmlns:a="http://schemas.openxmlformats.org/drawingml/2006/main">
+          <a:srgbClr val="FFFFFF"/>
+        </a:solidFill>
+      </p:bgPr>
+    </p:bg>
+    <p:spTree>
+      <p:nvGrpSpPr>
+        <p:cNvPr id="1" name=""/>
+        <p:cNvGrpSpPr/>
+        <p:nvPr/>
+      </p:nvGrpSpPr>
+      <p:grpSpPr>
+        <a:xfrm xmlns:a="http://schemas.openxmlformats.org/drawingml/2006/main"/>
+      </p:grpSpPr>
+      <p:sp>
+        <p:nvSpPr>
+          <p:cNvPr id="24" name="section-11">
+            <a:extLst xmlns:a="http://schemas.openxmlformats.org/drawingml/2006/main">
+              <a:ext uri="{FF2B5EF4-FFF2-40B4-BE49-F238E27FC236}">
+                <a16:creationId xmlns:a16="http://schemas.microsoft.com/office/drawing/2014/main" id="{272ED433-B59C-436C-9DFB-4D317B90A13F}"/>
+              </a:ext>
+            </a:extLst>
+          </p:cNvPr>
+          <p:cNvSpPr>
+            <a:spLocks xmlns:a="http://schemas.openxmlformats.org/drawingml/2006/main" noGrp="1"/>
+          </p:cNvSpPr>
+          <p:nvPr/>
+        </p:nvSpPr>
+        <p:spPr>
+          <a:xfrm xmlns:a="http://schemas.openxmlformats.org/drawingml/2006/main">
+            <a:off x="457200" y="228600"/>
+            <a:ext cx="4191000" cy="228600"/>
+          </a:xfrm>
+          <a:prstGeom xmlns:a="http://schemas.openxmlformats.org/drawingml/2006/main" prst="rect">
+            <a:avLst/>
+          </a:prstGeom>
+          <a:noFill xmlns:a="http://schemas.openxmlformats.org/drawingml/2006/main"/>
+          <a:ln xmlns:a="http://schemas.openxmlformats.org/drawingml/2006/main" w="0">
+            <a:noFill/>
+            <a:prstDash val="solid"/>
+          </a:ln>
+        </p:spPr>
+        <p:txBody>
+          <a:bodyPr xmlns:a="http://schemas.openxmlformats.org/drawingml/2006/main" wrap="square" lIns="0" tIns="0" rIns="0" bIns="0" anchor="t">
+            <a:normAutofit fontScale="100000"/>
+          </a:bodyPr>
+          <a:lstStyle xmlns:a="http://schemas.openxmlformats.org/drawingml/2006/main"/>
+          <a:p xmlns:a="http://schemas.openxmlformats.org/drawingml/2006/main">
+            <a:pPr algn="l">
+              <a:buNone/>
+              <a:defRPr sz="1200" b="1">
+                <a:solidFill>
+                  <a:srgbClr val="667384"/>
+                </a:solidFill>
+                <a:latin typeface="Arial"/>
+                <a:ea typeface="Arial"/>
+                <a:cs typeface="Arial"/>
+              </a:defRPr>
+            </a:pPr>
+            <a:r>
+              <a:rPr sz="1200" b="1">
+                <a:solidFill>
+                  <a:srgbClr val="667384"/>
+                </a:solidFill>
+                <a:latin typeface="Arial"/>
+                <a:ea typeface="Arial"/>
+                <a:cs typeface="Arial"/>
+              </a:rPr>
+              <a:t>MEASUREMENT CONTRACT</a:t>
+            </a:r>
+          </a:p>
+        </p:txBody>
+      </p:sp>
+      <p:sp>
+        <p:nvSpPr>
+          <p:cNvPr id="2" name="title-11">
+            <a:extLst xmlns:a="http://schemas.openxmlformats.org/drawingml/2006/main">
+              <a:ext uri="{FF2B5EF4-FFF2-40B4-BE49-F238E27FC236}">
+                <a16:creationId xmlns:a16="http://schemas.microsoft.com/office/drawing/2014/main" id="{3EC40708-7E00-432C-8ECE-907FA5705292}"/>
+              </a:ext>
+            </a:extLst>
+          </p:cNvPr>
+          <p:cNvSpPr>
+            <a:spLocks xmlns:a="http://schemas.openxmlformats.org/drawingml/2006/main" noGrp="1"/>
+          </p:cNvSpPr>
+          <p:nvPr/>
+        </p:nvSpPr>
+        <p:spPr>
+          <a:xfrm xmlns:a="http://schemas.openxmlformats.org/drawingml/2006/main">
+            <a:off x="457200" y="533400"/>
+            <a:ext cx="11277600" cy="628650"/>
+          </a:xfrm>
+          <a:prstGeom xmlns:a="http://schemas.openxmlformats.org/drawingml/2006/main" prst="rect">
+            <a:avLst/>
+          </a:prstGeom>
+          <a:noFill xmlns:a="http://schemas.openxmlformats.org/drawingml/2006/main"/>
+          <a:ln xmlns:a="http://schemas.openxmlformats.org/drawingml/2006/main" w="0">
+            <a:noFill/>
+            <a:prstDash val="solid"/>
+          </a:ln>
+        </p:spPr>
+        <p:txBody>
+          <a:bodyPr xmlns:a="http://schemas.openxmlformats.org/drawingml/2006/main" wrap="square" lIns="0" tIns="0" rIns="0" bIns="0" anchor="t">
+            <a:normAutofit fontScale="100000"/>
+          </a:bodyPr>
+          <a:lstStyle xmlns:a="http://schemas.openxmlformats.org/drawingml/2006/main"/>
+          <a:p xmlns:a="http://schemas.openxmlformats.org/drawingml/2006/main">
+            <a:pPr algn="l">
+              <a:buNone/>
+              <a:defRPr sz="3525" b="1">
+                <a:solidFill>
+                  <a:srgbClr val="000000"/>
+                </a:solidFill>
+                <a:latin typeface="Arial"/>
+                <a:ea typeface="Arial"/>
+                <a:cs typeface="Arial"/>
+              </a:defRPr>
+            </a:pPr>
+            <a:r>
+              <a:rPr sz="3525" b="1">
+                <a:solidFill>
+                  <a:srgbClr val="000000"/>
+                </a:solidFill>
+                <a:latin typeface="Arial"/>
+                <a:ea typeface="Arial"/>
+                <a:cs typeface="Arial"/>
+              </a:rPr>
+              <a:t>Every block uses the same historical anchors</a:t>
+            </a:r>
+          </a:p>
+        </p:txBody>
+      </p:sp>
+      <p:sp>
+        <p:nvSpPr>
+          <p:cNvPr id="3" name="">
+            <a:extLst xmlns:a="http://schemas.openxmlformats.org/drawingml/2006/main">
+              <a:ext uri="{FF2B5EF4-FFF2-40B4-BE49-F238E27FC236}">
+                <a16:creationId xmlns:a16="http://schemas.microsoft.com/office/drawing/2014/main" id="{D5CA0FCE-75E8-41EF-A76A-23E9E2120C6A}"/>
+              </a:ext>
+            </a:extLst>
+          </p:cNvPr>
+          <p:cNvSpPr>
+            <a:spLocks xmlns:a="http://schemas.openxmlformats.org/drawingml/2006/main" noGrp="1"/>
+          </p:cNvSpPr>
+          <p:nvPr/>
+        </p:nvSpPr>
+        <p:spPr>
+          <a:xfrm xmlns:a="http://schemas.openxmlformats.org/drawingml/2006/main">
+            <a:off x="457200" y="1200150"/>
+            <a:ext cx="11277600" cy="19050"/>
+          </a:xfrm>
+          <a:prstGeom xmlns:a="http://schemas.openxmlformats.org/drawingml/2006/main" prst="rect">
+            <a:avLst/>
+          </a:prstGeom>
+          <a:solidFill xmlns:a="http://schemas.openxmlformats.org/drawingml/2006/main">
+            <a:srgbClr val="B8BCC4"/>
+          </a:solidFill>
+          <a:ln xmlns:a="http://schemas.openxmlformats.org/drawingml/2006/main" w="0">
+            <a:solidFill>
+              <a:srgbClr val="B8BCC4"/>
+            </a:solidFill>
+            <a:prstDash val="solid"/>
+          </a:ln>
+        </p:spPr>
+      </p:sp>
+      <p:sp>
+        <p:nvSpPr>
+          <p:cNvPr id="4" name="footer-left-11">
+            <a:extLst xmlns:a="http://schemas.openxmlformats.org/drawingml/2006/main">
+              <a:ext uri="{FF2B5EF4-FFF2-40B4-BE49-F238E27FC236}">
+                <a16:creationId xmlns:a16="http://schemas.microsoft.com/office/drawing/2014/main" id="{700DA765-80E0-4197-8700-00D867B86FA2}"/>
+              </a:ext>
+            </a:extLst>
+          </p:cNvPr>
+          <p:cNvSpPr>
+            <a:spLocks xmlns:a="http://schemas.openxmlformats.org/drawingml/2006/main" noGrp="1"/>
+          </p:cNvSpPr>
+          <p:nvPr/>
+        </p:nvSpPr>
+        <p:spPr>
+          <a:xfrm xmlns:a="http://schemas.openxmlformats.org/drawingml/2006/main">
+            <a:off x="457200" y="6515100"/>
+            <a:ext cx="3429000" cy="171450"/>
+          </a:xfrm>
+          <a:prstGeom xmlns:a="http://schemas.openxmlformats.org/drawingml/2006/main" prst="rect">
+            <a:avLst/>
+          </a:prstGeom>
+          <a:noFill xmlns:a="http://schemas.openxmlformats.org/drawingml/2006/main"/>
+          <a:ln xmlns:a="http://schemas.openxmlformats.org/drawingml/2006/main" w="0">
+            <a:noFill/>
+            <a:prstDash val="solid"/>
+          </a:ln>
+        </p:spPr>
+        <p:txBody>
+          <a:bodyPr xmlns:a="http://schemas.openxmlformats.org/drawingml/2006/main" wrap="square" lIns="0" tIns="0" rIns="0" bIns="0" anchor="t">
+            <a:normAutofit fontScale="100000"/>
+          </a:bodyPr>
+          <a:lstStyle xmlns:a="http://schemas.openxmlformats.org/drawingml/2006/main"/>
+          <a:p xmlns:a="http://schemas.openxmlformats.org/drawingml/2006/main">
+            <a:pPr algn="l">
+              <a:buNone/>
+              <a:defRPr sz="825" b="0">
+                <a:solidFill>
+                  <a:srgbClr val="64748B"/>
+                </a:solidFill>
+                <a:latin typeface="Arial"/>
+                <a:ea typeface="Arial"/>
+                <a:cs typeface="Arial"/>
+              </a:defRPr>
+            </a:pPr>
+            <a:r>
+              <a:rPr sz="825" b="0">
+                <a:solidFill>
+                  <a:srgbClr val="64748B"/>
+                </a:solidFill>
+                <a:latin typeface="Arial"/>
+                <a:ea typeface="Arial"/>
+                <a:cs typeface="Arial"/>
+              </a:rPr>
+              <a:t>Return geometry | common-sample timing test</a:t>
+            </a:r>
+          </a:p>
+        </p:txBody>
+      </p:sp>
+      <p:sp>
+        <p:nvSpPr>
+          <p:cNvPr id="5" name="footer-number-11">
+            <a:extLst xmlns:a="http://schemas.openxmlformats.org/drawingml/2006/main">
+              <a:ext uri="{FF2B5EF4-FFF2-40B4-BE49-F238E27FC236}">
+                <a16:creationId xmlns:a16="http://schemas.microsoft.com/office/drawing/2014/main" id="{83896276-4112-4532-AF7C-776C67C58B77}"/>
+              </a:ext>
+            </a:extLst>
+          </p:cNvPr>
+          <p:cNvSpPr>
+            <a:spLocks xmlns:a="http://schemas.openxmlformats.org/drawingml/2006/main" noGrp="1"/>
+          </p:cNvSpPr>
+          <p:nvPr/>
+        </p:nvSpPr>
+        <p:spPr>
+          <a:xfrm xmlns:a="http://schemas.openxmlformats.org/drawingml/2006/main">
+            <a:off x="10477500" y="6496050"/>
+            <a:ext cx="1257300" cy="190500"/>
+          </a:xfrm>
+          <a:prstGeom xmlns:a="http://schemas.openxmlformats.org/drawingml/2006/main" prst="rect">
+            <a:avLst/>
+          </a:prstGeom>
+          <a:noFill xmlns:a="http://schemas.openxmlformats.org/drawingml/2006/main"/>
+          <a:ln xmlns:a="http://schemas.openxmlformats.org/drawingml/2006/main" w="0">
+            <a:noFill/>
+            <a:prstDash val="solid"/>
+          </a:ln>
+        </p:spPr>
+        <p:txBody>
+          <a:bodyPr xmlns:a="http://schemas.openxmlformats.org/drawingml/2006/main" wrap="square" lIns="0" tIns="0" rIns="0" bIns="0" anchor="t">
+            <a:normAutofit fontScale="100000"/>
+          </a:bodyPr>
+          <a:lstStyle xmlns:a="http://schemas.openxmlformats.org/drawingml/2006/main"/>
+          <a:p xmlns:a="http://schemas.openxmlformats.org/drawingml/2006/main">
+            <a:pPr algn="r">
+              <a:buNone/>
+              <a:defRPr sz="1050" b="0">
+                <a:solidFill>
+                  <a:srgbClr val="667384"/>
+                </a:solidFill>
+                <a:latin typeface="Arial"/>
+                <a:ea typeface="Arial"/>
+                <a:cs typeface="Arial"/>
+              </a:defRPr>
+            </a:pPr>
+            <a:r>
+              <a:rPr sz="1050" b="0">
+                <a:solidFill>
+                  <a:srgbClr val="667384"/>
+                </a:solidFill>
+                <a:latin typeface="Arial"/>
+                <a:ea typeface="Arial"/>
+                <a:cs typeface="Arial"/>
+              </a:rPr>
+              <a:t>9</a:t>
+            </a:r>
+          </a:p>
+        </p:txBody>
+      </p:sp>
+      <p:sp>
+        <p:nvSpPr>
+          <p:cNvPr id="6" name="">
+            <a:extLst xmlns:a="http://schemas.openxmlformats.org/drawingml/2006/main">
+              <a:ext uri="{FF2B5EF4-FFF2-40B4-BE49-F238E27FC236}">
+                <a16:creationId xmlns:a16="http://schemas.microsoft.com/office/drawing/2014/main" id="{10F4BA85-46C5-47BD-BA74-EC806E663D58}"/>
+              </a:ext>
+            </a:extLst>
+          </p:cNvPr>
+          <p:cNvSpPr>
+            <a:spLocks xmlns:a="http://schemas.openxmlformats.org/drawingml/2006/main" noGrp="1"/>
+          </p:cNvSpPr>
+          <p:nvPr/>
+        </p:nvSpPr>
+        <p:spPr>
+          <a:xfrm xmlns:a="http://schemas.openxmlformats.org/drawingml/2006/main">
+            <a:off x="552450" y="1600200"/>
+            <a:ext cx="95250" cy="895350"/>
+          </a:xfrm>
+          <a:prstGeom xmlns:a="http://schemas.openxmlformats.org/drawingml/2006/main" prst="rect">
+            <a:avLst/>
+          </a:prstGeom>
+          <a:solidFill xmlns:a="http://schemas.openxmlformats.org/drawingml/2006/main">
+            <a:srgbClr val="E45756"/>
+          </a:solidFill>
+          <a:ln xmlns:a="http://schemas.openxmlformats.org/drawingml/2006/main" w="0">
+            <a:solidFill>
+              <a:srgbClr val="E45756"/>
+            </a:solidFill>
+            <a:prstDash val="solid"/>
+          </a:ln>
+        </p:spPr>
+      </p:sp>
+      <p:sp>
+        <p:nvSpPr>
+          <p:cNvPr id="7" name="">
+            <a:extLst xmlns:a="http://schemas.openxmlformats.org/drawingml/2006/main">
+              <a:ext uri="{FF2B5EF4-FFF2-40B4-BE49-F238E27FC236}">
+                <a16:creationId xmlns:a16="http://schemas.microsoft.com/office/drawing/2014/main" id="{7EF5B945-9D04-48FA-BA66-96DE813A9715}"/>
+              </a:ext>
+            </a:extLst>
+          </p:cNvPr>
+          <p:cNvSpPr>
+            <a:spLocks xmlns:a="http://schemas.openxmlformats.org/drawingml/2006/main" noGrp="1"/>
+          </p:cNvSpPr>
+          <p:nvPr/>
+        </p:nvSpPr>
+        <p:spPr>
+          <a:xfrm xmlns:a="http://schemas.openxmlformats.org/drawingml/2006/main">
+            <a:off x="876300" y="1581150"/>
+            <a:ext cx="2095500" cy="285750"/>
+          </a:xfrm>
+          <a:prstGeom xmlns:a="http://schemas.openxmlformats.org/drawingml/2006/main" prst="rect">
+            <a:avLst/>
+          </a:prstGeom>
+          <a:noFill xmlns:a="http://schemas.openxmlformats.org/drawingml/2006/main"/>
+          <a:ln xmlns:a="http://schemas.openxmlformats.org/drawingml/2006/main" w="0">
+            <a:noFill/>
+            <a:prstDash val="solid"/>
+          </a:ln>
+        </p:spPr>
+        <p:txBody>
+          <a:bodyPr xmlns:a="http://schemas.openxmlformats.org/drawingml/2006/main" wrap="square" lIns="0" tIns="0" rIns="0" bIns="0" anchor="t">
+            <a:normAutofit fontScale="100000"/>
+          </a:bodyPr>
+          <a:lstStyle xmlns:a="http://schemas.openxmlformats.org/drawingml/2006/main"/>
+          <a:p xmlns:a="http://schemas.openxmlformats.org/drawingml/2006/main">
+            <a:pPr algn="l">
+              <a:buNone/>
+              <a:defRPr sz="1350" b="1">
+                <a:solidFill>
+                  <a:srgbClr val="E45756"/>
+                </a:solidFill>
+                <a:latin typeface="Arial"/>
+                <a:ea typeface="Arial"/>
+                <a:cs typeface="Arial"/>
+              </a:defRPr>
+            </a:pPr>
+            <a:r>
+              <a:rPr sz="1350" b="1">
+                <a:solidFill>
+                  <a:srgbClr val="E45756"/>
+                </a:solidFill>
+                <a:latin typeface="Arial"/>
+                <a:ea typeface="Arial"/>
+                <a:cs typeface="Arial"/>
+              </a:rPr>
+              <a:t>COMMON SAMPLE</a:t>
+            </a:r>
+          </a:p>
+        </p:txBody>
+      </p:sp>
+      <p:sp>
+        <p:nvSpPr>
+          <p:cNvPr id="8" name="">
+            <a:extLst xmlns:a="http://schemas.openxmlformats.org/drawingml/2006/main">
+              <a:ext uri="{FF2B5EF4-FFF2-40B4-BE49-F238E27FC236}">
+                <a16:creationId xmlns:a16="http://schemas.microsoft.com/office/drawing/2014/main" id="{655CF75D-5F23-4C7F-BE9C-764036D0B9E8}"/>
+              </a:ext>
+            </a:extLst>
+          </p:cNvPr>
+          <p:cNvSpPr>
+            <a:spLocks xmlns:a="http://schemas.openxmlformats.org/drawingml/2006/main" noGrp="1"/>
+          </p:cNvSpPr>
+          <p:nvPr/>
+        </p:nvSpPr>
+        <p:spPr>
+          <a:xfrm xmlns:a="http://schemas.openxmlformats.org/drawingml/2006/main">
+            <a:off x="3105150" y="1562100"/>
+            <a:ext cx="4762500" cy="419100"/>
+          </a:xfrm>
+          <a:prstGeom xmlns:a="http://schemas.openxmlformats.org/drawingml/2006/main" prst="rect">
+            <a:avLst/>
+          </a:prstGeom>
+          <a:noFill xmlns:a="http://schemas.openxmlformats.org/drawingml/2006/main"/>
+          <a:ln xmlns:a="http://schemas.openxmlformats.org/drawingml/2006/main" w="0">
+            <a:noFill/>
+            <a:prstDash val="solid"/>
+          </a:ln>
+        </p:spPr>
+        <p:txBody>
+          <a:bodyPr xmlns:a="http://schemas.openxmlformats.org/drawingml/2006/main" wrap="square" lIns="0" tIns="0" rIns="0" bIns="0" anchor="t">
+            <a:normAutofit fontScale="100000"/>
+          </a:bodyPr>
+          <a:lstStyle xmlns:a="http://schemas.openxmlformats.org/drawingml/2006/main"/>
+          <a:p xmlns:a="http://schemas.openxmlformats.org/drawingml/2006/main">
+            <a:pPr algn="l">
+              <a:buNone/>
+              <a:defRPr sz="1950" b="1">
+                <a:solidFill>
+                  <a:srgbClr val="273548"/>
+                </a:solidFill>
+                <a:latin typeface="Arial"/>
+                <a:ea typeface="Arial"/>
+                <a:cs typeface="Arial"/>
+              </a:defRPr>
+            </a:pPr>
+            <a:r>
+              <a:rPr sz="1950" b="1">
+                <a:solidFill>
+                  <a:srgbClr val="273548"/>
+                </a:solidFill>
+                <a:latin typeface="Arial"/>
+                <a:ea typeface="Arial"/>
+                <a:cs typeface="Arial"/>
+              </a:rPr>
+              <a:t>Complete 100-session path</a:t>
+            </a:r>
+          </a:p>
+        </p:txBody>
+      </p:sp>
+      <p:sp>
+        <p:nvSpPr>
+          <p:cNvPr id="9" name="">
+            <a:extLst xmlns:a="http://schemas.openxmlformats.org/drawingml/2006/main">
+              <a:ext uri="{FF2B5EF4-FFF2-40B4-BE49-F238E27FC236}">
+                <a16:creationId xmlns:a16="http://schemas.microsoft.com/office/drawing/2014/main" id="{3E0B76F2-4514-4DD8-934B-ABE42A34E950}"/>
+              </a:ext>
+            </a:extLst>
+          </p:cNvPr>
+          <p:cNvSpPr>
+            <a:spLocks xmlns:a="http://schemas.openxmlformats.org/drawingml/2006/main" noGrp="1"/>
+          </p:cNvSpPr>
+          <p:nvPr/>
+        </p:nvSpPr>
+        <p:spPr>
+          <a:xfrm xmlns:a="http://schemas.openxmlformats.org/drawingml/2006/main">
+            <a:off x="8096250" y="1581150"/>
+            <a:ext cx="3333750" cy="704850"/>
+          </a:xfrm>
+          <a:prstGeom xmlns:a="http://schemas.openxmlformats.org/drawingml/2006/main" prst="rect">
+            <a:avLst/>
+          </a:prstGeom>
+          <a:noFill xmlns:a="http://schemas.openxmlformats.org/drawingml/2006/main"/>
+          <a:ln xmlns:a="http://schemas.openxmlformats.org/drawingml/2006/main" w="0">
+            <a:noFill/>
+            <a:prstDash val="solid"/>
+          </a:ln>
+        </p:spPr>
+        <p:txBody>
+          <a:bodyPr xmlns:a="http://schemas.openxmlformats.org/drawingml/2006/main" wrap="square" lIns="0" tIns="0" rIns="0" bIns="0" anchor="t">
+            <a:normAutofit fontScale="100000"/>
+          </a:bodyPr>
+          <a:lstStyle xmlns:a="http://schemas.openxmlformats.org/drawingml/2006/main"/>
+          <a:p xmlns:a="http://schemas.openxmlformats.org/drawingml/2006/main">
+            <a:pPr algn="l">
+              <a:buNone/>
+              <a:defRPr sz="1425" b="0">
+                <a:solidFill>
+                  <a:srgbClr val="667384"/>
+                </a:solidFill>
+                <a:latin typeface="Arial"/>
+                <a:ea typeface="Arial"/>
+                <a:cs typeface="Arial"/>
+              </a:defRPr>
+            </a:pPr>
+            <a:r>
+              <a:rPr sz="1425" b="0">
+                <a:solidFill>
+                  <a:srgbClr val="667384"/>
+                </a:solidFill>
+                <a:latin typeface="Arial"/>
+                <a:ea typeface="Arial"/>
+                <a:cs typeface="Arial"/>
+              </a:rPr>
+              <a:t>prevents block-to-block sample drift</a:t>
+            </a:r>
+          </a:p>
+        </p:txBody>
+      </p:sp>
+      <p:sp>
+        <p:nvSpPr>
+          <p:cNvPr id="10" name="">
+            <a:extLst xmlns:a="http://schemas.openxmlformats.org/drawingml/2006/main">
+              <a:ext uri="{FF2B5EF4-FFF2-40B4-BE49-F238E27FC236}">
+                <a16:creationId xmlns:a16="http://schemas.microsoft.com/office/drawing/2014/main" id="{294777C3-6D2F-4277-840E-7E984FB4554D}"/>
+              </a:ext>
+            </a:extLst>
+          </p:cNvPr>
+          <p:cNvSpPr>
+            <a:spLocks xmlns:a="http://schemas.openxmlformats.org/drawingml/2006/main" noGrp="1"/>
+          </p:cNvSpPr>
+          <p:nvPr/>
+        </p:nvSpPr>
+        <p:spPr>
+          <a:xfrm xmlns:a="http://schemas.openxmlformats.org/drawingml/2006/main">
+            <a:off x="876300" y="2590800"/>
+            <a:ext cx="10553700" cy="9525"/>
+          </a:xfrm>
+          <a:prstGeom xmlns:a="http://schemas.openxmlformats.org/drawingml/2006/main" prst="rect">
+            <a:avLst/>
+          </a:prstGeom>
+          <a:solidFill xmlns:a="http://schemas.openxmlformats.org/drawingml/2006/main">
+            <a:srgbClr val="B8BCC4"/>
+          </a:solidFill>
+          <a:ln xmlns:a="http://schemas.openxmlformats.org/drawingml/2006/main" w="0">
+            <a:solidFill>
+              <a:srgbClr val="B8BCC4"/>
+            </a:solidFill>
+            <a:prstDash val="solid"/>
+          </a:ln>
+        </p:spPr>
+      </p:sp>
+      <p:sp>
+        <p:nvSpPr>
+          <p:cNvPr id="11" name="">
+            <a:extLst xmlns:a="http://schemas.openxmlformats.org/drawingml/2006/main">
+              <a:ext uri="{FF2B5EF4-FFF2-40B4-BE49-F238E27FC236}">
+                <a16:creationId xmlns:a16="http://schemas.microsoft.com/office/drawing/2014/main" id="{F894CF3F-AD63-423C-8F01-64C507896579}"/>
+              </a:ext>
+            </a:extLst>
+          </p:cNvPr>
+          <p:cNvSpPr>
+            <a:spLocks xmlns:a="http://schemas.openxmlformats.org/drawingml/2006/main" noGrp="1"/>
+          </p:cNvSpPr>
+          <p:nvPr/>
+        </p:nvSpPr>
+        <p:spPr>
+          <a:xfrm xmlns:a="http://schemas.openxmlformats.org/drawingml/2006/main">
+            <a:off x="552450" y="2800350"/>
+            <a:ext cx="95250" cy="895350"/>
+          </a:xfrm>
+          <a:prstGeom xmlns:a="http://schemas.openxmlformats.org/drawingml/2006/main" prst="rect">
+            <a:avLst/>
+          </a:prstGeom>
+          <a:solidFill xmlns:a="http://schemas.openxmlformats.org/drawingml/2006/main">
+            <a:srgbClr val="2A9D6F"/>
+          </a:solidFill>
+          <a:ln xmlns:a="http://schemas.openxmlformats.org/drawingml/2006/main" w="0">
+            <a:solidFill>
+              <a:srgbClr val="2A9D6F"/>
+            </a:solidFill>
+            <a:prstDash val="solid"/>
+          </a:ln>
+        </p:spPr>
+      </p:sp>
+      <p:sp>
+        <p:nvSpPr>
+          <p:cNvPr id="12" name="">
+            <a:extLst xmlns:a="http://schemas.openxmlformats.org/drawingml/2006/main">
+              <a:ext uri="{FF2B5EF4-FFF2-40B4-BE49-F238E27FC236}">
+                <a16:creationId xmlns:a16="http://schemas.microsoft.com/office/drawing/2014/main" id="{D3953D03-6A7A-4FEE-B242-02BF0319C169}"/>
+              </a:ext>
+            </a:extLst>
+          </p:cNvPr>
+          <p:cNvSpPr>
+            <a:spLocks xmlns:a="http://schemas.openxmlformats.org/drawingml/2006/main" noGrp="1"/>
+          </p:cNvSpPr>
+          <p:nvPr/>
+        </p:nvSpPr>
+        <p:spPr>
+          <a:xfrm xmlns:a="http://schemas.openxmlformats.org/drawingml/2006/main">
+            <a:off x="876300" y="2781300"/>
+            <a:ext cx="2095500" cy="285750"/>
+          </a:xfrm>
+          <a:prstGeom xmlns:a="http://schemas.openxmlformats.org/drawingml/2006/main" prst="rect">
+            <a:avLst/>
+          </a:prstGeom>
+          <a:noFill xmlns:a="http://schemas.openxmlformats.org/drawingml/2006/main"/>
+          <a:ln xmlns:a="http://schemas.openxmlformats.org/drawingml/2006/main" w="0">
+            <a:noFill/>
+            <a:prstDash val="solid"/>
+          </a:ln>
+        </p:spPr>
+        <p:txBody>
+          <a:bodyPr xmlns:a="http://schemas.openxmlformats.org/drawingml/2006/main" wrap="square" lIns="0" tIns="0" rIns="0" bIns="0" anchor="t">
+            <a:normAutofit fontScale="100000"/>
+          </a:bodyPr>
+          <a:lstStyle xmlns:a="http://schemas.openxmlformats.org/drawingml/2006/main"/>
+          <a:p xmlns:a="http://schemas.openxmlformats.org/drawingml/2006/main">
+            <a:pPr algn="l">
+              <a:buNone/>
+              <a:defRPr sz="1350" b="1">
+                <a:solidFill>
+                  <a:srgbClr val="2A9D6F"/>
+                </a:solidFill>
+                <a:latin typeface="Arial"/>
+                <a:ea typeface="Arial"/>
+                <a:cs typeface="Arial"/>
+              </a:defRPr>
+            </a:pPr>
+            <a:r>
+              <a:rPr sz="1350" b="1">
+                <a:solidFill>
+                  <a:srgbClr val="2A9D6F"/>
+                </a:solidFill>
+                <a:latin typeface="Arial"/>
+                <a:ea typeface="Arial"/>
+                <a:cs typeface="Arial"/>
+              </a:rPr>
+              <a:t>INCREMENTAL</a:t>
+            </a:r>
+          </a:p>
+        </p:txBody>
+      </p:sp>
+      <p:sp>
+        <p:nvSpPr>
+          <p:cNvPr id="13" name="">
+            <a:extLst xmlns:a="http://schemas.openxmlformats.org/drawingml/2006/main">
+              <a:ext uri="{FF2B5EF4-FFF2-40B4-BE49-F238E27FC236}">
+                <a16:creationId xmlns:a16="http://schemas.microsoft.com/office/drawing/2014/main" id="{52D1DBE8-EAF6-4492-89E7-5C97A3A6A395}"/>
+              </a:ext>
+            </a:extLst>
+          </p:cNvPr>
+          <p:cNvSpPr>
+            <a:spLocks xmlns:a="http://schemas.openxmlformats.org/drawingml/2006/main" noGrp="1"/>
+          </p:cNvSpPr>
+          <p:nvPr/>
+        </p:nvSpPr>
+        <p:spPr>
+          <a:xfrm xmlns:a="http://schemas.openxmlformats.org/drawingml/2006/main">
+            <a:off x="3105150" y="2762250"/>
+            <a:ext cx="4762500" cy="419100"/>
+          </a:xfrm>
+          <a:prstGeom xmlns:a="http://schemas.openxmlformats.org/drawingml/2006/main" prst="rect">
+            <a:avLst/>
+          </a:prstGeom>
+          <a:noFill xmlns:a="http://schemas.openxmlformats.org/drawingml/2006/main"/>
+          <a:ln xmlns:a="http://schemas.openxmlformats.org/drawingml/2006/main" w="0">
+            <a:noFill/>
+            <a:prstDash val="solid"/>
+          </a:ln>
+        </p:spPr>
+        <p:txBody>
+          <a:bodyPr xmlns:a="http://schemas.openxmlformats.org/drawingml/2006/main" wrap="square" lIns="0" tIns="0" rIns="0" bIns="0" anchor="t">
+            <a:normAutofit fontScale="100000"/>
+          </a:bodyPr>
+          <a:lstStyle xmlns:a="http://schemas.openxmlformats.org/drawingml/2006/main"/>
+          <a:p xmlns:a="http://schemas.openxmlformats.org/drawingml/2006/main">
+            <a:pPr algn="l">
+              <a:buNone/>
+              <a:defRPr sz="1950" b="1">
+                <a:solidFill>
+                  <a:srgbClr val="273548"/>
+                </a:solidFill>
+                <a:latin typeface="Arial"/>
+                <a:ea typeface="Arial"/>
+                <a:cs typeface="Arial"/>
+              </a:defRPr>
+            </a:pPr>
+            <a:r>
+              <a:rPr sz="1950" b="1">
+                <a:solidFill>
+                  <a:srgbClr val="273548"/>
+                </a:solidFill>
+                <a:latin typeface="Arial"/>
+                <a:ea typeface="Arial"/>
+                <a:cs typeface="Arial"/>
+              </a:rPr>
+              <a:t>1–5 / 6–10 / … / 61–100</a:t>
+            </a:r>
+          </a:p>
+        </p:txBody>
+      </p:sp>
+      <p:sp>
+        <p:nvSpPr>
+          <p:cNvPr id="14" name="">
+            <a:extLst xmlns:a="http://schemas.openxmlformats.org/drawingml/2006/main">
+              <a:ext uri="{FF2B5EF4-FFF2-40B4-BE49-F238E27FC236}">
+                <a16:creationId xmlns:a16="http://schemas.microsoft.com/office/drawing/2014/main" id="{2CAF0156-C9E6-4210-8A8A-BFEDD044631B}"/>
+              </a:ext>
+            </a:extLst>
+          </p:cNvPr>
+          <p:cNvSpPr>
+            <a:spLocks xmlns:a="http://schemas.openxmlformats.org/drawingml/2006/main" noGrp="1"/>
+          </p:cNvSpPr>
+          <p:nvPr/>
+        </p:nvSpPr>
+        <p:spPr>
+          <a:xfrm xmlns:a="http://schemas.openxmlformats.org/drawingml/2006/main">
+            <a:off x="8096250" y="2781300"/>
+            <a:ext cx="3333750" cy="704850"/>
+          </a:xfrm>
+          <a:prstGeom xmlns:a="http://schemas.openxmlformats.org/drawingml/2006/main" prst="rect">
+            <a:avLst/>
+          </a:prstGeom>
+          <a:noFill xmlns:a="http://schemas.openxmlformats.org/drawingml/2006/main"/>
+          <a:ln xmlns:a="http://schemas.openxmlformats.org/drawingml/2006/main" w="0">
+            <a:noFill/>
+            <a:prstDash val="solid"/>
+          </a:ln>
+        </p:spPr>
+        <p:txBody>
+          <a:bodyPr xmlns:a="http://schemas.openxmlformats.org/drawingml/2006/main" wrap="square" lIns="0" tIns="0" rIns="0" bIns="0" anchor="t">
+            <a:normAutofit fontScale="100000"/>
+          </a:bodyPr>
+          <a:lstStyle xmlns:a="http://schemas.openxmlformats.org/drawingml/2006/main"/>
+          <a:p xmlns:a="http://schemas.openxmlformats.org/drawingml/2006/main">
+            <a:pPr algn="l">
+              <a:buNone/>
+              <a:defRPr sz="1425" b="0">
+                <a:solidFill>
+                  <a:srgbClr val="667384"/>
+                </a:solidFill>
+                <a:latin typeface="Arial"/>
+                <a:ea typeface="Arial"/>
+                <a:cs typeface="Arial"/>
+              </a:defRPr>
+            </a:pPr>
+            <a:r>
+              <a:rPr sz="1425" b="0">
+                <a:solidFill>
+                  <a:srgbClr val="667384"/>
+                </a:solidFill>
+                <a:latin typeface="Arial"/>
+                <a:ea typeface="Arial"/>
+                <a:cs typeface="Arial"/>
+              </a:rPr>
+              <a:t>six blocks sum exactly to R(1:100)</a:t>
+            </a:r>
+          </a:p>
+        </p:txBody>
+      </p:sp>
+      <p:sp>
+        <p:nvSpPr>
+          <p:cNvPr id="15" name="">
+            <a:extLst xmlns:a="http://schemas.openxmlformats.org/drawingml/2006/main">
+              <a:ext uri="{FF2B5EF4-FFF2-40B4-BE49-F238E27FC236}">
+                <a16:creationId xmlns:a16="http://schemas.microsoft.com/office/drawing/2014/main" id="{B126165D-5B65-44DB-99BD-15ED33F9B90F}"/>
+              </a:ext>
+            </a:extLst>
+          </p:cNvPr>
+          <p:cNvSpPr>
+            <a:spLocks xmlns:a="http://schemas.openxmlformats.org/drawingml/2006/main" noGrp="1"/>
+          </p:cNvSpPr>
+          <p:nvPr/>
+        </p:nvSpPr>
+        <p:spPr>
+          <a:xfrm xmlns:a="http://schemas.openxmlformats.org/drawingml/2006/main">
+            <a:off x="876300" y="3790950"/>
+            <a:ext cx="10553700" cy="9525"/>
+          </a:xfrm>
+          <a:prstGeom xmlns:a="http://schemas.openxmlformats.org/drawingml/2006/main" prst="rect">
+            <a:avLst/>
+          </a:prstGeom>
+          <a:solidFill xmlns:a="http://schemas.openxmlformats.org/drawingml/2006/main">
+            <a:srgbClr val="B8BCC4"/>
+          </a:solidFill>
+          <a:ln xmlns:a="http://schemas.openxmlformats.org/drawingml/2006/main" w="0">
+            <a:solidFill>
+              <a:srgbClr val="B8BCC4"/>
+            </a:solidFill>
+            <a:prstDash val="solid"/>
+          </a:ln>
+        </p:spPr>
+      </p:sp>
+      <p:sp>
+        <p:nvSpPr>
+          <p:cNvPr id="16" name="">
+            <a:extLst xmlns:a="http://schemas.openxmlformats.org/drawingml/2006/main">
+              <a:ext uri="{FF2B5EF4-FFF2-40B4-BE49-F238E27FC236}">
+                <a16:creationId xmlns:a16="http://schemas.microsoft.com/office/drawing/2014/main" id="{7DC0911F-9587-4B19-84C6-11974DB2A91C}"/>
+              </a:ext>
+            </a:extLst>
+          </p:cNvPr>
+          <p:cNvSpPr>
+            <a:spLocks xmlns:a="http://schemas.openxmlformats.org/drawingml/2006/main" noGrp="1"/>
+          </p:cNvSpPr>
+          <p:nvPr/>
+        </p:nvSpPr>
+        <p:spPr>
+          <a:xfrm xmlns:a="http://schemas.openxmlformats.org/drawingml/2006/main">
+            <a:off x="552450" y="4000500"/>
+            <a:ext cx="95250" cy="895350"/>
+          </a:xfrm>
+          <a:prstGeom xmlns:a="http://schemas.openxmlformats.org/drawingml/2006/main" prst="rect">
+            <a:avLst/>
+          </a:prstGeom>
+          <a:solidFill xmlns:a="http://schemas.openxmlformats.org/drawingml/2006/main">
+            <a:srgbClr val="3D8DFF"/>
+          </a:solidFill>
+          <a:ln xmlns:a="http://schemas.openxmlformats.org/drawingml/2006/main" w="0">
+            <a:solidFill>
+              <a:srgbClr val="3D8DFF"/>
+            </a:solidFill>
+            <a:prstDash val="solid"/>
+          </a:ln>
+        </p:spPr>
+      </p:sp>
+      <p:sp>
+        <p:nvSpPr>
+          <p:cNvPr id="17" name="">
+            <a:extLst xmlns:a="http://schemas.openxmlformats.org/drawingml/2006/main">
+              <a:ext uri="{FF2B5EF4-FFF2-40B4-BE49-F238E27FC236}">
+                <a16:creationId xmlns:a16="http://schemas.microsoft.com/office/drawing/2014/main" id="{DAB53991-F50C-4B95-9F23-DAE86BCEDF3B}"/>
+              </a:ext>
+            </a:extLst>
+          </p:cNvPr>
+          <p:cNvSpPr>
+            <a:spLocks xmlns:a="http://schemas.openxmlformats.org/drawingml/2006/main" noGrp="1"/>
+          </p:cNvSpPr>
+          <p:nvPr/>
+        </p:nvSpPr>
+        <p:spPr>
+          <a:xfrm xmlns:a="http://schemas.openxmlformats.org/drawingml/2006/main">
+            <a:off x="876300" y="3981450"/>
+            <a:ext cx="2095500" cy="285750"/>
+          </a:xfrm>
+          <a:prstGeom xmlns:a="http://schemas.openxmlformats.org/drawingml/2006/main" prst="rect">
+            <a:avLst/>
+          </a:prstGeom>
+          <a:noFill xmlns:a="http://schemas.openxmlformats.org/drawingml/2006/main"/>
+          <a:ln xmlns:a="http://schemas.openxmlformats.org/drawingml/2006/main" w="0">
+            <a:noFill/>
+            <a:prstDash val="solid"/>
+          </a:ln>
+        </p:spPr>
+        <p:txBody>
+          <a:bodyPr xmlns:a="http://schemas.openxmlformats.org/drawingml/2006/main" wrap="square" lIns="0" tIns="0" rIns="0" bIns="0" anchor="t">
+            <a:normAutofit fontScale="100000"/>
+          </a:bodyPr>
+          <a:lstStyle xmlns:a="http://schemas.openxmlformats.org/drawingml/2006/main"/>
+          <a:p xmlns:a="http://schemas.openxmlformats.org/drawingml/2006/main">
+            <a:pPr algn="l">
+              <a:buNone/>
+              <a:defRPr sz="1350" b="1">
+                <a:solidFill>
+                  <a:srgbClr val="3D8DFF"/>
+                </a:solidFill>
+                <a:latin typeface="Arial"/>
+                <a:ea typeface="Arial"/>
+                <a:cs typeface="Arial"/>
+              </a:defRPr>
+            </a:pPr>
+            <a:r>
+              <a:rPr sz="1350" b="1">
+                <a:solidFill>
+                  <a:srgbClr val="3D8DFF"/>
+                </a:solidFill>
+                <a:latin typeface="Arial"/>
+                <a:ea typeface="Arial"/>
+                <a:cs typeface="Arial"/>
+              </a:rPr>
+              <a:t>COMPARE</a:t>
+            </a:r>
+          </a:p>
+        </p:txBody>
+      </p:sp>
+      <p:sp>
+        <p:nvSpPr>
+          <p:cNvPr id="18" name="">
+            <a:extLst xmlns:a="http://schemas.openxmlformats.org/drawingml/2006/main">
+              <a:ext uri="{FF2B5EF4-FFF2-40B4-BE49-F238E27FC236}">
+                <a16:creationId xmlns:a16="http://schemas.microsoft.com/office/drawing/2014/main" id="{5DFACF3B-08BC-4148-A40A-2004DFB81D71}"/>
+              </a:ext>
+            </a:extLst>
+          </p:cNvPr>
+          <p:cNvSpPr>
+            <a:spLocks xmlns:a="http://schemas.openxmlformats.org/drawingml/2006/main" noGrp="1"/>
+          </p:cNvSpPr>
+          <p:nvPr/>
+        </p:nvSpPr>
+        <p:spPr>
+          <a:xfrm xmlns:a="http://schemas.openxmlformats.org/drawingml/2006/main">
+            <a:off x="3105150" y="3962400"/>
+            <a:ext cx="4762500" cy="419100"/>
+          </a:xfrm>
+          <a:prstGeom xmlns:a="http://schemas.openxmlformats.org/drawingml/2006/main" prst="rect">
+            <a:avLst/>
+          </a:prstGeom>
+          <a:noFill xmlns:a="http://schemas.openxmlformats.org/drawingml/2006/main"/>
+          <a:ln xmlns:a="http://schemas.openxmlformats.org/drawingml/2006/main" w="0">
+            <a:noFill/>
+            <a:prstDash val="solid"/>
+          </a:ln>
+        </p:spPr>
+        <p:txBody>
+          <a:bodyPr xmlns:a="http://schemas.openxmlformats.org/drawingml/2006/main" wrap="square" lIns="0" tIns="0" rIns="0" bIns="0" anchor="t">
+            <a:normAutofit fontScale="100000"/>
+          </a:bodyPr>
+          <a:lstStyle xmlns:a="http://schemas.openxmlformats.org/drawingml/2006/main"/>
+          <a:p xmlns:a="http://schemas.openxmlformats.org/drawingml/2006/main">
+            <a:pPr algn="l">
+              <a:buNone/>
+              <a:defRPr sz="1950" b="1">
+                <a:solidFill>
+                  <a:srgbClr val="273548"/>
+                </a:solidFill>
+                <a:latin typeface="Arial"/>
+                <a:ea typeface="Arial"/>
+                <a:cs typeface="Arial"/>
+              </a:defRPr>
+            </a:pPr>
+            <a:r>
+              <a:rPr sz="1950" b="1">
+                <a:solidFill>
+                  <a:srgbClr val="273548"/>
+                </a:solidFill>
+                <a:latin typeface="Arial"/>
+                <a:ea typeface="Arial"/>
+                <a:cs typeface="Arial"/>
+              </a:rPr>
+              <a:t>Cumulative + drift</a:t>
+            </a:r>
+          </a:p>
+        </p:txBody>
+      </p:sp>
+      <p:sp>
+        <p:nvSpPr>
+          <p:cNvPr id="19" name="">
+            <a:extLst xmlns:a="http://schemas.openxmlformats.org/drawingml/2006/main">
+              <a:ext uri="{FF2B5EF4-FFF2-40B4-BE49-F238E27FC236}">
+                <a16:creationId xmlns:a16="http://schemas.microsoft.com/office/drawing/2014/main" id="{C907D23B-44A2-43C4-9658-4C6E38430BF5}"/>
+              </a:ext>
+            </a:extLst>
+          </p:cNvPr>
+          <p:cNvSpPr>
+            <a:spLocks xmlns:a="http://schemas.openxmlformats.org/drawingml/2006/main" noGrp="1"/>
+          </p:cNvSpPr>
+          <p:nvPr/>
+        </p:nvSpPr>
+        <p:spPr>
+          <a:xfrm xmlns:a="http://schemas.openxmlformats.org/drawingml/2006/main">
+            <a:off x="8096250" y="3981450"/>
+            <a:ext cx="3333750" cy="704850"/>
+          </a:xfrm>
+          <a:prstGeom xmlns:a="http://schemas.openxmlformats.org/drawingml/2006/main" prst="rect">
+            <a:avLst/>
+          </a:prstGeom>
+          <a:noFill xmlns:a="http://schemas.openxmlformats.org/drawingml/2006/main"/>
+          <a:ln xmlns:a="http://schemas.openxmlformats.org/drawingml/2006/main" w="0">
+            <a:noFill/>
+            <a:prstDash val="solid"/>
+          </a:ln>
+        </p:spPr>
+        <p:txBody>
+          <a:bodyPr xmlns:a="http://schemas.openxmlformats.org/drawingml/2006/main" wrap="square" lIns="0" tIns="0" rIns="0" bIns="0" anchor="t">
+            <a:normAutofit fontScale="100000"/>
+          </a:bodyPr>
+          <a:lstStyle xmlns:a="http://schemas.openxmlformats.org/drawingml/2006/main"/>
+          <a:p xmlns:a="http://schemas.openxmlformats.org/drawingml/2006/main">
+            <a:pPr algn="l">
+              <a:buNone/>
+              <a:defRPr sz="1425" b="0">
+                <a:solidFill>
+                  <a:srgbClr val="667384"/>
+                </a:solidFill>
+                <a:latin typeface="Arial"/>
+                <a:ea typeface="Arial"/>
+                <a:cs typeface="Arial"/>
+              </a:defRPr>
+            </a:pPr>
+            <a:r>
+              <a:rPr sz="1425" b="0">
+                <a:solidFill>
+                  <a:srgbClr val="667384"/>
+                </a:solidFill>
+                <a:latin typeface="Arial"/>
+                <a:ea typeface="Arial"/>
+                <a:cs typeface="Arial"/>
+              </a:rPr>
+              <a:t>one unfiltered-loss comparator</a:t>
+            </a:r>
+          </a:p>
+        </p:txBody>
+      </p:sp>
+      <p:sp>
+        <p:nvSpPr>
+          <p:cNvPr id="20" name="">
+            <a:extLst xmlns:a="http://schemas.openxmlformats.org/drawingml/2006/main">
+              <a:ext uri="{FF2B5EF4-FFF2-40B4-BE49-F238E27FC236}">
+                <a16:creationId xmlns:a16="http://schemas.microsoft.com/office/drawing/2014/main" id="{8042DFC4-7E22-47E6-8C53-1E63A8411C3A}"/>
+              </a:ext>
+            </a:extLst>
+          </p:cNvPr>
+          <p:cNvSpPr>
+            <a:spLocks xmlns:a="http://schemas.openxmlformats.org/drawingml/2006/main" noGrp="1"/>
+          </p:cNvSpPr>
+          <p:nvPr/>
+        </p:nvSpPr>
+        <p:spPr>
+          <a:xfrm xmlns:a="http://schemas.openxmlformats.org/drawingml/2006/main">
+            <a:off x="876300" y="4991100"/>
+            <a:ext cx="10553700" cy="9525"/>
+          </a:xfrm>
+          <a:prstGeom xmlns:a="http://schemas.openxmlformats.org/drawingml/2006/main" prst="rect">
+            <a:avLst/>
+          </a:prstGeom>
+          <a:solidFill xmlns:a="http://schemas.openxmlformats.org/drawingml/2006/main">
+            <a:srgbClr val="B8BCC4"/>
+          </a:solidFill>
+          <a:ln xmlns:a="http://schemas.openxmlformats.org/drawingml/2006/main" w="0">
+            <a:solidFill>
+              <a:srgbClr val="B8BCC4"/>
+            </a:solidFill>
+            <a:prstDash val="solid"/>
+          </a:ln>
+        </p:spPr>
+      </p:sp>
+      <p:sp>
+        <p:nvSpPr>
+          <p:cNvPr id="21" name="">
+            <a:extLst xmlns:a="http://schemas.openxmlformats.org/drawingml/2006/main">
+              <a:ext uri="{FF2B5EF4-FFF2-40B4-BE49-F238E27FC236}">
+                <a16:creationId xmlns:a16="http://schemas.microsoft.com/office/drawing/2014/main" id="{F4066D54-676B-4D0F-93B6-2152B57E41AF}"/>
+              </a:ext>
+            </a:extLst>
+          </p:cNvPr>
+          <p:cNvSpPr>
+            <a:spLocks xmlns:a="http://schemas.openxmlformats.org/drawingml/2006/main" noGrp="1"/>
+          </p:cNvSpPr>
+          <p:nvPr/>
+        </p:nvSpPr>
+        <p:spPr>
+          <a:xfrm xmlns:a="http://schemas.openxmlformats.org/drawingml/2006/main">
+            <a:off x="552450" y="5353050"/>
+            <a:ext cx="10877550" cy="781050"/>
+          </a:xfrm>
+          <a:prstGeom xmlns:a="http://schemas.openxmlformats.org/drawingml/2006/main" prst="rect">
+            <a:avLst/>
+          </a:prstGeom>
+          <a:solidFill xmlns:a="http://schemas.openxmlformats.org/drawingml/2006/main">
+            <a:srgbClr val="EAF5FB"/>
+          </a:solidFill>
+          <a:ln xmlns:a="http://schemas.openxmlformats.org/drawingml/2006/main" w="0">
+            <a:solidFill>
+              <a:srgbClr val="EAF5FB"/>
+            </a:solidFill>
+            <a:prstDash val="solid"/>
+          </a:ln>
+        </p:spPr>
+      </p:sp>
+      <p:sp>
+        <p:nvSpPr>
+          <p:cNvPr id="22" name="">
+            <a:extLst xmlns:a="http://schemas.openxmlformats.org/drawingml/2006/main">
+              <a:ext uri="{FF2B5EF4-FFF2-40B4-BE49-F238E27FC236}">
+                <a16:creationId xmlns:a16="http://schemas.microsoft.com/office/drawing/2014/main" id="{6E4C79AE-EB98-4B5B-B3D3-11ED0D4C729B}"/>
+              </a:ext>
+            </a:extLst>
+          </p:cNvPr>
+          <p:cNvSpPr>
+            <a:spLocks xmlns:a="http://schemas.openxmlformats.org/drawingml/2006/main" noGrp="1"/>
+          </p:cNvSpPr>
+          <p:nvPr/>
+        </p:nvSpPr>
+        <p:spPr>
+          <a:xfrm xmlns:a="http://schemas.openxmlformats.org/drawingml/2006/main">
+            <a:off x="781050" y="5524500"/>
+            <a:ext cx="2476500" cy="323850"/>
+          </a:xfrm>
+          <a:prstGeom xmlns:a="http://schemas.openxmlformats.org/drawingml/2006/main" prst="rect">
+            <a:avLst/>
+          </a:prstGeom>
+          <a:noFill xmlns:a="http://schemas.openxmlformats.org/drawingml/2006/main"/>
+          <a:ln xmlns:a="http://schemas.openxmlformats.org/drawingml/2006/main" w="0">
+            <a:noFill/>
+            <a:prstDash val="solid"/>
+          </a:ln>
+        </p:spPr>
+        <p:txBody>
+          <a:bodyPr xmlns:a="http://schemas.openxmlformats.org/drawingml/2006/main" wrap="square" lIns="0" tIns="0" rIns="0" bIns="0" anchor="t">
+            <a:normAutofit fontScale="100000"/>
+          </a:bodyPr>
+          <a:lstStyle xmlns:a="http://schemas.openxmlformats.org/drawingml/2006/main"/>
+          <a:p xmlns:a="http://schemas.openxmlformats.org/drawingml/2006/main">
+            <a:pPr algn="l">
+              <a:buNone/>
+              <a:defRPr sz="1725" b="1">
+                <a:solidFill>
+                  <a:srgbClr val="3D8DFF"/>
+                </a:solidFill>
+                <a:latin typeface="Arial"/>
+                <a:ea typeface="Arial"/>
+                <a:cs typeface="Arial"/>
+              </a:defRPr>
+            </a:pPr>
+            <a:r>
+              <a:rPr sz="1725" b="1">
+                <a:solidFill>
+                  <a:srgbClr val="3D8DFF"/>
+                </a:solidFill>
+                <a:latin typeface="Arial"/>
+                <a:ea typeface="Arial"/>
+                <a:cs typeface="Arial"/>
+              </a:rPr>
+              <a:t>Frozen rule</a:t>
+            </a:r>
+          </a:p>
+        </p:txBody>
+      </p:sp>
+      <p:sp>
+        <p:nvSpPr>
+          <p:cNvPr id="23" name="">
+            <a:extLst xmlns:a="http://schemas.openxmlformats.org/drawingml/2006/main">
+              <a:ext uri="{FF2B5EF4-FFF2-40B4-BE49-F238E27FC236}">
+                <a16:creationId xmlns:a16="http://schemas.microsoft.com/office/drawing/2014/main" id="{3320D60E-6067-4236-80ED-A898A863026E}"/>
+              </a:ext>
+            </a:extLst>
+          </p:cNvPr>
+          <p:cNvSpPr>
+            <a:spLocks xmlns:a="http://schemas.openxmlformats.org/drawingml/2006/main" noGrp="1"/>
+          </p:cNvSpPr>
+          <p:nvPr/>
+        </p:nvSpPr>
+        <p:spPr>
+          <a:xfrm xmlns:a="http://schemas.openxmlformats.org/drawingml/2006/main">
+            <a:off x="3333750" y="5486400"/>
+            <a:ext cx="7810500" cy="419100"/>
+          </a:xfrm>
+          <a:prstGeom xmlns:a="http://schemas.openxmlformats.org/drawingml/2006/main" prst="rect">
+            <a:avLst/>
+          </a:prstGeom>
+          <a:noFill xmlns:a="http://schemas.openxmlformats.org/drawingml/2006/main"/>
+          <a:ln xmlns:a="http://schemas.openxmlformats.org/drawingml/2006/main" w="0">
+            <a:noFill/>
+            <a:prstDash val="solid"/>
+          </a:ln>
+        </p:spPr>
+        <p:txBody>
+          <a:bodyPr xmlns:a="http://schemas.openxmlformats.org/drawingml/2006/main" wrap="square" lIns="0" tIns="0" rIns="0" bIns="0" anchor="t">
+            <a:normAutofit fontScale="76389"/>
+          </a:bodyPr>
+          <a:lstStyle xmlns:a="http://schemas.openxmlformats.org/drawingml/2006/main"/>
+          <a:p xmlns:a="http://schemas.openxmlformats.org/drawingml/2006/main">
+            <a:pPr algn="l">
+              <a:buNone/>
+              <a:defRPr sz="1800" b="1">
+                <a:solidFill>
+                  <a:srgbClr val="273548"/>
+                </a:solidFill>
+                <a:latin typeface="Arial"/>
+                <a:ea typeface="Arial"/>
+                <a:cs typeface="Arial"/>
+              </a:defRPr>
+            </a:pPr>
+            <a:r>
+              <a:rPr sz="1800" b="1">
+                <a:solidFill>
+                  <a:srgbClr val="273548"/>
+                </a:solidFill>
+                <a:latin typeface="Arial"/>
+                <a:ea typeface="Arial"/>
+                <a:cs typeface="Arial"/>
+              </a:rPr>
+              <a:t>Duration survives only if at least 2 of 3 late blocks retain negative sector breadth and positive drift-adjusted return.</a:t>
             </a:r>
           </a:p>
         </p:txBody>

--- a/operator_hypothesis_lab/presentations/return_geometry_edge_promotion_huddle.pptx
+++ b/operator_hypothesis_lab/presentations/return_geometry_edge_promotion_huddle.pptx
@@ -2,26 +2,36 @@
 <file path=ppt/presentation.xml><?xml version="1.0" encoding="utf-8"?>
 <p:presentation xmlns:p="http://schemas.openxmlformats.org/presentationml/2006/main">
   <p:sldMasterIdLst>
-    <p:sldMasterId xmlns:r="http://schemas.openxmlformats.org/officeDocument/2006/relationships" id="2147483648" r:id="Rfbe7c072e9ce4e46"/>
+    <p:sldMasterId xmlns:r="http://schemas.openxmlformats.org/officeDocument/2006/relationships" id="2147483648" r:id="R7b5f2297cff04c42"/>
   </p:sldMasterIdLst>
   <p:notesMasterIdLst>
-    <p:notesMasterId xmlns:r="http://schemas.openxmlformats.org/officeDocument/2006/relationships" r:id="R232e0113f1684ade"/>
+    <p:notesMasterId xmlns:r="http://schemas.openxmlformats.org/officeDocument/2006/relationships" r:id="Ra1d36a77685e4657"/>
   </p:notesMasterIdLst>
   <p:sldIdLst>
-    <p:sldId xmlns:r="http://schemas.openxmlformats.org/officeDocument/2006/relationships" id="256" r:id="Rbc00210236524d10"/>
-    <p:sldId xmlns:r="http://schemas.openxmlformats.org/officeDocument/2006/relationships" id="257" r:id="R4fe5cfbf5b4f4f74"/>
-    <p:sldId xmlns:r="http://schemas.openxmlformats.org/officeDocument/2006/relationships" id="258" r:id="R248db14013ba4ea4"/>
-    <p:sldId xmlns:r="http://schemas.openxmlformats.org/officeDocument/2006/relationships" id="259" r:id="Rd73a275feeb04466"/>
-    <p:sldId xmlns:r="http://schemas.openxmlformats.org/officeDocument/2006/relationships" id="260" r:id="R365ec315b88e4a48"/>
-    <p:sldId xmlns:r="http://schemas.openxmlformats.org/officeDocument/2006/relationships" id="261" r:id="R5608bb0b1a404037"/>
-    <p:sldId xmlns:r="http://schemas.openxmlformats.org/officeDocument/2006/relationships" id="262" r:id="R5b26d08f004c40e8"/>
-    <p:sldId xmlns:r="http://schemas.openxmlformats.org/officeDocument/2006/relationships" id="263" r:id="R62f4c2bec2ac458d"/>
-    <p:sldId xmlns:r="http://schemas.openxmlformats.org/officeDocument/2006/relationships" id="264" r:id="Re3aab716c99f4e67"/>
-    <p:sldId xmlns:r="http://schemas.openxmlformats.org/officeDocument/2006/relationships" id="265" r:id="R3b5b8d5ffad449d8"/>
-    <p:sldId xmlns:r="http://schemas.openxmlformats.org/officeDocument/2006/relationships" id="266" r:id="R39378f0773904102"/>
-    <p:sldId xmlns:r="http://schemas.openxmlformats.org/officeDocument/2006/relationships" id="267" r:id="R5fc95116e12a4d63"/>
-    <p:sldId xmlns:r="http://schemas.openxmlformats.org/officeDocument/2006/relationships" id="268" r:id="R86f884fd8e9a4f85"/>
-    <p:sldId xmlns:r="http://schemas.openxmlformats.org/officeDocument/2006/relationships" id="269" r:id="R943917c6f8af4aa3"/>
+    <p:sldId xmlns:r="http://schemas.openxmlformats.org/officeDocument/2006/relationships" id="256" r:id="R260f5d23915c450f"/>
+    <p:sldId xmlns:r="http://schemas.openxmlformats.org/officeDocument/2006/relationships" id="257" r:id="R0c457a97c65f4317"/>
+    <p:sldId xmlns:r="http://schemas.openxmlformats.org/officeDocument/2006/relationships" id="258" r:id="R6f22f678b06b48db"/>
+    <p:sldId xmlns:r="http://schemas.openxmlformats.org/officeDocument/2006/relationships" id="259" r:id="Rbe4690ace755489b"/>
+    <p:sldId xmlns:r="http://schemas.openxmlformats.org/officeDocument/2006/relationships" id="260" r:id="R599678e7374c4259"/>
+    <p:sldId xmlns:r="http://schemas.openxmlformats.org/officeDocument/2006/relationships" id="261" r:id="Rcb8fa09ebf844d2d"/>
+    <p:sldId xmlns:r="http://schemas.openxmlformats.org/officeDocument/2006/relationships" id="262" r:id="Rc01cf9ca0e3e4c2c"/>
+    <p:sldId xmlns:r="http://schemas.openxmlformats.org/officeDocument/2006/relationships" id="263" r:id="R6cd8df88d605457d"/>
+    <p:sldId xmlns:r="http://schemas.openxmlformats.org/officeDocument/2006/relationships" id="264" r:id="R2aa4dfebb7dd411b"/>
+    <p:sldId xmlns:r="http://schemas.openxmlformats.org/officeDocument/2006/relationships" id="265" r:id="R808f70af818046f3"/>
+    <p:sldId xmlns:r="http://schemas.openxmlformats.org/officeDocument/2006/relationships" id="266" r:id="Rcb3d4e7366164ffe"/>
+    <p:sldId xmlns:r="http://schemas.openxmlformats.org/officeDocument/2006/relationships" id="267" r:id="R01519ae0a66548ce"/>
+    <p:sldId xmlns:r="http://schemas.openxmlformats.org/officeDocument/2006/relationships" id="268" r:id="Rea8d12b7ab204b7b"/>
+    <p:sldId xmlns:r="http://schemas.openxmlformats.org/officeDocument/2006/relationships" id="269" r:id="Re0999a5d795044ea"/>
+    <p:sldId xmlns:r="http://schemas.openxmlformats.org/officeDocument/2006/relationships" id="270" r:id="Rfa191beab31545f3"/>
+    <p:sldId xmlns:r="http://schemas.openxmlformats.org/officeDocument/2006/relationships" id="271" r:id="R2e1cf856561b4e86"/>
+    <p:sldId xmlns:r="http://schemas.openxmlformats.org/officeDocument/2006/relationships" id="272" r:id="Rc4095e6f0c884c92"/>
+    <p:sldId xmlns:r="http://schemas.openxmlformats.org/officeDocument/2006/relationships" id="273" r:id="Rae0a9225a3554999"/>
+    <p:sldId xmlns:r="http://schemas.openxmlformats.org/officeDocument/2006/relationships" id="274" r:id="Rb9085b40066240bc"/>
+    <p:sldId xmlns:r="http://schemas.openxmlformats.org/officeDocument/2006/relationships" id="275" r:id="Ra39a8f7da45140b4"/>
+    <p:sldId xmlns:r="http://schemas.openxmlformats.org/officeDocument/2006/relationships" id="276" r:id="R8205d8d6ff8c4c4e"/>
+    <p:sldId xmlns:r="http://schemas.openxmlformats.org/officeDocument/2006/relationships" id="277" r:id="R8f82d32022da42fd"/>
+    <p:sldId xmlns:r="http://schemas.openxmlformats.org/officeDocument/2006/relationships" id="278" r:id="Rcba22e6b9072490b"/>
+    <p:sldId xmlns:r="http://schemas.openxmlformats.org/officeDocument/2006/relationships" id="279" r:id="R6a5b70e660564946"/>
   </p:sldIdLst>
   <p:sldSz cx="12192000" cy="6858000"/>
   <p:notesSz cx="6858000" cy="9144000"/>
@@ -1040,6 +1050,516 @@
 </p:notes>
 </file>
 
+<file path=ppt/notesSlides/notesSlide15.xml><?xml version="1.0" encoding="utf-8"?>
+<p:notes xmlns:p="http://schemas.openxmlformats.org/presentationml/2006/main">
+  <p:cSld>
+    <p:spTree>
+      <p:nvGrpSpPr>
+        <p:cNvPr id="1" name=""/>
+        <p:cNvGrpSpPr/>
+        <p:nvPr/>
+      </p:nvGrpSpPr>
+      <p:grpSpPr>
+        <a:xfrm xmlns:a="http://schemas.openxmlformats.org/drawingml/2006/main"/>
+      </p:grpSpPr>
+      <p:sp>
+        <p:nvSpPr>
+          <p:cNvPr id="2" name="Slide Image Placeholder 1"/>
+          <p:cNvSpPr>
+            <a:spLocks xmlns:a="http://schemas.openxmlformats.org/drawingml/2006/main" noGrp="1"/>
+          </p:cNvSpPr>
+          <p:nvPr>
+            <p:ph type="sldImg" idx="0"/>
+          </p:nvPr>
+        </p:nvSpPr>
+        <p:spPr/>
+      </p:sp>
+      <p:sp>
+        <p:nvSpPr>
+          <p:cNvPr id="3" name="Notes Placeholder 2"/>
+          <p:cNvSpPr>
+            <a:spLocks xmlns:a="http://schemas.openxmlformats.org/drawingml/2006/main" noGrp="1"/>
+          </p:cNvSpPr>
+          <p:nvPr>
+            <p:ph type="body" idx="1"/>
+          </p:nvPr>
+        </p:nvSpPr>
+        <p:spPr/>
+        <p:txBody>
+          <a:bodyPr xmlns:a="http://schemas.openxmlformats.org/drawingml/2006/main"/>
+          <a:lstStyle xmlns:a="http://schemas.openxmlformats.org/drawingml/2006/main"/>
+          <a:p xmlns:a="http://schemas.openxmlformats.org/drawingml/2006/main">
+            <a:r>
+              <a:t>All 129 instruments in the wide atlas are processed wherever the causal history requirement is met. The 88 figure is not a reduced universe: it is the full-history stock core spanning 11 GICS sectors and supplies the equal-sector headline. The remaining 41 instruments stay visible as attention, equity-ETF, and non-equity diagnostic cohorts.</a:t>
+            </a:r>
+          </a:p>
+          <a:p xmlns:a="http://schemas.openxmlformats.org/drawingml/2006/main">
+            <a:r>
+              <a:t/>
+            </a:r>
+          </a:p>
+          <a:p xmlns:a="http://schemas.openxmlformats.org/drawingml/2006/main">
+            <a:r>
+              <a:t>[Sources]</a:t>
+            </a:r>
+          </a:p>
+          <a:p xmlns:a="http://schemas.openxmlformats.org/drawingml/2006/main">
+            <a:r>
+              <a:t>- Codex thread 01a0226e-2fa2-7222-a6d9-79ab971ac616 (2026-08-28), operator-authorized bottom-20% next-open rule translation.</a:t>
+            </a:r>
+          </a:p>
+          <a:p xmlns:a="http://schemas.openxmlformats.org/drawingml/2006/main">
+            <a:r>
+              <a:t>- runs/research_workbench/operator_hypothesis_lab/return_geometry_next_open_rule_translation_20260828/run_spec.csv</a:t>
+            </a:r>
+          </a:p>
+          <a:p xmlns:a="http://schemas.openxmlformats.org/drawingml/2006/main">
+            <a:r>
+              <a:t>- runs/research_workbench/operator_hypothesis_lab/return_geometry_next_open_rule_translation_20260828/candidate_coverage.csv</a:t>
+            </a:r>
+          </a:p>
+          <a:p xmlns:a="http://schemas.openxmlformats.org/drawingml/2006/main">
+            <a:r>
+              <a:t>[/Sources]</a:t>
+            </a:r>
+          </a:p>
+        </p:txBody>
+      </p:sp>
+      <p:sp>
+        <p:nvSpPr>
+          <p:cNvPr id="4" name="Slide Number Placeholder 3"/>
+          <p:cNvSpPr>
+            <a:spLocks xmlns:a="http://schemas.openxmlformats.org/drawingml/2006/main" noGrp="1"/>
+          </p:cNvSpPr>
+          <p:nvPr>
+            <p:ph type="sldNum" idx="5"/>
+          </p:nvPr>
+        </p:nvSpPr>
+        <p:spPr/>
+        <p:txBody>
+          <a:bodyPr xmlns:a="http://schemas.openxmlformats.org/drawingml/2006/main"/>
+          <a:lstStyle xmlns:a="http://schemas.openxmlformats.org/drawingml/2006/main"/>
+          <a:p xmlns:a="http://schemas.openxmlformats.org/drawingml/2006/main"/>
+        </p:txBody>
+      </p:sp>
+    </p:spTree>
+  </p:cSld>
+  <p:clrMapOvr>
+    <a:masterClrMapping xmlns:a="http://schemas.openxmlformats.org/drawingml/2006/main"/>
+  </p:clrMapOvr>
+</p:notes>
+</file>
+
+<file path=ppt/notesSlides/notesSlide16.xml><?xml version="1.0" encoding="utf-8"?>
+<p:notes xmlns:p="http://schemas.openxmlformats.org/presentationml/2006/main">
+  <p:cSld>
+    <p:spTree>
+      <p:nvGrpSpPr>
+        <p:cNvPr id="1" name=""/>
+        <p:cNvGrpSpPr/>
+        <p:nvPr/>
+      </p:nvGrpSpPr>
+      <p:grpSpPr>
+        <a:xfrm xmlns:a="http://schemas.openxmlformats.org/drawingml/2006/main"/>
+      </p:grpSpPr>
+      <p:sp>
+        <p:nvSpPr>
+          <p:cNvPr id="2" name="Slide Image Placeholder 1"/>
+          <p:cNvSpPr>
+            <a:spLocks xmlns:a="http://schemas.openxmlformats.org/drawingml/2006/main" noGrp="1"/>
+          </p:cNvSpPr>
+          <p:nvPr>
+            <p:ph type="sldImg" idx="0"/>
+          </p:nvPr>
+        </p:nvSpPr>
+        <p:spPr/>
+      </p:sp>
+      <p:sp>
+        <p:nvSpPr>
+          <p:cNvPr id="3" name="Notes Placeholder 2"/>
+          <p:cNvSpPr>
+            <a:spLocks xmlns:a="http://schemas.openxmlformats.org/drawingml/2006/main" noGrp="1"/>
+          </p:cNvSpPr>
+          <p:nvPr>
+            <p:ph type="body" idx="1"/>
+          </p:nvPr>
+        </p:nvSpPr>
+        <p:spPr/>
+        <p:txBody>
+          <a:bodyPr xmlns:a="http://schemas.openxmlformats.org/drawingml/2006/main"/>
+          <a:lstStyle xmlns:a="http://schemas.openxmlformats.org/drawingml/2006/main"/>
+          <a:p xmlns:a="http://schemas.openxmlformats.org/drawingml/2006/main">
+            <a:r>
+              <a:t>The severity threshold uses only an asset's previous negative 20-session returns; the current observation is excluded. A qualifying close-t signal enters at adjusted open t+1 and exits at adjusted open t+21. Only one position may be active per asset, and a signal observed at the close of the exit session may seed the next trade.</a:t>
+            </a:r>
+          </a:p>
+          <a:p xmlns:a="http://schemas.openxmlformats.org/drawingml/2006/main">
+            <a:r>
+              <a:t/>
+            </a:r>
+          </a:p>
+          <a:p xmlns:a="http://schemas.openxmlformats.org/drawingml/2006/main">
+            <a:r>
+              <a:t>[Sources]</a:t>
+            </a:r>
+          </a:p>
+          <a:p xmlns:a="http://schemas.openxmlformats.org/drawingml/2006/main">
+            <a:r>
+              <a:t>- runs/research_workbench/operator_hypothesis_lab/return_geometry_next_open_rule_translation_20260828/run_spec.csv</a:t>
+            </a:r>
+          </a:p>
+          <a:p xmlns:a="http://schemas.openxmlformats.org/drawingml/2006/main">
+            <a:r>
+              <a:t>- runs/research_workbench/operator_hypothesis_lab/return_geometry_next_open_rule_translation_20260828/rule_translation_checks.csv</a:t>
+            </a:r>
+          </a:p>
+          <a:p xmlns:a="http://schemas.openxmlformats.org/drawingml/2006/main">
+            <a:r>
+              <a:t>- operator_hypothesis_lab/docs/RETURN_GEOMETRY_NEXT_OPEN_RULE_TRANSLATION_2018_2023.md</a:t>
+            </a:r>
+          </a:p>
+          <a:p xmlns:a="http://schemas.openxmlformats.org/drawingml/2006/main">
+            <a:r>
+              <a:t>[/Sources]</a:t>
+            </a:r>
+          </a:p>
+        </p:txBody>
+      </p:sp>
+      <p:sp>
+        <p:nvSpPr>
+          <p:cNvPr id="4" name="Slide Number Placeholder 3"/>
+          <p:cNvSpPr>
+            <a:spLocks xmlns:a="http://schemas.openxmlformats.org/drawingml/2006/main" noGrp="1"/>
+          </p:cNvSpPr>
+          <p:nvPr>
+            <p:ph type="sldNum" idx="5"/>
+          </p:nvPr>
+        </p:nvSpPr>
+        <p:spPr/>
+        <p:txBody>
+          <a:bodyPr xmlns:a="http://schemas.openxmlformats.org/drawingml/2006/main"/>
+          <a:lstStyle xmlns:a="http://schemas.openxmlformats.org/drawingml/2006/main"/>
+          <a:p xmlns:a="http://schemas.openxmlformats.org/drawingml/2006/main"/>
+        </p:txBody>
+      </p:sp>
+    </p:spTree>
+  </p:cSld>
+  <p:clrMapOvr>
+    <a:masterClrMapping xmlns:a="http://schemas.openxmlformats.org/drawingml/2006/main"/>
+  </p:clrMapOvr>
+</p:notes>
+</file>
+
+<file path=ppt/notesSlides/notesSlide17.xml><?xml version="1.0" encoding="utf-8"?>
+<p:notes xmlns:p="http://schemas.openxmlformats.org/presentationml/2006/main">
+  <p:cSld>
+    <p:spTree>
+      <p:nvGrpSpPr>
+        <p:cNvPr id="1" name=""/>
+        <p:cNvGrpSpPr/>
+        <p:nvPr/>
+      </p:nvGrpSpPr>
+      <p:grpSpPr>
+        <a:xfrm xmlns:a="http://schemas.openxmlformats.org/drawingml/2006/main"/>
+      </p:grpSpPr>
+      <p:sp>
+        <p:nvSpPr>
+          <p:cNvPr id="2" name="Slide Image Placeholder 1"/>
+          <p:cNvSpPr>
+            <a:spLocks xmlns:a="http://schemas.openxmlformats.org/drawingml/2006/main" noGrp="1"/>
+          </p:cNvSpPr>
+          <p:nvPr>
+            <p:ph type="sldImg" idx="0"/>
+          </p:nvPr>
+        </p:nvSpPr>
+        <p:spPr/>
+      </p:sp>
+      <p:sp>
+        <p:nvSpPr>
+          <p:cNvPr id="3" name="Notes Placeholder 2"/>
+          <p:cNvSpPr>
+            <a:spLocks xmlns:a="http://schemas.openxmlformats.org/drawingml/2006/main" noGrp="1"/>
+          </p:cNvSpPr>
+          <p:nvPr>
+            <p:ph type="body" idx="1"/>
+          </p:nvPr>
+        </p:nvSpPr>
+        <p:spPr/>
+        <p:txBody>
+          <a:bodyPr xmlns:a="http://schemas.openxmlformats.org/drawingml/2006/main"/>
+          <a:lstStyle xmlns:a="http://schemas.openxmlformats.org/drawingml/2006/main"/>
+          <a:p xmlns:a="http://schemas.openxmlformats.org/drawingml/2006/main">
+            <a:r>
+              <a:t>For the 88-stock core, the same events average +0.60% close-to-close and +0.55% gross open-to-open. The roughly -0.04 percentage-point translation loss is real but small, so the TRAIN outcome is not explained by moving the trade clock to executable opens.</a:t>
+            </a:r>
+          </a:p>
+          <a:p xmlns:a="http://schemas.openxmlformats.org/drawingml/2006/main">
+            <a:r>
+              <a:t/>
+            </a:r>
+          </a:p>
+          <a:p xmlns:a="http://schemas.openxmlformats.org/drawingml/2006/main">
+            <a:r>
+              <a:t>[Sources]</a:t>
+            </a:r>
+          </a:p>
+          <a:p xmlns:a="http://schemas.openxmlformats.org/drawingml/2006/main">
+            <a:r>
+              <a:t>- runs/research_workbench/operator_hypothesis_lab/return_geometry_next_open_rule_translation_20260828/trade_summary.csv</a:t>
+            </a:r>
+          </a:p>
+          <a:p xmlns:a="http://schemas.openxmlformats.org/drawingml/2006/main">
+            <a:r>
+              <a:t>- runs/research_workbench/operator_hypothesis_lab/return_geometry_next_open_rule_translation_20260828/visuals/close_to_open_translation.png</a:t>
+            </a:r>
+          </a:p>
+          <a:p xmlns:a="http://schemas.openxmlformats.org/drawingml/2006/main">
+            <a:r>
+              <a:t>- Codex thread 01a0226e-2fa2-7222-a6d9-79ab971ac616 (2026-08-28), executable TRAIN rule discussion.</a:t>
+            </a:r>
+          </a:p>
+          <a:p xmlns:a="http://schemas.openxmlformats.org/drawingml/2006/main">
+            <a:r>
+              <a:t>[/Sources]</a:t>
+            </a:r>
+          </a:p>
+        </p:txBody>
+      </p:sp>
+      <p:sp>
+        <p:nvSpPr>
+          <p:cNvPr id="4" name="Slide Number Placeholder 3"/>
+          <p:cNvSpPr>
+            <a:spLocks xmlns:a="http://schemas.openxmlformats.org/drawingml/2006/main" noGrp="1"/>
+          </p:cNvSpPr>
+          <p:nvPr>
+            <p:ph type="sldNum" idx="5"/>
+          </p:nvPr>
+        </p:nvSpPr>
+        <p:spPr/>
+        <p:txBody>
+          <a:bodyPr xmlns:a="http://schemas.openxmlformats.org/drawingml/2006/main"/>
+          <a:lstStyle xmlns:a="http://schemas.openxmlformats.org/drawingml/2006/main"/>
+          <a:p xmlns:a="http://schemas.openxmlformats.org/drawingml/2006/main"/>
+        </p:txBody>
+      </p:sp>
+    </p:spTree>
+  </p:cSld>
+  <p:clrMapOvr>
+    <a:masterClrMapping xmlns:a="http://schemas.openxmlformats.org/drawingml/2006/main"/>
+  </p:clrMapOvr>
+</p:notes>
+</file>
+
+<file path=ppt/notesSlides/notesSlide18.xml><?xml version="1.0" encoding="utf-8"?>
+<p:notes xmlns:p="http://schemas.openxmlformats.org/presentationml/2006/main">
+  <p:cSld>
+    <p:spTree>
+      <p:nvGrpSpPr>
+        <p:cNvPr id="1" name=""/>
+        <p:cNvGrpSpPr/>
+        <p:nvPr/>
+      </p:nvGrpSpPr>
+      <p:grpSpPr>
+        <a:xfrm xmlns:a="http://schemas.openxmlformats.org/drawingml/2006/main"/>
+      </p:grpSpPr>
+      <p:sp>
+        <p:nvSpPr>
+          <p:cNvPr id="2" name="Slide Image Placeholder 1"/>
+          <p:cNvSpPr>
+            <a:spLocks xmlns:a="http://schemas.openxmlformats.org/drawingml/2006/main" noGrp="1"/>
+          </p:cNvSpPr>
+          <p:nvPr>
+            <p:ph type="sldImg" idx="0"/>
+          </p:nvPr>
+        </p:nvSpPr>
+        <p:spPr/>
+      </p:sp>
+      <p:sp>
+        <p:nvSpPr>
+          <p:cNvPr id="3" name="Notes Placeholder 2"/>
+          <p:cNvSpPr>
+            <a:spLocks xmlns:a="http://schemas.openxmlformats.org/drawingml/2006/main" noGrp="1"/>
+          </p:cNvSpPr>
+          <p:nvPr>
+            <p:ph type="body" idx="1"/>
+          </p:nvPr>
+        </p:nvSpPr>
+        <p:spPr/>
+        <p:txBody>
+          <a:bodyPr xmlns:a="http://schemas.openxmlformats.org/drawingml/2006/main"/>
+          <a:lstStyle xmlns:a="http://schemas.openxmlformats.org/drawingml/2006/main"/>
+          <a:p xmlns:a="http://schemas.openxmlformats.org/drawingml/2006/main">
+            <a:r>
+              <a:t>The frozen breadth gate required at least 7 of 11 sectors to have positive median asset net excess over the same-asset unconditional 20-session open-to-open drift baseline. Only 6 pass. Communication Services is strongest; Consumer Discretionary is weakest.</a:t>
+            </a:r>
+          </a:p>
+          <a:p xmlns:a="http://schemas.openxmlformats.org/drawingml/2006/main">
+            <a:r>
+              <a:t/>
+            </a:r>
+          </a:p>
+          <a:p xmlns:a="http://schemas.openxmlformats.org/drawingml/2006/main">
+            <a:r>
+              <a:t>[Sources]</a:t>
+            </a:r>
+          </a:p>
+          <a:p xmlns:a="http://schemas.openxmlformats.org/drawingml/2006/main">
+            <a:r>
+              <a:t>- runs/research_workbench/operator_hypothesis_lab/return_geometry_next_open_rule_translation_20260828/core_sector_summary.csv</a:t>
+            </a:r>
+          </a:p>
+          <a:p xmlns:a="http://schemas.openxmlformats.org/drawingml/2006/main">
+            <a:r>
+              <a:t>- runs/research_workbench/operator_hypothesis_lab/return_geometry_next_open_rule_translation_20260828/train_mechanics_gates.csv</a:t>
+            </a:r>
+          </a:p>
+          <a:p xmlns:a="http://schemas.openxmlformats.org/drawingml/2006/main">
+            <a:r>
+              <a:t>- runs/research_workbench/operator_hypothesis_lab/return_geometry_next_open_rule_translation_20260828/visuals/core_sector_net_excess.png</a:t>
+            </a:r>
+          </a:p>
+          <a:p xmlns:a="http://schemas.openxmlformats.org/drawingml/2006/main">
+            <a:r>
+              <a:t>- Codex thread 01a0226e-2fa2-7222-a6d9-79ab971ac616 (2026-08-28), executable TRAIN rule discussion.</a:t>
+            </a:r>
+          </a:p>
+          <a:p xmlns:a="http://schemas.openxmlformats.org/drawingml/2006/main">
+            <a:r>
+              <a:t>[/Sources]</a:t>
+            </a:r>
+          </a:p>
+        </p:txBody>
+      </p:sp>
+      <p:sp>
+        <p:nvSpPr>
+          <p:cNvPr id="4" name="Slide Number Placeholder 3"/>
+          <p:cNvSpPr>
+            <a:spLocks xmlns:a="http://schemas.openxmlformats.org/drawingml/2006/main" noGrp="1"/>
+          </p:cNvSpPr>
+          <p:nvPr>
+            <p:ph type="sldNum" idx="5"/>
+          </p:nvPr>
+        </p:nvSpPr>
+        <p:spPr/>
+        <p:txBody>
+          <a:bodyPr xmlns:a="http://schemas.openxmlformats.org/drawingml/2006/main"/>
+          <a:lstStyle xmlns:a="http://schemas.openxmlformats.org/drawingml/2006/main"/>
+          <a:p xmlns:a="http://schemas.openxmlformats.org/drawingml/2006/main"/>
+        </p:txBody>
+      </p:sp>
+    </p:spTree>
+  </p:cSld>
+  <p:clrMapOvr>
+    <a:masterClrMapping xmlns:a="http://schemas.openxmlformats.org/drawingml/2006/main"/>
+  </p:clrMapOvr>
+</p:notes>
+</file>
+
+<file path=ppt/notesSlides/notesSlide19.xml><?xml version="1.0" encoding="utf-8"?>
+<p:notes xmlns:p="http://schemas.openxmlformats.org/presentationml/2006/main">
+  <p:cSld>
+    <p:spTree>
+      <p:nvGrpSpPr>
+        <p:cNvPr id="1" name=""/>
+        <p:cNvGrpSpPr/>
+        <p:nvPr/>
+      </p:nvGrpSpPr>
+      <p:grpSpPr>
+        <a:xfrm xmlns:a="http://schemas.openxmlformats.org/drawingml/2006/main"/>
+      </p:grpSpPr>
+      <p:sp>
+        <p:nvSpPr>
+          <p:cNvPr id="2" name="Slide Image Placeholder 1"/>
+          <p:cNvSpPr>
+            <a:spLocks xmlns:a="http://schemas.openxmlformats.org/drawingml/2006/main" noGrp="1"/>
+          </p:cNvSpPr>
+          <p:nvPr>
+            <p:ph type="sldImg" idx="0"/>
+          </p:nvPr>
+        </p:nvSpPr>
+        <p:spPr/>
+      </p:sp>
+      <p:sp>
+        <p:nvSpPr>
+          <p:cNvPr id="3" name="Notes Placeholder 2"/>
+          <p:cNvSpPr>
+            <a:spLocks xmlns:a="http://schemas.openxmlformats.org/drawingml/2006/main" noGrp="1"/>
+          </p:cNvSpPr>
+          <p:nvPr>
+            <p:ph type="body" idx="1"/>
+          </p:nvPr>
+        </p:nvSpPr>
+        <p:spPr/>
+        <p:txBody>
+          <a:bodyPr xmlns:a="http://schemas.openxmlformats.org/drawingml/2006/main"/>
+          <a:lstStyle xmlns:a="http://schemas.openxmlformats.org/drawingml/2006/main"/>
+          <a:p xmlns:a="http://schemas.openxmlformats.org/drawingml/2006/main">
+            <a:r>
+              <a:t>The equal-sector median asset earns +16.7 bp net excess per trade and the median core asset is barely positive at +1.9 bp. But the event-pooled core mean is -25.1 bp. That sign conflict means the result depends materially on whether assets, sectors, or events receive equal weight.</a:t>
+            </a:r>
+          </a:p>
+          <a:p xmlns:a="http://schemas.openxmlformats.org/drawingml/2006/main">
+            <a:r>
+              <a:t/>
+            </a:r>
+          </a:p>
+          <a:p xmlns:a="http://schemas.openxmlformats.org/drawingml/2006/main">
+            <a:r>
+              <a:t>[Sources]</a:t>
+            </a:r>
+          </a:p>
+          <a:p xmlns:a="http://schemas.openxmlformats.org/drawingml/2006/main">
+            <a:r>
+              <a:t>- runs/research_workbench/operator_hypothesis_lab/return_geometry_next_open_rule_translation_20260828/equal_sector_summary.csv</a:t>
+            </a:r>
+          </a:p>
+          <a:p xmlns:a="http://schemas.openxmlformats.org/drawingml/2006/main">
+            <a:r>
+              <a:t>- runs/research_workbench/operator_hypothesis_lab/return_geometry_next_open_rule_translation_20260828/trade_summary.csv</a:t>
+            </a:r>
+          </a:p>
+          <a:p xmlns:a="http://schemas.openxmlformats.org/drawingml/2006/main">
+            <a:r>
+              <a:t>- runs/research_workbench/operator_hypothesis_lab/return_geometry_next_open_rule_translation_20260828/visuals/core_aggregation_lenses.png</a:t>
+            </a:r>
+          </a:p>
+          <a:p xmlns:a="http://schemas.openxmlformats.org/drawingml/2006/main">
+            <a:r>
+              <a:t>- Codex thread 01a0226e-2fa2-7222-a6d9-79ab971ac616 (2026-08-28), executable TRAIN rule discussion.</a:t>
+            </a:r>
+          </a:p>
+          <a:p xmlns:a="http://schemas.openxmlformats.org/drawingml/2006/main">
+            <a:r>
+              <a:t>[/Sources]</a:t>
+            </a:r>
+          </a:p>
+        </p:txBody>
+      </p:sp>
+      <p:sp>
+        <p:nvSpPr>
+          <p:cNvPr id="4" name="Slide Number Placeholder 3"/>
+          <p:cNvSpPr>
+            <a:spLocks xmlns:a="http://schemas.openxmlformats.org/drawingml/2006/main" noGrp="1"/>
+          </p:cNvSpPr>
+          <p:nvPr>
+            <p:ph type="sldNum" idx="5"/>
+          </p:nvPr>
+        </p:nvSpPr>
+        <p:spPr/>
+        <p:txBody>
+          <a:bodyPr xmlns:a="http://schemas.openxmlformats.org/drawingml/2006/main"/>
+          <a:lstStyle xmlns:a="http://schemas.openxmlformats.org/drawingml/2006/main"/>
+          <a:p xmlns:a="http://schemas.openxmlformats.org/drawingml/2006/main"/>
+        </p:txBody>
+      </p:sp>
+    </p:spTree>
+  </p:cSld>
+  <p:clrMapOvr>
+    <a:masterClrMapping xmlns:a="http://schemas.openxmlformats.org/drawingml/2006/main"/>
+  </p:clrMapOvr>
+</p:notes>
+</file>
+
 <file path=ppt/notesSlides/notesSlide2.xml><?xml version="1.0" encoding="utf-8"?>
 <p:notes xmlns:p="http://schemas.openxmlformats.org/presentationml/2006/main">
   <p:cSld>
@@ -1106,6 +1626,521 @@
           <a:p xmlns:a="http://schemas.openxmlformats.org/drawingml/2006/main">
             <a:r>
               <a:t>- operator_hypothesis_lab/docs/RETURN_GEOMETRY_WIDE_ATLAS_2018_2023.md</a:t>
+            </a:r>
+          </a:p>
+          <a:p xmlns:a="http://schemas.openxmlformats.org/drawingml/2006/main">
+            <a:r>
+              <a:t>[/Sources]</a:t>
+            </a:r>
+          </a:p>
+        </p:txBody>
+      </p:sp>
+      <p:sp>
+        <p:nvSpPr>
+          <p:cNvPr id="4" name="Slide Number Placeholder 3"/>
+          <p:cNvSpPr>
+            <a:spLocks xmlns:a="http://schemas.openxmlformats.org/drawingml/2006/main" noGrp="1"/>
+          </p:cNvSpPr>
+          <p:nvPr>
+            <p:ph type="sldNum" idx="5"/>
+          </p:nvPr>
+        </p:nvSpPr>
+        <p:spPr/>
+        <p:txBody>
+          <a:bodyPr xmlns:a="http://schemas.openxmlformats.org/drawingml/2006/main"/>
+          <a:lstStyle xmlns:a="http://schemas.openxmlformats.org/drawingml/2006/main"/>
+          <a:p xmlns:a="http://schemas.openxmlformats.org/drawingml/2006/main"/>
+        </p:txBody>
+      </p:sp>
+    </p:spTree>
+  </p:cSld>
+  <p:clrMapOvr>
+    <a:masterClrMapping xmlns:a="http://schemas.openxmlformats.org/drawingml/2006/main"/>
+  </p:clrMapOvr>
+</p:notes>
+</file>
+
+<file path=ppt/notesSlides/notesSlide20.xml><?xml version="1.0" encoding="utf-8"?>
+<p:notes xmlns:p="http://schemas.openxmlformats.org/presentationml/2006/main">
+  <p:cSld>
+    <p:spTree>
+      <p:nvGrpSpPr>
+        <p:cNvPr id="1" name=""/>
+        <p:cNvGrpSpPr/>
+        <p:nvPr/>
+      </p:nvGrpSpPr>
+      <p:grpSpPr>
+        <a:xfrm xmlns:a="http://schemas.openxmlformats.org/drawingml/2006/main"/>
+      </p:grpSpPr>
+      <p:sp>
+        <p:nvSpPr>
+          <p:cNvPr id="2" name="Slide Image Placeholder 1"/>
+          <p:cNvSpPr>
+            <a:spLocks xmlns:a="http://schemas.openxmlformats.org/drawingml/2006/main" noGrp="1"/>
+          </p:cNvSpPr>
+          <p:nvPr>
+            <p:ph type="sldImg" idx="0"/>
+          </p:nvPr>
+        </p:nvSpPr>
+        <p:spPr/>
+      </p:sp>
+      <p:sp>
+        <p:nvSpPr>
+          <p:cNvPr id="3" name="Notes Placeholder 2"/>
+          <p:cNvSpPr>
+            <a:spLocks xmlns:a="http://schemas.openxmlformats.org/drawingml/2006/main" noGrp="1"/>
+          </p:cNvSpPr>
+          <p:nvPr>
+            <p:ph type="body" idx="1"/>
+          </p:nvPr>
+        </p:nvSpPr>
+        <p:spPr/>
+        <p:txBody>
+          <a:bodyPr xmlns:a="http://schemas.openxmlformats.org/drawingml/2006/main"/>
+          <a:lstStyle xmlns:a="http://schemas.openxmlformats.org/drawingml/2006/main"/>
+          <a:p xmlns:a="http://schemas.openxmlformats.org/drawingml/2006/main">
+            <a:r>
+              <a:t>The TRAIN mechanics are not temporally stable: 2019 and 2021 are strongly positive, while 2020 and 2022 are negative. This calendar view is descriptive and does not create a new year filter.</a:t>
+            </a:r>
+          </a:p>
+          <a:p xmlns:a="http://schemas.openxmlformats.org/drawingml/2006/main">
+            <a:r>
+              <a:t/>
+            </a:r>
+          </a:p>
+          <a:p xmlns:a="http://schemas.openxmlformats.org/drawingml/2006/main">
+            <a:r>
+              <a:t>[Sources]</a:t>
+            </a:r>
+          </a:p>
+          <a:p xmlns:a="http://schemas.openxmlformats.org/drawingml/2006/main">
+            <a:r>
+              <a:t>- runs/research_workbench/operator_hypothesis_lab/return_geometry_next_open_rule_translation_20260828/core_year_summary.csv</a:t>
+            </a:r>
+          </a:p>
+          <a:p xmlns:a="http://schemas.openxmlformats.org/drawingml/2006/main">
+            <a:r>
+              <a:t>- runs/research_workbench/operator_hypothesis_lab/return_geometry_next_open_rule_translation_20260828/visuals/core_yearly_net_return.png</a:t>
+            </a:r>
+          </a:p>
+          <a:p xmlns:a="http://schemas.openxmlformats.org/drawingml/2006/main">
+            <a:r>
+              <a:t>- Codex thread 01a0226e-2fa2-7222-a6d9-79ab971ac616 (2026-08-28), executable TRAIN rule discussion.</a:t>
+            </a:r>
+          </a:p>
+          <a:p xmlns:a="http://schemas.openxmlformats.org/drawingml/2006/main">
+            <a:r>
+              <a:t>[/Sources]</a:t>
+            </a:r>
+          </a:p>
+        </p:txBody>
+      </p:sp>
+      <p:sp>
+        <p:nvSpPr>
+          <p:cNvPr id="4" name="Slide Number Placeholder 3"/>
+          <p:cNvSpPr>
+            <a:spLocks xmlns:a="http://schemas.openxmlformats.org/drawingml/2006/main" noGrp="1"/>
+          </p:cNvSpPr>
+          <p:nvPr>
+            <p:ph type="sldNum" idx="5"/>
+          </p:nvPr>
+        </p:nvSpPr>
+        <p:spPr/>
+        <p:txBody>
+          <a:bodyPr xmlns:a="http://schemas.openxmlformats.org/drawingml/2006/main"/>
+          <a:lstStyle xmlns:a="http://schemas.openxmlformats.org/drawingml/2006/main"/>
+          <a:p xmlns:a="http://schemas.openxmlformats.org/drawingml/2006/main"/>
+        </p:txBody>
+      </p:sp>
+    </p:spTree>
+  </p:cSld>
+  <p:clrMapOvr>
+    <a:masterClrMapping xmlns:a="http://schemas.openxmlformats.org/drawingml/2006/main"/>
+  </p:clrMapOvr>
+</p:notes>
+</file>
+
+<file path=ppt/notesSlides/notesSlide21.xml><?xml version="1.0" encoding="utf-8"?>
+<p:notes xmlns:p="http://schemas.openxmlformats.org/presentationml/2006/main">
+  <p:cSld>
+    <p:spTree>
+      <p:nvGrpSpPr>
+        <p:cNvPr id="1" name=""/>
+        <p:cNvGrpSpPr/>
+        <p:nvPr/>
+      </p:nvGrpSpPr>
+      <p:grpSpPr>
+        <a:xfrm xmlns:a="http://schemas.openxmlformats.org/drawingml/2006/main"/>
+      </p:grpSpPr>
+      <p:sp>
+        <p:nvSpPr>
+          <p:cNvPr id="2" name="Slide Image Placeholder 1"/>
+          <p:cNvSpPr>
+            <a:spLocks xmlns:a="http://schemas.openxmlformats.org/drawingml/2006/main" noGrp="1"/>
+          </p:cNvSpPr>
+          <p:nvPr>
+            <p:ph type="sldImg" idx="0"/>
+          </p:nvPr>
+        </p:nvSpPr>
+        <p:spPr/>
+      </p:sp>
+      <p:sp>
+        <p:nvSpPr>
+          <p:cNvPr id="3" name="Notes Placeholder 2"/>
+          <p:cNvSpPr>
+            <a:spLocks xmlns:a="http://schemas.openxmlformats.org/drawingml/2006/main" noGrp="1"/>
+          </p:cNvSpPr>
+          <p:nvPr>
+            <p:ph type="body" idx="1"/>
+          </p:nvPr>
+        </p:nvSpPr>
+        <p:spPr/>
+        <p:txBody>
+          <a:bodyPr xmlns:a="http://schemas.openxmlformats.org/drawingml/2006/main"/>
+          <a:lstStyle xmlns:a="http://schemas.openxmlformats.org/drawingml/2006/main"/>
+          <a:p xmlns:a="http://schemas.openxmlformats.org/drawingml/2006/main">
+            <a:r>
+              <a:t>Cohort paths reveal that the atlas is not behaviorally homogeneous. The 88-stock GICS core and equity ETFs stabilize above zero on average, while the attention cohort continues declining after entry. The non-equity controls remain weak.</a:t>
+            </a:r>
+          </a:p>
+          <a:p xmlns:a="http://schemas.openxmlformats.org/drawingml/2006/main">
+            <a:r>
+              <a:t/>
+            </a:r>
+          </a:p>
+          <a:p xmlns:a="http://schemas.openxmlformats.org/drawingml/2006/main">
+            <a:r>
+              <a:t>[Sources]</a:t>
+            </a:r>
+          </a:p>
+          <a:p xmlns:a="http://schemas.openxmlformats.org/drawingml/2006/main">
+            <a:r>
+              <a:t>- runs/research_workbench/operator_hypothesis_lab/return_geometry_next_open_rule_translation_20260828/trade_path_summary.csv</a:t>
+            </a:r>
+          </a:p>
+          <a:p xmlns:a="http://schemas.openxmlformats.org/drawingml/2006/main">
+            <a:r>
+              <a:t>- runs/research_workbench/operator_hypothesis_lab/return_geometry_next_open_rule_translation_20260828/cohort_summary.csv</a:t>
+            </a:r>
+          </a:p>
+          <a:p xmlns:a="http://schemas.openxmlformats.org/drawingml/2006/main">
+            <a:r>
+              <a:t>- runs/research_workbench/operator_hypothesis_lab/return_geometry_next_open_rule_translation_20260828/visuals/mean_trade_path_by_cohort.png</a:t>
+            </a:r>
+          </a:p>
+          <a:p xmlns:a="http://schemas.openxmlformats.org/drawingml/2006/main">
+            <a:r>
+              <a:t>- Codex thread 01a0226e-2fa2-7222-a6d9-79ab971ac616 (2026-08-28), executable TRAIN rule discussion.</a:t>
+            </a:r>
+          </a:p>
+          <a:p xmlns:a="http://schemas.openxmlformats.org/drawingml/2006/main">
+            <a:r>
+              <a:t>[/Sources]</a:t>
+            </a:r>
+          </a:p>
+        </p:txBody>
+      </p:sp>
+      <p:sp>
+        <p:nvSpPr>
+          <p:cNvPr id="4" name="Slide Number Placeholder 3"/>
+          <p:cNvSpPr>
+            <a:spLocks xmlns:a="http://schemas.openxmlformats.org/drawingml/2006/main" noGrp="1"/>
+          </p:cNvSpPr>
+          <p:nvPr>
+            <p:ph type="sldNum" idx="5"/>
+          </p:nvPr>
+        </p:nvSpPr>
+        <p:spPr/>
+        <p:txBody>
+          <a:bodyPr xmlns:a="http://schemas.openxmlformats.org/drawingml/2006/main"/>
+          <a:lstStyle xmlns:a="http://schemas.openxmlformats.org/drawingml/2006/main"/>
+          <a:p xmlns:a="http://schemas.openxmlformats.org/drawingml/2006/main"/>
+        </p:txBody>
+      </p:sp>
+    </p:spTree>
+  </p:cSld>
+  <p:clrMapOvr>
+    <a:masterClrMapping xmlns:a="http://schemas.openxmlformats.org/drawingml/2006/main"/>
+  </p:clrMapOvr>
+</p:notes>
+</file>
+
+<file path=ppt/notesSlides/notesSlide22.xml><?xml version="1.0" encoding="utf-8"?>
+<p:notes xmlns:p="http://schemas.openxmlformats.org/presentationml/2006/main">
+  <p:cSld>
+    <p:spTree>
+      <p:nvGrpSpPr>
+        <p:cNvPr id="1" name=""/>
+        <p:cNvGrpSpPr/>
+        <p:nvPr/>
+      </p:nvGrpSpPr>
+      <p:grpSpPr>
+        <a:xfrm xmlns:a="http://schemas.openxmlformats.org/drawingml/2006/main"/>
+      </p:grpSpPr>
+      <p:sp>
+        <p:nvSpPr>
+          <p:cNvPr id="2" name="Slide Image Placeholder 1"/>
+          <p:cNvSpPr>
+            <a:spLocks xmlns:a="http://schemas.openxmlformats.org/drawingml/2006/main" noGrp="1"/>
+          </p:cNvSpPr>
+          <p:nvPr>
+            <p:ph type="sldImg" idx="0"/>
+          </p:nvPr>
+        </p:nvSpPr>
+        <p:spPr/>
+      </p:sp>
+      <p:sp>
+        <p:nvSpPr>
+          <p:cNvPr id="3" name="Notes Placeholder 2"/>
+          <p:cNvSpPr>
+            <a:spLocks xmlns:a="http://schemas.openxmlformats.org/drawingml/2006/main" noGrp="1"/>
+          </p:cNvSpPr>
+          <p:nvPr>
+            <p:ph type="body" idx="1"/>
+          </p:nvPr>
+        </p:nvSpPr>
+        <p:spPr/>
+        <p:txBody>
+          <a:bodyPr xmlns:a="http://schemas.openxmlformats.org/drawingml/2006/main"/>
+          <a:lstStyle xmlns:a="http://schemas.openxmlformats.org/drawingml/2006/main"/>
+          <a:p xmlns:a="http://schemas.openxmlformats.org/drawingml/2006/main">
+            <a:r>
+              <a:t>Even within sectors, asset-level outcomes span both signs. This dispersion is why a positive equal-sector median is not enough to promote the rule and why the breadth gate was frozen before seeing the result.</a:t>
+            </a:r>
+          </a:p>
+          <a:p xmlns:a="http://schemas.openxmlformats.org/drawingml/2006/main">
+            <a:r>
+              <a:t/>
+            </a:r>
+          </a:p>
+          <a:p xmlns:a="http://schemas.openxmlformats.org/drawingml/2006/main">
+            <a:r>
+              <a:t>[Sources]</a:t>
+            </a:r>
+          </a:p>
+          <a:p xmlns:a="http://schemas.openxmlformats.org/drawingml/2006/main">
+            <a:r>
+              <a:t>- runs/research_workbench/operator_hypothesis_lab/return_geometry_next_open_rule_translation_20260828/asset_summary.csv</a:t>
+            </a:r>
+          </a:p>
+          <a:p xmlns:a="http://schemas.openxmlformats.org/drawingml/2006/main">
+            <a:r>
+              <a:t>- runs/research_workbench/operator_hypothesis_lab/return_geometry_next_open_rule_translation_20260828/core_sector_summary.csv</a:t>
+            </a:r>
+          </a:p>
+          <a:p xmlns:a="http://schemas.openxmlformats.org/drawingml/2006/main">
+            <a:r>
+              <a:t>- runs/research_workbench/operator_hypothesis_lab/return_geometry_next_open_rule_translation_20260828/visuals/core_asset_excess_distribution.png</a:t>
+            </a:r>
+          </a:p>
+          <a:p xmlns:a="http://schemas.openxmlformats.org/drawingml/2006/main">
+            <a:r>
+              <a:t>- Codex thread 01a0226e-2fa2-7222-a6d9-79ab971ac616 (2026-08-28), executable TRAIN rule discussion.</a:t>
+            </a:r>
+          </a:p>
+          <a:p xmlns:a="http://schemas.openxmlformats.org/drawingml/2006/main">
+            <a:r>
+              <a:t>[/Sources]</a:t>
+            </a:r>
+          </a:p>
+        </p:txBody>
+      </p:sp>
+      <p:sp>
+        <p:nvSpPr>
+          <p:cNvPr id="4" name="Slide Number Placeholder 3"/>
+          <p:cNvSpPr>
+            <a:spLocks xmlns:a="http://schemas.openxmlformats.org/drawingml/2006/main" noGrp="1"/>
+          </p:cNvSpPr>
+          <p:nvPr>
+            <p:ph type="sldNum" idx="5"/>
+          </p:nvPr>
+        </p:nvSpPr>
+        <p:spPr/>
+        <p:txBody>
+          <a:bodyPr xmlns:a="http://schemas.openxmlformats.org/drawingml/2006/main"/>
+          <a:lstStyle xmlns:a="http://schemas.openxmlformats.org/drawingml/2006/main"/>
+          <a:p xmlns:a="http://schemas.openxmlformats.org/drawingml/2006/main"/>
+        </p:txBody>
+      </p:sp>
+    </p:spTree>
+  </p:cSld>
+  <p:clrMapOvr>
+    <a:masterClrMapping xmlns:a="http://schemas.openxmlformats.org/drawingml/2006/main"/>
+  </p:clrMapOvr>
+</p:notes>
+</file>
+
+<file path=ppt/notesSlides/notesSlide23.xml><?xml version="1.0" encoding="utf-8"?>
+<p:notes xmlns:p="http://schemas.openxmlformats.org/presentationml/2006/main">
+  <p:cSld>
+    <p:spTree>
+      <p:nvGrpSpPr>
+        <p:cNvPr id="1" name=""/>
+        <p:cNvGrpSpPr/>
+        <p:nvPr/>
+      </p:nvGrpSpPr>
+      <p:grpSpPr>
+        <a:xfrm xmlns:a="http://schemas.openxmlformats.org/drawingml/2006/main"/>
+      </p:grpSpPr>
+      <p:sp>
+        <p:nvSpPr>
+          <p:cNvPr id="2" name="Slide Image Placeholder 1"/>
+          <p:cNvSpPr>
+            <a:spLocks xmlns:a="http://schemas.openxmlformats.org/drawingml/2006/main" noGrp="1"/>
+          </p:cNvSpPr>
+          <p:nvPr>
+            <p:ph type="sldImg" idx="0"/>
+          </p:nvPr>
+        </p:nvSpPr>
+        <p:spPr/>
+      </p:sp>
+      <p:sp>
+        <p:nvSpPr>
+          <p:cNvPr id="3" name="Notes Placeholder 2"/>
+          <p:cNvSpPr>
+            <a:spLocks xmlns:a="http://schemas.openxmlformats.org/drawingml/2006/main" noGrp="1"/>
+          </p:cNvSpPr>
+          <p:nvPr>
+            <p:ph type="body" idx="1"/>
+          </p:nvPr>
+        </p:nvSpPr>
+        <p:spPr/>
+        <p:txBody>
+          <a:bodyPr xmlns:a="http://schemas.openxmlformats.org/drawingml/2006/main"/>
+          <a:lstStyle xmlns:a="http://schemas.openxmlformats.org/drawingml/2006/main"/>
+          <a:p xmlns:a="http://schemas.openxmlformats.org/drawingml/2006/main">
+            <a:r>
+              <a:t>These are the first eligible deterministic trades for TSLA, AMD, GOOGL, and SPY—not chosen winners. Red marks the qualifying signal close, green the next-open entry, and blue the 20-session exit. The panels make the rule's heterogeneous path behavior directly inspectable.</a:t>
+            </a:r>
+          </a:p>
+          <a:p xmlns:a="http://schemas.openxmlformats.org/drawingml/2006/main">
+            <a:r>
+              <a:t/>
+            </a:r>
+          </a:p>
+          <a:p xmlns:a="http://schemas.openxmlformats.org/drawingml/2006/main">
+            <a:r>
+              <a:t>[Sources]</a:t>
+            </a:r>
+          </a:p>
+          <a:p xmlns:a="http://schemas.openxmlformats.org/drawingml/2006/main">
+            <a:r>
+              <a:t>- runs/research_workbench/operator_hypothesis_lab/return_geometry_next_open_rule_translation_20260828/primary_trade_ledger.csv</a:t>
+            </a:r>
+          </a:p>
+          <a:p xmlns:a="http://schemas.openxmlformats.org/drawingml/2006/main">
+            <a:r>
+              <a:t>- runs/research_workbench/operator_hypothesis_lab/return_geometry_next_open_rule_translation_20260828/visuals/representative_trade_tapes.png</a:t>
+            </a:r>
+          </a:p>
+          <a:p xmlns:a="http://schemas.openxmlformats.org/drawingml/2006/main">
+            <a:r>
+              <a:t>- Codex thread 01a0226e-2fa2-7222-a6d9-79ab971ac616 (2026-08-28), executable TRAIN rule discussion.</a:t>
+            </a:r>
+          </a:p>
+          <a:p xmlns:a="http://schemas.openxmlformats.org/drawingml/2006/main">
+            <a:r>
+              <a:t>[/Sources]</a:t>
+            </a:r>
+          </a:p>
+        </p:txBody>
+      </p:sp>
+      <p:sp>
+        <p:nvSpPr>
+          <p:cNvPr id="4" name="Slide Number Placeholder 3"/>
+          <p:cNvSpPr>
+            <a:spLocks xmlns:a="http://schemas.openxmlformats.org/drawingml/2006/main" noGrp="1"/>
+          </p:cNvSpPr>
+          <p:nvPr>
+            <p:ph type="sldNum" idx="5"/>
+          </p:nvPr>
+        </p:nvSpPr>
+        <p:spPr/>
+        <p:txBody>
+          <a:bodyPr xmlns:a="http://schemas.openxmlformats.org/drawingml/2006/main"/>
+          <a:lstStyle xmlns:a="http://schemas.openxmlformats.org/drawingml/2006/main"/>
+          <a:p xmlns:a="http://schemas.openxmlformats.org/drawingml/2006/main"/>
+        </p:txBody>
+      </p:sp>
+    </p:spTree>
+  </p:cSld>
+  <p:clrMapOvr>
+    <a:masterClrMapping xmlns:a="http://schemas.openxmlformats.org/drawingml/2006/main"/>
+  </p:clrMapOvr>
+</p:notes>
+</file>
+
+<file path=ppt/notesSlides/notesSlide24.xml><?xml version="1.0" encoding="utf-8"?>
+<p:notes xmlns:p="http://schemas.openxmlformats.org/presentationml/2006/main">
+  <p:cSld>
+    <p:spTree>
+      <p:nvGrpSpPr>
+        <p:cNvPr id="1" name=""/>
+        <p:cNvGrpSpPr/>
+        <p:nvPr/>
+      </p:nvGrpSpPr>
+      <p:grpSpPr>
+        <a:xfrm xmlns:a="http://schemas.openxmlformats.org/drawingml/2006/main"/>
+      </p:grpSpPr>
+      <p:sp>
+        <p:nvSpPr>
+          <p:cNvPr id="2" name="Slide Image Placeholder 1"/>
+          <p:cNvSpPr>
+            <a:spLocks xmlns:a="http://schemas.openxmlformats.org/drawingml/2006/main" noGrp="1"/>
+          </p:cNvSpPr>
+          <p:nvPr>
+            <p:ph type="sldImg" idx="0"/>
+          </p:nvPr>
+        </p:nvSpPr>
+        <p:spPr/>
+      </p:sp>
+      <p:sp>
+        <p:nvSpPr>
+          <p:cNvPr id="3" name="Notes Placeholder 2"/>
+          <p:cNvSpPr>
+            <a:spLocks xmlns:a="http://schemas.openxmlformats.org/drawingml/2006/main" noGrp="1"/>
+          </p:cNvSpPr>
+          <p:nvPr>
+            <p:ph type="body" idx="1"/>
+          </p:nvPr>
+        </p:nvSpPr>
+        <p:spPr/>
+        <p:txBody>
+          <a:bodyPr xmlns:a="http://schemas.openxmlformats.org/drawingml/2006/main"/>
+          <a:lstStyle xmlns:a="http://schemas.openxmlformats.org/drawingml/2006/main"/>
+          <a:p xmlns:a="http://schemas.openxmlformats.org/drawingml/2006/main">
+            <a:r>
+              <a:t>The frozen TRAIN rule does not retain mechanical support. It activates all 129 atlas instruments and 88 of 88 core stocks, so coverage is not the problem. It fails only the predeclared sector-breadth gate, but the event-pooled negative excess and strong cohort/calendar heterogeneity reinforce the STOP. No post-2023 outcomes were opened.</a:t>
+            </a:r>
+          </a:p>
+          <a:p xmlns:a="http://schemas.openxmlformats.org/drawingml/2006/main">
+            <a:r>
+              <a:t/>
+            </a:r>
+          </a:p>
+          <a:p xmlns:a="http://schemas.openxmlformats.org/drawingml/2006/main">
+            <a:r>
+              <a:t>[Sources]</a:t>
+            </a:r>
+          </a:p>
+          <a:p xmlns:a="http://schemas.openxmlformats.org/drawingml/2006/main">
+            <a:r>
+              <a:t>- runs/research_workbench/operator_hypothesis_lab/return_geometry_next_open_rule_translation_20260828/status.csv</a:t>
+            </a:r>
+          </a:p>
+          <a:p xmlns:a="http://schemas.openxmlformats.org/drawingml/2006/main">
+            <a:r>
+              <a:t>- runs/research_workbench/operator_hypothesis_lab/return_geometry_next_open_rule_translation_20260828/train_mechanics_gates.csv</a:t>
+            </a:r>
+          </a:p>
+          <a:p xmlns:a="http://schemas.openxmlformats.org/drawingml/2006/main">
+            <a:r>
+              <a:t>- runs/research_workbench/operator_hypothesis_lab/return_geometry_next_open_rule_translation_20260828/report.md</a:t>
+            </a:r>
+          </a:p>
+          <a:p xmlns:a="http://schemas.openxmlformats.org/drawingml/2006/main">
+            <a:r>
+              <a:t>- operator_hypothesis_lab/docs/RETURN_GEOMETRY_NEXT_OPEN_RULE_TRANSLATION_2018_2023.md</a:t>
             </a:r>
           </a:p>
           <a:p xmlns:a="http://schemas.openxmlformats.org/drawingml/2006/main">
@@ -1868,7 +2903,7 @@
   </p:cSld>
   <p:clrMap bg1="lt1" tx1="dk1" bg2="lt2" tx2="dk2" accent1="accent1" accent2="accent2" accent3="accent3" accent4="accent4" accent5="accent5" accent6="accent6" hlink="hlink" folHlink="folHlink"/>
   <p:sldLayoutIdLst>
-    <p:sldLayoutId xmlns:r="http://schemas.openxmlformats.org/officeDocument/2006/relationships" id="2147483649" r:id="Rc3bd7254ee25416f"/>
+    <p:sldLayoutId xmlns:r="http://schemas.openxmlformats.org/officeDocument/2006/relationships" id="2147483649" r:id="Rbd3dffb78ea74b1e"/>
   </p:sldLayoutIdLst>
   <p:txStyles>
     <p:titleStyle>
@@ -3009,7 +4044,7 @@
           <p:nvPr/>
         </p:nvPicPr>
         <p:blipFill>
-          <a:blip xmlns:r="http://schemas.openxmlformats.org/officeDocument/2006/relationships" xmlns:a="http://schemas.openxmlformats.org/drawingml/2006/main" r:embed="R3c6a4bbcc8a9404e"/>
+          <a:blip xmlns:r="http://schemas.openxmlformats.org/officeDocument/2006/relationships" xmlns:a="http://schemas.openxmlformats.org/drawingml/2006/main" r:embed="Rfd766bee8c044ba7"/>
           <a:stretch xmlns:a="http://schemas.openxmlformats.org/drawingml/2006/main"/>
         </p:blipFill>
         <p:spPr>
@@ -3140,7 +4175,7 @@
         </p:spPr>
         <p:txBody>
           <a:bodyPr xmlns:a="http://schemas.openxmlformats.org/drawingml/2006/main" wrap="square" lIns="0" tIns="0" rIns="0" bIns="0" anchor="t">
-            <a:normAutofit fontScale="99556"/>
+            <a:normAutofit fontScale="100000"/>
           </a:bodyPr>
           <a:lstStyle xmlns:a="http://schemas.openxmlformats.org/drawingml/2006/main"/>
           <a:p xmlns:a="http://schemas.openxmlformats.org/drawingml/2006/main">
@@ -3164,7 +4199,7 @@
                 <a:ea typeface="Arial"/>
                 <a:cs typeface="Arial"/>
               </a:rPr>
-              <a:t>The response remains broad through sessions 41–60</a:t>
+              <a:t>The response stays broad through sessions 41–60</a:t>
             </a:r>
           </a:p>
         </p:txBody>
@@ -3329,7 +4364,7 @@
           <p:nvPr/>
         </p:nvPicPr>
         <p:blipFill>
-          <a:blip xmlns:r="http://schemas.openxmlformats.org/officeDocument/2006/relationships" xmlns:a="http://schemas.openxmlformats.org/drawingml/2006/main" r:embed="Rc6c075b1341f4bb5"/>
+          <a:blip xmlns:r="http://schemas.openxmlformats.org/officeDocument/2006/relationships" xmlns:a="http://schemas.openxmlformats.org/drawingml/2006/main" r:embed="Rc9e6468457884f53"/>
           <a:stretch xmlns:a="http://schemas.openxmlformats.org/drawingml/2006/main"/>
         </p:blipFill>
         <p:spPr>
@@ -3649,7 +4684,7 @@
           <p:nvPr/>
         </p:nvPicPr>
         <p:blipFill>
-          <a:blip xmlns:r="http://schemas.openxmlformats.org/officeDocument/2006/relationships" xmlns:a="http://schemas.openxmlformats.org/drawingml/2006/main" r:embed="Rd80499b1559a4104"/>
+          <a:blip xmlns:r="http://schemas.openxmlformats.org/officeDocument/2006/relationships" xmlns:a="http://schemas.openxmlformats.org/drawingml/2006/main" r:embed="R3abad371ac3146f9"/>
           <a:stretch xmlns:a="http://schemas.openxmlformats.org/drawingml/2006/main"/>
         </p:blipFill>
         <p:spPr>
@@ -3969,7 +5004,7 @@
           <p:nvPr/>
         </p:nvPicPr>
         <p:blipFill>
-          <a:blip xmlns:r="http://schemas.openxmlformats.org/officeDocument/2006/relationships" xmlns:a="http://schemas.openxmlformats.org/drawingml/2006/main" r:embed="R06a8940d53f9429a"/>
+          <a:blip xmlns:r="http://schemas.openxmlformats.org/officeDocument/2006/relationships" xmlns:a="http://schemas.openxmlformats.org/drawingml/2006/main" r:embed="R00c8bba7dc844c19"/>
           <a:stretch xmlns:a="http://schemas.openxmlformats.org/drawingml/2006/main"/>
         </p:blipFill>
         <p:spPr>
@@ -5170,6 +6205,3472 @@
 </p:sld>
 </file>
 
+<file path=ppt/slides/slide15.xml><?xml version="1.0" encoding="utf-8"?>
+<p:sld xmlns:p="http://schemas.openxmlformats.org/presentationml/2006/main">
+  <p:cSld>
+    <p:bg>
+      <p:bgPr>
+        <a:solidFill xmlns:a="http://schemas.openxmlformats.org/drawingml/2006/main">
+          <a:srgbClr val="FFFFFF"/>
+        </a:solidFill>
+      </p:bgPr>
+    </p:bg>
+    <p:spTree>
+      <p:nvGrpSpPr>
+        <p:cNvPr id="1" name=""/>
+        <p:cNvGrpSpPr/>
+        <p:nvPr/>
+      </p:nvGrpSpPr>
+      <p:grpSpPr>
+        <a:xfrm xmlns:a="http://schemas.openxmlformats.org/drawingml/2006/main"/>
+      </p:grpSpPr>
+      <p:sp>
+        <p:nvSpPr>
+          <p:cNvPr id="24" name="section-11">
+            <a:extLst xmlns:a="http://schemas.openxmlformats.org/drawingml/2006/main">
+              <a:ext uri="{FF2B5EF4-FFF2-40B4-BE49-F238E27FC236}">
+                <a16:creationId xmlns:a16="http://schemas.microsoft.com/office/drawing/2014/main" id="{272ED433-B59C-436C-9DFB-4D317B90A13F}"/>
+              </a:ext>
+            </a:extLst>
+          </p:cNvPr>
+          <p:cNvSpPr>
+            <a:spLocks xmlns:a="http://schemas.openxmlformats.org/drawingml/2006/main" noGrp="1"/>
+          </p:cNvSpPr>
+          <p:nvPr/>
+        </p:nvSpPr>
+        <p:spPr>
+          <a:xfrm xmlns:a="http://schemas.openxmlformats.org/drawingml/2006/main">
+            <a:off x="457200" y="228600"/>
+            <a:ext cx="4191000" cy="228600"/>
+          </a:xfrm>
+          <a:prstGeom xmlns:a="http://schemas.openxmlformats.org/drawingml/2006/main" prst="rect">
+            <a:avLst/>
+          </a:prstGeom>
+          <a:noFill xmlns:a="http://schemas.openxmlformats.org/drawingml/2006/main"/>
+          <a:ln xmlns:a="http://schemas.openxmlformats.org/drawingml/2006/main" w="0">
+            <a:noFill/>
+            <a:prstDash val="solid"/>
+          </a:ln>
+        </p:spPr>
+        <p:txBody>
+          <a:bodyPr xmlns:a="http://schemas.openxmlformats.org/drawingml/2006/main" wrap="square" lIns="0" tIns="0" rIns="0" bIns="0" anchor="t">
+            <a:normAutofit fontScale="100000"/>
+          </a:bodyPr>
+          <a:lstStyle xmlns:a="http://schemas.openxmlformats.org/drawingml/2006/main"/>
+          <a:p xmlns:a="http://schemas.openxmlformats.org/drawingml/2006/main">
+            <a:pPr algn="l">
+              <a:buNone/>
+              <a:defRPr sz="1200" b="1">
+                <a:solidFill>
+                  <a:srgbClr val="667384"/>
+                </a:solidFill>
+                <a:latin typeface="Arial"/>
+                <a:ea typeface="Arial"/>
+                <a:cs typeface="Arial"/>
+              </a:defRPr>
+            </a:pPr>
+            <a:r>
+              <a:rPr sz="1200" b="1">
+                <a:solidFill>
+                  <a:srgbClr val="667384"/>
+                </a:solidFill>
+                <a:latin typeface="Arial"/>
+                <a:ea typeface="Arial"/>
+                <a:cs typeface="Arial"/>
+              </a:rPr>
+              <a:t>EXECUTABLE TRANSLATION</a:t>
+            </a:r>
+          </a:p>
+        </p:txBody>
+      </p:sp>
+      <p:sp>
+        <p:nvSpPr>
+          <p:cNvPr id="2" name="title-11">
+            <a:extLst xmlns:a="http://schemas.openxmlformats.org/drawingml/2006/main">
+              <a:ext uri="{FF2B5EF4-FFF2-40B4-BE49-F238E27FC236}">
+                <a16:creationId xmlns:a16="http://schemas.microsoft.com/office/drawing/2014/main" id="{3EC40708-7E00-432C-8ECE-907FA5705292}"/>
+              </a:ext>
+            </a:extLst>
+          </p:cNvPr>
+          <p:cNvSpPr>
+            <a:spLocks xmlns:a="http://schemas.openxmlformats.org/drawingml/2006/main" noGrp="1"/>
+          </p:cNvSpPr>
+          <p:nvPr/>
+        </p:nvSpPr>
+        <p:spPr>
+          <a:xfrm xmlns:a="http://schemas.openxmlformats.org/drawingml/2006/main">
+            <a:off x="457200" y="533400"/>
+            <a:ext cx="11277600" cy="628650"/>
+          </a:xfrm>
+          <a:prstGeom xmlns:a="http://schemas.openxmlformats.org/drawingml/2006/main" prst="rect">
+            <a:avLst/>
+          </a:prstGeom>
+          <a:noFill xmlns:a="http://schemas.openxmlformats.org/drawingml/2006/main"/>
+          <a:ln xmlns:a="http://schemas.openxmlformats.org/drawingml/2006/main" w="0">
+            <a:noFill/>
+            <a:prstDash val="solid"/>
+          </a:ln>
+        </p:spPr>
+        <p:txBody>
+          <a:bodyPr xmlns:a="http://schemas.openxmlformats.org/drawingml/2006/main" wrap="square" lIns="0" tIns="0" rIns="0" bIns="0" anchor="t">
+            <a:normAutofit fontScale="97941"/>
+          </a:bodyPr>
+          <a:lstStyle xmlns:a="http://schemas.openxmlformats.org/drawingml/2006/main"/>
+          <a:p xmlns:a="http://schemas.openxmlformats.org/drawingml/2006/main">
+            <a:pPr algn="l">
+              <a:buNone/>
+              <a:defRPr sz="3525" b="1">
+                <a:solidFill>
+                  <a:srgbClr val="000000"/>
+                </a:solidFill>
+                <a:latin typeface="Arial"/>
+                <a:ea typeface="Arial"/>
+                <a:cs typeface="Arial"/>
+              </a:defRPr>
+            </a:pPr>
+            <a:r>
+              <a:rPr sz="3525" b="1">
+                <a:solidFill>
+                  <a:srgbClr val="000000"/>
+                </a:solidFill>
+                <a:latin typeface="Arial"/>
+                <a:ea typeface="Arial"/>
+                <a:cs typeface="Arial"/>
+              </a:rPr>
+              <a:t>A frozen rule asks whether geometry becomes a trade</a:t>
+            </a:r>
+          </a:p>
+        </p:txBody>
+      </p:sp>
+      <p:sp>
+        <p:nvSpPr>
+          <p:cNvPr id="3" name="">
+            <a:extLst xmlns:a="http://schemas.openxmlformats.org/drawingml/2006/main">
+              <a:ext uri="{FF2B5EF4-FFF2-40B4-BE49-F238E27FC236}">
+                <a16:creationId xmlns:a16="http://schemas.microsoft.com/office/drawing/2014/main" id="{D5CA0FCE-75E8-41EF-A76A-23E9E2120C6A}"/>
+              </a:ext>
+            </a:extLst>
+          </p:cNvPr>
+          <p:cNvSpPr>
+            <a:spLocks xmlns:a="http://schemas.openxmlformats.org/drawingml/2006/main" noGrp="1"/>
+          </p:cNvSpPr>
+          <p:nvPr/>
+        </p:nvSpPr>
+        <p:spPr>
+          <a:xfrm xmlns:a="http://schemas.openxmlformats.org/drawingml/2006/main">
+            <a:off x="457200" y="1200150"/>
+            <a:ext cx="11277600" cy="19050"/>
+          </a:xfrm>
+          <a:prstGeom xmlns:a="http://schemas.openxmlformats.org/drawingml/2006/main" prst="rect">
+            <a:avLst/>
+          </a:prstGeom>
+          <a:solidFill xmlns:a="http://schemas.openxmlformats.org/drawingml/2006/main">
+            <a:srgbClr val="B8BCC4"/>
+          </a:solidFill>
+          <a:ln xmlns:a="http://schemas.openxmlformats.org/drawingml/2006/main" w="0">
+            <a:solidFill>
+              <a:srgbClr val="B8BCC4"/>
+            </a:solidFill>
+            <a:prstDash val="solid"/>
+          </a:ln>
+        </p:spPr>
+      </p:sp>
+      <p:sp>
+        <p:nvSpPr>
+          <p:cNvPr id="4" name="footer-left-11">
+            <a:extLst xmlns:a="http://schemas.openxmlformats.org/drawingml/2006/main">
+              <a:ext uri="{FF2B5EF4-FFF2-40B4-BE49-F238E27FC236}">
+                <a16:creationId xmlns:a16="http://schemas.microsoft.com/office/drawing/2014/main" id="{700DA765-80E0-4197-8700-00D867B86FA2}"/>
+              </a:ext>
+            </a:extLst>
+          </p:cNvPr>
+          <p:cNvSpPr>
+            <a:spLocks xmlns:a="http://schemas.openxmlformats.org/drawingml/2006/main" noGrp="1"/>
+          </p:cNvSpPr>
+          <p:nvPr/>
+        </p:nvSpPr>
+        <p:spPr>
+          <a:xfrm xmlns:a="http://schemas.openxmlformats.org/drawingml/2006/main">
+            <a:off x="457200" y="6515100"/>
+            <a:ext cx="3429000" cy="171450"/>
+          </a:xfrm>
+          <a:prstGeom xmlns:a="http://schemas.openxmlformats.org/drawingml/2006/main" prst="rect">
+            <a:avLst/>
+          </a:prstGeom>
+          <a:noFill xmlns:a="http://schemas.openxmlformats.org/drawingml/2006/main"/>
+          <a:ln xmlns:a="http://schemas.openxmlformats.org/drawingml/2006/main" w="0">
+            <a:noFill/>
+            <a:prstDash val="solid"/>
+          </a:ln>
+        </p:spPr>
+        <p:txBody>
+          <a:bodyPr xmlns:a="http://schemas.openxmlformats.org/drawingml/2006/main" wrap="square" lIns="0" tIns="0" rIns="0" bIns="0" anchor="t">
+            <a:normAutofit fontScale="100000"/>
+          </a:bodyPr>
+          <a:lstStyle xmlns:a="http://schemas.openxmlformats.org/drawingml/2006/main"/>
+          <a:p xmlns:a="http://schemas.openxmlformats.org/drawingml/2006/main">
+            <a:pPr algn="l">
+              <a:buNone/>
+              <a:defRPr sz="825" b="0">
+                <a:solidFill>
+                  <a:srgbClr val="64748B"/>
+                </a:solidFill>
+                <a:latin typeface="Arial"/>
+                <a:ea typeface="Arial"/>
+                <a:cs typeface="Arial"/>
+              </a:defRPr>
+            </a:pPr>
+            <a:r>
+              <a:rPr sz="825" b="0">
+                <a:solidFill>
+                  <a:srgbClr val="64748B"/>
+                </a:solidFill>
+                <a:latin typeface="Arial"/>
+                <a:ea typeface="Arial"/>
+                <a:cs typeface="Arial"/>
+              </a:rPr>
+              <a:t>Return geometry | next-open rule translation</a:t>
+            </a:r>
+          </a:p>
+        </p:txBody>
+      </p:sp>
+      <p:sp>
+        <p:nvSpPr>
+          <p:cNvPr id="5" name="footer-number-11">
+            <a:extLst xmlns:a="http://schemas.openxmlformats.org/drawingml/2006/main">
+              <a:ext uri="{FF2B5EF4-FFF2-40B4-BE49-F238E27FC236}">
+                <a16:creationId xmlns:a16="http://schemas.microsoft.com/office/drawing/2014/main" id="{83896276-4112-4532-AF7C-776C67C58B77}"/>
+              </a:ext>
+            </a:extLst>
+          </p:cNvPr>
+          <p:cNvSpPr>
+            <a:spLocks xmlns:a="http://schemas.openxmlformats.org/drawingml/2006/main" noGrp="1"/>
+          </p:cNvSpPr>
+          <p:nvPr/>
+        </p:nvSpPr>
+        <p:spPr>
+          <a:xfrm xmlns:a="http://schemas.openxmlformats.org/drawingml/2006/main">
+            <a:off x="10477500" y="6496050"/>
+            <a:ext cx="1257300" cy="190500"/>
+          </a:xfrm>
+          <a:prstGeom xmlns:a="http://schemas.openxmlformats.org/drawingml/2006/main" prst="rect">
+            <a:avLst/>
+          </a:prstGeom>
+          <a:noFill xmlns:a="http://schemas.openxmlformats.org/drawingml/2006/main"/>
+          <a:ln xmlns:a="http://schemas.openxmlformats.org/drawingml/2006/main" w="0">
+            <a:noFill/>
+            <a:prstDash val="solid"/>
+          </a:ln>
+        </p:spPr>
+        <p:txBody>
+          <a:bodyPr xmlns:a="http://schemas.openxmlformats.org/drawingml/2006/main" wrap="square" lIns="0" tIns="0" rIns="0" bIns="0" anchor="t">
+            <a:normAutofit fontScale="100000"/>
+          </a:bodyPr>
+          <a:lstStyle xmlns:a="http://schemas.openxmlformats.org/drawingml/2006/main"/>
+          <a:p xmlns:a="http://schemas.openxmlformats.org/drawingml/2006/main">
+            <a:pPr algn="r">
+              <a:buNone/>
+              <a:defRPr sz="1050" b="0">
+                <a:solidFill>
+                  <a:srgbClr val="667384"/>
+                </a:solidFill>
+                <a:latin typeface="Arial"/>
+                <a:ea typeface="Arial"/>
+                <a:cs typeface="Arial"/>
+              </a:defRPr>
+            </a:pPr>
+            <a:r>
+              <a:rPr sz="1050" b="0">
+                <a:solidFill>
+                  <a:srgbClr val="667384"/>
+                </a:solidFill>
+                <a:latin typeface="Arial"/>
+                <a:ea typeface="Arial"/>
+                <a:cs typeface="Arial"/>
+              </a:rPr>
+              <a:t>15</a:t>
+            </a:r>
+          </a:p>
+        </p:txBody>
+      </p:sp>
+      <p:sp>
+        <p:nvSpPr>
+          <p:cNvPr id="6" name="">
+            <a:extLst xmlns:a="http://schemas.openxmlformats.org/drawingml/2006/main">
+              <a:ext uri="{FF2B5EF4-FFF2-40B4-BE49-F238E27FC236}">
+                <a16:creationId xmlns:a16="http://schemas.microsoft.com/office/drawing/2014/main" id="{10F4BA85-46C5-47BD-BA74-EC806E663D58}"/>
+              </a:ext>
+            </a:extLst>
+          </p:cNvPr>
+          <p:cNvSpPr>
+            <a:spLocks xmlns:a="http://schemas.openxmlformats.org/drawingml/2006/main" noGrp="1"/>
+          </p:cNvSpPr>
+          <p:nvPr/>
+        </p:nvSpPr>
+        <p:spPr>
+          <a:xfrm xmlns:a="http://schemas.openxmlformats.org/drawingml/2006/main">
+            <a:off x="552450" y="1600200"/>
+            <a:ext cx="95250" cy="895350"/>
+          </a:xfrm>
+          <a:prstGeom xmlns:a="http://schemas.openxmlformats.org/drawingml/2006/main" prst="rect">
+            <a:avLst/>
+          </a:prstGeom>
+          <a:solidFill xmlns:a="http://schemas.openxmlformats.org/drawingml/2006/main">
+            <a:srgbClr val="E45756"/>
+          </a:solidFill>
+          <a:ln xmlns:a="http://schemas.openxmlformats.org/drawingml/2006/main" w="0">
+            <a:solidFill>
+              <a:srgbClr val="E45756"/>
+            </a:solidFill>
+            <a:prstDash val="solid"/>
+          </a:ln>
+        </p:spPr>
+      </p:sp>
+      <p:sp>
+        <p:nvSpPr>
+          <p:cNvPr id="7" name="">
+            <a:extLst xmlns:a="http://schemas.openxmlformats.org/drawingml/2006/main">
+              <a:ext uri="{FF2B5EF4-FFF2-40B4-BE49-F238E27FC236}">
+                <a16:creationId xmlns:a16="http://schemas.microsoft.com/office/drawing/2014/main" id="{7EF5B945-9D04-48FA-BA66-96DE813A9715}"/>
+              </a:ext>
+            </a:extLst>
+          </p:cNvPr>
+          <p:cNvSpPr>
+            <a:spLocks xmlns:a="http://schemas.openxmlformats.org/drawingml/2006/main" noGrp="1"/>
+          </p:cNvSpPr>
+          <p:nvPr/>
+        </p:nvSpPr>
+        <p:spPr>
+          <a:xfrm xmlns:a="http://schemas.openxmlformats.org/drawingml/2006/main">
+            <a:off x="876300" y="1581150"/>
+            <a:ext cx="2095500" cy="285750"/>
+          </a:xfrm>
+          <a:prstGeom xmlns:a="http://schemas.openxmlformats.org/drawingml/2006/main" prst="rect">
+            <a:avLst/>
+          </a:prstGeom>
+          <a:noFill xmlns:a="http://schemas.openxmlformats.org/drawingml/2006/main"/>
+          <a:ln xmlns:a="http://schemas.openxmlformats.org/drawingml/2006/main" w="0">
+            <a:noFill/>
+            <a:prstDash val="solid"/>
+          </a:ln>
+        </p:spPr>
+        <p:txBody>
+          <a:bodyPr xmlns:a="http://schemas.openxmlformats.org/drawingml/2006/main" wrap="square" lIns="0" tIns="0" rIns="0" bIns="0" anchor="t">
+            <a:normAutofit fontScale="100000"/>
+          </a:bodyPr>
+          <a:lstStyle xmlns:a="http://schemas.openxmlformats.org/drawingml/2006/main"/>
+          <a:p xmlns:a="http://schemas.openxmlformats.org/drawingml/2006/main">
+            <a:pPr algn="l">
+              <a:buNone/>
+              <a:defRPr sz="1350" b="1">
+                <a:solidFill>
+                  <a:srgbClr val="E45756"/>
+                </a:solidFill>
+                <a:latin typeface="Arial"/>
+                <a:ea typeface="Arial"/>
+                <a:cs typeface="Arial"/>
+              </a:defRPr>
+            </a:pPr>
+            <a:r>
+              <a:rPr sz="1350" b="1">
+                <a:solidFill>
+                  <a:srgbClr val="E45756"/>
+                </a:solidFill>
+                <a:latin typeface="Arial"/>
+                <a:ea typeface="Arial"/>
+                <a:cs typeface="Arial"/>
+              </a:rPr>
+              <a:t>SIGNAL</a:t>
+            </a:r>
+          </a:p>
+        </p:txBody>
+      </p:sp>
+      <p:sp>
+        <p:nvSpPr>
+          <p:cNvPr id="8" name="">
+            <a:extLst xmlns:a="http://schemas.openxmlformats.org/drawingml/2006/main">
+              <a:ext uri="{FF2B5EF4-FFF2-40B4-BE49-F238E27FC236}">
+                <a16:creationId xmlns:a16="http://schemas.microsoft.com/office/drawing/2014/main" id="{655CF75D-5F23-4C7F-BE9C-764036D0B9E8}"/>
+              </a:ext>
+            </a:extLst>
+          </p:cNvPr>
+          <p:cNvSpPr>
+            <a:spLocks xmlns:a="http://schemas.openxmlformats.org/drawingml/2006/main" noGrp="1"/>
+          </p:cNvSpPr>
+          <p:nvPr/>
+        </p:nvSpPr>
+        <p:spPr>
+          <a:xfrm xmlns:a="http://schemas.openxmlformats.org/drawingml/2006/main">
+            <a:off x="3105150" y="1562100"/>
+            <a:ext cx="4762500" cy="419100"/>
+          </a:xfrm>
+          <a:prstGeom xmlns:a="http://schemas.openxmlformats.org/drawingml/2006/main" prst="rect">
+            <a:avLst/>
+          </a:prstGeom>
+          <a:noFill xmlns:a="http://schemas.openxmlformats.org/drawingml/2006/main"/>
+          <a:ln xmlns:a="http://schemas.openxmlformats.org/drawingml/2006/main" w="0">
+            <a:noFill/>
+            <a:prstDash val="solid"/>
+          </a:ln>
+        </p:spPr>
+        <p:txBody>
+          <a:bodyPr xmlns:a="http://schemas.openxmlformats.org/drawingml/2006/main" wrap="square" lIns="0" tIns="0" rIns="0" bIns="0" anchor="t">
+            <a:normAutofit fontScale="100000"/>
+          </a:bodyPr>
+          <a:lstStyle xmlns:a="http://schemas.openxmlformats.org/drawingml/2006/main"/>
+          <a:p xmlns:a="http://schemas.openxmlformats.org/drawingml/2006/main">
+            <a:pPr algn="l">
+              <a:buNone/>
+              <a:defRPr sz="1950" b="1">
+                <a:solidFill>
+                  <a:srgbClr val="273548"/>
+                </a:solidFill>
+                <a:latin typeface="Arial"/>
+                <a:ea typeface="Arial"/>
+                <a:cs typeface="Arial"/>
+              </a:defRPr>
+            </a:pPr>
+            <a:r>
+              <a:rPr sz="1950" b="1">
+                <a:solidFill>
+                  <a:srgbClr val="273548"/>
+                </a:solidFill>
+                <a:latin typeface="Arial"/>
+                <a:ea typeface="Arial"/>
+                <a:cs typeface="Arial"/>
+              </a:rPr>
+              <a:t>Signed ER20 down</a:t>
+            </a:r>
+          </a:p>
+        </p:txBody>
+      </p:sp>
+      <p:sp>
+        <p:nvSpPr>
+          <p:cNvPr id="9" name="">
+            <a:extLst xmlns:a="http://schemas.openxmlformats.org/drawingml/2006/main">
+              <a:ext uri="{FF2B5EF4-FFF2-40B4-BE49-F238E27FC236}">
+                <a16:creationId xmlns:a16="http://schemas.microsoft.com/office/drawing/2014/main" id="{3E0B76F2-4514-4DD8-934B-ABE42A34E950}"/>
+              </a:ext>
+            </a:extLst>
+          </p:cNvPr>
+          <p:cNvSpPr>
+            <a:spLocks xmlns:a="http://schemas.openxmlformats.org/drawingml/2006/main" noGrp="1"/>
+          </p:cNvSpPr>
+          <p:nvPr/>
+        </p:nvSpPr>
+        <p:spPr>
+          <a:xfrm xmlns:a="http://schemas.openxmlformats.org/drawingml/2006/main">
+            <a:off x="8096250" y="1581150"/>
+            <a:ext cx="3333750" cy="704850"/>
+          </a:xfrm>
+          <a:prstGeom xmlns:a="http://schemas.openxmlformats.org/drawingml/2006/main" prst="rect">
+            <a:avLst/>
+          </a:prstGeom>
+          <a:noFill xmlns:a="http://schemas.openxmlformats.org/drawingml/2006/main"/>
+          <a:ln xmlns:a="http://schemas.openxmlformats.org/drawingml/2006/main" w="0">
+            <a:noFill/>
+            <a:prstDash val="solid"/>
+          </a:ln>
+        </p:spPr>
+        <p:txBody>
+          <a:bodyPr xmlns:a="http://schemas.openxmlformats.org/drawingml/2006/main" wrap="square" lIns="0" tIns="0" rIns="0" bIns="0" anchor="t">
+            <a:normAutofit fontScale="100000"/>
+          </a:bodyPr>
+          <a:lstStyle xmlns:a="http://schemas.openxmlformats.org/drawingml/2006/main"/>
+          <a:p xmlns:a="http://schemas.openxmlformats.org/drawingml/2006/main">
+            <a:pPr algn="l">
+              <a:buNone/>
+              <a:defRPr sz="1425" b="0">
+                <a:solidFill>
+                  <a:srgbClr val="667384"/>
+                </a:solidFill>
+                <a:latin typeface="Arial"/>
+                <a:ea typeface="Arial"/>
+                <a:cs typeface="Arial"/>
+              </a:defRPr>
+            </a:pPr>
+            <a:r>
+              <a:rPr sz="1425" b="0">
+                <a:solidFill>
+                  <a:srgbClr val="667384"/>
+                </a:solidFill>
+                <a:latin typeface="Arial"/>
+                <a:ea typeface="Arial"/>
+                <a:cs typeface="Arial"/>
+              </a:rPr>
+              <a:t>at completed close t</a:t>
+            </a:r>
+          </a:p>
+        </p:txBody>
+      </p:sp>
+      <p:sp>
+        <p:nvSpPr>
+          <p:cNvPr id="10" name="">
+            <a:extLst xmlns:a="http://schemas.openxmlformats.org/drawingml/2006/main">
+              <a:ext uri="{FF2B5EF4-FFF2-40B4-BE49-F238E27FC236}">
+                <a16:creationId xmlns:a16="http://schemas.microsoft.com/office/drawing/2014/main" id="{294777C3-6D2F-4277-840E-7E984FB4554D}"/>
+              </a:ext>
+            </a:extLst>
+          </p:cNvPr>
+          <p:cNvSpPr>
+            <a:spLocks xmlns:a="http://schemas.openxmlformats.org/drawingml/2006/main" noGrp="1"/>
+          </p:cNvSpPr>
+          <p:nvPr/>
+        </p:nvSpPr>
+        <p:spPr>
+          <a:xfrm xmlns:a="http://schemas.openxmlformats.org/drawingml/2006/main">
+            <a:off x="876300" y="2590800"/>
+            <a:ext cx="10553700" cy="9525"/>
+          </a:xfrm>
+          <a:prstGeom xmlns:a="http://schemas.openxmlformats.org/drawingml/2006/main" prst="rect">
+            <a:avLst/>
+          </a:prstGeom>
+          <a:solidFill xmlns:a="http://schemas.openxmlformats.org/drawingml/2006/main">
+            <a:srgbClr val="B8BCC4"/>
+          </a:solidFill>
+          <a:ln xmlns:a="http://schemas.openxmlformats.org/drawingml/2006/main" w="0">
+            <a:solidFill>
+              <a:srgbClr val="B8BCC4"/>
+            </a:solidFill>
+            <a:prstDash val="solid"/>
+          </a:ln>
+        </p:spPr>
+      </p:sp>
+      <p:sp>
+        <p:nvSpPr>
+          <p:cNvPr id="11" name="">
+            <a:extLst xmlns:a="http://schemas.openxmlformats.org/drawingml/2006/main">
+              <a:ext uri="{FF2B5EF4-FFF2-40B4-BE49-F238E27FC236}">
+                <a16:creationId xmlns:a16="http://schemas.microsoft.com/office/drawing/2014/main" id="{F894CF3F-AD63-423C-8F01-64C507896579}"/>
+              </a:ext>
+            </a:extLst>
+          </p:cNvPr>
+          <p:cNvSpPr>
+            <a:spLocks xmlns:a="http://schemas.openxmlformats.org/drawingml/2006/main" noGrp="1"/>
+          </p:cNvSpPr>
+          <p:nvPr/>
+        </p:nvSpPr>
+        <p:spPr>
+          <a:xfrm xmlns:a="http://schemas.openxmlformats.org/drawingml/2006/main">
+            <a:off x="552450" y="2800350"/>
+            <a:ext cx="95250" cy="895350"/>
+          </a:xfrm>
+          <a:prstGeom xmlns:a="http://schemas.openxmlformats.org/drawingml/2006/main" prst="rect">
+            <a:avLst/>
+          </a:prstGeom>
+          <a:solidFill xmlns:a="http://schemas.openxmlformats.org/drawingml/2006/main">
+            <a:srgbClr val="2A9D6F"/>
+          </a:solidFill>
+          <a:ln xmlns:a="http://schemas.openxmlformats.org/drawingml/2006/main" w="0">
+            <a:solidFill>
+              <a:srgbClr val="2A9D6F"/>
+            </a:solidFill>
+            <a:prstDash val="solid"/>
+          </a:ln>
+        </p:spPr>
+      </p:sp>
+      <p:sp>
+        <p:nvSpPr>
+          <p:cNvPr id="12" name="">
+            <a:extLst xmlns:a="http://schemas.openxmlformats.org/drawingml/2006/main">
+              <a:ext uri="{FF2B5EF4-FFF2-40B4-BE49-F238E27FC236}">
+                <a16:creationId xmlns:a16="http://schemas.microsoft.com/office/drawing/2014/main" id="{D3953D03-6A7A-4FEE-B242-02BF0319C169}"/>
+              </a:ext>
+            </a:extLst>
+          </p:cNvPr>
+          <p:cNvSpPr>
+            <a:spLocks xmlns:a="http://schemas.openxmlformats.org/drawingml/2006/main" noGrp="1"/>
+          </p:cNvSpPr>
+          <p:nvPr/>
+        </p:nvSpPr>
+        <p:spPr>
+          <a:xfrm xmlns:a="http://schemas.openxmlformats.org/drawingml/2006/main">
+            <a:off x="876300" y="2781300"/>
+            <a:ext cx="2095500" cy="285750"/>
+          </a:xfrm>
+          <a:prstGeom xmlns:a="http://schemas.openxmlformats.org/drawingml/2006/main" prst="rect">
+            <a:avLst/>
+          </a:prstGeom>
+          <a:noFill xmlns:a="http://schemas.openxmlformats.org/drawingml/2006/main"/>
+          <a:ln xmlns:a="http://schemas.openxmlformats.org/drawingml/2006/main" w="0">
+            <a:noFill/>
+            <a:prstDash val="solid"/>
+          </a:ln>
+        </p:spPr>
+        <p:txBody>
+          <a:bodyPr xmlns:a="http://schemas.openxmlformats.org/drawingml/2006/main" wrap="square" lIns="0" tIns="0" rIns="0" bIns="0" anchor="t">
+            <a:normAutofit fontScale="100000"/>
+          </a:bodyPr>
+          <a:lstStyle xmlns:a="http://schemas.openxmlformats.org/drawingml/2006/main"/>
+          <a:p xmlns:a="http://schemas.openxmlformats.org/drawingml/2006/main">
+            <a:pPr algn="l">
+              <a:buNone/>
+              <a:defRPr sz="1350" b="1">
+                <a:solidFill>
+                  <a:srgbClr val="2A9D6F"/>
+                </a:solidFill>
+                <a:latin typeface="Arial"/>
+                <a:ea typeface="Arial"/>
+                <a:cs typeface="Arial"/>
+              </a:defRPr>
+            </a:pPr>
+            <a:r>
+              <a:rPr sz="1350" b="1">
+                <a:solidFill>
+                  <a:srgbClr val="2A9D6F"/>
+                </a:solidFill>
+                <a:latin typeface="Arial"/>
+                <a:ea typeface="Arial"/>
+                <a:cs typeface="Arial"/>
+              </a:rPr>
+              <a:t>SEVERITY</a:t>
+            </a:r>
+          </a:p>
+        </p:txBody>
+      </p:sp>
+      <p:sp>
+        <p:nvSpPr>
+          <p:cNvPr id="13" name="">
+            <a:extLst xmlns:a="http://schemas.openxmlformats.org/drawingml/2006/main">
+              <a:ext uri="{FF2B5EF4-FFF2-40B4-BE49-F238E27FC236}">
+                <a16:creationId xmlns:a16="http://schemas.microsoft.com/office/drawing/2014/main" id="{52D1DBE8-EAF6-4492-89E7-5C97A3A6A395}"/>
+              </a:ext>
+            </a:extLst>
+          </p:cNvPr>
+          <p:cNvSpPr>
+            <a:spLocks xmlns:a="http://schemas.openxmlformats.org/drawingml/2006/main" noGrp="1"/>
+          </p:cNvSpPr>
+          <p:nvPr/>
+        </p:nvSpPr>
+        <p:spPr>
+          <a:xfrm xmlns:a="http://schemas.openxmlformats.org/drawingml/2006/main">
+            <a:off x="3105150" y="2762250"/>
+            <a:ext cx="4762500" cy="419100"/>
+          </a:xfrm>
+          <a:prstGeom xmlns:a="http://schemas.openxmlformats.org/drawingml/2006/main" prst="rect">
+            <a:avLst/>
+          </a:prstGeom>
+          <a:noFill xmlns:a="http://schemas.openxmlformats.org/drawingml/2006/main"/>
+          <a:ln xmlns:a="http://schemas.openxmlformats.org/drawingml/2006/main" w="0">
+            <a:noFill/>
+            <a:prstDash val="solid"/>
+          </a:ln>
+        </p:spPr>
+        <p:txBody>
+          <a:bodyPr xmlns:a="http://schemas.openxmlformats.org/drawingml/2006/main" wrap="square" lIns="0" tIns="0" rIns="0" bIns="0" anchor="t">
+            <a:normAutofit fontScale="100000"/>
+          </a:bodyPr>
+          <a:lstStyle xmlns:a="http://schemas.openxmlformats.org/drawingml/2006/main"/>
+          <a:p xmlns:a="http://schemas.openxmlformats.org/drawingml/2006/main">
+            <a:pPr algn="l">
+              <a:buNone/>
+              <a:defRPr sz="1950" b="1">
+                <a:solidFill>
+                  <a:srgbClr val="273548"/>
+                </a:solidFill>
+                <a:latin typeface="Arial"/>
+                <a:ea typeface="Arial"/>
+                <a:cs typeface="Arial"/>
+              </a:defRPr>
+            </a:pPr>
+            <a:r>
+              <a:rPr sz="1950" b="1">
+                <a:solidFill>
+                  <a:srgbClr val="273548"/>
+                </a:solidFill>
+                <a:latin typeface="Arial"/>
+                <a:ea typeface="Arial"/>
+                <a:cs typeface="Arial"/>
+              </a:rPr>
+              <a:t>Bottom 20% of prior losses</a:t>
+            </a:r>
+          </a:p>
+        </p:txBody>
+      </p:sp>
+      <p:sp>
+        <p:nvSpPr>
+          <p:cNvPr id="14" name="">
+            <a:extLst xmlns:a="http://schemas.openxmlformats.org/drawingml/2006/main">
+              <a:ext uri="{FF2B5EF4-FFF2-40B4-BE49-F238E27FC236}">
+                <a16:creationId xmlns:a16="http://schemas.microsoft.com/office/drawing/2014/main" id="{2CAF0156-C9E6-4210-8A8A-BFEDD044631B}"/>
+              </a:ext>
+            </a:extLst>
+          </p:cNvPr>
+          <p:cNvSpPr>
+            <a:spLocks xmlns:a="http://schemas.openxmlformats.org/drawingml/2006/main" noGrp="1"/>
+          </p:cNvSpPr>
+          <p:nvPr/>
+        </p:nvSpPr>
+        <p:spPr>
+          <a:xfrm xmlns:a="http://schemas.openxmlformats.org/drawingml/2006/main">
+            <a:off x="8096250" y="2781300"/>
+            <a:ext cx="3333750" cy="704850"/>
+          </a:xfrm>
+          <a:prstGeom xmlns:a="http://schemas.openxmlformats.org/drawingml/2006/main" prst="rect">
+            <a:avLst/>
+          </a:prstGeom>
+          <a:noFill xmlns:a="http://schemas.openxmlformats.org/drawingml/2006/main"/>
+          <a:ln xmlns:a="http://schemas.openxmlformats.org/drawingml/2006/main" w="0">
+            <a:noFill/>
+            <a:prstDash val="solid"/>
+          </a:ln>
+        </p:spPr>
+        <p:txBody>
+          <a:bodyPr xmlns:a="http://schemas.openxmlformats.org/drawingml/2006/main" wrap="square" lIns="0" tIns="0" rIns="0" bIns="0" anchor="t">
+            <a:normAutofit fontScale="100000"/>
+          </a:bodyPr>
+          <a:lstStyle xmlns:a="http://schemas.openxmlformats.org/drawingml/2006/main"/>
+          <a:p xmlns:a="http://schemas.openxmlformats.org/drawingml/2006/main">
+            <a:pPr algn="l">
+              <a:buNone/>
+              <a:defRPr sz="1425" b="0">
+                <a:solidFill>
+                  <a:srgbClr val="667384"/>
+                </a:solidFill>
+                <a:latin typeface="Arial"/>
+                <a:ea typeface="Arial"/>
+                <a:cs typeface="Arial"/>
+              </a:defRPr>
+            </a:pPr>
+            <a:r>
+              <a:rPr sz="1425" b="0">
+                <a:solidFill>
+                  <a:srgbClr val="667384"/>
+                </a:solidFill>
+                <a:latin typeface="Arial"/>
+                <a:ea typeface="Arial"/>
+                <a:cs typeface="Arial"/>
+              </a:rPr>
+              <a:t>causal, asset-specific</a:t>
+            </a:r>
+          </a:p>
+        </p:txBody>
+      </p:sp>
+      <p:sp>
+        <p:nvSpPr>
+          <p:cNvPr id="15" name="">
+            <a:extLst xmlns:a="http://schemas.openxmlformats.org/drawingml/2006/main">
+              <a:ext uri="{FF2B5EF4-FFF2-40B4-BE49-F238E27FC236}">
+                <a16:creationId xmlns:a16="http://schemas.microsoft.com/office/drawing/2014/main" id="{B126165D-5B65-44DB-99BD-15ED33F9B90F}"/>
+              </a:ext>
+            </a:extLst>
+          </p:cNvPr>
+          <p:cNvSpPr>
+            <a:spLocks xmlns:a="http://schemas.openxmlformats.org/drawingml/2006/main" noGrp="1"/>
+          </p:cNvSpPr>
+          <p:nvPr/>
+        </p:nvSpPr>
+        <p:spPr>
+          <a:xfrm xmlns:a="http://schemas.openxmlformats.org/drawingml/2006/main">
+            <a:off x="876300" y="3790950"/>
+            <a:ext cx="10553700" cy="9525"/>
+          </a:xfrm>
+          <a:prstGeom xmlns:a="http://schemas.openxmlformats.org/drawingml/2006/main" prst="rect">
+            <a:avLst/>
+          </a:prstGeom>
+          <a:solidFill xmlns:a="http://schemas.openxmlformats.org/drawingml/2006/main">
+            <a:srgbClr val="B8BCC4"/>
+          </a:solidFill>
+          <a:ln xmlns:a="http://schemas.openxmlformats.org/drawingml/2006/main" w="0">
+            <a:solidFill>
+              <a:srgbClr val="B8BCC4"/>
+            </a:solidFill>
+            <a:prstDash val="solid"/>
+          </a:ln>
+        </p:spPr>
+      </p:sp>
+      <p:sp>
+        <p:nvSpPr>
+          <p:cNvPr id="16" name="">
+            <a:extLst xmlns:a="http://schemas.openxmlformats.org/drawingml/2006/main">
+              <a:ext uri="{FF2B5EF4-FFF2-40B4-BE49-F238E27FC236}">
+                <a16:creationId xmlns:a16="http://schemas.microsoft.com/office/drawing/2014/main" id="{7DC0911F-9587-4B19-84C6-11974DB2A91C}"/>
+              </a:ext>
+            </a:extLst>
+          </p:cNvPr>
+          <p:cNvSpPr>
+            <a:spLocks xmlns:a="http://schemas.openxmlformats.org/drawingml/2006/main" noGrp="1"/>
+          </p:cNvSpPr>
+          <p:nvPr/>
+        </p:nvSpPr>
+        <p:spPr>
+          <a:xfrm xmlns:a="http://schemas.openxmlformats.org/drawingml/2006/main">
+            <a:off x="552450" y="4000500"/>
+            <a:ext cx="95250" cy="895350"/>
+          </a:xfrm>
+          <a:prstGeom xmlns:a="http://schemas.openxmlformats.org/drawingml/2006/main" prst="rect">
+            <a:avLst/>
+          </a:prstGeom>
+          <a:solidFill xmlns:a="http://schemas.openxmlformats.org/drawingml/2006/main">
+            <a:srgbClr val="3D8DFF"/>
+          </a:solidFill>
+          <a:ln xmlns:a="http://schemas.openxmlformats.org/drawingml/2006/main" w="0">
+            <a:solidFill>
+              <a:srgbClr val="3D8DFF"/>
+            </a:solidFill>
+            <a:prstDash val="solid"/>
+          </a:ln>
+        </p:spPr>
+      </p:sp>
+      <p:sp>
+        <p:nvSpPr>
+          <p:cNvPr id="17" name="">
+            <a:extLst xmlns:a="http://schemas.openxmlformats.org/drawingml/2006/main">
+              <a:ext uri="{FF2B5EF4-FFF2-40B4-BE49-F238E27FC236}">
+                <a16:creationId xmlns:a16="http://schemas.microsoft.com/office/drawing/2014/main" id="{DAB53991-F50C-4B95-9F23-DAE86BCEDF3B}"/>
+              </a:ext>
+            </a:extLst>
+          </p:cNvPr>
+          <p:cNvSpPr>
+            <a:spLocks xmlns:a="http://schemas.openxmlformats.org/drawingml/2006/main" noGrp="1"/>
+          </p:cNvSpPr>
+          <p:nvPr/>
+        </p:nvSpPr>
+        <p:spPr>
+          <a:xfrm xmlns:a="http://schemas.openxmlformats.org/drawingml/2006/main">
+            <a:off x="876300" y="3981450"/>
+            <a:ext cx="2095500" cy="285750"/>
+          </a:xfrm>
+          <a:prstGeom xmlns:a="http://schemas.openxmlformats.org/drawingml/2006/main" prst="rect">
+            <a:avLst/>
+          </a:prstGeom>
+          <a:noFill xmlns:a="http://schemas.openxmlformats.org/drawingml/2006/main"/>
+          <a:ln xmlns:a="http://schemas.openxmlformats.org/drawingml/2006/main" w="0">
+            <a:noFill/>
+            <a:prstDash val="solid"/>
+          </a:ln>
+        </p:spPr>
+        <p:txBody>
+          <a:bodyPr xmlns:a="http://schemas.openxmlformats.org/drawingml/2006/main" wrap="square" lIns="0" tIns="0" rIns="0" bIns="0" anchor="t">
+            <a:normAutofit fontScale="100000"/>
+          </a:bodyPr>
+          <a:lstStyle xmlns:a="http://schemas.openxmlformats.org/drawingml/2006/main"/>
+          <a:p xmlns:a="http://schemas.openxmlformats.org/drawingml/2006/main">
+            <a:pPr algn="l">
+              <a:buNone/>
+              <a:defRPr sz="1350" b="1">
+                <a:solidFill>
+                  <a:srgbClr val="3D8DFF"/>
+                </a:solidFill>
+                <a:latin typeface="Arial"/>
+                <a:ea typeface="Arial"/>
+                <a:cs typeface="Arial"/>
+              </a:defRPr>
+            </a:pPr>
+            <a:r>
+              <a:rPr sz="1350" b="1">
+                <a:solidFill>
+                  <a:srgbClr val="3D8DFF"/>
+                </a:solidFill>
+                <a:latin typeface="Arial"/>
+                <a:ea typeface="Arial"/>
+                <a:cs typeface="Arial"/>
+              </a:rPr>
+              <a:t>UNIVERSE</a:t>
+            </a:r>
+          </a:p>
+        </p:txBody>
+      </p:sp>
+      <p:sp>
+        <p:nvSpPr>
+          <p:cNvPr id="18" name="">
+            <a:extLst xmlns:a="http://schemas.openxmlformats.org/drawingml/2006/main">
+              <a:ext uri="{FF2B5EF4-FFF2-40B4-BE49-F238E27FC236}">
+                <a16:creationId xmlns:a16="http://schemas.microsoft.com/office/drawing/2014/main" id="{5DFACF3B-08BC-4148-A40A-2004DFB81D71}"/>
+              </a:ext>
+            </a:extLst>
+          </p:cNvPr>
+          <p:cNvSpPr>
+            <a:spLocks xmlns:a="http://schemas.openxmlformats.org/drawingml/2006/main" noGrp="1"/>
+          </p:cNvSpPr>
+          <p:nvPr/>
+        </p:nvSpPr>
+        <p:spPr>
+          <a:xfrm xmlns:a="http://schemas.openxmlformats.org/drawingml/2006/main">
+            <a:off x="3105150" y="3962400"/>
+            <a:ext cx="4762500" cy="419100"/>
+          </a:xfrm>
+          <a:prstGeom xmlns:a="http://schemas.openxmlformats.org/drawingml/2006/main" prst="rect">
+            <a:avLst/>
+          </a:prstGeom>
+          <a:noFill xmlns:a="http://schemas.openxmlformats.org/drawingml/2006/main"/>
+          <a:ln xmlns:a="http://schemas.openxmlformats.org/drawingml/2006/main" w="0">
+            <a:noFill/>
+            <a:prstDash val="solid"/>
+          </a:ln>
+        </p:spPr>
+        <p:txBody>
+          <a:bodyPr xmlns:a="http://schemas.openxmlformats.org/drawingml/2006/main" wrap="square" lIns="0" tIns="0" rIns="0" bIns="0" anchor="t">
+            <a:normAutofit fontScale="100000"/>
+          </a:bodyPr>
+          <a:lstStyle xmlns:a="http://schemas.openxmlformats.org/drawingml/2006/main"/>
+          <a:p xmlns:a="http://schemas.openxmlformats.org/drawingml/2006/main">
+            <a:pPr algn="l">
+              <a:buNone/>
+              <a:defRPr sz="1950" b="1">
+                <a:solidFill>
+                  <a:srgbClr val="273548"/>
+                </a:solidFill>
+                <a:latin typeface="Arial"/>
+                <a:ea typeface="Arial"/>
+                <a:cs typeface="Arial"/>
+              </a:defRPr>
+            </a:pPr>
+            <a:r>
+              <a:rPr sz="1950" b="1">
+                <a:solidFill>
+                  <a:srgbClr val="273548"/>
+                </a:solidFill>
+                <a:latin typeface="Arial"/>
+                <a:ea typeface="Arial"/>
+                <a:cs typeface="Arial"/>
+              </a:rPr>
+              <a:t>All 129 atlas instruments</a:t>
+            </a:r>
+          </a:p>
+        </p:txBody>
+      </p:sp>
+      <p:sp>
+        <p:nvSpPr>
+          <p:cNvPr id="19" name="">
+            <a:extLst xmlns:a="http://schemas.openxmlformats.org/drawingml/2006/main">
+              <a:ext uri="{FF2B5EF4-FFF2-40B4-BE49-F238E27FC236}">
+                <a16:creationId xmlns:a16="http://schemas.microsoft.com/office/drawing/2014/main" id="{C907D23B-44A2-43C4-9658-4C6E38430BF5}"/>
+              </a:ext>
+            </a:extLst>
+          </p:cNvPr>
+          <p:cNvSpPr>
+            <a:spLocks xmlns:a="http://schemas.openxmlformats.org/drawingml/2006/main" noGrp="1"/>
+          </p:cNvSpPr>
+          <p:nvPr/>
+        </p:nvSpPr>
+        <p:spPr>
+          <a:xfrm xmlns:a="http://schemas.openxmlformats.org/drawingml/2006/main">
+            <a:off x="8096250" y="3981450"/>
+            <a:ext cx="3333750" cy="704850"/>
+          </a:xfrm>
+          <a:prstGeom xmlns:a="http://schemas.openxmlformats.org/drawingml/2006/main" prst="rect">
+            <a:avLst/>
+          </a:prstGeom>
+          <a:noFill xmlns:a="http://schemas.openxmlformats.org/drawingml/2006/main"/>
+          <a:ln xmlns:a="http://schemas.openxmlformats.org/drawingml/2006/main" w="0">
+            <a:noFill/>
+            <a:prstDash val="solid"/>
+          </a:ln>
+        </p:spPr>
+        <p:txBody>
+          <a:bodyPr xmlns:a="http://schemas.openxmlformats.org/drawingml/2006/main" wrap="square" lIns="0" tIns="0" rIns="0" bIns="0" anchor="t">
+            <a:normAutofit fontScale="100000"/>
+          </a:bodyPr>
+          <a:lstStyle xmlns:a="http://schemas.openxmlformats.org/drawingml/2006/main"/>
+          <a:p xmlns:a="http://schemas.openxmlformats.org/drawingml/2006/main">
+            <a:pPr algn="l">
+              <a:buNone/>
+              <a:defRPr sz="1425" b="0">
+                <a:solidFill>
+                  <a:srgbClr val="667384"/>
+                </a:solidFill>
+                <a:latin typeface="Arial"/>
+                <a:ea typeface="Arial"/>
+                <a:cs typeface="Arial"/>
+              </a:defRPr>
+            </a:pPr>
+            <a:r>
+              <a:rPr sz="1425" b="0">
+                <a:solidFill>
+                  <a:srgbClr val="667384"/>
+                </a:solidFill>
+                <a:latin typeface="Arial"/>
+                <a:ea typeface="Arial"/>
+                <a:cs typeface="Arial"/>
+              </a:rPr>
+              <a:t>88-stock core is headline</a:t>
+            </a:r>
+          </a:p>
+        </p:txBody>
+      </p:sp>
+      <p:sp>
+        <p:nvSpPr>
+          <p:cNvPr id="20" name="">
+            <a:extLst xmlns:a="http://schemas.openxmlformats.org/drawingml/2006/main">
+              <a:ext uri="{FF2B5EF4-FFF2-40B4-BE49-F238E27FC236}">
+                <a16:creationId xmlns:a16="http://schemas.microsoft.com/office/drawing/2014/main" id="{8042DFC4-7E22-47E6-8C53-1E63A8411C3A}"/>
+              </a:ext>
+            </a:extLst>
+          </p:cNvPr>
+          <p:cNvSpPr>
+            <a:spLocks xmlns:a="http://schemas.openxmlformats.org/drawingml/2006/main" noGrp="1"/>
+          </p:cNvSpPr>
+          <p:nvPr/>
+        </p:nvSpPr>
+        <p:spPr>
+          <a:xfrm xmlns:a="http://schemas.openxmlformats.org/drawingml/2006/main">
+            <a:off x="876300" y="4991100"/>
+            <a:ext cx="10553700" cy="9525"/>
+          </a:xfrm>
+          <a:prstGeom xmlns:a="http://schemas.openxmlformats.org/drawingml/2006/main" prst="rect">
+            <a:avLst/>
+          </a:prstGeom>
+          <a:solidFill xmlns:a="http://schemas.openxmlformats.org/drawingml/2006/main">
+            <a:srgbClr val="B8BCC4"/>
+          </a:solidFill>
+          <a:ln xmlns:a="http://schemas.openxmlformats.org/drawingml/2006/main" w="0">
+            <a:solidFill>
+              <a:srgbClr val="B8BCC4"/>
+            </a:solidFill>
+            <a:prstDash val="solid"/>
+          </a:ln>
+        </p:spPr>
+      </p:sp>
+      <p:sp>
+        <p:nvSpPr>
+          <p:cNvPr id="21" name="">
+            <a:extLst xmlns:a="http://schemas.openxmlformats.org/drawingml/2006/main">
+              <a:ext uri="{FF2B5EF4-FFF2-40B4-BE49-F238E27FC236}">
+                <a16:creationId xmlns:a16="http://schemas.microsoft.com/office/drawing/2014/main" id="{F4066D54-676B-4D0F-93B6-2152B57E41AF}"/>
+              </a:ext>
+            </a:extLst>
+          </p:cNvPr>
+          <p:cNvSpPr>
+            <a:spLocks xmlns:a="http://schemas.openxmlformats.org/drawingml/2006/main" noGrp="1"/>
+          </p:cNvSpPr>
+          <p:nvPr/>
+        </p:nvSpPr>
+        <p:spPr>
+          <a:xfrm xmlns:a="http://schemas.openxmlformats.org/drawingml/2006/main">
+            <a:off x="552450" y="5353050"/>
+            <a:ext cx="10877550" cy="781050"/>
+          </a:xfrm>
+          <a:prstGeom xmlns:a="http://schemas.openxmlformats.org/drawingml/2006/main" prst="rect">
+            <a:avLst/>
+          </a:prstGeom>
+          <a:solidFill xmlns:a="http://schemas.openxmlformats.org/drawingml/2006/main">
+            <a:srgbClr val="EAF5FB"/>
+          </a:solidFill>
+          <a:ln xmlns:a="http://schemas.openxmlformats.org/drawingml/2006/main" w="0">
+            <a:solidFill>
+              <a:srgbClr val="EAF5FB"/>
+            </a:solidFill>
+            <a:prstDash val="solid"/>
+          </a:ln>
+        </p:spPr>
+      </p:sp>
+      <p:sp>
+        <p:nvSpPr>
+          <p:cNvPr id="22" name="">
+            <a:extLst xmlns:a="http://schemas.openxmlformats.org/drawingml/2006/main">
+              <a:ext uri="{FF2B5EF4-FFF2-40B4-BE49-F238E27FC236}">
+                <a16:creationId xmlns:a16="http://schemas.microsoft.com/office/drawing/2014/main" id="{6E4C79AE-EB98-4B5B-B3D3-11ED0D4C729B}"/>
+              </a:ext>
+            </a:extLst>
+          </p:cNvPr>
+          <p:cNvSpPr>
+            <a:spLocks xmlns:a="http://schemas.openxmlformats.org/drawingml/2006/main" noGrp="1"/>
+          </p:cNvSpPr>
+          <p:nvPr/>
+        </p:nvSpPr>
+        <p:spPr>
+          <a:xfrm xmlns:a="http://schemas.openxmlformats.org/drawingml/2006/main">
+            <a:off x="781050" y="5524500"/>
+            <a:ext cx="2476500" cy="323850"/>
+          </a:xfrm>
+          <a:prstGeom xmlns:a="http://schemas.openxmlformats.org/drawingml/2006/main" prst="rect">
+            <a:avLst/>
+          </a:prstGeom>
+          <a:noFill xmlns:a="http://schemas.openxmlformats.org/drawingml/2006/main"/>
+          <a:ln xmlns:a="http://schemas.openxmlformats.org/drawingml/2006/main" w="0">
+            <a:noFill/>
+            <a:prstDash val="solid"/>
+          </a:ln>
+        </p:spPr>
+        <p:txBody>
+          <a:bodyPr xmlns:a="http://schemas.openxmlformats.org/drawingml/2006/main" wrap="square" lIns="0" tIns="0" rIns="0" bIns="0" anchor="t">
+            <a:normAutofit fontScale="100000"/>
+          </a:bodyPr>
+          <a:lstStyle xmlns:a="http://schemas.openxmlformats.org/drawingml/2006/main"/>
+          <a:p xmlns:a="http://schemas.openxmlformats.org/drawingml/2006/main">
+            <a:pPr algn="l">
+              <a:buNone/>
+              <a:defRPr sz="1725" b="1">
+                <a:solidFill>
+                  <a:srgbClr val="3D8DFF"/>
+                </a:solidFill>
+                <a:latin typeface="Arial"/>
+                <a:ea typeface="Arial"/>
+                <a:cs typeface="Arial"/>
+              </a:defRPr>
+            </a:pPr>
+            <a:r>
+              <a:rPr sz="1725" b="1">
+                <a:solidFill>
+                  <a:srgbClr val="3D8DFF"/>
+                </a:solidFill>
+                <a:latin typeface="Arial"/>
+                <a:ea typeface="Arial"/>
+                <a:cs typeface="Arial"/>
+              </a:rPr>
+              <a:t>TRAIN only</a:t>
+            </a:r>
+          </a:p>
+        </p:txBody>
+      </p:sp>
+      <p:sp>
+        <p:nvSpPr>
+          <p:cNvPr id="23" name="">
+            <a:extLst xmlns:a="http://schemas.openxmlformats.org/drawingml/2006/main">
+              <a:ext uri="{FF2B5EF4-FFF2-40B4-BE49-F238E27FC236}">
+                <a16:creationId xmlns:a16="http://schemas.microsoft.com/office/drawing/2014/main" id="{3320D60E-6067-4236-80ED-A898A863026E}"/>
+              </a:ext>
+            </a:extLst>
+          </p:cNvPr>
+          <p:cNvSpPr>
+            <a:spLocks xmlns:a="http://schemas.openxmlformats.org/drawingml/2006/main" noGrp="1"/>
+          </p:cNvSpPr>
+          <p:nvPr/>
+        </p:nvSpPr>
+        <p:spPr>
+          <a:xfrm xmlns:a="http://schemas.openxmlformats.org/drawingml/2006/main">
+            <a:off x="3333750" y="5486400"/>
+            <a:ext cx="7810500" cy="419100"/>
+          </a:xfrm>
+          <a:prstGeom xmlns:a="http://schemas.openxmlformats.org/drawingml/2006/main" prst="rect">
+            <a:avLst/>
+          </a:prstGeom>
+          <a:noFill xmlns:a="http://schemas.openxmlformats.org/drawingml/2006/main"/>
+          <a:ln xmlns:a="http://schemas.openxmlformats.org/drawingml/2006/main" w="0">
+            <a:noFill/>
+            <a:prstDash val="solid"/>
+          </a:ln>
+        </p:spPr>
+        <p:txBody>
+          <a:bodyPr xmlns:a="http://schemas.openxmlformats.org/drawingml/2006/main" wrap="square" lIns="0" tIns="0" rIns="0" bIns="0" anchor="t">
+            <a:normAutofit fontScale="100000"/>
+          </a:bodyPr>
+          <a:lstStyle xmlns:a="http://schemas.openxmlformats.org/drawingml/2006/main"/>
+          <a:p xmlns:a="http://schemas.openxmlformats.org/drawingml/2006/main">
+            <a:pPr algn="l">
+              <a:buNone/>
+              <a:defRPr sz="1800" b="1">
+                <a:solidFill>
+                  <a:srgbClr val="273548"/>
+                </a:solidFill>
+                <a:latin typeface="Arial"/>
+                <a:ea typeface="Arial"/>
+                <a:cs typeface="Arial"/>
+              </a:defRPr>
+            </a:pPr>
+            <a:r>
+              <a:rPr sz="1800" b="1">
+                <a:solidFill>
+                  <a:srgbClr val="273548"/>
+                </a:solidFill>
+                <a:latin typeface="Arial"/>
+                <a:ea typeface="Arial"/>
+                <a:cs typeface="Arial"/>
+              </a:rPr>
+              <a:t>2018–2023 mechanics study. Post-2023 outcomes remain sealed.</a:t>
+            </a:r>
+          </a:p>
+        </p:txBody>
+      </p:sp>
+    </p:spTree>
+    <p:extLst>
+      <p:ext uri="{BB962C8B-B14F-4D97-AF65-F5344CB8AC3E}">
+        <p14:creationId xmlns:p14="http://schemas.microsoft.com/office/powerpoint/2010/main" val="666536286"/>
+      </p:ext>
+    </p:extLst>
+  </p:cSld>
+</p:sld>
+</file>
+
+<file path=ppt/slides/slide16.xml><?xml version="1.0" encoding="utf-8"?>
+<p:sld xmlns:p="http://schemas.openxmlformats.org/presentationml/2006/main">
+  <p:cSld>
+    <p:bg>
+      <p:bgPr>
+        <a:solidFill xmlns:a="http://schemas.openxmlformats.org/drawingml/2006/main">
+          <a:srgbClr val="FFFFFF"/>
+        </a:solidFill>
+      </p:bgPr>
+    </p:bg>
+    <p:spTree>
+      <p:nvGrpSpPr>
+        <p:cNvPr id="1" name=""/>
+        <p:cNvGrpSpPr/>
+        <p:nvPr/>
+      </p:nvGrpSpPr>
+      <p:grpSpPr>
+        <a:xfrm xmlns:a="http://schemas.openxmlformats.org/drawingml/2006/main"/>
+      </p:grpSpPr>
+      <p:sp>
+        <p:nvSpPr>
+          <p:cNvPr id="24" name="section-11">
+            <a:extLst xmlns:a="http://schemas.openxmlformats.org/drawingml/2006/main">
+              <a:ext uri="{FF2B5EF4-FFF2-40B4-BE49-F238E27FC236}">
+                <a16:creationId xmlns:a16="http://schemas.microsoft.com/office/drawing/2014/main" id="{272ED433-B59C-436C-9DFB-4D317B90A13F}"/>
+              </a:ext>
+            </a:extLst>
+          </p:cNvPr>
+          <p:cNvSpPr>
+            <a:spLocks xmlns:a="http://schemas.openxmlformats.org/drawingml/2006/main" noGrp="1"/>
+          </p:cNvSpPr>
+          <p:nvPr/>
+        </p:nvSpPr>
+        <p:spPr>
+          <a:xfrm xmlns:a="http://schemas.openxmlformats.org/drawingml/2006/main">
+            <a:off x="457200" y="228600"/>
+            <a:ext cx="4191000" cy="228600"/>
+          </a:xfrm>
+          <a:prstGeom xmlns:a="http://schemas.openxmlformats.org/drawingml/2006/main" prst="rect">
+            <a:avLst/>
+          </a:prstGeom>
+          <a:noFill xmlns:a="http://schemas.openxmlformats.org/drawingml/2006/main"/>
+          <a:ln xmlns:a="http://schemas.openxmlformats.org/drawingml/2006/main" w="0">
+            <a:noFill/>
+            <a:prstDash val="solid"/>
+          </a:ln>
+        </p:spPr>
+        <p:txBody>
+          <a:bodyPr xmlns:a="http://schemas.openxmlformats.org/drawingml/2006/main" wrap="square" lIns="0" tIns="0" rIns="0" bIns="0" anchor="t">
+            <a:normAutofit fontScale="100000"/>
+          </a:bodyPr>
+          <a:lstStyle xmlns:a="http://schemas.openxmlformats.org/drawingml/2006/main"/>
+          <a:p xmlns:a="http://schemas.openxmlformats.org/drawingml/2006/main">
+            <a:pPr algn="l">
+              <a:buNone/>
+              <a:defRPr sz="1200" b="1">
+                <a:solidFill>
+                  <a:srgbClr val="667384"/>
+                </a:solidFill>
+                <a:latin typeface="Arial"/>
+                <a:ea typeface="Arial"/>
+                <a:cs typeface="Arial"/>
+              </a:defRPr>
+            </a:pPr>
+            <a:r>
+              <a:rPr sz="1200" b="1">
+                <a:solidFill>
+                  <a:srgbClr val="667384"/>
+                </a:solidFill>
+                <a:latin typeface="Arial"/>
+                <a:ea typeface="Arial"/>
+                <a:cs typeface="Arial"/>
+              </a:rPr>
+              <a:t>EXECUTION CONTRACT</a:t>
+            </a:r>
+          </a:p>
+        </p:txBody>
+      </p:sp>
+      <p:sp>
+        <p:nvSpPr>
+          <p:cNvPr id="2" name="title-11">
+            <a:extLst xmlns:a="http://schemas.openxmlformats.org/drawingml/2006/main">
+              <a:ext uri="{FF2B5EF4-FFF2-40B4-BE49-F238E27FC236}">
+                <a16:creationId xmlns:a16="http://schemas.microsoft.com/office/drawing/2014/main" id="{3EC40708-7E00-432C-8ECE-907FA5705292}"/>
+              </a:ext>
+            </a:extLst>
+          </p:cNvPr>
+          <p:cNvSpPr>
+            <a:spLocks xmlns:a="http://schemas.openxmlformats.org/drawingml/2006/main" noGrp="1"/>
+          </p:cNvSpPr>
+          <p:nvPr/>
+        </p:nvSpPr>
+        <p:spPr>
+          <a:xfrm xmlns:a="http://schemas.openxmlformats.org/drawingml/2006/main">
+            <a:off x="457200" y="533400"/>
+            <a:ext cx="11277600" cy="628650"/>
+          </a:xfrm>
+          <a:prstGeom xmlns:a="http://schemas.openxmlformats.org/drawingml/2006/main" prst="rect">
+            <a:avLst/>
+          </a:prstGeom>
+          <a:noFill xmlns:a="http://schemas.openxmlformats.org/drawingml/2006/main"/>
+          <a:ln xmlns:a="http://schemas.openxmlformats.org/drawingml/2006/main" w="0">
+            <a:noFill/>
+            <a:prstDash val="solid"/>
+          </a:ln>
+        </p:spPr>
+        <p:txBody>
+          <a:bodyPr xmlns:a="http://schemas.openxmlformats.org/drawingml/2006/main" wrap="square" lIns="0" tIns="0" rIns="0" bIns="0" anchor="t">
+            <a:normAutofit fontScale="100000"/>
+          </a:bodyPr>
+          <a:lstStyle xmlns:a="http://schemas.openxmlformats.org/drawingml/2006/main"/>
+          <a:p xmlns:a="http://schemas.openxmlformats.org/drawingml/2006/main">
+            <a:pPr algn="l">
+              <a:buNone/>
+              <a:defRPr sz="3525" b="1">
+                <a:solidFill>
+                  <a:srgbClr val="000000"/>
+                </a:solidFill>
+                <a:latin typeface="Arial"/>
+                <a:ea typeface="Arial"/>
+                <a:cs typeface="Arial"/>
+              </a:defRPr>
+            </a:pPr>
+            <a:r>
+              <a:rPr sz="3525" b="1">
+                <a:solidFill>
+                  <a:srgbClr val="000000"/>
+                </a:solidFill>
+                <a:latin typeface="Arial"/>
+                <a:ea typeface="Arial"/>
+                <a:cs typeface="Arial"/>
+              </a:rPr>
+              <a:t>The rule is causal, non-overlapping, and next-open</a:t>
+            </a:r>
+          </a:p>
+        </p:txBody>
+      </p:sp>
+      <p:sp>
+        <p:nvSpPr>
+          <p:cNvPr id="3" name="">
+            <a:extLst xmlns:a="http://schemas.openxmlformats.org/drawingml/2006/main">
+              <a:ext uri="{FF2B5EF4-FFF2-40B4-BE49-F238E27FC236}">
+                <a16:creationId xmlns:a16="http://schemas.microsoft.com/office/drawing/2014/main" id="{D5CA0FCE-75E8-41EF-A76A-23E9E2120C6A}"/>
+              </a:ext>
+            </a:extLst>
+          </p:cNvPr>
+          <p:cNvSpPr>
+            <a:spLocks xmlns:a="http://schemas.openxmlformats.org/drawingml/2006/main" noGrp="1"/>
+          </p:cNvSpPr>
+          <p:nvPr/>
+        </p:nvSpPr>
+        <p:spPr>
+          <a:xfrm xmlns:a="http://schemas.openxmlformats.org/drawingml/2006/main">
+            <a:off x="457200" y="1200150"/>
+            <a:ext cx="11277600" cy="19050"/>
+          </a:xfrm>
+          <a:prstGeom xmlns:a="http://schemas.openxmlformats.org/drawingml/2006/main" prst="rect">
+            <a:avLst/>
+          </a:prstGeom>
+          <a:solidFill xmlns:a="http://schemas.openxmlformats.org/drawingml/2006/main">
+            <a:srgbClr val="B8BCC4"/>
+          </a:solidFill>
+          <a:ln xmlns:a="http://schemas.openxmlformats.org/drawingml/2006/main" w="0">
+            <a:solidFill>
+              <a:srgbClr val="B8BCC4"/>
+            </a:solidFill>
+            <a:prstDash val="solid"/>
+          </a:ln>
+        </p:spPr>
+      </p:sp>
+      <p:sp>
+        <p:nvSpPr>
+          <p:cNvPr id="4" name="footer-left-11">
+            <a:extLst xmlns:a="http://schemas.openxmlformats.org/drawingml/2006/main">
+              <a:ext uri="{FF2B5EF4-FFF2-40B4-BE49-F238E27FC236}">
+                <a16:creationId xmlns:a16="http://schemas.microsoft.com/office/drawing/2014/main" id="{700DA765-80E0-4197-8700-00D867B86FA2}"/>
+              </a:ext>
+            </a:extLst>
+          </p:cNvPr>
+          <p:cNvSpPr>
+            <a:spLocks xmlns:a="http://schemas.openxmlformats.org/drawingml/2006/main" noGrp="1"/>
+          </p:cNvSpPr>
+          <p:nvPr/>
+        </p:nvSpPr>
+        <p:spPr>
+          <a:xfrm xmlns:a="http://schemas.openxmlformats.org/drawingml/2006/main">
+            <a:off x="457200" y="6515100"/>
+            <a:ext cx="3429000" cy="171450"/>
+          </a:xfrm>
+          <a:prstGeom xmlns:a="http://schemas.openxmlformats.org/drawingml/2006/main" prst="rect">
+            <a:avLst/>
+          </a:prstGeom>
+          <a:noFill xmlns:a="http://schemas.openxmlformats.org/drawingml/2006/main"/>
+          <a:ln xmlns:a="http://schemas.openxmlformats.org/drawingml/2006/main" w="0">
+            <a:noFill/>
+            <a:prstDash val="solid"/>
+          </a:ln>
+        </p:spPr>
+        <p:txBody>
+          <a:bodyPr xmlns:a="http://schemas.openxmlformats.org/drawingml/2006/main" wrap="square" lIns="0" tIns="0" rIns="0" bIns="0" anchor="t">
+            <a:normAutofit fontScale="100000"/>
+          </a:bodyPr>
+          <a:lstStyle xmlns:a="http://schemas.openxmlformats.org/drawingml/2006/main"/>
+          <a:p xmlns:a="http://schemas.openxmlformats.org/drawingml/2006/main">
+            <a:pPr algn="l">
+              <a:buNone/>
+              <a:defRPr sz="825" b="0">
+                <a:solidFill>
+                  <a:srgbClr val="64748B"/>
+                </a:solidFill>
+                <a:latin typeface="Arial"/>
+                <a:ea typeface="Arial"/>
+                <a:cs typeface="Arial"/>
+              </a:defRPr>
+            </a:pPr>
+            <a:r>
+              <a:rPr sz="825" b="0">
+                <a:solidFill>
+                  <a:srgbClr val="64748B"/>
+                </a:solidFill>
+                <a:latin typeface="Arial"/>
+                <a:ea typeface="Arial"/>
+                <a:cs typeface="Arial"/>
+              </a:rPr>
+              <a:t>Return geometry | executable mechanics</a:t>
+            </a:r>
+          </a:p>
+        </p:txBody>
+      </p:sp>
+      <p:sp>
+        <p:nvSpPr>
+          <p:cNvPr id="5" name="footer-number-11">
+            <a:extLst xmlns:a="http://schemas.openxmlformats.org/drawingml/2006/main">
+              <a:ext uri="{FF2B5EF4-FFF2-40B4-BE49-F238E27FC236}">
+                <a16:creationId xmlns:a16="http://schemas.microsoft.com/office/drawing/2014/main" id="{83896276-4112-4532-AF7C-776C67C58B77}"/>
+              </a:ext>
+            </a:extLst>
+          </p:cNvPr>
+          <p:cNvSpPr>
+            <a:spLocks xmlns:a="http://schemas.openxmlformats.org/drawingml/2006/main" noGrp="1"/>
+          </p:cNvSpPr>
+          <p:nvPr/>
+        </p:nvSpPr>
+        <p:spPr>
+          <a:xfrm xmlns:a="http://schemas.openxmlformats.org/drawingml/2006/main">
+            <a:off x="10477500" y="6496050"/>
+            <a:ext cx="1257300" cy="190500"/>
+          </a:xfrm>
+          <a:prstGeom xmlns:a="http://schemas.openxmlformats.org/drawingml/2006/main" prst="rect">
+            <a:avLst/>
+          </a:prstGeom>
+          <a:noFill xmlns:a="http://schemas.openxmlformats.org/drawingml/2006/main"/>
+          <a:ln xmlns:a="http://schemas.openxmlformats.org/drawingml/2006/main" w="0">
+            <a:noFill/>
+            <a:prstDash val="solid"/>
+          </a:ln>
+        </p:spPr>
+        <p:txBody>
+          <a:bodyPr xmlns:a="http://schemas.openxmlformats.org/drawingml/2006/main" wrap="square" lIns="0" tIns="0" rIns="0" bIns="0" anchor="t">
+            <a:normAutofit fontScale="100000"/>
+          </a:bodyPr>
+          <a:lstStyle xmlns:a="http://schemas.openxmlformats.org/drawingml/2006/main"/>
+          <a:p xmlns:a="http://schemas.openxmlformats.org/drawingml/2006/main">
+            <a:pPr algn="r">
+              <a:buNone/>
+              <a:defRPr sz="1050" b="0">
+                <a:solidFill>
+                  <a:srgbClr val="667384"/>
+                </a:solidFill>
+                <a:latin typeface="Arial"/>
+                <a:ea typeface="Arial"/>
+                <a:cs typeface="Arial"/>
+              </a:defRPr>
+            </a:pPr>
+            <a:r>
+              <a:rPr sz="1050" b="0">
+                <a:solidFill>
+                  <a:srgbClr val="667384"/>
+                </a:solidFill>
+                <a:latin typeface="Arial"/>
+                <a:ea typeface="Arial"/>
+                <a:cs typeface="Arial"/>
+              </a:rPr>
+              <a:t>16</a:t>
+            </a:r>
+          </a:p>
+        </p:txBody>
+      </p:sp>
+      <p:sp>
+        <p:nvSpPr>
+          <p:cNvPr id="6" name="">
+            <a:extLst xmlns:a="http://schemas.openxmlformats.org/drawingml/2006/main">
+              <a:ext uri="{FF2B5EF4-FFF2-40B4-BE49-F238E27FC236}">
+                <a16:creationId xmlns:a16="http://schemas.microsoft.com/office/drawing/2014/main" id="{10F4BA85-46C5-47BD-BA74-EC806E663D58}"/>
+              </a:ext>
+            </a:extLst>
+          </p:cNvPr>
+          <p:cNvSpPr>
+            <a:spLocks xmlns:a="http://schemas.openxmlformats.org/drawingml/2006/main" noGrp="1"/>
+          </p:cNvSpPr>
+          <p:nvPr/>
+        </p:nvSpPr>
+        <p:spPr>
+          <a:xfrm xmlns:a="http://schemas.openxmlformats.org/drawingml/2006/main">
+            <a:off x="552450" y="1600200"/>
+            <a:ext cx="95250" cy="895350"/>
+          </a:xfrm>
+          <a:prstGeom xmlns:a="http://schemas.openxmlformats.org/drawingml/2006/main" prst="rect">
+            <a:avLst/>
+          </a:prstGeom>
+          <a:solidFill xmlns:a="http://schemas.openxmlformats.org/drawingml/2006/main">
+            <a:srgbClr val="E45756"/>
+          </a:solidFill>
+          <a:ln xmlns:a="http://schemas.openxmlformats.org/drawingml/2006/main" w="0">
+            <a:solidFill>
+              <a:srgbClr val="E45756"/>
+            </a:solidFill>
+            <a:prstDash val="solid"/>
+          </a:ln>
+        </p:spPr>
+      </p:sp>
+      <p:sp>
+        <p:nvSpPr>
+          <p:cNvPr id="7" name="">
+            <a:extLst xmlns:a="http://schemas.openxmlformats.org/drawingml/2006/main">
+              <a:ext uri="{FF2B5EF4-FFF2-40B4-BE49-F238E27FC236}">
+                <a16:creationId xmlns:a16="http://schemas.microsoft.com/office/drawing/2014/main" id="{7EF5B945-9D04-48FA-BA66-96DE813A9715}"/>
+              </a:ext>
+            </a:extLst>
+          </p:cNvPr>
+          <p:cNvSpPr>
+            <a:spLocks xmlns:a="http://schemas.openxmlformats.org/drawingml/2006/main" noGrp="1"/>
+          </p:cNvSpPr>
+          <p:nvPr/>
+        </p:nvSpPr>
+        <p:spPr>
+          <a:xfrm xmlns:a="http://schemas.openxmlformats.org/drawingml/2006/main">
+            <a:off x="876300" y="1581150"/>
+            <a:ext cx="2095500" cy="285750"/>
+          </a:xfrm>
+          <a:prstGeom xmlns:a="http://schemas.openxmlformats.org/drawingml/2006/main" prst="rect">
+            <a:avLst/>
+          </a:prstGeom>
+          <a:noFill xmlns:a="http://schemas.openxmlformats.org/drawingml/2006/main"/>
+          <a:ln xmlns:a="http://schemas.openxmlformats.org/drawingml/2006/main" w="0">
+            <a:noFill/>
+            <a:prstDash val="solid"/>
+          </a:ln>
+        </p:spPr>
+        <p:txBody>
+          <a:bodyPr xmlns:a="http://schemas.openxmlformats.org/drawingml/2006/main" wrap="square" lIns="0" tIns="0" rIns="0" bIns="0" anchor="t">
+            <a:normAutofit fontScale="100000"/>
+          </a:bodyPr>
+          <a:lstStyle xmlns:a="http://schemas.openxmlformats.org/drawingml/2006/main"/>
+          <a:p xmlns:a="http://schemas.openxmlformats.org/drawingml/2006/main">
+            <a:pPr algn="l">
+              <a:buNone/>
+              <a:defRPr sz="1350" b="1">
+                <a:solidFill>
+                  <a:srgbClr val="E45756"/>
+                </a:solidFill>
+                <a:latin typeface="Arial"/>
+                <a:ea typeface="Arial"/>
+                <a:cs typeface="Arial"/>
+              </a:defRPr>
+            </a:pPr>
+            <a:r>
+              <a:rPr sz="1350" b="1">
+                <a:solidFill>
+                  <a:srgbClr val="E45756"/>
+                </a:solidFill>
+                <a:latin typeface="Arial"/>
+                <a:ea typeface="Arial"/>
+                <a:cs typeface="Arial"/>
+              </a:rPr>
+              <a:t>ENTRY</a:t>
+            </a:r>
+          </a:p>
+        </p:txBody>
+      </p:sp>
+      <p:sp>
+        <p:nvSpPr>
+          <p:cNvPr id="8" name="">
+            <a:extLst xmlns:a="http://schemas.openxmlformats.org/drawingml/2006/main">
+              <a:ext uri="{FF2B5EF4-FFF2-40B4-BE49-F238E27FC236}">
+                <a16:creationId xmlns:a16="http://schemas.microsoft.com/office/drawing/2014/main" id="{655CF75D-5F23-4C7F-BE9C-764036D0B9E8}"/>
+              </a:ext>
+            </a:extLst>
+          </p:cNvPr>
+          <p:cNvSpPr>
+            <a:spLocks xmlns:a="http://schemas.openxmlformats.org/drawingml/2006/main" noGrp="1"/>
+          </p:cNvSpPr>
+          <p:nvPr/>
+        </p:nvSpPr>
+        <p:spPr>
+          <a:xfrm xmlns:a="http://schemas.openxmlformats.org/drawingml/2006/main">
+            <a:off x="3105150" y="1562100"/>
+            <a:ext cx="4762500" cy="419100"/>
+          </a:xfrm>
+          <a:prstGeom xmlns:a="http://schemas.openxmlformats.org/drawingml/2006/main" prst="rect">
+            <a:avLst/>
+          </a:prstGeom>
+          <a:noFill xmlns:a="http://schemas.openxmlformats.org/drawingml/2006/main"/>
+          <a:ln xmlns:a="http://schemas.openxmlformats.org/drawingml/2006/main" w="0">
+            <a:noFill/>
+            <a:prstDash val="solid"/>
+          </a:ln>
+        </p:spPr>
+        <p:txBody>
+          <a:bodyPr xmlns:a="http://schemas.openxmlformats.org/drawingml/2006/main" wrap="square" lIns="0" tIns="0" rIns="0" bIns="0" anchor="t">
+            <a:normAutofit fontScale="100000"/>
+          </a:bodyPr>
+          <a:lstStyle xmlns:a="http://schemas.openxmlformats.org/drawingml/2006/main"/>
+          <a:p xmlns:a="http://schemas.openxmlformats.org/drawingml/2006/main">
+            <a:pPr algn="l">
+              <a:buNone/>
+              <a:defRPr sz="1950" b="1">
+                <a:solidFill>
+                  <a:srgbClr val="273548"/>
+                </a:solidFill>
+                <a:latin typeface="Arial"/>
+                <a:ea typeface="Arial"/>
+                <a:cs typeface="Arial"/>
+              </a:defRPr>
+            </a:pPr>
+            <a:r>
+              <a:rPr sz="1950" b="1">
+                <a:solidFill>
+                  <a:srgbClr val="273548"/>
+                </a:solidFill>
+                <a:latin typeface="Arial"/>
+                <a:ea typeface="Arial"/>
+                <a:cs typeface="Arial"/>
+              </a:rPr>
+              <a:t>Open t+1</a:t>
+            </a:r>
+          </a:p>
+        </p:txBody>
+      </p:sp>
+      <p:sp>
+        <p:nvSpPr>
+          <p:cNvPr id="9" name="">
+            <a:extLst xmlns:a="http://schemas.openxmlformats.org/drawingml/2006/main">
+              <a:ext uri="{FF2B5EF4-FFF2-40B4-BE49-F238E27FC236}">
+                <a16:creationId xmlns:a16="http://schemas.microsoft.com/office/drawing/2014/main" id="{3E0B76F2-4514-4DD8-934B-ABE42A34E950}"/>
+              </a:ext>
+            </a:extLst>
+          </p:cNvPr>
+          <p:cNvSpPr>
+            <a:spLocks xmlns:a="http://schemas.openxmlformats.org/drawingml/2006/main" noGrp="1"/>
+          </p:cNvSpPr>
+          <p:nvPr/>
+        </p:nvSpPr>
+        <p:spPr>
+          <a:xfrm xmlns:a="http://schemas.openxmlformats.org/drawingml/2006/main">
+            <a:off x="8096250" y="1581150"/>
+            <a:ext cx="3333750" cy="704850"/>
+          </a:xfrm>
+          <a:prstGeom xmlns:a="http://schemas.openxmlformats.org/drawingml/2006/main" prst="rect">
+            <a:avLst/>
+          </a:prstGeom>
+          <a:noFill xmlns:a="http://schemas.openxmlformats.org/drawingml/2006/main"/>
+          <a:ln xmlns:a="http://schemas.openxmlformats.org/drawingml/2006/main" w="0">
+            <a:noFill/>
+            <a:prstDash val="solid"/>
+          </a:ln>
+        </p:spPr>
+        <p:txBody>
+          <a:bodyPr xmlns:a="http://schemas.openxmlformats.org/drawingml/2006/main" wrap="square" lIns="0" tIns="0" rIns="0" bIns="0" anchor="t">
+            <a:normAutofit fontScale="100000"/>
+          </a:bodyPr>
+          <a:lstStyle xmlns:a="http://schemas.openxmlformats.org/drawingml/2006/main"/>
+          <a:p xmlns:a="http://schemas.openxmlformats.org/drawingml/2006/main">
+            <a:pPr algn="l">
+              <a:buNone/>
+              <a:defRPr sz="1425" b="0">
+                <a:solidFill>
+                  <a:srgbClr val="667384"/>
+                </a:solidFill>
+                <a:latin typeface="Arial"/>
+                <a:ea typeface="Arial"/>
+                <a:cs typeface="Arial"/>
+              </a:defRPr>
+            </a:pPr>
+            <a:r>
+              <a:rPr sz="1425" b="0">
+                <a:solidFill>
+                  <a:srgbClr val="667384"/>
+                </a:solidFill>
+                <a:latin typeface="Arial"/>
+                <a:ea typeface="Arial"/>
+                <a:cs typeface="Arial"/>
+              </a:rPr>
+              <a:t>after completed signal close</a:t>
+            </a:r>
+          </a:p>
+        </p:txBody>
+      </p:sp>
+      <p:sp>
+        <p:nvSpPr>
+          <p:cNvPr id="10" name="">
+            <a:extLst xmlns:a="http://schemas.openxmlformats.org/drawingml/2006/main">
+              <a:ext uri="{FF2B5EF4-FFF2-40B4-BE49-F238E27FC236}">
+                <a16:creationId xmlns:a16="http://schemas.microsoft.com/office/drawing/2014/main" id="{294777C3-6D2F-4277-840E-7E984FB4554D}"/>
+              </a:ext>
+            </a:extLst>
+          </p:cNvPr>
+          <p:cNvSpPr>
+            <a:spLocks xmlns:a="http://schemas.openxmlformats.org/drawingml/2006/main" noGrp="1"/>
+          </p:cNvSpPr>
+          <p:nvPr/>
+        </p:nvSpPr>
+        <p:spPr>
+          <a:xfrm xmlns:a="http://schemas.openxmlformats.org/drawingml/2006/main">
+            <a:off x="876300" y="2590800"/>
+            <a:ext cx="10553700" cy="9525"/>
+          </a:xfrm>
+          <a:prstGeom xmlns:a="http://schemas.openxmlformats.org/drawingml/2006/main" prst="rect">
+            <a:avLst/>
+          </a:prstGeom>
+          <a:solidFill xmlns:a="http://schemas.openxmlformats.org/drawingml/2006/main">
+            <a:srgbClr val="B8BCC4"/>
+          </a:solidFill>
+          <a:ln xmlns:a="http://schemas.openxmlformats.org/drawingml/2006/main" w="0">
+            <a:solidFill>
+              <a:srgbClr val="B8BCC4"/>
+            </a:solidFill>
+            <a:prstDash val="solid"/>
+          </a:ln>
+        </p:spPr>
+      </p:sp>
+      <p:sp>
+        <p:nvSpPr>
+          <p:cNvPr id="11" name="">
+            <a:extLst xmlns:a="http://schemas.openxmlformats.org/drawingml/2006/main">
+              <a:ext uri="{FF2B5EF4-FFF2-40B4-BE49-F238E27FC236}">
+                <a16:creationId xmlns:a16="http://schemas.microsoft.com/office/drawing/2014/main" id="{F894CF3F-AD63-423C-8F01-64C507896579}"/>
+              </a:ext>
+            </a:extLst>
+          </p:cNvPr>
+          <p:cNvSpPr>
+            <a:spLocks xmlns:a="http://schemas.openxmlformats.org/drawingml/2006/main" noGrp="1"/>
+          </p:cNvSpPr>
+          <p:nvPr/>
+        </p:nvSpPr>
+        <p:spPr>
+          <a:xfrm xmlns:a="http://schemas.openxmlformats.org/drawingml/2006/main">
+            <a:off x="552450" y="2800350"/>
+            <a:ext cx="95250" cy="895350"/>
+          </a:xfrm>
+          <a:prstGeom xmlns:a="http://schemas.openxmlformats.org/drawingml/2006/main" prst="rect">
+            <a:avLst/>
+          </a:prstGeom>
+          <a:solidFill xmlns:a="http://schemas.openxmlformats.org/drawingml/2006/main">
+            <a:srgbClr val="2A9D6F"/>
+          </a:solidFill>
+          <a:ln xmlns:a="http://schemas.openxmlformats.org/drawingml/2006/main" w="0">
+            <a:solidFill>
+              <a:srgbClr val="2A9D6F"/>
+            </a:solidFill>
+            <a:prstDash val="solid"/>
+          </a:ln>
+        </p:spPr>
+      </p:sp>
+      <p:sp>
+        <p:nvSpPr>
+          <p:cNvPr id="12" name="">
+            <a:extLst xmlns:a="http://schemas.openxmlformats.org/drawingml/2006/main">
+              <a:ext uri="{FF2B5EF4-FFF2-40B4-BE49-F238E27FC236}">
+                <a16:creationId xmlns:a16="http://schemas.microsoft.com/office/drawing/2014/main" id="{D3953D03-6A7A-4FEE-B242-02BF0319C169}"/>
+              </a:ext>
+            </a:extLst>
+          </p:cNvPr>
+          <p:cNvSpPr>
+            <a:spLocks xmlns:a="http://schemas.openxmlformats.org/drawingml/2006/main" noGrp="1"/>
+          </p:cNvSpPr>
+          <p:nvPr/>
+        </p:nvSpPr>
+        <p:spPr>
+          <a:xfrm xmlns:a="http://schemas.openxmlformats.org/drawingml/2006/main">
+            <a:off x="876300" y="2781300"/>
+            <a:ext cx="2095500" cy="285750"/>
+          </a:xfrm>
+          <a:prstGeom xmlns:a="http://schemas.openxmlformats.org/drawingml/2006/main" prst="rect">
+            <a:avLst/>
+          </a:prstGeom>
+          <a:noFill xmlns:a="http://schemas.openxmlformats.org/drawingml/2006/main"/>
+          <a:ln xmlns:a="http://schemas.openxmlformats.org/drawingml/2006/main" w="0">
+            <a:noFill/>
+            <a:prstDash val="solid"/>
+          </a:ln>
+        </p:spPr>
+        <p:txBody>
+          <a:bodyPr xmlns:a="http://schemas.openxmlformats.org/drawingml/2006/main" wrap="square" lIns="0" tIns="0" rIns="0" bIns="0" anchor="t">
+            <a:normAutofit fontScale="100000"/>
+          </a:bodyPr>
+          <a:lstStyle xmlns:a="http://schemas.openxmlformats.org/drawingml/2006/main"/>
+          <a:p xmlns:a="http://schemas.openxmlformats.org/drawingml/2006/main">
+            <a:pPr algn="l">
+              <a:buNone/>
+              <a:defRPr sz="1350" b="1">
+                <a:solidFill>
+                  <a:srgbClr val="2A9D6F"/>
+                </a:solidFill>
+                <a:latin typeface="Arial"/>
+                <a:ea typeface="Arial"/>
+                <a:cs typeface="Arial"/>
+              </a:defRPr>
+            </a:pPr>
+            <a:r>
+              <a:rPr sz="1350" b="1">
+                <a:solidFill>
+                  <a:srgbClr val="2A9D6F"/>
+                </a:solidFill>
+                <a:latin typeface="Arial"/>
+                <a:ea typeface="Arial"/>
+                <a:cs typeface="Arial"/>
+              </a:rPr>
+              <a:t>EXIT</a:t>
+            </a:r>
+          </a:p>
+        </p:txBody>
+      </p:sp>
+      <p:sp>
+        <p:nvSpPr>
+          <p:cNvPr id="13" name="">
+            <a:extLst xmlns:a="http://schemas.openxmlformats.org/drawingml/2006/main">
+              <a:ext uri="{FF2B5EF4-FFF2-40B4-BE49-F238E27FC236}">
+                <a16:creationId xmlns:a16="http://schemas.microsoft.com/office/drawing/2014/main" id="{52D1DBE8-EAF6-4492-89E7-5C97A3A6A395}"/>
+              </a:ext>
+            </a:extLst>
+          </p:cNvPr>
+          <p:cNvSpPr>
+            <a:spLocks xmlns:a="http://schemas.openxmlformats.org/drawingml/2006/main" noGrp="1"/>
+          </p:cNvSpPr>
+          <p:nvPr/>
+        </p:nvSpPr>
+        <p:spPr>
+          <a:xfrm xmlns:a="http://schemas.openxmlformats.org/drawingml/2006/main">
+            <a:off x="3105150" y="2762250"/>
+            <a:ext cx="4762500" cy="419100"/>
+          </a:xfrm>
+          <a:prstGeom xmlns:a="http://schemas.openxmlformats.org/drawingml/2006/main" prst="rect">
+            <a:avLst/>
+          </a:prstGeom>
+          <a:noFill xmlns:a="http://schemas.openxmlformats.org/drawingml/2006/main"/>
+          <a:ln xmlns:a="http://schemas.openxmlformats.org/drawingml/2006/main" w="0">
+            <a:noFill/>
+            <a:prstDash val="solid"/>
+          </a:ln>
+        </p:spPr>
+        <p:txBody>
+          <a:bodyPr xmlns:a="http://schemas.openxmlformats.org/drawingml/2006/main" wrap="square" lIns="0" tIns="0" rIns="0" bIns="0" anchor="t">
+            <a:normAutofit fontScale="100000"/>
+          </a:bodyPr>
+          <a:lstStyle xmlns:a="http://schemas.openxmlformats.org/drawingml/2006/main"/>
+          <a:p xmlns:a="http://schemas.openxmlformats.org/drawingml/2006/main">
+            <a:pPr algn="l">
+              <a:buNone/>
+              <a:defRPr sz="1950" b="1">
+                <a:solidFill>
+                  <a:srgbClr val="273548"/>
+                </a:solidFill>
+                <a:latin typeface="Arial"/>
+                <a:ea typeface="Arial"/>
+                <a:cs typeface="Arial"/>
+              </a:defRPr>
+            </a:pPr>
+            <a:r>
+              <a:rPr sz="1950" b="1">
+                <a:solidFill>
+                  <a:srgbClr val="273548"/>
+                </a:solidFill>
+                <a:latin typeface="Arial"/>
+                <a:ea typeface="Arial"/>
+                <a:cs typeface="Arial"/>
+              </a:rPr>
+              <a:t>Open t+21</a:t>
+            </a:r>
+          </a:p>
+        </p:txBody>
+      </p:sp>
+      <p:sp>
+        <p:nvSpPr>
+          <p:cNvPr id="14" name="">
+            <a:extLst xmlns:a="http://schemas.openxmlformats.org/drawingml/2006/main">
+              <a:ext uri="{FF2B5EF4-FFF2-40B4-BE49-F238E27FC236}">
+                <a16:creationId xmlns:a16="http://schemas.microsoft.com/office/drawing/2014/main" id="{2CAF0156-C9E6-4210-8A8A-BFEDD044631B}"/>
+              </a:ext>
+            </a:extLst>
+          </p:cNvPr>
+          <p:cNvSpPr>
+            <a:spLocks xmlns:a="http://schemas.openxmlformats.org/drawingml/2006/main" noGrp="1"/>
+          </p:cNvSpPr>
+          <p:nvPr/>
+        </p:nvSpPr>
+        <p:spPr>
+          <a:xfrm xmlns:a="http://schemas.openxmlformats.org/drawingml/2006/main">
+            <a:off x="8096250" y="2781300"/>
+            <a:ext cx="3333750" cy="704850"/>
+          </a:xfrm>
+          <a:prstGeom xmlns:a="http://schemas.openxmlformats.org/drawingml/2006/main" prst="rect">
+            <a:avLst/>
+          </a:prstGeom>
+          <a:noFill xmlns:a="http://schemas.openxmlformats.org/drawingml/2006/main"/>
+          <a:ln xmlns:a="http://schemas.openxmlformats.org/drawingml/2006/main" w="0">
+            <a:noFill/>
+            <a:prstDash val="solid"/>
+          </a:ln>
+        </p:spPr>
+        <p:txBody>
+          <a:bodyPr xmlns:a="http://schemas.openxmlformats.org/drawingml/2006/main" wrap="square" lIns="0" tIns="0" rIns="0" bIns="0" anchor="t">
+            <a:normAutofit fontScale="100000"/>
+          </a:bodyPr>
+          <a:lstStyle xmlns:a="http://schemas.openxmlformats.org/drawingml/2006/main"/>
+          <a:p xmlns:a="http://schemas.openxmlformats.org/drawingml/2006/main">
+            <a:pPr algn="l">
+              <a:buNone/>
+              <a:defRPr sz="1425" b="0">
+                <a:solidFill>
+                  <a:srgbClr val="667384"/>
+                </a:solidFill>
+                <a:latin typeface="Arial"/>
+                <a:ea typeface="Arial"/>
+                <a:cs typeface="Arial"/>
+              </a:defRPr>
+            </a:pPr>
+            <a:r>
+              <a:rPr sz="1425" b="0">
+                <a:solidFill>
+                  <a:srgbClr val="667384"/>
+                </a:solidFill>
+                <a:latin typeface="Arial"/>
+                <a:ea typeface="Arial"/>
+                <a:cs typeface="Arial"/>
+              </a:rPr>
+              <a:t>20 held sessions</a:t>
+            </a:r>
+          </a:p>
+        </p:txBody>
+      </p:sp>
+      <p:sp>
+        <p:nvSpPr>
+          <p:cNvPr id="15" name="">
+            <a:extLst xmlns:a="http://schemas.openxmlformats.org/drawingml/2006/main">
+              <a:ext uri="{FF2B5EF4-FFF2-40B4-BE49-F238E27FC236}">
+                <a16:creationId xmlns:a16="http://schemas.microsoft.com/office/drawing/2014/main" id="{B126165D-5B65-44DB-99BD-15ED33F9B90F}"/>
+              </a:ext>
+            </a:extLst>
+          </p:cNvPr>
+          <p:cNvSpPr>
+            <a:spLocks xmlns:a="http://schemas.openxmlformats.org/drawingml/2006/main" noGrp="1"/>
+          </p:cNvSpPr>
+          <p:nvPr/>
+        </p:nvSpPr>
+        <p:spPr>
+          <a:xfrm xmlns:a="http://schemas.openxmlformats.org/drawingml/2006/main">
+            <a:off x="876300" y="3790950"/>
+            <a:ext cx="10553700" cy="9525"/>
+          </a:xfrm>
+          <a:prstGeom xmlns:a="http://schemas.openxmlformats.org/drawingml/2006/main" prst="rect">
+            <a:avLst/>
+          </a:prstGeom>
+          <a:solidFill xmlns:a="http://schemas.openxmlformats.org/drawingml/2006/main">
+            <a:srgbClr val="B8BCC4"/>
+          </a:solidFill>
+          <a:ln xmlns:a="http://schemas.openxmlformats.org/drawingml/2006/main" w="0">
+            <a:solidFill>
+              <a:srgbClr val="B8BCC4"/>
+            </a:solidFill>
+            <a:prstDash val="solid"/>
+          </a:ln>
+        </p:spPr>
+      </p:sp>
+      <p:sp>
+        <p:nvSpPr>
+          <p:cNvPr id="16" name="">
+            <a:extLst xmlns:a="http://schemas.openxmlformats.org/drawingml/2006/main">
+              <a:ext uri="{FF2B5EF4-FFF2-40B4-BE49-F238E27FC236}">
+                <a16:creationId xmlns:a16="http://schemas.microsoft.com/office/drawing/2014/main" id="{7DC0911F-9587-4B19-84C6-11974DB2A91C}"/>
+              </a:ext>
+            </a:extLst>
+          </p:cNvPr>
+          <p:cNvSpPr>
+            <a:spLocks xmlns:a="http://schemas.openxmlformats.org/drawingml/2006/main" noGrp="1"/>
+          </p:cNvSpPr>
+          <p:nvPr/>
+        </p:nvSpPr>
+        <p:spPr>
+          <a:xfrm xmlns:a="http://schemas.openxmlformats.org/drawingml/2006/main">
+            <a:off x="552450" y="4000500"/>
+            <a:ext cx="95250" cy="895350"/>
+          </a:xfrm>
+          <a:prstGeom xmlns:a="http://schemas.openxmlformats.org/drawingml/2006/main" prst="rect">
+            <a:avLst/>
+          </a:prstGeom>
+          <a:solidFill xmlns:a="http://schemas.openxmlformats.org/drawingml/2006/main">
+            <a:srgbClr val="3D8DFF"/>
+          </a:solidFill>
+          <a:ln xmlns:a="http://schemas.openxmlformats.org/drawingml/2006/main" w="0">
+            <a:solidFill>
+              <a:srgbClr val="3D8DFF"/>
+            </a:solidFill>
+            <a:prstDash val="solid"/>
+          </a:ln>
+        </p:spPr>
+      </p:sp>
+      <p:sp>
+        <p:nvSpPr>
+          <p:cNvPr id="17" name="">
+            <a:extLst xmlns:a="http://schemas.openxmlformats.org/drawingml/2006/main">
+              <a:ext uri="{FF2B5EF4-FFF2-40B4-BE49-F238E27FC236}">
+                <a16:creationId xmlns:a16="http://schemas.microsoft.com/office/drawing/2014/main" id="{DAB53991-F50C-4B95-9F23-DAE86BCEDF3B}"/>
+              </a:ext>
+            </a:extLst>
+          </p:cNvPr>
+          <p:cNvSpPr>
+            <a:spLocks xmlns:a="http://schemas.openxmlformats.org/drawingml/2006/main" noGrp="1"/>
+          </p:cNvSpPr>
+          <p:nvPr/>
+        </p:nvSpPr>
+        <p:spPr>
+          <a:xfrm xmlns:a="http://schemas.openxmlformats.org/drawingml/2006/main">
+            <a:off x="876300" y="3981450"/>
+            <a:ext cx="2095500" cy="285750"/>
+          </a:xfrm>
+          <a:prstGeom xmlns:a="http://schemas.openxmlformats.org/drawingml/2006/main" prst="rect">
+            <a:avLst/>
+          </a:prstGeom>
+          <a:noFill xmlns:a="http://schemas.openxmlformats.org/drawingml/2006/main"/>
+          <a:ln xmlns:a="http://schemas.openxmlformats.org/drawingml/2006/main" w="0">
+            <a:noFill/>
+            <a:prstDash val="solid"/>
+          </a:ln>
+        </p:spPr>
+        <p:txBody>
+          <a:bodyPr xmlns:a="http://schemas.openxmlformats.org/drawingml/2006/main" wrap="square" lIns="0" tIns="0" rIns="0" bIns="0" anchor="t">
+            <a:normAutofit fontScale="100000"/>
+          </a:bodyPr>
+          <a:lstStyle xmlns:a="http://schemas.openxmlformats.org/drawingml/2006/main"/>
+          <a:p xmlns:a="http://schemas.openxmlformats.org/drawingml/2006/main">
+            <a:pPr algn="l">
+              <a:buNone/>
+              <a:defRPr sz="1350" b="1">
+                <a:solidFill>
+                  <a:srgbClr val="3D8DFF"/>
+                </a:solidFill>
+                <a:latin typeface="Arial"/>
+                <a:ea typeface="Arial"/>
+                <a:cs typeface="Arial"/>
+              </a:defRPr>
+            </a:pPr>
+            <a:r>
+              <a:rPr sz="1350" b="1">
+                <a:solidFill>
+                  <a:srgbClr val="3D8DFF"/>
+                </a:solidFill>
+                <a:latin typeface="Arial"/>
+                <a:ea typeface="Arial"/>
+                <a:cs typeface="Arial"/>
+              </a:rPr>
+              <a:t>POSITION</a:t>
+            </a:r>
+          </a:p>
+        </p:txBody>
+      </p:sp>
+      <p:sp>
+        <p:nvSpPr>
+          <p:cNvPr id="18" name="">
+            <a:extLst xmlns:a="http://schemas.openxmlformats.org/drawingml/2006/main">
+              <a:ext uri="{FF2B5EF4-FFF2-40B4-BE49-F238E27FC236}">
+                <a16:creationId xmlns:a16="http://schemas.microsoft.com/office/drawing/2014/main" id="{5DFACF3B-08BC-4148-A40A-2004DFB81D71}"/>
+              </a:ext>
+            </a:extLst>
+          </p:cNvPr>
+          <p:cNvSpPr>
+            <a:spLocks xmlns:a="http://schemas.openxmlformats.org/drawingml/2006/main" noGrp="1"/>
+          </p:cNvSpPr>
+          <p:nvPr/>
+        </p:nvSpPr>
+        <p:spPr>
+          <a:xfrm xmlns:a="http://schemas.openxmlformats.org/drawingml/2006/main">
+            <a:off x="3105150" y="3962400"/>
+            <a:ext cx="4762500" cy="419100"/>
+          </a:xfrm>
+          <a:prstGeom xmlns:a="http://schemas.openxmlformats.org/drawingml/2006/main" prst="rect">
+            <a:avLst/>
+          </a:prstGeom>
+          <a:noFill xmlns:a="http://schemas.openxmlformats.org/drawingml/2006/main"/>
+          <a:ln xmlns:a="http://schemas.openxmlformats.org/drawingml/2006/main" w="0">
+            <a:noFill/>
+            <a:prstDash val="solid"/>
+          </a:ln>
+        </p:spPr>
+        <p:txBody>
+          <a:bodyPr xmlns:a="http://schemas.openxmlformats.org/drawingml/2006/main" wrap="square" lIns="0" tIns="0" rIns="0" bIns="0" anchor="t">
+            <a:normAutofit fontScale="100000"/>
+          </a:bodyPr>
+          <a:lstStyle xmlns:a="http://schemas.openxmlformats.org/drawingml/2006/main"/>
+          <a:p xmlns:a="http://schemas.openxmlformats.org/drawingml/2006/main">
+            <a:pPr algn="l">
+              <a:buNone/>
+              <a:defRPr sz="1950" b="1">
+                <a:solidFill>
+                  <a:srgbClr val="273548"/>
+                </a:solidFill>
+                <a:latin typeface="Arial"/>
+                <a:ea typeface="Arial"/>
+                <a:cs typeface="Arial"/>
+              </a:defRPr>
+            </a:pPr>
+            <a:r>
+              <a:rPr sz="1950" b="1">
+                <a:solidFill>
+                  <a:srgbClr val="273548"/>
+                </a:solidFill>
+                <a:latin typeface="Arial"/>
+                <a:ea typeface="Arial"/>
+                <a:cs typeface="Arial"/>
+              </a:rPr>
+              <a:t>One per asset</a:t>
+            </a:r>
+          </a:p>
+        </p:txBody>
+      </p:sp>
+      <p:sp>
+        <p:nvSpPr>
+          <p:cNvPr id="19" name="">
+            <a:extLst xmlns:a="http://schemas.openxmlformats.org/drawingml/2006/main">
+              <a:ext uri="{FF2B5EF4-FFF2-40B4-BE49-F238E27FC236}">
+                <a16:creationId xmlns:a16="http://schemas.microsoft.com/office/drawing/2014/main" id="{C907D23B-44A2-43C4-9658-4C6E38430BF5}"/>
+              </a:ext>
+            </a:extLst>
+          </p:cNvPr>
+          <p:cNvSpPr>
+            <a:spLocks xmlns:a="http://schemas.openxmlformats.org/drawingml/2006/main" noGrp="1"/>
+          </p:cNvSpPr>
+          <p:nvPr/>
+        </p:nvSpPr>
+        <p:spPr>
+          <a:xfrm xmlns:a="http://schemas.openxmlformats.org/drawingml/2006/main">
+            <a:off x="8096250" y="3981450"/>
+            <a:ext cx="3333750" cy="704850"/>
+          </a:xfrm>
+          <a:prstGeom xmlns:a="http://schemas.openxmlformats.org/drawingml/2006/main" prst="rect">
+            <a:avLst/>
+          </a:prstGeom>
+          <a:noFill xmlns:a="http://schemas.openxmlformats.org/drawingml/2006/main"/>
+          <a:ln xmlns:a="http://schemas.openxmlformats.org/drawingml/2006/main" w="0">
+            <a:noFill/>
+            <a:prstDash val="solid"/>
+          </a:ln>
+        </p:spPr>
+        <p:txBody>
+          <a:bodyPr xmlns:a="http://schemas.openxmlformats.org/drawingml/2006/main" wrap="square" lIns="0" tIns="0" rIns="0" bIns="0" anchor="t">
+            <a:normAutofit fontScale="100000"/>
+          </a:bodyPr>
+          <a:lstStyle xmlns:a="http://schemas.openxmlformats.org/drawingml/2006/main"/>
+          <a:p xmlns:a="http://schemas.openxmlformats.org/drawingml/2006/main">
+            <a:pPr algn="l">
+              <a:buNone/>
+              <a:defRPr sz="1425" b="0">
+                <a:solidFill>
+                  <a:srgbClr val="667384"/>
+                </a:solidFill>
+                <a:latin typeface="Arial"/>
+                <a:ea typeface="Arial"/>
+                <a:cs typeface="Arial"/>
+              </a:defRPr>
+            </a:pPr>
+            <a:r>
+              <a:rPr sz="1425" b="0">
+                <a:solidFill>
+                  <a:srgbClr val="667384"/>
+                </a:solidFill>
+                <a:latin typeface="Arial"/>
+                <a:ea typeface="Arial"/>
+                <a:cs typeface="Arial"/>
+              </a:rPr>
+              <a:t>intervening signals ignored</a:t>
+            </a:r>
+          </a:p>
+        </p:txBody>
+      </p:sp>
+      <p:sp>
+        <p:nvSpPr>
+          <p:cNvPr id="20" name="">
+            <a:extLst xmlns:a="http://schemas.openxmlformats.org/drawingml/2006/main">
+              <a:ext uri="{FF2B5EF4-FFF2-40B4-BE49-F238E27FC236}">
+                <a16:creationId xmlns:a16="http://schemas.microsoft.com/office/drawing/2014/main" id="{8042DFC4-7E22-47E6-8C53-1E63A8411C3A}"/>
+              </a:ext>
+            </a:extLst>
+          </p:cNvPr>
+          <p:cNvSpPr>
+            <a:spLocks xmlns:a="http://schemas.openxmlformats.org/drawingml/2006/main" noGrp="1"/>
+          </p:cNvSpPr>
+          <p:nvPr/>
+        </p:nvSpPr>
+        <p:spPr>
+          <a:xfrm xmlns:a="http://schemas.openxmlformats.org/drawingml/2006/main">
+            <a:off x="876300" y="4991100"/>
+            <a:ext cx="10553700" cy="9525"/>
+          </a:xfrm>
+          <a:prstGeom xmlns:a="http://schemas.openxmlformats.org/drawingml/2006/main" prst="rect">
+            <a:avLst/>
+          </a:prstGeom>
+          <a:solidFill xmlns:a="http://schemas.openxmlformats.org/drawingml/2006/main">
+            <a:srgbClr val="B8BCC4"/>
+          </a:solidFill>
+          <a:ln xmlns:a="http://schemas.openxmlformats.org/drawingml/2006/main" w="0">
+            <a:solidFill>
+              <a:srgbClr val="B8BCC4"/>
+            </a:solidFill>
+            <a:prstDash val="solid"/>
+          </a:ln>
+        </p:spPr>
+      </p:sp>
+      <p:sp>
+        <p:nvSpPr>
+          <p:cNvPr id="21" name="">
+            <a:extLst xmlns:a="http://schemas.openxmlformats.org/drawingml/2006/main">
+              <a:ext uri="{FF2B5EF4-FFF2-40B4-BE49-F238E27FC236}">
+                <a16:creationId xmlns:a16="http://schemas.microsoft.com/office/drawing/2014/main" id="{F4066D54-676B-4D0F-93B6-2152B57E41AF}"/>
+              </a:ext>
+            </a:extLst>
+          </p:cNvPr>
+          <p:cNvSpPr>
+            <a:spLocks xmlns:a="http://schemas.openxmlformats.org/drawingml/2006/main" noGrp="1"/>
+          </p:cNvSpPr>
+          <p:nvPr/>
+        </p:nvSpPr>
+        <p:spPr>
+          <a:xfrm xmlns:a="http://schemas.openxmlformats.org/drawingml/2006/main">
+            <a:off x="552450" y="5353050"/>
+            <a:ext cx="10877550" cy="781050"/>
+          </a:xfrm>
+          <a:prstGeom xmlns:a="http://schemas.openxmlformats.org/drawingml/2006/main" prst="rect">
+            <a:avLst/>
+          </a:prstGeom>
+          <a:solidFill xmlns:a="http://schemas.openxmlformats.org/drawingml/2006/main">
+            <a:srgbClr val="EAF5FB"/>
+          </a:solidFill>
+          <a:ln xmlns:a="http://schemas.openxmlformats.org/drawingml/2006/main" w="0">
+            <a:solidFill>
+              <a:srgbClr val="EAF5FB"/>
+            </a:solidFill>
+            <a:prstDash val="solid"/>
+          </a:ln>
+        </p:spPr>
+      </p:sp>
+      <p:sp>
+        <p:nvSpPr>
+          <p:cNvPr id="22" name="">
+            <a:extLst xmlns:a="http://schemas.openxmlformats.org/drawingml/2006/main">
+              <a:ext uri="{FF2B5EF4-FFF2-40B4-BE49-F238E27FC236}">
+                <a16:creationId xmlns:a16="http://schemas.microsoft.com/office/drawing/2014/main" id="{6E4C79AE-EB98-4B5B-B3D3-11ED0D4C729B}"/>
+              </a:ext>
+            </a:extLst>
+          </p:cNvPr>
+          <p:cNvSpPr>
+            <a:spLocks xmlns:a="http://schemas.openxmlformats.org/drawingml/2006/main" noGrp="1"/>
+          </p:cNvSpPr>
+          <p:nvPr/>
+        </p:nvSpPr>
+        <p:spPr>
+          <a:xfrm xmlns:a="http://schemas.openxmlformats.org/drawingml/2006/main">
+            <a:off x="781050" y="5524500"/>
+            <a:ext cx="2476500" cy="323850"/>
+          </a:xfrm>
+          <a:prstGeom xmlns:a="http://schemas.openxmlformats.org/drawingml/2006/main" prst="rect">
+            <a:avLst/>
+          </a:prstGeom>
+          <a:noFill xmlns:a="http://schemas.openxmlformats.org/drawingml/2006/main"/>
+          <a:ln xmlns:a="http://schemas.openxmlformats.org/drawingml/2006/main" w="0">
+            <a:noFill/>
+            <a:prstDash val="solid"/>
+          </a:ln>
+        </p:spPr>
+        <p:txBody>
+          <a:bodyPr xmlns:a="http://schemas.openxmlformats.org/drawingml/2006/main" wrap="square" lIns="0" tIns="0" rIns="0" bIns="0" anchor="t">
+            <a:normAutofit fontScale="100000"/>
+          </a:bodyPr>
+          <a:lstStyle xmlns:a="http://schemas.openxmlformats.org/drawingml/2006/main"/>
+          <a:p xmlns:a="http://schemas.openxmlformats.org/drawingml/2006/main">
+            <a:pPr algn="l">
+              <a:buNone/>
+              <a:defRPr sz="1725" b="1">
+                <a:solidFill>
+                  <a:srgbClr val="3D8DFF"/>
+                </a:solidFill>
+                <a:latin typeface="Arial"/>
+                <a:ea typeface="Arial"/>
+                <a:cs typeface="Arial"/>
+              </a:defRPr>
+            </a:pPr>
+            <a:r>
+              <a:rPr sz="1725" b="1">
+                <a:solidFill>
+                  <a:srgbClr val="3D8DFF"/>
+                </a:solidFill>
+                <a:latin typeface="Arial"/>
+                <a:ea typeface="Arial"/>
+                <a:cs typeface="Arial"/>
+              </a:rPr>
+              <a:t>Frozen mechanics</a:t>
+            </a:r>
+          </a:p>
+        </p:txBody>
+      </p:sp>
+      <p:sp>
+        <p:nvSpPr>
+          <p:cNvPr id="23" name="">
+            <a:extLst xmlns:a="http://schemas.openxmlformats.org/drawingml/2006/main">
+              <a:ext uri="{FF2B5EF4-FFF2-40B4-BE49-F238E27FC236}">
+                <a16:creationId xmlns:a16="http://schemas.microsoft.com/office/drawing/2014/main" id="{3320D60E-6067-4236-80ED-A898A863026E}"/>
+              </a:ext>
+            </a:extLst>
+          </p:cNvPr>
+          <p:cNvSpPr>
+            <a:spLocks xmlns:a="http://schemas.openxmlformats.org/drawingml/2006/main" noGrp="1"/>
+          </p:cNvSpPr>
+          <p:nvPr/>
+        </p:nvSpPr>
+        <p:spPr>
+          <a:xfrm xmlns:a="http://schemas.openxmlformats.org/drawingml/2006/main">
+            <a:off x="3333750" y="5486400"/>
+            <a:ext cx="7810500" cy="419100"/>
+          </a:xfrm>
+          <a:prstGeom xmlns:a="http://schemas.openxmlformats.org/drawingml/2006/main" prst="rect">
+            <a:avLst/>
+          </a:prstGeom>
+          <a:noFill xmlns:a="http://schemas.openxmlformats.org/drawingml/2006/main"/>
+          <a:ln xmlns:a="http://schemas.openxmlformats.org/drawingml/2006/main" w="0">
+            <a:noFill/>
+            <a:prstDash val="solid"/>
+          </a:ln>
+        </p:spPr>
+        <p:txBody>
+          <a:bodyPr xmlns:a="http://schemas.openxmlformats.org/drawingml/2006/main" wrap="square" lIns="0" tIns="0" rIns="0" bIns="0" anchor="t">
+            <a:normAutofit fontScale="98015"/>
+          </a:bodyPr>
+          <a:lstStyle xmlns:a="http://schemas.openxmlformats.org/drawingml/2006/main"/>
+          <a:p xmlns:a="http://schemas.openxmlformats.org/drawingml/2006/main">
+            <a:pPr algn="l">
+              <a:buNone/>
+              <a:defRPr sz="1800" b="1">
+                <a:solidFill>
+                  <a:srgbClr val="273548"/>
+                </a:solidFill>
+                <a:latin typeface="Arial"/>
+                <a:ea typeface="Arial"/>
+                <a:cs typeface="Arial"/>
+              </a:defRPr>
+            </a:pPr>
+            <a:r>
+              <a:rPr sz="1800" b="1">
+                <a:solidFill>
+                  <a:srgbClr val="273548"/>
+                </a:solidFill>
+                <a:latin typeface="Arial"/>
+                <a:ea typeface="Arial"/>
+                <a:cs typeface="Arial"/>
+              </a:rPr>
+              <a:t>100 prior negative observations • causal 20th percentile • 10 bp round trip</a:t>
+            </a:r>
+          </a:p>
+        </p:txBody>
+      </p:sp>
+    </p:spTree>
+    <p:extLst>
+      <p:ext uri="{BB962C8B-B14F-4D97-AF65-F5344CB8AC3E}">
+        <p14:creationId xmlns:p14="http://schemas.microsoft.com/office/powerpoint/2010/main" val="666536286"/>
+      </p:ext>
+    </p:extLst>
+  </p:cSld>
+</p:sld>
+</file>
+
+<file path=ppt/slides/slide17.xml><?xml version="1.0" encoding="utf-8"?>
+<p:sld xmlns:p="http://schemas.openxmlformats.org/presentationml/2006/main">
+  <p:cSld>
+    <p:bg>
+      <p:bgPr>
+        <a:solidFill xmlns:a="http://schemas.openxmlformats.org/drawingml/2006/main">
+          <a:srgbClr val="FFFFFF"/>
+        </a:solidFill>
+      </p:bgPr>
+    </p:bg>
+    <p:spTree>
+      <p:nvGrpSpPr>
+        <p:cNvPr id="1" name=""/>
+        <p:cNvGrpSpPr/>
+        <p:nvPr/>
+      </p:nvGrpSpPr>
+      <p:grpSpPr>
+        <a:xfrm xmlns:a="http://schemas.openxmlformats.org/drawingml/2006/main"/>
+      </p:grpSpPr>
+      <p:sp>
+        <p:nvSpPr>
+          <p:cNvPr id="24" name="section-11">
+            <a:extLst xmlns:a="http://schemas.openxmlformats.org/drawingml/2006/main">
+              <a:ext uri="{FF2B5EF4-FFF2-40B4-BE49-F238E27FC236}">
+                <a16:creationId xmlns:a16="http://schemas.microsoft.com/office/drawing/2014/main" id="{272ED433-B59C-436C-9DFB-4D317B90A13F}"/>
+              </a:ext>
+            </a:extLst>
+          </p:cNvPr>
+          <p:cNvSpPr>
+            <a:spLocks xmlns:a="http://schemas.openxmlformats.org/drawingml/2006/main" noGrp="1"/>
+          </p:cNvSpPr>
+          <p:nvPr/>
+        </p:nvSpPr>
+        <p:spPr>
+          <a:xfrm xmlns:a="http://schemas.openxmlformats.org/drawingml/2006/main">
+            <a:off x="457200" y="228600"/>
+            <a:ext cx="4191000" cy="228600"/>
+          </a:xfrm>
+          <a:prstGeom xmlns:a="http://schemas.openxmlformats.org/drawingml/2006/main" prst="rect">
+            <a:avLst/>
+          </a:prstGeom>
+          <a:noFill xmlns:a="http://schemas.openxmlformats.org/drawingml/2006/main"/>
+          <a:ln xmlns:a="http://schemas.openxmlformats.org/drawingml/2006/main" w="0">
+            <a:noFill/>
+            <a:prstDash val="solid"/>
+          </a:ln>
+        </p:spPr>
+        <p:txBody>
+          <a:bodyPr xmlns:a="http://schemas.openxmlformats.org/drawingml/2006/main" wrap="square" lIns="0" tIns="0" rIns="0" bIns="0" anchor="t">
+            <a:normAutofit fontScale="100000"/>
+          </a:bodyPr>
+          <a:lstStyle xmlns:a="http://schemas.openxmlformats.org/drawingml/2006/main"/>
+          <a:p xmlns:a="http://schemas.openxmlformats.org/drawingml/2006/main">
+            <a:pPr algn="l">
+              <a:buNone/>
+              <a:defRPr sz="1200" b="1">
+                <a:solidFill>
+                  <a:srgbClr val="667384"/>
+                </a:solidFill>
+                <a:latin typeface="Arial"/>
+                <a:ea typeface="Arial"/>
+                <a:cs typeface="Arial"/>
+              </a:defRPr>
+            </a:pPr>
+            <a:r>
+              <a:rPr sz="1200" b="1">
+                <a:solidFill>
+                  <a:srgbClr val="667384"/>
+                </a:solidFill>
+                <a:latin typeface="Arial"/>
+                <a:ea typeface="Arial"/>
+                <a:cs typeface="Arial"/>
+              </a:rPr>
+              <a:t>CLOCK TRANSLATION</a:t>
+            </a:r>
+          </a:p>
+        </p:txBody>
+      </p:sp>
+      <p:sp>
+        <p:nvSpPr>
+          <p:cNvPr id="2" name="title-11">
+            <a:extLst xmlns:a="http://schemas.openxmlformats.org/drawingml/2006/main">
+              <a:ext uri="{FF2B5EF4-FFF2-40B4-BE49-F238E27FC236}">
+                <a16:creationId xmlns:a16="http://schemas.microsoft.com/office/drawing/2014/main" id="{3EC40708-7E00-432C-8ECE-907FA5705292}"/>
+              </a:ext>
+            </a:extLst>
+          </p:cNvPr>
+          <p:cNvSpPr>
+            <a:spLocks xmlns:a="http://schemas.openxmlformats.org/drawingml/2006/main" noGrp="1"/>
+          </p:cNvSpPr>
+          <p:nvPr/>
+        </p:nvSpPr>
+        <p:spPr>
+          <a:xfrm xmlns:a="http://schemas.openxmlformats.org/drawingml/2006/main">
+            <a:off x="457200" y="533400"/>
+            <a:ext cx="11277600" cy="628650"/>
+          </a:xfrm>
+          <a:prstGeom xmlns:a="http://schemas.openxmlformats.org/drawingml/2006/main" prst="rect">
+            <a:avLst/>
+          </a:prstGeom>
+          <a:noFill xmlns:a="http://schemas.openxmlformats.org/drawingml/2006/main"/>
+          <a:ln xmlns:a="http://schemas.openxmlformats.org/drawingml/2006/main" w="0">
+            <a:noFill/>
+            <a:prstDash val="solid"/>
+          </a:ln>
+        </p:spPr>
+        <p:txBody>
+          <a:bodyPr xmlns:a="http://schemas.openxmlformats.org/drawingml/2006/main" wrap="square" lIns="0" tIns="0" rIns="0" bIns="0" anchor="t">
+            <a:normAutofit fontScale="100000"/>
+          </a:bodyPr>
+          <a:lstStyle xmlns:a="http://schemas.openxmlformats.org/drawingml/2006/main"/>
+          <a:p xmlns:a="http://schemas.openxmlformats.org/drawingml/2006/main">
+            <a:pPr algn="l">
+              <a:buNone/>
+              <a:defRPr sz="3525" b="1">
+                <a:solidFill>
+                  <a:srgbClr val="000000"/>
+                </a:solidFill>
+                <a:latin typeface="Arial"/>
+                <a:ea typeface="Arial"/>
+                <a:cs typeface="Arial"/>
+              </a:defRPr>
+            </a:pPr>
+            <a:r>
+              <a:rPr sz="3525" b="1">
+                <a:solidFill>
+                  <a:srgbClr val="000000"/>
+                </a:solidFill>
+                <a:latin typeface="Arial"/>
+                <a:ea typeface="Arial"/>
+                <a:cs typeface="Arial"/>
+              </a:rPr>
+              <a:t>Next-open timing preserves almost all of the return</a:t>
+            </a:r>
+          </a:p>
+        </p:txBody>
+      </p:sp>
+      <p:sp>
+        <p:nvSpPr>
+          <p:cNvPr id="3" name="">
+            <a:extLst xmlns:a="http://schemas.openxmlformats.org/drawingml/2006/main">
+              <a:ext uri="{FF2B5EF4-FFF2-40B4-BE49-F238E27FC236}">
+                <a16:creationId xmlns:a16="http://schemas.microsoft.com/office/drawing/2014/main" id="{D5CA0FCE-75E8-41EF-A76A-23E9E2120C6A}"/>
+              </a:ext>
+            </a:extLst>
+          </p:cNvPr>
+          <p:cNvSpPr>
+            <a:spLocks xmlns:a="http://schemas.openxmlformats.org/drawingml/2006/main" noGrp="1"/>
+          </p:cNvSpPr>
+          <p:nvPr/>
+        </p:nvSpPr>
+        <p:spPr>
+          <a:xfrm xmlns:a="http://schemas.openxmlformats.org/drawingml/2006/main">
+            <a:off x="457200" y="1200150"/>
+            <a:ext cx="11277600" cy="19050"/>
+          </a:xfrm>
+          <a:prstGeom xmlns:a="http://schemas.openxmlformats.org/drawingml/2006/main" prst="rect">
+            <a:avLst/>
+          </a:prstGeom>
+          <a:solidFill xmlns:a="http://schemas.openxmlformats.org/drawingml/2006/main">
+            <a:srgbClr val="B8BCC4"/>
+          </a:solidFill>
+          <a:ln xmlns:a="http://schemas.openxmlformats.org/drawingml/2006/main" w="0">
+            <a:solidFill>
+              <a:srgbClr val="B8BCC4"/>
+            </a:solidFill>
+            <a:prstDash val="solid"/>
+          </a:ln>
+        </p:spPr>
+      </p:sp>
+      <p:sp>
+        <p:nvSpPr>
+          <p:cNvPr id="4" name="footer-left-11">
+            <a:extLst xmlns:a="http://schemas.openxmlformats.org/drawingml/2006/main">
+              <a:ext uri="{FF2B5EF4-FFF2-40B4-BE49-F238E27FC236}">
+                <a16:creationId xmlns:a16="http://schemas.microsoft.com/office/drawing/2014/main" id="{700DA765-80E0-4197-8700-00D867B86FA2}"/>
+              </a:ext>
+            </a:extLst>
+          </p:cNvPr>
+          <p:cNvSpPr>
+            <a:spLocks xmlns:a="http://schemas.openxmlformats.org/drawingml/2006/main" noGrp="1"/>
+          </p:cNvSpPr>
+          <p:nvPr/>
+        </p:nvSpPr>
+        <p:spPr>
+          <a:xfrm xmlns:a="http://schemas.openxmlformats.org/drawingml/2006/main">
+            <a:off x="457200" y="6515100"/>
+            <a:ext cx="3429000" cy="171450"/>
+          </a:xfrm>
+          <a:prstGeom xmlns:a="http://schemas.openxmlformats.org/drawingml/2006/main" prst="rect">
+            <a:avLst/>
+          </a:prstGeom>
+          <a:noFill xmlns:a="http://schemas.openxmlformats.org/drawingml/2006/main"/>
+          <a:ln xmlns:a="http://schemas.openxmlformats.org/drawingml/2006/main" w="0">
+            <a:noFill/>
+            <a:prstDash val="solid"/>
+          </a:ln>
+        </p:spPr>
+        <p:txBody>
+          <a:bodyPr xmlns:a="http://schemas.openxmlformats.org/drawingml/2006/main" wrap="square" lIns="0" tIns="0" rIns="0" bIns="0" anchor="t">
+            <a:normAutofit fontScale="100000"/>
+          </a:bodyPr>
+          <a:lstStyle xmlns:a="http://schemas.openxmlformats.org/drawingml/2006/main"/>
+          <a:p xmlns:a="http://schemas.openxmlformats.org/drawingml/2006/main">
+            <a:pPr algn="l">
+              <a:buNone/>
+              <a:defRPr sz="825" b="0">
+                <a:solidFill>
+                  <a:srgbClr val="64748B"/>
+                </a:solidFill>
+                <a:latin typeface="Arial"/>
+                <a:ea typeface="Arial"/>
+                <a:cs typeface="Arial"/>
+              </a:defRPr>
+            </a:pPr>
+            <a:r>
+              <a:rPr sz="825" b="0">
+                <a:solidFill>
+                  <a:srgbClr val="64748B"/>
+                </a:solidFill>
+                <a:latin typeface="Arial"/>
+                <a:ea typeface="Arial"/>
+                <a:cs typeface="Arial"/>
+              </a:rPr>
+              <a:t>Return geometry | close-to-close versus open-to-open</a:t>
+            </a:r>
+          </a:p>
+        </p:txBody>
+      </p:sp>
+      <p:sp>
+        <p:nvSpPr>
+          <p:cNvPr id="5" name="footer-number-11">
+            <a:extLst xmlns:a="http://schemas.openxmlformats.org/drawingml/2006/main">
+              <a:ext uri="{FF2B5EF4-FFF2-40B4-BE49-F238E27FC236}">
+                <a16:creationId xmlns:a16="http://schemas.microsoft.com/office/drawing/2014/main" id="{83896276-4112-4532-AF7C-776C67C58B77}"/>
+              </a:ext>
+            </a:extLst>
+          </p:cNvPr>
+          <p:cNvSpPr>
+            <a:spLocks xmlns:a="http://schemas.openxmlformats.org/drawingml/2006/main" noGrp="1"/>
+          </p:cNvSpPr>
+          <p:nvPr/>
+        </p:nvSpPr>
+        <p:spPr>
+          <a:xfrm xmlns:a="http://schemas.openxmlformats.org/drawingml/2006/main">
+            <a:off x="10477500" y="6496050"/>
+            <a:ext cx="1257300" cy="190500"/>
+          </a:xfrm>
+          <a:prstGeom xmlns:a="http://schemas.openxmlformats.org/drawingml/2006/main" prst="rect">
+            <a:avLst/>
+          </a:prstGeom>
+          <a:noFill xmlns:a="http://schemas.openxmlformats.org/drawingml/2006/main"/>
+          <a:ln xmlns:a="http://schemas.openxmlformats.org/drawingml/2006/main" w="0">
+            <a:noFill/>
+            <a:prstDash val="solid"/>
+          </a:ln>
+        </p:spPr>
+        <p:txBody>
+          <a:bodyPr xmlns:a="http://schemas.openxmlformats.org/drawingml/2006/main" wrap="square" lIns="0" tIns="0" rIns="0" bIns="0" anchor="t">
+            <a:normAutofit fontScale="100000"/>
+          </a:bodyPr>
+          <a:lstStyle xmlns:a="http://schemas.openxmlformats.org/drawingml/2006/main"/>
+          <a:p xmlns:a="http://schemas.openxmlformats.org/drawingml/2006/main">
+            <a:pPr algn="r">
+              <a:buNone/>
+              <a:defRPr sz="1050" b="0">
+                <a:solidFill>
+                  <a:srgbClr val="667384"/>
+                </a:solidFill>
+                <a:latin typeface="Arial"/>
+                <a:ea typeface="Arial"/>
+                <a:cs typeface="Arial"/>
+              </a:defRPr>
+            </a:pPr>
+            <a:r>
+              <a:rPr sz="1050" b="0">
+                <a:solidFill>
+                  <a:srgbClr val="667384"/>
+                </a:solidFill>
+                <a:latin typeface="Arial"/>
+                <a:ea typeface="Arial"/>
+                <a:cs typeface="Arial"/>
+              </a:rPr>
+              <a:t>17</a:t>
+            </a:r>
+          </a:p>
+        </p:txBody>
+      </p:sp>
+      <p:pic>
+        <p:nvPicPr>
+          <p:cNvPr id="33" name=""/>
+          <p:cNvPicPr>
+            <a:picLocks xmlns:a="http://schemas.openxmlformats.org/drawingml/2006/main" noChangeAspect="1"/>
+          </p:cNvPicPr>
+          <p:nvPr/>
+        </p:nvPicPr>
+        <p:blipFill>
+          <a:blip xmlns:r="http://schemas.openxmlformats.org/officeDocument/2006/relationships" xmlns:a="http://schemas.openxmlformats.org/drawingml/2006/main" r:embed="R0a608633f35945ef"/>
+          <a:stretch xmlns:a="http://schemas.openxmlformats.org/drawingml/2006/main"/>
+        </p:blipFill>
+        <p:spPr>
+          <a:xfrm xmlns:a="http://schemas.openxmlformats.org/drawingml/2006/main">
+            <a:off x="1771650" y="1335087"/>
+            <a:ext cx="8648700" cy="5045075"/>
+          </a:xfrm>
+          <a:prstGeom xmlns:a="http://schemas.openxmlformats.org/drawingml/2006/main" prst="rect">
+            <a:avLst/>
+          </a:prstGeom>
+        </p:spPr>
+      </p:pic>
+      <p:pic>
+        <p:nvPicPr>
+          <p:cNvPr id="34" name=""/>
+          <p:cNvPicPr>
+            <a:picLocks xmlns:a="http://schemas.openxmlformats.org/drawingml/2006/main" noChangeAspect="1"/>
+          </p:cNvPicPr>
+          <p:nvPr/>
+        </p:nvPicPr>
+        <p:blipFill>
+          <a:blip xmlns:r="http://schemas.openxmlformats.org/officeDocument/2006/relationships" xmlns:a="http://schemas.openxmlformats.org/drawingml/2006/main" r:embed="Re3026b6be95741d2">
+            <a:extLst>
+              <a:ext uri="{96DAC541-7B7A-43D3-8B79-37D633B846F1}">
+                <asvg:svgBlip xmlns:asvg="http://schemas.microsoft.com/office/drawing/2016/SVG/main" r:embed="R45f9ef4b411d45eb"/>
+              </a:ext>
+            </a:extLst>
+          </a:blip>
+          <a:stretch xmlns:a="http://schemas.openxmlformats.org/drawingml/2006/main"/>
+        </p:blipFill>
+        <p:spPr>
+          <a:xfrm xmlns:a="http://schemas.openxmlformats.org/drawingml/2006/main">
+            <a:off x="1771650" y="1335087"/>
+            <a:ext cx="8648700" cy="5045075"/>
+          </a:xfrm>
+          <a:prstGeom xmlns:a="http://schemas.openxmlformats.org/drawingml/2006/main" prst="rect">
+            <a:avLst/>
+          </a:prstGeom>
+        </p:spPr>
+      </p:pic>
+      <p:pic>
+        <p:nvPicPr>
+          <p:cNvPr id="35" name=""/>
+          <p:cNvPicPr>
+            <a:picLocks xmlns:a="http://schemas.openxmlformats.org/drawingml/2006/main" noChangeAspect="1"/>
+          </p:cNvPicPr>
+          <p:nvPr/>
+        </p:nvPicPr>
+        <p:blipFill>
+          <a:blip xmlns:r="http://schemas.openxmlformats.org/officeDocument/2006/relationships" xmlns:a="http://schemas.openxmlformats.org/drawingml/2006/main" r:embed="Rcb8ca6514b674afa"/>
+          <a:stretch xmlns:a="http://schemas.openxmlformats.org/drawingml/2006/main"/>
+        </p:blipFill>
+        <p:spPr>
+          <a:xfrm xmlns:a="http://schemas.openxmlformats.org/drawingml/2006/main">
+            <a:off x="2172053" y="1335087"/>
+            <a:ext cx="7847894" cy="5045075"/>
+          </a:xfrm>
+          <a:prstGeom xmlns:a="http://schemas.openxmlformats.org/drawingml/2006/main" prst="rect">
+            <a:avLst/>
+          </a:prstGeom>
+        </p:spPr>
+      </p:pic>
+    </p:spTree>
+    <p:extLst>
+      <p:ext uri="{BB962C8B-B14F-4D97-AF65-F5344CB8AC3E}">
+        <p14:creationId xmlns:p14="http://schemas.microsoft.com/office/powerpoint/2010/main" val="666536286"/>
+      </p:ext>
+    </p:extLst>
+  </p:cSld>
+</p:sld>
+</file>
+
+<file path=ppt/slides/slide18.xml><?xml version="1.0" encoding="utf-8"?>
+<p:sld xmlns:p="http://schemas.openxmlformats.org/presentationml/2006/main">
+  <p:cSld>
+    <p:bg>
+      <p:bgPr>
+        <a:solidFill xmlns:a="http://schemas.openxmlformats.org/drawingml/2006/main">
+          <a:srgbClr val="FFFFFF"/>
+        </a:solidFill>
+      </p:bgPr>
+    </p:bg>
+    <p:spTree>
+      <p:nvGrpSpPr>
+        <p:cNvPr id="1" name=""/>
+        <p:cNvGrpSpPr/>
+        <p:nvPr/>
+      </p:nvGrpSpPr>
+      <p:grpSpPr>
+        <a:xfrm xmlns:a="http://schemas.openxmlformats.org/drawingml/2006/main"/>
+      </p:grpSpPr>
+      <p:sp>
+        <p:nvSpPr>
+          <p:cNvPr id="24" name="section-11">
+            <a:extLst xmlns:a="http://schemas.openxmlformats.org/drawingml/2006/main">
+              <a:ext uri="{FF2B5EF4-FFF2-40B4-BE49-F238E27FC236}">
+                <a16:creationId xmlns:a16="http://schemas.microsoft.com/office/drawing/2014/main" id="{272ED433-B59C-436C-9DFB-4D317B90A13F}"/>
+              </a:ext>
+            </a:extLst>
+          </p:cNvPr>
+          <p:cNvSpPr>
+            <a:spLocks xmlns:a="http://schemas.openxmlformats.org/drawingml/2006/main" noGrp="1"/>
+          </p:cNvSpPr>
+          <p:nvPr/>
+        </p:nvSpPr>
+        <p:spPr>
+          <a:xfrm xmlns:a="http://schemas.openxmlformats.org/drawingml/2006/main">
+            <a:off x="457200" y="228600"/>
+            <a:ext cx="4191000" cy="228600"/>
+          </a:xfrm>
+          <a:prstGeom xmlns:a="http://schemas.openxmlformats.org/drawingml/2006/main" prst="rect">
+            <a:avLst/>
+          </a:prstGeom>
+          <a:noFill xmlns:a="http://schemas.openxmlformats.org/drawingml/2006/main"/>
+          <a:ln xmlns:a="http://schemas.openxmlformats.org/drawingml/2006/main" w="0">
+            <a:noFill/>
+            <a:prstDash val="solid"/>
+          </a:ln>
+        </p:spPr>
+        <p:txBody>
+          <a:bodyPr xmlns:a="http://schemas.openxmlformats.org/drawingml/2006/main" wrap="square" lIns="0" tIns="0" rIns="0" bIns="0" anchor="t">
+            <a:normAutofit fontScale="100000"/>
+          </a:bodyPr>
+          <a:lstStyle xmlns:a="http://schemas.openxmlformats.org/drawingml/2006/main"/>
+          <a:p xmlns:a="http://schemas.openxmlformats.org/drawingml/2006/main">
+            <a:pPr algn="l">
+              <a:buNone/>
+              <a:defRPr sz="1200" b="1">
+                <a:solidFill>
+                  <a:srgbClr val="667384"/>
+                </a:solidFill>
+                <a:latin typeface="Arial"/>
+                <a:ea typeface="Arial"/>
+                <a:cs typeface="Arial"/>
+              </a:defRPr>
+            </a:pPr>
+            <a:r>
+              <a:rPr sz="1200" b="1">
+                <a:solidFill>
+                  <a:srgbClr val="667384"/>
+                </a:solidFill>
+                <a:latin typeface="Arial"/>
+                <a:ea typeface="Arial"/>
+                <a:cs typeface="Arial"/>
+              </a:rPr>
+              <a:t>SECTOR BREADTH</a:t>
+            </a:r>
+          </a:p>
+        </p:txBody>
+      </p:sp>
+      <p:sp>
+        <p:nvSpPr>
+          <p:cNvPr id="2" name="title-11">
+            <a:extLst xmlns:a="http://schemas.openxmlformats.org/drawingml/2006/main">
+              <a:ext uri="{FF2B5EF4-FFF2-40B4-BE49-F238E27FC236}">
+                <a16:creationId xmlns:a16="http://schemas.microsoft.com/office/drawing/2014/main" id="{3EC40708-7E00-432C-8ECE-907FA5705292}"/>
+              </a:ext>
+            </a:extLst>
+          </p:cNvPr>
+          <p:cNvSpPr>
+            <a:spLocks xmlns:a="http://schemas.openxmlformats.org/drawingml/2006/main" noGrp="1"/>
+          </p:cNvSpPr>
+          <p:nvPr/>
+        </p:nvSpPr>
+        <p:spPr>
+          <a:xfrm xmlns:a="http://schemas.openxmlformats.org/drawingml/2006/main">
+            <a:off x="457200" y="533400"/>
+            <a:ext cx="11277600" cy="628650"/>
+          </a:xfrm>
+          <a:prstGeom xmlns:a="http://schemas.openxmlformats.org/drawingml/2006/main" prst="rect">
+            <a:avLst/>
+          </a:prstGeom>
+          <a:noFill xmlns:a="http://schemas.openxmlformats.org/drawingml/2006/main"/>
+          <a:ln xmlns:a="http://schemas.openxmlformats.org/drawingml/2006/main" w="0">
+            <a:noFill/>
+            <a:prstDash val="solid"/>
+          </a:ln>
+        </p:spPr>
+        <p:txBody>
+          <a:bodyPr xmlns:a="http://schemas.openxmlformats.org/drawingml/2006/main" wrap="square" lIns="0" tIns="0" rIns="0" bIns="0" anchor="t">
+            <a:normAutofit fontScale="100000"/>
+          </a:bodyPr>
+          <a:lstStyle xmlns:a="http://schemas.openxmlformats.org/drawingml/2006/main"/>
+          <a:p xmlns:a="http://schemas.openxmlformats.org/drawingml/2006/main">
+            <a:pPr algn="l">
+              <a:buNone/>
+              <a:defRPr sz="3525" b="1">
+                <a:solidFill>
+                  <a:srgbClr val="000000"/>
+                </a:solidFill>
+                <a:latin typeface="Arial"/>
+                <a:ea typeface="Arial"/>
+                <a:cs typeface="Arial"/>
+              </a:defRPr>
+            </a:pPr>
+            <a:r>
+              <a:rPr sz="3525" b="1">
+                <a:solidFill>
+                  <a:srgbClr val="000000"/>
+                </a:solidFill>
+                <a:latin typeface="Arial"/>
+                <a:ea typeface="Arial"/>
+                <a:cs typeface="Arial"/>
+              </a:rPr>
+              <a:t>Only six of eleven sectors clear ordinary drift</a:t>
+            </a:r>
+          </a:p>
+        </p:txBody>
+      </p:sp>
+      <p:sp>
+        <p:nvSpPr>
+          <p:cNvPr id="3" name="">
+            <a:extLst xmlns:a="http://schemas.openxmlformats.org/drawingml/2006/main">
+              <a:ext uri="{FF2B5EF4-FFF2-40B4-BE49-F238E27FC236}">
+                <a16:creationId xmlns:a16="http://schemas.microsoft.com/office/drawing/2014/main" id="{D5CA0FCE-75E8-41EF-A76A-23E9E2120C6A}"/>
+              </a:ext>
+            </a:extLst>
+          </p:cNvPr>
+          <p:cNvSpPr>
+            <a:spLocks xmlns:a="http://schemas.openxmlformats.org/drawingml/2006/main" noGrp="1"/>
+          </p:cNvSpPr>
+          <p:nvPr/>
+        </p:nvSpPr>
+        <p:spPr>
+          <a:xfrm xmlns:a="http://schemas.openxmlformats.org/drawingml/2006/main">
+            <a:off x="457200" y="1200150"/>
+            <a:ext cx="11277600" cy="19050"/>
+          </a:xfrm>
+          <a:prstGeom xmlns:a="http://schemas.openxmlformats.org/drawingml/2006/main" prst="rect">
+            <a:avLst/>
+          </a:prstGeom>
+          <a:solidFill xmlns:a="http://schemas.openxmlformats.org/drawingml/2006/main">
+            <a:srgbClr val="B8BCC4"/>
+          </a:solidFill>
+          <a:ln xmlns:a="http://schemas.openxmlformats.org/drawingml/2006/main" w="0">
+            <a:solidFill>
+              <a:srgbClr val="B8BCC4"/>
+            </a:solidFill>
+            <a:prstDash val="solid"/>
+          </a:ln>
+        </p:spPr>
+      </p:sp>
+      <p:sp>
+        <p:nvSpPr>
+          <p:cNvPr id="4" name="footer-left-11">
+            <a:extLst xmlns:a="http://schemas.openxmlformats.org/drawingml/2006/main">
+              <a:ext uri="{FF2B5EF4-FFF2-40B4-BE49-F238E27FC236}">
+                <a16:creationId xmlns:a16="http://schemas.microsoft.com/office/drawing/2014/main" id="{700DA765-80E0-4197-8700-00D867B86FA2}"/>
+              </a:ext>
+            </a:extLst>
+          </p:cNvPr>
+          <p:cNvSpPr>
+            <a:spLocks xmlns:a="http://schemas.openxmlformats.org/drawingml/2006/main" noGrp="1"/>
+          </p:cNvSpPr>
+          <p:nvPr/>
+        </p:nvSpPr>
+        <p:spPr>
+          <a:xfrm xmlns:a="http://schemas.openxmlformats.org/drawingml/2006/main">
+            <a:off x="457200" y="6515100"/>
+            <a:ext cx="3429000" cy="171450"/>
+          </a:xfrm>
+          <a:prstGeom xmlns:a="http://schemas.openxmlformats.org/drawingml/2006/main" prst="rect">
+            <a:avLst/>
+          </a:prstGeom>
+          <a:noFill xmlns:a="http://schemas.openxmlformats.org/drawingml/2006/main"/>
+          <a:ln xmlns:a="http://schemas.openxmlformats.org/drawingml/2006/main" w="0">
+            <a:noFill/>
+            <a:prstDash val="solid"/>
+          </a:ln>
+        </p:spPr>
+        <p:txBody>
+          <a:bodyPr xmlns:a="http://schemas.openxmlformats.org/drawingml/2006/main" wrap="square" lIns="0" tIns="0" rIns="0" bIns="0" anchor="t">
+            <a:normAutofit fontScale="100000"/>
+          </a:bodyPr>
+          <a:lstStyle xmlns:a="http://schemas.openxmlformats.org/drawingml/2006/main"/>
+          <a:p xmlns:a="http://schemas.openxmlformats.org/drawingml/2006/main">
+            <a:pPr algn="l">
+              <a:buNone/>
+              <a:defRPr sz="825" b="0">
+                <a:solidFill>
+                  <a:srgbClr val="64748B"/>
+                </a:solidFill>
+                <a:latin typeface="Arial"/>
+                <a:ea typeface="Arial"/>
+                <a:cs typeface="Arial"/>
+              </a:defRPr>
+            </a:pPr>
+            <a:r>
+              <a:rPr sz="825" b="0">
+                <a:solidFill>
+                  <a:srgbClr val="64748B"/>
+                </a:solidFill>
+                <a:latin typeface="Arial"/>
+                <a:ea typeface="Arial"/>
+                <a:cs typeface="Arial"/>
+              </a:rPr>
+              <a:t>Return geometry | median asset net excess by sector</a:t>
+            </a:r>
+          </a:p>
+        </p:txBody>
+      </p:sp>
+      <p:sp>
+        <p:nvSpPr>
+          <p:cNvPr id="5" name="footer-number-11">
+            <a:extLst xmlns:a="http://schemas.openxmlformats.org/drawingml/2006/main">
+              <a:ext uri="{FF2B5EF4-FFF2-40B4-BE49-F238E27FC236}">
+                <a16:creationId xmlns:a16="http://schemas.microsoft.com/office/drawing/2014/main" id="{83896276-4112-4532-AF7C-776C67C58B77}"/>
+              </a:ext>
+            </a:extLst>
+          </p:cNvPr>
+          <p:cNvSpPr>
+            <a:spLocks xmlns:a="http://schemas.openxmlformats.org/drawingml/2006/main" noGrp="1"/>
+          </p:cNvSpPr>
+          <p:nvPr/>
+        </p:nvSpPr>
+        <p:spPr>
+          <a:xfrm xmlns:a="http://schemas.openxmlformats.org/drawingml/2006/main">
+            <a:off x="10477500" y="6496050"/>
+            <a:ext cx="1257300" cy="190500"/>
+          </a:xfrm>
+          <a:prstGeom xmlns:a="http://schemas.openxmlformats.org/drawingml/2006/main" prst="rect">
+            <a:avLst/>
+          </a:prstGeom>
+          <a:noFill xmlns:a="http://schemas.openxmlformats.org/drawingml/2006/main"/>
+          <a:ln xmlns:a="http://schemas.openxmlformats.org/drawingml/2006/main" w="0">
+            <a:noFill/>
+            <a:prstDash val="solid"/>
+          </a:ln>
+        </p:spPr>
+        <p:txBody>
+          <a:bodyPr xmlns:a="http://schemas.openxmlformats.org/drawingml/2006/main" wrap="square" lIns="0" tIns="0" rIns="0" bIns="0" anchor="t">
+            <a:normAutofit fontScale="100000"/>
+          </a:bodyPr>
+          <a:lstStyle xmlns:a="http://schemas.openxmlformats.org/drawingml/2006/main"/>
+          <a:p xmlns:a="http://schemas.openxmlformats.org/drawingml/2006/main">
+            <a:pPr algn="r">
+              <a:buNone/>
+              <a:defRPr sz="1050" b="0">
+                <a:solidFill>
+                  <a:srgbClr val="667384"/>
+                </a:solidFill>
+                <a:latin typeface="Arial"/>
+                <a:ea typeface="Arial"/>
+                <a:cs typeface="Arial"/>
+              </a:defRPr>
+            </a:pPr>
+            <a:r>
+              <a:rPr sz="1050" b="0">
+                <a:solidFill>
+                  <a:srgbClr val="667384"/>
+                </a:solidFill>
+                <a:latin typeface="Arial"/>
+                <a:ea typeface="Arial"/>
+                <a:cs typeface="Arial"/>
+              </a:rPr>
+              <a:t>18</a:t>
+            </a:r>
+          </a:p>
+        </p:txBody>
+      </p:sp>
+      <p:pic>
+        <p:nvPicPr>
+          <p:cNvPr id="33" name=""/>
+          <p:cNvPicPr>
+            <a:picLocks xmlns:a="http://schemas.openxmlformats.org/drawingml/2006/main" noChangeAspect="1"/>
+          </p:cNvPicPr>
+          <p:nvPr/>
+        </p:nvPicPr>
+        <p:blipFill>
+          <a:blip xmlns:r="http://schemas.openxmlformats.org/officeDocument/2006/relationships" xmlns:a="http://schemas.openxmlformats.org/drawingml/2006/main" r:embed="Rc011db9cd19240e8"/>
+          <a:stretch xmlns:a="http://schemas.openxmlformats.org/drawingml/2006/main"/>
+        </p:blipFill>
+        <p:spPr>
+          <a:xfrm xmlns:a="http://schemas.openxmlformats.org/drawingml/2006/main">
+            <a:off x="1771650" y="1335087"/>
+            <a:ext cx="8648700" cy="5045075"/>
+          </a:xfrm>
+          <a:prstGeom xmlns:a="http://schemas.openxmlformats.org/drawingml/2006/main" prst="rect">
+            <a:avLst/>
+          </a:prstGeom>
+        </p:spPr>
+      </p:pic>
+      <p:pic>
+        <p:nvPicPr>
+          <p:cNvPr id="34" name=""/>
+          <p:cNvPicPr>
+            <a:picLocks xmlns:a="http://schemas.openxmlformats.org/drawingml/2006/main" noChangeAspect="1"/>
+          </p:cNvPicPr>
+          <p:nvPr/>
+        </p:nvPicPr>
+        <p:blipFill>
+          <a:blip xmlns:r="http://schemas.openxmlformats.org/officeDocument/2006/relationships" xmlns:a="http://schemas.openxmlformats.org/drawingml/2006/main" r:embed="Rf6a6944a475c49ef">
+            <a:extLst>
+              <a:ext uri="{96DAC541-7B7A-43D3-8B79-37D633B846F1}">
+                <asvg:svgBlip xmlns:asvg="http://schemas.microsoft.com/office/drawing/2016/SVG/main" r:embed="R9489692dd1184771"/>
+              </a:ext>
+            </a:extLst>
+          </a:blip>
+          <a:stretch xmlns:a="http://schemas.openxmlformats.org/drawingml/2006/main"/>
+        </p:blipFill>
+        <p:spPr>
+          <a:xfrm xmlns:a="http://schemas.openxmlformats.org/drawingml/2006/main">
+            <a:off x="1771650" y="1335087"/>
+            <a:ext cx="8648700" cy="5045075"/>
+          </a:xfrm>
+          <a:prstGeom xmlns:a="http://schemas.openxmlformats.org/drawingml/2006/main" prst="rect">
+            <a:avLst/>
+          </a:prstGeom>
+        </p:spPr>
+      </p:pic>
+      <p:pic>
+        <p:nvPicPr>
+          <p:cNvPr id="35" name=""/>
+          <p:cNvPicPr>
+            <a:picLocks xmlns:a="http://schemas.openxmlformats.org/drawingml/2006/main" noChangeAspect="1"/>
+          </p:cNvPicPr>
+          <p:nvPr/>
+        </p:nvPicPr>
+        <p:blipFill>
+          <a:blip xmlns:r="http://schemas.openxmlformats.org/officeDocument/2006/relationships" xmlns:a="http://schemas.openxmlformats.org/drawingml/2006/main" r:embed="Raad7ce7e82224775"/>
+          <a:stretch xmlns:a="http://schemas.openxmlformats.org/drawingml/2006/main"/>
+        </p:blipFill>
+        <p:spPr>
+          <a:xfrm xmlns:a="http://schemas.openxmlformats.org/drawingml/2006/main">
+            <a:off x="1891771" y="1335087"/>
+            <a:ext cx="8408458" cy="5045075"/>
+          </a:xfrm>
+          <a:prstGeom xmlns:a="http://schemas.openxmlformats.org/drawingml/2006/main" prst="rect">
+            <a:avLst/>
+          </a:prstGeom>
+        </p:spPr>
+      </p:pic>
+    </p:spTree>
+    <p:extLst>
+      <p:ext uri="{BB962C8B-B14F-4D97-AF65-F5344CB8AC3E}">
+        <p14:creationId xmlns:p14="http://schemas.microsoft.com/office/powerpoint/2010/main" val="666536286"/>
+      </p:ext>
+    </p:extLst>
+  </p:cSld>
+</p:sld>
+</file>
+
+<file path=ppt/slides/slide19.xml><?xml version="1.0" encoding="utf-8"?>
+<p:sld xmlns:p="http://schemas.openxmlformats.org/presentationml/2006/main">
+  <p:cSld>
+    <p:bg>
+      <p:bgPr>
+        <a:solidFill xmlns:a="http://schemas.openxmlformats.org/drawingml/2006/main">
+          <a:srgbClr val="FFFFFF"/>
+        </a:solidFill>
+      </p:bgPr>
+    </p:bg>
+    <p:spTree>
+      <p:nvGrpSpPr>
+        <p:cNvPr id="1" name=""/>
+        <p:cNvGrpSpPr/>
+        <p:nvPr/>
+      </p:nvGrpSpPr>
+      <p:grpSpPr>
+        <a:xfrm xmlns:a="http://schemas.openxmlformats.org/drawingml/2006/main"/>
+      </p:grpSpPr>
+      <p:sp>
+        <p:nvSpPr>
+          <p:cNvPr id="24" name="section-11">
+            <a:extLst xmlns:a="http://schemas.openxmlformats.org/drawingml/2006/main">
+              <a:ext uri="{FF2B5EF4-FFF2-40B4-BE49-F238E27FC236}">
+                <a16:creationId xmlns:a16="http://schemas.microsoft.com/office/drawing/2014/main" id="{272ED433-B59C-436C-9DFB-4D317B90A13F}"/>
+              </a:ext>
+            </a:extLst>
+          </p:cNvPr>
+          <p:cNvSpPr>
+            <a:spLocks xmlns:a="http://schemas.openxmlformats.org/drawingml/2006/main" noGrp="1"/>
+          </p:cNvSpPr>
+          <p:nvPr/>
+        </p:nvSpPr>
+        <p:spPr>
+          <a:xfrm xmlns:a="http://schemas.openxmlformats.org/drawingml/2006/main">
+            <a:off x="457200" y="228600"/>
+            <a:ext cx="4191000" cy="228600"/>
+          </a:xfrm>
+          <a:prstGeom xmlns:a="http://schemas.openxmlformats.org/drawingml/2006/main" prst="rect">
+            <a:avLst/>
+          </a:prstGeom>
+          <a:noFill xmlns:a="http://schemas.openxmlformats.org/drawingml/2006/main"/>
+          <a:ln xmlns:a="http://schemas.openxmlformats.org/drawingml/2006/main" w="0">
+            <a:noFill/>
+            <a:prstDash val="solid"/>
+          </a:ln>
+        </p:spPr>
+        <p:txBody>
+          <a:bodyPr xmlns:a="http://schemas.openxmlformats.org/drawingml/2006/main" wrap="square" lIns="0" tIns="0" rIns="0" bIns="0" anchor="t">
+            <a:normAutofit fontScale="100000"/>
+          </a:bodyPr>
+          <a:lstStyle xmlns:a="http://schemas.openxmlformats.org/drawingml/2006/main"/>
+          <a:p xmlns:a="http://schemas.openxmlformats.org/drawingml/2006/main">
+            <a:pPr algn="l">
+              <a:buNone/>
+              <a:defRPr sz="1200" b="1">
+                <a:solidFill>
+                  <a:srgbClr val="667384"/>
+                </a:solidFill>
+                <a:latin typeface="Arial"/>
+                <a:ea typeface="Arial"/>
+                <a:cs typeface="Arial"/>
+              </a:defRPr>
+            </a:pPr>
+            <a:r>
+              <a:rPr sz="1200" b="1">
+                <a:solidFill>
+                  <a:srgbClr val="667384"/>
+                </a:solidFill>
+                <a:latin typeface="Arial"/>
+                <a:ea typeface="Arial"/>
+                <a:cs typeface="Arial"/>
+              </a:rPr>
+              <a:t>AGGREGATION</a:t>
+            </a:r>
+          </a:p>
+        </p:txBody>
+      </p:sp>
+      <p:sp>
+        <p:nvSpPr>
+          <p:cNvPr id="2" name="title-11">
+            <a:extLst xmlns:a="http://schemas.openxmlformats.org/drawingml/2006/main">
+              <a:ext uri="{FF2B5EF4-FFF2-40B4-BE49-F238E27FC236}">
+                <a16:creationId xmlns:a16="http://schemas.microsoft.com/office/drawing/2014/main" id="{3EC40708-7E00-432C-8ECE-907FA5705292}"/>
+              </a:ext>
+            </a:extLst>
+          </p:cNvPr>
+          <p:cNvSpPr>
+            <a:spLocks xmlns:a="http://schemas.openxmlformats.org/drawingml/2006/main" noGrp="1"/>
+          </p:cNvSpPr>
+          <p:nvPr/>
+        </p:nvSpPr>
+        <p:spPr>
+          <a:xfrm xmlns:a="http://schemas.openxmlformats.org/drawingml/2006/main">
+            <a:off x="457200" y="533400"/>
+            <a:ext cx="11277600" cy="628650"/>
+          </a:xfrm>
+          <a:prstGeom xmlns:a="http://schemas.openxmlformats.org/drawingml/2006/main" prst="rect">
+            <a:avLst/>
+          </a:prstGeom>
+          <a:noFill xmlns:a="http://schemas.openxmlformats.org/drawingml/2006/main"/>
+          <a:ln xmlns:a="http://schemas.openxmlformats.org/drawingml/2006/main" w="0">
+            <a:noFill/>
+            <a:prstDash val="solid"/>
+          </a:ln>
+        </p:spPr>
+        <p:txBody>
+          <a:bodyPr xmlns:a="http://schemas.openxmlformats.org/drawingml/2006/main" wrap="square" lIns="0" tIns="0" rIns="0" bIns="0" anchor="t">
+            <a:normAutofit fontScale="93773"/>
+          </a:bodyPr>
+          <a:lstStyle xmlns:a="http://schemas.openxmlformats.org/drawingml/2006/main"/>
+          <a:p xmlns:a="http://schemas.openxmlformats.org/drawingml/2006/main">
+            <a:pPr algn="l">
+              <a:buNone/>
+              <a:defRPr sz="3525" b="1">
+                <a:solidFill>
+                  <a:srgbClr val="000000"/>
+                </a:solidFill>
+                <a:latin typeface="Arial"/>
+                <a:ea typeface="Arial"/>
+                <a:cs typeface="Arial"/>
+              </a:defRPr>
+            </a:pPr>
+            <a:r>
+              <a:rPr sz="3525" b="1">
+                <a:solidFill>
+                  <a:srgbClr val="000000"/>
+                </a:solidFill>
+                <a:latin typeface="Arial"/>
+                <a:ea typeface="Arial"/>
+                <a:cs typeface="Arial"/>
+              </a:rPr>
+              <a:t>A typical asset looks positive—but pooled events do not</a:t>
+            </a:r>
+          </a:p>
+        </p:txBody>
+      </p:sp>
+      <p:sp>
+        <p:nvSpPr>
+          <p:cNvPr id="3" name="">
+            <a:extLst xmlns:a="http://schemas.openxmlformats.org/drawingml/2006/main">
+              <a:ext uri="{FF2B5EF4-FFF2-40B4-BE49-F238E27FC236}">
+                <a16:creationId xmlns:a16="http://schemas.microsoft.com/office/drawing/2014/main" id="{D5CA0FCE-75E8-41EF-A76A-23E9E2120C6A}"/>
+              </a:ext>
+            </a:extLst>
+          </p:cNvPr>
+          <p:cNvSpPr>
+            <a:spLocks xmlns:a="http://schemas.openxmlformats.org/drawingml/2006/main" noGrp="1"/>
+          </p:cNvSpPr>
+          <p:nvPr/>
+        </p:nvSpPr>
+        <p:spPr>
+          <a:xfrm xmlns:a="http://schemas.openxmlformats.org/drawingml/2006/main">
+            <a:off x="457200" y="1200150"/>
+            <a:ext cx="11277600" cy="19050"/>
+          </a:xfrm>
+          <a:prstGeom xmlns:a="http://schemas.openxmlformats.org/drawingml/2006/main" prst="rect">
+            <a:avLst/>
+          </a:prstGeom>
+          <a:solidFill xmlns:a="http://schemas.openxmlformats.org/drawingml/2006/main">
+            <a:srgbClr val="B8BCC4"/>
+          </a:solidFill>
+          <a:ln xmlns:a="http://schemas.openxmlformats.org/drawingml/2006/main" w="0">
+            <a:solidFill>
+              <a:srgbClr val="B8BCC4"/>
+            </a:solidFill>
+            <a:prstDash val="solid"/>
+          </a:ln>
+        </p:spPr>
+      </p:sp>
+      <p:sp>
+        <p:nvSpPr>
+          <p:cNvPr id="4" name="footer-left-11">
+            <a:extLst xmlns:a="http://schemas.openxmlformats.org/drawingml/2006/main">
+              <a:ext uri="{FF2B5EF4-FFF2-40B4-BE49-F238E27FC236}">
+                <a16:creationId xmlns:a16="http://schemas.microsoft.com/office/drawing/2014/main" id="{700DA765-80E0-4197-8700-00D867B86FA2}"/>
+              </a:ext>
+            </a:extLst>
+          </p:cNvPr>
+          <p:cNvSpPr>
+            <a:spLocks xmlns:a="http://schemas.openxmlformats.org/drawingml/2006/main" noGrp="1"/>
+          </p:cNvSpPr>
+          <p:nvPr/>
+        </p:nvSpPr>
+        <p:spPr>
+          <a:xfrm xmlns:a="http://schemas.openxmlformats.org/drawingml/2006/main">
+            <a:off x="457200" y="6515100"/>
+            <a:ext cx="3429000" cy="171450"/>
+          </a:xfrm>
+          <a:prstGeom xmlns:a="http://schemas.openxmlformats.org/drawingml/2006/main" prst="rect">
+            <a:avLst/>
+          </a:prstGeom>
+          <a:noFill xmlns:a="http://schemas.openxmlformats.org/drawingml/2006/main"/>
+          <a:ln xmlns:a="http://schemas.openxmlformats.org/drawingml/2006/main" w="0">
+            <a:noFill/>
+            <a:prstDash val="solid"/>
+          </a:ln>
+        </p:spPr>
+        <p:txBody>
+          <a:bodyPr xmlns:a="http://schemas.openxmlformats.org/drawingml/2006/main" wrap="square" lIns="0" tIns="0" rIns="0" bIns="0" anchor="t">
+            <a:normAutofit fontScale="100000"/>
+          </a:bodyPr>
+          <a:lstStyle xmlns:a="http://schemas.openxmlformats.org/drawingml/2006/main"/>
+          <a:p xmlns:a="http://schemas.openxmlformats.org/drawingml/2006/main">
+            <a:pPr algn="l">
+              <a:buNone/>
+              <a:defRPr sz="825" b="0">
+                <a:solidFill>
+                  <a:srgbClr val="64748B"/>
+                </a:solidFill>
+                <a:latin typeface="Arial"/>
+                <a:ea typeface="Arial"/>
+                <a:cs typeface="Arial"/>
+              </a:defRPr>
+            </a:pPr>
+            <a:r>
+              <a:rPr sz="825" b="0">
+                <a:solidFill>
+                  <a:srgbClr val="64748B"/>
+                </a:solidFill>
+                <a:latin typeface="Arial"/>
+                <a:ea typeface="Arial"/>
+                <a:cs typeface="Arial"/>
+              </a:rPr>
+              <a:t>Return geometry | three aggregation lenses</a:t>
+            </a:r>
+          </a:p>
+        </p:txBody>
+      </p:sp>
+      <p:sp>
+        <p:nvSpPr>
+          <p:cNvPr id="5" name="footer-number-11">
+            <a:extLst xmlns:a="http://schemas.openxmlformats.org/drawingml/2006/main">
+              <a:ext uri="{FF2B5EF4-FFF2-40B4-BE49-F238E27FC236}">
+                <a16:creationId xmlns:a16="http://schemas.microsoft.com/office/drawing/2014/main" id="{83896276-4112-4532-AF7C-776C67C58B77}"/>
+              </a:ext>
+            </a:extLst>
+          </p:cNvPr>
+          <p:cNvSpPr>
+            <a:spLocks xmlns:a="http://schemas.openxmlformats.org/drawingml/2006/main" noGrp="1"/>
+          </p:cNvSpPr>
+          <p:nvPr/>
+        </p:nvSpPr>
+        <p:spPr>
+          <a:xfrm xmlns:a="http://schemas.openxmlformats.org/drawingml/2006/main">
+            <a:off x="10477500" y="6496050"/>
+            <a:ext cx="1257300" cy="190500"/>
+          </a:xfrm>
+          <a:prstGeom xmlns:a="http://schemas.openxmlformats.org/drawingml/2006/main" prst="rect">
+            <a:avLst/>
+          </a:prstGeom>
+          <a:noFill xmlns:a="http://schemas.openxmlformats.org/drawingml/2006/main"/>
+          <a:ln xmlns:a="http://schemas.openxmlformats.org/drawingml/2006/main" w="0">
+            <a:noFill/>
+            <a:prstDash val="solid"/>
+          </a:ln>
+        </p:spPr>
+        <p:txBody>
+          <a:bodyPr xmlns:a="http://schemas.openxmlformats.org/drawingml/2006/main" wrap="square" lIns="0" tIns="0" rIns="0" bIns="0" anchor="t">
+            <a:normAutofit fontScale="100000"/>
+          </a:bodyPr>
+          <a:lstStyle xmlns:a="http://schemas.openxmlformats.org/drawingml/2006/main"/>
+          <a:p xmlns:a="http://schemas.openxmlformats.org/drawingml/2006/main">
+            <a:pPr algn="r">
+              <a:buNone/>
+              <a:defRPr sz="1050" b="0">
+                <a:solidFill>
+                  <a:srgbClr val="667384"/>
+                </a:solidFill>
+                <a:latin typeface="Arial"/>
+                <a:ea typeface="Arial"/>
+                <a:cs typeface="Arial"/>
+              </a:defRPr>
+            </a:pPr>
+            <a:r>
+              <a:rPr sz="1050" b="0">
+                <a:solidFill>
+                  <a:srgbClr val="667384"/>
+                </a:solidFill>
+                <a:latin typeface="Arial"/>
+                <a:ea typeface="Arial"/>
+                <a:cs typeface="Arial"/>
+              </a:rPr>
+              <a:t>19</a:t>
+            </a:r>
+          </a:p>
+        </p:txBody>
+      </p:sp>
+      <p:pic>
+        <p:nvPicPr>
+          <p:cNvPr id="33" name=""/>
+          <p:cNvPicPr>
+            <a:picLocks xmlns:a="http://schemas.openxmlformats.org/drawingml/2006/main" noChangeAspect="1"/>
+          </p:cNvPicPr>
+          <p:nvPr/>
+        </p:nvPicPr>
+        <p:blipFill>
+          <a:blip xmlns:r="http://schemas.openxmlformats.org/officeDocument/2006/relationships" xmlns:a="http://schemas.openxmlformats.org/drawingml/2006/main" r:embed="Rc971de3379a54858"/>
+          <a:stretch xmlns:a="http://schemas.openxmlformats.org/drawingml/2006/main"/>
+        </p:blipFill>
+        <p:spPr>
+          <a:xfrm xmlns:a="http://schemas.openxmlformats.org/drawingml/2006/main">
+            <a:off x="1771650" y="1335087"/>
+            <a:ext cx="8648700" cy="5045075"/>
+          </a:xfrm>
+          <a:prstGeom xmlns:a="http://schemas.openxmlformats.org/drawingml/2006/main" prst="rect">
+            <a:avLst/>
+          </a:prstGeom>
+        </p:spPr>
+      </p:pic>
+      <p:pic>
+        <p:nvPicPr>
+          <p:cNvPr id="34" name=""/>
+          <p:cNvPicPr>
+            <a:picLocks xmlns:a="http://schemas.openxmlformats.org/drawingml/2006/main" noChangeAspect="1"/>
+          </p:cNvPicPr>
+          <p:nvPr/>
+        </p:nvPicPr>
+        <p:blipFill>
+          <a:blip xmlns:r="http://schemas.openxmlformats.org/officeDocument/2006/relationships" xmlns:a="http://schemas.openxmlformats.org/drawingml/2006/main" r:embed="Re616f888a77d47b8">
+            <a:extLst>
+              <a:ext uri="{96DAC541-7B7A-43D3-8B79-37D633B846F1}">
+                <asvg:svgBlip xmlns:asvg="http://schemas.microsoft.com/office/drawing/2016/SVG/main" r:embed="R47eacf8164794987"/>
+              </a:ext>
+            </a:extLst>
+          </a:blip>
+          <a:stretch xmlns:a="http://schemas.openxmlformats.org/drawingml/2006/main"/>
+        </p:blipFill>
+        <p:spPr>
+          <a:xfrm xmlns:a="http://schemas.openxmlformats.org/drawingml/2006/main">
+            <a:off x="1771650" y="1335087"/>
+            <a:ext cx="8648700" cy="5045075"/>
+          </a:xfrm>
+          <a:prstGeom xmlns:a="http://schemas.openxmlformats.org/drawingml/2006/main" prst="rect">
+            <a:avLst/>
+          </a:prstGeom>
+        </p:spPr>
+      </p:pic>
+      <p:pic>
+        <p:nvPicPr>
+          <p:cNvPr id="35" name=""/>
+          <p:cNvPicPr>
+            <a:picLocks xmlns:a="http://schemas.openxmlformats.org/drawingml/2006/main" noChangeAspect="1"/>
+          </p:cNvPicPr>
+          <p:nvPr/>
+        </p:nvPicPr>
+        <p:blipFill>
+          <a:blip xmlns:r="http://schemas.openxmlformats.org/officeDocument/2006/relationships" xmlns:a="http://schemas.openxmlformats.org/drawingml/2006/main" r:embed="R628c20d1b43a4f93"/>
+          <a:stretch xmlns:a="http://schemas.openxmlformats.org/drawingml/2006/main"/>
+        </p:blipFill>
+        <p:spPr>
+          <a:xfrm xmlns:a="http://schemas.openxmlformats.org/drawingml/2006/main">
+            <a:off x="2172053" y="1335087"/>
+            <a:ext cx="7847894" cy="5045075"/>
+          </a:xfrm>
+          <a:prstGeom xmlns:a="http://schemas.openxmlformats.org/drawingml/2006/main" prst="rect">
+            <a:avLst/>
+          </a:prstGeom>
+        </p:spPr>
+      </p:pic>
+    </p:spTree>
+    <p:extLst>
+      <p:ext uri="{BB962C8B-B14F-4D97-AF65-F5344CB8AC3E}">
+        <p14:creationId xmlns:p14="http://schemas.microsoft.com/office/powerpoint/2010/main" val="666536286"/>
+      </p:ext>
+    </p:extLst>
+  </p:cSld>
+</p:sld>
+</file>
+
 <file path=ppt/slides/slide2.xml><?xml version="1.0" encoding="utf-8"?>
 <p:sld xmlns:p="http://schemas.openxmlformats.org/presentationml/2006/main">
   <p:cSld>
@@ -6334,6 +10835,2664 @@
                 <a:cs typeface="Arial"/>
               </a:rPr>
               <a:t>The atlas is a discovery surface. Promotion begins only after one hypothesis is frozen before new data.</a:t>
+            </a:r>
+          </a:p>
+        </p:txBody>
+      </p:sp>
+    </p:spTree>
+    <p:extLst>
+      <p:ext uri="{BB962C8B-B14F-4D97-AF65-F5344CB8AC3E}">
+        <p14:creationId xmlns:p14="http://schemas.microsoft.com/office/powerpoint/2010/main" val="666536286"/>
+      </p:ext>
+    </p:extLst>
+  </p:cSld>
+</p:sld>
+</file>
+
+<file path=ppt/slides/slide20.xml><?xml version="1.0" encoding="utf-8"?>
+<p:sld xmlns:p="http://schemas.openxmlformats.org/presentationml/2006/main">
+  <p:cSld>
+    <p:bg>
+      <p:bgPr>
+        <a:solidFill xmlns:a="http://schemas.openxmlformats.org/drawingml/2006/main">
+          <a:srgbClr val="FFFFFF"/>
+        </a:solidFill>
+      </p:bgPr>
+    </p:bg>
+    <p:spTree>
+      <p:nvGrpSpPr>
+        <p:cNvPr id="1" name=""/>
+        <p:cNvGrpSpPr/>
+        <p:nvPr/>
+      </p:nvGrpSpPr>
+      <p:grpSpPr>
+        <a:xfrm xmlns:a="http://schemas.openxmlformats.org/drawingml/2006/main"/>
+      </p:grpSpPr>
+      <p:sp>
+        <p:nvSpPr>
+          <p:cNvPr id="24" name="section-11">
+            <a:extLst xmlns:a="http://schemas.openxmlformats.org/drawingml/2006/main">
+              <a:ext uri="{FF2B5EF4-FFF2-40B4-BE49-F238E27FC236}">
+                <a16:creationId xmlns:a16="http://schemas.microsoft.com/office/drawing/2014/main" id="{272ED433-B59C-436C-9DFB-4D317B90A13F}"/>
+              </a:ext>
+            </a:extLst>
+          </p:cNvPr>
+          <p:cNvSpPr>
+            <a:spLocks xmlns:a="http://schemas.openxmlformats.org/drawingml/2006/main" noGrp="1"/>
+          </p:cNvSpPr>
+          <p:nvPr/>
+        </p:nvSpPr>
+        <p:spPr>
+          <a:xfrm xmlns:a="http://schemas.openxmlformats.org/drawingml/2006/main">
+            <a:off x="457200" y="228600"/>
+            <a:ext cx="4191000" cy="228600"/>
+          </a:xfrm>
+          <a:prstGeom xmlns:a="http://schemas.openxmlformats.org/drawingml/2006/main" prst="rect">
+            <a:avLst/>
+          </a:prstGeom>
+          <a:noFill xmlns:a="http://schemas.openxmlformats.org/drawingml/2006/main"/>
+          <a:ln xmlns:a="http://schemas.openxmlformats.org/drawingml/2006/main" w="0">
+            <a:noFill/>
+            <a:prstDash val="solid"/>
+          </a:ln>
+        </p:spPr>
+        <p:txBody>
+          <a:bodyPr xmlns:a="http://schemas.openxmlformats.org/drawingml/2006/main" wrap="square" lIns="0" tIns="0" rIns="0" bIns="0" anchor="t">
+            <a:normAutofit fontScale="100000"/>
+          </a:bodyPr>
+          <a:lstStyle xmlns:a="http://schemas.openxmlformats.org/drawingml/2006/main"/>
+          <a:p xmlns:a="http://schemas.openxmlformats.org/drawingml/2006/main">
+            <a:pPr algn="l">
+              <a:buNone/>
+              <a:defRPr sz="1200" b="1">
+                <a:solidFill>
+                  <a:srgbClr val="667384"/>
+                </a:solidFill>
+                <a:latin typeface="Arial"/>
+                <a:ea typeface="Arial"/>
+                <a:cs typeface="Arial"/>
+              </a:defRPr>
+            </a:pPr>
+            <a:r>
+              <a:rPr sz="1200" b="1">
+                <a:solidFill>
+                  <a:srgbClr val="667384"/>
+                </a:solidFill>
+                <a:latin typeface="Arial"/>
+                <a:ea typeface="Arial"/>
+                <a:cs typeface="Arial"/>
+              </a:rPr>
+              <a:t>CALENDAR STABILITY</a:t>
+            </a:r>
+          </a:p>
+        </p:txBody>
+      </p:sp>
+      <p:sp>
+        <p:nvSpPr>
+          <p:cNvPr id="2" name="title-11">
+            <a:extLst xmlns:a="http://schemas.openxmlformats.org/drawingml/2006/main">
+              <a:ext uri="{FF2B5EF4-FFF2-40B4-BE49-F238E27FC236}">
+                <a16:creationId xmlns:a16="http://schemas.microsoft.com/office/drawing/2014/main" id="{3EC40708-7E00-432C-8ECE-907FA5705292}"/>
+              </a:ext>
+            </a:extLst>
+          </p:cNvPr>
+          <p:cNvSpPr>
+            <a:spLocks xmlns:a="http://schemas.openxmlformats.org/drawingml/2006/main" noGrp="1"/>
+          </p:cNvSpPr>
+          <p:nvPr/>
+        </p:nvSpPr>
+        <p:spPr>
+          <a:xfrm xmlns:a="http://schemas.openxmlformats.org/drawingml/2006/main">
+            <a:off x="457200" y="533400"/>
+            <a:ext cx="11277600" cy="628650"/>
+          </a:xfrm>
+          <a:prstGeom xmlns:a="http://schemas.openxmlformats.org/drawingml/2006/main" prst="rect">
+            <a:avLst/>
+          </a:prstGeom>
+          <a:noFill xmlns:a="http://schemas.openxmlformats.org/drawingml/2006/main"/>
+          <a:ln xmlns:a="http://schemas.openxmlformats.org/drawingml/2006/main" w="0">
+            <a:noFill/>
+            <a:prstDash val="solid"/>
+          </a:ln>
+        </p:spPr>
+        <p:txBody>
+          <a:bodyPr xmlns:a="http://schemas.openxmlformats.org/drawingml/2006/main" wrap="square" lIns="0" tIns="0" rIns="0" bIns="0" anchor="t">
+            <a:normAutofit fontScale="100000"/>
+          </a:bodyPr>
+          <a:lstStyle xmlns:a="http://schemas.openxmlformats.org/drawingml/2006/main"/>
+          <a:p xmlns:a="http://schemas.openxmlformats.org/drawingml/2006/main">
+            <a:pPr algn="l">
+              <a:buNone/>
+              <a:defRPr sz="3525" b="1">
+                <a:solidFill>
+                  <a:srgbClr val="000000"/>
+                </a:solidFill>
+                <a:latin typeface="Arial"/>
+                <a:ea typeface="Arial"/>
+                <a:cs typeface="Arial"/>
+              </a:defRPr>
+            </a:pPr>
+            <a:r>
+              <a:rPr sz="3525" b="1">
+                <a:solidFill>
+                  <a:srgbClr val="000000"/>
+                </a:solidFill>
+                <a:latin typeface="Arial"/>
+                <a:ea typeface="Arial"/>
+                <a:cs typeface="Arial"/>
+              </a:rPr>
+              <a:t>Strong years coexist with two material losing years</a:t>
+            </a:r>
+          </a:p>
+        </p:txBody>
+      </p:sp>
+      <p:sp>
+        <p:nvSpPr>
+          <p:cNvPr id="3" name="">
+            <a:extLst xmlns:a="http://schemas.openxmlformats.org/drawingml/2006/main">
+              <a:ext uri="{FF2B5EF4-FFF2-40B4-BE49-F238E27FC236}">
+                <a16:creationId xmlns:a16="http://schemas.microsoft.com/office/drawing/2014/main" id="{D5CA0FCE-75E8-41EF-A76A-23E9E2120C6A}"/>
+              </a:ext>
+            </a:extLst>
+          </p:cNvPr>
+          <p:cNvSpPr>
+            <a:spLocks xmlns:a="http://schemas.openxmlformats.org/drawingml/2006/main" noGrp="1"/>
+          </p:cNvSpPr>
+          <p:nvPr/>
+        </p:nvSpPr>
+        <p:spPr>
+          <a:xfrm xmlns:a="http://schemas.openxmlformats.org/drawingml/2006/main">
+            <a:off x="457200" y="1200150"/>
+            <a:ext cx="11277600" cy="19050"/>
+          </a:xfrm>
+          <a:prstGeom xmlns:a="http://schemas.openxmlformats.org/drawingml/2006/main" prst="rect">
+            <a:avLst/>
+          </a:prstGeom>
+          <a:solidFill xmlns:a="http://schemas.openxmlformats.org/drawingml/2006/main">
+            <a:srgbClr val="B8BCC4"/>
+          </a:solidFill>
+          <a:ln xmlns:a="http://schemas.openxmlformats.org/drawingml/2006/main" w="0">
+            <a:solidFill>
+              <a:srgbClr val="B8BCC4"/>
+            </a:solidFill>
+            <a:prstDash val="solid"/>
+          </a:ln>
+        </p:spPr>
+      </p:sp>
+      <p:sp>
+        <p:nvSpPr>
+          <p:cNvPr id="4" name="footer-left-11">
+            <a:extLst xmlns:a="http://schemas.openxmlformats.org/drawingml/2006/main">
+              <a:ext uri="{FF2B5EF4-FFF2-40B4-BE49-F238E27FC236}">
+                <a16:creationId xmlns:a16="http://schemas.microsoft.com/office/drawing/2014/main" id="{700DA765-80E0-4197-8700-00D867B86FA2}"/>
+              </a:ext>
+            </a:extLst>
+          </p:cNvPr>
+          <p:cNvSpPr>
+            <a:spLocks xmlns:a="http://schemas.openxmlformats.org/drawingml/2006/main" noGrp="1"/>
+          </p:cNvSpPr>
+          <p:nvPr/>
+        </p:nvSpPr>
+        <p:spPr>
+          <a:xfrm xmlns:a="http://schemas.openxmlformats.org/drawingml/2006/main">
+            <a:off x="457200" y="6515100"/>
+            <a:ext cx="3429000" cy="171450"/>
+          </a:xfrm>
+          <a:prstGeom xmlns:a="http://schemas.openxmlformats.org/drawingml/2006/main" prst="rect">
+            <a:avLst/>
+          </a:prstGeom>
+          <a:noFill xmlns:a="http://schemas.openxmlformats.org/drawingml/2006/main"/>
+          <a:ln xmlns:a="http://schemas.openxmlformats.org/drawingml/2006/main" w="0">
+            <a:noFill/>
+            <a:prstDash val="solid"/>
+          </a:ln>
+        </p:spPr>
+        <p:txBody>
+          <a:bodyPr xmlns:a="http://schemas.openxmlformats.org/drawingml/2006/main" wrap="square" lIns="0" tIns="0" rIns="0" bIns="0" anchor="t">
+            <a:normAutofit fontScale="100000"/>
+          </a:bodyPr>
+          <a:lstStyle xmlns:a="http://schemas.openxmlformats.org/drawingml/2006/main"/>
+          <a:p xmlns:a="http://schemas.openxmlformats.org/drawingml/2006/main">
+            <a:pPr algn="l">
+              <a:buNone/>
+              <a:defRPr sz="825" b="0">
+                <a:solidFill>
+                  <a:srgbClr val="64748B"/>
+                </a:solidFill>
+                <a:latin typeface="Arial"/>
+                <a:ea typeface="Arial"/>
+                <a:cs typeface="Arial"/>
+              </a:defRPr>
+            </a:pPr>
+            <a:r>
+              <a:rPr sz="825" b="0">
+                <a:solidFill>
+                  <a:srgbClr val="64748B"/>
+                </a:solidFill>
+                <a:latin typeface="Arial"/>
+                <a:ea typeface="Arial"/>
+                <a:cs typeface="Arial"/>
+              </a:rPr>
+              <a:t>Return geometry | core event-pooled net return by year</a:t>
+            </a:r>
+          </a:p>
+        </p:txBody>
+      </p:sp>
+      <p:sp>
+        <p:nvSpPr>
+          <p:cNvPr id="5" name="footer-number-11">
+            <a:extLst xmlns:a="http://schemas.openxmlformats.org/drawingml/2006/main">
+              <a:ext uri="{FF2B5EF4-FFF2-40B4-BE49-F238E27FC236}">
+                <a16:creationId xmlns:a16="http://schemas.microsoft.com/office/drawing/2014/main" id="{83896276-4112-4532-AF7C-776C67C58B77}"/>
+              </a:ext>
+            </a:extLst>
+          </p:cNvPr>
+          <p:cNvSpPr>
+            <a:spLocks xmlns:a="http://schemas.openxmlformats.org/drawingml/2006/main" noGrp="1"/>
+          </p:cNvSpPr>
+          <p:nvPr/>
+        </p:nvSpPr>
+        <p:spPr>
+          <a:xfrm xmlns:a="http://schemas.openxmlformats.org/drawingml/2006/main">
+            <a:off x="10477500" y="6496050"/>
+            <a:ext cx="1257300" cy="190500"/>
+          </a:xfrm>
+          <a:prstGeom xmlns:a="http://schemas.openxmlformats.org/drawingml/2006/main" prst="rect">
+            <a:avLst/>
+          </a:prstGeom>
+          <a:noFill xmlns:a="http://schemas.openxmlformats.org/drawingml/2006/main"/>
+          <a:ln xmlns:a="http://schemas.openxmlformats.org/drawingml/2006/main" w="0">
+            <a:noFill/>
+            <a:prstDash val="solid"/>
+          </a:ln>
+        </p:spPr>
+        <p:txBody>
+          <a:bodyPr xmlns:a="http://schemas.openxmlformats.org/drawingml/2006/main" wrap="square" lIns="0" tIns="0" rIns="0" bIns="0" anchor="t">
+            <a:normAutofit fontScale="100000"/>
+          </a:bodyPr>
+          <a:lstStyle xmlns:a="http://schemas.openxmlformats.org/drawingml/2006/main"/>
+          <a:p xmlns:a="http://schemas.openxmlformats.org/drawingml/2006/main">
+            <a:pPr algn="r">
+              <a:buNone/>
+              <a:defRPr sz="1050" b="0">
+                <a:solidFill>
+                  <a:srgbClr val="667384"/>
+                </a:solidFill>
+                <a:latin typeface="Arial"/>
+                <a:ea typeface="Arial"/>
+                <a:cs typeface="Arial"/>
+              </a:defRPr>
+            </a:pPr>
+            <a:r>
+              <a:rPr sz="1050" b="0">
+                <a:solidFill>
+                  <a:srgbClr val="667384"/>
+                </a:solidFill>
+                <a:latin typeface="Arial"/>
+                <a:ea typeface="Arial"/>
+                <a:cs typeface="Arial"/>
+              </a:rPr>
+              <a:t>20</a:t>
+            </a:r>
+          </a:p>
+        </p:txBody>
+      </p:sp>
+      <p:pic>
+        <p:nvPicPr>
+          <p:cNvPr id="33" name=""/>
+          <p:cNvPicPr>
+            <a:picLocks xmlns:a="http://schemas.openxmlformats.org/drawingml/2006/main" noChangeAspect="1"/>
+          </p:cNvPicPr>
+          <p:nvPr/>
+        </p:nvPicPr>
+        <p:blipFill>
+          <a:blip xmlns:r="http://schemas.openxmlformats.org/officeDocument/2006/relationships" xmlns:a="http://schemas.openxmlformats.org/drawingml/2006/main" r:embed="R73fde9860b3841e8"/>
+          <a:stretch xmlns:a="http://schemas.openxmlformats.org/drawingml/2006/main"/>
+        </p:blipFill>
+        <p:spPr>
+          <a:xfrm xmlns:a="http://schemas.openxmlformats.org/drawingml/2006/main">
+            <a:off x="1771650" y="1335087"/>
+            <a:ext cx="8648700" cy="5045075"/>
+          </a:xfrm>
+          <a:prstGeom xmlns:a="http://schemas.openxmlformats.org/drawingml/2006/main" prst="rect">
+            <a:avLst/>
+          </a:prstGeom>
+        </p:spPr>
+      </p:pic>
+      <p:pic>
+        <p:nvPicPr>
+          <p:cNvPr id="34" name=""/>
+          <p:cNvPicPr>
+            <a:picLocks xmlns:a="http://schemas.openxmlformats.org/drawingml/2006/main" noChangeAspect="1"/>
+          </p:cNvPicPr>
+          <p:nvPr/>
+        </p:nvPicPr>
+        <p:blipFill>
+          <a:blip xmlns:r="http://schemas.openxmlformats.org/officeDocument/2006/relationships" xmlns:a="http://schemas.openxmlformats.org/drawingml/2006/main" r:embed="R4f604b8fd73c44d8">
+            <a:extLst>
+              <a:ext uri="{96DAC541-7B7A-43D3-8B79-37D633B846F1}">
+                <asvg:svgBlip xmlns:asvg="http://schemas.microsoft.com/office/drawing/2016/SVG/main" r:embed="R1643adf340c340fa"/>
+              </a:ext>
+            </a:extLst>
+          </a:blip>
+          <a:stretch xmlns:a="http://schemas.openxmlformats.org/drawingml/2006/main"/>
+        </p:blipFill>
+        <p:spPr>
+          <a:xfrm xmlns:a="http://schemas.openxmlformats.org/drawingml/2006/main">
+            <a:off x="1771650" y="1335087"/>
+            <a:ext cx="8648700" cy="5045075"/>
+          </a:xfrm>
+          <a:prstGeom xmlns:a="http://schemas.openxmlformats.org/drawingml/2006/main" prst="rect">
+            <a:avLst/>
+          </a:prstGeom>
+        </p:spPr>
+      </p:pic>
+      <p:pic>
+        <p:nvPicPr>
+          <p:cNvPr id="35" name=""/>
+          <p:cNvPicPr>
+            <a:picLocks xmlns:a="http://schemas.openxmlformats.org/drawingml/2006/main" noChangeAspect="1"/>
+          </p:cNvPicPr>
+          <p:nvPr/>
+        </p:nvPicPr>
+        <p:blipFill>
+          <a:blip xmlns:r="http://schemas.openxmlformats.org/officeDocument/2006/relationships" xmlns:a="http://schemas.openxmlformats.org/drawingml/2006/main" r:embed="R5c5b577e6acb4ddb"/>
+          <a:stretch xmlns:a="http://schemas.openxmlformats.org/drawingml/2006/main"/>
+        </p:blipFill>
+        <p:spPr>
+          <a:xfrm xmlns:a="http://schemas.openxmlformats.org/drawingml/2006/main">
+            <a:off x="2172053" y="1335087"/>
+            <a:ext cx="7847894" cy="5045075"/>
+          </a:xfrm>
+          <a:prstGeom xmlns:a="http://schemas.openxmlformats.org/drawingml/2006/main" prst="rect">
+            <a:avLst/>
+          </a:prstGeom>
+        </p:spPr>
+      </p:pic>
+    </p:spTree>
+    <p:extLst>
+      <p:ext uri="{BB962C8B-B14F-4D97-AF65-F5344CB8AC3E}">
+        <p14:creationId xmlns:p14="http://schemas.microsoft.com/office/powerpoint/2010/main" val="666536286"/>
+      </p:ext>
+    </p:extLst>
+  </p:cSld>
+</p:sld>
+</file>
+
+<file path=ppt/slides/slide21.xml><?xml version="1.0" encoding="utf-8"?>
+<p:sld xmlns:p="http://schemas.openxmlformats.org/presentationml/2006/main">
+  <p:cSld>
+    <p:bg>
+      <p:bgPr>
+        <a:solidFill xmlns:a="http://schemas.openxmlformats.org/drawingml/2006/main">
+          <a:srgbClr val="FFFFFF"/>
+        </a:solidFill>
+      </p:bgPr>
+    </p:bg>
+    <p:spTree>
+      <p:nvGrpSpPr>
+        <p:cNvPr id="1" name=""/>
+        <p:cNvGrpSpPr/>
+        <p:nvPr/>
+      </p:nvGrpSpPr>
+      <p:grpSpPr>
+        <a:xfrm xmlns:a="http://schemas.openxmlformats.org/drawingml/2006/main"/>
+      </p:grpSpPr>
+      <p:sp>
+        <p:nvSpPr>
+          <p:cNvPr id="24" name="section-11">
+            <a:extLst xmlns:a="http://schemas.openxmlformats.org/drawingml/2006/main">
+              <a:ext uri="{FF2B5EF4-FFF2-40B4-BE49-F238E27FC236}">
+                <a16:creationId xmlns:a16="http://schemas.microsoft.com/office/drawing/2014/main" id="{272ED433-B59C-436C-9DFB-4D317B90A13F}"/>
+              </a:ext>
+            </a:extLst>
+          </p:cNvPr>
+          <p:cNvSpPr>
+            <a:spLocks xmlns:a="http://schemas.openxmlformats.org/drawingml/2006/main" noGrp="1"/>
+          </p:cNvSpPr>
+          <p:nvPr/>
+        </p:nvSpPr>
+        <p:spPr>
+          <a:xfrm xmlns:a="http://schemas.openxmlformats.org/drawingml/2006/main">
+            <a:off x="457200" y="228600"/>
+            <a:ext cx="4191000" cy="228600"/>
+          </a:xfrm>
+          <a:prstGeom xmlns:a="http://schemas.openxmlformats.org/drawingml/2006/main" prst="rect">
+            <a:avLst/>
+          </a:prstGeom>
+          <a:noFill xmlns:a="http://schemas.openxmlformats.org/drawingml/2006/main"/>
+          <a:ln xmlns:a="http://schemas.openxmlformats.org/drawingml/2006/main" w="0">
+            <a:noFill/>
+            <a:prstDash val="solid"/>
+          </a:ln>
+        </p:spPr>
+        <p:txBody>
+          <a:bodyPr xmlns:a="http://schemas.openxmlformats.org/drawingml/2006/main" wrap="square" lIns="0" tIns="0" rIns="0" bIns="0" anchor="t">
+            <a:normAutofit fontScale="100000"/>
+          </a:bodyPr>
+          <a:lstStyle xmlns:a="http://schemas.openxmlformats.org/drawingml/2006/main"/>
+          <a:p xmlns:a="http://schemas.openxmlformats.org/drawingml/2006/main">
+            <a:pPr algn="l">
+              <a:buNone/>
+              <a:defRPr sz="1200" b="1">
+                <a:solidFill>
+                  <a:srgbClr val="667384"/>
+                </a:solidFill>
+                <a:latin typeface="Arial"/>
+                <a:ea typeface="Arial"/>
+                <a:cs typeface="Arial"/>
+              </a:defRPr>
+            </a:pPr>
+            <a:r>
+              <a:rPr sz="1200" b="1">
+                <a:solidFill>
+                  <a:srgbClr val="667384"/>
+                </a:solidFill>
+                <a:latin typeface="Arial"/>
+                <a:ea typeface="Arial"/>
+                <a:cs typeface="Arial"/>
+              </a:rPr>
+              <a:t>COHORT PATHS</a:t>
+            </a:r>
+          </a:p>
+        </p:txBody>
+      </p:sp>
+      <p:sp>
+        <p:nvSpPr>
+          <p:cNvPr id="2" name="title-11">
+            <a:extLst xmlns:a="http://schemas.openxmlformats.org/drawingml/2006/main">
+              <a:ext uri="{FF2B5EF4-FFF2-40B4-BE49-F238E27FC236}">
+                <a16:creationId xmlns:a16="http://schemas.microsoft.com/office/drawing/2014/main" id="{3EC40708-7E00-432C-8ECE-907FA5705292}"/>
+              </a:ext>
+            </a:extLst>
+          </p:cNvPr>
+          <p:cNvSpPr>
+            <a:spLocks xmlns:a="http://schemas.openxmlformats.org/drawingml/2006/main" noGrp="1"/>
+          </p:cNvSpPr>
+          <p:nvPr/>
+        </p:nvSpPr>
+        <p:spPr>
+          <a:xfrm xmlns:a="http://schemas.openxmlformats.org/drawingml/2006/main">
+            <a:off x="457200" y="533400"/>
+            <a:ext cx="11277600" cy="628650"/>
+          </a:xfrm>
+          <a:prstGeom xmlns:a="http://schemas.openxmlformats.org/drawingml/2006/main" prst="rect">
+            <a:avLst/>
+          </a:prstGeom>
+          <a:noFill xmlns:a="http://schemas.openxmlformats.org/drawingml/2006/main"/>
+          <a:ln xmlns:a="http://schemas.openxmlformats.org/drawingml/2006/main" w="0">
+            <a:noFill/>
+            <a:prstDash val="solid"/>
+          </a:ln>
+        </p:spPr>
+        <p:txBody>
+          <a:bodyPr xmlns:a="http://schemas.openxmlformats.org/drawingml/2006/main" wrap="square" lIns="0" tIns="0" rIns="0" bIns="0" anchor="t">
+            <a:normAutofit fontScale="100000"/>
+          </a:bodyPr>
+          <a:lstStyle xmlns:a="http://schemas.openxmlformats.org/drawingml/2006/main"/>
+          <a:p xmlns:a="http://schemas.openxmlformats.org/drawingml/2006/main">
+            <a:pPr algn="l">
+              <a:buNone/>
+              <a:defRPr sz="3525" b="1">
+                <a:solidFill>
+                  <a:srgbClr val="000000"/>
+                </a:solidFill>
+                <a:latin typeface="Arial"/>
+                <a:ea typeface="Arial"/>
+                <a:cs typeface="Arial"/>
+              </a:defRPr>
+            </a:pPr>
+            <a:r>
+              <a:rPr sz="3525" b="1">
+                <a:solidFill>
+                  <a:srgbClr val="000000"/>
+                </a:solidFill>
+                <a:latin typeface="Arial"/>
+                <a:ea typeface="Arial"/>
+                <a:cs typeface="Arial"/>
+              </a:rPr>
+              <a:t>The attention cohort keeps falling after entry</a:t>
+            </a:r>
+          </a:p>
+        </p:txBody>
+      </p:sp>
+      <p:sp>
+        <p:nvSpPr>
+          <p:cNvPr id="3" name="">
+            <a:extLst xmlns:a="http://schemas.openxmlformats.org/drawingml/2006/main">
+              <a:ext uri="{FF2B5EF4-FFF2-40B4-BE49-F238E27FC236}">
+                <a16:creationId xmlns:a16="http://schemas.microsoft.com/office/drawing/2014/main" id="{D5CA0FCE-75E8-41EF-A76A-23E9E2120C6A}"/>
+              </a:ext>
+            </a:extLst>
+          </p:cNvPr>
+          <p:cNvSpPr>
+            <a:spLocks xmlns:a="http://schemas.openxmlformats.org/drawingml/2006/main" noGrp="1"/>
+          </p:cNvSpPr>
+          <p:nvPr/>
+        </p:nvSpPr>
+        <p:spPr>
+          <a:xfrm xmlns:a="http://schemas.openxmlformats.org/drawingml/2006/main">
+            <a:off x="457200" y="1200150"/>
+            <a:ext cx="11277600" cy="19050"/>
+          </a:xfrm>
+          <a:prstGeom xmlns:a="http://schemas.openxmlformats.org/drawingml/2006/main" prst="rect">
+            <a:avLst/>
+          </a:prstGeom>
+          <a:solidFill xmlns:a="http://schemas.openxmlformats.org/drawingml/2006/main">
+            <a:srgbClr val="B8BCC4"/>
+          </a:solidFill>
+          <a:ln xmlns:a="http://schemas.openxmlformats.org/drawingml/2006/main" w="0">
+            <a:solidFill>
+              <a:srgbClr val="B8BCC4"/>
+            </a:solidFill>
+            <a:prstDash val="solid"/>
+          </a:ln>
+        </p:spPr>
+      </p:sp>
+      <p:sp>
+        <p:nvSpPr>
+          <p:cNvPr id="4" name="footer-left-11">
+            <a:extLst xmlns:a="http://schemas.openxmlformats.org/drawingml/2006/main">
+              <a:ext uri="{FF2B5EF4-FFF2-40B4-BE49-F238E27FC236}">
+                <a16:creationId xmlns:a16="http://schemas.microsoft.com/office/drawing/2014/main" id="{700DA765-80E0-4197-8700-00D867B86FA2}"/>
+              </a:ext>
+            </a:extLst>
+          </p:cNvPr>
+          <p:cNvSpPr>
+            <a:spLocks xmlns:a="http://schemas.openxmlformats.org/drawingml/2006/main" noGrp="1"/>
+          </p:cNvSpPr>
+          <p:nvPr/>
+        </p:nvSpPr>
+        <p:spPr>
+          <a:xfrm xmlns:a="http://schemas.openxmlformats.org/drawingml/2006/main">
+            <a:off x="457200" y="6515100"/>
+            <a:ext cx="3429000" cy="171450"/>
+          </a:xfrm>
+          <a:prstGeom xmlns:a="http://schemas.openxmlformats.org/drawingml/2006/main" prst="rect">
+            <a:avLst/>
+          </a:prstGeom>
+          <a:noFill xmlns:a="http://schemas.openxmlformats.org/drawingml/2006/main"/>
+          <a:ln xmlns:a="http://schemas.openxmlformats.org/drawingml/2006/main" w="0">
+            <a:noFill/>
+            <a:prstDash val="solid"/>
+          </a:ln>
+        </p:spPr>
+        <p:txBody>
+          <a:bodyPr xmlns:a="http://schemas.openxmlformats.org/drawingml/2006/main" wrap="square" lIns="0" tIns="0" rIns="0" bIns="0" anchor="t">
+            <a:normAutofit fontScale="100000"/>
+          </a:bodyPr>
+          <a:lstStyle xmlns:a="http://schemas.openxmlformats.org/drawingml/2006/main"/>
+          <a:p xmlns:a="http://schemas.openxmlformats.org/drawingml/2006/main">
+            <a:pPr algn="l">
+              <a:buNone/>
+              <a:defRPr sz="825" b="0">
+                <a:solidFill>
+                  <a:srgbClr val="64748B"/>
+                </a:solidFill>
+                <a:latin typeface="Arial"/>
+                <a:ea typeface="Arial"/>
+                <a:cs typeface="Arial"/>
+              </a:defRPr>
+            </a:pPr>
+            <a:r>
+              <a:rPr sz="825" b="0">
+                <a:solidFill>
+                  <a:srgbClr val="64748B"/>
+                </a:solidFill>
+                <a:latin typeface="Arial"/>
+                <a:ea typeface="Arial"/>
+                <a:cs typeface="Arial"/>
+              </a:rPr>
+              <a:t>Return geometry | mean cumulative trade path by cohort</a:t>
+            </a:r>
+          </a:p>
+        </p:txBody>
+      </p:sp>
+      <p:sp>
+        <p:nvSpPr>
+          <p:cNvPr id="5" name="footer-number-11">
+            <a:extLst xmlns:a="http://schemas.openxmlformats.org/drawingml/2006/main">
+              <a:ext uri="{FF2B5EF4-FFF2-40B4-BE49-F238E27FC236}">
+                <a16:creationId xmlns:a16="http://schemas.microsoft.com/office/drawing/2014/main" id="{83896276-4112-4532-AF7C-776C67C58B77}"/>
+              </a:ext>
+            </a:extLst>
+          </p:cNvPr>
+          <p:cNvSpPr>
+            <a:spLocks xmlns:a="http://schemas.openxmlformats.org/drawingml/2006/main" noGrp="1"/>
+          </p:cNvSpPr>
+          <p:nvPr/>
+        </p:nvSpPr>
+        <p:spPr>
+          <a:xfrm xmlns:a="http://schemas.openxmlformats.org/drawingml/2006/main">
+            <a:off x="10477500" y="6496050"/>
+            <a:ext cx="1257300" cy="190500"/>
+          </a:xfrm>
+          <a:prstGeom xmlns:a="http://schemas.openxmlformats.org/drawingml/2006/main" prst="rect">
+            <a:avLst/>
+          </a:prstGeom>
+          <a:noFill xmlns:a="http://schemas.openxmlformats.org/drawingml/2006/main"/>
+          <a:ln xmlns:a="http://schemas.openxmlformats.org/drawingml/2006/main" w="0">
+            <a:noFill/>
+            <a:prstDash val="solid"/>
+          </a:ln>
+        </p:spPr>
+        <p:txBody>
+          <a:bodyPr xmlns:a="http://schemas.openxmlformats.org/drawingml/2006/main" wrap="square" lIns="0" tIns="0" rIns="0" bIns="0" anchor="t">
+            <a:normAutofit fontScale="100000"/>
+          </a:bodyPr>
+          <a:lstStyle xmlns:a="http://schemas.openxmlformats.org/drawingml/2006/main"/>
+          <a:p xmlns:a="http://schemas.openxmlformats.org/drawingml/2006/main">
+            <a:pPr algn="r">
+              <a:buNone/>
+              <a:defRPr sz="1050" b="0">
+                <a:solidFill>
+                  <a:srgbClr val="667384"/>
+                </a:solidFill>
+                <a:latin typeface="Arial"/>
+                <a:ea typeface="Arial"/>
+                <a:cs typeface="Arial"/>
+              </a:defRPr>
+            </a:pPr>
+            <a:r>
+              <a:rPr sz="1050" b="0">
+                <a:solidFill>
+                  <a:srgbClr val="667384"/>
+                </a:solidFill>
+                <a:latin typeface="Arial"/>
+                <a:ea typeface="Arial"/>
+                <a:cs typeface="Arial"/>
+              </a:rPr>
+              <a:t>21</a:t>
+            </a:r>
+          </a:p>
+        </p:txBody>
+      </p:sp>
+      <p:pic>
+        <p:nvPicPr>
+          <p:cNvPr id="33" name=""/>
+          <p:cNvPicPr>
+            <a:picLocks xmlns:a="http://schemas.openxmlformats.org/drawingml/2006/main" noChangeAspect="1"/>
+          </p:cNvPicPr>
+          <p:nvPr/>
+        </p:nvPicPr>
+        <p:blipFill>
+          <a:blip xmlns:r="http://schemas.openxmlformats.org/officeDocument/2006/relationships" xmlns:a="http://schemas.openxmlformats.org/drawingml/2006/main" r:embed="R670313d773e848da"/>
+          <a:stretch xmlns:a="http://schemas.openxmlformats.org/drawingml/2006/main"/>
+        </p:blipFill>
+        <p:spPr>
+          <a:xfrm xmlns:a="http://schemas.openxmlformats.org/drawingml/2006/main">
+            <a:off x="1771650" y="1335087"/>
+            <a:ext cx="8648700" cy="5045075"/>
+          </a:xfrm>
+          <a:prstGeom xmlns:a="http://schemas.openxmlformats.org/drawingml/2006/main" prst="rect">
+            <a:avLst/>
+          </a:prstGeom>
+        </p:spPr>
+      </p:pic>
+      <p:pic>
+        <p:nvPicPr>
+          <p:cNvPr id="34" name=""/>
+          <p:cNvPicPr>
+            <a:picLocks xmlns:a="http://schemas.openxmlformats.org/drawingml/2006/main" noChangeAspect="1"/>
+          </p:cNvPicPr>
+          <p:nvPr/>
+        </p:nvPicPr>
+        <p:blipFill>
+          <a:blip xmlns:r="http://schemas.openxmlformats.org/officeDocument/2006/relationships" xmlns:a="http://schemas.openxmlformats.org/drawingml/2006/main" r:embed="Rc6438bbcb72246a4">
+            <a:extLst>
+              <a:ext uri="{96DAC541-7B7A-43D3-8B79-37D633B846F1}">
+                <asvg:svgBlip xmlns:asvg="http://schemas.microsoft.com/office/drawing/2016/SVG/main" r:embed="R390b0987eb194a22"/>
+              </a:ext>
+            </a:extLst>
+          </a:blip>
+          <a:stretch xmlns:a="http://schemas.openxmlformats.org/drawingml/2006/main"/>
+        </p:blipFill>
+        <p:spPr>
+          <a:xfrm xmlns:a="http://schemas.openxmlformats.org/drawingml/2006/main">
+            <a:off x="1771650" y="1335087"/>
+            <a:ext cx="8648700" cy="5045075"/>
+          </a:xfrm>
+          <a:prstGeom xmlns:a="http://schemas.openxmlformats.org/drawingml/2006/main" prst="rect">
+            <a:avLst/>
+          </a:prstGeom>
+        </p:spPr>
+      </p:pic>
+      <p:pic>
+        <p:nvPicPr>
+          <p:cNvPr id="35" name=""/>
+          <p:cNvPicPr>
+            <a:picLocks xmlns:a="http://schemas.openxmlformats.org/drawingml/2006/main" noChangeAspect="1"/>
+          </p:cNvPicPr>
+          <p:nvPr/>
+        </p:nvPicPr>
+        <p:blipFill>
+          <a:blip xmlns:r="http://schemas.openxmlformats.org/officeDocument/2006/relationships" xmlns:a="http://schemas.openxmlformats.org/drawingml/2006/main" r:embed="R1b510924777b4ec4"/>
+          <a:stretch xmlns:a="http://schemas.openxmlformats.org/drawingml/2006/main"/>
+        </p:blipFill>
+        <p:spPr>
+          <a:xfrm xmlns:a="http://schemas.openxmlformats.org/drawingml/2006/main">
+            <a:off x="2172053" y="1335087"/>
+            <a:ext cx="7847894" cy="5045075"/>
+          </a:xfrm>
+          <a:prstGeom xmlns:a="http://schemas.openxmlformats.org/drawingml/2006/main" prst="rect">
+            <a:avLst/>
+          </a:prstGeom>
+        </p:spPr>
+      </p:pic>
+    </p:spTree>
+    <p:extLst>
+      <p:ext uri="{BB962C8B-B14F-4D97-AF65-F5344CB8AC3E}">
+        <p14:creationId xmlns:p14="http://schemas.microsoft.com/office/powerpoint/2010/main" val="666536286"/>
+      </p:ext>
+    </p:extLst>
+  </p:cSld>
+</p:sld>
+</file>
+
+<file path=ppt/slides/slide22.xml><?xml version="1.0" encoding="utf-8"?>
+<p:sld xmlns:p="http://schemas.openxmlformats.org/presentationml/2006/main">
+  <p:cSld>
+    <p:bg>
+      <p:bgPr>
+        <a:solidFill xmlns:a="http://schemas.openxmlformats.org/drawingml/2006/main">
+          <a:srgbClr val="FFFFFF"/>
+        </a:solidFill>
+      </p:bgPr>
+    </p:bg>
+    <p:spTree>
+      <p:nvGrpSpPr>
+        <p:cNvPr id="1" name=""/>
+        <p:cNvGrpSpPr/>
+        <p:nvPr/>
+      </p:nvGrpSpPr>
+      <p:grpSpPr>
+        <a:xfrm xmlns:a="http://schemas.openxmlformats.org/drawingml/2006/main"/>
+      </p:grpSpPr>
+      <p:sp>
+        <p:nvSpPr>
+          <p:cNvPr id="24" name="section-11">
+            <a:extLst xmlns:a="http://schemas.openxmlformats.org/drawingml/2006/main">
+              <a:ext uri="{FF2B5EF4-FFF2-40B4-BE49-F238E27FC236}">
+                <a16:creationId xmlns:a16="http://schemas.microsoft.com/office/drawing/2014/main" id="{272ED433-B59C-436C-9DFB-4D317B90A13F}"/>
+              </a:ext>
+            </a:extLst>
+          </p:cNvPr>
+          <p:cNvSpPr>
+            <a:spLocks xmlns:a="http://schemas.openxmlformats.org/drawingml/2006/main" noGrp="1"/>
+          </p:cNvSpPr>
+          <p:nvPr/>
+        </p:nvSpPr>
+        <p:spPr>
+          <a:xfrm xmlns:a="http://schemas.openxmlformats.org/drawingml/2006/main">
+            <a:off x="457200" y="228600"/>
+            <a:ext cx="4191000" cy="228600"/>
+          </a:xfrm>
+          <a:prstGeom xmlns:a="http://schemas.openxmlformats.org/drawingml/2006/main" prst="rect">
+            <a:avLst/>
+          </a:prstGeom>
+          <a:noFill xmlns:a="http://schemas.openxmlformats.org/drawingml/2006/main"/>
+          <a:ln xmlns:a="http://schemas.openxmlformats.org/drawingml/2006/main" w="0">
+            <a:noFill/>
+            <a:prstDash val="solid"/>
+          </a:ln>
+        </p:spPr>
+        <p:txBody>
+          <a:bodyPr xmlns:a="http://schemas.openxmlformats.org/drawingml/2006/main" wrap="square" lIns="0" tIns="0" rIns="0" bIns="0" anchor="t">
+            <a:normAutofit fontScale="100000"/>
+          </a:bodyPr>
+          <a:lstStyle xmlns:a="http://schemas.openxmlformats.org/drawingml/2006/main"/>
+          <a:p xmlns:a="http://schemas.openxmlformats.org/drawingml/2006/main">
+            <a:pPr algn="l">
+              <a:buNone/>
+              <a:defRPr sz="1200" b="1">
+                <a:solidFill>
+                  <a:srgbClr val="667384"/>
+                </a:solidFill>
+                <a:latin typeface="Arial"/>
+                <a:ea typeface="Arial"/>
+                <a:cs typeface="Arial"/>
+              </a:defRPr>
+            </a:pPr>
+            <a:r>
+              <a:rPr sz="1200" b="1">
+                <a:solidFill>
+                  <a:srgbClr val="667384"/>
+                </a:solidFill>
+                <a:latin typeface="Arial"/>
+                <a:ea typeface="Arial"/>
+                <a:cs typeface="Arial"/>
+              </a:rPr>
+              <a:t>ASSET HETEROGENEITY</a:t>
+            </a:r>
+          </a:p>
+        </p:txBody>
+      </p:sp>
+      <p:sp>
+        <p:nvSpPr>
+          <p:cNvPr id="2" name="title-11">
+            <a:extLst xmlns:a="http://schemas.openxmlformats.org/drawingml/2006/main">
+              <a:ext uri="{FF2B5EF4-FFF2-40B4-BE49-F238E27FC236}">
+                <a16:creationId xmlns:a16="http://schemas.microsoft.com/office/drawing/2014/main" id="{3EC40708-7E00-432C-8ECE-907FA5705292}"/>
+              </a:ext>
+            </a:extLst>
+          </p:cNvPr>
+          <p:cNvSpPr>
+            <a:spLocks xmlns:a="http://schemas.openxmlformats.org/drawingml/2006/main" noGrp="1"/>
+          </p:cNvSpPr>
+          <p:nvPr/>
+        </p:nvSpPr>
+        <p:spPr>
+          <a:xfrm xmlns:a="http://schemas.openxmlformats.org/drawingml/2006/main">
+            <a:off x="457200" y="533400"/>
+            <a:ext cx="11277600" cy="628650"/>
+          </a:xfrm>
+          <a:prstGeom xmlns:a="http://schemas.openxmlformats.org/drawingml/2006/main" prst="rect">
+            <a:avLst/>
+          </a:prstGeom>
+          <a:noFill xmlns:a="http://schemas.openxmlformats.org/drawingml/2006/main"/>
+          <a:ln xmlns:a="http://schemas.openxmlformats.org/drawingml/2006/main" w="0">
+            <a:noFill/>
+            <a:prstDash val="solid"/>
+          </a:ln>
+        </p:spPr>
+        <p:txBody>
+          <a:bodyPr xmlns:a="http://schemas.openxmlformats.org/drawingml/2006/main" wrap="square" lIns="0" tIns="0" rIns="0" bIns="0" anchor="t">
+            <a:normAutofit fontScale="100000"/>
+          </a:bodyPr>
+          <a:lstStyle xmlns:a="http://schemas.openxmlformats.org/drawingml/2006/main"/>
+          <a:p xmlns:a="http://schemas.openxmlformats.org/drawingml/2006/main">
+            <a:pPr algn="l">
+              <a:buNone/>
+              <a:defRPr sz="3525" b="1">
+                <a:solidFill>
+                  <a:srgbClr val="000000"/>
+                </a:solidFill>
+                <a:latin typeface="Arial"/>
+                <a:ea typeface="Arial"/>
+                <a:cs typeface="Arial"/>
+              </a:defRPr>
+            </a:pPr>
+            <a:r>
+              <a:rPr sz="3525" b="1">
+                <a:solidFill>
+                  <a:srgbClr val="000000"/>
+                </a:solidFill>
+                <a:latin typeface="Arial"/>
+                <a:ea typeface="Arial"/>
+                <a:cs typeface="Arial"/>
+              </a:rPr>
+              <a:t>Sector medians conceal wide asset dispersion</a:t>
+            </a:r>
+          </a:p>
+        </p:txBody>
+      </p:sp>
+      <p:sp>
+        <p:nvSpPr>
+          <p:cNvPr id="3" name="">
+            <a:extLst xmlns:a="http://schemas.openxmlformats.org/drawingml/2006/main">
+              <a:ext uri="{FF2B5EF4-FFF2-40B4-BE49-F238E27FC236}">
+                <a16:creationId xmlns:a16="http://schemas.microsoft.com/office/drawing/2014/main" id="{D5CA0FCE-75E8-41EF-A76A-23E9E2120C6A}"/>
+              </a:ext>
+            </a:extLst>
+          </p:cNvPr>
+          <p:cNvSpPr>
+            <a:spLocks xmlns:a="http://schemas.openxmlformats.org/drawingml/2006/main" noGrp="1"/>
+          </p:cNvSpPr>
+          <p:nvPr/>
+        </p:nvSpPr>
+        <p:spPr>
+          <a:xfrm xmlns:a="http://schemas.openxmlformats.org/drawingml/2006/main">
+            <a:off x="457200" y="1200150"/>
+            <a:ext cx="11277600" cy="19050"/>
+          </a:xfrm>
+          <a:prstGeom xmlns:a="http://schemas.openxmlformats.org/drawingml/2006/main" prst="rect">
+            <a:avLst/>
+          </a:prstGeom>
+          <a:solidFill xmlns:a="http://schemas.openxmlformats.org/drawingml/2006/main">
+            <a:srgbClr val="B8BCC4"/>
+          </a:solidFill>
+          <a:ln xmlns:a="http://schemas.openxmlformats.org/drawingml/2006/main" w="0">
+            <a:solidFill>
+              <a:srgbClr val="B8BCC4"/>
+            </a:solidFill>
+            <a:prstDash val="solid"/>
+          </a:ln>
+        </p:spPr>
+      </p:sp>
+      <p:sp>
+        <p:nvSpPr>
+          <p:cNvPr id="4" name="footer-left-11">
+            <a:extLst xmlns:a="http://schemas.openxmlformats.org/drawingml/2006/main">
+              <a:ext uri="{FF2B5EF4-FFF2-40B4-BE49-F238E27FC236}">
+                <a16:creationId xmlns:a16="http://schemas.microsoft.com/office/drawing/2014/main" id="{700DA765-80E0-4197-8700-00D867B86FA2}"/>
+              </a:ext>
+            </a:extLst>
+          </p:cNvPr>
+          <p:cNvSpPr>
+            <a:spLocks xmlns:a="http://schemas.openxmlformats.org/drawingml/2006/main" noGrp="1"/>
+          </p:cNvSpPr>
+          <p:nvPr/>
+        </p:nvSpPr>
+        <p:spPr>
+          <a:xfrm xmlns:a="http://schemas.openxmlformats.org/drawingml/2006/main">
+            <a:off x="457200" y="6515100"/>
+            <a:ext cx="3429000" cy="171450"/>
+          </a:xfrm>
+          <a:prstGeom xmlns:a="http://schemas.openxmlformats.org/drawingml/2006/main" prst="rect">
+            <a:avLst/>
+          </a:prstGeom>
+          <a:noFill xmlns:a="http://schemas.openxmlformats.org/drawingml/2006/main"/>
+          <a:ln xmlns:a="http://schemas.openxmlformats.org/drawingml/2006/main" w="0">
+            <a:noFill/>
+            <a:prstDash val="solid"/>
+          </a:ln>
+        </p:spPr>
+        <p:txBody>
+          <a:bodyPr xmlns:a="http://schemas.openxmlformats.org/drawingml/2006/main" wrap="square" lIns="0" tIns="0" rIns="0" bIns="0" anchor="t">
+            <a:normAutofit fontScale="100000"/>
+          </a:bodyPr>
+          <a:lstStyle xmlns:a="http://schemas.openxmlformats.org/drawingml/2006/main"/>
+          <a:p xmlns:a="http://schemas.openxmlformats.org/drawingml/2006/main">
+            <a:pPr algn="l">
+              <a:buNone/>
+              <a:defRPr sz="825" b="0">
+                <a:solidFill>
+                  <a:srgbClr val="64748B"/>
+                </a:solidFill>
+                <a:latin typeface="Arial"/>
+                <a:ea typeface="Arial"/>
+                <a:cs typeface="Arial"/>
+              </a:defRPr>
+            </a:pPr>
+            <a:r>
+              <a:rPr sz="825" b="0">
+                <a:solidFill>
+                  <a:srgbClr val="64748B"/>
+                </a:solidFill>
+                <a:latin typeface="Arial"/>
+                <a:ea typeface="Arial"/>
+                <a:cs typeface="Arial"/>
+              </a:rPr>
+              <a:t>Return geometry | core asset net excess distribution</a:t>
+            </a:r>
+          </a:p>
+        </p:txBody>
+      </p:sp>
+      <p:sp>
+        <p:nvSpPr>
+          <p:cNvPr id="5" name="footer-number-11">
+            <a:extLst xmlns:a="http://schemas.openxmlformats.org/drawingml/2006/main">
+              <a:ext uri="{FF2B5EF4-FFF2-40B4-BE49-F238E27FC236}">
+                <a16:creationId xmlns:a16="http://schemas.microsoft.com/office/drawing/2014/main" id="{83896276-4112-4532-AF7C-776C67C58B77}"/>
+              </a:ext>
+            </a:extLst>
+          </p:cNvPr>
+          <p:cNvSpPr>
+            <a:spLocks xmlns:a="http://schemas.openxmlformats.org/drawingml/2006/main" noGrp="1"/>
+          </p:cNvSpPr>
+          <p:nvPr/>
+        </p:nvSpPr>
+        <p:spPr>
+          <a:xfrm xmlns:a="http://schemas.openxmlformats.org/drawingml/2006/main">
+            <a:off x="10477500" y="6496050"/>
+            <a:ext cx="1257300" cy="190500"/>
+          </a:xfrm>
+          <a:prstGeom xmlns:a="http://schemas.openxmlformats.org/drawingml/2006/main" prst="rect">
+            <a:avLst/>
+          </a:prstGeom>
+          <a:noFill xmlns:a="http://schemas.openxmlformats.org/drawingml/2006/main"/>
+          <a:ln xmlns:a="http://schemas.openxmlformats.org/drawingml/2006/main" w="0">
+            <a:noFill/>
+            <a:prstDash val="solid"/>
+          </a:ln>
+        </p:spPr>
+        <p:txBody>
+          <a:bodyPr xmlns:a="http://schemas.openxmlformats.org/drawingml/2006/main" wrap="square" lIns="0" tIns="0" rIns="0" bIns="0" anchor="t">
+            <a:normAutofit fontScale="100000"/>
+          </a:bodyPr>
+          <a:lstStyle xmlns:a="http://schemas.openxmlformats.org/drawingml/2006/main"/>
+          <a:p xmlns:a="http://schemas.openxmlformats.org/drawingml/2006/main">
+            <a:pPr algn="r">
+              <a:buNone/>
+              <a:defRPr sz="1050" b="0">
+                <a:solidFill>
+                  <a:srgbClr val="667384"/>
+                </a:solidFill>
+                <a:latin typeface="Arial"/>
+                <a:ea typeface="Arial"/>
+                <a:cs typeface="Arial"/>
+              </a:defRPr>
+            </a:pPr>
+            <a:r>
+              <a:rPr sz="1050" b="0">
+                <a:solidFill>
+                  <a:srgbClr val="667384"/>
+                </a:solidFill>
+                <a:latin typeface="Arial"/>
+                <a:ea typeface="Arial"/>
+                <a:cs typeface="Arial"/>
+              </a:rPr>
+              <a:t>22</a:t>
+            </a:r>
+          </a:p>
+        </p:txBody>
+      </p:sp>
+      <p:pic>
+        <p:nvPicPr>
+          <p:cNvPr id="33" name=""/>
+          <p:cNvPicPr>
+            <a:picLocks xmlns:a="http://schemas.openxmlformats.org/drawingml/2006/main" noChangeAspect="1"/>
+          </p:cNvPicPr>
+          <p:nvPr/>
+        </p:nvPicPr>
+        <p:blipFill>
+          <a:blip xmlns:r="http://schemas.openxmlformats.org/officeDocument/2006/relationships" xmlns:a="http://schemas.openxmlformats.org/drawingml/2006/main" r:embed="R1634c9de5df3496c"/>
+          <a:stretch xmlns:a="http://schemas.openxmlformats.org/drawingml/2006/main"/>
+        </p:blipFill>
+        <p:spPr>
+          <a:xfrm xmlns:a="http://schemas.openxmlformats.org/drawingml/2006/main">
+            <a:off x="1771650" y="1335087"/>
+            <a:ext cx="8648700" cy="5045075"/>
+          </a:xfrm>
+          <a:prstGeom xmlns:a="http://schemas.openxmlformats.org/drawingml/2006/main" prst="rect">
+            <a:avLst/>
+          </a:prstGeom>
+        </p:spPr>
+      </p:pic>
+      <p:pic>
+        <p:nvPicPr>
+          <p:cNvPr id="34" name=""/>
+          <p:cNvPicPr>
+            <a:picLocks xmlns:a="http://schemas.openxmlformats.org/drawingml/2006/main" noChangeAspect="1"/>
+          </p:cNvPicPr>
+          <p:nvPr/>
+        </p:nvPicPr>
+        <p:blipFill>
+          <a:blip xmlns:r="http://schemas.openxmlformats.org/officeDocument/2006/relationships" xmlns:a="http://schemas.openxmlformats.org/drawingml/2006/main" r:embed="R24785d4b72b04709">
+            <a:extLst>
+              <a:ext uri="{96DAC541-7B7A-43D3-8B79-37D633B846F1}">
+                <asvg:svgBlip xmlns:asvg="http://schemas.microsoft.com/office/drawing/2016/SVG/main" r:embed="R554067f958d64e3c"/>
+              </a:ext>
+            </a:extLst>
+          </a:blip>
+          <a:stretch xmlns:a="http://schemas.openxmlformats.org/drawingml/2006/main"/>
+        </p:blipFill>
+        <p:spPr>
+          <a:xfrm xmlns:a="http://schemas.openxmlformats.org/drawingml/2006/main">
+            <a:off x="1771650" y="1335087"/>
+            <a:ext cx="8648700" cy="5045075"/>
+          </a:xfrm>
+          <a:prstGeom xmlns:a="http://schemas.openxmlformats.org/drawingml/2006/main" prst="rect">
+            <a:avLst/>
+          </a:prstGeom>
+        </p:spPr>
+      </p:pic>
+      <p:pic>
+        <p:nvPicPr>
+          <p:cNvPr id="35" name=""/>
+          <p:cNvPicPr>
+            <a:picLocks xmlns:a="http://schemas.openxmlformats.org/drawingml/2006/main" noChangeAspect="1"/>
+          </p:cNvPicPr>
+          <p:nvPr/>
+        </p:nvPicPr>
+        <p:blipFill>
+          <a:blip xmlns:r="http://schemas.openxmlformats.org/officeDocument/2006/relationships" xmlns:a="http://schemas.openxmlformats.org/drawingml/2006/main" r:embed="Rcc5db206f48e4ef0"/>
+          <a:stretch xmlns:a="http://schemas.openxmlformats.org/drawingml/2006/main"/>
+        </p:blipFill>
+        <p:spPr>
+          <a:xfrm xmlns:a="http://schemas.openxmlformats.org/drawingml/2006/main">
+            <a:off x="1891771" y="1335087"/>
+            <a:ext cx="8408458" cy="5045075"/>
+          </a:xfrm>
+          <a:prstGeom xmlns:a="http://schemas.openxmlformats.org/drawingml/2006/main" prst="rect">
+            <a:avLst/>
+          </a:prstGeom>
+        </p:spPr>
+      </p:pic>
+    </p:spTree>
+    <p:extLst>
+      <p:ext uri="{BB962C8B-B14F-4D97-AF65-F5344CB8AC3E}">
+        <p14:creationId xmlns:p14="http://schemas.microsoft.com/office/powerpoint/2010/main" val="666536286"/>
+      </p:ext>
+    </p:extLst>
+  </p:cSld>
+</p:sld>
+</file>
+
+<file path=ppt/slides/slide23.xml><?xml version="1.0" encoding="utf-8"?>
+<p:sld xmlns:p="http://schemas.openxmlformats.org/presentationml/2006/main">
+  <p:cSld>
+    <p:bg>
+      <p:bgPr>
+        <a:solidFill xmlns:a="http://schemas.openxmlformats.org/drawingml/2006/main">
+          <a:srgbClr val="FFFFFF"/>
+        </a:solidFill>
+      </p:bgPr>
+    </p:bg>
+    <p:spTree>
+      <p:nvGrpSpPr>
+        <p:cNvPr id="1" name=""/>
+        <p:cNvGrpSpPr/>
+        <p:nvPr/>
+      </p:nvGrpSpPr>
+      <p:grpSpPr>
+        <a:xfrm xmlns:a="http://schemas.openxmlformats.org/drawingml/2006/main"/>
+      </p:grpSpPr>
+      <p:sp>
+        <p:nvSpPr>
+          <p:cNvPr id="24" name="section-11">
+            <a:extLst xmlns:a="http://schemas.openxmlformats.org/drawingml/2006/main">
+              <a:ext uri="{FF2B5EF4-FFF2-40B4-BE49-F238E27FC236}">
+                <a16:creationId xmlns:a16="http://schemas.microsoft.com/office/drawing/2014/main" id="{272ED433-B59C-436C-9DFB-4D317B90A13F}"/>
+              </a:ext>
+            </a:extLst>
+          </p:cNvPr>
+          <p:cNvSpPr>
+            <a:spLocks xmlns:a="http://schemas.openxmlformats.org/drawingml/2006/main" noGrp="1"/>
+          </p:cNvSpPr>
+          <p:nvPr/>
+        </p:nvSpPr>
+        <p:spPr>
+          <a:xfrm xmlns:a="http://schemas.openxmlformats.org/drawingml/2006/main">
+            <a:off x="457200" y="228600"/>
+            <a:ext cx="4191000" cy="228600"/>
+          </a:xfrm>
+          <a:prstGeom xmlns:a="http://schemas.openxmlformats.org/drawingml/2006/main" prst="rect">
+            <a:avLst/>
+          </a:prstGeom>
+          <a:noFill xmlns:a="http://schemas.openxmlformats.org/drawingml/2006/main"/>
+          <a:ln xmlns:a="http://schemas.openxmlformats.org/drawingml/2006/main" w="0">
+            <a:noFill/>
+            <a:prstDash val="solid"/>
+          </a:ln>
+        </p:spPr>
+        <p:txBody>
+          <a:bodyPr xmlns:a="http://schemas.openxmlformats.org/drawingml/2006/main" wrap="square" lIns="0" tIns="0" rIns="0" bIns="0" anchor="t">
+            <a:normAutofit fontScale="100000"/>
+          </a:bodyPr>
+          <a:lstStyle xmlns:a="http://schemas.openxmlformats.org/drawingml/2006/main"/>
+          <a:p xmlns:a="http://schemas.openxmlformats.org/drawingml/2006/main">
+            <a:pPr algn="l">
+              <a:buNone/>
+              <a:defRPr sz="1200" b="1">
+                <a:solidFill>
+                  <a:srgbClr val="667384"/>
+                </a:solidFill>
+                <a:latin typeface="Arial"/>
+                <a:ea typeface="Arial"/>
+                <a:cs typeface="Arial"/>
+              </a:defRPr>
+            </a:pPr>
+            <a:r>
+              <a:rPr sz="1200" b="1">
+                <a:solidFill>
+                  <a:srgbClr val="667384"/>
+                </a:solidFill>
+                <a:latin typeface="Arial"/>
+                <a:ea typeface="Arial"/>
+                <a:cs typeface="Arial"/>
+              </a:rPr>
+              <a:t>REPRESENTATIVE TAPES</a:t>
+            </a:r>
+          </a:p>
+        </p:txBody>
+      </p:sp>
+      <p:sp>
+        <p:nvSpPr>
+          <p:cNvPr id="2" name="title-11">
+            <a:extLst xmlns:a="http://schemas.openxmlformats.org/drawingml/2006/main">
+              <a:ext uri="{FF2B5EF4-FFF2-40B4-BE49-F238E27FC236}">
+                <a16:creationId xmlns:a16="http://schemas.microsoft.com/office/drawing/2014/main" id="{3EC40708-7E00-432C-8ECE-907FA5705292}"/>
+              </a:ext>
+            </a:extLst>
+          </p:cNvPr>
+          <p:cNvSpPr>
+            <a:spLocks xmlns:a="http://schemas.openxmlformats.org/drawingml/2006/main" noGrp="1"/>
+          </p:cNvSpPr>
+          <p:nvPr/>
+        </p:nvSpPr>
+        <p:spPr>
+          <a:xfrm xmlns:a="http://schemas.openxmlformats.org/drawingml/2006/main">
+            <a:off x="457200" y="533400"/>
+            <a:ext cx="11277600" cy="628650"/>
+          </a:xfrm>
+          <a:prstGeom xmlns:a="http://schemas.openxmlformats.org/drawingml/2006/main" prst="rect">
+            <a:avLst/>
+          </a:prstGeom>
+          <a:noFill xmlns:a="http://schemas.openxmlformats.org/drawingml/2006/main"/>
+          <a:ln xmlns:a="http://schemas.openxmlformats.org/drawingml/2006/main" w="0">
+            <a:noFill/>
+            <a:prstDash val="solid"/>
+          </a:ln>
+        </p:spPr>
+        <p:txBody>
+          <a:bodyPr xmlns:a="http://schemas.openxmlformats.org/drawingml/2006/main" wrap="square" lIns="0" tIns="0" rIns="0" bIns="0" anchor="t">
+            <a:normAutofit fontScale="98424"/>
+          </a:bodyPr>
+          <a:lstStyle xmlns:a="http://schemas.openxmlformats.org/drawingml/2006/main"/>
+          <a:p xmlns:a="http://schemas.openxmlformats.org/drawingml/2006/main">
+            <a:pPr algn="l">
+              <a:buNone/>
+              <a:defRPr sz="3525" b="1">
+                <a:solidFill>
+                  <a:srgbClr val="000000"/>
+                </a:solidFill>
+                <a:latin typeface="Arial"/>
+                <a:ea typeface="Arial"/>
+                <a:cs typeface="Arial"/>
+              </a:defRPr>
+            </a:pPr>
+            <a:r>
+              <a:rPr sz="3525" b="1">
+                <a:solidFill>
+                  <a:srgbClr val="000000"/>
+                </a:solidFill>
+                <a:latin typeface="Arial"/>
+                <a:ea typeface="Arial"/>
+                <a:cs typeface="Arial"/>
+              </a:rPr>
+              <a:t>The rule produces rebounds—and continued declines</a:t>
+            </a:r>
+          </a:p>
+        </p:txBody>
+      </p:sp>
+      <p:sp>
+        <p:nvSpPr>
+          <p:cNvPr id="3" name="">
+            <a:extLst xmlns:a="http://schemas.openxmlformats.org/drawingml/2006/main">
+              <a:ext uri="{FF2B5EF4-FFF2-40B4-BE49-F238E27FC236}">
+                <a16:creationId xmlns:a16="http://schemas.microsoft.com/office/drawing/2014/main" id="{D5CA0FCE-75E8-41EF-A76A-23E9E2120C6A}"/>
+              </a:ext>
+            </a:extLst>
+          </p:cNvPr>
+          <p:cNvSpPr>
+            <a:spLocks xmlns:a="http://schemas.openxmlformats.org/drawingml/2006/main" noGrp="1"/>
+          </p:cNvSpPr>
+          <p:nvPr/>
+        </p:nvSpPr>
+        <p:spPr>
+          <a:xfrm xmlns:a="http://schemas.openxmlformats.org/drawingml/2006/main">
+            <a:off x="457200" y="1200150"/>
+            <a:ext cx="11277600" cy="19050"/>
+          </a:xfrm>
+          <a:prstGeom xmlns:a="http://schemas.openxmlformats.org/drawingml/2006/main" prst="rect">
+            <a:avLst/>
+          </a:prstGeom>
+          <a:solidFill xmlns:a="http://schemas.openxmlformats.org/drawingml/2006/main">
+            <a:srgbClr val="B8BCC4"/>
+          </a:solidFill>
+          <a:ln xmlns:a="http://schemas.openxmlformats.org/drawingml/2006/main" w="0">
+            <a:solidFill>
+              <a:srgbClr val="B8BCC4"/>
+            </a:solidFill>
+            <a:prstDash val="solid"/>
+          </a:ln>
+        </p:spPr>
+      </p:sp>
+      <p:sp>
+        <p:nvSpPr>
+          <p:cNvPr id="4" name="footer-left-11">
+            <a:extLst xmlns:a="http://schemas.openxmlformats.org/drawingml/2006/main">
+              <a:ext uri="{FF2B5EF4-FFF2-40B4-BE49-F238E27FC236}">
+                <a16:creationId xmlns:a16="http://schemas.microsoft.com/office/drawing/2014/main" id="{700DA765-80E0-4197-8700-00D867B86FA2}"/>
+              </a:ext>
+            </a:extLst>
+          </p:cNvPr>
+          <p:cNvSpPr>
+            <a:spLocks xmlns:a="http://schemas.openxmlformats.org/drawingml/2006/main" noGrp="1"/>
+          </p:cNvSpPr>
+          <p:nvPr/>
+        </p:nvSpPr>
+        <p:spPr>
+          <a:xfrm xmlns:a="http://schemas.openxmlformats.org/drawingml/2006/main">
+            <a:off x="457200" y="6515100"/>
+            <a:ext cx="3429000" cy="171450"/>
+          </a:xfrm>
+          <a:prstGeom xmlns:a="http://schemas.openxmlformats.org/drawingml/2006/main" prst="rect">
+            <a:avLst/>
+          </a:prstGeom>
+          <a:noFill xmlns:a="http://schemas.openxmlformats.org/drawingml/2006/main"/>
+          <a:ln xmlns:a="http://schemas.openxmlformats.org/drawingml/2006/main" w="0">
+            <a:noFill/>
+            <a:prstDash val="solid"/>
+          </a:ln>
+        </p:spPr>
+        <p:txBody>
+          <a:bodyPr xmlns:a="http://schemas.openxmlformats.org/drawingml/2006/main" wrap="square" lIns="0" tIns="0" rIns="0" bIns="0" anchor="t">
+            <a:normAutofit fontScale="100000"/>
+          </a:bodyPr>
+          <a:lstStyle xmlns:a="http://schemas.openxmlformats.org/drawingml/2006/main"/>
+          <a:p xmlns:a="http://schemas.openxmlformats.org/drawingml/2006/main">
+            <a:pPr algn="l">
+              <a:buNone/>
+              <a:defRPr sz="825" b="0">
+                <a:solidFill>
+                  <a:srgbClr val="64748B"/>
+                </a:solidFill>
+                <a:latin typeface="Arial"/>
+                <a:ea typeface="Arial"/>
+                <a:cs typeface="Arial"/>
+              </a:defRPr>
+            </a:pPr>
+            <a:r>
+              <a:rPr sz="825" b="0">
+                <a:solidFill>
+                  <a:srgbClr val="64748B"/>
+                </a:solidFill>
+                <a:latin typeface="Arial"/>
+                <a:ea typeface="Arial"/>
+                <a:cs typeface="Arial"/>
+              </a:rPr>
+              <a:t>Return geometry | deterministic representative trades</a:t>
+            </a:r>
+          </a:p>
+        </p:txBody>
+      </p:sp>
+      <p:sp>
+        <p:nvSpPr>
+          <p:cNvPr id="5" name="footer-number-11">
+            <a:extLst xmlns:a="http://schemas.openxmlformats.org/drawingml/2006/main">
+              <a:ext uri="{FF2B5EF4-FFF2-40B4-BE49-F238E27FC236}">
+                <a16:creationId xmlns:a16="http://schemas.microsoft.com/office/drawing/2014/main" id="{83896276-4112-4532-AF7C-776C67C58B77}"/>
+              </a:ext>
+            </a:extLst>
+          </p:cNvPr>
+          <p:cNvSpPr>
+            <a:spLocks xmlns:a="http://schemas.openxmlformats.org/drawingml/2006/main" noGrp="1"/>
+          </p:cNvSpPr>
+          <p:nvPr/>
+        </p:nvSpPr>
+        <p:spPr>
+          <a:xfrm xmlns:a="http://schemas.openxmlformats.org/drawingml/2006/main">
+            <a:off x="10477500" y="6496050"/>
+            <a:ext cx="1257300" cy="190500"/>
+          </a:xfrm>
+          <a:prstGeom xmlns:a="http://schemas.openxmlformats.org/drawingml/2006/main" prst="rect">
+            <a:avLst/>
+          </a:prstGeom>
+          <a:noFill xmlns:a="http://schemas.openxmlformats.org/drawingml/2006/main"/>
+          <a:ln xmlns:a="http://schemas.openxmlformats.org/drawingml/2006/main" w="0">
+            <a:noFill/>
+            <a:prstDash val="solid"/>
+          </a:ln>
+        </p:spPr>
+        <p:txBody>
+          <a:bodyPr xmlns:a="http://schemas.openxmlformats.org/drawingml/2006/main" wrap="square" lIns="0" tIns="0" rIns="0" bIns="0" anchor="t">
+            <a:normAutofit fontScale="100000"/>
+          </a:bodyPr>
+          <a:lstStyle xmlns:a="http://schemas.openxmlformats.org/drawingml/2006/main"/>
+          <a:p xmlns:a="http://schemas.openxmlformats.org/drawingml/2006/main">
+            <a:pPr algn="r">
+              <a:buNone/>
+              <a:defRPr sz="1050" b="0">
+                <a:solidFill>
+                  <a:srgbClr val="667384"/>
+                </a:solidFill>
+                <a:latin typeface="Arial"/>
+                <a:ea typeface="Arial"/>
+                <a:cs typeface="Arial"/>
+              </a:defRPr>
+            </a:pPr>
+            <a:r>
+              <a:rPr sz="1050" b="0">
+                <a:solidFill>
+                  <a:srgbClr val="667384"/>
+                </a:solidFill>
+                <a:latin typeface="Arial"/>
+                <a:ea typeface="Arial"/>
+                <a:cs typeface="Arial"/>
+              </a:rPr>
+              <a:t>23</a:t>
+            </a:r>
+          </a:p>
+        </p:txBody>
+      </p:sp>
+      <p:pic>
+        <p:nvPicPr>
+          <p:cNvPr id="33" name=""/>
+          <p:cNvPicPr>
+            <a:picLocks xmlns:a="http://schemas.openxmlformats.org/drawingml/2006/main" noChangeAspect="1"/>
+          </p:cNvPicPr>
+          <p:nvPr/>
+        </p:nvPicPr>
+        <p:blipFill>
+          <a:blip xmlns:r="http://schemas.openxmlformats.org/officeDocument/2006/relationships" xmlns:a="http://schemas.openxmlformats.org/drawingml/2006/main" r:embed="R8e396b25b6c0478e"/>
+          <a:stretch xmlns:a="http://schemas.openxmlformats.org/drawingml/2006/main"/>
+        </p:blipFill>
+        <p:spPr>
+          <a:xfrm xmlns:a="http://schemas.openxmlformats.org/drawingml/2006/main">
+            <a:off x="1771650" y="1335087"/>
+            <a:ext cx="8648700" cy="5045075"/>
+          </a:xfrm>
+          <a:prstGeom xmlns:a="http://schemas.openxmlformats.org/drawingml/2006/main" prst="rect">
+            <a:avLst/>
+          </a:prstGeom>
+        </p:spPr>
+      </p:pic>
+      <p:pic>
+        <p:nvPicPr>
+          <p:cNvPr id="34" name=""/>
+          <p:cNvPicPr>
+            <a:picLocks xmlns:a="http://schemas.openxmlformats.org/drawingml/2006/main" noChangeAspect="1"/>
+          </p:cNvPicPr>
+          <p:nvPr/>
+        </p:nvPicPr>
+        <p:blipFill>
+          <a:blip xmlns:r="http://schemas.openxmlformats.org/officeDocument/2006/relationships" xmlns:a="http://schemas.openxmlformats.org/drawingml/2006/main" r:embed="R530db31302f84333">
+            <a:extLst>
+              <a:ext uri="{96DAC541-7B7A-43D3-8B79-37D633B846F1}">
+                <asvg:svgBlip xmlns:asvg="http://schemas.microsoft.com/office/drawing/2016/SVG/main" r:embed="R5ecaa06317a640ae"/>
+              </a:ext>
+            </a:extLst>
+          </a:blip>
+          <a:stretch xmlns:a="http://schemas.openxmlformats.org/drawingml/2006/main"/>
+        </p:blipFill>
+        <p:spPr>
+          <a:xfrm xmlns:a="http://schemas.openxmlformats.org/drawingml/2006/main">
+            <a:off x="1771650" y="1335087"/>
+            <a:ext cx="8648700" cy="5045075"/>
+          </a:xfrm>
+          <a:prstGeom xmlns:a="http://schemas.openxmlformats.org/drawingml/2006/main" prst="rect">
+            <a:avLst/>
+          </a:prstGeom>
+        </p:spPr>
+      </p:pic>
+      <p:pic>
+        <p:nvPicPr>
+          <p:cNvPr id="35" name=""/>
+          <p:cNvPicPr>
+            <a:picLocks xmlns:a="http://schemas.openxmlformats.org/drawingml/2006/main" noChangeAspect="1"/>
+          </p:cNvPicPr>
+          <p:nvPr/>
+        </p:nvPicPr>
+        <p:blipFill>
+          <a:blip xmlns:r="http://schemas.openxmlformats.org/officeDocument/2006/relationships" xmlns:a="http://schemas.openxmlformats.org/drawingml/2006/main" r:embed="R1b28d838c6e54d9f"/>
+          <a:stretch xmlns:a="http://schemas.openxmlformats.org/drawingml/2006/main"/>
+        </p:blipFill>
+        <p:spPr>
+          <a:xfrm xmlns:a="http://schemas.openxmlformats.org/drawingml/2006/main">
+            <a:off x="2426855" y="1335087"/>
+            <a:ext cx="7338291" cy="5045075"/>
+          </a:xfrm>
+          <a:prstGeom xmlns:a="http://schemas.openxmlformats.org/drawingml/2006/main" prst="rect">
+            <a:avLst/>
+          </a:prstGeom>
+        </p:spPr>
+      </p:pic>
+    </p:spTree>
+    <p:extLst>
+      <p:ext uri="{BB962C8B-B14F-4D97-AF65-F5344CB8AC3E}">
+        <p14:creationId xmlns:p14="http://schemas.microsoft.com/office/powerpoint/2010/main" val="666536286"/>
+      </p:ext>
+    </p:extLst>
+  </p:cSld>
+</p:sld>
+</file>
+
+<file path=ppt/slides/slide24.xml><?xml version="1.0" encoding="utf-8"?>
+<p:sld xmlns:p="http://schemas.openxmlformats.org/presentationml/2006/main">
+  <p:cSld>
+    <p:bg>
+      <p:bgPr>
+        <a:solidFill xmlns:a="http://schemas.openxmlformats.org/drawingml/2006/main">
+          <a:srgbClr val="FFFFFF"/>
+        </a:solidFill>
+      </p:bgPr>
+    </p:bg>
+    <p:spTree>
+      <p:nvGrpSpPr>
+        <p:cNvPr id="1" name=""/>
+        <p:cNvGrpSpPr/>
+        <p:nvPr/>
+      </p:nvGrpSpPr>
+      <p:grpSpPr>
+        <a:xfrm xmlns:a="http://schemas.openxmlformats.org/drawingml/2006/main"/>
+      </p:grpSpPr>
+      <p:sp>
+        <p:nvSpPr>
+          <p:cNvPr id="24" name="section-11">
+            <a:extLst xmlns:a="http://schemas.openxmlformats.org/drawingml/2006/main">
+              <a:ext uri="{FF2B5EF4-FFF2-40B4-BE49-F238E27FC236}">
+                <a16:creationId xmlns:a16="http://schemas.microsoft.com/office/drawing/2014/main" id="{272ED433-B59C-436C-9DFB-4D317B90A13F}"/>
+              </a:ext>
+            </a:extLst>
+          </p:cNvPr>
+          <p:cNvSpPr>
+            <a:spLocks xmlns:a="http://schemas.openxmlformats.org/drawingml/2006/main" noGrp="1"/>
+          </p:cNvSpPr>
+          <p:nvPr/>
+        </p:nvSpPr>
+        <p:spPr>
+          <a:xfrm xmlns:a="http://schemas.openxmlformats.org/drawingml/2006/main">
+            <a:off x="457200" y="228600"/>
+            <a:ext cx="4191000" cy="228600"/>
+          </a:xfrm>
+          <a:prstGeom xmlns:a="http://schemas.openxmlformats.org/drawingml/2006/main" prst="rect">
+            <a:avLst/>
+          </a:prstGeom>
+          <a:noFill xmlns:a="http://schemas.openxmlformats.org/drawingml/2006/main"/>
+          <a:ln xmlns:a="http://schemas.openxmlformats.org/drawingml/2006/main" w="0">
+            <a:noFill/>
+            <a:prstDash val="solid"/>
+          </a:ln>
+        </p:spPr>
+        <p:txBody>
+          <a:bodyPr xmlns:a="http://schemas.openxmlformats.org/drawingml/2006/main" wrap="square" lIns="0" tIns="0" rIns="0" bIns="0" anchor="t">
+            <a:normAutofit fontScale="100000"/>
+          </a:bodyPr>
+          <a:lstStyle xmlns:a="http://schemas.openxmlformats.org/drawingml/2006/main"/>
+          <a:p xmlns:a="http://schemas.openxmlformats.org/drawingml/2006/main">
+            <a:pPr algn="l">
+              <a:buNone/>
+              <a:defRPr sz="1200" b="1">
+                <a:solidFill>
+                  <a:srgbClr val="667384"/>
+                </a:solidFill>
+                <a:latin typeface="Arial"/>
+                <a:ea typeface="Arial"/>
+                <a:cs typeface="Arial"/>
+              </a:defRPr>
+            </a:pPr>
+            <a:r>
+              <a:rPr sz="1200" b="1">
+                <a:solidFill>
+                  <a:srgbClr val="667384"/>
+                </a:solidFill>
+                <a:latin typeface="Arial"/>
+                <a:ea typeface="Arial"/>
+                <a:cs typeface="Arial"/>
+              </a:rPr>
+              <a:t>TRAIN DECISION</a:t>
+            </a:r>
+          </a:p>
+        </p:txBody>
+      </p:sp>
+      <p:sp>
+        <p:nvSpPr>
+          <p:cNvPr id="2" name="title-11">
+            <a:extLst xmlns:a="http://schemas.openxmlformats.org/drawingml/2006/main">
+              <a:ext uri="{FF2B5EF4-FFF2-40B4-BE49-F238E27FC236}">
+                <a16:creationId xmlns:a16="http://schemas.microsoft.com/office/drawing/2014/main" id="{3EC40708-7E00-432C-8ECE-907FA5705292}"/>
+              </a:ext>
+            </a:extLst>
+          </p:cNvPr>
+          <p:cNvSpPr>
+            <a:spLocks xmlns:a="http://schemas.openxmlformats.org/drawingml/2006/main" noGrp="1"/>
+          </p:cNvSpPr>
+          <p:nvPr/>
+        </p:nvSpPr>
+        <p:spPr>
+          <a:xfrm xmlns:a="http://schemas.openxmlformats.org/drawingml/2006/main">
+            <a:off x="457200" y="533400"/>
+            <a:ext cx="11277600" cy="628650"/>
+          </a:xfrm>
+          <a:prstGeom xmlns:a="http://schemas.openxmlformats.org/drawingml/2006/main" prst="rect">
+            <a:avLst/>
+          </a:prstGeom>
+          <a:noFill xmlns:a="http://schemas.openxmlformats.org/drawingml/2006/main"/>
+          <a:ln xmlns:a="http://schemas.openxmlformats.org/drawingml/2006/main" w="0">
+            <a:noFill/>
+            <a:prstDash val="solid"/>
+          </a:ln>
+        </p:spPr>
+        <p:txBody>
+          <a:bodyPr xmlns:a="http://schemas.openxmlformats.org/drawingml/2006/main" wrap="square" lIns="0" tIns="0" rIns="0" bIns="0" anchor="t">
+            <a:normAutofit fontScale="100000"/>
+          </a:bodyPr>
+          <a:lstStyle xmlns:a="http://schemas.openxmlformats.org/drawingml/2006/main"/>
+          <a:p xmlns:a="http://schemas.openxmlformats.org/drawingml/2006/main">
+            <a:pPr algn="l">
+              <a:buNone/>
+              <a:defRPr sz="3525" b="1">
+                <a:solidFill>
+                  <a:srgbClr val="000000"/>
+                </a:solidFill>
+                <a:latin typeface="Arial"/>
+                <a:ea typeface="Arial"/>
+                <a:cs typeface="Arial"/>
+              </a:defRPr>
+            </a:pPr>
+            <a:r>
+              <a:rPr sz="3525" b="1">
+                <a:solidFill>
+                  <a:srgbClr val="000000"/>
+                </a:solidFill>
+                <a:latin typeface="Arial"/>
+                <a:ea typeface="Arial"/>
+                <a:cs typeface="Arial"/>
+              </a:rPr>
+              <a:t>The rule stops before OOS</a:t>
+            </a:r>
+          </a:p>
+        </p:txBody>
+      </p:sp>
+      <p:sp>
+        <p:nvSpPr>
+          <p:cNvPr id="3" name="">
+            <a:extLst xmlns:a="http://schemas.openxmlformats.org/drawingml/2006/main">
+              <a:ext uri="{FF2B5EF4-FFF2-40B4-BE49-F238E27FC236}">
+                <a16:creationId xmlns:a16="http://schemas.microsoft.com/office/drawing/2014/main" id="{D5CA0FCE-75E8-41EF-A76A-23E9E2120C6A}"/>
+              </a:ext>
+            </a:extLst>
+          </p:cNvPr>
+          <p:cNvSpPr>
+            <a:spLocks xmlns:a="http://schemas.openxmlformats.org/drawingml/2006/main" noGrp="1"/>
+          </p:cNvSpPr>
+          <p:nvPr/>
+        </p:nvSpPr>
+        <p:spPr>
+          <a:xfrm xmlns:a="http://schemas.openxmlformats.org/drawingml/2006/main">
+            <a:off x="457200" y="1200150"/>
+            <a:ext cx="11277600" cy="19050"/>
+          </a:xfrm>
+          <a:prstGeom xmlns:a="http://schemas.openxmlformats.org/drawingml/2006/main" prst="rect">
+            <a:avLst/>
+          </a:prstGeom>
+          <a:solidFill xmlns:a="http://schemas.openxmlformats.org/drawingml/2006/main">
+            <a:srgbClr val="B8BCC4"/>
+          </a:solidFill>
+          <a:ln xmlns:a="http://schemas.openxmlformats.org/drawingml/2006/main" w="0">
+            <a:solidFill>
+              <a:srgbClr val="B8BCC4"/>
+            </a:solidFill>
+            <a:prstDash val="solid"/>
+          </a:ln>
+        </p:spPr>
+      </p:sp>
+      <p:sp>
+        <p:nvSpPr>
+          <p:cNvPr id="4" name="footer-left-11">
+            <a:extLst xmlns:a="http://schemas.openxmlformats.org/drawingml/2006/main">
+              <a:ext uri="{FF2B5EF4-FFF2-40B4-BE49-F238E27FC236}">
+                <a16:creationId xmlns:a16="http://schemas.microsoft.com/office/drawing/2014/main" id="{700DA765-80E0-4197-8700-00D867B86FA2}"/>
+              </a:ext>
+            </a:extLst>
+          </p:cNvPr>
+          <p:cNvSpPr>
+            <a:spLocks xmlns:a="http://schemas.openxmlformats.org/drawingml/2006/main" noGrp="1"/>
+          </p:cNvSpPr>
+          <p:nvPr/>
+        </p:nvSpPr>
+        <p:spPr>
+          <a:xfrm xmlns:a="http://schemas.openxmlformats.org/drawingml/2006/main">
+            <a:off x="457200" y="6515100"/>
+            <a:ext cx="3429000" cy="171450"/>
+          </a:xfrm>
+          <a:prstGeom xmlns:a="http://schemas.openxmlformats.org/drawingml/2006/main" prst="rect">
+            <a:avLst/>
+          </a:prstGeom>
+          <a:noFill xmlns:a="http://schemas.openxmlformats.org/drawingml/2006/main"/>
+          <a:ln xmlns:a="http://schemas.openxmlformats.org/drawingml/2006/main" w="0">
+            <a:noFill/>
+            <a:prstDash val="solid"/>
+          </a:ln>
+        </p:spPr>
+        <p:txBody>
+          <a:bodyPr xmlns:a="http://schemas.openxmlformats.org/drawingml/2006/main" wrap="square" lIns="0" tIns="0" rIns="0" bIns="0" anchor="t">
+            <a:normAutofit fontScale="100000"/>
+          </a:bodyPr>
+          <a:lstStyle xmlns:a="http://schemas.openxmlformats.org/drawingml/2006/main"/>
+          <a:p xmlns:a="http://schemas.openxmlformats.org/drawingml/2006/main">
+            <a:pPr algn="l">
+              <a:buNone/>
+              <a:defRPr sz="825" b="0">
+                <a:solidFill>
+                  <a:srgbClr val="64748B"/>
+                </a:solidFill>
+                <a:latin typeface="Arial"/>
+                <a:ea typeface="Arial"/>
+                <a:cs typeface="Arial"/>
+              </a:defRPr>
+            </a:pPr>
+            <a:r>
+              <a:rPr sz="825" b="0">
+                <a:solidFill>
+                  <a:srgbClr val="64748B"/>
+                </a:solidFill>
+                <a:latin typeface="Arial"/>
+                <a:ea typeface="Arial"/>
+                <a:cs typeface="Arial"/>
+              </a:rPr>
+              <a:t>Return geometry | executable TRAIN decision</a:t>
+            </a:r>
+          </a:p>
+        </p:txBody>
+      </p:sp>
+      <p:sp>
+        <p:nvSpPr>
+          <p:cNvPr id="5" name="footer-number-11">
+            <a:extLst xmlns:a="http://schemas.openxmlformats.org/drawingml/2006/main">
+              <a:ext uri="{FF2B5EF4-FFF2-40B4-BE49-F238E27FC236}">
+                <a16:creationId xmlns:a16="http://schemas.microsoft.com/office/drawing/2014/main" id="{83896276-4112-4532-AF7C-776C67C58B77}"/>
+              </a:ext>
+            </a:extLst>
+          </p:cNvPr>
+          <p:cNvSpPr>
+            <a:spLocks xmlns:a="http://schemas.openxmlformats.org/drawingml/2006/main" noGrp="1"/>
+          </p:cNvSpPr>
+          <p:nvPr/>
+        </p:nvSpPr>
+        <p:spPr>
+          <a:xfrm xmlns:a="http://schemas.openxmlformats.org/drawingml/2006/main">
+            <a:off x="10477500" y="6496050"/>
+            <a:ext cx="1257300" cy="190500"/>
+          </a:xfrm>
+          <a:prstGeom xmlns:a="http://schemas.openxmlformats.org/drawingml/2006/main" prst="rect">
+            <a:avLst/>
+          </a:prstGeom>
+          <a:noFill xmlns:a="http://schemas.openxmlformats.org/drawingml/2006/main"/>
+          <a:ln xmlns:a="http://schemas.openxmlformats.org/drawingml/2006/main" w="0">
+            <a:noFill/>
+            <a:prstDash val="solid"/>
+          </a:ln>
+        </p:spPr>
+        <p:txBody>
+          <a:bodyPr xmlns:a="http://schemas.openxmlformats.org/drawingml/2006/main" wrap="square" lIns="0" tIns="0" rIns="0" bIns="0" anchor="t">
+            <a:normAutofit fontScale="100000"/>
+          </a:bodyPr>
+          <a:lstStyle xmlns:a="http://schemas.openxmlformats.org/drawingml/2006/main"/>
+          <a:p xmlns:a="http://schemas.openxmlformats.org/drawingml/2006/main">
+            <a:pPr algn="r">
+              <a:buNone/>
+              <a:defRPr sz="1050" b="0">
+                <a:solidFill>
+                  <a:srgbClr val="667384"/>
+                </a:solidFill>
+                <a:latin typeface="Arial"/>
+                <a:ea typeface="Arial"/>
+                <a:cs typeface="Arial"/>
+              </a:defRPr>
+            </a:pPr>
+            <a:r>
+              <a:rPr sz="1050" b="0">
+                <a:solidFill>
+                  <a:srgbClr val="667384"/>
+                </a:solidFill>
+                <a:latin typeface="Arial"/>
+                <a:ea typeface="Arial"/>
+                <a:cs typeface="Arial"/>
+              </a:rPr>
+              <a:t>24</a:t>
+            </a:r>
+          </a:p>
+        </p:txBody>
+      </p:sp>
+      <p:sp>
+        <p:nvSpPr>
+          <p:cNvPr id="6" name="">
+            <a:extLst xmlns:a="http://schemas.openxmlformats.org/drawingml/2006/main">
+              <a:ext uri="{FF2B5EF4-FFF2-40B4-BE49-F238E27FC236}">
+                <a16:creationId xmlns:a16="http://schemas.microsoft.com/office/drawing/2014/main" id="{10F4BA85-46C5-47BD-BA74-EC806E663D58}"/>
+              </a:ext>
+            </a:extLst>
+          </p:cNvPr>
+          <p:cNvSpPr>
+            <a:spLocks xmlns:a="http://schemas.openxmlformats.org/drawingml/2006/main" noGrp="1"/>
+          </p:cNvSpPr>
+          <p:nvPr/>
+        </p:nvSpPr>
+        <p:spPr>
+          <a:xfrm xmlns:a="http://schemas.openxmlformats.org/drawingml/2006/main">
+            <a:off x="552450" y="1600200"/>
+            <a:ext cx="95250" cy="895350"/>
+          </a:xfrm>
+          <a:prstGeom xmlns:a="http://schemas.openxmlformats.org/drawingml/2006/main" prst="rect">
+            <a:avLst/>
+          </a:prstGeom>
+          <a:solidFill xmlns:a="http://schemas.openxmlformats.org/drawingml/2006/main">
+            <a:srgbClr val="E45756"/>
+          </a:solidFill>
+          <a:ln xmlns:a="http://schemas.openxmlformats.org/drawingml/2006/main" w="0">
+            <a:solidFill>
+              <a:srgbClr val="E45756"/>
+            </a:solidFill>
+            <a:prstDash val="solid"/>
+          </a:ln>
+        </p:spPr>
+      </p:sp>
+      <p:sp>
+        <p:nvSpPr>
+          <p:cNvPr id="7" name="">
+            <a:extLst xmlns:a="http://schemas.openxmlformats.org/drawingml/2006/main">
+              <a:ext uri="{FF2B5EF4-FFF2-40B4-BE49-F238E27FC236}">
+                <a16:creationId xmlns:a16="http://schemas.microsoft.com/office/drawing/2014/main" id="{7EF5B945-9D04-48FA-BA66-96DE813A9715}"/>
+              </a:ext>
+            </a:extLst>
+          </p:cNvPr>
+          <p:cNvSpPr>
+            <a:spLocks xmlns:a="http://schemas.openxmlformats.org/drawingml/2006/main" noGrp="1"/>
+          </p:cNvSpPr>
+          <p:nvPr/>
+        </p:nvSpPr>
+        <p:spPr>
+          <a:xfrm xmlns:a="http://schemas.openxmlformats.org/drawingml/2006/main">
+            <a:off x="876300" y="1581150"/>
+            <a:ext cx="2095500" cy="285750"/>
+          </a:xfrm>
+          <a:prstGeom xmlns:a="http://schemas.openxmlformats.org/drawingml/2006/main" prst="rect">
+            <a:avLst/>
+          </a:prstGeom>
+          <a:noFill xmlns:a="http://schemas.openxmlformats.org/drawingml/2006/main"/>
+          <a:ln xmlns:a="http://schemas.openxmlformats.org/drawingml/2006/main" w="0">
+            <a:noFill/>
+            <a:prstDash val="solid"/>
+          </a:ln>
+        </p:spPr>
+        <p:txBody>
+          <a:bodyPr xmlns:a="http://schemas.openxmlformats.org/drawingml/2006/main" wrap="square" lIns="0" tIns="0" rIns="0" bIns="0" anchor="t">
+            <a:normAutofit fontScale="100000"/>
+          </a:bodyPr>
+          <a:lstStyle xmlns:a="http://schemas.openxmlformats.org/drawingml/2006/main"/>
+          <a:p xmlns:a="http://schemas.openxmlformats.org/drawingml/2006/main">
+            <a:pPr algn="l">
+              <a:buNone/>
+              <a:defRPr sz="1350" b="1">
+                <a:solidFill>
+                  <a:srgbClr val="E45756"/>
+                </a:solidFill>
+                <a:latin typeface="Arial"/>
+                <a:ea typeface="Arial"/>
+                <a:cs typeface="Arial"/>
+              </a:defRPr>
+            </a:pPr>
+            <a:r>
+              <a:rPr sz="1350" b="1">
+                <a:solidFill>
+                  <a:srgbClr val="E45756"/>
+                </a:solidFill>
+                <a:latin typeface="Arial"/>
+                <a:ea typeface="Arial"/>
+                <a:cs typeface="Arial"/>
+              </a:rPr>
+              <a:t>TRANSLATES</a:t>
+            </a:r>
+          </a:p>
+        </p:txBody>
+      </p:sp>
+      <p:sp>
+        <p:nvSpPr>
+          <p:cNvPr id="8" name="">
+            <a:extLst xmlns:a="http://schemas.openxmlformats.org/drawingml/2006/main">
+              <a:ext uri="{FF2B5EF4-FFF2-40B4-BE49-F238E27FC236}">
+                <a16:creationId xmlns:a16="http://schemas.microsoft.com/office/drawing/2014/main" id="{655CF75D-5F23-4C7F-BE9C-764036D0B9E8}"/>
+              </a:ext>
+            </a:extLst>
+          </p:cNvPr>
+          <p:cNvSpPr>
+            <a:spLocks xmlns:a="http://schemas.openxmlformats.org/drawingml/2006/main" noGrp="1"/>
+          </p:cNvSpPr>
+          <p:nvPr/>
+        </p:nvSpPr>
+        <p:spPr>
+          <a:xfrm xmlns:a="http://schemas.openxmlformats.org/drawingml/2006/main">
+            <a:off x="3105150" y="1562100"/>
+            <a:ext cx="4762500" cy="419100"/>
+          </a:xfrm>
+          <a:prstGeom xmlns:a="http://schemas.openxmlformats.org/drawingml/2006/main" prst="rect">
+            <a:avLst/>
+          </a:prstGeom>
+          <a:noFill xmlns:a="http://schemas.openxmlformats.org/drawingml/2006/main"/>
+          <a:ln xmlns:a="http://schemas.openxmlformats.org/drawingml/2006/main" w="0">
+            <a:noFill/>
+            <a:prstDash val="solid"/>
+          </a:ln>
+        </p:spPr>
+        <p:txBody>
+          <a:bodyPr xmlns:a="http://schemas.openxmlformats.org/drawingml/2006/main" wrap="square" lIns="0" tIns="0" rIns="0" bIns="0" anchor="t">
+            <a:normAutofit fontScale="100000"/>
+          </a:bodyPr>
+          <a:lstStyle xmlns:a="http://schemas.openxmlformats.org/drawingml/2006/main"/>
+          <a:p xmlns:a="http://schemas.openxmlformats.org/drawingml/2006/main">
+            <a:pPr algn="l">
+              <a:buNone/>
+              <a:defRPr sz="1950" b="1">
+                <a:solidFill>
+                  <a:srgbClr val="273548"/>
+                </a:solidFill>
+                <a:latin typeface="Arial"/>
+                <a:ea typeface="Arial"/>
+                <a:cs typeface="Arial"/>
+              </a:defRPr>
+            </a:pPr>
+            <a:r>
+              <a:rPr sz="1950" b="1">
+                <a:solidFill>
+                  <a:srgbClr val="273548"/>
+                </a:solidFill>
+                <a:latin typeface="Arial"/>
+                <a:ea typeface="Arial"/>
+                <a:cs typeface="Arial"/>
+              </a:rPr>
+              <a:t>Clock change is small</a:t>
+            </a:r>
+          </a:p>
+        </p:txBody>
+      </p:sp>
+      <p:sp>
+        <p:nvSpPr>
+          <p:cNvPr id="9" name="">
+            <a:extLst xmlns:a="http://schemas.openxmlformats.org/drawingml/2006/main">
+              <a:ext uri="{FF2B5EF4-FFF2-40B4-BE49-F238E27FC236}">
+                <a16:creationId xmlns:a16="http://schemas.microsoft.com/office/drawing/2014/main" id="{3E0B76F2-4514-4DD8-934B-ABE42A34E950}"/>
+              </a:ext>
+            </a:extLst>
+          </p:cNvPr>
+          <p:cNvSpPr>
+            <a:spLocks xmlns:a="http://schemas.openxmlformats.org/drawingml/2006/main" noGrp="1"/>
+          </p:cNvSpPr>
+          <p:nvPr/>
+        </p:nvSpPr>
+        <p:spPr>
+          <a:xfrm xmlns:a="http://schemas.openxmlformats.org/drawingml/2006/main">
+            <a:off x="8096250" y="1581150"/>
+            <a:ext cx="3333750" cy="704850"/>
+          </a:xfrm>
+          <a:prstGeom xmlns:a="http://schemas.openxmlformats.org/drawingml/2006/main" prst="rect">
+            <a:avLst/>
+          </a:prstGeom>
+          <a:noFill xmlns:a="http://schemas.openxmlformats.org/drawingml/2006/main"/>
+          <a:ln xmlns:a="http://schemas.openxmlformats.org/drawingml/2006/main" w="0">
+            <a:noFill/>
+            <a:prstDash val="solid"/>
+          </a:ln>
+        </p:spPr>
+        <p:txBody>
+          <a:bodyPr xmlns:a="http://schemas.openxmlformats.org/drawingml/2006/main" wrap="square" lIns="0" tIns="0" rIns="0" bIns="0" anchor="t">
+            <a:normAutofit fontScale="100000"/>
+          </a:bodyPr>
+          <a:lstStyle xmlns:a="http://schemas.openxmlformats.org/drawingml/2006/main"/>
+          <a:p xmlns:a="http://schemas.openxmlformats.org/drawingml/2006/main">
+            <a:pPr algn="l">
+              <a:buNone/>
+              <a:defRPr sz="1425" b="0">
+                <a:solidFill>
+                  <a:srgbClr val="667384"/>
+                </a:solidFill>
+                <a:latin typeface="Arial"/>
+                <a:ea typeface="Arial"/>
+                <a:cs typeface="Arial"/>
+              </a:defRPr>
+            </a:pPr>
+            <a:r>
+              <a:rPr sz="1425" b="0">
+                <a:solidFill>
+                  <a:srgbClr val="667384"/>
+                </a:solidFill>
+                <a:latin typeface="Arial"/>
+                <a:ea typeface="Arial"/>
+                <a:cs typeface="Arial"/>
+              </a:rPr>
+              <a:t>+0.60% close vs +0.55% open</a:t>
+            </a:r>
+          </a:p>
+        </p:txBody>
+      </p:sp>
+      <p:sp>
+        <p:nvSpPr>
+          <p:cNvPr id="10" name="">
+            <a:extLst xmlns:a="http://schemas.openxmlformats.org/drawingml/2006/main">
+              <a:ext uri="{FF2B5EF4-FFF2-40B4-BE49-F238E27FC236}">
+                <a16:creationId xmlns:a16="http://schemas.microsoft.com/office/drawing/2014/main" id="{294777C3-6D2F-4277-840E-7E984FB4554D}"/>
+              </a:ext>
+            </a:extLst>
+          </p:cNvPr>
+          <p:cNvSpPr>
+            <a:spLocks xmlns:a="http://schemas.openxmlformats.org/drawingml/2006/main" noGrp="1"/>
+          </p:cNvSpPr>
+          <p:nvPr/>
+        </p:nvSpPr>
+        <p:spPr>
+          <a:xfrm xmlns:a="http://schemas.openxmlformats.org/drawingml/2006/main">
+            <a:off x="876300" y="2590800"/>
+            <a:ext cx="10553700" cy="9525"/>
+          </a:xfrm>
+          <a:prstGeom xmlns:a="http://schemas.openxmlformats.org/drawingml/2006/main" prst="rect">
+            <a:avLst/>
+          </a:prstGeom>
+          <a:solidFill xmlns:a="http://schemas.openxmlformats.org/drawingml/2006/main">
+            <a:srgbClr val="B8BCC4"/>
+          </a:solidFill>
+          <a:ln xmlns:a="http://schemas.openxmlformats.org/drawingml/2006/main" w="0">
+            <a:solidFill>
+              <a:srgbClr val="B8BCC4"/>
+            </a:solidFill>
+            <a:prstDash val="solid"/>
+          </a:ln>
+        </p:spPr>
+      </p:sp>
+      <p:sp>
+        <p:nvSpPr>
+          <p:cNvPr id="11" name="">
+            <a:extLst xmlns:a="http://schemas.openxmlformats.org/drawingml/2006/main">
+              <a:ext uri="{FF2B5EF4-FFF2-40B4-BE49-F238E27FC236}">
+                <a16:creationId xmlns:a16="http://schemas.microsoft.com/office/drawing/2014/main" id="{F894CF3F-AD63-423C-8F01-64C507896579}"/>
+              </a:ext>
+            </a:extLst>
+          </p:cNvPr>
+          <p:cNvSpPr>
+            <a:spLocks xmlns:a="http://schemas.openxmlformats.org/drawingml/2006/main" noGrp="1"/>
+          </p:cNvSpPr>
+          <p:nvPr/>
+        </p:nvSpPr>
+        <p:spPr>
+          <a:xfrm xmlns:a="http://schemas.openxmlformats.org/drawingml/2006/main">
+            <a:off x="552450" y="2800350"/>
+            <a:ext cx="95250" cy="895350"/>
+          </a:xfrm>
+          <a:prstGeom xmlns:a="http://schemas.openxmlformats.org/drawingml/2006/main" prst="rect">
+            <a:avLst/>
+          </a:prstGeom>
+          <a:solidFill xmlns:a="http://schemas.openxmlformats.org/drawingml/2006/main">
+            <a:srgbClr val="2A9D6F"/>
+          </a:solidFill>
+          <a:ln xmlns:a="http://schemas.openxmlformats.org/drawingml/2006/main" w="0">
+            <a:solidFill>
+              <a:srgbClr val="2A9D6F"/>
+            </a:solidFill>
+            <a:prstDash val="solid"/>
+          </a:ln>
+        </p:spPr>
+      </p:sp>
+      <p:sp>
+        <p:nvSpPr>
+          <p:cNvPr id="12" name="">
+            <a:extLst xmlns:a="http://schemas.openxmlformats.org/drawingml/2006/main">
+              <a:ext uri="{FF2B5EF4-FFF2-40B4-BE49-F238E27FC236}">
+                <a16:creationId xmlns:a16="http://schemas.microsoft.com/office/drawing/2014/main" id="{D3953D03-6A7A-4FEE-B242-02BF0319C169}"/>
+              </a:ext>
+            </a:extLst>
+          </p:cNvPr>
+          <p:cNvSpPr>
+            <a:spLocks xmlns:a="http://schemas.openxmlformats.org/drawingml/2006/main" noGrp="1"/>
+          </p:cNvSpPr>
+          <p:nvPr/>
+        </p:nvSpPr>
+        <p:spPr>
+          <a:xfrm xmlns:a="http://schemas.openxmlformats.org/drawingml/2006/main">
+            <a:off x="876300" y="2781300"/>
+            <a:ext cx="2095500" cy="285750"/>
+          </a:xfrm>
+          <a:prstGeom xmlns:a="http://schemas.openxmlformats.org/drawingml/2006/main" prst="rect">
+            <a:avLst/>
+          </a:prstGeom>
+          <a:noFill xmlns:a="http://schemas.openxmlformats.org/drawingml/2006/main"/>
+          <a:ln xmlns:a="http://schemas.openxmlformats.org/drawingml/2006/main" w="0">
+            <a:noFill/>
+            <a:prstDash val="solid"/>
+          </a:ln>
+        </p:spPr>
+        <p:txBody>
+          <a:bodyPr xmlns:a="http://schemas.openxmlformats.org/drawingml/2006/main" wrap="square" lIns="0" tIns="0" rIns="0" bIns="0" anchor="t">
+            <a:normAutofit fontScale="100000"/>
+          </a:bodyPr>
+          <a:lstStyle xmlns:a="http://schemas.openxmlformats.org/drawingml/2006/main"/>
+          <a:p xmlns:a="http://schemas.openxmlformats.org/drawingml/2006/main">
+            <a:pPr algn="l">
+              <a:buNone/>
+              <a:defRPr sz="1350" b="1">
+                <a:solidFill>
+                  <a:srgbClr val="2A9D6F"/>
+                </a:solidFill>
+                <a:latin typeface="Arial"/>
+                <a:ea typeface="Arial"/>
+                <a:cs typeface="Arial"/>
+              </a:defRPr>
+            </a:pPr>
+            <a:r>
+              <a:rPr sz="1350" b="1">
+                <a:solidFill>
+                  <a:srgbClr val="2A9D6F"/>
+                </a:solidFill>
+                <a:latin typeface="Arial"/>
+                <a:ea typeface="Arial"/>
+                <a:cs typeface="Arial"/>
+              </a:rPr>
+              <a:t>FAILS</a:t>
+            </a:r>
+          </a:p>
+        </p:txBody>
+      </p:sp>
+      <p:sp>
+        <p:nvSpPr>
+          <p:cNvPr id="13" name="">
+            <a:extLst xmlns:a="http://schemas.openxmlformats.org/drawingml/2006/main">
+              <a:ext uri="{FF2B5EF4-FFF2-40B4-BE49-F238E27FC236}">
+                <a16:creationId xmlns:a16="http://schemas.microsoft.com/office/drawing/2014/main" id="{52D1DBE8-EAF6-4492-89E7-5C97A3A6A395}"/>
+              </a:ext>
+            </a:extLst>
+          </p:cNvPr>
+          <p:cNvSpPr>
+            <a:spLocks xmlns:a="http://schemas.openxmlformats.org/drawingml/2006/main" noGrp="1"/>
+          </p:cNvSpPr>
+          <p:nvPr/>
+        </p:nvSpPr>
+        <p:spPr>
+          <a:xfrm xmlns:a="http://schemas.openxmlformats.org/drawingml/2006/main">
+            <a:off x="3105150" y="2762250"/>
+            <a:ext cx="4762500" cy="419100"/>
+          </a:xfrm>
+          <a:prstGeom xmlns:a="http://schemas.openxmlformats.org/drawingml/2006/main" prst="rect">
+            <a:avLst/>
+          </a:prstGeom>
+          <a:noFill xmlns:a="http://schemas.openxmlformats.org/drawingml/2006/main"/>
+          <a:ln xmlns:a="http://schemas.openxmlformats.org/drawingml/2006/main" w="0">
+            <a:noFill/>
+            <a:prstDash val="solid"/>
+          </a:ln>
+        </p:spPr>
+        <p:txBody>
+          <a:bodyPr xmlns:a="http://schemas.openxmlformats.org/drawingml/2006/main" wrap="square" lIns="0" tIns="0" rIns="0" bIns="0" anchor="t">
+            <a:normAutofit fontScale="100000"/>
+          </a:bodyPr>
+          <a:lstStyle xmlns:a="http://schemas.openxmlformats.org/drawingml/2006/main"/>
+          <a:p xmlns:a="http://schemas.openxmlformats.org/drawingml/2006/main">
+            <a:pPr algn="l">
+              <a:buNone/>
+              <a:defRPr sz="1950" b="1">
+                <a:solidFill>
+                  <a:srgbClr val="273548"/>
+                </a:solidFill>
+                <a:latin typeface="Arial"/>
+                <a:ea typeface="Arial"/>
+                <a:cs typeface="Arial"/>
+              </a:defRPr>
+            </a:pPr>
+            <a:r>
+              <a:rPr sz="1950" b="1">
+                <a:solidFill>
+                  <a:srgbClr val="273548"/>
+                </a:solidFill>
+                <a:latin typeface="Arial"/>
+                <a:ea typeface="Arial"/>
+                <a:cs typeface="Arial"/>
+              </a:rPr>
+              <a:t>Sector breadth</a:t>
+            </a:r>
+          </a:p>
+        </p:txBody>
+      </p:sp>
+      <p:sp>
+        <p:nvSpPr>
+          <p:cNvPr id="14" name="">
+            <a:extLst xmlns:a="http://schemas.openxmlformats.org/drawingml/2006/main">
+              <a:ext uri="{FF2B5EF4-FFF2-40B4-BE49-F238E27FC236}">
+                <a16:creationId xmlns:a16="http://schemas.microsoft.com/office/drawing/2014/main" id="{2CAF0156-C9E6-4210-8A8A-BFEDD044631B}"/>
+              </a:ext>
+            </a:extLst>
+          </p:cNvPr>
+          <p:cNvSpPr>
+            <a:spLocks xmlns:a="http://schemas.openxmlformats.org/drawingml/2006/main" noGrp="1"/>
+          </p:cNvSpPr>
+          <p:nvPr/>
+        </p:nvSpPr>
+        <p:spPr>
+          <a:xfrm xmlns:a="http://schemas.openxmlformats.org/drawingml/2006/main">
+            <a:off x="8096250" y="2781300"/>
+            <a:ext cx="3333750" cy="704850"/>
+          </a:xfrm>
+          <a:prstGeom xmlns:a="http://schemas.openxmlformats.org/drawingml/2006/main" prst="rect">
+            <a:avLst/>
+          </a:prstGeom>
+          <a:noFill xmlns:a="http://schemas.openxmlformats.org/drawingml/2006/main"/>
+          <a:ln xmlns:a="http://schemas.openxmlformats.org/drawingml/2006/main" w="0">
+            <a:noFill/>
+            <a:prstDash val="solid"/>
+          </a:ln>
+        </p:spPr>
+        <p:txBody>
+          <a:bodyPr xmlns:a="http://schemas.openxmlformats.org/drawingml/2006/main" wrap="square" lIns="0" tIns="0" rIns="0" bIns="0" anchor="t">
+            <a:normAutofit fontScale="100000"/>
+          </a:bodyPr>
+          <a:lstStyle xmlns:a="http://schemas.openxmlformats.org/drawingml/2006/main"/>
+          <a:p xmlns:a="http://schemas.openxmlformats.org/drawingml/2006/main">
+            <a:pPr algn="l">
+              <a:buNone/>
+              <a:defRPr sz="1425" b="0">
+                <a:solidFill>
+                  <a:srgbClr val="667384"/>
+                </a:solidFill>
+                <a:latin typeface="Arial"/>
+                <a:ea typeface="Arial"/>
+                <a:cs typeface="Arial"/>
+              </a:defRPr>
+            </a:pPr>
+            <a:r>
+              <a:rPr sz="1425" b="0">
+                <a:solidFill>
+                  <a:srgbClr val="667384"/>
+                </a:solidFill>
+                <a:latin typeface="Arial"/>
+                <a:ea typeface="Arial"/>
+                <a:cs typeface="Arial"/>
+              </a:rPr>
+              <a:t>6 of 11 versus 7 required</a:t>
+            </a:r>
+          </a:p>
+        </p:txBody>
+      </p:sp>
+      <p:sp>
+        <p:nvSpPr>
+          <p:cNvPr id="15" name="">
+            <a:extLst xmlns:a="http://schemas.openxmlformats.org/drawingml/2006/main">
+              <a:ext uri="{FF2B5EF4-FFF2-40B4-BE49-F238E27FC236}">
+                <a16:creationId xmlns:a16="http://schemas.microsoft.com/office/drawing/2014/main" id="{B126165D-5B65-44DB-99BD-15ED33F9B90F}"/>
+              </a:ext>
+            </a:extLst>
+          </p:cNvPr>
+          <p:cNvSpPr>
+            <a:spLocks xmlns:a="http://schemas.openxmlformats.org/drawingml/2006/main" noGrp="1"/>
+          </p:cNvSpPr>
+          <p:nvPr/>
+        </p:nvSpPr>
+        <p:spPr>
+          <a:xfrm xmlns:a="http://schemas.openxmlformats.org/drawingml/2006/main">
+            <a:off x="876300" y="3790950"/>
+            <a:ext cx="10553700" cy="9525"/>
+          </a:xfrm>
+          <a:prstGeom xmlns:a="http://schemas.openxmlformats.org/drawingml/2006/main" prst="rect">
+            <a:avLst/>
+          </a:prstGeom>
+          <a:solidFill xmlns:a="http://schemas.openxmlformats.org/drawingml/2006/main">
+            <a:srgbClr val="B8BCC4"/>
+          </a:solidFill>
+          <a:ln xmlns:a="http://schemas.openxmlformats.org/drawingml/2006/main" w="0">
+            <a:solidFill>
+              <a:srgbClr val="B8BCC4"/>
+            </a:solidFill>
+            <a:prstDash val="solid"/>
+          </a:ln>
+        </p:spPr>
+      </p:sp>
+      <p:sp>
+        <p:nvSpPr>
+          <p:cNvPr id="16" name="">
+            <a:extLst xmlns:a="http://schemas.openxmlformats.org/drawingml/2006/main">
+              <a:ext uri="{FF2B5EF4-FFF2-40B4-BE49-F238E27FC236}">
+                <a16:creationId xmlns:a16="http://schemas.microsoft.com/office/drawing/2014/main" id="{7DC0911F-9587-4B19-84C6-11974DB2A91C}"/>
+              </a:ext>
+            </a:extLst>
+          </p:cNvPr>
+          <p:cNvSpPr>
+            <a:spLocks xmlns:a="http://schemas.openxmlformats.org/drawingml/2006/main" noGrp="1"/>
+          </p:cNvSpPr>
+          <p:nvPr/>
+        </p:nvSpPr>
+        <p:spPr>
+          <a:xfrm xmlns:a="http://schemas.openxmlformats.org/drawingml/2006/main">
+            <a:off x="552450" y="4000500"/>
+            <a:ext cx="95250" cy="895350"/>
+          </a:xfrm>
+          <a:prstGeom xmlns:a="http://schemas.openxmlformats.org/drawingml/2006/main" prst="rect">
+            <a:avLst/>
+          </a:prstGeom>
+          <a:solidFill xmlns:a="http://schemas.openxmlformats.org/drawingml/2006/main">
+            <a:srgbClr val="3D8DFF"/>
+          </a:solidFill>
+          <a:ln xmlns:a="http://schemas.openxmlformats.org/drawingml/2006/main" w="0">
+            <a:solidFill>
+              <a:srgbClr val="3D8DFF"/>
+            </a:solidFill>
+            <a:prstDash val="solid"/>
+          </a:ln>
+        </p:spPr>
+      </p:sp>
+      <p:sp>
+        <p:nvSpPr>
+          <p:cNvPr id="17" name="">
+            <a:extLst xmlns:a="http://schemas.openxmlformats.org/drawingml/2006/main">
+              <a:ext uri="{FF2B5EF4-FFF2-40B4-BE49-F238E27FC236}">
+                <a16:creationId xmlns:a16="http://schemas.microsoft.com/office/drawing/2014/main" id="{DAB53991-F50C-4B95-9F23-DAE86BCEDF3B}"/>
+              </a:ext>
+            </a:extLst>
+          </p:cNvPr>
+          <p:cNvSpPr>
+            <a:spLocks xmlns:a="http://schemas.openxmlformats.org/drawingml/2006/main" noGrp="1"/>
+          </p:cNvSpPr>
+          <p:nvPr/>
+        </p:nvSpPr>
+        <p:spPr>
+          <a:xfrm xmlns:a="http://schemas.openxmlformats.org/drawingml/2006/main">
+            <a:off x="876300" y="3981450"/>
+            <a:ext cx="2095500" cy="285750"/>
+          </a:xfrm>
+          <a:prstGeom xmlns:a="http://schemas.openxmlformats.org/drawingml/2006/main" prst="rect">
+            <a:avLst/>
+          </a:prstGeom>
+          <a:noFill xmlns:a="http://schemas.openxmlformats.org/drawingml/2006/main"/>
+          <a:ln xmlns:a="http://schemas.openxmlformats.org/drawingml/2006/main" w="0">
+            <a:noFill/>
+            <a:prstDash val="solid"/>
+          </a:ln>
+        </p:spPr>
+        <p:txBody>
+          <a:bodyPr xmlns:a="http://schemas.openxmlformats.org/drawingml/2006/main" wrap="square" lIns="0" tIns="0" rIns="0" bIns="0" anchor="t">
+            <a:normAutofit fontScale="100000"/>
+          </a:bodyPr>
+          <a:lstStyle xmlns:a="http://schemas.openxmlformats.org/drawingml/2006/main"/>
+          <a:p xmlns:a="http://schemas.openxmlformats.org/drawingml/2006/main">
+            <a:pPr algn="l">
+              <a:buNone/>
+              <a:defRPr sz="1350" b="1">
+                <a:solidFill>
+                  <a:srgbClr val="3D8DFF"/>
+                </a:solidFill>
+                <a:latin typeface="Arial"/>
+                <a:ea typeface="Arial"/>
+                <a:cs typeface="Arial"/>
+              </a:defRPr>
+            </a:pPr>
+            <a:r>
+              <a:rPr sz="1350" b="1">
+                <a:solidFill>
+                  <a:srgbClr val="3D8DFF"/>
+                </a:solidFill>
+                <a:latin typeface="Arial"/>
+                <a:ea typeface="Arial"/>
+                <a:cs typeface="Arial"/>
+              </a:rPr>
+              <a:t>CONFLICTS</a:t>
+            </a:r>
+          </a:p>
+        </p:txBody>
+      </p:sp>
+      <p:sp>
+        <p:nvSpPr>
+          <p:cNvPr id="18" name="">
+            <a:extLst xmlns:a="http://schemas.openxmlformats.org/drawingml/2006/main">
+              <a:ext uri="{FF2B5EF4-FFF2-40B4-BE49-F238E27FC236}">
+                <a16:creationId xmlns:a16="http://schemas.microsoft.com/office/drawing/2014/main" id="{5DFACF3B-08BC-4148-A40A-2004DFB81D71}"/>
+              </a:ext>
+            </a:extLst>
+          </p:cNvPr>
+          <p:cNvSpPr>
+            <a:spLocks xmlns:a="http://schemas.openxmlformats.org/drawingml/2006/main" noGrp="1"/>
+          </p:cNvSpPr>
+          <p:nvPr/>
+        </p:nvSpPr>
+        <p:spPr>
+          <a:xfrm xmlns:a="http://schemas.openxmlformats.org/drawingml/2006/main">
+            <a:off x="3105150" y="3962400"/>
+            <a:ext cx="4762500" cy="419100"/>
+          </a:xfrm>
+          <a:prstGeom xmlns:a="http://schemas.openxmlformats.org/drawingml/2006/main" prst="rect">
+            <a:avLst/>
+          </a:prstGeom>
+          <a:noFill xmlns:a="http://schemas.openxmlformats.org/drawingml/2006/main"/>
+          <a:ln xmlns:a="http://schemas.openxmlformats.org/drawingml/2006/main" w="0">
+            <a:noFill/>
+            <a:prstDash val="solid"/>
+          </a:ln>
+        </p:spPr>
+        <p:txBody>
+          <a:bodyPr xmlns:a="http://schemas.openxmlformats.org/drawingml/2006/main" wrap="square" lIns="0" tIns="0" rIns="0" bIns="0" anchor="t">
+            <a:normAutofit fontScale="100000"/>
+          </a:bodyPr>
+          <a:lstStyle xmlns:a="http://schemas.openxmlformats.org/drawingml/2006/main"/>
+          <a:p xmlns:a="http://schemas.openxmlformats.org/drawingml/2006/main">
+            <a:pPr algn="l">
+              <a:buNone/>
+              <a:defRPr sz="1950" b="1">
+                <a:solidFill>
+                  <a:srgbClr val="273548"/>
+                </a:solidFill>
+                <a:latin typeface="Arial"/>
+                <a:ea typeface="Arial"/>
+                <a:cs typeface="Arial"/>
+              </a:defRPr>
+            </a:pPr>
+            <a:r>
+              <a:rPr sz="1950" b="1">
+                <a:solidFill>
+                  <a:srgbClr val="273548"/>
+                </a:solidFill>
+                <a:latin typeface="Arial"/>
+                <a:ea typeface="Arial"/>
+                <a:cs typeface="Arial"/>
+              </a:rPr>
+              <a:t>Event weighting</a:t>
+            </a:r>
+          </a:p>
+        </p:txBody>
+      </p:sp>
+      <p:sp>
+        <p:nvSpPr>
+          <p:cNvPr id="19" name="">
+            <a:extLst xmlns:a="http://schemas.openxmlformats.org/drawingml/2006/main">
+              <a:ext uri="{FF2B5EF4-FFF2-40B4-BE49-F238E27FC236}">
+                <a16:creationId xmlns:a16="http://schemas.microsoft.com/office/drawing/2014/main" id="{C907D23B-44A2-43C4-9658-4C6E38430BF5}"/>
+              </a:ext>
+            </a:extLst>
+          </p:cNvPr>
+          <p:cNvSpPr>
+            <a:spLocks xmlns:a="http://schemas.openxmlformats.org/drawingml/2006/main" noGrp="1"/>
+          </p:cNvSpPr>
+          <p:nvPr/>
+        </p:nvSpPr>
+        <p:spPr>
+          <a:xfrm xmlns:a="http://schemas.openxmlformats.org/drawingml/2006/main">
+            <a:off x="8096250" y="3981450"/>
+            <a:ext cx="3333750" cy="704850"/>
+          </a:xfrm>
+          <a:prstGeom xmlns:a="http://schemas.openxmlformats.org/drawingml/2006/main" prst="rect">
+            <a:avLst/>
+          </a:prstGeom>
+          <a:noFill xmlns:a="http://schemas.openxmlformats.org/drawingml/2006/main"/>
+          <a:ln xmlns:a="http://schemas.openxmlformats.org/drawingml/2006/main" w="0">
+            <a:noFill/>
+            <a:prstDash val="solid"/>
+          </a:ln>
+        </p:spPr>
+        <p:txBody>
+          <a:bodyPr xmlns:a="http://schemas.openxmlformats.org/drawingml/2006/main" wrap="square" lIns="0" tIns="0" rIns="0" bIns="0" anchor="t">
+            <a:normAutofit fontScale="100000"/>
+          </a:bodyPr>
+          <a:lstStyle xmlns:a="http://schemas.openxmlformats.org/drawingml/2006/main"/>
+          <a:p xmlns:a="http://schemas.openxmlformats.org/drawingml/2006/main">
+            <a:pPr algn="l">
+              <a:buNone/>
+              <a:defRPr sz="1425" b="0">
+                <a:solidFill>
+                  <a:srgbClr val="667384"/>
+                </a:solidFill>
+                <a:latin typeface="Arial"/>
+                <a:ea typeface="Arial"/>
+                <a:cs typeface="Arial"/>
+              </a:defRPr>
+            </a:pPr>
+            <a:r>
+              <a:rPr sz="1425" b="0">
+                <a:solidFill>
+                  <a:srgbClr val="667384"/>
+                </a:solidFill>
+                <a:latin typeface="Arial"/>
+                <a:ea typeface="Arial"/>
+                <a:cs typeface="Arial"/>
+              </a:rPr>
+              <a:t>−25.1 bp versus drift</a:t>
+            </a:r>
+          </a:p>
+        </p:txBody>
+      </p:sp>
+      <p:sp>
+        <p:nvSpPr>
+          <p:cNvPr id="20" name="">
+            <a:extLst xmlns:a="http://schemas.openxmlformats.org/drawingml/2006/main">
+              <a:ext uri="{FF2B5EF4-FFF2-40B4-BE49-F238E27FC236}">
+                <a16:creationId xmlns:a16="http://schemas.microsoft.com/office/drawing/2014/main" id="{8042DFC4-7E22-47E6-8C53-1E63A8411C3A}"/>
+              </a:ext>
+            </a:extLst>
+          </p:cNvPr>
+          <p:cNvSpPr>
+            <a:spLocks xmlns:a="http://schemas.openxmlformats.org/drawingml/2006/main" noGrp="1"/>
+          </p:cNvSpPr>
+          <p:nvPr/>
+        </p:nvSpPr>
+        <p:spPr>
+          <a:xfrm xmlns:a="http://schemas.openxmlformats.org/drawingml/2006/main">
+            <a:off x="876300" y="4991100"/>
+            <a:ext cx="10553700" cy="9525"/>
+          </a:xfrm>
+          <a:prstGeom xmlns:a="http://schemas.openxmlformats.org/drawingml/2006/main" prst="rect">
+            <a:avLst/>
+          </a:prstGeom>
+          <a:solidFill xmlns:a="http://schemas.openxmlformats.org/drawingml/2006/main">
+            <a:srgbClr val="B8BCC4"/>
+          </a:solidFill>
+          <a:ln xmlns:a="http://schemas.openxmlformats.org/drawingml/2006/main" w="0">
+            <a:solidFill>
+              <a:srgbClr val="B8BCC4"/>
+            </a:solidFill>
+            <a:prstDash val="solid"/>
+          </a:ln>
+        </p:spPr>
+      </p:sp>
+      <p:sp>
+        <p:nvSpPr>
+          <p:cNvPr id="21" name="">
+            <a:extLst xmlns:a="http://schemas.openxmlformats.org/drawingml/2006/main">
+              <a:ext uri="{FF2B5EF4-FFF2-40B4-BE49-F238E27FC236}">
+                <a16:creationId xmlns:a16="http://schemas.microsoft.com/office/drawing/2014/main" id="{F4066D54-676B-4D0F-93B6-2152B57E41AF}"/>
+              </a:ext>
+            </a:extLst>
+          </p:cNvPr>
+          <p:cNvSpPr>
+            <a:spLocks xmlns:a="http://schemas.openxmlformats.org/drawingml/2006/main" noGrp="1"/>
+          </p:cNvSpPr>
+          <p:nvPr/>
+        </p:nvSpPr>
+        <p:spPr>
+          <a:xfrm xmlns:a="http://schemas.openxmlformats.org/drawingml/2006/main">
+            <a:off x="552450" y="5353050"/>
+            <a:ext cx="10877550" cy="781050"/>
+          </a:xfrm>
+          <a:prstGeom xmlns:a="http://schemas.openxmlformats.org/drawingml/2006/main" prst="rect">
+            <a:avLst/>
+          </a:prstGeom>
+          <a:solidFill xmlns:a="http://schemas.openxmlformats.org/drawingml/2006/main">
+            <a:srgbClr val="EAF5FB"/>
+          </a:solidFill>
+          <a:ln xmlns:a="http://schemas.openxmlformats.org/drawingml/2006/main" w="0">
+            <a:solidFill>
+              <a:srgbClr val="EAF5FB"/>
+            </a:solidFill>
+            <a:prstDash val="solid"/>
+          </a:ln>
+        </p:spPr>
+      </p:sp>
+      <p:sp>
+        <p:nvSpPr>
+          <p:cNvPr id="22" name="">
+            <a:extLst xmlns:a="http://schemas.openxmlformats.org/drawingml/2006/main">
+              <a:ext uri="{FF2B5EF4-FFF2-40B4-BE49-F238E27FC236}">
+                <a16:creationId xmlns:a16="http://schemas.microsoft.com/office/drawing/2014/main" id="{6E4C79AE-EB98-4B5B-B3D3-11ED0D4C729B}"/>
+              </a:ext>
+            </a:extLst>
+          </p:cNvPr>
+          <p:cNvSpPr>
+            <a:spLocks xmlns:a="http://schemas.openxmlformats.org/drawingml/2006/main" noGrp="1"/>
+          </p:cNvSpPr>
+          <p:nvPr/>
+        </p:nvSpPr>
+        <p:spPr>
+          <a:xfrm xmlns:a="http://schemas.openxmlformats.org/drawingml/2006/main">
+            <a:off x="781050" y="5524500"/>
+            <a:ext cx="2476500" cy="323850"/>
+          </a:xfrm>
+          <a:prstGeom xmlns:a="http://schemas.openxmlformats.org/drawingml/2006/main" prst="rect">
+            <a:avLst/>
+          </a:prstGeom>
+          <a:noFill xmlns:a="http://schemas.openxmlformats.org/drawingml/2006/main"/>
+          <a:ln xmlns:a="http://schemas.openxmlformats.org/drawingml/2006/main" w="0">
+            <a:noFill/>
+            <a:prstDash val="solid"/>
+          </a:ln>
+        </p:spPr>
+        <p:txBody>
+          <a:bodyPr xmlns:a="http://schemas.openxmlformats.org/drawingml/2006/main" wrap="square" lIns="0" tIns="0" rIns="0" bIns="0" anchor="t">
+            <a:normAutofit fontScale="100000"/>
+          </a:bodyPr>
+          <a:lstStyle xmlns:a="http://schemas.openxmlformats.org/drawingml/2006/main"/>
+          <a:p xmlns:a="http://schemas.openxmlformats.org/drawingml/2006/main">
+            <a:pPr algn="l">
+              <a:buNone/>
+              <a:defRPr sz="1725" b="1">
+                <a:solidFill>
+                  <a:srgbClr val="3D8DFF"/>
+                </a:solidFill>
+                <a:latin typeface="Arial"/>
+                <a:ea typeface="Arial"/>
+                <a:cs typeface="Arial"/>
+              </a:defRPr>
+            </a:pPr>
+            <a:r>
+              <a:rPr sz="1725" b="1">
+                <a:solidFill>
+                  <a:srgbClr val="3D8DFF"/>
+                </a:solidFill>
+                <a:latin typeface="Arial"/>
+                <a:ea typeface="Arial"/>
+                <a:cs typeface="Arial"/>
+              </a:rPr>
+              <a:t>STOP OOS</a:t>
+            </a:r>
+          </a:p>
+        </p:txBody>
+      </p:sp>
+      <p:sp>
+        <p:nvSpPr>
+          <p:cNvPr id="23" name="">
+            <a:extLst xmlns:a="http://schemas.openxmlformats.org/drawingml/2006/main">
+              <a:ext uri="{FF2B5EF4-FFF2-40B4-BE49-F238E27FC236}">
+                <a16:creationId xmlns:a16="http://schemas.microsoft.com/office/drawing/2014/main" id="{3320D60E-6067-4236-80ED-A898A863026E}"/>
+              </a:ext>
+            </a:extLst>
+          </p:cNvPr>
+          <p:cNvSpPr>
+            <a:spLocks xmlns:a="http://schemas.openxmlformats.org/drawingml/2006/main" noGrp="1"/>
+          </p:cNvSpPr>
+          <p:nvPr/>
+        </p:nvSpPr>
+        <p:spPr>
+          <a:xfrm xmlns:a="http://schemas.openxmlformats.org/drawingml/2006/main">
+            <a:off x="3333750" y="5486400"/>
+            <a:ext cx="7810500" cy="419100"/>
+          </a:xfrm>
+          <a:prstGeom xmlns:a="http://schemas.openxmlformats.org/drawingml/2006/main" prst="rect">
+            <a:avLst/>
+          </a:prstGeom>
+          <a:noFill xmlns:a="http://schemas.openxmlformats.org/drawingml/2006/main"/>
+          <a:ln xmlns:a="http://schemas.openxmlformats.org/drawingml/2006/main" w="0">
+            <a:noFill/>
+            <a:prstDash val="solid"/>
+          </a:ln>
+        </p:spPr>
+        <p:txBody>
+          <a:bodyPr xmlns:a="http://schemas.openxmlformats.org/drawingml/2006/main" wrap="square" lIns="0" tIns="0" rIns="0" bIns="0" anchor="t">
+            <a:normAutofit fontScale="79031"/>
+          </a:bodyPr>
+          <a:lstStyle xmlns:a="http://schemas.openxmlformats.org/drawingml/2006/main"/>
+          <a:p xmlns:a="http://schemas.openxmlformats.org/drawingml/2006/main">
+            <a:pPr algn="l">
+              <a:buNone/>
+              <a:defRPr sz="1800" b="1">
+                <a:solidFill>
+                  <a:srgbClr val="273548"/>
+                </a:solidFill>
+                <a:latin typeface="Arial"/>
+                <a:ea typeface="Arial"/>
+                <a:cs typeface="Arial"/>
+              </a:defRPr>
+            </a:pPr>
+            <a:r>
+              <a:rPr sz="1800" b="1">
+                <a:solidFill>
+                  <a:srgbClr val="273548"/>
+                </a:solidFill>
+                <a:latin typeface="Arial"/>
+                <a:ea typeface="Arial"/>
+                <a:cs typeface="Arial"/>
+              </a:rPr>
+              <a:t>Do not tune percentile, ER cutoff, hold, overlap, costs, or universe. Post-2023 stays sealed.</a:t>
             </a:r>
           </a:p>
         </p:txBody>

--- a/operator_hypothesis_lab/presentations/return_geometry_edge_promotion_huddle.pptx
+++ b/operator_hypothesis_lab/presentations/return_geometry_edge_promotion_huddle.pptx
@@ -2,47 +2,58 @@
 <file path=ppt/presentation.xml><?xml version="1.0" encoding="utf-8"?>
 <p:presentation xmlns:p="http://schemas.openxmlformats.org/presentationml/2006/main">
   <p:sldMasterIdLst>
-    <p:sldMasterId xmlns:r="http://schemas.openxmlformats.org/officeDocument/2006/relationships" id="2147483648" r:id="R95976afe13bb461a"/>
+    <p:sldMasterId xmlns:r="http://schemas.openxmlformats.org/officeDocument/2006/relationships" id="2147483648" r:id="R01b46a81d8464d84"/>
   </p:sldMasterIdLst>
   <p:notesMasterIdLst>
-    <p:notesMasterId xmlns:r="http://schemas.openxmlformats.org/officeDocument/2006/relationships" r:id="R639c6a3fcb114996"/>
+    <p:notesMasterId xmlns:r="http://schemas.openxmlformats.org/officeDocument/2006/relationships" r:id="R1ce49536a6594c03"/>
   </p:notesMasterIdLst>
   <p:sldIdLst>
-    <p:sldId xmlns:r="http://schemas.openxmlformats.org/officeDocument/2006/relationships" id="256" r:id="R0c1edcd7caf44ffc"/>
-    <p:sldId xmlns:r="http://schemas.openxmlformats.org/officeDocument/2006/relationships" id="257" r:id="R1543be29308a4945"/>
-    <p:sldId xmlns:r="http://schemas.openxmlformats.org/officeDocument/2006/relationships" id="258" r:id="Rff22a96740fe4fe5"/>
-    <p:sldId xmlns:r="http://schemas.openxmlformats.org/officeDocument/2006/relationships" id="259" r:id="R8b74feabbc5f4eee"/>
-    <p:sldId xmlns:r="http://schemas.openxmlformats.org/officeDocument/2006/relationships" id="260" r:id="R9437ef88683046d7"/>
-    <p:sldId xmlns:r="http://schemas.openxmlformats.org/officeDocument/2006/relationships" id="261" r:id="R392e60eca5a4466e"/>
-    <p:sldId xmlns:r="http://schemas.openxmlformats.org/officeDocument/2006/relationships" id="262" r:id="Rf96580309b4e4b15"/>
-    <p:sldId xmlns:r="http://schemas.openxmlformats.org/officeDocument/2006/relationships" id="263" r:id="Rdbe7ec3c331f4212"/>
-    <p:sldId xmlns:r="http://schemas.openxmlformats.org/officeDocument/2006/relationships" id="264" r:id="R3d09c89510a449be"/>
-    <p:sldId xmlns:r="http://schemas.openxmlformats.org/officeDocument/2006/relationships" id="265" r:id="R49cf645f4f1b4e30"/>
-    <p:sldId xmlns:r="http://schemas.openxmlformats.org/officeDocument/2006/relationships" id="266" r:id="R5bf7875ce4814b3f"/>
-    <p:sldId xmlns:r="http://schemas.openxmlformats.org/officeDocument/2006/relationships" id="267" r:id="R28a0b01ce5e2413b"/>
-    <p:sldId xmlns:r="http://schemas.openxmlformats.org/officeDocument/2006/relationships" id="268" r:id="Raa93e334f0cd4d5e"/>
-    <p:sldId xmlns:r="http://schemas.openxmlformats.org/officeDocument/2006/relationships" id="269" r:id="Ra649fa3c9bd7440d"/>
-    <p:sldId xmlns:r="http://schemas.openxmlformats.org/officeDocument/2006/relationships" id="270" r:id="Rb01ceecb50fa414a"/>
-    <p:sldId xmlns:r="http://schemas.openxmlformats.org/officeDocument/2006/relationships" id="271" r:id="Rd7b6db20914f4c08"/>
-    <p:sldId xmlns:r="http://schemas.openxmlformats.org/officeDocument/2006/relationships" id="272" r:id="R8f3db03ceaf540f1"/>
-    <p:sldId xmlns:r="http://schemas.openxmlformats.org/officeDocument/2006/relationships" id="273" r:id="R039c2f834ba645d7"/>
-    <p:sldId xmlns:r="http://schemas.openxmlformats.org/officeDocument/2006/relationships" id="274" r:id="Rcccaba28fbcd41a8"/>
-    <p:sldId xmlns:r="http://schemas.openxmlformats.org/officeDocument/2006/relationships" id="275" r:id="R14235c5ac1e1427f"/>
-    <p:sldId xmlns:r="http://schemas.openxmlformats.org/officeDocument/2006/relationships" id="276" r:id="R24b60410c4714422"/>
-    <p:sldId xmlns:r="http://schemas.openxmlformats.org/officeDocument/2006/relationships" id="277" r:id="R3f4d1e50795c497b"/>
-    <p:sldId xmlns:r="http://schemas.openxmlformats.org/officeDocument/2006/relationships" id="278" r:id="Rec82b0b465da4277"/>
-    <p:sldId xmlns:r="http://schemas.openxmlformats.org/officeDocument/2006/relationships" id="279" r:id="R4129ef043eae42f2"/>
-    <p:sldId xmlns:r="http://schemas.openxmlformats.org/officeDocument/2006/relationships" id="280" r:id="R88c123f9a5834bfe"/>
-    <p:sldId xmlns:r="http://schemas.openxmlformats.org/officeDocument/2006/relationships" id="281" r:id="R63c9466481964111"/>
-    <p:sldId xmlns:r="http://schemas.openxmlformats.org/officeDocument/2006/relationships" id="282" r:id="Re81d881951094306"/>
-    <p:sldId xmlns:r="http://schemas.openxmlformats.org/officeDocument/2006/relationships" id="283" r:id="Ra183135a27bb4525"/>
-    <p:sldId xmlns:r="http://schemas.openxmlformats.org/officeDocument/2006/relationships" id="284" r:id="Rdcd8c405057a4340"/>
-    <p:sldId xmlns:r="http://schemas.openxmlformats.org/officeDocument/2006/relationships" id="285" r:id="Re926de797d1e4f84"/>
-    <p:sldId xmlns:r="http://schemas.openxmlformats.org/officeDocument/2006/relationships" id="286" r:id="Rab54d7ff38c340d7"/>
-    <p:sldId xmlns:r="http://schemas.openxmlformats.org/officeDocument/2006/relationships" id="287" r:id="R20bbc92c81484bd2"/>
-    <p:sldId xmlns:r="http://schemas.openxmlformats.org/officeDocument/2006/relationships" id="288" r:id="R96b90eb436b64ede"/>
-    <p:sldId xmlns:r="http://schemas.openxmlformats.org/officeDocument/2006/relationships" id="289" r:id="R729a3d72be8646ff"/>
-    <p:sldId xmlns:r="http://schemas.openxmlformats.org/officeDocument/2006/relationships" id="290" r:id="R5e05562e4a2a4a1b"/>
+    <p:sldId xmlns:r="http://schemas.openxmlformats.org/officeDocument/2006/relationships" id="256" r:id="Rb0a7fe2c263b44d1"/>
+    <p:sldId xmlns:r="http://schemas.openxmlformats.org/officeDocument/2006/relationships" id="257" r:id="R317b15516a644a47"/>
+    <p:sldId xmlns:r="http://schemas.openxmlformats.org/officeDocument/2006/relationships" id="258" r:id="Rf797d5b47a6a46a0"/>
+    <p:sldId xmlns:r="http://schemas.openxmlformats.org/officeDocument/2006/relationships" id="259" r:id="Re09a8be565564ce4"/>
+    <p:sldId xmlns:r="http://schemas.openxmlformats.org/officeDocument/2006/relationships" id="260" r:id="R5f3f17c635a24290"/>
+    <p:sldId xmlns:r="http://schemas.openxmlformats.org/officeDocument/2006/relationships" id="261" r:id="Rc8653e4bd1794a05"/>
+    <p:sldId xmlns:r="http://schemas.openxmlformats.org/officeDocument/2006/relationships" id="262" r:id="R1fffa903f9c1480f"/>
+    <p:sldId xmlns:r="http://schemas.openxmlformats.org/officeDocument/2006/relationships" id="263" r:id="R002e38a048604eb5"/>
+    <p:sldId xmlns:r="http://schemas.openxmlformats.org/officeDocument/2006/relationships" id="264" r:id="Rdf71dc14be8741b4"/>
+    <p:sldId xmlns:r="http://schemas.openxmlformats.org/officeDocument/2006/relationships" id="265" r:id="R3b5697d00ac0429b"/>
+    <p:sldId xmlns:r="http://schemas.openxmlformats.org/officeDocument/2006/relationships" id="266" r:id="R0f6fe8621cfb43c1"/>
+    <p:sldId xmlns:r="http://schemas.openxmlformats.org/officeDocument/2006/relationships" id="267" r:id="R7646860a323a46f3"/>
+    <p:sldId xmlns:r="http://schemas.openxmlformats.org/officeDocument/2006/relationships" id="268" r:id="R7af5a80b0bf94dc6"/>
+    <p:sldId xmlns:r="http://schemas.openxmlformats.org/officeDocument/2006/relationships" id="269" r:id="R9f959e08b7464885"/>
+    <p:sldId xmlns:r="http://schemas.openxmlformats.org/officeDocument/2006/relationships" id="270" r:id="R213ac917d3d24a1e"/>
+    <p:sldId xmlns:r="http://schemas.openxmlformats.org/officeDocument/2006/relationships" id="271" r:id="R740a774008b94908"/>
+    <p:sldId xmlns:r="http://schemas.openxmlformats.org/officeDocument/2006/relationships" id="272" r:id="R367280e8ed05453c"/>
+    <p:sldId xmlns:r="http://schemas.openxmlformats.org/officeDocument/2006/relationships" id="273" r:id="Ra76f472f33684436"/>
+    <p:sldId xmlns:r="http://schemas.openxmlformats.org/officeDocument/2006/relationships" id="274" r:id="Rce2b9e5c65884170"/>
+    <p:sldId xmlns:r="http://schemas.openxmlformats.org/officeDocument/2006/relationships" id="275" r:id="R31952d6ef0ce4a7e"/>
+    <p:sldId xmlns:r="http://schemas.openxmlformats.org/officeDocument/2006/relationships" id="276" r:id="R45189dccaabb4ee3"/>
+    <p:sldId xmlns:r="http://schemas.openxmlformats.org/officeDocument/2006/relationships" id="277" r:id="R124329192d1d430c"/>
+    <p:sldId xmlns:r="http://schemas.openxmlformats.org/officeDocument/2006/relationships" id="278" r:id="R64e40908d5a8419c"/>
+    <p:sldId xmlns:r="http://schemas.openxmlformats.org/officeDocument/2006/relationships" id="279" r:id="Rabc20cb2e8184e04"/>
+    <p:sldId xmlns:r="http://schemas.openxmlformats.org/officeDocument/2006/relationships" id="280" r:id="R8e18bcb385b74484"/>
+    <p:sldId xmlns:r="http://schemas.openxmlformats.org/officeDocument/2006/relationships" id="281" r:id="Ra1903b11afe64ed0"/>
+    <p:sldId xmlns:r="http://schemas.openxmlformats.org/officeDocument/2006/relationships" id="282" r:id="Rdb464dcf78ff4efc"/>
+    <p:sldId xmlns:r="http://schemas.openxmlformats.org/officeDocument/2006/relationships" id="283" r:id="Rd04332c98d434417"/>
+    <p:sldId xmlns:r="http://schemas.openxmlformats.org/officeDocument/2006/relationships" id="284" r:id="R5d27c05aed234fcb"/>
+    <p:sldId xmlns:r="http://schemas.openxmlformats.org/officeDocument/2006/relationships" id="285" r:id="Ra1ab1b18b2f44c00"/>
+    <p:sldId xmlns:r="http://schemas.openxmlformats.org/officeDocument/2006/relationships" id="286" r:id="R181ed53ac7094e71"/>
+    <p:sldId xmlns:r="http://schemas.openxmlformats.org/officeDocument/2006/relationships" id="287" r:id="R5a228fa072184e4f"/>
+    <p:sldId xmlns:r="http://schemas.openxmlformats.org/officeDocument/2006/relationships" id="288" r:id="R342443e31ece4afe"/>
+    <p:sldId xmlns:r="http://schemas.openxmlformats.org/officeDocument/2006/relationships" id="289" r:id="Rc859c83aa23246e3"/>
+    <p:sldId xmlns:r="http://schemas.openxmlformats.org/officeDocument/2006/relationships" id="290" r:id="Re28f2830d73647b6"/>
+    <p:sldId xmlns:r="http://schemas.openxmlformats.org/officeDocument/2006/relationships" id="291" r:id="Re7bd9c590b2a4c90"/>
+    <p:sldId xmlns:r="http://schemas.openxmlformats.org/officeDocument/2006/relationships" id="292" r:id="R6a9cfcc6f6fa454d"/>
+    <p:sldId xmlns:r="http://schemas.openxmlformats.org/officeDocument/2006/relationships" id="293" r:id="R272a2e56d63b4bf7"/>
+    <p:sldId xmlns:r="http://schemas.openxmlformats.org/officeDocument/2006/relationships" id="294" r:id="Re8eba6f25a59474d"/>
+    <p:sldId xmlns:r="http://schemas.openxmlformats.org/officeDocument/2006/relationships" id="295" r:id="R5ffa6434b6f44fd3"/>
+    <p:sldId xmlns:r="http://schemas.openxmlformats.org/officeDocument/2006/relationships" id="296" r:id="R41d0c2b9fae04bd3"/>
+    <p:sldId xmlns:r="http://schemas.openxmlformats.org/officeDocument/2006/relationships" id="297" r:id="R724605aaf7094b52"/>
+    <p:sldId xmlns:r="http://schemas.openxmlformats.org/officeDocument/2006/relationships" id="298" r:id="R276a10858cc7420d"/>
+    <p:sldId xmlns:r="http://schemas.openxmlformats.org/officeDocument/2006/relationships" id="299" r:id="R27c3765e3bd24a2f"/>
+    <p:sldId xmlns:r="http://schemas.openxmlformats.org/officeDocument/2006/relationships" id="300" r:id="R52b8ccc6a56645a7"/>
+    <p:sldId xmlns:r="http://schemas.openxmlformats.org/officeDocument/2006/relationships" id="301" r:id="R7bd1dd9d31f7486a"/>
   </p:sldIdLst>
   <p:sldSz cx="12192000" cy="6858000"/>
   <p:notesSz cx="6858000" cy="9144000"/>
@@ -3506,6 +3517,426 @@
 </p:notes>
 </file>
 
+<file path=ppt/notesSlides/notesSlide36.xml><?xml version="1.0" encoding="utf-8"?>
+<p:notes xmlns:p="http://schemas.openxmlformats.org/presentationml/2006/main">
+  <p:cSld>
+    <p:spTree>
+      <p:nvGrpSpPr>
+        <p:cNvPr id="1" name=""/>
+        <p:cNvGrpSpPr/>
+        <p:nvPr/>
+      </p:nvGrpSpPr>
+      <p:grpSpPr>
+        <a:xfrm xmlns:a="http://schemas.openxmlformats.org/drawingml/2006/main"/>
+      </p:grpSpPr>
+      <p:sp>
+        <p:nvSpPr>
+          <p:cNvPr id="2" name="Slide Image Placeholder 1"/>
+          <p:cNvSpPr>
+            <a:spLocks xmlns:a="http://schemas.openxmlformats.org/drawingml/2006/main" noGrp="1"/>
+          </p:cNvSpPr>
+          <p:nvPr>
+            <p:ph type="sldImg" idx="0"/>
+          </p:nvPr>
+        </p:nvSpPr>
+        <p:spPr/>
+      </p:sp>
+      <p:sp>
+        <p:nvSpPr>
+          <p:cNvPr id="3" name="Notes Placeholder 2"/>
+          <p:cNvSpPr>
+            <a:spLocks xmlns:a="http://schemas.openxmlformats.org/drawingml/2006/main" noGrp="1"/>
+          </p:cNvSpPr>
+          <p:nvPr>
+            <p:ph type="body" idx="1"/>
+          </p:nvPr>
+        </p:nvSpPr>
+        <p:spPr/>
+        <p:txBody>
+          <a:bodyPr xmlns:a="http://schemas.openxmlformats.org/drawingml/2006/main"/>
+          <a:lstStyle xmlns:a="http://schemas.openxmlformats.org/drawingml/2006/main"/>
+          <a:p xmlns:a="http://schemas.openxmlformats.org/drawingml/2006/main">
+            <a:r>
+              <a:t>The prior feature atlas did not earn a general permission rule, but it did reveal one visually coherent negative clue: the two highest abnormal-dollar-volume bins were below drift. This slice maps that exact clue to one frozen causal veto. It does not retune the stopped rebound rule or search multiple thresholds.</a:t>
+            </a:r>
+          </a:p>
+          <a:p xmlns:a="http://schemas.openxmlformats.org/drawingml/2006/main">
+            <a:r>
+              <a:t/>
+            </a:r>
+          </a:p>
+          <a:p xmlns:a="http://schemas.openxmlformats.org/drawingml/2006/main">
+            <a:r>
+              <a:t>[Sources]</a:t>
+            </a:r>
+          </a:p>
+          <a:p xmlns:a="http://schemas.openxmlformats.org/drawingml/2006/main">
+            <a:r>
+              <a:t>- Codex task 01a0226e-2fa2-7222-a6d9-79ab971ac616 (2026-08-28), operator-approved abnormal-volume veto falsification.</a:t>
+            </a:r>
+          </a:p>
+          <a:p xmlns:a="http://schemas.openxmlformats.org/drawingml/2006/main">
+            <a:r>
+              <a:t>- runs/research_workbench/operator_hypothesis_lab/return_geometry_abnormal_volume_veto_20260828/run_spec.csv</a:t>
+            </a:r>
+          </a:p>
+          <a:p xmlns:a="http://schemas.openxmlformats.org/drawingml/2006/main">
+            <a:r>
+              <a:t>- runs/research_workbench/operator_hypothesis_lab/return_geometry_abnormal_volume_veto_20260828/status.csv</a:t>
+            </a:r>
+          </a:p>
+          <a:p xmlns:a="http://schemas.openxmlformats.org/drawingml/2006/main">
+            <a:r>
+              <a:t>- operator_hypothesis_lab/docs/RETURN_GEOMETRY_ABNORMAL_VOLUME_VETO_2018_2023.md</a:t>
+            </a:r>
+          </a:p>
+          <a:p xmlns:a="http://schemas.openxmlformats.org/drawingml/2006/main">
+            <a:r>
+              <a:t>[/Sources]</a:t>
+            </a:r>
+          </a:p>
+        </p:txBody>
+      </p:sp>
+      <p:sp>
+        <p:nvSpPr>
+          <p:cNvPr id="4" name="Slide Number Placeholder 3"/>
+          <p:cNvSpPr>
+            <a:spLocks xmlns:a="http://schemas.openxmlformats.org/drawingml/2006/main" noGrp="1"/>
+          </p:cNvSpPr>
+          <p:nvPr>
+            <p:ph type="sldNum" idx="5"/>
+          </p:nvPr>
+        </p:nvSpPr>
+        <p:spPr/>
+        <p:txBody>
+          <a:bodyPr xmlns:a="http://schemas.openxmlformats.org/drawingml/2006/main"/>
+          <a:lstStyle xmlns:a="http://schemas.openxmlformats.org/drawingml/2006/main"/>
+          <a:p xmlns:a="http://schemas.openxmlformats.org/drawingml/2006/main"/>
+        </p:txBody>
+      </p:sp>
+    </p:spTree>
+  </p:cSld>
+  <p:clrMapOvr>
+    <a:masterClrMapping xmlns:a="http://schemas.openxmlformats.org/drawingml/2006/main"/>
+  </p:clrMapOvr>
+</p:notes>
+</file>
+
+<file path=ppt/notesSlides/notesSlide37.xml><?xml version="1.0" encoding="utf-8"?>
+<p:notes xmlns:p="http://schemas.openxmlformats.org/presentationml/2006/main">
+  <p:cSld>
+    <p:spTree>
+      <p:nvGrpSpPr>
+        <p:cNvPr id="1" name=""/>
+        <p:cNvGrpSpPr/>
+        <p:nvPr/>
+      </p:nvGrpSpPr>
+      <p:grpSpPr>
+        <a:xfrm xmlns:a="http://schemas.openxmlformats.org/drawingml/2006/main"/>
+      </p:grpSpPr>
+      <p:sp>
+        <p:nvSpPr>
+          <p:cNvPr id="2" name="Slide Image Placeholder 1"/>
+          <p:cNvSpPr>
+            <a:spLocks xmlns:a="http://schemas.openxmlformats.org/drawingml/2006/main" noGrp="1"/>
+          </p:cNvSpPr>
+          <p:nvPr>
+            <p:ph type="sldImg" idx="0"/>
+          </p:nvPr>
+        </p:nvSpPr>
+        <p:spPr/>
+      </p:sp>
+      <p:sp>
+        <p:nvSpPr>
+          <p:cNvPr id="3" name="Notes Placeholder 2"/>
+          <p:cNvSpPr>
+            <a:spLocks xmlns:a="http://schemas.openxmlformats.org/drawingml/2006/main" noGrp="1"/>
+          </p:cNvSpPr>
+          <p:nvPr>
+            <p:ph type="body" idx="1"/>
+          </p:nvPr>
+        </p:nvSpPr>
+        <p:spPr/>
+        <p:txBody>
+          <a:bodyPr xmlns:a="http://schemas.openxmlformats.org/drawingml/2006/main"/>
+          <a:lstStyle xmlns:a="http://schemas.openxmlformats.org/drawingml/2006/main"/>
+          <a:p xmlns:a="http://schemas.openxmlformats.org/drawingml/2006/main">
+            <a:r>
+              <a:t>Daily abnormal dollar volume is the log ratio of the current 20-session median dollar volume to the median over the preceding 126 sessions. Each daily value is ranked only against strictly prior feature values. The 60th-percentile boundary was frozen before this run because it translates the atlas's top-two-of-five-bin clue directly into one veto.</a:t>
+            </a:r>
+          </a:p>
+          <a:p xmlns:a="http://schemas.openxmlformats.org/drawingml/2006/main">
+            <a:r>
+              <a:t/>
+            </a:r>
+          </a:p>
+          <a:p xmlns:a="http://schemas.openxmlformats.org/drawingml/2006/main">
+            <a:r>
+              <a:t>[Sources]</a:t>
+            </a:r>
+          </a:p>
+          <a:p xmlns:a="http://schemas.openxmlformats.org/drawingml/2006/main">
+            <a:r>
+              <a:t>- Codex task 01a0226e-2fa2-7222-a6d9-79ab971ac616 (2026-08-28), operator-approved abnormal-volume veto falsification.</a:t>
+            </a:r>
+          </a:p>
+          <a:p xmlns:a="http://schemas.openxmlformats.org/drawingml/2006/main">
+            <a:r>
+              <a:t>- runs/research_workbench/operator_hypothesis_lab/return_geometry_abnormal_volume_veto_20260828/run_spec.csv</a:t>
+            </a:r>
+          </a:p>
+          <a:p xmlns:a="http://schemas.openxmlformats.org/drawingml/2006/main">
+            <a:r>
+              <a:t>- runs/research_workbench/operator_hypothesis_lab/return_geometry_abnormal_volume_veto_20260828/construction_checks.csv</a:t>
+            </a:r>
+          </a:p>
+          <a:p xmlns:a="http://schemas.openxmlformats.org/drawingml/2006/main">
+            <a:r>
+              <a:t>- operator_hypothesis_lab/docs/RETURN_GEOMETRY_ABNORMAL_VOLUME_VETO_2018_2023.md</a:t>
+            </a:r>
+          </a:p>
+          <a:p xmlns:a="http://schemas.openxmlformats.org/drawingml/2006/main">
+            <a:r>
+              <a:t>[/Sources]</a:t>
+            </a:r>
+          </a:p>
+        </p:txBody>
+      </p:sp>
+      <p:sp>
+        <p:nvSpPr>
+          <p:cNvPr id="4" name="Slide Number Placeholder 3"/>
+          <p:cNvSpPr>
+            <a:spLocks xmlns:a="http://schemas.openxmlformats.org/drawingml/2006/main" noGrp="1"/>
+          </p:cNvSpPr>
+          <p:nvPr>
+            <p:ph type="sldNum" idx="5"/>
+          </p:nvPr>
+        </p:nvSpPr>
+        <p:spPr/>
+        <p:txBody>
+          <a:bodyPr xmlns:a="http://schemas.openxmlformats.org/drawingml/2006/main"/>
+          <a:lstStyle xmlns:a="http://schemas.openxmlformats.org/drawingml/2006/main"/>
+          <a:p xmlns:a="http://schemas.openxmlformats.org/drawingml/2006/main"/>
+        </p:txBody>
+      </p:sp>
+    </p:spTree>
+  </p:cSld>
+  <p:clrMapOvr>
+    <a:masterClrMapping xmlns:a="http://schemas.openxmlformats.org/drawingml/2006/main"/>
+  </p:clrMapOvr>
+</p:notes>
+</file>
+
+<file path=ppt/notesSlides/notesSlide38.xml><?xml version="1.0" encoding="utf-8"?>
+<p:notes xmlns:p="http://schemas.openxmlformats.org/presentationml/2006/main">
+  <p:cSld>
+    <p:spTree>
+      <p:nvGrpSpPr>
+        <p:cNvPr id="1" name=""/>
+        <p:cNvGrpSpPr/>
+        <p:nvPr/>
+      </p:nvGrpSpPr>
+      <p:grpSpPr>
+        <a:xfrm xmlns:a="http://schemas.openxmlformats.org/drawingml/2006/main"/>
+      </p:grpSpPr>
+      <p:sp>
+        <p:nvSpPr>
+          <p:cNvPr id="2" name="Slide Image Placeholder 1"/>
+          <p:cNvSpPr>
+            <a:spLocks xmlns:a="http://schemas.openxmlformats.org/drawingml/2006/main" noGrp="1"/>
+          </p:cNvSpPr>
+          <p:nvPr>
+            <p:ph type="sldImg" idx="0"/>
+          </p:nvPr>
+        </p:nvSpPr>
+        <p:spPr/>
+      </p:sp>
+      <p:sp>
+        <p:nvSpPr>
+          <p:cNvPr id="3" name="Notes Placeholder 2"/>
+          <p:cNvSpPr>
+            <a:spLocks xmlns:a="http://schemas.openxmlformats.org/drawingml/2006/main" noGrp="1"/>
+          </p:cNvSpPr>
+          <p:nvPr>
+            <p:ph type="body" idx="1"/>
+          </p:nvPr>
+        </p:nvSpPr>
+        <p:spPr/>
+        <p:txBody>
+          <a:bodyPr xmlns:a="http://schemas.openxmlformats.org/drawingml/2006/main"/>
+          <a:lstStyle xmlns:a="http://schemas.openxmlformats.org/drawingml/2006/main"/>
+          <a:p xmlns:a="http://schemas.openxmlformats.org/drawingml/2006/main">
+            <a:r>
+              <a:t>The causal percentile profile preserves the atlas shape: low and middle abnormal-volume states are near or above drift, while the predeclared high-veto region—the top two bins—is negative. This is descriptive continuity, not independent confirmation.</a:t>
+            </a:r>
+          </a:p>
+          <a:p xmlns:a="http://schemas.openxmlformats.org/drawingml/2006/main">
+            <a:r>
+              <a:t/>
+            </a:r>
+          </a:p>
+          <a:p xmlns:a="http://schemas.openxmlformats.org/drawingml/2006/main">
+            <a:r>
+              <a:t>[Sources]</a:t>
+            </a:r>
+          </a:p>
+          <a:p xmlns:a="http://schemas.openxmlformats.org/drawingml/2006/main">
+            <a:r>
+              <a:t>- Codex task 01a0226e-2fa2-7222-a6d9-79ab971ac616 (2026-08-28), operator-approved abnormal-volume veto falsification.</a:t>
+            </a:r>
+          </a:p>
+          <a:p xmlns:a="http://schemas.openxmlformats.org/drawingml/2006/main">
+            <a:r>
+              <a:t>- runs/research_workbench/operator_hypothesis_lab/return_geometry_abnormal_volume_veto_20260828/visuals/causal_percentile_profile.png</a:t>
+            </a:r>
+          </a:p>
+          <a:p xmlns:a="http://schemas.openxmlformats.org/drawingml/2006/main">
+            <a:r>
+              <a:t>- runs/research_workbench/operator_hypothesis_lab/return_geometry_abnormal_volume_veto_20260828/report.md</a:t>
+            </a:r>
+          </a:p>
+          <a:p xmlns:a="http://schemas.openxmlformats.org/drawingml/2006/main">
+            <a:r>
+              <a:t>- operator_hypothesis_lab/docs/RETURN_GEOMETRY_ABNORMAL_VOLUME_VETO_2018_2023.md</a:t>
+            </a:r>
+          </a:p>
+          <a:p xmlns:a="http://schemas.openxmlformats.org/drawingml/2006/main">
+            <a:r>
+              <a:t>[/Sources]</a:t>
+            </a:r>
+          </a:p>
+        </p:txBody>
+      </p:sp>
+      <p:sp>
+        <p:nvSpPr>
+          <p:cNvPr id="4" name="Slide Number Placeholder 3"/>
+          <p:cNvSpPr>
+            <a:spLocks xmlns:a="http://schemas.openxmlformats.org/drawingml/2006/main" noGrp="1"/>
+          </p:cNvSpPr>
+          <p:nvPr>
+            <p:ph type="sldNum" idx="5"/>
+          </p:nvPr>
+        </p:nvSpPr>
+        <p:spPr/>
+        <p:txBody>
+          <a:bodyPr xmlns:a="http://schemas.openxmlformats.org/drawingml/2006/main"/>
+          <a:lstStyle xmlns:a="http://schemas.openxmlformats.org/drawingml/2006/main"/>
+          <a:p xmlns:a="http://schemas.openxmlformats.org/drawingml/2006/main"/>
+        </p:txBody>
+      </p:sp>
+    </p:spTree>
+  </p:cSld>
+  <p:clrMapOvr>
+    <a:masterClrMapping xmlns:a="http://schemas.openxmlformats.org/drawingml/2006/main"/>
+  </p:clrMapOvr>
+</p:notes>
+</file>
+
+<file path=ppt/notesSlides/notesSlide39.xml><?xml version="1.0" encoding="utf-8"?>
+<p:notes xmlns:p="http://schemas.openxmlformats.org/presentationml/2006/main">
+  <p:cSld>
+    <p:spTree>
+      <p:nvGrpSpPr>
+        <p:cNvPr id="1" name=""/>
+        <p:cNvGrpSpPr/>
+        <p:nvPr/>
+      </p:nvGrpSpPr>
+      <p:grpSpPr>
+        <a:xfrm xmlns:a="http://schemas.openxmlformats.org/drawingml/2006/main"/>
+      </p:grpSpPr>
+      <p:sp>
+        <p:nvSpPr>
+          <p:cNvPr id="2" name="Slide Image Placeholder 1"/>
+          <p:cNvSpPr>
+            <a:spLocks xmlns:a="http://schemas.openxmlformats.org/drawingml/2006/main" noGrp="1"/>
+          </p:cNvSpPr>
+          <p:nvPr>
+            <p:ph type="sldImg" idx="0"/>
+          </p:nvPr>
+        </p:nvSpPr>
+        <p:spPr/>
+      </p:sp>
+      <p:sp>
+        <p:nvSpPr>
+          <p:cNvPr id="3" name="Notes Placeholder 2"/>
+          <p:cNvSpPr>
+            <a:spLocks xmlns:a="http://schemas.openxmlformats.org/drawingml/2006/main" noGrp="1"/>
+          </p:cNvSpPr>
+          <p:nvPr>
+            <p:ph type="body" idx="1"/>
+          </p:nvPr>
+        </p:nvSpPr>
+        <p:spPr/>
+        <p:txBody>
+          <a:bodyPr xmlns:a="http://schemas.openxmlformats.org/drawingml/2006/main"/>
+          <a:lstStyle xmlns:a="http://schemas.openxmlformats.org/drawingml/2006/main"/>
+          <a:p xmlns:a="http://schemas.openxmlformats.org/drawingml/2006/main">
+            <a:r>
+              <a:t>Across core events, the original rule is -25 bp/trade versus drift. Retained normal-volume events are +41 bp/trade; removed high-volume events are -122 bp/trade. The retained share is 59.6%. This is the strongest practical separation in the slice, but all values remain internal to TRAIN.</a:t>
+            </a:r>
+          </a:p>
+          <a:p xmlns:a="http://schemas.openxmlformats.org/drawingml/2006/main">
+            <a:r>
+              <a:t/>
+            </a:r>
+          </a:p>
+          <a:p xmlns:a="http://schemas.openxmlformats.org/drawingml/2006/main">
+            <a:r>
+              <a:t>[Sources]</a:t>
+            </a:r>
+          </a:p>
+          <a:p xmlns:a="http://schemas.openxmlformats.org/drawingml/2006/main">
+            <a:r>
+              <a:t>- Codex task 01a0226e-2fa2-7222-a6d9-79ab971ac616 (2026-08-28), operator-approved abnormal-volume veto falsification.</a:t>
+            </a:r>
+          </a:p>
+          <a:p xmlns:a="http://schemas.openxmlformats.org/drawingml/2006/main">
+            <a:r>
+              <a:t>- runs/research_workbench/operator_hypothesis_lab/return_geometry_abnormal_volume_veto_20260828/visuals/veto_rule_comparison.png</a:t>
+            </a:r>
+          </a:p>
+          <a:p xmlns:a="http://schemas.openxmlformats.org/drawingml/2006/main">
+            <a:r>
+              <a:t>- runs/research_workbench/operator_hypothesis_lab/return_geometry_abnormal_volume_veto_20260828/report.md</a:t>
+            </a:r>
+          </a:p>
+          <a:p xmlns:a="http://schemas.openxmlformats.org/drawingml/2006/main">
+            <a:r>
+              <a:t>- operator_hypothesis_lab/docs/RETURN_GEOMETRY_ABNORMAL_VOLUME_VETO_2018_2023.md</a:t>
+            </a:r>
+          </a:p>
+          <a:p xmlns:a="http://schemas.openxmlformats.org/drawingml/2006/main">
+            <a:r>
+              <a:t>[/Sources]</a:t>
+            </a:r>
+          </a:p>
+        </p:txBody>
+      </p:sp>
+      <p:sp>
+        <p:nvSpPr>
+          <p:cNvPr id="4" name="Slide Number Placeholder 3"/>
+          <p:cNvSpPr>
+            <a:spLocks xmlns:a="http://schemas.openxmlformats.org/drawingml/2006/main" noGrp="1"/>
+          </p:cNvSpPr>
+          <p:nvPr>
+            <p:ph type="sldNum" idx="5"/>
+          </p:nvPr>
+        </p:nvSpPr>
+        <p:spPr/>
+        <p:txBody>
+          <a:bodyPr xmlns:a="http://schemas.openxmlformats.org/drawingml/2006/main"/>
+          <a:lstStyle xmlns:a="http://schemas.openxmlformats.org/drawingml/2006/main"/>
+          <a:p xmlns:a="http://schemas.openxmlformats.org/drawingml/2006/main"/>
+        </p:txBody>
+      </p:sp>
+    </p:spTree>
+  </p:cSld>
+  <p:clrMapOvr>
+    <a:masterClrMapping xmlns:a="http://schemas.openxmlformats.org/drawingml/2006/main"/>
+  </p:clrMapOvr>
+</p:notes>
+</file>
+
 <file path=ppt/notesSlides/notesSlide4.xml><?xml version="1.0" encoding="utf-8"?>
 <p:notes xmlns:p="http://schemas.openxmlformats.org/presentationml/2006/main">
   <p:cSld>
@@ -3572,6 +4003,751 @@
           <a:p xmlns:a="http://schemas.openxmlformats.org/drawingml/2006/main">
             <a:r>
               <a:t>- operator_hypothesis_lab/docs/OWN_ASSET_RETURN_GEOMETRY_WORKFLOW_ROADMAP.md</a:t>
+            </a:r>
+          </a:p>
+          <a:p xmlns:a="http://schemas.openxmlformats.org/drawingml/2006/main">
+            <a:r>
+              <a:t>[/Sources]</a:t>
+            </a:r>
+          </a:p>
+        </p:txBody>
+      </p:sp>
+      <p:sp>
+        <p:nvSpPr>
+          <p:cNvPr id="4" name="Slide Number Placeholder 3"/>
+          <p:cNvSpPr>
+            <a:spLocks xmlns:a="http://schemas.openxmlformats.org/drawingml/2006/main" noGrp="1"/>
+          </p:cNvSpPr>
+          <p:nvPr>
+            <p:ph type="sldNum" idx="5"/>
+          </p:nvPr>
+        </p:nvSpPr>
+        <p:spPr/>
+        <p:txBody>
+          <a:bodyPr xmlns:a="http://schemas.openxmlformats.org/drawingml/2006/main"/>
+          <a:lstStyle xmlns:a="http://schemas.openxmlformats.org/drawingml/2006/main"/>
+          <a:p xmlns:a="http://schemas.openxmlformats.org/drawingml/2006/main"/>
+        </p:txBody>
+      </p:sp>
+    </p:spTree>
+  </p:cSld>
+  <p:clrMapOvr>
+    <a:masterClrMapping xmlns:a="http://schemas.openxmlformats.org/drawingml/2006/main"/>
+  </p:clrMapOvr>
+</p:notes>
+</file>
+
+<file path=ppt/notesSlides/notesSlide40.xml><?xml version="1.0" encoding="utf-8"?>
+<p:notes xmlns:p="http://schemas.openxmlformats.org/presentationml/2006/main">
+  <p:cSld>
+    <p:spTree>
+      <p:nvGrpSpPr>
+        <p:cNvPr id="1" name=""/>
+        <p:cNvGrpSpPr/>
+        <p:nvPr/>
+      </p:nvGrpSpPr>
+      <p:grpSpPr>
+        <a:xfrm xmlns:a="http://schemas.openxmlformats.org/drawingml/2006/main"/>
+      </p:grpSpPr>
+      <p:sp>
+        <p:nvSpPr>
+          <p:cNvPr id="2" name="Slide Image Placeholder 1"/>
+          <p:cNvSpPr>
+            <a:spLocks xmlns:a="http://schemas.openxmlformats.org/drawingml/2006/main" noGrp="1"/>
+          </p:cNvSpPr>
+          <p:nvPr>
+            <p:ph type="sldImg" idx="0"/>
+          </p:nvPr>
+        </p:nvSpPr>
+        <p:spPr/>
+      </p:sp>
+      <p:sp>
+        <p:nvSpPr>
+          <p:cNvPr id="3" name="Notes Placeholder 2"/>
+          <p:cNvSpPr>
+            <a:spLocks xmlns:a="http://schemas.openxmlformats.org/drawingml/2006/main" noGrp="1"/>
+          </p:cNvSpPr>
+          <p:nvPr>
+            <p:ph type="body" idx="1"/>
+          </p:nvPr>
+        </p:nvSpPr>
+        <p:spPr/>
+        <p:txBody>
+          <a:bodyPr xmlns:a="http://schemas.openxmlformats.org/drawingml/2006/main"/>
+          <a:lstStyle xmlns:a="http://schemas.openxmlformats.org/drawingml/2006/main"/>
+          <a:p xmlns:a="http://schemas.openxmlformats.org/drawingml/2006/main">
+            <a:r>
+              <a:t>Eight sector medians are negative, meeting the frozen 7-of-11 breadth check. Information Technology is approximately flat; Communication Services and Industrials reverse. Sector breadth supports a broad mechanism while preserving visible heterogeneity.</a:t>
+            </a:r>
+          </a:p>
+          <a:p xmlns:a="http://schemas.openxmlformats.org/drawingml/2006/main">
+            <a:r>
+              <a:t/>
+            </a:r>
+          </a:p>
+          <a:p xmlns:a="http://schemas.openxmlformats.org/drawingml/2006/main">
+            <a:r>
+              <a:t>[Sources]</a:t>
+            </a:r>
+          </a:p>
+          <a:p xmlns:a="http://schemas.openxmlformats.org/drawingml/2006/main">
+            <a:r>
+              <a:t>- Codex task 01a0226e-2fa2-7222-a6d9-79ab971ac616 (2026-08-28), operator-approved abnormal-volume veto falsification.</a:t>
+            </a:r>
+          </a:p>
+          <a:p xmlns:a="http://schemas.openxmlformats.org/drawingml/2006/main">
+            <a:r>
+              <a:t>- runs/research_workbench/operator_hypothesis_lab/return_geometry_abnormal_volume_veto_20260828/visuals/sector_veto_contrasts.png</a:t>
+            </a:r>
+          </a:p>
+          <a:p xmlns:a="http://schemas.openxmlformats.org/drawingml/2006/main">
+            <a:r>
+              <a:t>- runs/research_workbench/operator_hypothesis_lab/return_geometry_abnormal_volume_veto_20260828/report.md</a:t>
+            </a:r>
+          </a:p>
+          <a:p xmlns:a="http://schemas.openxmlformats.org/drawingml/2006/main">
+            <a:r>
+              <a:t>- operator_hypothesis_lab/docs/RETURN_GEOMETRY_ABNORMAL_VOLUME_VETO_2018_2023.md</a:t>
+            </a:r>
+          </a:p>
+          <a:p xmlns:a="http://schemas.openxmlformats.org/drawingml/2006/main">
+            <a:r>
+              <a:t>[/Sources]</a:t>
+            </a:r>
+          </a:p>
+        </p:txBody>
+      </p:sp>
+      <p:sp>
+        <p:nvSpPr>
+          <p:cNvPr id="4" name="Slide Number Placeholder 3"/>
+          <p:cNvSpPr>
+            <a:spLocks xmlns:a="http://schemas.openxmlformats.org/drawingml/2006/main" noGrp="1"/>
+          </p:cNvSpPr>
+          <p:nvPr>
+            <p:ph type="sldNum" idx="5"/>
+          </p:nvPr>
+        </p:nvSpPr>
+        <p:spPr/>
+        <p:txBody>
+          <a:bodyPr xmlns:a="http://schemas.openxmlformats.org/drawingml/2006/main"/>
+          <a:lstStyle xmlns:a="http://schemas.openxmlformats.org/drawingml/2006/main"/>
+          <a:p xmlns:a="http://schemas.openxmlformats.org/drawingml/2006/main"/>
+        </p:txBody>
+      </p:sp>
+    </p:spTree>
+  </p:cSld>
+  <p:clrMapOvr>
+    <a:masterClrMapping xmlns:a="http://schemas.openxmlformats.org/drawingml/2006/main"/>
+  </p:clrMapOvr>
+</p:notes>
+</file>
+
+<file path=ppt/notesSlides/notesSlide41.xml><?xml version="1.0" encoding="utf-8"?>
+<p:notes xmlns:p="http://schemas.openxmlformats.org/presentationml/2006/main">
+  <p:cSld>
+    <p:spTree>
+      <p:nvGrpSpPr>
+        <p:cNvPr id="1" name=""/>
+        <p:cNvGrpSpPr/>
+        <p:nvPr/>
+      </p:nvGrpSpPr>
+      <p:grpSpPr>
+        <a:xfrm xmlns:a="http://schemas.openxmlformats.org/drawingml/2006/main"/>
+      </p:grpSpPr>
+      <p:sp>
+        <p:nvSpPr>
+          <p:cNvPr id="2" name="Slide Image Placeholder 1"/>
+          <p:cNvSpPr>
+            <a:spLocks xmlns:a="http://schemas.openxmlformats.org/drawingml/2006/main" noGrp="1"/>
+          </p:cNvSpPr>
+          <p:nvPr>
+            <p:ph type="sldImg" idx="0"/>
+          </p:nvPr>
+        </p:nvSpPr>
+        <p:spPr/>
+      </p:sp>
+      <p:sp>
+        <p:nvSpPr>
+          <p:cNvPr id="3" name="Notes Placeholder 2"/>
+          <p:cNvSpPr>
+            <a:spLocks xmlns:a="http://schemas.openxmlformats.org/drawingml/2006/main" noGrp="1"/>
+          </p:cNvSpPr>
+          <p:nvPr>
+            <p:ph type="body" idx="1"/>
+          </p:nvPr>
+        </p:nvSpPr>
+        <p:spPr/>
+        <p:txBody>
+          <a:bodyPr xmlns:a="http://schemas.openxmlformats.org/drawingml/2006/main"/>
+          <a:lstStyle xmlns:a="http://schemas.openxmlformats.org/drawingml/2006/main"/>
+          <a:p xmlns:a="http://schemas.openxmlformats.org/drawingml/2006/main">
+            <a:r>
+              <a:t>The asset-balanced contrast is -160 bp/trade and 55 of 88 comparable assets are negative, clearing the frozen 60% breadth threshold. The wide dispersion is crucial: the veto is not universal, even within sectors that support it on median.</a:t>
+            </a:r>
+          </a:p>
+          <a:p xmlns:a="http://schemas.openxmlformats.org/drawingml/2006/main">
+            <a:r>
+              <a:t/>
+            </a:r>
+          </a:p>
+          <a:p xmlns:a="http://schemas.openxmlformats.org/drawingml/2006/main">
+            <a:r>
+              <a:t>[Sources]</a:t>
+            </a:r>
+          </a:p>
+          <a:p xmlns:a="http://schemas.openxmlformats.org/drawingml/2006/main">
+            <a:r>
+              <a:t>- Codex task 01a0226e-2fa2-7222-a6d9-79ab971ac616 (2026-08-28), operator-approved abnormal-volume veto falsification.</a:t>
+            </a:r>
+          </a:p>
+          <a:p xmlns:a="http://schemas.openxmlformats.org/drawingml/2006/main">
+            <a:r>
+              <a:t>- runs/research_workbench/operator_hypothesis_lab/return_geometry_abnormal_volume_veto_20260828/visuals/asset_veto_contrast_distribution.png</a:t>
+            </a:r>
+          </a:p>
+          <a:p xmlns:a="http://schemas.openxmlformats.org/drawingml/2006/main">
+            <a:r>
+              <a:t>- runs/research_workbench/operator_hypothesis_lab/return_geometry_abnormal_volume_veto_20260828/report.md</a:t>
+            </a:r>
+          </a:p>
+          <a:p xmlns:a="http://schemas.openxmlformats.org/drawingml/2006/main">
+            <a:r>
+              <a:t>- operator_hypothesis_lab/docs/RETURN_GEOMETRY_ABNORMAL_VOLUME_VETO_2018_2023.md</a:t>
+            </a:r>
+          </a:p>
+          <a:p xmlns:a="http://schemas.openxmlformats.org/drawingml/2006/main">
+            <a:r>
+              <a:t>[/Sources]</a:t>
+            </a:r>
+          </a:p>
+        </p:txBody>
+      </p:sp>
+      <p:sp>
+        <p:nvSpPr>
+          <p:cNvPr id="4" name="Slide Number Placeholder 3"/>
+          <p:cNvSpPr>
+            <a:spLocks xmlns:a="http://schemas.openxmlformats.org/drawingml/2006/main" noGrp="1"/>
+          </p:cNvSpPr>
+          <p:nvPr>
+            <p:ph type="sldNum" idx="5"/>
+          </p:nvPr>
+        </p:nvSpPr>
+        <p:spPr/>
+        <p:txBody>
+          <a:bodyPr xmlns:a="http://schemas.openxmlformats.org/drawingml/2006/main"/>
+          <a:lstStyle xmlns:a="http://schemas.openxmlformats.org/drawingml/2006/main"/>
+          <a:p xmlns:a="http://schemas.openxmlformats.org/drawingml/2006/main"/>
+        </p:txBody>
+      </p:sp>
+    </p:spTree>
+  </p:cSld>
+  <p:clrMapOvr>
+    <a:masterClrMapping xmlns:a="http://schemas.openxmlformats.org/drawingml/2006/main"/>
+  </p:clrMapOvr>
+</p:notes>
+</file>
+
+<file path=ppt/notesSlides/notesSlide42.xml><?xml version="1.0" encoding="utf-8"?>
+<p:notes xmlns:p="http://schemas.openxmlformats.org/presentationml/2006/main">
+  <p:cSld>
+    <p:spTree>
+      <p:nvGrpSpPr>
+        <p:cNvPr id="1" name=""/>
+        <p:cNvGrpSpPr/>
+        <p:nvPr/>
+      </p:nvGrpSpPr>
+      <p:grpSpPr>
+        <a:xfrm xmlns:a="http://schemas.openxmlformats.org/drawingml/2006/main"/>
+      </p:grpSpPr>
+      <p:sp>
+        <p:nvSpPr>
+          <p:cNvPr id="2" name="Slide Image Placeholder 1"/>
+          <p:cNvSpPr>
+            <a:spLocks xmlns:a="http://schemas.openxmlformats.org/drawingml/2006/main" noGrp="1"/>
+          </p:cNvSpPr>
+          <p:nvPr>
+            <p:ph type="sldImg" idx="0"/>
+          </p:nvPr>
+        </p:nvSpPr>
+        <p:spPr/>
+      </p:sp>
+      <p:sp>
+        <p:nvSpPr>
+          <p:cNvPr id="3" name="Notes Placeholder 2"/>
+          <p:cNvSpPr>
+            <a:spLocks xmlns:a="http://schemas.openxmlformats.org/drawingml/2006/main" noGrp="1"/>
+          </p:cNvSpPr>
+          <p:nvPr>
+            <p:ph type="body" idx="1"/>
+          </p:nvPr>
+        </p:nvSpPr>
+        <p:spPr/>
+        <p:txBody>
+          <a:bodyPr xmlns:a="http://schemas.openxmlformats.org/drawingml/2006/main"/>
+          <a:lstStyle xmlns:a="http://schemas.openxmlformats.org/drawingml/2006/main"/>
+          <a:p xmlns:a="http://schemas.openxmlformats.org/drawingml/2006/main">
+            <a:r>
+              <a:t>Each high-veto event is matched within the same asset to the unused normal-volume event with the closest prior-20 loss severity. Outcomes never enter matching. The paired high-minus-normal contrast is -179 bp/trade, so simple loss-severity imbalance is not enough to explain the separation.</a:t>
+            </a:r>
+          </a:p>
+          <a:p xmlns:a="http://schemas.openxmlformats.org/drawingml/2006/main">
+            <a:r>
+              <a:t/>
+            </a:r>
+          </a:p>
+          <a:p xmlns:a="http://schemas.openxmlformats.org/drawingml/2006/main">
+            <a:r>
+              <a:t>[Sources]</a:t>
+            </a:r>
+          </a:p>
+          <a:p xmlns:a="http://schemas.openxmlformats.org/drawingml/2006/main">
+            <a:r>
+              <a:t>- Codex task 01a0226e-2fa2-7222-a6d9-79ab971ac616 (2026-08-28), operator-approved abnormal-volume veto falsification.</a:t>
+            </a:r>
+          </a:p>
+          <a:p xmlns:a="http://schemas.openxmlformats.org/drawingml/2006/main">
+            <a:r>
+              <a:t>- runs/research_workbench/operator_hypothesis_lab/return_geometry_abnormal_volume_veto_20260828/visuals/severity_matched_outcomes.png</a:t>
+            </a:r>
+          </a:p>
+          <a:p xmlns:a="http://schemas.openxmlformats.org/drawingml/2006/main">
+            <a:r>
+              <a:t>- runs/research_workbench/operator_hypothesis_lab/return_geometry_abnormal_volume_veto_20260828/report.md</a:t>
+            </a:r>
+          </a:p>
+          <a:p xmlns:a="http://schemas.openxmlformats.org/drawingml/2006/main">
+            <a:r>
+              <a:t>- operator_hypothesis_lab/docs/RETURN_GEOMETRY_ABNORMAL_VOLUME_VETO_2018_2023.md</a:t>
+            </a:r>
+          </a:p>
+          <a:p xmlns:a="http://schemas.openxmlformats.org/drawingml/2006/main">
+            <a:r>
+              <a:t>[/Sources]</a:t>
+            </a:r>
+          </a:p>
+        </p:txBody>
+      </p:sp>
+      <p:sp>
+        <p:nvSpPr>
+          <p:cNvPr id="4" name="Slide Number Placeholder 3"/>
+          <p:cNvSpPr>
+            <a:spLocks xmlns:a="http://schemas.openxmlformats.org/drawingml/2006/main" noGrp="1"/>
+          </p:cNvSpPr>
+          <p:nvPr>
+            <p:ph type="sldNum" idx="5"/>
+          </p:nvPr>
+        </p:nvSpPr>
+        <p:spPr/>
+        <p:txBody>
+          <a:bodyPr xmlns:a="http://schemas.openxmlformats.org/drawingml/2006/main"/>
+          <a:lstStyle xmlns:a="http://schemas.openxmlformats.org/drawingml/2006/main"/>
+          <a:p xmlns:a="http://schemas.openxmlformats.org/drawingml/2006/main"/>
+        </p:txBody>
+      </p:sp>
+    </p:spTree>
+  </p:cSld>
+  <p:clrMapOvr>
+    <a:masterClrMapping xmlns:a="http://schemas.openxmlformats.org/drawingml/2006/main"/>
+  </p:clrMapOvr>
+</p:notes>
+</file>
+
+<file path=ppt/notesSlides/notesSlide43.xml><?xml version="1.0" encoding="utf-8"?>
+<p:notes xmlns:p="http://schemas.openxmlformats.org/presentationml/2006/main">
+  <p:cSld>
+    <p:spTree>
+      <p:nvGrpSpPr>
+        <p:cNvPr id="1" name=""/>
+        <p:cNvGrpSpPr/>
+        <p:nvPr/>
+      </p:nvGrpSpPr>
+      <p:grpSpPr>
+        <a:xfrm xmlns:a="http://schemas.openxmlformats.org/drawingml/2006/main"/>
+      </p:grpSpPr>
+      <p:sp>
+        <p:nvSpPr>
+          <p:cNvPr id="2" name="Slide Image Placeholder 1"/>
+          <p:cNvSpPr>
+            <a:spLocks xmlns:a="http://schemas.openxmlformats.org/drawingml/2006/main" noGrp="1"/>
+          </p:cNvSpPr>
+          <p:nvPr>
+            <p:ph type="sldImg" idx="0"/>
+          </p:nvPr>
+        </p:nvSpPr>
+        <p:spPr/>
+      </p:sp>
+      <p:sp>
+        <p:nvSpPr>
+          <p:cNvPr id="3" name="Notes Placeholder 2"/>
+          <p:cNvSpPr>
+            <a:spLocks xmlns:a="http://schemas.openxmlformats.org/drawingml/2006/main" noGrp="1"/>
+          </p:cNvSpPr>
+          <p:nvPr>
+            <p:ph type="body" idx="1"/>
+          </p:nvPr>
+        </p:nvSpPr>
+        <p:spPr/>
+        <p:txBody>
+          <a:bodyPr xmlns:a="http://schemas.openxmlformats.org/drawingml/2006/main"/>
+          <a:lstStyle xmlns:a="http://schemas.openxmlformats.org/drawingml/2006/main"/>
+          <a:p xmlns:a="http://schemas.openxmlformats.org/drawingml/2006/main">
+            <a:r>
+              <a:t>Every eligible atlas cohort has a negative asset-balanced high-minus-normal contrast: GICS core -160 bp/trade, attention supplement -538, equity ETF controls -52, and non-equity controls -69. This is encouraging structural transport, but the cohorts are exposed to the same dates and were part of the same discovery ledger, so they are diagnostic—not independent replication.</a:t>
+            </a:r>
+          </a:p>
+          <a:p xmlns:a="http://schemas.openxmlformats.org/drawingml/2006/main">
+            <a:r>
+              <a:t/>
+            </a:r>
+          </a:p>
+          <a:p xmlns:a="http://schemas.openxmlformats.org/drawingml/2006/main">
+            <a:r>
+              <a:t>[Sources]</a:t>
+            </a:r>
+          </a:p>
+          <a:p xmlns:a="http://schemas.openxmlformats.org/drawingml/2006/main">
+            <a:r>
+              <a:t>- Codex task 01a0226e-2fa2-7222-a6d9-79ab971ac616 (2026-08-28), operator-approved abnormal-volume veto falsification.</a:t>
+            </a:r>
+          </a:p>
+          <a:p xmlns:a="http://schemas.openxmlformats.org/drawingml/2006/main">
+            <a:r>
+              <a:t>- runs/research_workbench/operator_hypothesis_lab/return_geometry_abnormal_volume_veto_20260828/cohort_veto_diagnostics.csv</a:t>
+            </a:r>
+          </a:p>
+          <a:p xmlns:a="http://schemas.openxmlformats.org/drawingml/2006/main">
+            <a:r>
+              <a:t>- runs/research_workbench/operator_hypothesis_lab/return_geometry_abnormal_volume_veto_20260828/status.csv</a:t>
+            </a:r>
+          </a:p>
+          <a:p xmlns:a="http://schemas.openxmlformats.org/drawingml/2006/main">
+            <a:r>
+              <a:t>- operator_hypothesis_lab/docs/RETURN_GEOMETRY_ABNORMAL_VOLUME_VETO_2018_2023.md</a:t>
+            </a:r>
+          </a:p>
+          <a:p xmlns:a="http://schemas.openxmlformats.org/drawingml/2006/main">
+            <a:r>
+              <a:t>[/Sources]</a:t>
+            </a:r>
+          </a:p>
+        </p:txBody>
+      </p:sp>
+      <p:sp>
+        <p:nvSpPr>
+          <p:cNvPr id="4" name="Slide Number Placeholder 3"/>
+          <p:cNvSpPr>
+            <a:spLocks xmlns:a="http://schemas.openxmlformats.org/drawingml/2006/main" noGrp="1"/>
+          </p:cNvSpPr>
+          <p:nvPr>
+            <p:ph type="sldNum" idx="5"/>
+          </p:nvPr>
+        </p:nvSpPr>
+        <p:spPr/>
+        <p:txBody>
+          <a:bodyPr xmlns:a="http://schemas.openxmlformats.org/drawingml/2006/main"/>
+          <a:lstStyle xmlns:a="http://schemas.openxmlformats.org/drawingml/2006/main"/>
+          <a:p xmlns:a="http://schemas.openxmlformats.org/drawingml/2006/main"/>
+        </p:txBody>
+      </p:sp>
+    </p:spTree>
+  </p:cSld>
+  <p:clrMapOvr>
+    <a:masterClrMapping xmlns:a="http://schemas.openxmlformats.org/drawingml/2006/main"/>
+  </p:clrMapOvr>
+</p:notes>
+</file>
+
+<file path=ppt/notesSlides/notesSlide44.xml><?xml version="1.0" encoding="utf-8"?>
+<p:notes xmlns:p="http://schemas.openxmlformats.org/presentationml/2006/main">
+  <p:cSld>
+    <p:spTree>
+      <p:nvGrpSpPr>
+        <p:cNvPr id="1" name=""/>
+        <p:cNvGrpSpPr/>
+        <p:nvPr/>
+      </p:nvGrpSpPr>
+      <p:grpSpPr>
+        <a:xfrm xmlns:a="http://schemas.openxmlformats.org/drawingml/2006/main"/>
+      </p:grpSpPr>
+      <p:sp>
+        <p:nvSpPr>
+          <p:cNvPr id="2" name="Slide Image Placeholder 1"/>
+          <p:cNvSpPr>
+            <a:spLocks xmlns:a="http://schemas.openxmlformats.org/drawingml/2006/main" noGrp="1"/>
+          </p:cNvSpPr>
+          <p:nvPr>
+            <p:ph type="sldImg" idx="0"/>
+          </p:nvPr>
+        </p:nvSpPr>
+        <p:spPr/>
+      </p:sp>
+      <p:sp>
+        <p:nvSpPr>
+          <p:cNvPr id="3" name="Notes Placeholder 2"/>
+          <p:cNvSpPr>
+            <a:spLocks xmlns:a="http://schemas.openxmlformats.org/drawingml/2006/main" noGrp="1"/>
+          </p:cNvSpPr>
+          <p:nvPr>
+            <p:ph type="body" idx="1"/>
+          </p:nvPr>
+        </p:nvSpPr>
+        <p:spPr/>
+        <p:txBody>
+          <a:bodyPr xmlns:a="http://schemas.openxmlformats.org/drawingml/2006/main"/>
+          <a:lstStyle xmlns:a="http://schemas.openxmlformats.org/drawingml/2006/main"/>
+          <a:p xmlns:a="http://schemas.openxmlformats.org/drawingml/2006/main">
+            <a:r>
+              <a:t>The veto direction holds in 2018, 2020, and 2021, but reverses in 2019, 2022, and 2023. The 2020 contrast is especially large, and the latest TRAIN year reverses. Calendar stability was diagnostic rather than a retroactively substituted gate; it qualifies the seven frozen cross-sectional passes and blocks a clean promotion claim.</a:t>
+            </a:r>
+          </a:p>
+          <a:p xmlns:a="http://schemas.openxmlformats.org/drawingml/2006/main">
+            <a:r>
+              <a:t/>
+            </a:r>
+          </a:p>
+          <a:p xmlns:a="http://schemas.openxmlformats.org/drawingml/2006/main">
+            <a:r>
+              <a:t>[Sources]</a:t>
+            </a:r>
+          </a:p>
+          <a:p xmlns:a="http://schemas.openxmlformats.org/drawingml/2006/main">
+            <a:r>
+              <a:t>- Codex task 01a0226e-2fa2-7222-a6d9-79ab971ac616 (2026-08-28), operator-approved abnormal-volume veto falsification.</a:t>
+            </a:r>
+          </a:p>
+          <a:p xmlns:a="http://schemas.openxmlformats.org/drawingml/2006/main">
+            <a:r>
+              <a:t>- runs/research_workbench/operator_hypothesis_lab/return_geometry_abnormal_volume_veto_20260828/visuals/year_veto_contrasts.png</a:t>
+            </a:r>
+          </a:p>
+          <a:p xmlns:a="http://schemas.openxmlformats.org/drawingml/2006/main">
+            <a:r>
+              <a:t>- runs/research_workbench/operator_hypothesis_lab/return_geometry_abnormal_volume_veto_20260828/report.md</a:t>
+            </a:r>
+          </a:p>
+          <a:p xmlns:a="http://schemas.openxmlformats.org/drawingml/2006/main">
+            <a:r>
+              <a:t>- operator_hypothesis_lab/docs/RETURN_GEOMETRY_ABNORMAL_VOLUME_VETO_2018_2023.md</a:t>
+            </a:r>
+          </a:p>
+          <a:p xmlns:a="http://schemas.openxmlformats.org/drawingml/2006/main">
+            <a:r>
+              <a:t>[/Sources]</a:t>
+            </a:r>
+          </a:p>
+        </p:txBody>
+      </p:sp>
+      <p:sp>
+        <p:nvSpPr>
+          <p:cNvPr id="4" name="Slide Number Placeholder 3"/>
+          <p:cNvSpPr>
+            <a:spLocks xmlns:a="http://schemas.openxmlformats.org/drawingml/2006/main" noGrp="1"/>
+          </p:cNvSpPr>
+          <p:nvPr>
+            <p:ph type="sldNum" idx="5"/>
+          </p:nvPr>
+        </p:nvSpPr>
+        <p:spPr/>
+        <p:txBody>
+          <a:bodyPr xmlns:a="http://schemas.openxmlformats.org/drawingml/2006/main"/>
+          <a:lstStyle xmlns:a="http://schemas.openxmlformats.org/drawingml/2006/main"/>
+          <a:p xmlns:a="http://schemas.openxmlformats.org/drawingml/2006/main"/>
+        </p:txBody>
+      </p:sp>
+    </p:spTree>
+  </p:cSld>
+  <p:clrMapOvr>
+    <a:masterClrMapping xmlns:a="http://schemas.openxmlformats.org/drawingml/2006/main"/>
+  </p:clrMapOvr>
+</p:notes>
+</file>
+
+<file path=ppt/notesSlides/notesSlide45.xml><?xml version="1.0" encoding="utf-8"?>
+<p:notes xmlns:p="http://schemas.openxmlformats.org/presentationml/2006/main">
+  <p:cSld>
+    <p:spTree>
+      <p:nvGrpSpPr>
+        <p:cNvPr id="1" name=""/>
+        <p:cNvGrpSpPr/>
+        <p:nvPr/>
+      </p:nvGrpSpPr>
+      <p:grpSpPr>
+        <a:xfrm xmlns:a="http://schemas.openxmlformats.org/drawingml/2006/main"/>
+      </p:grpSpPr>
+      <p:sp>
+        <p:nvSpPr>
+          <p:cNvPr id="2" name="Slide Image Placeholder 1"/>
+          <p:cNvSpPr>
+            <a:spLocks xmlns:a="http://schemas.openxmlformats.org/drawingml/2006/main" noGrp="1"/>
+          </p:cNvSpPr>
+          <p:nvPr>
+            <p:ph type="sldImg" idx="0"/>
+          </p:nvPr>
+        </p:nvSpPr>
+        <p:spPr/>
+      </p:sp>
+      <p:sp>
+        <p:nvSpPr>
+          <p:cNvPr id="3" name="Notes Placeholder 2"/>
+          <p:cNvSpPr>
+            <a:spLocks xmlns:a="http://schemas.openxmlformats.org/drawingml/2006/main" noGrp="1"/>
+          </p:cNvSpPr>
+          <p:nvPr>
+            <p:ph type="body" idx="1"/>
+          </p:nvPr>
+        </p:nvSpPr>
+        <p:spPr/>
+        <p:txBody>
+          <a:bodyPr xmlns:a="http://schemas.openxmlformats.org/drawingml/2006/main"/>
+          <a:lstStyle xmlns:a="http://schemas.openxmlformats.org/drawingml/2006/main"/>
+          <a:p xmlns:a="http://schemas.openxmlformats.org/drawingml/2006/main">
+            <a:r>
+              <a:t>Representative pairs are selected by same asset and smallest prior-loss-severity distance, with controls not reused and outcomes excluded. Red is signal close, green next-open entry, and blue exit. The tapes expose residual heterogeneity and should not be read as proof of the average effect.</a:t>
+            </a:r>
+          </a:p>
+          <a:p xmlns:a="http://schemas.openxmlformats.org/drawingml/2006/main">
+            <a:r>
+              <a:t/>
+            </a:r>
+          </a:p>
+          <a:p xmlns:a="http://schemas.openxmlformats.org/drawingml/2006/main">
+            <a:r>
+              <a:t>[Sources]</a:t>
+            </a:r>
+          </a:p>
+          <a:p xmlns:a="http://schemas.openxmlformats.org/drawingml/2006/main">
+            <a:r>
+              <a:t>- Codex task 01a0226e-2fa2-7222-a6d9-79ab971ac616 (2026-08-28), operator-approved abnormal-volume veto falsification.</a:t>
+            </a:r>
+          </a:p>
+          <a:p xmlns:a="http://schemas.openxmlformats.org/drawingml/2006/main">
+            <a:r>
+              <a:t>- runs/research_workbench/operator_hypothesis_lab/return_geometry_abnormal_volume_veto_20260828/visuals/representative_veto_trade_tapes.png</a:t>
+            </a:r>
+          </a:p>
+          <a:p xmlns:a="http://schemas.openxmlformats.org/drawingml/2006/main">
+            <a:r>
+              <a:t>- runs/research_workbench/operator_hypothesis_lab/return_geometry_abnormal_volume_veto_20260828/report.md</a:t>
+            </a:r>
+          </a:p>
+          <a:p xmlns:a="http://schemas.openxmlformats.org/drawingml/2006/main">
+            <a:r>
+              <a:t>- operator_hypothesis_lab/docs/RETURN_GEOMETRY_ABNORMAL_VOLUME_VETO_2018_2023.md</a:t>
+            </a:r>
+          </a:p>
+          <a:p xmlns:a="http://schemas.openxmlformats.org/drawingml/2006/main">
+            <a:r>
+              <a:t>[/Sources]</a:t>
+            </a:r>
+          </a:p>
+        </p:txBody>
+      </p:sp>
+      <p:sp>
+        <p:nvSpPr>
+          <p:cNvPr id="4" name="Slide Number Placeholder 3"/>
+          <p:cNvSpPr>
+            <a:spLocks xmlns:a="http://schemas.openxmlformats.org/drawingml/2006/main" noGrp="1"/>
+          </p:cNvSpPr>
+          <p:nvPr>
+            <p:ph type="sldNum" idx="5"/>
+          </p:nvPr>
+        </p:nvSpPr>
+        <p:spPr/>
+        <p:txBody>
+          <a:bodyPr xmlns:a="http://schemas.openxmlformats.org/drawingml/2006/main"/>
+          <a:lstStyle xmlns:a="http://schemas.openxmlformats.org/drawingml/2006/main"/>
+          <a:p xmlns:a="http://schemas.openxmlformats.org/drawingml/2006/main"/>
+        </p:txBody>
+      </p:sp>
+    </p:spTree>
+  </p:cSld>
+  <p:clrMapOvr>
+    <a:masterClrMapping xmlns:a="http://schemas.openxmlformats.org/drawingml/2006/main"/>
+  </p:clrMapOvr>
+</p:notes>
+</file>
+
+<file path=ppt/notesSlides/notesSlide46.xml><?xml version="1.0" encoding="utf-8"?>
+<p:notes xmlns:p="http://schemas.openxmlformats.org/presentationml/2006/main">
+  <p:cSld>
+    <p:spTree>
+      <p:nvGrpSpPr>
+        <p:cNvPr id="1" name=""/>
+        <p:cNvGrpSpPr/>
+        <p:nvPr/>
+      </p:nvGrpSpPr>
+      <p:grpSpPr>
+        <a:xfrm xmlns:a="http://schemas.openxmlformats.org/drawingml/2006/main"/>
+      </p:grpSpPr>
+      <p:sp>
+        <p:nvSpPr>
+          <p:cNvPr id="2" name="Slide Image Placeholder 1"/>
+          <p:cNvSpPr>
+            <a:spLocks xmlns:a="http://schemas.openxmlformats.org/drawingml/2006/main" noGrp="1"/>
+          </p:cNvSpPr>
+          <p:nvPr>
+            <p:ph type="sldImg" idx="0"/>
+          </p:nvPr>
+        </p:nvSpPr>
+        <p:spPr/>
+      </p:sp>
+      <p:sp>
+        <p:nvSpPr>
+          <p:cNvPr id="3" name="Notes Placeholder 2"/>
+          <p:cNvSpPr>
+            <a:spLocks xmlns:a="http://schemas.openxmlformats.org/drawingml/2006/main" noGrp="1"/>
+          </p:cNvSpPr>
+          <p:nvPr>
+            <p:ph type="body" idx="1"/>
+          </p:nvPr>
+        </p:nvSpPr>
+        <p:spPr/>
+        <p:txBody>
+          <a:bodyPr xmlns:a="http://schemas.openxmlformats.org/drawingml/2006/main"/>
+          <a:lstStyle xmlns:a="http://schemas.openxmlformats.org/drawingml/2006/main"/>
+          <a:p xmlns:a="http://schemas.openxmlformats.org/drawingml/2006/main">
+            <a:r>
+              <a:t>Status: TRAIN_VOLUME_VETO_CROSS_SECTIONAL_SUPPORT_TEMPORALLY_UNSTABLE_STOP_BEFORE_OOS. The veto is the first feature in this lane to behave like a plausible failure-state discriminator: it transports across assets, sectors, matched loss severity, and diagnostic cohorts while preserving 59.6% of events. But only three of six calendar years agree, and 2023 reverses. This is not a promoted edge and does not automatically open OOS.</a:t>
+            </a:r>
+          </a:p>
+          <a:p xmlns:a="http://schemas.openxmlformats.org/drawingml/2006/main">
+            <a:r>
+              <a:t/>
+            </a:r>
+          </a:p>
+          <a:p xmlns:a="http://schemas.openxmlformats.org/drawingml/2006/main">
+            <a:r>
+              <a:t>[Sources]</a:t>
+            </a:r>
+          </a:p>
+          <a:p xmlns:a="http://schemas.openxmlformats.org/drawingml/2006/main">
+            <a:r>
+              <a:t>- Codex task 01a0226e-2fa2-7222-a6d9-79ab971ac616 (2026-08-28), operator-approved abnormal-volume veto falsification.</a:t>
+            </a:r>
+          </a:p>
+          <a:p xmlns:a="http://schemas.openxmlformats.org/drawingml/2006/main">
+            <a:r>
+              <a:t>- runs/research_workbench/operator_hypothesis_lab/return_geometry_abnormal_volume_veto_20260828/status.csv</a:t>
+            </a:r>
+          </a:p>
+          <a:p xmlns:a="http://schemas.openxmlformats.org/drawingml/2006/main">
+            <a:r>
+              <a:t>- runs/research_workbench/operator_hypothesis_lab/return_geometry_abnormal_volume_veto_20260828/train_veto_gates.csv</a:t>
+            </a:r>
+          </a:p>
+          <a:p xmlns:a="http://schemas.openxmlformats.org/drawingml/2006/main">
+            <a:r>
+              <a:t>- runs/research_workbench/operator_hypothesis_lab/return_geometry_abnormal_volume_veto_20260828/temporal_diagnostic.csv</a:t>
+            </a:r>
+          </a:p>
+          <a:p xmlns:a="http://schemas.openxmlformats.org/drawingml/2006/main">
+            <a:r>
+              <a:t>- runs/research_workbench/operator_hypothesis_lab/return_geometry_abnormal_volume_veto_20260828/report.md</a:t>
+            </a:r>
+          </a:p>
+          <a:p xmlns:a="http://schemas.openxmlformats.org/drawingml/2006/main">
+            <a:r>
+              <a:t>- operator_hypothesis_lab/docs/RETURN_GEOMETRY_ABNORMAL_VOLUME_VETO_2018_2023.md</a:t>
             </a:r>
           </a:p>
           <a:p xmlns:a="http://schemas.openxmlformats.org/drawingml/2006/main">
@@ -4139,7 +5315,7 @@
   </p:cSld>
   <p:clrMap bg1="lt1" tx1="dk1" bg2="lt2" tx2="dk2" accent1="accent1" accent2="accent2" accent3="accent3" accent4="accent4" accent5="accent5" accent6="accent6" hlink="hlink" folHlink="folHlink"/>
   <p:sldLayoutIdLst>
-    <p:sldLayoutId xmlns:r="http://schemas.openxmlformats.org/officeDocument/2006/relationships" id="2147483649" r:id="R9a1bc1a0f1ec4a5c"/>
+    <p:sldLayoutId xmlns:r="http://schemas.openxmlformats.org/officeDocument/2006/relationships" id="2147483649" r:id="Rf7e4d197597f400e"/>
   </p:sldLayoutIdLst>
   <p:txStyles>
     <p:titleStyle>
@@ -5280,7 +6456,7 @@
           <p:nvPr/>
         </p:nvPicPr>
         <p:blipFill>
-          <a:blip xmlns:r="http://schemas.openxmlformats.org/officeDocument/2006/relationships" xmlns:a="http://schemas.openxmlformats.org/drawingml/2006/main" r:embed="Rb4ea6678bcf546fe"/>
+          <a:blip xmlns:r="http://schemas.openxmlformats.org/officeDocument/2006/relationships" xmlns:a="http://schemas.openxmlformats.org/drawingml/2006/main" r:embed="R550415a99ab0456f"/>
           <a:stretch xmlns:a="http://schemas.openxmlformats.org/drawingml/2006/main"/>
         </p:blipFill>
         <p:spPr>
@@ -5600,7 +6776,7 @@
           <p:nvPr/>
         </p:nvPicPr>
         <p:blipFill>
-          <a:blip xmlns:r="http://schemas.openxmlformats.org/officeDocument/2006/relationships" xmlns:a="http://schemas.openxmlformats.org/drawingml/2006/main" r:embed="Rcc9057b0bea14ace"/>
+          <a:blip xmlns:r="http://schemas.openxmlformats.org/officeDocument/2006/relationships" xmlns:a="http://schemas.openxmlformats.org/drawingml/2006/main" r:embed="R21a01115d6814e1c"/>
           <a:stretch xmlns:a="http://schemas.openxmlformats.org/drawingml/2006/main"/>
         </p:blipFill>
         <p:spPr>
@@ -5920,7 +7096,7 @@
           <p:nvPr/>
         </p:nvPicPr>
         <p:blipFill>
-          <a:blip xmlns:r="http://schemas.openxmlformats.org/officeDocument/2006/relationships" xmlns:a="http://schemas.openxmlformats.org/drawingml/2006/main" r:embed="Rd20e6dd6f2e64cfc"/>
+          <a:blip xmlns:r="http://schemas.openxmlformats.org/officeDocument/2006/relationships" xmlns:a="http://schemas.openxmlformats.org/drawingml/2006/main" r:embed="Rd03ff41ab72948bb"/>
           <a:stretch xmlns:a="http://schemas.openxmlformats.org/drawingml/2006/main"/>
         </p:blipFill>
         <p:spPr>
@@ -6240,7 +7416,7 @@
           <p:nvPr/>
         </p:nvPicPr>
         <p:blipFill>
-          <a:blip xmlns:r="http://schemas.openxmlformats.org/officeDocument/2006/relationships" xmlns:a="http://schemas.openxmlformats.org/drawingml/2006/main" r:embed="R75fdafde23e34b03"/>
+          <a:blip xmlns:r="http://schemas.openxmlformats.org/officeDocument/2006/relationships" xmlns:a="http://schemas.openxmlformats.org/drawingml/2006/main" r:embed="Rf5d4275df16d432b"/>
           <a:stretch xmlns:a="http://schemas.openxmlformats.org/drawingml/2006/main"/>
         </p:blipFill>
         <p:spPr>
@@ -10094,7 +11270,7 @@
           <p:nvPr/>
         </p:nvPicPr>
         <p:blipFill>
-          <a:blip xmlns:r="http://schemas.openxmlformats.org/officeDocument/2006/relationships" xmlns:a="http://schemas.openxmlformats.org/drawingml/2006/main" r:embed="R90e8a179ed5c4c75"/>
+          <a:blip xmlns:r="http://schemas.openxmlformats.org/officeDocument/2006/relationships" xmlns:a="http://schemas.openxmlformats.org/drawingml/2006/main" r:embed="R9e15d6cec8724ee2"/>
           <a:stretch xmlns:a="http://schemas.openxmlformats.org/drawingml/2006/main"/>
         </p:blipFill>
         <p:spPr>
@@ -10116,10 +11292,10 @@
           <p:nvPr/>
         </p:nvPicPr>
         <p:blipFill>
-          <a:blip xmlns:r="http://schemas.openxmlformats.org/officeDocument/2006/relationships" xmlns:a="http://schemas.openxmlformats.org/drawingml/2006/main" r:embed="Rb593d9fb284e4440">
+          <a:blip xmlns:r="http://schemas.openxmlformats.org/officeDocument/2006/relationships" xmlns:a="http://schemas.openxmlformats.org/drawingml/2006/main" r:embed="R696b2b083d7048ea">
             <a:extLst>
               <a:ext uri="{96DAC541-7B7A-43D3-8B79-37D633B846F1}">
-                <asvg:svgBlip xmlns:asvg="http://schemas.microsoft.com/office/drawing/2016/SVG/main" r:embed="Rd1b66e8ebd9a4690"/>
+                <asvg:svgBlip xmlns:asvg="http://schemas.microsoft.com/office/drawing/2016/SVG/main" r:embed="R7bb7a7d0e44a4f88"/>
               </a:ext>
             </a:extLst>
           </a:blip>
@@ -10144,7 +11320,7 @@
           <p:nvPr/>
         </p:nvPicPr>
         <p:blipFill>
-          <a:blip xmlns:r="http://schemas.openxmlformats.org/officeDocument/2006/relationships" xmlns:a="http://schemas.openxmlformats.org/drawingml/2006/main" r:embed="R5828f87065e14232"/>
+          <a:blip xmlns:r="http://schemas.openxmlformats.org/officeDocument/2006/relationships" xmlns:a="http://schemas.openxmlformats.org/drawingml/2006/main" r:embed="Rbb38ae936ce34d34"/>
           <a:stretch xmlns:a="http://schemas.openxmlformats.org/drawingml/2006/main"/>
         </p:blipFill>
         <p:spPr>
@@ -10464,7 +11640,7 @@
           <p:nvPr/>
         </p:nvPicPr>
         <p:blipFill>
-          <a:blip xmlns:r="http://schemas.openxmlformats.org/officeDocument/2006/relationships" xmlns:a="http://schemas.openxmlformats.org/drawingml/2006/main" r:embed="R526ed293904c48d2"/>
+          <a:blip xmlns:r="http://schemas.openxmlformats.org/officeDocument/2006/relationships" xmlns:a="http://schemas.openxmlformats.org/drawingml/2006/main" r:embed="R74f2bed371204b98"/>
           <a:stretch xmlns:a="http://schemas.openxmlformats.org/drawingml/2006/main"/>
         </p:blipFill>
         <p:spPr>
@@ -10486,10 +11662,10 @@
           <p:nvPr/>
         </p:nvPicPr>
         <p:blipFill>
-          <a:blip xmlns:r="http://schemas.openxmlformats.org/officeDocument/2006/relationships" xmlns:a="http://schemas.openxmlformats.org/drawingml/2006/main" r:embed="R223712f0f72a4f35">
+          <a:blip xmlns:r="http://schemas.openxmlformats.org/officeDocument/2006/relationships" xmlns:a="http://schemas.openxmlformats.org/drawingml/2006/main" r:embed="R7e93977dc21942b3">
             <a:extLst>
               <a:ext uri="{96DAC541-7B7A-43D3-8B79-37D633B846F1}">
-                <asvg:svgBlip xmlns:asvg="http://schemas.microsoft.com/office/drawing/2016/SVG/main" r:embed="R39c6dda9c53549a4"/>
+                <asvg:svgBlip xmlns:asvg="http://schemas.microsoft.com/office/drawing/2016/SVG/main" r:embed="Rf3cc910526f84395"/>
               </a:ext>
             </a:extLst>
           </a:blip>
@@ -10514,7 +11690,7 @@
           <p:nvPr/>
         </p:nvPicPr>
         <p:blipFill>
-          <a:blip xmlns:r="http://schemas.openxmlformats.org/officeDocument/2006/relationships" xmlns:a="http://schemas.openxmlformats.org/drawingml/2006/main" r:embed="Rdff1877855f94cc5"/>
+          <a:blip xmlns:r="http://schemas.openxmlformats.org/officeDocument/2006/relationships" xmlns:a="http://schemas.openxmlformats.org/drawingml/2006/main" r:embed="Rfdf012c40996494c"/>
           <a:stretch xmlns:a="http://schemas.openxmlformats.org/drawingml/2006/main"/>
         </p:blipFill>
         <p:spPr>
@@ -10834,7 +12010,7 @@
           <p:nvPr/>
         </p:nvPicPr>
         <p:blipFill>
-          <a:blip xmlns:r="http://schemas.openxmlformats.org/officeDocument/2006/relationships" xmlns:a="http://schemas.openxmlformats.org/drawingml/2006/main" r:embed="Raf323437f5e7482b"/>
+          <a:blip xmlns:r="http://schemas.openxmlformats.org/officeDocument/2006/relationships" xmlns:a="http://schemas.openxmlformats.org/drawingml/2006/main" r:embed="R7f9dcc85295744fa"/>
           <a:stretch xmlns:a="http://schemas.openxmlformats.org/drawingml/2006/main"/>
         </p:blipFill>
         <p:spPr>
@@ -10856,10 +12032,10 @@
           <p:nvPr/>
         </p:nvPicPr>
         <p:blipFill>
-          <a:blip xmlns:r="http://schemas.openxmlformats.org/officeDocument/2006/relationships" xmlns:a="http://schemas.openxmlformats.org/drawingml/2006/main" r:embed="R98513a2abe2640f6">
+          <a:blip xmlns:r="http://schemas.openxmlformats.org/officeDocument/2006/relationships" xmlns:a="http://schemas.openxmlformats.org/drawingml/2006/main" r:embed="R05e84f67065b4324">
             <a:extLst>
               <a:ext uri="{96DAC541-7B7A-43D3-8B79-37D633B846F1}">
-                <asvg:svgBlip xmlns:asvg="http://schemas.microsoft.com/office/drawing/2016/SVG/main" r:embed="Rf649b1a369264503"/>
+                <asvg:svgBlip xmlns:asvg="http://schemas.microsoft.com/office/drawing/2016/SVG/main" r:embed="R9f3b848b66014be7"/>
               </a:ext>
             </a:extLst>
           </a:blip>
@@ -10884,7 +12060,7 @@
           <p:nvPr/>
         </p:nvPicPr>
         <p:blipFill>
-          <a:blip xmlns:r="http://schemas.openxmlformats.org/officeDocument/2006/relationships" xmlns:a="http://schemas.openxmlformats.org/drawingml/2006/main" r:embed="R63fd89bcfe3a453b"/>
+          <a:blip xmlns:r="http://schemas.openxmlformats.org/officeDocument/2006/relationships" xmlns:a="http://schemas.openxmlformats.org/drawingml/2006/main" r:embed="Ra4c0ff198ba84cfc"/>
           <a:stretch xmlns:a="http://schemas.openxmlformats.org/drawingml/2006/main"/>
         </p:blipFill>
         <p:spPr>
@@ -12382,7 +13558,7 @@
           <p:nvPr/>
         </p:nvPicPr>
         <p:blipFill>
-          <a:blip xmlns:r="http://schemas.openxmlformats.org/officeDocument/2006/relationships" xmlns:a="http://schemas.openxmlformats.org/drawingml/2006/main" r:embed="Rd638c9c77c45489c"/>
+          <a:blip xmlns:r="http://schemas.openxmlformats.org/officeDocument/2006/relationships" xmlns:a="http://schemas.openxmlformats.org/drawingml/2006/main" r:embed="Ra38d71cc165a402e"/>
           <a:stretch xmlns:a="http://schemas.openxmlformats.org/drawingml/2006/main"/>
         </p:blipFill>
         <p:spPr>
@@ -12404,10 +13580,10 @@
           <p:nvPr/>
         </p:nvPicPr>
         <p:blipFill>
-          <a:blip xmlns:r="http://schemas.openxmlformats.org/officeDocument/2006/relationships" xmlns:a="http://schemas.openxmlformats.org/drawingml/2006/main" r:embed="Rd638c9c77c45489c">
+          <a:blip xmlns:r="http://schemas.openxmlformats.org/officeDocument/2006/relationships" xmlns:a="http://schemas.openxmlformats.org/drawingml/2006/main" r:embed="Ra38d71cc165a402e">
             <a:extLst>
               <a:ext uri="{96DAC541-7B7A-43D3-8B79-37D633B846F1}">
-                <asvg:svgBlip xmlns:asvg="http://schemas.microsoft.com/office/drawing/2016/SVG/main" r:embed="R2198f2479a8d42c8"/>
+                <asvg:svgBlip xmlns:asvg="http://schemas.microsoft.com/office/drawing/2016/SVG/main" r:embed="R321e9c1c4eaf4211"/>
               </a:ext>
             </a:extLst>
           </a:blip>
@@ -12432,7 +13608,7 @@
           <p:nvPr/>
         </p:nvPicPr>
         <p:blipFill>
-          <a:blip xmlns:r="http://schemas.openxmlformats.org/officeDocument/2006/relationships" xmlns:a="http://schemas.openxmlformats.org/drawingml/2006/main" r:embed="R13890bfd7bab4962"/>
+          <a:blip xmlns:r="http://schemas.openxmlformats.org/officeDocument/2006/relationships" xmlns:a="http://schemas.openxmlformats.org/drawingml/2006/main" r:embed="R0d1ba547da904921"/>
           <a:stretch xmlns:a="http://schemas.openxmlformats.org/drawingml/2006/main"/>
         </p:blipFill>
         <p:spPr>
@@ -12752,7 +13928,7 @@
           <p:nvPr/>
         </p:nvPicPr>
         <p:blipFill>
-          <a:blip xmlns:r="http://schemas.openxmlformats.org/officeDocument/2006/relationships" xmlns:a="http://schemas.openxmlformats.org/drawingml/2006/main" r:embed="Rce864b5af68f434c"/>
+          <a:blip xmlns:r="http://schemas.openxmlformats.org/officeDocument/2006/relationships" xmlns:a="http://schemas.openxmlformats.org/drawingml/2006/main" r:embed="Re7efc9c4822a45f2"/>
           <a:stretch xmlns:a="http://schemas.openxmlformats.org/drawingml/2006/main"/>
         </p:blipFill>
         <p:spPr>
@@ -12774,10 +13950,10 @@
           <p:nvPr/>
         </p:nvPicPr>
         <p:blipFill>
-          <a:blip xmlns:r="http://schemas.openxmlformats.org/officeDocument/2006/relationships" xmlns:a="http://schemas.openxmlformats.org/drawingml/2006/main" r:embed="Rd62e65010a82485f">
+          <a:blip xmlns:r="http://schemas.openxmlformats.org/officeDocument/2006/relationships" xmlns:a="http://schemas.openxmlformats.org/drawingml/2006/main" r:embed="R556256f355f54149">
             <a:extLst>
               <a:ext uri="{96DAC541-7B7A-43D3-8B79-37D633B846F1}">
-                <asvg:svgBlip xmlns:asvg="http://schemas.microsoft.com/office/drawing/2016/SVG/main" r:embed="Rb2536c315b09405f"/>
+                <asvg:svgBlip xmlns:asvg="http://schemas.microsoft.com/office/drawing/2016/SVG/main" r:embed="R347e9009fc4543e5"/>
               </a:ext>
             </a:extLst>
           </a:blip>
@@ -12802,7 +13978,7 @@
           <p:nvPr/>
         </p:nvPicPr>
         <p:blipFill>
-          <a:blip xmlns:r="http://schemas.openxmlformats.org/officeDocument/2006/relationships" xmlns:a="http://schemas.openxmlformats.org/drawingml/2006/main" r:embed="R1f495f1a78e34df0"/>
+          <a:blip xmlns:r="http://schemas.openxmlformats.org/officeDocument/2006/relationships" xmlns:a="http://schemas.openxmlformats.org/drawingml/2006/main" r:embed="R2cf55043b8284356"/>
           <a:stretch xmlns:a="http://schemas.openxmlformats.org/drawingml/2006/main"/>
         </p:blipFill>
         <p:spPr>
@@ -13122,7 +14298,7 @@
           <p:nvPr/>
         </p:nvPicPr>
         <p:blipFill>
-          <a:blip xmlns:r="http://schemas.openxmlformats.org/officeDocument/2006/relationships" xmlns:a="http://schemas.openxmlformats.org/drawingml/2006/main" r:embed="Rc28abb0bf1d140a5"/>
+          <a:blip xmlns:r="http://schemas.openxmlformats.org/officeDocument/2006/relationships" xmlns:a="http://schemas.openxmlformats.org/drawingml/2006/main" r:embed="R29385c9b7ca141dc"/>
           <a:stretch xmlns:a="http://schemas.openxmlformats.org/drawingml/2006/main"/>
         </p:blipFill>
         <p:spPr>
@@ -13144,10 +14320,10 @@
           <p:nvPr/>
         </p:nvPicPr>
         <p:blipFill>
-          <a:blip xmlns:r="http://schemas.openxmlformats.org/officeDocument/2006/relationships" xmlns:a="http://schemas.openxmlformats.org/drawingml/2006/main" r:embed="Rf41e894309644b25">
+          <a:blip xmlns:r="http://schemas.openxmlformats.org/officeDocument/2006/relationships" xmlns:a="http://schemas.openxmlformats.org/drawingml/2006/main" r:embed="R28ecdf02fb224d83">
             <a:extLst>
               <a:ext uri="{96DAC541-7B7A-43D3-8B79-37D633B846F1}">
-                <asvg:svgBlip xmlns:asvg="http://schemas.microsoft.com/office/drawing/2016/SVG/main" r:embed="Rf6a6ff2847324ef0"/>
+                <asvg:svgBlip xmlns:asvg="http://schemas.microsoft.com/office/drawing/2016/SVG/main" r:embed="R37217038025142b7"/>
               </a:ext>
             </a:extLst>
           </a:blip>
@@ -13172,7 +14348,7 @@
           <p:nvPr/>
         </p:nvPicPr>
         <p:blipFill>
-          <a:blip xmlns:r="http://schemas.openxmlformats.org/officeDocument/2006/relationships" xmlns:a="http://schemas.openxmlformats.org/drawingml/2006/main" r:embed="Rf06448feddfc47f1"/>
+          <a:blip xmlns:r="http://schemas.openxmlformats.org/officeDocument/2006/relationships" xmlns:a="http://schemas.openxmlformats.org/drawingml/2006/main" r:embed="R55850fc015574643"/>
           <a:stretch xmlns:a="http://schemas.openxmlformats.org/drawingml/2006/main"/>
         </p:blipFill>
         <p:spPr>
@@ -13492,7 +14668,7 @@
           <p:nvPr/>
         </p:nvPicPr>
         <p:blipFill>
-          <a:blip xmlns:r="http://schemas.openxmlformats.org/officeDocument/2006/relationships" xmlns:a="http://schemas.openxmlformats.org/drawingml/2006/main" r:embed="R10562d56b9a544d2"/>
+          <a:blip xmlns:r="http://schemas.openxmlformats.org/officeDocument/2006/relationships" xmlns:a="http://schemas.openxmlformats.org/drawingml/2006/main" r:embed="Rf475b904b0ef4326"/>
           <a:stretch xmlns:a="http://schemas.openxmlformats.org/drawingml/2006/main"/>
         </p:blipFill>
         <p:spPr>
@@ -13514,10 +14690,10 @@
           <p:nvPr/>
         </p:nvPicPr>
         <p:blipFill>
-          <a:blip xmlns:r="http://schemas.openxmlformats.org/officeDocument/2006/relationships" xmlns:a="http://schemas.openxmlformats.org/drawingml/2006/main" r:embed="Rd68dc82ddc65458d">
+          <a:blip xmlns:r="http://schemas.openxmlformats.org/officeDocument/2006/relationships" xmlns:a="http://schemas.openxmlformats.org/drawingml/2006/main" r:embed="R7dac6bd60c194d9e">
             <a:extLst>
               <a:ext uri="{96DAC541-7B7A-43D3-8B79-37D633B846F1}">
-                <asvg:svgBlip xmlns:asvg="http://schemas.microsoft.com/office/drawing/2016/SVG/main" r:embed="Rd5ece239faa448fb"/>
+                <asvg:svgBlip xmlns:asvg="http://schemas.microsoft.com/office/drawing/2016/SVG/main" r:embed="Re0c93f797dcd48f7"/>
               </a:ext>
             </a:extLst>
           </a:blip>
@@ -13542,7 +14718,7 @@
           <p:nvPr/>
         </p:nvPicPr>
         <p:blipFill>
-          <a:blip xmlns:r="http://schemas.openxmlformats.org/officeDocument/2006/relationships" xmlns:a="http://schemas.openxmlformats.org/drawingml/2006/main" r:embed="R2dc12da9cc514751"/>
+          <a:blip xmlns:r="http://schemas.openxmlformats.org/officeDocument/2006/relationships" xmlns:a="http://schemas.openxmlformats.org/drawingml/2006/main" r:embed="R4af7e6a2dd3b4c04"/>
           <a:stretch xmlns:a="http://schemas.openxmlformats.org/drawingml/2006/main"/>
         </p:blipFill>
         <p:spPr>
@@ -18574,7 +19750,7 @@
           <p:nvPr/>
         </p:nvPicPr>
         <p:blipFill>
-          <a:blip xmlns:r="http://schemas.openxmlformats.org/officeDocument/2006/relationships" xmlns:a="http://schemas.openxmlformats.org/drawingml/2006/main" r:embed="R4fbe27f2ee1a4b2d"/>
+          <a:blip xmlns:r="http://schemas.openxmlformats.org/officeDocument/2006/relationships" xmlns:a="http://schemas.openxmlformats.org/drawingml/2006/main" r:embed="Rba6bc810bc914a64"/>
           <a:stretch xmlns:a="http://schemas.openxmlformats.org/drawingml/2006/main"/>
         </p:blipFill>
         <p:spPr>
@@ -18596,10 +19772,10 @@
           <p:nvPr/>
         </p:nvPicPr>
         <p:blipFill>
-          <a:blip xmlns:r="http://schemas.openxmlformats.org/officeDocument/2006/relationships" xmlns:a="http://schemas.openxmlformats.org/drawingml/2006/main" r:embed="Rd7548e3fa6e94280">
+          <a:blip xmlns:r="http://schemas.openxmlformats.org/officeDocument/2006/relationships" xmlns:a="http://schemas.openxmlformats.org/drawingml/2006/main" r:embed="R899b9a9d2c794e47">
             <a:extLst>
               <a:ext uri="{96DAC541-7B7A-43D3-8B79-37D633B846F1}">
-                <asvg:svgBlip xmlns:asvg="http://schemas.microsoft.com/office/drawing/2016/SVG/main" r:embed="R4f5b0e96053c4a99"/>
+                <asvg:svgBlip xmlns:asvg="http://schemas.microsoft.com/office/drawing/2016/SVG/main" r:embed="Rb4b773afaa0b4dc3"/>
               </a:ext>
             </a:extLst>
           </a:blip>
@@ -18624,7 +19800,7 @@
           <p:nvPr/>
         </p:nvPicPr>
         <p:blipFill>
-          <a:blip xmlns:r="http://schemas.openxmlformats.org/officeDocument/2006/relationships" xmlns:a="http://schemas.openxmlformats.org/drawingml/2006/main" r:embed="Re1e43640827e4acc"/>
+          <a:blip xmlns:r="http://schemas.openxmlformats.org/officeDocument/2006/relationships" xmlns:a="http://schemas.openxmlformats.org/drawingml/2006/main" r:embed="Rc856a1114e734165"/>
           <a:stretch xmlns:a="http://schemas.openxmlformats.org/drawingml/2006/main"/>
         </p:blipFill>
         <p:spPr>
@@ -18646,10 +19822,10 @@
           <p:nvPr/>
         </p:nvPicPr>
         <p:blipFill>
-          <a:blip xmlns:r="http://schemas.openxmlformats.org/officeDocument/2006/relationships" xmlns:a="http://schemas.openxmlformats.org/drawingml/2006/main" r:embed="Rd69cdda9f76844fd">
+          <a:blip xmlns:r="http://schemas.openxmlformats.org/officeDocument/2006/relationships" xmlns:a="http://schemas.openxmlformats.org/drawingml/2006/main" r:embed="R109d6eacfd5e436f">
             <a:extLst>
               <a:ext uri="{96DAC541-7B7A-43D3-8B79-37D633B846F1}">
-                <asvg:svgBlip xmlns:asvg="http://schemas.microsoft.com/office/drawing/2016/SVG/main" r:embed="R2213ed87da5f4139"/>
+                <asvg:svgBlip xmlns:asvg="http://schemas.microsoft.com/office/drawing/2016/SVG/main" r:embed="Rad3d2dd657e943fa"/>
               </a:ext>
             </a:extLst>
           </a:blip>
@@ -18674,7 +19850,7 @@
           <p:nvPr/>
         </p:nvPicPr>
         <p:blipFill>
-          <a:blip xmlns:r="http://schemas.openxmlformats.org/officeDocument/2006/relationships" xmlns:a="http://schemas.openxmlformats.org/drawingml/2006/main" r:embed="Rd240c2d0e74f48c3"/>
+          <a:blip xmlns:r="http://schemas.openxmlformats.org/officeDocument/2006/relationships" xmlns:a="http://schemas.openxmlformats.org/drawingml/2006/main" r:embed="Red9e451a54b94608"/>
           <a:stretch xmlns:a="http://schemas.openxmlformats.org/drawingml/2006/main"/>
         </p:blipFill>
         <p:spPr>
@@ -18994,7 +20170,7 @@
           <p:nvPr/>
         </p:nvPicPr>
         <p:blipFill>
-          <a:blip xmlns:r="http://schemas.openxmlformats.org/officeDocument/2006/relationships" xmlns:a="http://schemas.openxmlformats.org/drawingml/2006/main" r:embed="Rb41e399745a440ea"/>
+          <a:blip xmlns:r="http://schemas.openxmlformats.org/officeDocument/2006/relationships" xmlns:a="http://schemas.openxmlformats.org/drawingml/2006/main" r:embed="Rfe21355fb8384ab9"/>
           <a:stretch xmlns:a="http://schemas.openxmlformats.org/drawingml/2006/main"/>
         </p:blipFill>
         <p:spPr>
@@ -19016,10 +20192,10 @@
           <p:nvPr/>
         </p:nvPicPr>
         <p:blipFill>
-          <a:blip xmlns:r="http://schemas.openxmlformats.org/officeDocument/2006/relationships" xmlns:a="http://schemas.openxmlformats.org/drawingml/2006/main" r:embed="R74fe3345eb6b4814">
+          <a:blip xmlns:r="http://schemas.openxmlformats.org/officeDocument/2006/relationships" xmlns:a="http://schemas.openxmlformats.org/drawingml/2006/main" r:embed="Ra10b6be2d41d4f85">
             <a:extLst>
               <a:ext uri="{96DAC541-7B7A-43D3-8B79-37D633B846F1}">
-                <asvg:svgBlip xmlns:asvg="http://schemas.microsoft.com/office/drawing/2016/SVG/main" r:embed="Rc7be531d77724f94"/>
+                <asvg:svgBlip xmlns:asvg="http://schemas.microsoft.com/office/drawing/2016/SVG/main" r:embed="R0337e150eb184c0e"/>
               </a:ext>
             </a:extLst>
           </a:blip>
@@ -19044,7 +20220,7 @@
           <p:nvPr/>
         </p:nvPicPr>
         <p:blipFill>
-          <a:blip xmlns:r="http://schemas.openxmlformats.org/officeDocument/2006/relationships" xmlns:a="http://schemas.openxmlformats.org/drawingml/2006/main" r:embed="R1a386771a0c440e6"/>
+          <a:blip xmlns:r="http://schemas.openxmlformats.org/officeDocument/2006/relationships" xmlns:a="http://schemas.openxmlformats.org/drawingml/2006/main" r:embed="R5d2ca5d35c354b99"/>
           <a:stretch xmlns:a="http://schemas.openxmlformats.org/drawingml/2006/main"/>
         </p:blipFill>
         <p:spPr>
@@ -19066,10 +20242,10 @@
           <p:nvPr/>
         </p:nvPicPr>
         <p:blipFill>
-          <a:blip xmlns:r="http://schemas.openxmlformats.org/officeDocument/2006/relationships" xmlns:a="http://schemas.openxmlformats.org/drawingml/2006/main" r:embed="R0f6857c0a3664568">
+          <a:blip xmlns:r="http://schemas.openxmlformats.org/officeDocument/2006/relationships" xmlns:a="http://schemas.openxmlformats.org/drawingml/2006/main" r:embed="R32a33f812c674f54">
             <a:extLst>
               <a:ext uri="{96DAC541-7B7A-43D3-8B79-37D633B846F1}">
-                <asvg:svgBlip xmlns:asvg="http://schemas.microsoft.com/office/drawing/2016/SVG/main" r:embed="R0fc7c49f83a641c1"/>
+                <asvg:svgBlip xmlns:asvg="http://schemas.microsoft.com/office/drawing/2016/SVG/main" r:embed="R06365647ff9547ca"/>
               </a:ext>
             </a:extLst>
           </a:blip>
@@ -19094,7 +20270,7 @@
           <p:nvPr/>
         </p:nvPicPr>
         <p:blipFill>
-          <a:blip xmlns:r="http://schemas.openxmlformats.org/officeDocument/2006/relationships" xmlns:a="http://schemas.openxmlformats.org/drawingml/2006/main" r:embed="R275b214835da47fb"/>
+          <a:blip xmlns:r="http://schemas.openxmlformats.org/officeDocument/2006/relationships" xmlns:a="http://schemas.openxmlformats.org/drawingml/2006/main" r:embed="R39779e9262e54949"/>
           <a:stretch xmlns:a="http://schemas.openxmlformats.org/drawingml/2006/main"/>
         </p:blipFill>
         <p:spPr>
@@ -20474,7 +21650,7 @@
           <p:nvPr/>
         </p:nvPicPr>
         <p:blipFill>
-          <a:blip xmlns:r="http://schemas.openxmlformats.org/officeDocument/2006/relationships" xmlns:a="http://schemas.openxmlformats.org/drawingml/2006/main" r:embed="R26c0fbeff87f4c77"/>
+          <a:blip xmlns:r="http://schemas.openxmlformats.org/officeDocument/2006/relationships" xmlns:a="http://schemas.openxmlformats.org/drawingml/2006/main" r:embed="Rd5ae1ee474974a4d"/>
           <a:stretch xmlns:a="http://schemas.openxmlformats.org/drawingml/2006/main"/>
         </p:blipFill>
         <p:spPr>
@@ -20496,10 +21672,10 @@
           <p:nvPr/>
         </p:nvPicPr>
         <p:blipFill>
-          <a:blip xmlns:r="http://schemas.openxmlformats.org/officeDocument/2006/relationships" xmlns:a="http://schemas.openxmlformats.org/drawingml/2006/main" r:embed="Rddb7078c7103400b">
+          <a:blip xmlns:r="http://schemas.openxmlformats.org/officeDocument/2006/relationships" xmlns:a="http://schemas.openxmlformats.org/drawingml/2006/main" r:embed="R5f71567723d644aa">
             <a:extLst>
               <a:ext uri="{96DAC541-7B7A-43D3-8B79-37D633B846F1}">
-                <asvg:svgBlip xmlns:asvg="http://schemas.microsoft.com/office/drawing/2016/SVG/main" r:embed="R3c94d459e707489d"/>
+                <asvg:svgBlip xmlns:asvg="http://schemas.microsoft.com/office/drawing/2016/SVG/main" r:embed="Rea81215c17e94ce7"/>
               </a:ext>
             </a:extLst>
           </a:blip>
@@ -20524,7 +21700,7 @@
           <p:nvPr/>
         </p:nvPicPr>
         <p:blipFill>
-          <a:blip xmlns:r="http://schemas.openxmlformats.org/officeDocument/2006/relationships" xmlns:a="http://schemas.openxmlformats.org/drawingml/2006/main" r:embed="R083dfc005a6a4852"/>
+          <a:blip xmlns:r="http://schemas.openxmlformats.org/officeDocument/2006/relationships" xmlns:a="http://schemas.openxmlformats.org/drawingml/2006/main" r:embed="R8cf4fd99855042ad"/>
           <a:stretch xmlns:a="http://schemas.openxmlformats.org/drawingml/2006/main"/>
         </p:blipFill>
         <p:spPr>
@@ -20546,10 +21722,10 @@
           <p:nvPr/>
         </p:nvPicPr>
         <p:blipFill>
-          <a:blip xmlns:r="http://schemas.openxmlformats.org/officeDocument/2006/relationships" xmlns:a="http://schemas.openxmlformats.org/drawingml/2006/main" r:embed="Rcfa003e458744aa9">
+          <a:blip xmlns:r="http://schemas.openxmlformats.org/officeDocument/2006/relationships" xmlns:a="http://schemas.openxmlformats.org/drawingml/2006/main" r:embed="Rf6e2c61ecd0045f2">
             <a:extLst>
               <a:ext uri="{96DAC541-7B7A-43D3-8B79-37D633B846F1}">
-                <asvg:svgBlip xmlns:asvg="http://schemas.microsoft.com/office/drawing/2016/SVG/main" r:embed="R45b69912d3574e35"/>
+                <asvg:svgBlip xmlns:asvg="http://schemas.microsoft.com/office/drawing/2016/SVG/main" r:embed="R421327066b584709"/>
               </a:ext>
             </a:extLst>
           </a:blip>
@@ -20574,7 +21750,7 @@
           <p:nvPr/>
         </p:nvPicPr>
         <p:blipFill>
-          <a:blip xmlns:r="http://schemas.openxmlformats.org/officeDocument/2006/relationships" xmlns:a="http://schemas.openxmlformats.org/drawingml/2006/main" r:embed="R61864fea5aa74f3b"/>
+          <a:blip xmlns:r="http://schemas.openxmlformats.org/officeDocument/2006/relationships" xmlns:a="http://schemas.openxmlformats.org/drawingml/2006/main" r:embed="R6b0ee08febaa4dc4"/>
           <a:stretch xmlns:a="http://schemas.openxmlformats.org/drawingml/2006/main"/>
         </p:blipFill>
         <p:spPr>
@@ -20894,7 +22070,7 @@
           <p:nvPr/>
         </p:nvPicPr>
         <p:blipFill>
-          <a:blip xmlns:r="http://schemas.openxmlformats.org/officeDocument/2006/relationships" xmlns:a="http://schemas.openxmlformats.org/drawingml/2006/main" r:embed="Rdc801e931c184dee"/>
+          <a:blip xmlns:r="http://schemas.openxmlformats.org/officeDocument/2006/relationships" xmlns:a="http://schemas.openxmlformats.org/drawingml/2006/main" r:embed="Raade26fd17df4806"/>
           <a:stretch xmlns:a="http://schemas.openxmlformats.org/drawingml/2006/main"/>
         </p:blipFill>
         <p:spPr>
@@ -20916,10 +22092,10 @@
           <p:nvPr/>
         </p:nvPicPr>
         <p:blipFill>
-          <a:blip xmlns:r="http://schemas.openxmlformats.org/officeDocument/2006/relationships" xmlns:a="http://schemas.openxmlformats.org/drawingml/2006/main" r:embed="R0b43362d449c4fe9">
+          <a:blip xmlns:r="http://schemas.openxmlformats.org/officeDocument/2006/relationships" xmlns:a="http://schemas.openxmlformats.org/drawingml/2006/main" r:embed="Rb843708da0e244e0">
             <a:extLst>
               <a:ext uri="{96DAC541-7B7A-43D3-8B79-37D633B846F1}">
-                <asvg:svgBlip xmlns:asvg="http://schemas.microsoft.com/office/drawing/2016/SVG/main" r:embed="R9d7738e4f9494906"/>
+                <asvg:svgBlip xmlns:asvg="http://schemas.microsoft.com/office/drawing/2016/SVG/main" r:embed="Rcd5610de830d4d60"/>
               </a:ext>
             </a:extLst>
           </a:blip>
@@ -20944,7 +22120,7 @@
           <p:nvPr/>
         </p:nvPicPr>
         <p:blipFill>
-          <a:blip xmlns:r="http://schemas.openxmlformats.org/officeDocument/2006/relationships" xmlns:a="http://schemas.openxmlformats.org/drawingml/2006/main" r:embed="Rdfd202397e72499c"/>
+          <a:blip xmlns:r="http://schemas.openxmlformats.org/officeDocument/2006/relationships" xmlns:a="http://schemas.openxmlformats.org/drawingml/2006/main" r:embed="Rab92f4d44595469d"/>
           <a:stretch xmlns:a="http://schemas.openxmlformats.org/drawingml/2006/main"/>
         </p:blipFill>
         <p:spPr>
@@ -20966,10 +22142,10 @@
           <p:nvPr/>
         </p:nvPicPr>
         <p:blipFill>
-          <a:blip xmlns:r="http://schemas.openxmlformats.org/officeDocument/2006/relationships" xmlns:a="http://schemas.openxmlformats.org/drawingml/2006/main" r:embed="Rf2c3e8b63ae04fb3">
+          <a:blip xmlns:r="http://schemas.openxmlformats.org/officeDocument/2006/relationships" xmlns:a="http://schemas.openxmlformats.org/drawingml/2006/main" r:embed="R0e7066525a274846">
             <a:extLst>
               <a:ext uri="{96DAC541-7B7A-43D3-8B79-37D633B846F1}">
-                <asvg:svgBlip xmlns:asvg="http://schemas.microsoft.com/office/drawing/2016/SVG/main" r:embed="R17b73dcb67a44f0e"/>
+                <asvg:svgBlip xmlns:asvg="http://schemas.microsoft.com/office/drawing/2016/SVG/main" r:embed="Ra60468ba2eb64226"/>
               </a:ext>
             </a:extLst>
           </a:blip>
@@ -20994,7 +22170,7 @@
           <p:nvPr/>
         </p:nvPicPr>
         <p:blipFill>
-          <a:blip xmlns:r="http://schemas.openxmlformats.org/officeDocument/2006/relationships" xmlns:a="http://schemas.openxmlformats.org/drawingml/2006/main" r:embed="Rf14b1a2698844853"/>
+          <a:blip xmlns:r="http://schemas.openxmlformats.org/officeDocument/2006/relationships" xmlns:a="http://schemas.openxmlformats.org/drawingml/2006/main" r:embed="R948715af7ff14cdb"/>
           <a:stretch xmlns:a="http://schemas.openxmlformats.org/drawingml/2006/main"/>
         </p:blipFill>
         <p:spPr>
@@ -21314,7 +22490,7 @@
           <p:nvPr/>
         </p:nvPicPr>
         <p:blipFill>
-          <a:blip xmlns:r="http://schemas.openxmlformats.org/officeDocument/2006/relationships" xmlns:a="http://schemas.openxmlformats.org/drawingml/2006/main" r:embed="Rcd545d12899a4be8"/>
+          <a:blip xmlns:r="http://schemas.openxmlformats.org/officeDocument/2006/relationships" xmlns:a="http://schemas.openxmlformats.org/drawingml/2006/main" r:embed="Re0e9bfa0561b419a"/>
           <a:stretch xmlns:a="http://schemas.openxmlformats.org/drawingml/2006/main"/>
         </p:blipFill>
         <p:spPr>
@@ -21336,10 +22512,10 @@
           <p:nvPr/>
         </p:nvPicPr>
         <p:blipFill>
-          <a:blip xmlns:r="http://schemas.openxmlformats.org/officeDocument/2006/relationships" xmlns:a="http://schemas.openxmlformats.org/drawingml/2006/main" r:embed="R5609779dcc924c50">
+          <a:blip xmlns:r="http://schemas.openxmlformats.org/officeDocument/2006/relationships" xmlns:a="http://schemas.openxmlformats.org/drawingml/2006/main" r:embed="Rbebca5c9b20541a4">
             <a:extLst>
               <a:ext uri="{96DAC541-7B7A-43D3-8B79-37D633B846F1}">
-                <asvg:svgBlip xmlns:asvg="http://schemas.microsoft.com/office/drawing/2016/SVG/main" r:embed="Rb5f5de4670534922"/>
+                <asvg:svgBlip xmlns:asvg="http://schemas.microsoft.com/office/drawing/2016/SVG/main" r:embed="Rde131172576346ef"/>
               </a:ext>
             </a:extLst>
           </a:blip>
@@ -21364,7 +22540,7 @@
           <p:nvPr/>
         </p:nvPicPr>
         <p:blipFill>
-          <a:blip xmlns:r="http://schemas.openxmlformats.org/officeDocument/2006/relationships" xmlns:a="http://schemas.openxmlformats.org/drawingml/2006/main" r:embed="R9c4263df46344766"/>
+          <a:blip xmlns:r="http://schemas.openxmlformats.org/officeDocument/2006/relationships" xmlns:a="http://schemas.openxmlformats.org/drawingml/2006/main" r:embed="R9b5fb0aaffbb455c"/>
           <a:stretch xmlns:a="http://schemas.openxmlformats.org/drawingml/2006/main"/>
         </p:blipFill>
         <p:spPr>
@@ -21386,10 +22562,10 @@
           <p:nvPr/>
         </p:nvPicPr>
         <p:blipFill>
-          <a:blip xmlns:r="http://schemas.openxmlformats.org/officeDocument/2006/relationships" xmlns:a="http://schemas.openxmlformats.org/drawingml/2006/main" r:embed="R8946cbaa4c474d04">
+          <a:blip xmlns:r="http://schemas.openxmlformats.org/officeDocument/2006/relationships" xmlns:a="http://schemas.openxmlformats.org/drawingml/2006/main" r:embed="R14999d87ea304b9d">
             <a:extLst>
               <a:ext uri="{96DAC541-7B7A-43D3-8B79-37D633B846F1}">
-                <asvg:svgBlip xmlns:asvg="http://schemas.microsoft.com/office/drawing/2016/SVG/main" r:embed="R5fcf9b08efac4133"/>
+                <asvg:svgBlip xmlns:asvg="http://schemas.microsoft.com/office/drawing/2016/SVG/main" r:embed="Rc8b5268de4ab481d"/>
               </a:ext>
             </a:extLst>
           </a:blip>
@@ -21414,7 +22590,7 @@
           <p:nvPr/>
         </p:nvPicPr>
         <p:blipFill>
-          <a:blip xmlns:r="http://schemas.openxmlformats.org/officeDocument/2006/relationships" xmlns:a="http://schemas.openxmlformats.org/drawingml/2006/main" r:embed="R4e672ddb47254905"/>
+          <a:blip xmlns:r="http://schemas.openxmlformats.org/officeDocument/2006/relationships" xmlns:a="http://schemas.openxmlformats.org/drawingml/2006/main" r:embed="R3f6faac0d0bb454a"/>
           <a:stretch xmlns:a="http://schemas.openxmlformats.org/drawingml/2006/main"/>
         </p:blipFill>
         <p:spPr>
@@ -21734,7 +22910,7 @@
           <p:nvPr/>
         </p:nvPicPr>
         <p:blipFill>
-          <a:blip xmlns:r="http://schemas.openxmlformats.org/officeDocument/2006/relationships" xmlns:a="http://schemas.openxmlformats.org/drawingml/2006/main" r:embed="R9e07a8662620459d"/>
+          <a:blip xmlns:r="http://schemas.openxmlformats.org/officeDocument/2006/relationships" xmlns:a="http://schemas.openxmlformats.org/drawingml/2006/main" r:embed="R323bd8cf2ee0493e"/>
           <a:stretch xmlns:a="http://schemas.openxmlformats.org/drawingml/2006/main"/>
         </p:blipFill>
         <p:spPr>
@@ -21756,10 +22932,10 @@
           <p:nvPr/>
         </p:nvPicPr>
         <p:blipFill>
-          <a:blip xmlns:r="http://schemas.openxmlformats.org/officeDocument/2006/relationships" xmlns:a="http://schemas.openxmlformats.org/drawingml/2006/main" r:embed="R5b3f60896fae45ca">
+          <a:blip xmlns:r="http://schemas.openxmlformats.org/officeDocument/2006/relationships" xmlns:a="http://schemas.openxmlformats.org/drawingml/2006/main" r:embed="Rd10799f772794a90">
             <a:extLst>
               <a:ext uri="{96DAC541-7B7A-43D3-8B79-37D633B846F1}">
-                <asvg:svgBlip xmlns:asvg="http://schemas.microsoft.com/office/drawing/2016/SVG/main" r:embed="Rfe3bafa1731d43fe"/>
+                <asvg:svgBlip xmlns:asvg="http://schemas.microsoft.com/office/drawing/2016/SVG/main" r:embed="R387c97f5c0bd4999"/>
               </a:ext>
             </a:extLst>
           </a:blip>
@@ -21784,7 +22960,7 @@
           <p:nvPr/>
         </p:nvPicPr>
         <p:blipFill>
-          <a:blip xmlns:r="http://schemas.openxmlformats.org/officeDocument/2006/relationships" xmlns:a="http://schemas.openxmlformats.org/drawingml/2006/main" r:embed="R17fec53a509e4147"/>
+          <a:blip xmlns:r="http://schemas.openxmlformats.org/officeDocument/2006/relationships" xmlns:a="http://schemas.openxmlformats.org/drawingml/2006/main" r:embed="R35a01ea5dc554aa7"/>
           <a:stretch xmlns:a="http://schemas.openxmlformats.org/drawingml/2006/main"/>
         </p:blipFill>
         <p:spPr>
@@ -21806,10 +22982,10 @@
           <p:nvPr/>
         </p:nvPicPr>
         <p:blipFill>
-          <a:blip xmlns:r="http://schemas.openxmlformats.org/officeDocument/2006/relationships" xmlns:a="http://schemas.openxmlformats.org/drawingml/2006/main" r:embed="Rc197bb2b2db14096">
+          <a:blip xmlns:r="http://schemas.openxmlformats.org/officeDocument/2006/relationships" xmlns:a="http://schemas.openxmlformats.org/drawingml/2006/main" r:embed="R94de84f5b434492a">
             <a:extLst>
               <a:ext uri="{96DAC541-7B7A-43D3-8B79-37D633B846F1}">
-                <asvg:svgBlip xmlns:asvg="http://schemas.microsoft.com/office/drawing/2016/SVG/main" r:embed="R1dc7384586104469"/>
+                <asvg:svgBlip xmlns:asvg="http://schemas.microsoft.com/office/drawing/2016/SVG/main" r:embed="Rf196d6ba5d6040cc"/>
               </a:ext>
             </a:extLst>
           </a:blip>
@@ -21834,7 +23010,7 @@
           <p:nvPr/>
         </p:nvPicPr>
         <p:blipFill>
-          <a:blip xmlns:r="http://schemas.openxmlformats.org/officeDocument/2006/relationships" xmlns:a="http://schemas.openxmlformats.org/drawingml/2006/main" r:embed="Ra5458cfc2bd349e5"/>
+          <a:blip xmlns:r="http://schemas.openxmlformats.org/officeDocument/2006/relationships" xmlns:a="http://schemas.openxmlformats.org/drawingml/2006/main" r:embed="R05140ad10bb342f1"/>
           <a:stretch xmlns:a="http://schemas.openxmlformats.org/drawingml/2006/main"/>
         </p:blipFill>
         <p:spPr>
@@ -24213,6 +25389,3302 @@
 </p:sld>
 </file>
 
+<file path=ppt/slides/slide36.xml><?xml version="1.0" encoding="utf-8"?>
+<p:sld xmlns:p="http://schemas.openxmlformats.org/presentationml/2006/main">
+  <p:cSld>
+    <p:bg>
+      <p:bgPr>
+        <a:solidFill xmlns:a="http://schemas.openxmlformats.org/drawingml/2006/main">
+          <a:srgbClr val="FFFFFF"/>
+        </a:solidFill>
+      </p:bgPr>
+    </p:bg>
+    <p:spTree>
+      <p:nvGrpSpPr>
+        <p:cNvPr id="1" name=""/>
+        <p:cNvGrpSpPr/>
+        <p:nvPr/>
+      </p:nvGrpSpPr>
+      <p:grpSpPr>
+        <a:xfrm xmlns:a="http://schemas.openxmlformats.org/drawingml/2006/main"/>
+      </p:grpSpPr>
+      <p:sp>
+        <p:nvSpPr>
+          <p:cNvPr id="24" name="section-11">
+            <a:extLst xmlns:a="http://schemas.openxmlformats.org/drawingml/2006/main">
+              <a:ext uri="{FF2B5EF4-FFF2-40B4-BE49-F238E27FC236}">
+                <a16:creationId xmlns:a16="http://schemas.microsoft.com/office/drawing/2014/main" id="{272ED433-B59C-436C-9DFB-4D317B90A13F}"/>
+              </a:ext>
+            </a:extLst>
+          </p:cNvPr>
+          <p:cNvSpPr>
+            <a:spLocks xmlns:a="http://schemas.openxmlformats.org/drawingml/2006/main" noGrp="1"/>
+          </p:cNvSpPr>
+          <p:nvPr/>
+        </p:nvSpPr>
+        <p:spPr>
+          <a:xfrm xmlns:a="http://schemas.openxmlformats.org/drawingml/2006/main">
+            <a:off x="457200" y="228600"/>
+            <a:ext cx="4191000" cy="228600"/>
+          </a:xfrm>
+          <a:prstGeom xmlns:a="http://schemas.openxmlformats.org/drawingml/2006/main" prst="rect">
+            <a:avLst/>
+          </a:prstGeom>
+          <a:noFill xmlns:a="http://schemas.openxmlformats.org/drawingml/2006/main"/>
+          <a:ln xmlns:a="http://schemas.openxmlformats.org/drawingml/2006/main" w="0">
+            <a:noFill/>
+            <a:prstDash val="solid"/>
+          </a:ln>
+        </p:spPr>
+        <p:txBody>
+          <a:bodyPr xmlns:a="http://schemas.openxmlformats.org/drawingml/2006/main" wrap="square" lIns="0" tIns="0" rIns="0" bIns="0" anchor="t">
+            <a:normAutofit fontScale="100000"/>
+          </a:bodyPr>
+          <a:lstStyle xmlns:a="http://schemas.openxmlformats.org/drawingml/2006/main"/>
+          <a:p xmlns:a="http://schemas.openxmlformats.org/drawingml/2006/main">
+            <a:pPr algn="l">
+              <a:buNone/>
+              <a:defRPr sz="1200" b="1">
+                <a:solidFill>
+                  <a:srgbClr val="667384"/>
+                </a:solidFill>
+                <a:latin typeface="Arial"/>
+                <a:ea typeface="Arial"/>
+                <a:cs typeface="Arial"/>
+              </a:defRPr>
+            </a:pPr>
+            <a:r>
+              <a:rPr sz="1200" b="1">
+                <a:solidFill>
+                  <a:srgbClr val="667384"/>
+                </a:solidFill>
+                <a:latin typeface="Arial"/>
+                <a:ea typeface="Arial"/>
+                <a:cs typeface="Arial"/>
+              </a:rPr>
+              <a:t>VETO LAB</a:t>
+            </a:r>
+          </a:p>
+        </p:txBody>
+      </p:sp>
+      <p:sp>
+        <p:nvSpPr>
+          <p:cNvPr id="2" name="title-11">
+            <a:extLst xmlns:a="http://schemas.openxmlformats.org/drawingml/2006/main">
+              <a:ext uri="{FF2B5EF4-FFF2-40B4-BE49-F238E27FC236}">
+                <a16:creationId xmlns:a16="http://schemas.microsoft.com/office/drawing/2014/main" id="{3EC40708-7E00-432C-8ECE-907FA5705292}"/>
+              </a:ext>
+            </a:extLst>
+          </p:cNvPr>
+          <p:cNvSpPr>
+            <a:spLocks xmlns:a="http://schemas.openxmlformats.org/drawingml/2006/main" noGrp="1"/>
+          </p:cNvSpPr>
+          <p:nvPr/>
+        </p:nvSpPr>
+        <p:spPr>
+          <a:xfrm xmlns:a="http://schemas.openxmlformats.org/drawingml/2006/main">
+            <a:off x="457200" y="533400"/>
+            <a:ext cx="11277600" cy="628650"/>
+          </a:xfrm>
+          <a:prstGeom xmlns:a="http://schemas.openxmlformats.org/drawingml/2006/main" prst="rect">
+            <a:avLst/>
+          </a:prstGeom>
+          <a:noFill xmlns:a="http://schemas.openxmlformats.org/drawingml/2006/main"/>
+          <a:ln xmlns:a="http://schemas.openxmlformats.org/drawingml/2006/main" w="0">
+            <a:noFill/>
+            <a:prstDash val="solid"/>
+          </a:ln>
+        </p:spPr>
+        <p:txBody>
+          <a:bodyPr xmlns:a="http://schemas.openxmlformats.org/drawingml/2006/main" wrap="square" lIns="0" tIns="0" rIns="0" bIns="0" anchor="t">
+            <a:normAutofit fontScale="100000"/>
+          </a:bodyPr>
+          <a:lstStyle xmlns:a="http://schemas.openxmlformats.org/drawingml/2006/main"/>
+          <a:p xmlns:a="http://schemas.openxmlformats.org/drawingml/2006/main">
+            <a:pPr algn="l">
+              <a:buNone/>
+              <a:defRPr sz="3525" b="1">
+                <a:solidFill>
+                  <a:srgbClr val="000000"/>
+                </a:solidFill>
+                <a:latin typeface="Arial"/>
+                <a:ea typeface="Arial"/>
+                <a:cs typeface="Arial"/>
+              </a:defRPr>
+            </a:pPr>
+            <a:r>
+              <a:rPr sz="3525" b="1">
+                <a:solidFill>
+                  <a:srgbClr val="000000"/>
+                </a:solidFill>
+                <a:latin typeface="Arial"/>
+                <a:ea typeface="Arial"/>
+                <a:cs typeface="Arial"/>
+              </a:rPr>
+              <a:t>One visual clue becomes one frozen veto</a:t>
+            </a:r>
+          </a:p>
+        </p:txBody>
+      </p:sp>
+      <p:sp>
+        <p:nvSpPr>
+          <p:cNvPr id="3" name="">
+            <a:extLst xmlns:a="http://schemas.openxmlformats.org/drawingml/2006/main">
+              <a:ext uri="{FF2B5EF4-FFF2-40B4-BE49-F238E27FC236}">
+                <a16:creationId xmlns:a16="http://schemas.microsoft.com/office/drawing/2014/main" id="{D5CA0FCE-75E8-41EF-A76A-23E9E2120C6A}"/>
+              </a:ext>
+            </a:extLst>
+          </p:cNvPr>
+          <p:cNvSpPr>
+            <a:spLocks xmlns:a="http://schemas.openxmlformats.org/drawingml/2006/main" noGrp="1"/>
+          </p:cNvSpPr>
+          <p:nvPr/>
+        </p:nvSpPr>
+        <p:spPr>
+          <a:xfrm xmlns:a="http://schemas.openxmlformats.org/drawingml/2006/main">
+            <a:off x="457200" y="1200150"/>
+            <a:ext cx="11277600" cy="19050"/>
+          </a:xfrm>
+          <a:prstGeom xmlns:a="http://schemas.openxmlformats.org/drawingml/2006/main" prst="rect">
+            <a:avLst/>
+          </a:prstGeom>
+          <a:solidFill xmlns:a="http://schemas.openxmlformats.org/drawingml/2006/main">
+            <a:srgbClr val="B8BCC4"/>
+          </a:solidFill>
+          <a:ln xmlns:a="http://schemas.openxmlformats.org/drawingml/2006/main" w="0">
+            <a:solidFill>
+              <a:srgbClr val="B8BCC4"/>
+            </a:solidFill>
+            <a:prstDash val="solid"/>
+          </a:ln>
+        </p:spPr>
+      </p:sp>
+      <p:sp>
+        <p:nvSpPr>
+          <p:cNvPr id="4" name="footer-left-11">
+            <a:extLst xmlns:a="http://schemas.openxmlformats.org/drawingml/2006/main">
+              <a:ext uri="{FF2B5EF4-FFF2-40B4-BE49-F238E27FC236}">
+                <a16:creationId xmlns:a16="http://schemas.microsoft.com/office/drawing/2014/main" id="{700DA765-80E0-4197-8700-00D867B86FA2}"/>
+              </a:ext>
+            </a:extLst>
+          </p:cNvPr>
+          <p:cNvSpPr>
+            <a:spLocks xmlns:a="http://schemas.openxmlformats.org/drawingml/2006/main" noGrp="1"/>
+          </p:cNvSpPr>
+          <p:nvPr/>
+        </p:nvSpPr>
+        <p:spPr>
+          <a:xfrm xmlns:a="http://schemas.openxmlformats.org/drawingml/2006/main">
+            <a:off x="457200" y="6515100"/>
+            <a:ext cx="3429000" cy="171450"/>
+          </a:xfrm>
+          <a:prstGeom xmlns:a="http://schemas.openxmlformats.org/drawingml/2006/main" prst="rect">
+            <a:avLst/>
+          </a:prstGeom>
+          <a:noFill xmlns:a="http://schemas.openxmlformats.org/drawingml/2006/main"/>
+          <a:ln xmlns:a="http://schemas.openxmlformats.org/drawingml/2006/main" w="0">
+            <a:noFill/>
+            <a:prstDash val="solid"/>
+          </a:ln>
+        </p:spPr>
+        <p:txBody>
+          <a:bodyPr xmlns:a="http://schemas.openxmlformats.org/drawingml/2006/main" wrap="square" lIns="0" tIns="0" rIns="0" bIns="0" anchor="t">
+            <a:normAutofit fontScale="100000"/>
+          </a:bodyPr>
+          <a:lstStyle xmlns:a="http://schemas.openxmlformats.org/drawingml/2006/main"/>
+          <a:p xmlns:a="http://schemas.openxmlformats.org/drawingml/2006/main">
+            <a:pPr algn="l">
+              <a:buNone/>
+              <a:defRPr sz="825" b="0">
+                <a:solidFill>
+                  <a:srgbClr val="64748B"/>
+                </a:solidFill>
+                <a:latin typeface="Arial"/>
+                <a:ea typeface="Arial"/>
+                <a:cs typeface="Arial"/>
+              </a:defRPr>
+            </a:pPr>
+            <a:r>
+              <a:rPr sz="825" b="0">
+                <a:solidFill>
+                  <a:srgbClr val="64748B"/>
+                </a:solidFill>
+                <a:latin typeface="Arial"/>
+                <a:ea typeface="Arial"/>
+                <a:cs typeface="Arial"/>
+              </a:rPr>
+              <a:t>Return geometry | abnormal-volume mechanism</a:t>
+            </a:r>
+          </a:p>
+        </p:txBody>
+      </p:sp>
+      <p:sp>
+        <p:nvSpPr>
+          <p:cNvPr id="5" name="footer-number-11">
+            <a:extLst xmlns:a="http://schemas.openxmlformats.org/drawingml/2006/main">
+              <a:ext uri="{FF2B5EF4-FFF2-40B4-BE49-F238E27FC236}">
+                <a16:creationId xmlns:a16="http://schemas.microsoft.com/office/drawing/2014/main" id="{83896276-4112-4532-AF7C-776C67C58B77}"/>
+              </a:ext>
+            </a:extLst>
+          </p:cNvPr>
+          <p:cNvSpPr>
+            <a:spLocks xmlns:a="http://schemas.openxmlformats.org/drawingml/2006/main" noGrp="1"/>
+          </p:cNvSpPr>
+          <p:nvPr/>
+        </p:nvSpPr>
+        <p:spPr>
+          <a:xfrm xmlns:a="http://schemas.openxmlformats.org/drawingml/2006/main">
+            <a:off x="10477500" y="6496050"/>
+            <a:ext cx="1257300" cy="190500"/>
+          </a:xfrm>
+          <a:prstGeom xmlns:a="http://schemas.openxmlformats.org/drawingml/2006/main" prst="rect">
+            <a:avLst/>
+          </a:prstGeom>
+          <a:noFill xmlns:a="http://schemas.openxmlformats.org/drawingml/2006/main"/>
+          <a:ln xmlns:a="http://schemas.openxmlformats.org/drawingml/2006/main" w="0">
+            <a:noFill/>
+            <a:prstDash val="solid"/>
+          </a:ln>
+        </p:spPr>
+        <p:txBody>
+          <a:bodyPr xmlns:a="http://schemas.openxmlformats.org/drawingml/2006/main" wrap="square" lIns="0" tIns="0" rIns="0" bIns="0" anchor="t">
+            <a:normAutofit fontScale="100000"/>
+          </a:bodyPr>
+          <a:lstStyle xmlns:a="http://schemas.openxmlformats.org/drawingml/2006/main"/>
+          <a:p xmlns:a="http://schemas.openxmlformats.org/drawingml/2006/main">
+            <a:pPr algn="r">
+              <a:buNone/>
+              <a:defRPr sz="1050" b="0">
+                <a:solidFill>
+                  <a:srgbClr val="667384"/>
+                </a:solidFill>
+                <a:latin typeface="Arial"/>
+                <a:ea typeface="Arial"/>
+                <a:cs typeface="Arial"/>
+              </a:defRPr>
+            </a:pPr>
+            <a:r>
+              <a:rPr sz="1050" b="0">
+                <a:solidFill>
+                  <a:srgbClr val="667384"/>
+                </a:solidFill>
+                <a:latin typeface="Arial"/>
+                <a:ea typeface="Arial"/>
+                <a:cs typeface="Arial"/>
+              </a:rPr>
+              <a:t>36</a:t>
+            </a:r>
+          </a:p>
+        </p:txBody>
+      </p:sp>
+      <p:sp>
+        <p:nvSpPr>
+          <p:cNvPr id="6" name="">
+            <a:extLst xmlns:a="http://schemas.openxmlformats.org/drawingml/2006/main">
+              <a:ext uri="{FF2B5EF4-FFF2-40B4-BE49-F238E27FC236}">
+                <a16:creationId xmlns:a16="http://schemas.microsoft.com/office/drawing/2014/main" id="{10F4BA85-46C5-47BD-BA74-EC806E663D58}"/>
+              </a:ext>
+            </a:extLst>
+          </p:cNvPr>
+          <p:cNvSpPr>
+            <a:spLocks xmlns:a="http://schemas.openxmlformats.org/drawingml/2006/main" noGrp="1"/>
+          </p:cNvSpPr>
+          <p:nvPr/>
+        </p:nvSpPr>
+        <p:spPr>
+          <a:xfrm xmlns:a="http://schemas.openxmlformats.org/drawingml/2006/main">
+            <a:off x="552450" y="1600200"/>
+            <a:ext cx="95250" cy="895350"/>
+          </a:xfrm>
+          <a:prstGeom xmlns:a="http://schemas.openxmlformats.org/drawingml/2006/main" prst="rect">
+            <a:avLst/>
+          </a:prstGeom>
+          <a:solidFill xmlns:a="http://schemas.openxmlformats.org/drawingml/2006/main">
+            <a:srgbClr val="E45756"/>
+          </a:solidFill>
+          <a:ln xmlns:a="http://schemas.openxmlformats.org/drawingml/2006/main" w="0">
+            <a:solidFill>
+              <a:srgbClr val="E45756"/>
+            </a:solidFill>
+            <a:prstDash val="solid"/>
+          </a:ln>
+        </p:spPr>
+      </p:sp>
+      <p:sp>
+        <p:nvSpPr>
+          <p:cNvPr id="7" name="">
+            <a:extLst xmlns:a="http://schemas.openxmlformats.org/drawingml/2006/main">
+              <a:ext uri="{FF2B5EF4-FFF2-40B4-BE49-F238E27FC236}">
+                <a16:creationId xmlns:a16="http://schemas.microsoft.com/office/drawing/2014/main" id="{7EF5B945-9D04-48FA-BA66-96DE813A9715}"/>
+              </a:ext>
+            </a:extLst>
+          </p:cNvPr>
+          <p:cNvSpPr>
+            <a:spLocks xmlns:a="http://schemas.openxmlformats.org/drawingml/2006/main" noGrp="1"/>
+          </p:cNvSpPr>
+          <p:nvPr/>
+        </p:nvSpPr>
+        <p:spPr>
+          <a:xfrm xmlns:a="http://schemas.openxmlformats.org/drawingml/2006/main">
+            <a:off x="876300" y="1581150"/>
+            <a:ext cx="2095500" cy="285750"/>
+          </a:xfrm>
+          <a:prstGeom xmlns:a="http://schemas.openxmlformats.org/drawingml/2006/main" prst="rect">
+            <a:avLst/>
+          </a:prstGeom>
+          <a:noFill xmlns:a="http://schemas.openxmlformats.org/drawingml/2006/main"/>
+          <a:ln xmlns:a="http://schemas.openxmlformats.org/drawingml/2006/main" w="0">
+            <a:noFill/>
+            <a:prstDash val="solid"/>
+          </a:ln>
+        </p:spPr>
+        <p:txBody>
+          <a:bodyPr xmlns:a="http://schemas.openxmlformats.org/drawingml/2006/main" wrap="square" lIns="0" tIns="0" rIns="0" bIns="0" anchor="t">
+            <a:normAutofit fontScale="100000"/>
+          </a:bodyPr>
+          <a:lstStyle xmlns:a="http://schemas.openxmlformats.org/drawingml/2006/main"/>
+          <a:p xmlns:a="http://schemas.openxmlformats.org/drawingml/2006/main">
+            <a:pPr algn="l">
+              <a:buNone/>
+              <a:defRPr sz="1350" b="1">
+                <a:solidFill>
+                  <a:srgbClr val="E45756"/>
+                </a:solidFill>
+                <a:latin typeface="Arial"/>
+                <a:ea typeface="Arial"/>
+                <a:cs typeface="Arial"/>
+              </a:defRPr>
+            </a:pPr>
+            <a:r>
+              <a:rPr sz="1350" b="1">
+                <a:solidFill>
+                  <a:srgbClr val="E45756"/>
+                </a:solidFill>
+                <a:latin typeface="Arial"/>
+                <a:ea typeface="Arial"/>
+                <a:cs typeface="Arial"/>
+              </a:rPr>
+              <a:t>CLUE</a:t>
+            </a:r>
+          </a:p>
+        </p:txBody>
+      </p:sp>
+      <p:sp>
+        <p:nvSpPr>
+          <p:cNvPr id="8" name="">
+            <a:extLst xmlns:a="http://schemas.openxmlformats.org/drawingml/2006/main">
+              <a:ext uri="{FF2B5EF4-FFF2-40B4-BE49-F238E27FC236}">
+                <a16:creationId xmlns:a16="http://schemas.microsoft.com/office/drawing/2014/main" id="{655CF75D-5F23-4C7F-BE9C-764036D0B9E8}"/>
+              </a:ext>
+            </a:extLst>
+          </p:cNvPr>
+          <p:cNvSpPr>
+            <a:spLocks xmlns:a="http://schemas.openxmlformats.org/drawingml/2006/main" noGrp="1"/>
+          </p:cNvSpPr>
+          <p:nvPr/>
+        </p:nvSpPr>
+        <p:spPr>
+          <a:xfrm xmlns:a="http://schemas.openxmlformats.org/drawingml/2006/main">
+            <a:off x="3105150" y="1562100"/>
+            <a:ext cx="4762500" cy="419100"/>
+          </a:xfrm>
+          <a:prstGeom xmlns:a="http://schemas.openxmlformats.org/drawingml/2006/main" prst="rect">
+            <a:avLst/>
+          </a:prstGeom>
+          <a:noFill xmlns:a="http://schemas.openxmlformats.org/drawingml/2006/main"/>
+          <a:ln xmlns:a="http://schemas.openxmlformats.org/drawingml/2006/main" w="0">
+            <a:noFill/>
+            <a:prstDash val="solid"/>
+          </a:ln>
+        </p:spPr>
+        <p:txBody>
+          <a:bodyPr xmlns:a="http://schemas.openxmlformats.org/drawingml/2006/main" wrap="square" lIns="0" tIns="0" rIns="0" bIns="0" anchor="t">
+            <a:normAutofit fontScale="100000"/>
+          </a:bodyPr>
+          <a:lstStyle xmlns:a="http://schemas.openxmlformats.org/drawingml/2006/main"/>
+          <a:p xmlns:a="http://schemas.openxmlformats.org/drawingml/2006/main">
+            <a:pPr algn="l">
+              <a:buNone/>
+              <a:defRPr sz="1950" b="1">
+                <a:solidFill>
+                  <a:srgbClr val="273548"/>
+                </a:solidFill>
+                <a:latin typeface="Arial"/>
+                <a:ea typeface="Arial"/>
+                <a:cs typeface="Arial"/>
+              </a:defRPr>
+            </a:pPr>
+            <a:r>
+              <a:rPr sz="1950" b="1">
+                <a:solidFill>
+                  <a:srgbClr val="273548"/>
+                </a:solidFill>
+                <a:latin typeface="Arial"/>
+                <a:ea typeface="Arial"/>
+                <a:cs typeface="Arial"/>
+              </a:rPr>
+              <a:t>Top two volume bins</a:t>
+            </a:r>
+          </a:p>
+        </p:txBody>
+      </p:sp>
+      <p:sp>
+        <p:nvSpPr>
+          <p:cNvPr id="9" name="">
+            <a:extLst xmlns:a="http://schemas.openxmlformats.org/drawingml/2006/main">
+              <a:ext uri="{FF2B5EF4-FFF2-40B4-BE49-F238E27FC236}">
+                <a16:creationId xmlns:a16="http://schemas.microsoft.com/office/drawing/2014/main" id="{3E0B76F2-4514-4DD8-934B-ABE42A34E950}"/>
+              </a:ext>
+            </a:extLst>
+          </p:cNvPr>
+          <p:cNvSpPr>
+            <a:spLocks xmlns:a="http://schemas.openxmlformats.org/drawingml/2006/main" noGrp="1"/>
+          </p:cNvSpPr>
+          <p:nvPr/>
+        </p:nvSpPr>
+        <p:spPr>
+          <a:xfrm xmlns:a="http://schemas.openxmlformats.org/drawingml/2006/main">
+            <a:off x="8096250" y="1581150"/>
+            <a:ext cx="3333750" cy="704850"/>
+          </a:xfrm>
+          <a:prstGeom xmlns:a="http://schemas.openxmlformats.org/drawingml/2006/main" prst="rect">
+            <a:avLst/>
+          </a:prstGeom>
+          <a:noFill xmlns:a="http://schemas.openxmlformats.org/drawingml/2006/main"/>
+          <a:ln xmlns:a="http://schemas.openxmlformats.org/drawingml/2006/main" w="0">
+            <a:noFill/>
+            <a:prstDash val="solid"/>
+          </a:ln>
+        </p:spPr>
+        <p:txBody>
+          <a:bodyPr xmlns:a="http://schemas.openxmlformats.org/drawingml/2006/main" wrap="square" lIns="0" tIns="0" rIns="0" bIns="0" anchor="t">
+            <a:normAutofit fontScale="100000"/>
+          </a:bodyPr>
+          <a:lstStyle xmlns:a="http://schemas.openxmlformats.org/drawingml/2006/main"/>
+          <a:p xmlns:a="http://schemas.openxmlformats.org/drawingml/2006/main">
+            <a:pPr algn="l">
+              <a:buNone/>
+              <a:defRPr sz="1425" b="0">
+                <a:solidFill>
+                  <a:srgbClr val="667384"/>
+                </a:solidFill>
+                <a:latin typeface="Arial"/>
+                <a:ea typeface="Arial"/>
+                <a:cs typeface="Arial"/>
+              </a:defRPr>
+            </a:pPr>
+            <a:r>
+              <a:rPr sz="1425" b="0">
+                <a:solidFill>
+                  <a:srgbClr val="667384"/>
+                </a:solidFill>
+                <a:latin typeface="Arial"/>
+                <a:ea typeface="Arial"/>
+                <a:cs typeface="Arial"/>
+              </a:rPr>
+              <a:t>both below ordinary drift</a:t>
+            </a:r>
+          </a:p>
+        </p:txBody>
+      </p:sp>
+      <p:sp>
+        <p:nvSpPr>
+          <p:cNvPr id="10" name="">
+            <a:extLst xmlns:a="http://schemas.openxmlformats.org/drawingml/2006/main">
+              <a:ext uri="{FF2B5EF4-FFF2-40B4-BE49-F238E27FC236}">
+                <a16:creationId xmlns:a16="http://schemas.microsoft.com/office/drawing/2014/main" id="{294777C3-6D2F-4277-840E-7E984FB4554D}"/>
+              </a:ext>
+            </a:extLst>
+          </p:cNvPr>
+          <p:cNvSpPr>
+            <a:spLocks xmlns:a="http://schemas.openxmlformats.org/drawingml/2006/main" noGrp="1"/>
+          </p:cNvSpPr>
+          <p:nvPr/>
+        </p:nvSpPr>
+        <p:spPr>
+          <a:xfrm xmlns:a="http://schemas.openxmlformats.org/drawingml/2006/main">
+            <a:off x="876300" y="2590800"/>
+            <a:ext cx="10553700" cy="9525"/>
+          </a:xfrm>
+          <a:prstGeom xmlns:a="http://schemas.openxmlformats.org/drawingml/2006/main" prst="rect">
+            <a:avLst/>
+          </a:prstGeom>
+          <a:solidFill xmlns:a="http://schemas.openxmlformats.org/drawingml/2006/main">
+            <a:srgbClr val="B8BCC4"/>
+          </a:solidFill>
+          <a:ln xmlns:a="http://schemas.openxmlformats.org/drawingml/2006/main" w="0">
+            <a:solidFill>
+              <a:srgbClr val="B8BCC4"/>
+            </a:solidFill>
+            <a:prstDash val="solid"/>
+          </a:ln>
+        </p:spPr>
+      </p:sp>
+      <p:sp>
+        <p:nvSpPr>
+          <p:cNvPr id="11" name="">
+            <a:extLst xmlns:a="http://schemas.openxmlformats.org/drawingml/2006/main">
+              <a:ext uri="{FF2B5EF4-FFF2-40B4-BE49-F238E27FC236}">
+                <a16:creationId xmlns:a16="http://schemas.microsoft.com/office/drawing/2014/main" id="{F894CF3F-AD63-423C-8F01-64C507896579}"/>
+              </a:ext>
+            </a:extLst>
+          </p:cNvPr>
+          <p:cNvSpPr>
+            <a:spLocks xmlns:a="http://schemas.openxmlformats.org/drawingml/2006/main" noGrp="1"/>
+          </p:cNvSpPr>
+          <p:nvPr/>
+        </p:nvSpPr>
+        <p:spPr>
+          <a:xfrm xmlns:a="http://schemas.openxmlformats.org/drawingml/2006/main">
+            <a:off x="552450" y="2800350"/>
+            <a:ext cx="95250" cy="895350"/>
+          </a:xfrm>
+          <a:prstGeom xmlns:a="http://schemas.openxmlformats.org/drawingml/2006/main" prst="rect">
+            <a:avLst/>
+          </a:prstGeom>
+          <a:solidFill xmlns:a="http://schemas.openxmlformats.org/drawingml/2006/main">
+            <a:srgbClr val="2A9D6F"/>
+          </a:solidFill>
+          <a:ln xmlns:a="http://schemas.openxmlformats.org/drawingml/2006/main" w="0">
+            <a:solidFill>
+              <a:srgbClr val="2A9D6F"/>
+            </a:solidFill>
+            <a:prstDash val="solid"/>
+          </a:ln>
+        </p:spPr>
+      </p:sp>
+      <p:sp>
+        <p:nvSpPr>
+          <p:cNvPr id="12" name="">
+            <a:extLst xmlns:a="http://schemas.openxmlformats.org/drawingml/2006/main">
+              <a:ext uri="{FF2B5EF4-FFF2-40B4-BE49-F238E27FC236}">
+                <a16:creationId xmlns:a16="http://schemas.microsoft.com/office/drawing/2014/main" id="{D3953D03-6A7A-4FEE-B242-02BF0319C169}"/>
+              </a:ext>
+            </a:extLst>
+          </p:cNvPr>
+          <p:cNvSpPr>
+            <a:spLocks xmlns:a="http://schemas.openxmlformats.org/drawingml/2006/main" noGrp="1"/>
+          </p:cNvSpPr>
+          <p:nvPr/>
+        </p:nvSpPr>
+        <p:spPr>
+          <a:xfrm xmlns:a="http://schemas.openxmlformats.org/drawingml/2006/main">
+            <a:off x="876300" y="2781300"/>
+            <a:ext cx="2095500" cy="285750"/>
+          </a:xfrm>
+          <a:prstGeom xmlns:a="http://schemas.openxmlformats.org/drawingml/2006/main" prst="rect">
+            <a:avLst/>
+          </a:prstGeom>
+          <a:noFill xmlns:a="http://schemas.openxmlformats.org/drawingml/2006/main"/>
+          <a:ln xmlns:a="http://schemas.openxmlformats.org/drawingml/2006/main" w="0">
+            <a:noFill/>
+            <a:prstDash val="solid"/>
+          </a:ln>
+        </p:spPr>
+        <p:txBody>
+          <a:bodyPr xmlns:a="http://schemas.openxmlformats.org/drawingml/2006/main" wrap="square" lIns="0" tIns="0" rIns="0" bIns="0" anchor="t">
+            <a:normAutofit fontScale="100000"/>
+          </a:bodyPr>
+          <a:lstStyle xmlns:a="http://schemas.openxmlformats.org/drawingml/2006/main"/>
+          <a:p xmlns:a="http://schemas.openxmlformats.org/drawingml/2006/main">
+            <a:pPr algn="l">
+              <a:buNone/>
+              <a:defRPr sz="1350" b="1">
+                <a:solidFill>
+                  <a:srgbClr val="2A9D6F"/>
+                </a:solidFill>
+                <a:latin typeface="Arial"/>
+                <a:ea typeface="Arial"/>
+                <a:cs typeface="Arial"/>
+              </a:defRPr>
+            </a:pPr>
+            <a:r>
+              <a:rPr sz="1350" b="1">
+                <a:solidFill>
+                  <a:srgbClr val="2A9D6F"/>
+                </a:solidFill>
+                <a:latin typeface="Arial"/>
+                <a:ea typeface="Arial"/>
+                <a:cs typeface="Arial"/>
+              </a:rPr>
+              <a:t>TEST</a:t>
+            </a:r>
+          </a:p>
+        </p:txBody>
+      </p:sp>
+      <p:sp>
+        <p:nvSpPr>
+          <p:cNvPr id="13" name="">
+            <a:extLst xmlns:a="http://schemas.openxmlformats.org/drawingml/2006/main">
+              <a:ext uri="{FF2B5EF4-FFF2-40B4-BE49-F238E27FC236}">
+                <a16:creationId xmlns:a16="http://schemas.microsoft.com/office/drawing/2014/main" id="{52D1DBE8-EAF6-4492-89E7-5C97A3A6A395}"/>
+              </a:ext>
+            </a:extLst>
+          </p:cNvPr>
+          <p:cNvSpPr>
+            <a:spLocks xmlns:a="http://schemas.openxmlformats.org/drawingml/2006/main" noGrp="1"/>
+          </p:cNvSpPr>
+          <p:nvPr/>
+        </p:nvSpPr>
+        <p:spPr>
+          <a:xfrm xmlns:a="http://schemas.openxmlformats.org/drawingml/2006/main">
+            <a:off x="3105150" y="2762250"/>
+            <a:ext cx="4762500" cy="419100"/>
+          </a:xfrm>
+          <a:prstGeom xmlns:a="http://schemas.openxmlformats.org/drawingml/2006/main" prst="rect">
+            <a:avLst/>
+          </a:prstGeom>
+          <a:noFill xmlns:a="http://schemas.openxmlformats.org/drawingml/2006/main"/>
+          <a:ln xmlns:a="http://schemas.openxmlformats.org/drawingml/2006/main" w="0">
+            <a:noFill/>
+            <a:prstDash val="solid"/>
+          </a:ln>
+        </p:spPr>
+        <p:txBody>
+          <a:bodyPr xmlns:a="http://schemas.openxmlformats.org/drawingml/2006/main" wrap="square" lIns="0" tIns="0" rIns="0" bIns="0" anchor="t">
+            <a:normAutofit fontScale="100000"/>
+          </a:bodyPr>
+          <a:lstStyle xmlns:a="http://schemas.openxmlformats.org/drawingml/2006/main"/>
+          <a:p xmlns:a="http://schemas.openxmlformats.org/drawingml/2006/main">
+            <a:pPr algn="l">
+              <a:buNone/>
+              <a:defRPr sz="1950" b="1">
+                <a:solidFill>
+                  <a:srgbClr val="273548"/>
+                </a:solidFill>
+                <a:latin typeface="Arial"/>
+                <a:ea typeface="Arial"/>
+                <a:cs typeface="Arial"/>
+              </a:defRPr>
+            </a:pPr>
+            <a:r>
+              <a:rPr sz="1950" b="1">
+                <a:solidFill>
+                  <a:srgbClr val="273548"/>
+                </a:solidFill>
+                <a:latin typeface="Arial"/>
+                <a:ea typeface="Arial"/>
+                <a:cs typeface="Arial"/>
+              </a:rPr>
+              <a:t>One causal threshold</a:t>
+            </a:r>
+          </a:p>
+        </p:txBody>
+      </p:sp>
+      <p:sp>
+        <p:nvSpPr>
+          <p:cNvPr id="14" name="">
+            <a:extLst xmlns:a="http://schemas.openxmlformats.org/drawingml/2006/main">
+              <a:ext uri="{FF2B5EF4-FFF2-40B4-BE49-F238E27FC236}">
+                <a16:creationId xmlns:a16="http://schemas.microsoft.com/office/drawing/2014/main" id="{2CAF0156-C9E6-4210-8A8A-BFEDD044631B}"/>
+              </a:ext>
+            </a:extLst>
+          </p:cNvPr>
+          <p:cNvSpPr>
+            <a:spLocks xmlns:a="http://schemas.openxmlformats.org/drawingml/2006/main" noGrp="1"/>
+          </p:cNvSpPr>
+          <p:nvPr/>
+        </p:nvSpPr>
+        <p:spPr>
+          <a:xfrm xmlns:a="http://schemas.openxmlformats.org/drawingml/2006/main">
+            <a:off x="8096250" y="2781300"/>
+            <a:ext cx="3333750" cy="704850"/>
+          </a:xfrm>
+          <a:prstGeom xmlns:a="http://schemas.openxmlformats.org/drawingml/2006/main" prst="rect">
+            <a:avLst/>
+          </a:prstGeom>
+          <a:noFill xmlns:a="http://schemas.openxmlformats.org/drawingml/2006/main"/>
+          <a:ln xmlns:a="http://schemas.openxmlformats.org/drawingml/2006/main" w="0">
+            <a:noFill/>
+            <a:prstDash val="solid"/>
+          </a:ln>
+        </p:spPr>
+        <p:txBody>
+          <a:bodyPr xmlns:a="http://schemas.openxmlformats.org/drawingml/2006/main" wrap="square" lIns="0" tIns="0" rIns="0" bIns="0" anchor="t">
+            <a:normAutofit fontScale="100000"/>
+          </a:bodyPr>
+          <a:lstStyle xmlns:a="http://schemas.openxmlformats.org/drawingml/2006/main"/>
+          <a:p xmlns:a="http://schemas.openxmlformats.org/drawingml/2006/main">
+            <a:pPr algn="l">
+              <a:buNone/>
+              <a:defRPr sz="1425" b="0">
+                <a:solidFill>
+                  <a:srgbClr val="667384"/>
+                </a:solidFill>
+                <a:latin typeface="Arial"/>
+                <a:ea typeface="Arial"/>
+                <a:cs typeface="Arial"/>
+              </a:defRPr>
+            </a:pPr>
+            <a:r>
+              <a:rPr sz="1425" b="0">
+                <a:solidFill>
+                  <a:srgbClr val="667384"/>
+                </a:solidFill>
+                <a:latin typeface="Arial"/>
+                <a:ea typeface="Arial"/>
+                <a:cs typeface="Arial"/>
+              </a:rPr>
+              <a:t>no feature combination</a:t>
+            </a:r>
+          </a:p>
+        </p:txBody>
+      </p:sp>
+      <p:sp>
+        <p:nvSpPr>
+          <p:cNvPr id="15" name="">
+            <a:extLst xmlns:a="http://schemas.openxmlformats.org/drawingml/2006/main">
+              <a:ext uri="{FF2B5EF4-FFF2-40B4-BE49-F238E27FC236}">
+                <a16:creationId xmlns:a16="http://schemas.microsoft.com/office/drawing/2014/main" id="{B126165D-5B65-44DB-99BD-15ED33F9B90F}"/>
+              </a:ext>
+            </a:extLst>
+          </p:cNvPr>
+          <p:cNvSpPr>
+            <a:spLocks xmlns:a="http://schemas.openxmlformats.org/drawingml/2006/main" noGrp="1"/>
+          </p:cNvSpPr>
+          <p:nvPr/>
+        </p:nvSpPr>
+        <p:spPr>
+          <a:xfrm xmlns:a="http://schemas.openxmlformats.org/drawingml/2006/main">
+            <a:off x="876300" y="3790950"/>
+            <a:ext cx="10553700" cy="9525"/>
+          </a:xfrm>
+          <a:prstGeom xmlns:a="http://schemas.openxmlformats.org/drawingml/2006/main" prst="rect">
+            <a:avLst/>
+          </a:prstGeom>
+          <a:solidFill xmlns:a="http://schemas.openxmlformats.org/drawingml/2006/main">
+            <a:srgbClr val="B8BCC4"/>
+          </a:solidFill>
+          <a:ln xmlns:a="http://schemas.openxmlformats.org/drawingml/2006/main" w="0">
+            <a:solidFill>
+              <a:srgbClr val="B8BCC4"/>
+            </a:solidFill>
+            <a:prstDash val="solid"/>
+          </a:ln>
+        </p:spPr>
+      </p:sp>
+      <p:sp>
+        <p:nvSpPr>
+          <p:cNvPr id="16" name="">
+            <a:extLst xmlns:a="http://schemas.openxmlformats.org/drawingml/2006/main">
+              <a:ext uri="{FF2B5EF4-FFF2-40B4-BE49-F238E27FC236}">
+                <a16:creationId xmlns:a16="http://schemas.microsoft.com/office/drawing/2014/main" id="{7DC0911F-9587-4B19-84C6-11974DB2A91C}"/>
+              </a:ext>
+            </a:extLst>
+          </p:cNvPr>
+          <p:cNvSpPr>
+            <a:spLocks xmlns:a="http://schemas.openxmlformats.org/drawingml/2006/main" noGrp="1"/>
+          </p:cNvSpPr>
+          <p:nvPr/>
+        </p:nvSpPr>
+        <p:spPr>
+          <a:xfrm xmlns:a="http://schemas.openxmlformats.org/drawingml/2006/main">
+            <a:off x="552450" y="4000500"/>
+            <a:ext cx="95250" cy="895350"/>
+          </a:xfrm>
+          <a:prstGeom xmlns:a="http://schemas.openxmlformats.org/drawingml/2006/main" prst="rect">
+            <a:avLst/>
+          </a:prstGeom>
+          <a:solidFill xmlns:a="http://schemas.openxmlformats.org/drawingml/2006/main">
+            <a:srgbClr val="3D8DFF"/>
+          </a:solidFill>
+          <a:ln xmlns:a="http://schemas.openxmlformats.org/drawingml/2006/main" w="0">
+            <a:solidFill>
+              <a:srgbClr val="3D8DFF"/>
+            </a:solidFill>
+            <a:prstDash val="solid"/>
+          </a:ln>
+        </p:spPr>
+      </p:sp>
+      <p:sp>
+        <p:nvSpPr>
+          <p:cNvPr id="17" name="">
+            <a:extLst xmlns:a="http://schemas.openxmlformats.org/drawingml/2006/main">
+              <a:ext uri="{FF2B5EF4-FFF2-40B4-BE49-F238E27FC236}">
+                <a16:creationId xmlns:a16="http://schemas.microsoft.com/office/drawing/2014/main" id="{DAB53991-F50C-4B95-9F23-DAE86BCEDF3B}"/>
+              </a:ext>
+            </a:extLst>
+          </p:cNvPr>
+          <p:cNvSpPr>
+            <a:spLocks xmlns:a="http://schemas.openxmlformats.org/drawingml/2006/main" noGrp="1"/>
+          </p:cNvSpPr>
+          <p:nvPr/>
+        </p:nvSpPr>
+        <p:spPr>
+          <a:xfrm xmlns:a="http://schemas.openxmlformats.org/drawingml/2006/main">
+            <a:off x="876300" y="3981450"/>
+            <a:ext cx="2095500" cy="285750"/>
+          </a:xfrm>
+          <a:prstGeom xmlns:a="http://schemas.openxmlformats.org/drawingml/2006/main" prst="rect">
+            <a:avLst/>
+          </a:prstGeom>
+          <a:noFill xmlns:a="http://schemas.openxmlformats.org/drawingml/2006/main"/>
+          <a:ln xmlns:a="http://schemas.openxmlformats.org/drawingml/2006/main" w="0">
+            <a:noFill/>
+            <a:prstDash val="solid"/>
+          </a:ln>
+        </p:spPr>
+        <p:txBody>
+          <a:bodyPr xmlns:a="http://schemas.openxmlformats.org/drawingml/2006/main" wrap="square" lIns="0" tIns="0" rIns="0" bIns="0" anchor="t">
+            <a:normAutofit fontScale="100000"/>
+          </a:bodyPr>
+          <a:lstStyle xmlns:a="http://schemas.openxmlformats.org/drawingml/2006/main"/>
+          <a:p xmlns:a="http://schemas.openxmlformats.org/drawingml/2006/main">
+            <a:pPr algn="l">
+              <a:buNone/>
+              <a:defRPr sz="1350" b="1">
+                <a:solidFill>
+                  <a:srgbClr val="3D8DFF"/>
+                </a:solidFill>
+                <a:latin typeface="Arial"/>
+                <a:ea typeface="Arial"/>
+                <a:cs typeface="Arial"/>
+              </a:defRPr>
+            </a:pPr>
+            <a:r>
+              <a:rPr sz="1350" b="1">
+                <a:solidFill>
+                  <a:srgbClr val="3D8DFF"/>
+                </a:solidFill>
+                <a:latin typeface="Arial"/>
+                <a:ea typeface="Arial"/>
+                <a:cs typeface="Arial"/>
+              </a:rPr>
+              <a:t>CONSTANT</a:t>
+            </a:r>
+          </a:p>
+        </p:txBody>
+      </p:sp>
+      <p:sp>
+        <p:nvSpPr>
+          <p:cNvPr id="18" name="">
+            <a:extLst xmlns:a="http://schemas.openxmlformats.org/drawingml/2006/main">
+              <a:ext uri="{FF2B5EF4-FFF2-40B4-BE49-F238E27FC236}">
+                <a16:creationId xmlns:a16="http://schemas.microsoft.com/office/drawing/2014/main" id="{5DFACF3B-08BC-4148-A40A-2004DFB81D71}"/>
+              </a:ext>
+            </a:extLst>
+          </p:cNvPr>
+          <p:cNvSpPr>
+            <a:spLocks xmlns:a="http://schemas.openxmlformats.org/drawingml/2006/main" noGrp="1"/>
+          </p:cNvSpPr>
+          <p:nvPr/>
+        </p:nvSpPr>
+        <p:spPr>
+          <a:xfrm xmlns:a="http://schemas.openxmlformats.org/drawingml/2006/main">
+            <a:off x="3105150" y="3962400"/>
+            <a:ext cx="4762500" cy="419100"/>
+          </a:xfrm>
+          <a:prstGeom xmlns:a="http://schemas.openxmlformats.org/drawingml/2006/main" prst="rect">
+            <a:avLst/>
+          </a:prstGeom>
+          <a:noFill xmlns:a="http://schemas.openxmlformats.org/drawingml/2006/main"/>
+          <a:ln xmlns:a="http://schemas.openxmlformats.org/drawingml/2006/main" w="0">
+            <a:noFill/>
+            <a:prstDash val="solid"/>
+          </a:ln>
+        </p:spPr>
+        <p:txBody>
+          <a:bodyPr xmlns:a="http://schemas.openxmlformats.org/drawingml/2006/main" wrap="square" lIns="0" tIns="0" rIns="0" bIns="0" anchor="t">
+            <a:normAutofit fontScale="100000"/>
+          </a:bodyPr>
+          <a:lstStyle xmlns:a="http://schemas.openxmlformats.org/drawingml/2006/main"/>
+          <a:p xmlns:a="http://schemas.openxmlformats.org/drawingml/2006/main">
+            <a:pPr algn="l">
+              <a:buNone/>
+              <a:defRPr sz="1950" b="1">
+                <a:solidFill>
+                  <a:srgbClr val="273548"/>
+                </a:solidFill>
+                <a:latin typeface="Arial"/>
+                <a:ea typeface="Arial"/>
+                <a:cs typeface="Arial"/>
+              </a:defRPr>
+            </a:pPr>
+            <a:r>
+              <a:rPr sz="1950" b="1">
+                <a:solidFill>
+                  <a:srgbClr val="273548"/>
+                </a:solidFill>
+                <a:latin typeface="Arial"/>
+                <a:ea typeface="Arial"/>
+                <a:cs typeface="Arial"/>
+              </a:rPr>
+              <a:t>Underlying rule</a:t>
+            </a:r>
+          </a:p>
+        </p:txBody>
+      </p:sp>
+      <p:sp>
+        <p:nvSpPr>
+          <p:cNvPr id="19" name="">
+            <a:extLst xmlns:a="http://schemas.openxmlformats.org/drawingml/2006/main">
+              <a:ext uri="{FF2B5EF4-FFF2-40B4-BE49-F238E27FC236}">
+                <a16:creationId xmlns:a16="http://schemas.microsoft.com/office/drawing/2014/main" id="{C907D23B-44A2-43C4-9658-4C6E38430BF5}"/>
+              </a:ext>
+            </a:extLst>
+          </p:cNvPr>
+          <p:cNvSpPr>
+            <a:spLocks xmlns:a="http://schemas.openxmlformats.org/drawingml/2006/main" noGrp="1"/>
+          </p:cNvSpPr>
+          <p:nvPr/>
+        </p:nvSpPr>
+        <p:spPr>
+          <a:xfrm xmlns:a="http://schemas.openxmlformats.org/drawingml/2006/main">
+            <a:off x="8096250" y="3981450"/>
+            <a:ext cx="3333750" cy="704850"/>
+          </a:xfrm>
+          <a:prstGeom xmlns:a="http://schemas.openxmlformats.org/drawingml/2006/main" prst="rect">
+            <a:avLst/>
+          </a:prstGeom>
+          <a:noFill xmlns:a="http://schemas.openxmlformats.org/drawingml/2006/main"/>
+          <a:ln xmlns:a="http://schemas.openxmlformats.org/drawingml/2006/main" w="0">
+            <a:noFill/>
+            <a:prstDash val="solid"/>
+          </a:ln>
+        </p:spPr>
+        <p:txBody>
+          <a:bodyPr xmlns:a="http://schemas.openxmlformats.org/drawingml/2006/main" wrap="square" lIns="0" tIns="0" rIns="0" bIns="0" anchor="t">
+            <a:normAutofit fontScale="100000"/>
+          </a:bodyPr>
+          <a:lstStyle xmlns:a="http://schemas.openxmlformats.org/drawingml/2006/main"/>
+          <a:p xmlns:a="http://schemas.openxmlformats.org/drawingml/2006/main">
+            <a:pPr algn="l">
+              <a:buNone/>
+              <a:defRPr sz="1425" b="0">
+                <a:solidFill>
+                  <a:srgbClr val="667384"/>
+                </a:solidFill>
+                <a:latin typeface="Arial"/>
+                <a:ea typeface="Arial"/>
+                <a:cs typeface="Arial"/>
+              </a:defRPr>
+            </a:pPr>
+            <a:r>
+              <a:rPr sz="1425" b="0">
+                <a:solidFill>
+                  <a:srgbClr val="667384"/>
+                </a:solidFill>
+                <a:latin typeface="Arial"/>
+                <a:ea typeface="Arial"/>
+                <a:cs typeface="Arial"/>
+              </a:rPr>
+              <a:t>trades, timing, costs unchanged</a:t>
+            </a:r>
+          </a:p>
+        </p:txBody>
+      </p:sp>
+      <p:sp>
+        <p:nvSpPr>
+          <p:cNvPr id="20" name="">
+            <a:extLst xmlns:a="http://schemas.openxmlformats.org/drawingml/2006/main">
+              <a:ext uri="{FF2B5EF4-FFF2-40B4-BE49-F238E27FC236}">
+                <a16:creationId xmlns:a16="http://schemas.microsoft.com/office/drawing/2014/main" id="{8042DFC4-7E22-47E6-8C53-1E63A8411C3A}"/>
+              </a:ext>
+            </a:extLst>
+          </p:cNvPr>
+          <p:cNvSpPr>
+            <a:spLocks xmlns:a="http://schemas.openxmlformats.org/drawingml/2006/main" noGrp="1"/>
+          </p:cNvSpPr>
+          <p:nvPr/>
+        </p:nvSpPr>
+        <p:spPr>
+          <a:xfrm xmlns:a="http://schemas.openxmlformats.org/drawingml/2006/main">
+            <a:off x="876300" y="4991100"/>
+            <a:ext cx="10553700" cy="9525"/>
+          </a:xfrm>
+          <a:prstGeom xmlns:a="http://schemas.openxmlformats.org/drawingml/2006/main" prst="rect">
+            <a:avLst/>
+          </a:prstGeom>
+          <a:solidFill xmlns:a="http://schemas.openxmlformats.org/drawingml/2006/main">
+            <a:srgbClr val="B8BCC4"/>
+          </a:solidFill>
+          <a:ln xmlns:a="http://schemas.openxmlformats.org/drawingml/2006/main" w="0">
+            <a:solidFill>
+              <a:srgbClr val="B8BCC4"/>
+            </a:solidFill>
+            <a:prstDash val="solid"/>
+          </a:ln>
+        </p:spPr>
+      </p:sp>
+      <p:sp>
+        <p:nvSpPr>
+          <p:cNvPr id="21" name="">
+            <a:extLst xmlns:a="http://schemas.openxmlformats.org/drawingml/2006/main">
+              <a:ext uri="{FF2B5EF4-FFF2-40B4-BE49-F238E27FC236}">
+                <a16:creationId xmlns:a16="http://schemas.microsoft.com/office/drawing/2014/main" id="{F4066D54-676B-4D0F-93B6-2152B57E41AF}"/>
+              </a:ext>
+            </a:extLst>
+          </p:cNvPr>
+          <p:cNvSpPr>
+            <a:spLocks xmlns:a="http://schemas.openxmlformats.org/drawingml/2006/main" noGrp="1"/>
+          </p:cNvSpPr>
+          <p:nvPr/>
+        </p:nvSpPr>
+        <p:spPr>
+          <a:xfrm xmlns:a="http://schemas.openxmlformats.org/drawingml/2006/main">
+            <a:off x="552450" y="5353050"/>
+            <a:ext cx="10877550" cy="781050"/>
+          </a:xfrm>
+          <a:prstGeom xmlns:a="http://schemas.openxmlformats.org/drawingml/2006/main" prst="rect">
+            <a:avLst/>
+          </a:prstGeom>
+          <a:solidFill xmlns:a="http://schemas.openxmlformats.org/drawingml/2006/main">
+            <a:srgbClr val="EAF5FB"/>
+          </a:solidFill>
+          <a:ln xmlns:a="http://schemas.openxmlformats.org/drawingml/2006/main" w="0">
+            <a:solidFill>
+              <a:srgbClr val="EAF5FB"/>
+            </a:solidFill>
+            <a:prstDash val="solid"/>
+          </a:ln>
+        </p:spPr>
+      </p:sp>
+      <p:sp>
+        <p:nvSpPr>
+          <p:cNvPr id="22" name="">
+            <a:extLst xmlns:a="http://schemas.openxmlformats.org/drawingml/2006/main">
+              <a:ext uri="{FF2B5EF4-FFF2-40B4-BE49-F238E27FC236}">
+                <a16:creationId xmlns:a16="http://schemas.microsoft.com/office/drawing/2014/main" id="{6E4C79AE-EB98-4B5B-B3D3-11ED0D4C729B}"/>
+              </a:ext>
+            </a:extLst>
+          </p:cNvPr>
+          <p:cNvSpPr>
+            <a:spLocks xmlns:a="http://schemas.openxmlformats.org/drawingml/2006/main" noGrp="1"/>
+          </p:cNvSpPr>
+          <p:nvPr/>
+        </p:nvSpPr>
+        <p:spPr>
+          <a:xfrm xmlns:a="http://schemas.openxmlformats.org/drawingml/2006/main">
+            <a:off x="781050" y="5524500"/>
+            <a:ext cx="2476500" cy="323850"/>
+          </a:xfrm>
+          <a:prstGeom xmlns:a="http://schemas.openxmlformats.org/drawingml/2006/main" prst="rect">
+            <a:avLst/>
+          </a:prstGeom>
+          <a:noFill xmlns:a="http://schemas.openxmlformats.org/drawingml/2006/main"/>
+          <a:ln xmlns:a="http://schemas.openxmlformats.org/drawingml/2006/main" w="0">
+            <a:noFill/>
+            <a:prstDash val="solid"/>
+          </a:ln>
+        </p:spPr>
+        <p:txBody>
+          <a:bodyPr xmlns:a="http://schemas.openxmlformats.org/drawingml/2006/main" wrap="square" lIns="0" tIns="0" rIns="0" bIns="0" anchor="t">
+            <a:normAutofit fontScale="100000"/>
+          </a:bodyPr>
+          <a:lstStyle xmlns:a="http://schemas.openxmlformats.org/drawingml/2006/main"/>
+          <a:p xmlns:a="http://schemas.openxmlformats.org/drawingml/2006/main">
+            <a:pPr algn="l">
+              <a:buNone/>
+              <a:defRPr sz="1725" b="1">
+                <a:solidFill>
+                  <a:srgbClr val="3D8DFF"/>
+                </a:solidFill>
+                <a:latin typeface="Arial"/>
+                <a:ea typeface="Arial"/>
+                <a:cs typeface="Arial"/>
+              </a:defRPr>
+            </a:pPr>
+            <a:r>
+              <a:rPr sz="1725" b="1">
+                <a:solidFill>
+                  <a:srgbClr val="3D8DFF"/>
+                </a:solidFill>
+                <a:latin typeface="Arial"/>
+                <a:ea typeface="Arial"/>
+                <a:cs typeface="Arial"/>
+              </a:rPr>
+              <a:t>TRAIN only</a:t>
+            </a:r>
+          </a:p>
+        </p:txBody>
+      </p:sp>
+      <p:sp>
+        <p:nvSpPr>
+          <p:cNvPr id="23" name="">
+            <a:extLst xmlns:a="http://schemas.openxmlformats.org/drawingml/2006/main">
+              <a:ext uri="{FF2B5EF4-FFF2-40B4-BE49-F238E27FC236}">
+                <a16:creationId xmlns:a16="http://schemas.microsoft.com/office/drawing/2014/main" id="{3320D60E-6067-4236-80ED-A898A863026E}"/>
+              </a:ext>
+            </a:extLst>
+          </p:cNvPr>
+          <p:cNvSpPr>
+            <a:spLocks xmlns:a="http://schemas.openxmlformats.org/drawingml/2006/main" noGrp="1"/>
+          </p:cNvSpPr>
+          <p:nvPr/>
+        </p:nvSpPr>
+        <p:spPr>
+          <a:xfrm xmlns:a="http://schemas.openxmlformats.org/drawingml/2006/main">
+            <a:off x="3333750" y="5486400"/>
+            <a:ext cx="7810500" cy="419100"/>
+          </a:xfrm>
+          <a:prstGeom xmlns:a="http://schemas.openxmlformats.org/drawingml/2006/main" prst="rect">
+            <a:avLst/>
+          </a:prstGeom>
+          <a:noFill xmlns:a="http://schemas.openxmlformats.org/drawingml/2006/main"/>
+          <a:ln xmlns:a="http://schemas.openxmlformats.org/drawingml/2006/main" w="0">
+            <a:noFill/>
+            <a:prstDash val="solid"/>
+          </a:ln>
+        </p:spPr>
+        <p:txBody>
+          <a:bodyPr xmlns:a="http://schemas.openxmlformats.org/drawingml/2006/main" wrap="square" lIns="0" tIns="0" rIns="0" bIns="0" anchor="t">
+            <a:normAutofit fontScale="91756"/>
+          </a:bodyPr>
+          <a:lstStyle xmlns:a="http://schemas.openxmlformats.org/drawingml/2006/main"/>
+          <a:p xmlns:a="http://schemas.openxmlformats.org/drawingml/2006/main">
+            <a:pPr algn="l">
+              <a:buNone/>
+              <a:defRPr sz="1800" b="1">
+                <a:solidFill>
+                  <a:srgbClr val="273548"/>
+                </a:solidFill>
+                <a:latin typeface="Arial"/>
+                <a:ea typeface="Arial"/>
+                <a:cs typeface="Arial"/>
+              </a:defRPr>
+            </a:pPr>
+            <a:r>
+              <a:rPr sz="1800" b="1">
+                <a:solidFill>
+                  <a:srgbClr val="273548"/>
+                </a:solidFill>
+                <a:latin typeface="Arial"/>
+                <a:ea typeface="Arial"/>
+                <a:cs typeface="Arial"/>
+              </a:rPr>
+              <a:t>1,548 core events • 88 stocks • 11 sectors • post-2023 outcomes remain sealed</a:t>
+            </a:r>
+          </a:p>
+        </p:txBody>
+      </p:sp>
+    </p:spTree>
+    <p:extLst>
+      <p:ext uri="{BB962C8B-B14F-4D97-AF65-F5344CB8AC3E}">
+        <p14:creationId xmlns:p14="http://schemas.microsoft.com/office/powerpoint/2010/main" val="666536286"/>
+      </p:ext>
+    </p:extLst>
+  </p:cSld>
+</p:sld>
+</file>
+
+<file path=ppt/slides/slide37.xml><?xml version="1.0" encoding="utf-8"?>
+<p:sld xmlns:p="http://schemas.openxmlformats.org/presentationml/2006/main">
+  <p:cSld>
+    <p:bg>
+      <p:bgPr>
+        <a:solidFill xmlns:a="http://schemas.openxmlformats.org/drawingml/2006/main">
+          <a:srgbClr val="FFFFFF"/>
+        </a:solidFill>
+      </p:bgPr>
+    </p:bg>
+    <p:spTree>
+      <p:nvGrpSpPr>
+        <p:cNvPr id="1" name=""/>
+        <p:cNvGrpSpPr/>
+        <p:nvPr/>
+      </p:nvGrpSpPr>
+      <p:grpSpPr>
+        <a:xfrm xmlns:a="http://schemas.openxmlformats.org/drawingml/2006/main"/>
+      </p:grpSpPr>
+      <p:sp>
+        <p:nvSpPr>
+          <p:cNvPr id="24" name="section-11">
+            <a:extLst xmlns:a="http://schemas.openxmlformats.org/drawingml/2006/main">
+              <a:ext uri="{FF2B5EF4-FFF2-40B4-BE49-F238E27FC236}">
+                <a16:creationId xmlns:a16="http://schemas.microsoft.com/office/drawing/2014/main" id="{272ED433-B59C-436C-9DFB-4D317B90A13F}"/>
+              </a:ext>
+            </a:extLst>
+          </p:cNvPr>
+          <p:cNvSpPr>
+            <a:spLocks xmlns:a="http://schemas.openxmlformats.org/drawingml/2006/main" noGrp="1"/>
+          </p:cNvSpPr>
+          <p:nvPr/>
+        </p:nvSpPr>
+        <p:spPr>
+          <a:xfrm xmlns:a="http://schemas.openxmlformats.org/drawingml/2006/main">
+            <a:off x="457200" y="228600"/>
+            <a:ext cx="4191000" cy="228600"/>
+          </a:xfrm>
+          <a:prstGeom xmlns:a="http://schemas.openxmlformats.org/drawingml/2006/main" prst="rect">
+            <a:avLst/>
+          </a:prstGeom>
+          <a:noFill xmlns:a="http://schemas.openxmlformats.org/drawingml/2006/main"/>
+          <a:ln xmlns:a="http://schemas.openxmlformats.org/drawingml/2006/main" w="0">
+            <a:noFill/>
+            <a:prstDash val="solid"/>
+          </a:ln>
+        </p:spPr>
+        <p:txBody>
+          <a:bodyPr xmlns:a="http://schemas.openxmlformats.org/drawingml/2006/main" wrap="square" lIns="0" tIns="0" rIns="0" bIns="0" anchor="t">
+            <a:normAutofit fontScale="100000"/>
+          </a:bodyPr>
+          <a:lstStyle xmlns:a="http://schemas.openxmlformats.org/drawingml/2006/main"/>
+          <a:p xmlns:a="http://schemas.openxmlformats.org/drawingml/2006/main">
+            <a:pPr algn="l">
+              <a:buNone/>
+              <a:defRPr sz="1200" b="1">
+                <a:solidFill>
+                  <a:srgbClr val="667384"/>
+                </a:solidFill>
+                <a:latin typeface="Arial"/>
+                <a:ea typeface="Arial"/>
+                <a:cs typeface="Arial"/>
+              </a:defRPr>
+            </a:pPr>
+            <a:r>
+              <a:rPr sz="1200" b="1">
+                <a:solidFill>
+                  <a:srgbClr val="667384"/>
+                </a:solidFill>
+                <a:latin typeface="Arial"/>
+                <a:ea typeface="Arial"/>
+                <a:cs typeface="Arial"/>
+              </a:rPr>
+              <a:t>CAUSAL CONTRACT</a:t>
+            </a:r>
+          </a:p>
+        </p:txBody>
+      </p:sp>
+      <p:sp>
+        <p:nvSpPr>
+          <p:cNvPr id="2" name="title-11">
+            <a:extLst xmlns:a="http://schemas.openxmlformats.org/drawingml/2006/main">
+              <a:ext uri="{FF2B5EF4-FFF2-40B4-BE49-F238E27FC236}">
+                <a16:creationId xmlns:a16="http://schemas.microsoft.com/office/drawing/2014/main" id="{3EC40708-7E00-432C-8ECE-907FA5705292}"/>
+              </a:ext>
+            </a:extLst>
+          </p:cNvPr>
+          <p:cNvSpPr>
+            <a:spLocks xmlns:a="http://schemas.openxmlformats.org/drawingml/2006/main" noGrp="1"/>
+          </p:cNvSpPr>
+          <p:nvPr/>
+        </p:nvSpPr>
+        <p:spPr>
+          <a:xfrm xmlns:a="http://schemas.openxmlformats.org/drawingml/2006/main">
+            <a:off x="457200" y="533400"/>
+            <a:ext cx="11277600" cy="628650"/>
+          </a:xfrm>
+          <a:prstGeom xmlns:a="http://schemas.openxmlformats.org/drawingml/2006/main" prst="rect">
+            <a:avLst/>
+          </a:prstGeom>
+          <a:noFill xmlns:a="http://schemas.openxmlformats.org/drawingml/2006/main"/>
+          <a:ln xmlns:a="http://schemas.openxmlformats.org/drawingml/2006/main" w="0">
+            <a:noFill/>
+            <a:prstDash val="solid"/>
+          </a:ln>
+        </p:spPr>
+        <p:txBody>
+          <a:bodyPr xmlns:a="http://schemas.openxmlformats.org/drawingml/2006/main" wrap="square" lIns="0" tIns="0" rIns="0" bIns="0" anchor="t">
+            <a:normAutofit fontScale="95073"/>
+          </a:bodyPr>
+          <a:lstStyle xmlns:a="http://schemas.openxmlformats.org/drawingml/2006/main"/>
+          <a:p xmlns:a="http://schemas.openxmlformats.org/drawingml/2006/main">
+            <a:pPr algn="l">
+              <a:buNone/>
+              <a:defRPr sz="3525" b="1">
+                <a:solidFill>
+                  <a:srgbClr val="000000"/>
+                </a:solidFill>
+                <a:latin typeface="Arial"/>
+                <a:ea typeface="Arial"/>
+                <a:cs typeface="Arial"/>
+              </a:defRPr>
+            </a:pPr>
+            <a:r>
+              <a:rPr sz="3525" b="1">
+                <a:solidFill>
+                  <a:srgbClr val="000000"/>
+                </a:solidFill>
+                <a:latin typeface="Arial"/>
+                <a:ea typeface="Arial"/>
+                <a:cs typeface="Arial"/>
+              </a:rPr>
+              <a:t>High abnormal volume means: do not take this rebound</a:t>
+            </a:r>
+          </a:p>
+        </p:txBody>
+      </p:sp>
+      <p:sp>
+        <p:nvSpPr>
+          <p:cNvPr id="3" name="">
+            <a:extLst xmlns:a="http://schemas.openxmlformats.org/drawingml/2006/main">
+              <a:ext uri="{FF2B5EF4-FFF2-40B4-BE49-F238E27FC236}">
+                <a16:creationId xmlns:a16="http://schemas.microsoft.com/office/drawing/2014/main" id="{D5CA0FCE-75E8-41EF-A76A-23E9E2120C6A}"/>
+              </a:ext>
+            </a:extLst>
+          </p:cNvPr>
+          <p:cNvSpPr>
+            <a:spLocks xmlns:a="http://schemas.openxmlformats.org/drawingml/2006/main" noGrp="1"/>
+          </p:cNvSpPr>
+          <p:nvPr/>
+        </p:nvSpPr>
+        <p:spPr>
+          <a:xfrm xmlns:a="http://schemas.openxmlformats.org/drawingml/2006/main">
+            <a:off x="457200" y="1200150"/>
+            <a:ext cx="11277600" cy="19050"/>
+          </a:xfrm>
+          <a:prstGeom xmlns:a="http://schemas.openxmlformats.org/drawingml/2006/main" prst="rect">
+            <a:avLst/>
+          </a:prstGeom>
+          <a:solidFill xmlns:a="http://schemas.openxmlformats.org/drawingml/2006/main">
+            <a:srgbClr val="B8BCC4"/>
+          </a:solidFill>
+          <a:ln xmlns:a="http://schemas.openxmlformats.org/drawingml/2006/main" w="0">
+            <a:solidFill>
+              <a:srgbClr val="B8BCC4"/>
+            </a:solidFill>
+            <a:prstDash val="solid"/>
+          </a:ln>
+        </p:spPr>
+      </p:sp>
+      <p:sp>
+        <p:nvSpPr>
+          <p:cNvPr id="4" name="footer-left-11">
+            <a:extLst xmlns:a="http://schemas.openxmlformats.org/drawingml/2006/main">
+              <a:ext uri="{FF2B5EF4-FFF2-40B4-BE49-F238E27FC236}">
+                <a16:creationId xmlns:a16="http://schemas.microsoft.com/office/drawing/2014/main" id="{700DA765-80E0-4197-8700-00D867B86FA2}"/>
+              </a:ext>
+            </a:extLst>
+          </p:cNvPr>
+          <p:cNvSpPr>
+            <a:spLocks xmlns:a="http://schemas.openxmlformats.org/drawingml/2006/main" noGrp="1"/>
+          </p:cNvSpPr>
+          <p:nvPr/>
+        </p:nvSpPr>
+        <p:spPr>
+          <a:xfrm xmlns:a="http://schemas.openxmlformats.org/drawingml/2006/main">
+            <a:off x="457200" y="6515100"/>
+            <a:ext cx="3429000" cy="171450"/>
+          </a:xfrm>
+          <a:prstGeom xmlns:a="http://schemas.openxmlformats.org/drawingml/2006/main" prst="rect">
+            <a:avLst/>
+          </a:prstGeom>
+          <a:noFill xmlns:a="http://schemas.openxmlformats.org/drawingml/2006/main"/>
+          <a:ln xmlns:a="http://schemas.openxmlformats.org/drawingml/2006/main" w="0">
+            <a:noFill/>
+            <a:prstDash val="solid"/>
+          </a:ln>
+        </p:spPr>
+        <p:txBody>
+          <a:bodyPr xmlns:a="http://schemas.openxmlformats.org/drawingml/2006/main" wrap="square" lIns="0" tIns="0" rIns="0" bIns="0" anchor="t">
+            <a:normAutofit fontScale="100000"/>
+          </a:bodyPr>
+          <a:lstStyle xmlns:a="http://schemas.openxmlformats.org/drawingml/2006/main"/>
+          <a:p xmlns:a="http://schemas.openxmlformats.org/drawingml/2006/main">
+            <a:pPr algn="l">
+              <a:buNone/>
+              <a:defRPr sz="825" b="0">
+                <a:solidFill>
+                  <a:srgbClr val="64748B"/>
+                </a:solidFill>
+                <a:latin typeface="Arial"/>
+                <a:ea typeface="Arial"/>
+                <a:cs typeface="Arial"/>
+              </a:defRPr>
+            </a:pPr>
+            <a:r>
+              <a:rPr sz="825" b="0">
+                <a:solidFill>
+                  <a:srgbClr val="64748B"/>
+                </a:solidFill>
+                <a:latin typeface="Arial"/>
+                <a:ea typeface="Arial"/>
+                <a:cs typeface="Arial"/>
+              </a:rPr>
+              <a:t>Return geometry | frozen veto definition</a:t>
+            </a:r>
+          </a:p>
+        </p:txBody>
+      </p:sp>
+      <p:sp>
+        <p:nvSpPr>
+          <p:cNvPr id="5" name="footer-number-11">
+            <a:extLst xmlns:a="http://schemas.openxmlformats.org/drawingml/2006/main">
+              <a:ext uri="{FF2B5EF4-FFF2-40B4-BE49-F238E27FC236}">
+                <a16:creationId xmlns:a16="http://schemas.microsoft.com/office/drawing/2014/main" id="{83896276-4112-4532-AF7C-776C67C58B77}"/>
+              </a:ext>
+            </a:extLst>
+          </p:cNvPr>
+          <p:cNvSpPr>
+            <a:spLocks xmlns:a="http://schemas.openxmlformats.org/drawingml/2006/main" noGrp="1"/>
+          </p:cNvSpPr>
+          <p:nvPr/>
+        </p:nvSpPr>
+        <p:spPr>
+          <a:xfrm xmlns:a="http://schemas.openxmlformats.org/drawingml/2006/main">
+            <a:off x="10477500" y="6496050"/>
+            <a:ext cx="1257300" cy="190500"/>
+          </a:xfrm>
+          <a:prstGeom xmlns:a="http://schemas.openxmlformats.org/drawingml/2006/main" prst="rect">
+            <a:avLst/>
+          </a:prstGeom>
+          <a:noFill xmlns:a="http://schemas.openxmlformats.org/drawingml/2006/main"/>
+          <a:ln xmlns:a="http://schemas.openxmlformats.org/drawingml/2006/main" w="0">
+            <a:noFill/>
+            <a:prstDash val="solid"/>
+          </a:ln>
+        </p:spPr>
+        <p:txBody>
+          <a:bodyPr xmlns:a="http://schemas.openxmlformats.org/drawingml/2006/main" wrap="square" lIns="0" tIns="0" rIns="0" bIns="0" anchor="t">
+            <a:normAutofit fontScale="100000"/>
+          </a:bodyPr>
+          <a:lstStyle xmlns:a="http://schemas.openxmlformats.org/drawingml/2006/main"/>
+          <a:p xmlns:a="http://schemas.openxmlformats.org/drawingml/2006/main">
+            <a:pPr algn="r">
+              <a:buNone/>
+              <a:defRPr sz="1050" b="0">
+                <a:solidFill>
+                  <a:srgbClr val="667384"/>
+                </a:solidFill>
+                <a:latin typeface="Arial"/>
+                <a:ea typeface="Arial"/>
+                <a:cs typeface="Arial"/>
+              </a:defRPr>
+            </a:pPr>
+            <a:r>
+              <a:rPr sz="1050" b="0">
+                <a:solidFill>
+                  <a:srgbClr val="667384"/>
+                </a:solidFill>
+                <a:latin typeface="Arial"/>
+                <a:ea typeface="Arial"/>
+                <a:cs typeface="Arial"/>
+              </a:rPr>
+              <a:t>37</a:t>
+            </a:r>
+          </a:p>
+        </p:txBody>
+      </p:sp>
+      <p:sp>
+        <p:nvSpPr>
+          <p:cNvPr id="6" name="">
+            <a:extLst xmlns:a="http://schemas.openxmlformats.org/drawingml/2006/main">
+              <a:ext uri="{FF2B5EF4-FFF2-40B4-BE49-F238E27FC236}">
+                <a16:creationId xmlns:a16="http://schemas.microsoft.com/office/drawing/2014/main" id="{10F4BA85-46C5-47BD-BA74-EC806E663D58}"/>
+              </a:ext>
+            </a:extLst>
+          </p:cNvPr>
+          <p:cNvSpPr>
+            <a:spLocks xmlns:a="http://schemas.openxmlformats.org/drawingml/2006/main" noGrp="1"/>
+          </p:cNvSpPr>
+          <p:nvPr/>
+        </p:nvSpPr>
+        <p:spPr>
+          <a:xfrm xmlns:a="http://schemas.openxmlformats.org/drawingml/2006/main">
+            <a:off x="552450" y="1600200"/>
+            <a:ext cx="95250" cy="895350"/>
+          </a:xfrm>
+          <a:prstGeom xmlns:a="http://schemas.openxmlformats.org/drawingml/2006/main" prst="rect">
+            <a:avLst/>
+          </a:prstGeom>
+          <a:solidFill xmlns:a="http://schemas.openxmlformats.org/drawingml/2006/main">
+            <a:srgbClr val="E45756"/>
+          </a:solidFill>
+          <a:ln xmlns:a="http://schemas.openxmlformats.org/drawingml/2006/main" w="0">
+            <a:solidFill>
+              <a:srgbClr val="E45756"/>
+            </a:solidFill>
+            <a:prstDash val="solid"/>
+          </a:ln>
+        </p:spPr>
+      </p:sp>
+      <p:sp>
+        <p:nvSpPr>
+          <p:cNvPr id="7" name="">
+            <a:extLst xmlns:a="http://schemas.openxmlformats.org/drawingml/2006/main">
+              <a:ext uri="{FF2B5EF4-FFF2-40B4-BE49-F238E27FC236}">
+                <a16:creationId xmlns:a16="http://schemas.microsoft.com/office/drawing/2014/main" id="{7EF5B945-9D04-48FA-BA66-96DE813A9715}"/>
+              </a:ext>
+            </a:extLst>
+          </p:cNvPr>
+          <p:cNvSpPr>
+            <a:spLocks xmlns:a="http://schemas.openxmlformats.org/drawingml/2006/main" noGrp="1"/>
+          </p:cNvSpPr>
+          <p:nvPr/>
+        </p:nvSpPr>
+        <p:spPr>
+          <a:xfrm xmlns:a="http://schemas.openxmlformats.org/drawingml/2006/main">
+            <a:off x="876300" y="1581150"/>
+            <a:ext cx="2095500" cy="285750"/>
+          </a:xfrm>
+          <a:prstGeom xmlns:a="http://schemas.openxmlformats.org/drawingml/2006/main" prst="rect">
+            <a:avLst/>
+          </a:prstGeom>
+          <a:noFill xmlns:a="http://schemas.openxmlformats.org/drawingml/2006/main"/>
+          <a:ln xmlns:a="http://schemas.openxmlformats.org/drawingml/2006/main" w="0">
+            <a:noFill/>
+            <a:prstDash val="solid"/>
+          </a:ln>
+        </p:spPr>
+        <p:txBody>
+          <a:bodyPr xmlns:a="http://schemas.openxmlformats.org/drawingml/2006/main" wrap="square" lIns="0" tIns="0" rIns="0" bIns="0" anchor="t">
+            <a:normAutofit fontScale="100000"/>
+          </a:bodyPr>
+          <a:lstStyle xmlns:a="http://schemas.openxmlformats.org/drawingml/2006/main"/>
+          <a:p xmlns:a="http://schemas.openxmlformats.org/drawingml/2006/main">
+            <a:pPr algn="l">
+              <a:buNone/>
+              <a:defRPr sz="1350" b="1">
+                <a:solidFill>
+                  <a:srgbClr val="E45756"/>
+                </a:solidFill>
+                <a:latin typeface="Arial"/>
+                <a:ea typeface="Arial"/>
+                <a:cs typeface="Arial"/>
+              </a:defRPr>
+            </a:pPr>
+            <a:r>
+              <a:rPr sz="1350" b="1">
+                <a:solidFill>
+                  <a:srgbClr val="E45756"/>
+                </a:solidFill>
+                <a:latin typeface="Arial"/>
+                <a:ea typeface="Arial"/>
+                <a:cs typeface="Arial"/>
+              </a:rPr>
+              <a:t>FEATURE</a:t>
+            </a:r>
+          </a:p>
+        </p:txBody>
+      </p:sp>
+      <p:sp>
+        <p:nvSpPr>
+          <p:cNvPr id="8" name="">
+            <a:extLst xmlns:a="http://schemas.openxmlformats.org/drawingml/2006/main">
+              <a:ext uri="{FF2B5EF4-FFF2-40B4-BE49-F238E27FC236}">
+                <a16:creationId xmlns:a16="http://schemas.microsoft.com/office/drawing/2014/main" id="{655CF75D-5F23-4C7F-BE9C-764036D0B9E8}"/>
+              </a:ext>
+            </a:extLst>
+          </p:cNvPr>
+          <p:cNvSpPr>
+            <a:spLocks xmlns:a="http://schemas.openxmlformats.org/drawingml/2006/main" noGrp="1"/>
+          </p:cNvSpPr>
+          <p:nvPr/>
+        </p:nvSpPr>
+        <p:spPr>
+          <a:xfrm xmlns:a="http://schemas.openxmlformats.org/drawingml/2006/main">
+            <a:off x="3105150" y="1562100"/>
+            <a:ext cx="4762500" cy="419100"/>
+          </a:xfrm>
+          <a:prstGeom xmlns:a="http://schemas.openxmlformats.org/drawingml/2006/main" prst="rect">
+            <a:avLst/>
+          </a:prstGeom>
+          <a:noFill xmlns:a="http://schemas.openxmlformats.org/drawingml/2006/main"/>
+          <a:ln xmlns:a="http://schemas.openxmlformats.org/drawingml/2006/main" w="0">
+            <a:noFill/>
+            <a:prstDash val="solid"/>
+          </a:ln>
+        </p:spPr>
+        <p:txBody>
+          <a:bodyPr xmlns:a="http://schemas.openxmlformats.org/drawingml/2006/main" wrap="square" lIns="0" tIns="0" rIns="0" bIns="0" anchor="t">
+            <a:normAutofit fontScale="100000"/>
+          </a:bodyPr>
+          <a:lstStyle xmlns:a="http://schemas.openxmlformats.org/drawingml/2006/main"/>
+          <a:p xmlns:a="http://schemas.openxmlformats.org/drawingml/2006/main">
+            <a:pPr algn="l">
+              <a:buNone/>
+              <a:defRPr sz="1950" b="1">
+                <a:solidFill>
+                  <a:srgbClr val="273548"/>
+                </a:solidFill>
+                <a:latin typeface="Arial"/>
+                <a:ea typeface="Arial"/>
+                <a:cs typeface="Arial"/>
+              </a:defRPr>
+            </a:pPr>
+            <a:r>
+              <a:rPr sz="1950" b="1">
+                <a:solidFill>
+                  <a:srgbClr val="273548"/>
+                </a:solidFill>
+                <a:latin typeface="Arial"/>
+                <a:ea typeface="Arial"/>
+                <a:cs typeface="Arial"/>
+              </a:rPr>
+              <a:t>20-day / prior 126</a:t>
+            </a:r>
+          </a:p>
+        </p:txBody>
+      </p:sp>
+      <p:sp>
+        <p:nvSpPr>
+          <p:cNvPr id="9" name="">
+            <a:extLst xmlns:a="http://schemas.openxmlformats.org/drawingml/2006/main">
+              <a:ext uri="{FF2B5EF4-FFF2-40B4-BE49-F238E27FC236}">
+                <a16:creationId xmlns:a16="http://schemas.microsoft.com/office/drawing/2014/main" id="{3E0B76F2-4514-4DD8-934B-ABE42A34E950}"/>
+              </a:ext>
+            </a:extLst>
+          </p:cNvPr>
+          <p:cNvSpPr>
+            <a:spLocks xmlns:a="http://schemas.openxmlformats.org/drawingml/2006/main" noGrp="1"/>
+          </p:cNvSpPr>
+          <p:nvPr/>
+        </p:nvSpPr>
+        <p:spPr>
+          <a:xfrm xmlns:a="http://schemas.openxmlformats.org/drawingml/2006/main">
+            <a:off x="8096250" y="1581150"/>
+            <a:ext cx="3333750" cy="704850"/>
+          </a:xfrm>
+          <a:prstGeom xmlns:a="http://schemas.openxmlformats.org/drawingml/2006/main" prst="rect">
+            <a:avLst/>
+          </a:prstGeom>
+          <a:noFill xmlns:a="http://schemas.openxmlformats.org/drawingml/2006/main"/>
+          <a:ln xmlns:a="http://schemas.openxmlformats.org/drawingml/2006/main" w="0">
+            <a:noFill/>
+            <a:prstDash val="solid"/>
+          </a:ln>
+        </p:spPr>
+        <p:txBody>
+          <a:bodyPr xmlns:a="http://schemas.openxmlformats.org/drawingml/2006/main" wrap="square" lIns="0" tIns="0" rIns="0" bIns="0" anchor="t">
+            <a:normAutofit fontScale="100000"/>
+          </a:bodyPr>
+          <a:lstStyle xmlns:a="http://schemas.openxmlformats.org/drawingml/2006/main"/>
+          <a:p xmlns:a="http://schemas.openxmlformats.org/drawingml/2006/main">
+            <a:pPr algn="l">
+              <a:buNone/>
+              <a:defRPr sz="1425" b="0">
+                <a:solidFill>
+                  <a:srgbClr val="667384"/>
+                </a:solidFill>
+                <a:latin typeface="Arial"/>
+                <a:ea typeface="Arial"/>
+                <a:cs typeface="Arial"/>
+              </a:defRPr>
+            </a:pPr>
+            <a:r>
+              <a:rPr sz="1425" b="0">
+                <a:solidFill>
+                  <a:srgbClr val="667384"/>
+                </a:solidFill>
+                <a:latin typeface="Arial"/>
+                <a:ea typeface="Arial"/>
+                <a:cs typeface="Arial"/>
+              </a:rPr>
+              <a:t>median dollar volume ratio</a:t>
+            </a:r>
+          </a:p>
+        </p:txBody>
+      </p:sp>
+      <p:sp>
+        <p:nvSpPr>
+          <p:cNvPr id="10" name="">
+            <a:extLst xmlns:a="http://schemas.openxmlformats.org/drawingml/2006/main">
+              <a:ext uri="{FF2B5EF4-FFF2-40B4-BE49-F238E27FC236}">
+                <a16:creationId xmlns:a16="http://schemas.microsoft.com/office/drawing/2014/main" id="{294777C3-6D2F-4277-840E-7E984FB4554D}"/>
+              </a:ext>
+            </a:extLst>
+          </p:cNvPr>
+          <p:cNvSpPr>
+            <a:spLocks xmlns:a="http://schemas.openxmlformats.org/drawingml/2006/main" noGrp="1"/>
+          </p:cNvSpPr>
+          <p:nvPr/>
+        </p:nvSpPr>
+        <p:spPr>
+          <a:xfrm xmlns:a="http://schemas.openxmlformats.org/drawingml/2006/main">
+            <a:off x="876300" y="2590800"/>
+            <a:ext cx="10553700" cy="9525"/>
+          </a:xfrm>
+          <a:prstGeom xmlns:a="http://schemas.openxmlformats.org/drawingml/2006/main" prst="rect">
+            <a:avLst/>
+          </a:prstGeom>
+          <a:solidFill xmlns:a="http://schemas.openxmlformats.org/drawingml/2006/main">
+            <a:srgbClr val="B8BCC4"/>
+          </a:solidFill>
+          <a:ln xmlns:a="http://schemas.openxmlformats.org/drawingml/2006/main" w="0">
+            <a:solidFill>
+              <a:srgbClr val="B8BCC4"/>
+            </a:solidFill>
+            <a:prstDash val="solid"/>
+          </a:ln>
+        </p:spPr>
+      </p:sp>
+      <p:sp>
+        <p:nvSpPr>
+          <p:cNvPr id="11" name="">
+            <a:extLst xmlns:a="http://schemas.openxmlformats.org/drawingml/2006/main">
+              <a:ext uri="{FF2B5EF4-FFF2-40B4-BE49-F238E27FC236}">
+                <a16:creationId xmlns:a16="http://schemas.microsoft.com/office/drawing/2014/main" id="{F894CF3F-AD63-423C-8F01-64C507896579}"/>
+              </a:ext>
+            </a:extLst>
+          </p:cNvPr>
+          <p:cNvSpPr>
+            <a:spLocks xmlns:a="http://schemas.openxmlformats.org/drawingml/2006/main" noGrp="1"/>
+          </p:cNvSpPr>
+          <p:nvPr/>
+        </p:nvSpPr>
+        <p:spPr>
+          <a:xfrm xmlns:a="http://schemas.openxmlformats.org/drawingml/2006/main">
+            <a:off x="552450" y="2800350"/>
+            <a:ext cx="95250" cy="895350"/>
+          </a:xfrm>
+          <a:prstGeom xmlns:a="http://schemas.openxmlformats.org/drawingml/2006/main" prst="rect">
+            <a:avLst/>
+          </a:prstGeom>
+          <a:solidFill xmlns:a="http://schemas.openxmlformats.org/drawingml/2006/main">
+            <a:srgbClr val="2A9D6F"/>
+          </a:solidFill>
+          <a:ln xmlns:a="http://schemas.openxmlformats.org/drawingml/2006/main" w="0">
+            <a:solidFill>
+              <a:srgbClr val="2A9D6F"/>
+            </a:solidFill>
+            <a:prstDash val="solid"/>
+          </a:ln>
+        </p:spPr>
+      </p:sp>
+      <p:sp>
+        <p:nvSpPr>
+          <p:cNvPr id="12" name="">
+            <a:extLst xmlns:a="http://schemas.openxmlformats.org/drawingml/2006/main">
+              <a:ext uri="{FF2B5EF4-FFF2-40B4-BE49-F238E27FC236}">
+                <a16:creationId xmlns:a16="http://schemas.microsoft.com/office/drawing/2014/main" id="{D3953D03-6A7A-4FEE-B242-02BF0319C169}"/>
+              </a:ext>
+            </a:extLst>
+          </p:cNvPr>
+          <p:cNvSpPr>
+            <a:spLocks xmlns:a="http://schemas.openxmlformats.org/drawingml/2006/main" noGrp="1"/>
+          </p:cNvSpPr>
+          <p:nvPr/>
+        </p:nvSpPr>
+        <p:spPr>
+          <a:xfrm xmlns:a="http://schemas.openxmlformats.org/drawingml/2006/main">
+            <a:off x="876300" y="2781300"/>
+            <a:ext cx="2095500" cy="285750"/>
+          </a:xfrm>
+          <a:prstGeom xmlns:a="http://schemas.openxmlformats.org/drawingml/2006/main" prst="rect">
+            <a:avLst/>
+          </a:prstGeom>
+          <a:noFill xmlns:a="http://schemas.openxmlformats.org/drawingml/2006/main"/>
+          <a:ln xmlns:a="http://schemas.openxmlformats.org/drawingml/2006/main" w="0">
+            <a:noFill/>
+            <a:prstDash val="solid"/>
+          </a:ln>
+        </p:spPr>
+        <p:txBody>
+          <a:bodyPr xmlns:a="http://schemas.openxmlformats.org/drawingml/2006/main" wrap="square" lIns="0" tIns="0" rIns="0" bIns="0" anchor="t">
+            <a:normAutofit fontScale="100000"/>
+          </a:bodyPr>
+          <a:lstStyle xmlns:a="http://schemas.openxmlformats.org/drawingml/2006/main"/>
+          <a:p xmlns:a="http://schemas.openxmlformats.org/drawingml/2006/main">
+            <a:pPr algn="l">
+              <a:buNone/>
+              <a:defRPr sz="1350" b="1">
+                <a:solidFill>
+                  <a:srgbClr val="2A9D6F"/>
+                </a:solidFill>
+                <a:latin typeface="Arial"/>
+                <a:ea typeface="Arial"/>
+                <a:cs typeface="Arial"/>
+              </a:defRPr>
+            </a:pPr>
+            <a:r>
+              <a:rPr sz="1350" b="1">
+                <a:solidFill>
+                  <a:srgbClr val="2A9D6F"/>
+                </a:solidFill>
+                <a:latin typeface="Arial"/>
+                <a:ea typeface="Arial"/>
+                <a:cs typeface="Arial"/>
+              </a:rPr>
+              <a:t>CAUSAL RANK</a:t>
+            </a:r>
+          </a:p>
+        </p:txBody>
+      </p:sp>
+      <p:sp>
+        <p:nvSpPr>
+          <p:cNvPr id="13" name="">
+            <a:extLst xmlns:a="http://schemas.openxmlformats.org/drawingml/2006/main">
+              <a:ext uri="{FF2B5EF4-FFF2-40B4-BE49-F238E27FC236}">
+                <a16:creationId xmlns:a16="http://schemas.microsoft.com/office/drawing/2014/main" id="{52D1DBE8-EAF6-4492-89E7-5C97A3A6A395}"/>
+              </a:ext>
+            </a:extLst>
+          </p:cNvPr>
+          <p:cNvSpPr>
+            <a:spLocks xmlns:a="http://schemas.openxmlformats.org/drawingml/2006/main" noGrp="1"/>
+          </p:cNvSpPr>
+          <p:nvPr/>
+        </p:nvSpPr>
+        <p:spPr>
+          <a:xfrm xmlns:a="http://schemas.openxmlformats.org/drawingml/2006/main">
+            <a:off x="3105150" y="2762250"/>
+            <a:ext cx="4762500" cy="419100"/>
+          </a:xfrm>
+          <a:prstGeom xmlns:a="http://schemas.openxmlformats.org/drawingml/2006/main" prst="rect">
+            <a:avLst/>
+          </a:prstGeom>
+          <a:noFill xmlns:a="http://schemas.openxmlformats.org/drawingml/2006/main"/>
+          <a:ln xmlns:a="http://schemas.openxmlformats.org/drawingml/2006/main" w="0">
+            <a:noFill/>
+            <a:prstDash val="solid"/>
+          </a:ln>
+        </p:spPr>
+        <p:txBody>
+          <a:bodyPr xmlns:a="http://schemas.openxmlformats.org/drawingml/2006/main" wrap="square" lIns="0" tIns="0" rIns="0" bIns="0" anchor="t">
+            <a:normAutofit fontScale="100000"/>
+          </a:bodyPr>
+          <a:lstStyle xmlns:a="http://schemas.openxmlformats.org/drawingml/2006/main"/>
+          <a:p xmlns:a="http://schemas.openxmlformats.org/drawingml/2006/main">
+            <a:pPr algn="l">
+              <a:buNone/>
+              <a:defRPr sz="1950" b="1">
+                <a:solidFill>
+                  <a:srgbClr val="273548"/>
+                </a:solidFill>
+                <a:latin typeface="Arial"/>
+                <a:ea typeface="Arial"/>
+                <a:cs typeface="Arial"/>
+              </a:defRPr>
+            </a:pPr>
+            <a:r>
+              <a:rPr sz="1950" b="1">
+                <a:solidFill>
+                  <a:srgbClr val="273548"/>
+                </a:solidFill>
+                <a:latin typeface="Arial"/>
+                <a:ea typeface="Arial"/>
+                <a:cs typeface="Arial"/>
+              </a:rPr>
+              <a:t>Up to 504 prior days</a:t>
+            </a:r>
+          </a:p>
+        </p:txBody>
+      </p:sp>
+      <p:sp>
+        <p:nvSpPr>
+          <p:cNvPr id="14" name="">
+            <a:extLst xmlns:a="http://schemas.openxmlformats.org/drawingml/2006/main">
+              <a:ext uri="{FF2B5EF4-FFF2-40B4-BE49-F238E27FC236}">
+                <a16:creationId xmlns:a16="http://schemas.microsoft.com/office/drawing/2014/main" id="{2CAF0156-C9E6-4210-8A8A-BFEDD044631B}"/>
+              </a:ext>
+            </a:extLst>
+          </p:cNvPr>
+          <p:cNvSpPr>
+            <a:spLocks xmlns:a="http://schemas.openxmlformats.org/drawingml/2006/main" noGrp="1"/>
+          </p:cNvSpPr>
+          <p:nvPr/>
+        </p:nvSpPr>
+        <p:spPr>
+          <a:xfrm xmlns:a="http://schemas.openxmlformats.org/drawingml/2006/main">
+            <a:off x="8096250" y="2781300"/>
+            <a:ext cx="3333750" cy="704850"/>
+          </a:xfrm>
+          <a:prstGeom xmlns:a="http://schemas.openxmlformats.org/drawingml/2006/main" prst="rect">
+            <a:avLst/>
+          </a:prstGeom>
+          <a:noFill xmlns:a="http://schemas.openxmlformats.org/drawingml/2006/main"/>
+          <a:ln xmlns:a="http://schemas.openxmlformats.org/drawingml/2006/main" w="0">
+            <a:noFill/>
+            <a:prstDash val="solid"/>
+          </a:ln>
+        </p:spPr>
+        <p:txBody>
+          <a:bodyPr xmlns:a="http://schemas.openxmlformats.org/drawingml/2006/main" wrap="square" lIns="0" tIns="0" rIns="0" bIns="0" anchor="t">
+            <a:normAutofit fontScale="100000"/>
+          </a:bodyPr>
+          <a:lstStyle xmlns:a="http://schemas.openxmlformats.org/drawingml/2006/main"/>
+          <a:p xmlns:a="http://schemas.openxmlformats.org/drawingml/2006/main">
+            <a:pPr algn="l">
+              <a:buNone/>
+              <a:defRPr sz="1425" b="0">
+                <a:solidFill>
+                  <a:srgbClr val="667384"/>
+                </a:solidFill>
+                <a:latin typeface="Arial"/>
+                <a:ea typeface="Arial"/>
+                <a:cs typeface="Arial"/>
+              </a:defRPr>
+            </a:pPr>
+            <a:r>
+              <a:rPr sz="1425" b="0">
+                <a:solidFill>
+                  <a:srgbClr val="667384"/>
+                </a:solidFill>
+                <a:latin typeface="Arial"/>
+                <a:ea typeface="Arial"/>
+                <a:cs typeface="Arial"/>
+              </a:rPr>
+              <a:t>252-day minimum history</a:t>
+            </a:r>
+          </a:p>
+        </p:txBody>
+      </p:sp>
+      <p:sp>
+        <p:nvSpPr>
+          <p:cNvPr id="15" name="">
+            <a:extLst xmlns:a="http://schemas.openxmlformats.org/drawingml/2006/main">
+              <a:ext uri="{FF2B5EF4-FFF2-40B4-BE49-F238E27FC236}">
+                <a16:creationId xmlns:a16="http://schemas.microsoft.com/office/drawing/2014/main" id="{B126165D-5B65-44DB-99BD-15ED33F9B90F}"/>
+              </a:ext>
+            </a:extLst>
+          </p:cNvPr>
+          <p:cNvSpPr>
+            <a:spLocks xmlns:a="http://schemas.openxmlformats.org/drawingml/2006/main" noGrp="1"/>
+          </p:cNvSpPr>
+          <p:nvPr/>
+        </p:nvSpPr>
+        <p:spPr>
+          <a:xfrm xmlns:a="http://schemas.openxmlformats.org/drawingml/2006/main">
+            <a:off x="876300" y="3790950"/>
+            <a:ext cx="10553700" cy="9525"/>
+          </a:xfrm>
+          <a:prstGeom xmlns:a="http://schemas.openxmlformats.org/drawingml/2006/main" prst="rect">
+            <a:avLst/>
+          </a:prstGeom>
+          <a:solidFill xmlns:a="http://schemas.openxmlformats.org/drawingml/2006/main">
+            <a:srgbClr val="B8BCC4"/>
+          </a:solidFill>
+          <a:ln xmlns:a="http://schemas.openxmlformats.org/drawingml/2006/main" w="0">
+            <a:solidFill>
+              <a:srgbClr val="B8BCC4"/>
+            </a:solidFill>
+            <a:prstDash val="solid"/>
+          </a:ln>
+        </p:spPr>
+      </p:sp>
+      <p:sp>
+        <p:nvSpPr>
+          <p:cNvPr id="16" name="">
+            <a:extLst xmlns:a="http://schemas.openxmlformats.org/drawingml/2006/main">
+              <a:ext uri="{FF2B5EF4-FFF2-40B4-BE49-F238E27FC236}">
+                <a16:creationId xmlns:a16="http://schemas.microsoft.com/office/drawing/2014/main" id="{7DC0911F-9587-4B19-84C6-11974DB2A91C}"/>
+              </a:ext>
+            </a:extLst>
+          </p:cNvPr>
+          <p:cNvSpPr>
+            <a:spLocks xmlns:a="http://schemas.openxmlformats.org/drawingml/2006/main" noGrp="1"/>
+          </p:cNvSpPr>
+          <p:nvPr/>
+        </p:nvSpPr>
+        <p:spPr>
+          <a:xfrm xmlns:a="http://schemas.openxmlformats.org/drawingml/2006/main">
+            <a:off x="552450" y="4000500"/>
+            <a:ext cx="95250" cy="895350"/>
+          </a:xfrm>
+          <a:prstGeom xmlns:a="http://schemas.openxmlformats.org/drawingml/2006/main" prst="rect">
+            <a:avLst/>
+          </a:prstGeom>
+          <a:solidFill xmlns:a="http://schemas.openxmlformats.org/drawingml/2006/main">
+            <a:srgbClr val="3D8DFF"/>
+          </a:solidFill>
+          <a:ln xmlns:a="http://schemas.openxmlformats.org/drawingml/2006/main" w="0">
+            <a:solidFill>
+              <a:srgbClr val="3D8DFF"/>
+            </a:solidFill>
+            <a:prstDash val="solid"/>
+          </a:ln>
+        </p:spPr>
+      </p:sp>
+      <p:sp>
+        <p:nvSpPr>
+          <p:cNvPr id="17" name="">
+            <a:extLst xmlns:a="http://schemas.openxmlformats.org/drawingml/2006/main">
+              <a:ext uri="{FF2B5EF4-FFF2-40B4-BE49-F238E27FC236}">
+                <a16:creationId xmlns:a16="http://schemas.microsoft.com/office/drawing/2014/main" id="{DAB53991-F50C-4B95-9F23-DAE86BCEDF3B}"/>
+              </a:ext>
+            </a:extLst>
+          </p:cNvPr>
+          <p:cNvSpPr>
+            <a:spLocks xmlns:a="http://schemas.openxmlformats.org/drawingml/2006/main" noGrp="1"/>
+          </p:cNvSpPr>
+          <p:nvPr/>
+        </p:nvSpPr>
+        <p:spPr>
+          <a:xfrm xmlns:a="http://schemas.openxmlformats.org/drawingml/2006/main">
+            <a:off x="876300" y="3981450"/>
+            <a:ext cx="2095500" cy="285750"/>
+          </a:xfrm>
+          <a:prstGeom xmlns:a="http://schemas.openxmlformats.org/drawingml/2006/main" prst="rect">
+            <a:avLst/>
+          </a:prstGeom>
+          <a:noFill xmlns:a="http://schemas.openxmlformats.org/drawingml/2006/main"/>
+          <a:ln xmlns:a="http://schemas.openxmlformats.org/drawingml/2006/main" w="0">
+            <a:noFill/>
+            <a:prstDash val="solid"/>
+          </a:ln>
+        </p:spPr>
+        <p:txBody>
+          <a:bodyPr xmlns:a="http://schemas.openxmlformats.org/drawingml/2006/main" wrap="square" lIns="0" tIns="0" rIns="0" bIns="0" anchor="t">
+            <a:normAutofit fontScale="100000"/>
+          </a:bodyPr>
+          <a:lstStyle xmlns:a="http://schemas.openxmlformats.org/drawingml/2006/main"/>
+          <a:p xmlns:a="http://schemas.openxmlformats.org/drawingml/2006/main">
+            <a:pPr algn="l">
+              <a:buNone/>
+              <a:defRPr sz="1350" b="1">
+                <a:solidFill>
+                  <a:srgbClr val="3D8DFF"/>
+                </a:solidFill>
+                <a:latin typeface="Arial"/>
+                <a:ea typeface="Arial"/>
+                <a:cs typeface="Arial"/>
+              </a:defRPr>
+            </a:pPr>
+            <a:r>
+              <a:rPr sz="1350" b="1">
+                <a:solidFill>
+                  <a:srgbClr val="3D8DFF"/>
+                </a:solidFill>
+                <a:latin typeface="Arial"/>
+                <a:ea typeface="Arial"/>
+                <a:cs typeface="Arial"/>
+              </a:rPr>
+              <a:t>VETO</a:t>
+            </a:r>
+          </a:p>
+        </p:txBody>
+      </p:sp>
+      <p:sp>
+        <p:nvSpPr>
+          <p:cNvPr id="18" name="">
+            <a:extLst xmlns:a="http://schemas.openxmlformats.org/drawingml/2006/main">
+              <a:ext uri="{FF2B5EF4-FFF2-40B4-BE49-F238E27FC236}">
+                <a16:creationId xmlns:a16="http://schemas.microsoft.com/office/drawing/2014/main" id="{5DFACF3B-08BC-4148-A40A-2004DFB81D71}"/>
+              </a:ext>
+            </a:extLst>
+          </p:cNvPr>
+          <p:cNvSpPr>
+            <a:spLocks xmlns:a="http://schemas.openxmlformats.org/drawingml/2006/main" noGrp="1"/>
+          </p:cNvSpPr>
+          <p:nvPr/>
+        </p:nvSpPr>
+        <p:spPr>
+          <a:xfrm xmlns:a="http://schemas.openxmlformats.org/drawingml/2006/main">
+            <a:off x="3105150" y="3962400"/>
+            <a:ext cx="4762500" cy="419100"/>
+          </a:xfrm>
+          <a:prstGeom xmlns:a="http://schemas.openxmlformats.org/drawingml/2006/main" prst="rect">
+            <a:avLst/>
+          </a:prstGeom>
+          <a:noFill xmlns:a="http://schemas.openxmlformats.org/drawingml/2006/main"/>
+          <a:ln xmlns:a="http://schemas.openxmlformats.org/drawingml/2006/main" w="0">
+            <a:noFill/>
+            <a:prstDash val="solid"/>
+          </a:ln>
+        </p:spPr>
+        <p:txBody>
+          <a:bodyPr xmlns:a="http://schemas.openxmlformats.org/drawingml/2006/main" wrap="square" lIns="0" tIns="0" rIns="0" bIns="0" anchor="t">
+            <a:normAutofit fontScale="100000"/>
+          </a:bodyPr>
+          <a:lstStyle xmlns:a="http://schemas.openxmlformats.org/drawingml/2006/main"/>
+          <a:p xmlns:a="http://schemas.openxmlformats.org/drawingml/2006/main">
+            <a:pPr algn="l">
+              <a:buNone/>
+              <a:defRPr sz="1950" b="1">
+                <a:solidFill>
+                  <a:srgbClr val="273548"/>
+                </a:solidFill>
+                <a:latin typeface="Arial"/>
+                <a:ea typeface="Arial"/>
+                <a:cs typeface="Arial"/>
+              </a:defRPr>
+            </a:pPr>
+            <a:r>
+              <a:rPr sz="1950" b="1">
+                <a:solidFill>
+                  <a:srgbClr val="273548"/>
+                </a:solidFill>
+                <a:latin typeface="Arial"/>
+                <a:ea typeface="Arial"/>
+                <a:cs typeface="Arial"/>
+              </a:rPr>
+              <a:t>Percentile at least 60%</a:t>
+            </a:r>
+          </a:p>
+        </p:txBody>
+      </p:sp>
+      <p:sp>
+        <p:nvSpPr>
+          <p:cNvPr id="19" name="">
+            <a:extLst xmlns:a="http://schemas.openxmlformats.org/drawingml/2006/main">
+              <a:ext uri="{FF2B5EF4-FFF2-40B4-BE49-F238E27FC236}">
+                <a16:creationId xmlns:a16="http://schemas.microsoft.com/office/drawing/2014/main" id="{C907D23B-44A2-43C4-9658-4C6E38430BF5}"/>
+              </a:ext>
+            </a:extLst>
+          </p:cNvPr>
+          <p:cNvSpPr>
+            <a:spLocks xmlns:a="http://schemas.openxmlformats.org/drawingml/2006/main" noGrp="1"/>
+          </p:cNvSpPr>
+          <p:nvPr/>
+        </p:nvSpPr>
+        <p:spPr>
+          <a:xfrm xmlns:a="http://schemas.openxmlformats.org/drawingml/2006/main">
+            <a:off x="8096250" y="3981450"/>
+            <a:ext cx="3333750" cy="704850"/>
+          </a:xfrm>
+          <a:prstGeom xmlns:a="http://schemas.openxmlformats.org/drawingml/2006/main" prst="rect">
+            <a:avLst/>
+          </a:prstGeom>
+          <a:noFill xmlns:a="http://schemas.openxmlformats.org/drawingml/2006/main"/>
+          <a:ln xmlns:a="http://schemas.openxmlformats.org/drawingml/2006/main" w="0">
+            <a:noFill/>
+            <a:prstDash val="solid"/>
+          </a:ln>
+        </p:spPr>
+        <p:txBody>
+          <a:bodyPr xmlns:a="http://schemas.openxmlformats.org/drawingml/2006/main" wrap="square" lIns="0" tIns="0" rIns="0" bIns="0" anchor="t">
+            <a:normAutofit fontScale="100000"/>
+          </a:bodyPr>
+          <a:lstStyle xmlns:a="http://schemas.openxmlformats.org/drawingml/2006/main"/>
+          <a:p xmlns:a="http://schemas.openxmlformats.org/drawingml/2006/main">
+            <a:pPr algn="l">
+              <a:buNone/>
+              <a:defRPr sz="1425" b="0">
+                <a:solidFill>
+                  <a:srgbClr val="667384"/>
+                </a:solidFill>
+                <a:latin typeface="Arial"/>
+                <a:ea typeface="Arial"/>
+                <a:cs typeface="Arial"/>
+              </a:defRPr>
+            </a:pPr>
+            <a:r>
+              <a:rPr sz="1425" b="0">
+                <a:solidFill>
+                  <a:srgbClr val="667384"/>
+                </a:solidFill>
+                <a:latin typeface="Arial"/>
+                <a:ea typeface="Arial"/>
+                <a:cs typeface="Arial"/>
+              </a:rPr>
+              <a:t>top two of five bins</a:t>
+            </a:r>
+          </a:p>
+        </p:txBody>
+      </p:sp>
+      <p:sp>
+        <p:nvSpPr>
+          <p:cNvPr id="20" name="">
+            <a:extLst xmlns:a="http://schemas.openxmlformats.org/drawingml/2006/main">
+              <a:ext uri="{FF2B5EF4-FFF2-40B4-BE49-F238E27FC236}">
+                <a16:creationId xmlns:a16="http://schemas.microsoft.com/office/drawing/2014/main" id="{8042DFC4-7E22-47E6-8C53-1E63A8411C3A}"/>
+              </a:ext>
+            </a:extLst>
+          </p:cNvPr>
+          <p:cNvSpPr>
+            <a:spLocks xmlns:a="http://schemas.openxmlformats.org/drawingml/2006/main" noGrp="1"/>
+          </p:cNvSpPr>
+          <p:nvPr/>
+        </p:nvSpPr>
+        <p:spPr>
+          <a:xfrm xmlns:a="http://schemas.openxmlformats.org/drawingml/2006/main">
+            <a:off x="876300" y="4991100"/>
+            <a:ext cx="10553700" cy="9525"/>
+          </a:xfrm>
+          <a:prstGeom xmlns:a="http://schemas.openxmlformats.org/drawingml/2006/main" prst="rect">
+            <a:avLst/>
+          </a:prstGeom>
+          <a:solidFill xmlns:a="http://schemas.openxmlformats.org/drawingml/2006/main">
+            <a:srgbClr val="B8BCC4"/>
+          </a:solidFill>
+          <a:ln xmlns:a="http://schemas.openxmlformats.org/drawingml/2006/main" w="0">
+            <a:solidFill>
+              <a:srgbClr val="B8BCC4"/>
+            </a:solidFill>
+            <a:prstDash val="solid"/>
+          </a:ln>
+        </p:spPr>
+      </p:sp>
+      <p:sp>
+        <p:nvSpPr>
+          <p:cNvPr id="21" name="">
+            <a:extLst xmlns:a="http://schemas.openxmlformats.org/drawingml/2006/main">
+              <a:ext uri="{FF2B5EF4-FFF2-40B4-BE49-F238E27FC236}">
+                <a16:creationId xmlns:a16="http://schemas.microsoft.com/office/drawing/2014/main" id="{F4066D54-676B-4D0F-93B6-2152B57E41AF}"/>
+              </a:ext>
+            </a:extLst>
+          </p:cNvPr>
+          <p:cNvSpPr>
+            <a:spLocks xmlns:a="http://schemas.openxmlformats.org/drawingml/2006/main" noGrp="1"/>
+          </p:cNvSpPr>
+          <p:nvPr/>
+        </p:nvSpPr>
+        <p:spPr>
+          <a:xfrm xmlns:a="http://schemas.openxmlformats.org/drawingml/2006/main">
+            <a:off x="552450" y="5353050"/>
+            <a:ext cx="10877550" cy="781050"/>
+          </a:xfrm>
+          <a:prstGeom xmlns:a="http://schemas.openxmlformats.org/drawingml/2006/main" prst="rect">
+            <a:avLst/>
+          </a:prstGeom>
+          <a:solidFill xmlns:a="http://schemas.openxmlformats.org/drawingml/2006/main">
+            <a:srgbClr val="EAF5FB"/>
+          </a:solidFill>
+          <a:ln xmlns:a="http://schemas.openxmlformats.org/drawingml/2006/main" w="0">
+            <a:solidFill>
+              <a:srgbClr val="EAF5FB"/>
+            </a:solidFill>
+            <a:prstDash val="solid"/>
+          </a:ln>
+        </p:spPr>
+      </p:sp>
+      <p:sp>
+        <p:nvSpPr>
+          <p:cNvPr id="22" name="">
+            <a:extLst xmlns:a="http://schemas.openxmlformats.org/drawingml/2006/main">
+              <a:ext uri="{FF2B5EF4-FFF2-40B4-BE49-F238E27FC236}">
+                <a16:creationId xmlns:a16="http://schemas.microsoft.com/office/drawing/2014/main" id="{6E4C79AE-EB98-4B5B-B3D3-11ED0D4C729B}"/>
+              </a:ext>
+            </a:extLst>
+          </p:cNvPr>
+          <p:cNvSpPr>
+            <a:spLocks xmlns:a="http://schemas.openxmlformats.org/drawingml/2006/main" noGrp="1"/>
+          </p:cNvSpPr>
+          <p:nvPr/>
+        </p:nvSpPr>
+        <p:spPr>
+          <a:xfrm xmlns:a="http://schemas.openxmlformats.org/drawingml/2006/main">
+            <a:off x="781050" y="5524500"/>
+            <a:ext cx="2476500" cy="323850"/>
+          </a:xfrm>
+          <a:prstGeom xmlns:a="http://schemas.openxmlformats.org/drawingml/2006/main" prst="rect">
+            <a:avLst/>
+          </a:prstGeom>
+          <a:noFill xmlns:a="http://schemas.openxmlformats.org/drawingml/2006/main"/>
+          <a:ln xmlns:a="http://schemas.openxmlformats.org/drawingml/2006/main" w="0">
+            <a:noFill/>
+            <a:prstDash val="solid"/>
+          </a:ln>
+        </p:spPr>
+        <p:txBody>
+          <a:bodyPr xmlns:a="http://schemas.openxmlformats.org/drawingml/2006/main" wrap="square" lIns="0" tIns="0" rIns="0" bIns="0" anchor="t">
+            <a:normAutofit fontScale="100000"/>
+          </a:bodyPr>
+          <a:lstStyle xmlns:a="http://schemas.openxmlformats.org/drawingml/2006/main"/>
+          <a:p xmlns:a="http://schemas.openxmlformats.org/drawingml/2006/main">
+            <a:pPr algn="l">
+              <a:buNone/>
+              <a:defRPr sz="1725" b="1">
+                <a:solidFill>
+                  <a:srgbClr val="3D8DFF"/>
+                </a:solidFill>
+                <a:latin typeface="Arial"/>
+                <a:ea typeface="Arial"/>
+                <a:cs typeface="Arial"/>
+              </a:defRPr>
+            </a:pPr>
+            <a:r>
+              <a:rPr sz="1725" b="1">
+                <a:solidFill>
+                  <a:srgbClr val="3D8DFF"/>
+                </a:solidFill>
+                <a:latin typeface="Arial"/>
+                <a:ea typeface="Arial"/>
+                <a:cs typeface="Arial"/>
+              </a:rPr>
+              <a:t>Rule unchanged</a:t>
+            </a:r>
+          </a:p>
+        </p:txBody>
+      </p:sp>
+      <p:sp>
+        <p:nvSpPr>
+          <p:cNvPr id="23" name="">
+            <a:extLst xmlns:a="http://schemas.openxmlformats.org/drawingml/2006/main">
+              <a:ext uri="{FF2B5EF4-FFF2-40B4-BE49-F238E27FC236}">
+                <a16:creationId xmlns:a16="http://schemas.microsoft.com/office/drawing/2014/main" id="{3320D60E-6067-4236-80ED-A898A863026E}"/>
+              </a:ext>
+            </a:extLst>
+          </p:cNvPr>
+          <p:cNvSpPr>
+            <a:spLocks xmlns:a="http://schemas.openxmlformats.org/drawingml/2006/main" noGrp="1"/>
+          </p:cNvSpPr>
+          <p:nvPr/>
+        </p:nvSpPr>
+        <p:spPr>
+          <a:xfrm xmlns:a="http://schemas.openxmlformats.org/drawingml/2006/main">
+            <a:off x="3333750" y="5486400"/>
+            <a:ext cx="7810500" cy="419100"/>
+          </a:xfrm>
+          <a:prstGeom xmlns:a="http://schemas.openxmlformats.org/drawingml/2006/main" prst="rect">
+            <a:avLst/>
+          </a:prstGeom>
+          <a:noFill xmlns:a="http://schemas.openxmlformats.org/drawingml/2006/main"/>
+          <a:ln xmlns:a="http://schemas.openxmlformats.org/drawingml/2006/main" w="0">
+            <a:noFill/>
+            <a:prstDash val="solid"/>
+          </a:ln>
+        </p:spPr>
+        <p:txBody>
+          <a:bodyPr xmlns:a="http://schemas.openxmlformats.org/drawingml/2006/main" wrap="square" lIns="0" tIns="0" rIns="0" bIns="0" anchor="t">
+            <a:normAutofit fontScale="81210"/>
+          </a:bodyPr>
+          <a:lstStyle xmlns:a="http://schemas.openxmlformats.org/drawingml/2006/main"/>
+          <a:p xmlns:a="http://schemas.openxmlformats.org/drawingml/2006/main">
+            <a:pPr algn="l">
+              <a:buNone/>
+              <a:defRPr sz="1800" b="1">
+                <a:solidFill>
+                  <a:srgbClr val="273548"/>
+                </a:solidFill>
+                <a:latin typeface="Arial"/>
+                <a:ea typeface="Arial"/>
+                <a:cs typeface="Arial"/>
+              </a:defRPr>
+            </a:pPr>
+            <a:r>
+              <a:rPr sz="1800" b="1">
+                <a:solidFill>
+                  <a:srgbClr val="273548"/>
+                </a:solidFill>
+                <a:latin typeface="Arial"/>
+                <a:ea typeface="Arial"/>
+                <a:cs typeface="Arial"/>
+              </a:rPr>
+              <a:t>Signed-down • bottom-q20 prior loss • next-open • 20 held sessions • non-overlap • 10 bp</a:t>
+            </a:r>
+          </a:p>
+        </p:txBody>
+      </p:sp>
+    </p:spTree>
+    <p:extLst>
+      <p:ext uri="{BB962C8B-B14F-4D97-AF65-F5344CB8AC3E}">
+        <p14:creationId xmlns:p14="http://schemas.microsoft.com/office/powerpoint/2010/main" val="666536286"/>
+      </p:ext>
+    </p:extLst>
+  </p:cSld>
+</p:sld>
+</file>
+
+<file path=ppt/slides/slide38.xml><?xml version="1.0" encoding="utf-8"?>
+<p:sld xmlns:p="http://schemas.openxmlformats.org/presentationml/2006/main">
+  <p:cSld>
+    <p:bg>
+      <p:bgPr>
+        <a:solidFill xmlns:a="http://schemas.openxmlformats.org/drawingml/2006/main">
+          <a:srgbClr val="FFFFFF"/>
+        </a:solidFill>
+      </p:bgPr>
+    </p:bg>
+    <p:spTree>
+      <p:nvGrpSpPr>
+        <p:cNvPr id="1" name=""/>
+        <p:cNvGrpSpPr/>
+        <p:nvPr/>
+      </p:nvGrpSpPr>
+      <p:grpSpPr>
+        <a:xfrm xmlns:a="http://schemas.openxmlformats.org/drawingml/2006/main"/>
+      </p:grpSpPr>
+      <p:sp>
+        <p:nvSpPr>
+          <p:cNvPr id="24" name="section-11">
+            <a:extLst xmlns:a="http://schemas.openxmlformats.org/drawingml/2006/main">
+              <a:ext uri="{FF2B5EF4-FFF2-40B4-BE49-F238E27FC236}">
+                <a16:creationId xmlns:a16="http://schemas.microsoft.com/office/drawing/2014/main" id="{272ED433-B59C-436C-9DFB-4D317B90A13F}"/>
+              </a:ext>
+            </a:extLst>
+          </p:cNvPr>
+          <p:cNvSpPr>
+            <a:spLocks xmlns:a="http://schemas.openxmlformats.org/drawingml/2006/main" noGrp="1"/>
+          </p:cNvSpPr>
+          <p:nvPr/>
+        </p:nvSpPr>
+        <p:spPr>
+          <a:xfrm xmlns:a="http://schemas.openxmlformats.org/drawingml/2006/main">
+            <a:off x="457200" y="228600"/>
+            <a:ext cx="4191000" cy="228600"/>
+          </a:xfrm>
+          <a:prstGeom xmlns:a="http://schemas.openxmlformats.org/drawingml/2006/main" prst="rect">
+            <a:avLst/>
+          </a:prstGeom>
+          <a:noFill xmlns:a="http://schemas.openxmlformats.org/drawingml/2006/main"/>
+          <a:ln xmlns:a="http://schemas.openxmlformats.org/drawingml/2006/main" w="0">
+            <a:noFill/>
+            <a:prstDash val="solid"/>
+          </a:ln>
+        </p:spPr>
+        <p:txBody>
+          <a:bodyPr xmlns:a="http://schemas.openxmlformats.org/drawingml/2006/main" wrap="square" lIns="0" tIns="0" rIns="0" bIns="0" anchor="t">
+            <a:normAutofit fontScale="100000"/>
+          </a:bodyPr>
+          <a:lstStyle xmlns:a="http://schemas.openxmlformats.org/drawingml/2006/main"/>
+          <a:p xmlns:a="http://schemas.openxmlformats.org/drawingml/2006/main">
+            <a:pPr algn="l">
+              <a:buNone/>
+              <a:defRPr sz="1200" b="1">
+                <a:solidFill>
+                  <a:srgbClr val="667384"/>
+                </a:solidFill>
+                <a:latin typeface="Arial"/>
+                <a:ea typeface="Arial"/>
+                <a:cs typeface="Arial"/>
+              </a:defRPr>
+            </a:pPr>
+            <a:r>
+              <a:rPr sz="1200" b="1">
+                <a:solidFill>
+                  <a:srgbClr val="667384"/>
+                </a:solidFill>
+                <a:latin typeface="Arial"/>
+                <a:ea typeface="Arial"/>
+                <a:cs typeface="Arial"/>
+              </a:rPr>
+              <a:t>CAUSAL PROFILE</a:t>
+            </a:r>
+          </a:p>
+        </p:txBody>
+      </p:sp>
+      <p:sp>
+        <p:nvSpPr>
+          <p:cNvPr id="2" name="title-11">
+            <a:extLst xmlns:a="http://schemas.openxmlformats.org/drawingml/2006/main">
+              <a:ext uri="{FF2B5EF4-FFF2-40B4-BE49-F238E27FC236}">
+                <a16:creationId xmlns:a16="http://schemas.microsoft.com/office/drawing/2014/main" id="{3EC40708-7E00-432C-8ECE-907FA5705292}"/>
+              </a:ext>
+            </a:extLst>
+          </p:cNvPr>
+          <p:cNvSpPr>
+            <a:spLocks xmlns:a="http://schemas.openxmlformats.org/drawingml/2006/main" noGrp="1"/>
+          </p:cNvSpPr>
+          <p:nvPr/>
+        </p:nvSpPr>
+        <p:spPr>
+          <a:xfrm xmlns:a="http://schemas.openxmlformats.org/drawingml/2006/main">
+            <a:off x="457200" y="533400"/>
+            <a:ext cx="11277600" cy="628650"/>
+          </a:xfrm>
+          <a:prstGeom xmlns:a="http://schemas.openxmlformats.org/drawingml/2006/main" prst="rect">
+            <a:avLst/>
+          </a:prstGeom>
+          <a:noFill xmlns:a="http://schemas.openxmlformats.org/drawingml/2006/main"/>
+          <a:ln xmlns:a="http://schemas.openxmlformats.org/drawingml/2006/main" w="0">
+            <a:noFill/>
+            <a:prstDash val="solid"/>
+          </a:ln>
+        </p:spPr>
+        <p:txBody>
+          <a:bodyPr xmlns:a="http://schemas.openxmlformats.org/drawingml/2006/main" wrap="square" lIns="0" tIns="0" rIns="0" bIns="0" anchor="t">
+            <a:normAutofit fontScale="100000"/>
+          </a:bodyPr>
+          <a:lstStyle xmlns:a="http://schemas.openxmlformats.org/drawingml/2006/main"/>
+          <a:p xmlns:a="http://schemas.openxmlformats.org/drawingml/2006/main">
+            <a:pPr algn="l">
+              <a:buNone/>
+              <a:defRPr sz="3525" b="1">
+                <a:solidFill>
+                  <a:srgbClr val="000000"/>
+                </a:solidFill>
+                <a:latin typeface="Arial"/>
+                <a:ea typeface="Arial"/>
+                <a:cs typeface="Arial"/>
+              </a:defRPr>
+            </a:pPr>
+            <a:r>
+              <a:rPr sz="3525" b="1">
+                <a:solidFill>
+                  <a:srgbClr val="000000"/>
+                </a:solidFill>
+                <a:latin typeface="Arial"/>
+                <a:ea typeface="Arial"/>
+                <a:cs typeface="Arial"/>
+              </a:rPr>
+              <a:t>The veto starts where outcomes turn adverse</a:t>
+            </a:r>
+          </a:p>
+        </p:txBody>
+      </p:sp>
+      <p:sp>
+        <p:nvSpPr>
+          <p:cNvPr id="3" name="">
+            <a:extLst xmlns:a="http://schemas.openxmlformats.org/drawingml/2006/main">
+              <a:ext uri="{FF2B5EF4-FFF2-40B4-BE49-F238E27FC236}">
+                <a16:creationId xmlns:a16="http://schemas.microsoft.com/office/drawing/2014/main" id="{D5CA0FCE-75E8-41EF-A76A-23E9E2120C6A}"/>
+              </a:ext>
+            </a:extLst>
+          </p:cNvPr>
+          <p:cNvSpPr>
+            <a:spLocks xmlns:a="http://schemas.openxmlformats.org/drawingml/2006/main" noGrp="1"/>
+          </p:cNvSpPr>
+          <p:nvPr/>
+        </p:nvSpPr>
+        <p:spPr>
+          <a:xfrm xmlns:a="http://schemas.openxmlformats.org/drawingml/2006/main">
+            <a:off x="457200" y="1200150"/>
+            <a:ext cx="11277600" cy="19050"/>
+          </a:xfrm>
+          <a:prstGeom xmlns:a="http://schemas.openxmlformats.org/drawingml/2006/main" prst="rect">
+            <a:avLst/>
+          </a:prstGeom>
+          <a:solidFill xmlns:a="http://schemas.openxmlformats.org/drawingml/2006/main">
+            <a:srgbClr val="B8BCC4"/>
+          </a:solidFill>
+          <a:ln xmlns:a="http://schemas.openxmlformats.org/drawingml/2006/main" w="0">
+            <a:solidFill>
+              <a:srgbClr val="B8BCC4"/>
+            </a:solidFill>
+            <a:prstDash val="solid"/>
+          </a:ln>
+        </p:spPr>
+      </p:sp>
+      <p:sp>
+        <p:nvSpPr>
+          <p:cNvPr id="4" name="footer-left-11">
+            <a:extLst xmlns:a="http://schemas.openxmlformats.org/drawingml/2006/main">
+              <a:ext uri="{FF2B5EF4-FFF2-40B4-BE49-F238E27FC236}">
+                <a16:creationId xmlns:a16="http://schemas.microsoft.com/office/drawing/2014/main" id="{700DA765-80E0-4197-8700-00D867B86FA2}"/>
+              </a:ext>
+            </a:extLst>
+          </p:cNvPr>
+          <p:cNvSpPr>
+            <a:spLocks xmlns:a="http://schemas.openxmlformats.org/drawingml/2006/main" noGrp="1"/>
+          </p:cNvSpPr>
+          <p:nvPr/>
+        </p:nvSpPr>
+        <p:spPr>
+          <a:xfrm xmlns:a="http://schemas.openxmlformats.org/drawingml/2006/main">
+            <a:off x="457200" y="6515100"/>
+            <a:ext cx="3429000" cy="171450"/>
+          </a:xfrm>
+          <a:prstGeom xmlns:a="http://schemas.openxmlformats.org/drawingml/2006/main" prst="rect">
+            <a:avLst/>
+          </a:prstGeom>
+          <a:noFill xmlns:a="http://schemas.openxmlformats.org/drawingml/2006/main"/>
+          <a:ln xmlns:a="http://schemas.openxmlformats.org/drawingml/2006/main" w="0">
+            <a:noFill/>
+            <a:prstDash val="solid"/>
+          </a:ln>
+        </p:spPr>
+        <p:txBody>
+          <a:bodyPr xmlns:a="http://schemas.openxmlformats.org/drawingml/2006/main" wrap="square" lIns="0" tIns="0" rIns="0" bIns="0" anchor="t">
+            <a:normAutofit fontScale="100000"/>
+          </a:bodyPr>
+          <a:lstStyle xmlns:a="http://schemas.openxmlformats.org/drawingml/2006/main"/>
+          <a:p xmlns:a="http://schemas.openxmlformats.org/drawingml/2006/main">
+            <a:pPr algn="l">
+              <a:buNone/>
+              <a:defRPr sz="825" b="0">
+                <a:solidFill>
+                  <a:srgbClr val="64748B"/>
+                </a:solidFill>
+                <a:latin typeface="Arial"/>
+                <a:ea typeface="Arial"/>
+                <a:cs typeface="Arial"/>
+              </a:defRPr>
+            </a:pPr>
+            <a:r>
+              <a:rPr sz="825" b="0">
+                <a:solidFill>
+                  <a:srgbClr val="64748B"/>
+                </a:solidFill>
+                <a:latin typeface="Arial"/>
+                <a:ea typeface="Arial"/>
+                <a:cs typeface="Arial"/>
+              </a:rPr>
+              <a:t>Return geometry | causal abnormal-volume percentile</a:t>
+            </a:r>
+          </a:p>
+        </p:txBody>
+      </p:sp>
+      <p:sp>
+        <p:nvSpPr>
+          <p:cNvPr id="5" name="footer-number-11">
+            <a:extLst xmlns:a="http://schemas.openxmlformats.org/drawingml/2006/main">
+              <a:ext uri="{FF2B5EF4-FFF2-40B4-BE49-F238E27FC236}">
+                <a16:creationId xmlns:a16="http://schemas.microsoft.com/office/drawing/2014/main" id="{83896276-4112-4532-AF7C-776C67C58B77}"/>
+              </a:ext>
+            </a:extLst>
+          </p:cNvPr>
+          <p:cNvSpPr>
+            <a:spLocks xmlns:a="http://schemas.openxmlformats.org/drawingml/2006/main" noGrp="1"/>
+          </p:cNvSpPr>
+          <p:nvPr/>
+        </p:nvSpPr>
+        <p:spPr>
+          <a:xfrm xmlns:a="http://schemas.openxmlformats.org/drawingml/2006/main">
+            <a:off x="10477500" y="6496050"/>
+            <a:ext cx="1257300" cy="190500"/>
+          </a:xfrm>
+          <a:prstGeom xmlns:a="http://schemas.openxmlformats.org/drawingml/2006/main" prst="rect">
+            <a:avLst/>
+          </a:prstGeom>
+          <a:noFill xmlns:a="http://schemas.openxmlformats.org/drawingml/2006/main"/>
+          <a:ln xmlns:a="http://schemas.openxmlformats.org/drawingml/2006/main" w="0">
+            <a:noFill/>
+            <a:prstDash val="solid"/>
+          </a:ln>
+        </p:spPr>
+        <p:txBody>
+          <a:bodyPr xmlns:a="http://schemas.openxmlformats.org/drawingml/2006/main" wrap="square" lIns="0" tIns="0" rIns="0" bIns="0" anchor="t">
+            <a:normAutofit fontScale="100000"/>
+          </a:bodyPr>
+          <a:lstStyle xmlns:a="http://schemas.openxmlformats.org/drawingml/2006/main"/>
+          <a:p xmlns:a="http://schemas.openxmlformats.org/drawingml/2006/main">
+            <a:pPr algn="r">
+              <a:buNone/>
+              <a:defRPr sz="1050" b="0">
+                <a:solidFill>
+                  <a:srgbClr val="667384"/>
+                </a:solidFill>
+                <a:latin typeface="Arial"/>
+                <a:ea typeface="Arial"/>
+                <a:cs typeface="Arial"/>
+              </a:defRPr>
+            </a:pPr>
+            <a:r>
+              <a:rPr sz="1050" b="0">
+                <a:solidFill>
+                  <a:srgbClr val="667384"/>
+                </a:solidFill>
+                <a:latin typeface="Arial"/>
+                <a:ea typeface="Arial"/>
+                <a:cs typeface="Arial"/>
+              </a:rPr>
+              <a:t>38</a:t>
+            </a:r>
+          </a:p>
+        </p:txBody>
+      </p:sp>
+      <p:pic>
+        <p:nvPicPr>
+          <p:cNvPr id="37" name=""/>
+          <p:cNvPicPr>
+            <a:picLocks xmlns:a="http://schemas.openxmlformats.org/drawingml/2006/main" noChangeAspect="1"/>
+          </p:cNvPicPr>
+          <p:nvPr/>
+        </p:nvPicPr>
+        <p:blipFill>
+          <a:blip xmlns:r="http://schemas.openxmlformats.org/officeDocument/2006/relationships" xmlns:a="http://schemas.openxmlformats.org/drawingml/2006/main" r:embed="R592e889db4e7405e"/>
+          <a:stretch xmlns:a="http://schemas.openxmlformats.org/drawingml/2006/main"/>
+        </p:blipFill>
+        <p:spPr>
+          <a:xfrm xmlns:a="http://schemas.openxmlformats.org/drawingml/2006/main">
+            <a:off x="1771650" y="1335087"/>
+            <a:ext cx="8648700" cy="5045075"/>
+          </a:xfrm>
+          <a:prstGeom xmlns:a="http://schemas.openxmlformats.org/drawingml/2006/main" prst="rect">
+            <a:avLst/>
+          </a:prstGeom>
+        </p:spPr>
+      </p:pic>
+      <p:pic>
+        <p:nvPicPr>
+          <p:cNvPr id="38" name=""/>
+          <p:cNvPicPr>
+            <a:picLocks xmlns:a="http://schemas.openxmlformats.org/drawingml/2006/main" noChangeAspect="1"/>
+          </p:cNvPicPr>
+          <p:nvPr/>
+        </p:nvPicPr>
+        <p:blipFill>
+          <a:blip xmlns:r="http://schemas.openxmlformats.org/officeDocument/2006/relationships" xmlns:a="http://schemas.openxmlformats.org/drawingml/2006/main" r:embed="Re275cf34413842cc">
+            <a:extLst>
+              <a:ext uri="{96DAC541-7B7A-43D3-8B79-37D633B846F1}">
+                <asvg:svgBlip xmlns:asvg="http://schemas.microsoft.com/office/drawing/2016/SVG/main" r:embed="R3cde4a3778af4c51"/>
+              </a:ext>
+            </a:extLst>
+          </a:blip>
+          <a:stretch xmlns:a="http://schemas.openxmlformats.org/drawingml/2006/main"/>
+        </p:blipFill>
+        <p:spPr>
+          <a:xfrm xmlns:a="http://schemas.openxmlformats.org/drawingml/2006/main">
+            <a:off x="1771650" y="1335087"/>
+            <a:ext cx="8648700" cy="5045075"/>
+          </a:xfrm>
+          <a:prstGeom xmlns:a="http://schemas.openxmlformats.org/drawingml/2006/main" prst="rect">
+            <a:avLst/>
+          </a:prstGeom>
+        </p:spPr>
+      </p:pic>
+      <p:pic>
+        <p:nvPicPr>
+          <p:cNvPr id="39" name=""/>
+          <p:cNvPicPr>
+            <a:picLocks xmlns:a="http://schemas.openxmlformats.org/drawingml/2006/main" noChangeAspect="1"/>
+          </p:cNvPicPr>
+          <p:nvPr/>
+        </p:nvPicPr>
+        <p:blipFill>
+          <a:blip xmlns:r="http://schemas.openxmlformats.org/officeDocument/2006/relationships" xmlns:a="http://schemas.openxmlformats.org/drawingml/2006/main" r:embed="R7ab16c607205472b"/>
+          <a:stretch xmlns:a="http://schemas.openxmlformats.org/drawingml/2006/main"/>
+        </p:blipFill>
+        <p:spPr>
+          <a:xfrm xmlns:a="http://schemas.openxmlformats.org/drawingml/2006/main">
+            <a:off x="2172053" y="1335087"/>
+            <a:ext cx="7847894" cy="5045075"/>
+          </a:xfrm>
+          <a:prstGeom xmlns:a="http://schemas.openxmlformats.org/drawingml/2006/main" prst="rect">
+            <a:avLst/>
+          </a:prstGeom>
+        </p:spPr>
+      </p:pic>
+      <p:pic>
+        <p:nvPicPr>
+          <p:cNvPr id="40" name=""/>
+          <p:cNvPicPr>
+            <a:picLocks xmlns:a="http://schemas.openxmlformats.org/drawingml/2006/main" noChangeAspect="1"/>
+          </p:cNvPicPr>
+          <p:nvPr/>
+        </p:nvPicPr>
+        <p:blipFill>
+          <a:blip xmlns:r="http://schemas.openxmlformats.org/officeDocument/2006/relationships" xmlns:a="http://schemas.openxmlformats.org/drawingml/2006/main" r:embed="R297a5e2f10864251">
+            <a:extLst>
+              <a:ext uri="{96DAC541-7B7A-43D3-8B79-37D633B846F1}">
+                <asvg:svgBlip xmlns:asvg="http://schemas.microsoft.com/office/drawing/2016/SVG/main" r:embed="R33899ea576f24662"/>
+              </a:ext>
+            </a:extLst>
+          </a:blip>
+          <a:stretch xmlns:a="http://schemas.openxmlformats.org/drawingml/2006/main"/>
+        </p:blipFill>
+        <p:spPr>
+          <a:xfrm xmlns:a="http://schemas.openxmlformats.org/drawingml/2006/main">
+            <a:off x="1771650" y="1335087"/>
+            <a:ext cx="8648700" cy="5045075"/>
+          </a:xfrm>
+          <a:prstGeom xmlns:a="http://schemas.openxmlformats.org/drawingml/2006/main" prst="rect">
+            <a:avLst/>
+          </a:prstGeom>
+        </p:spPr>
+      </p:pic>
+      <p:pic>
+        <p:nvPicPr>
+          <p:cNvPr id="41" name=""/>
+          <p:cNvPicPr>
+            <a:picLocks xmlns:a="http://schemas.openxmlformats.org/drawingml/2006/main" noChangeAspect="1"/>
+          </p:cNvPicPr>
+          <p:nvPr/>
+        </p:nvPicPr>
+        <p:blipFill>
+          <a:blip xmlns:r="http://schemas.openxmlformats.org/officeDocument/2006/relationships" xmlns:a="http://schemas.openxmlformats.org/drawingml/2006/main" r:embed="R97268e01284248b7"/>
+          <a:stretch xmlns:a="http://schemas.openxmlformats.org/drawingml/2006/main"/>
+        </p:blipFill>
+        <p:spPr>
+          <a:xfrm xmlns:a="http://schemas.openxmlformats.org/drawingml/2006/main">
+            <a:off x="2312194" y="1335087"/>
+            <a:ext cx="7567613" cy="5045075"/>
+          </a:xfrm>
+          <a:prstGeom xmlns:a="http://schemas.openxmlformats.org/drawingml/2006/main" prst="rect">
+            <a:avLst/>
+          </a:prstGeom>
+        </p:spPr>
+      </p:pic>
+      <p:pic>
+        <p:nvPicPr>
+          <p:cNvPr id="42" name=""/>
+          <p:cNvPicPr>
+            <a:picLocks xmlns:a="http://schemas.openxmlformats.org/drawingml/2006/main" noChangeAspect="1"/>
+          </p:cNvPicPr>
+          <p:nvPr/>
+        </p:nvPicPr>
+        <p:blipFill>
+          <a:blip xmlns:r="http://schemas.openxmlformats.org/officeDocument/2006/relationships" xmlns:a="http://schemas.openxmlformats.org/drawingml/2006/main" r:embed="Raae22f38929b474d">
+            <a:extLst>
+              <a:ext uri="{96DAC541-7B7A-43D3-8B79-37D633B846F1}">
+                <asvg:svgBlip xmlns:asvg="http://schemas.microsoft.com/office/drawing/2016/SVG/main" r:embed="Rca2189c003764539"/>
+              </a:ext>
+            </a:extLst>
+          </a:blip>
+          <a:stretch xmlns:a="http://schemas.openxmlformats.org/drawingml/2006/main"/>
+        </p:blipFill>
+        <p:spPr>
+          <a:xfrm xmlns:a="http://schemas.openxmlformats.org/drawingml/2006/main">
+            <a:off x="1771650" y="1335087"/>
+            <a:ext cx="8648700" cy="5045075"/>
+          </a:xfrm>
+          <a:prstGeom xmlns:a="http://schemas.openxmlformats.org/drawingml/2006/main" prst="rect">
+            <a:avLst/>
+          </a:prstGeom>
+        </p:spPr>
+      </p:pic>
+      <p:pic>
+        <p:nvPicPr>
+          <p:cNvPr id="43" name=""/>
+          <p:cNvPicPr>
+            <a:picLocks xmlns:a="http://schemas.openxmlformats.org/drawingml/2006/main" noChangeAspect="1"/>
+          </p:cNvPicPr>
+          <p:nvPr/>
+        </p:nvPicPr>
+        <p:blipFill>
+          <a:blip xmlns:r="http://schemas.openxmlformats.org/officeDocument/2006/relationships" xmlns:a="http://schemas.openxmlformats.org/drawingml/2006/main" r:embed="Rb4a4326b7c39409a"/>
+          <a:stretch xmlns:a="http://schemas.openxmlformats.org/drawingml/2006/main"/>
+        </p:blipFill>
+        <p:spPr>
+          <a:xfrm xmlns:a="http://schemas.openxmlformats.org/drawingml/2006/main">
+            <a:off x="1891771" y="1335087"/>
+            <a:ext cx="8408458" cy="5045075"/>
+          </a:xfrm>
+          <a:prstGeom xmlns:a="http://schemas.openxmlformats.org/drawingml/2006/main" prst="rect">
+            <a:avLst/>
+          </a:prstGeom>
+        </p:spPr>
+      </p:pic>
+    </p:spTree>
+    <p:extLst>
+      <p:ext uri="{BB962C8B-B14F-4D97-AF65-F5344CB8AC3E}">
+        <p14:creationId xmlns:p14="http://schemas.microsoft.com/office/powerpoint/2010/main" val="666536286"/>
+      </p:ext>
+    </p:extLst>
+  </p:cSld>
+</p:sld>
+</file>
+
+<file path=ppt/slides/slide39.xml><?xml version="1.0" encoding="utf-8"?>
+<p:sld xmlns:p="http://schemas.openxmlformats.org/presentationml/2006/main">
+  <p:cSld>
+    <p:bg>
+      <p:bgPr>
+        <a:solidFill xmlns:a="http://schemas.openxmlformats.org/drawingml/2006/main">
+          <a:srgbClr val="FFFFFF"/>
+        </a:solidFill>
+      </p:bgPr>
+    </p:bg>
+    <p:spTree>
+      <p:nvGrpSpPr>
+        <p:cNvPr id="1" name=""/>
+        <p:cNvGrpSpPr/>
+        <p:nvPr/>
+      </p:nvGrpSpPr>
+      <p:grpSpPr>
+        <a:xfrm xmlns:a="http://schemas.openxmlformats.org/drawingml/2006/main"/>
+      </p:grpSpPr>
+      <p:sp>
+        <p:nvSpPr>
+          <p:cNvPr id="24" name="section-11">
+            <a:extLst xmlns:a="http://schemas.openxmlformats.org/drawingml/2006/main">
+              <a:ext uri="{FF2B5EF4-FFF2-40B4-BE49-F238E27FC236}">
+                <a16:creationId xmlns:a16="http://schemas.microsoft.com/office/drawing/2014/main" id="{272ED433-B59C-436C-9DFB-4D317B90A13F}"/>
+              </a:ext>
+            </a:extLst>
+          </p:cNvPr>
+          <p:cNvSpPr>
+            <a:spLocks xmlns:a="http://schemas.openxmlformats.org/drawingml/2006/main" noGrp="1"/>
+          </p:cNvSpPr>
+          <p:nvPr/>
+        </p:nvSpPr>
+        <p:spPr>
+          <a:xfrm xmlns:a="http://schemas.openxmlformats.org/drawingml/2006/main">
+            <a:off x="457200" y="228600"/>
+            <a:ext cx="4191000" cy="228600"/>
+          </a:xfrm>
+          <a:prstGeom xmlns:a="http://schemas.openxmlformats.org/drawingml/2006/main" prst="rect">
+            <a:avLst/>
+          </a:prstGeom>
+          <a:noFill xmlns:a="http://schemas.openxmlformats.org/drawingml/2006/main"/>
+          <a:ln xmlns:a="http://schemas.openxmlformats.org/drawingml/2006/main" w="0">
+            <a:noFill/>
+            <a:prstDash val="solid"/>
+          </a:ln>
+        </p:spPr>
+        <p:txBody>
+          <a:bodyPr xmlns:a="http://schemas.openxmlformats.org/drawingml/2006/main" wrap="square" lIns="0" tIns="0" rIns="0" bIns="0" anchor="t">
+            <a:normAutofit fontScale="100000"/>
+          </a:bodyPr>
+          <a:lstStyle xmlns:a="http://schemas.openxmlformats.org/drawingml/2006/main"/>
+          <a:p xmlns:a="http://schemas.openxmlformats.org/drawingml/2006/main">
+            <a:pPr algn="l">
+              <a:buNone/>
+              <a:defRPr sz="1200" b="1">
+                <a:solidFill>
+                  <a:srgbClr val="667384"/>
+                </a:solidFill>
+                <a:latin typeface="Arial"/>
+                <a:ea typeface="Arial"/>
+                <a:cs typeface="Arial"/>
+              </a:defRPr>
+            </a:pPr>
+            <a:r>
+              <a:rPr sz="1200" b="1">
+                <a:solidFill>
+                  <a:srgbClr val="667384"/>
+                </a:solidFill>
+                <a:latin typeface="Arial"/>
+                <a:ea typeface="Arial"/>
+                <a:cs typeface="Arial"/>
+              </a:rPr>
+              <a:t>RULE COMPARISON</a:t>
+            </a:r>
+          </a:p>
+        </p:txBody>
+      </p:sp>
+      <p:sp>
+        <p:nvSpPr>
+          <p:cNvPr id="2" name="title-11">
+            <a:extLst xmlns:a="http://schemas.openxmlformats.org/drawingml/2006/main">
+              <a:ext uri="{FF2B5EF4-FFF2-40B4-BE49-F238E27FC236}">
+                <a16:creationId xmlns:a16="http://schemas.microsoft.com/office/drawing/2014/main" id="{3EC40708-7E00-432C-8ECE-907FA5705292}"/>
+              </a:ext>
+            </a:extLst>
+          </p:cNvPr>
+          <p:cNvSpPr>
+            <a:spLocks xmlns:a="http://schemas.openxmlformats.org/drawingml/2006/main" noGrp="1"/>
+          </p:cNvSpPr>
+          <p:nvPr/>
+        </p:nvSpPr>
+        <p:spPr>
+          <a:xfrm xmlns:a="http://schemas.openxmlformats.org/drawingml/2006/main">
+            <a:off x="457200" y="533400"/>
+            <a:ext cx="11277600" cy="628650"/>
+          </a:xfrm>
+          <a:prstGeom xmlns:a="http://schemas.openxmlformats.org/drawingml/2006/main" prst="rect">
+            <a:avLst/>
+          </a:prstGeom>
+          <a:noFill xmlns:a="http://schemas.openxmlformats.org/drawingml/2006/main"/>
+          <a:ln xmlns:a="http://schemas.openxmlformats.org/drawingml/2006/main" w="0">
+            <a:noFill/>
+            <a:prstDash val="solid"/>
+          </a:ln>
+        </p:spPr>
+        <p:txBody>
+          <a:bodyPr xmlns:a="http://schemas.openxmlformats.org/drawingml/2006/main" wrap="square" lIns="0" tIns="0" rIns="0" bIns="0" anchor="t">
+            <a:normAutofit fontScale="100000"/>
+          </a:bodyPr>
+          <a:lstStyle xmlns:a="http://schemas.openxmlformats.org/drawingml/2006/main"/>
+          <a:p xmlns:a="http://schemas.openxmlformats.org/drawingml/2006/main">
+            <a:pPr algn="l">
+              <a:buNone/>
+              <a:defRPr sz="3525" b="1">
+                <a:solidFill>
+                  <a:srgbClr val="000000"/>
+                </a:solidFill>
+                <a:latin typeface="Arial"/>
+                <a:ea typeface="Arial"/>
+                <a:cs typeface="Arial"/>
+              </a:defRPr>
+            </a:pPr>
+            <a:r>
+              <a:rPr sz="3525" b="1">
+                <a:solidFill>
+                  <a:srgbClr val="000000"/>
+                </a:solidFill>
+                <a:latin typeface="Arial"/>
+                <a:ea typeface="Arial"/>
+                <a:cs typeface="Arial"/>
+              </a:rPr>
+              <a:t>The veto removes the losing subset and keeps 60%</a:t>
+            </a:r>
+          </a:p>
+        </p:txBody>
+      </p:sp>
+      <p:sp>
+        <p:nvSpPr>
+          <p:cNvPr id="3" name="">
+            <a:extLst xmlns:a="http://schemas.openxmlformats.org/drawingml/2006/main">
+              <a:ext uri="{FF2B5EF4-FFF2-40B4-BE49-F238E27FC236}">
+                <a16:creationId xmlns:a16="http://schemas.microsoft.com/office/drawing/2014/main" id="{D5CA0FCE-75E8-41EF-A76A-23E9E2120C6A}"/>
+              </a:ext>
+            </a:extLst>
+          </p:cNvPr>
+          <p:cNvSpPr>
+            <a:spLocks xmlns:a="http://schemas.openxmlformats.org/drawingml/2006/main" noGrp="1"/>
+          </p:cNvSpPr>
+          <p:nvPr/>
+        </p:nvSpPr>
+        <p:spPr>
+          <a:xfrm xmlns:a="http://schemas.openxmlformats.org/drawingml/2006/main">
+            <a:off x="457200" y="1200150"/>
+            <a:ext cx="11277600" cy="19050"/>
+          </a:xfrm>
+          <a:prstGeom xmlns:a="http://schemas.openxmlformats.org/drawingml/2006/main" prst="rect">
+            <a:avLst/>
+          </a:prstGeom>
+          <a:solidFill xmlns:a="http://schemas.openxmlformats.org/drawingml/2006/main">
+            <a:srgbClr val="B8BCC4"/>
+          </a:solidFill>
+          <a:ln xmlns:a="http://schemas.openxmlformats.org/drawingml/2006/main" w="0">
+            <a:solidFill>
+              <a:srgbClr val="B8BCC4"/>
+            </a:solidFill>
+            <a:prstDash val="solid"/>
+          </a:ln>
+        </p:spPr>
+      </p:sp>
+      <p:sp>
+        <p:nvSpPr>
+          <p:cNvPr id="4" name="footer-left-11">
+            <a:extLst xmlns:a="http://schemas.openxmlformats.org/drawingml/2006/main">
+              <a:ext uri="{FF2B5EF4-FFF2-40B4-BE49-F238E27FC236}">
+                <a16:creationId xmlns:a16="http://schemas.microsoft.com/office/drawing/2014/main" id="{700DA765-80E0-4197-8700-00D867B86FA2}"/>
+              </a:ext>
+            </a:extLst>
+          </p:cNvPr>
+          <p:cNvSpPr>
+            <a:spLocks xmlns:a="http://schemas.openxmlformats.org/drawingml/2006/main" noGrp="1"/>
+          </p:cNvSpPr>
+          <p:nvPr/>
+        </p:nvSpPr>
+        <p:spPr>
+          <a:xfrm xmlns:a="http://schemas.openxmlformats.org/drawingml/2006/main">
+            <a:off x="457200" y="6515100"/>
+            <a:ext cx="3429000" cy="171450"/>
+          </a:xfrm>
+          <a:prstGeom xmlns:a="http://schemas.openxmlformats.org/drawingml/2006/main" prst="rect">
+            <a:avLst/>
+          </a:prstGeom>
+          <a:noFill xmlns:a="http://schemas.openxmlformats.org/drawingml/2006/main"/>
+          <a:ln xmlns:a="http://schemas.openxmlformats.org/drawingml/2006/main" w="0">
+            <a:noFill/>
+            <a:prstDash val="solid"/>
+          </a:ln>
+        </p:spPr>
+        <p:txBody>
+          <a:bodyPr xmlns:a="http://schemas.openxmlformats.org/drawingml/2006/main" wrap="square" lIns="0" tIns="0" rIns="0" bIns="0" anchor="t">
+            <a:normAutofit fontScale="100000"/>
+          </a:bodyPr>
+          <a:lstStyle xmlns:a="http://schemas.openxmlformats.org/drawingml/2006/main"/>
+          <a:p xmlns:a="http://schemas.openxmlformats.org/drawingml/2006/main">
+            <a:pPr algn="l">
+              <a:buNone/>
+              <a:defRPr sz="825" b="0">
+                <a:solidFill>
+                  <a:srgbClr val="64748B"/>
+                </a:solidFill>
+                <a:latin typeface="Arial"/>
+                <a:ea typeface="Arial"/>
+                <a:cs typeface="Arial"/>
+              </a:defRPr>
+            </a:pPr>
+            <a:r>
+              <a:rPr sz="825" b="0">
+                <a:solidFill>
+                  <a:srgbClr val="64748B"/>
+                </a:solidFill>
+                <a:latin typeface="Arial"/>
+                <a:ea typeface="Arial"/>
+                <a:cs typeface="Arial"/>
+              </a:rPr>
+              <a:t>Return geometry | original, retained, and removed</a:t>
+            </a:r>
+          </a:p>
+        </p:txBody>
+      </p:sp>
+      <p:sp>
+        <p:nvSpPr>
+          <p:cNvPr id="5" name="footer-number-11">
+            <a:extLst xmlns:a="http://schemas.openxmlformats.org/drawingml/2006/main">
+              <a:ext uri="{FF2B5EF4-FFF2-40B4-BE49-F238E27FC236}">
+                <a16:creationId xmlns:a16="http://schemas.microsoft.com/office/drawing/2014/main" id="{83896276-4112-4532-AF7C-776C67C58B77}"/>
+              </a:ext>
+            </a:extLst>
+          </p:cNvPr>
+          <p:cNvSpPr>
+            <a:spLocks xmlns:a="http://schemas.openxmlformats.org/drawingml/2006/main" noGrp="1"/>
+          </p:cNvSpPr>
+          <p:nvPr/>
+        </p:nvSpPr>
+        <p:spPr>
+          <a:xfrm xmlns:a="http://schemas.openxmlformats.org/drawingml/2006/main">
+            <a:off x="10477500" y="6496050"/>
+            <a:ext cx="1257300" cy="190500"/>
+          </a:xfrm>
+          <a:prstGeom xmlns:a="http://schemas.openxmlformats.org/drawingml/2006/main" prst="rect">
+            <a:avLst/>
+          </a:prstGeom>
+          <a:noFill xmlns:a="http://schemas.openxmlformats.org/drawingml/2006/main"/>
+          <a:ln xmlns:a="http://schemas.openxmlformats.org/drawingml/2006/main" w="0">
+            <a:noFill/>
+            <a:prstDash val="solid"/>
+          </a:ln>
+        </p:spPr>
+        <p:txBody>
+          <a:bodyPr xmlns:a="http://schemas.openxmlformats.org/drawingml/2006/main" wrap="square" lIns="0" tIns="0" rIns="0" bIns="0" anchor="t">
+            <a:normAutofit fontScale="100000"/>
+          </a:bodyPr>
+          <a:lstStyle xmlns:a="http://schemas.openxmlformats.org/drawingml/2006/main"/>
+          <a:p xmlns:a="http://schemas.openxmlformats.org/drawingml/2006/main">
+            <a:pPr algn="r">
+              <a:buNone/>
+              <a:defRPr sz="1050" b="0">
+                <a:solidFill>
+                  <a:srgbClr val="667384"/>
+                </a:solidFill>
+                <a:latin typeface="Arial"/>
+                <a:ea typeface="Arial"/>
+                <a:cs typeface="Arial"/>
+              </a:defRPr>
+            </a:pPr>
+            <a:r>
+              <a:rPr sz="1050" b="0">
+                <a:solidFill>
+                  <a:srgbClr val="667384"/>
+                </a:solidFill>
+                <a:latin typeface="Arial"/>
+                <a:ea typeface="Arial"/>
+                <a:cs typeface="Arial"/>
+              </a:rPr>
+              <a:t>39</a:t>
+            </a:r>
+          </a:p>
+        </p:txBody>
+      </p:sp>
+      <p:pic>
+        <p:nvPicPr>
+          <p:cNvPr id="37" name=""/>
+          <p:cNvPicPr>
+            <a:picLocks xmlns:a="http://schemas.openxmlformats.org/drawingml/2006/main" noChangeAspect="1"/>
+          </p:cNvPicPr>
+          <p:nvPr/>
+        </p:nvPicPr>
+        <p:blipFill>
+          <a:blip xmlns:r="http://schemas.openxmlformats.org/officeDocument/2006/relationships" xmlns:a="http://schemas.openxmlformats.org/drawingml/2006/main" r:embed="Rb619f641576b4960"/>
+          <a:stretch xmlns:a="http://schemas.openxmlformats.org/drawingml/2006/main"/>
+        </p:blipFill>
+        <p:spPr>
+          <a:xfrm xmlns:a="http://schemas.openxmlformats.org/drawingml/2006/main">
+            <a:off x="1771650" y="1335087"/>
+            <a:ext cx="8648700" cy="5045075"/>
+          </a:xfrm>
+          <a:prstGeom xmlns:a="http://schemas.openxmlformats.org/drawingml/2006/main" prst="rect">
+            <a:avLst/>
+          </a:prstGeom>
+        </p:spPr>
+      </p:pic>
+      <p:pic>
+        <p:nvPicPr>
+          <p:cNvPr id="38" name=""/>
+          <p:cNvPicPr>
+            <a:picLocks xmlns:a="http://schemas.openxmlformats.org/drawingml/2006/main" noChangeAspect="1"/>
+          </p:cNvPicPr>
+          <p:nvPr/>
+        </p:nvPicPr>
+        <p:blipFill>
+          <a:blip xmlns:r="http://schemas.openxmlformats.org/officeDocument/2006/relationships" xmlns:a="http://schemas.openxmlformats.org/drawingml/2006/main" r:embed="R0d40b7783a1840d3">
+            <a:extLst>
+              <a:ext uri="{96DAC541-7B7A-43D3-8B79-37D633B846F1}">
+                <asvg:svgBlip xmlns:asvg="http://schemas.microsoft.com/office/drawing/2016/SVG/main" r:embed="R6a1fec0e88294180"/>
+              </a:ext>
+            </a:extLst>
+          </a:blip>
+          <a:stretch xmlns:a="http://schemas.openxmlformats.org/drawingml/2006/main"/>
+        </p:blipFill>
+        <p:spPr>
+          <a:xfrm xmlns:a="http://schemas.openxmlformats.org/drawingml/2006/main">
+            <a:off x="1771650" y="1335087"/>
+            <a:ext cx="8648700" cy="5045075"/>
+          </a:xfrm>
+          <a:prstGeom xmlns:a="http://schemas.openxmlformats.org/drawingml/2006/main" prst="rect">
+            <a:avLst/>
+          </a:prstGeom>
+        </p:spPr>
+      </p:pic>
+      <p:pic>
+        <p:nvPicPr>
+          <p:cNvPr id="39" name=""/>
+          <p:cNvPicPr>
+            <a:picLocks xmlns:a="http://schemas.openxmlformats.org/drawingml/2006/main" noChangeAspect="1"/>
+          </p:cNvPicPr>
+          <p:nvPr/>
+        </p:nvPicPr>
+        <p:blipFill>
+          <a:blip xmlns:r="http://schemas.openxmlformats.org/officeDocument/2006/relationships" xmlns:a="http://schemas.openxmlformats.org/drawingml/2006/main" r:embed="Rb0666e96f4c948b8"/>
+          <a:stretch xmlns:a="http://schemas.openxmlformats.org/drawingml/2006/main"/>
+        </p:blipFill>
+        <p:spPr>
+          <a:xfrm xmlns:a="http://schemas.openxmlformats.org/drawingml/2006/main">
+            <a:off x="2172053" y="1335087"/>
+            <a:ext cx="7847894" cy="5045075"/>
+          </a:xfrm>
+          <a:prstGeom xmlns:a="http://schemas.openxmlformats.org/drawingml/2006/main" prst="rect">
+            <a:avLst/>
+          </a:prstGeom>
+        </p:spPr>
+      </p:pic>
+      <p:pic>
+        <p:nvPicPr>
+          <p:cNvPr id="40" name=""/>
+          <p:cNvPicPr>
+            <a:picLocks xmlns:a="http://schemas.openxmlformats.org/drawingml/2006/main" noChangeAspect="1"/>
+          </p:cNvPicPr>
+          <p:nvPr/>
+        </p:nvPicPr>
+        <p:blipFill>
+          <a:blip xmlns:r="http://schemas.openxmlformats.org/officeDocument/2006/relationships" xmlns:a="http://schemas.openxmlformats.org/drawingml/2006/main" r:embed="Rb9681864740b421c">
+            <a:extLst>
+              <a:ext uri="{96DAC541-7B7A-43D3-8B79-37D633B846F1}">
+                <asvg:svgBlip xmlns:asvg="http://schemas.microsoft.com/office/drawing/2016/SVG/main" r:embed="Rd83182418c244840"/>
+              </a:ext>
+            </a:extLst>
+          </a:blip>
+          <a:stretch xmlns:a="http://schemas.openxmlformats.org/drawingml/2006/main"/>
+        </p:blipFill>
+        <p:spPr>
+          <a:xfrm xmlns:a="http://schemas.openxmlformats.org/drawingml/2006/main">
+            <a:off x="1771650" y="1335087"/>
+            <a:ext cx="8648700" cy="5045075"/>
+          </a:xfrm>
+          <a:prstGeom xmlns:a="http://schemas.openxmlformats.org/drawingml/2006/main" prst="rect">
+            <a:avLst/>
+          </a:prstGeom>
+        </p:spPr>
+      </p:pic>
+      <p:pic>
+        <p:nvPicPr>
+          <p:cNvPr id="41" name=""/>
+          <p:cNvPicPr>
+            <a:picLocks xmlns:a="http://schemas.openxmlformats.org/drawingml/2006/main" noChangeAspect="1"/>
+          </p:cNvPicPr>
+          <p:nvPr/>
+        </p:nvPicPr>
+        <p:blipFill>
+          <a:blip xmlns:r="http://schemas.openxmlformats.org/officeDocument/2006/relationships" xmlns:a="http://schemas.openxmlformats.org/drawingml/2006/main" r:embed="R04ed33b596e84411"/>
+          <a:stretch xmlns:a="http://schemas.openxmlformats.org/drawingml/2006/main"/>
+        </p:blipFill>
+        <p:spPr>
+          <a:xfrm xmlns:a="http://schemas.openxmlformats.org/drawingml/2006/main">
+            <a:off x="2312194" y="1335087"/>
+            <a:ext cx="7567613" cy="5045075"/>
+          </a:xfrm>
+          <a:prstGeom xmlns:a="http://schemas.openxmlformats.org/drawingml/2006/main" prst="rect">
+            <a:avLst/>
+          </a:prstGeom>
+        </p:spPr>
+      </p:pic>
+      <p:pic>
+        <p:nvPicPr>
+          <p:cNvPr id="42" name=""/>
+          <p:cNvPicPr>
+            <a:picLocks xmlns:a="http://schemas.openxmlformats.org/drawingml/2006/main" noChangeAspect="1"/>
+          </p:cNvPicPr>
+          <p:nvPr/>
+        </p:nvPicPr>
+        <p:blipFill>
+          <a:blip xmlns:r="http://schemas.openxmlformats.org/officeDocument/2006/relationships" xmlns:a="http://schemas.openxmlformats.org/drawingml/2006/main" r:embed="Rc22ad24d534c4bb6">
+            <a:extLst>
+              <a:ext uri="{96DAC541-7B7A-43D3-8B79-37D633B846F1}">
+                <asvg:svgBlip xmlns:asvg="http://schemas.microsoft.com/office/drawing/2016/SVG/main" r:embed="R7f480aba64764885"/>
+              </a:ext>
+            </a:extLst>
+          </a:blip>
+          <a:stretch xmlns:a="http://schemas.openxmlformats.org/drawingml/2006/main"/>
+        </p:blipFill>
+        <p:spPr>
+          <a:xfrm xmlns:a="http://schemas.openxmlformats.org/drawingml/2006/main">
+            <a:off x="1771650" y="1335087"/>
+            <a:ext cx="8648700" cy="5045075"/>
+          </a:xfrm>
+          <a:prstGeom xmlns:a="http://schemas.openxmlformats.org/drawingml/2006/main" prst="rect">
+            <a:avLst/>
+          </a:prstGeom>
+        </p:spPr>
+      </p:pic>
+      <p:pic>
+        <p:nvPicPr>
+          <p:cNvPr id="43" name=""/>
+          <p:cNvPicPr>
+            <a:picLocks xmlns:a="http://schemas.openxmlformats.org/drawingml/2006/main" noChangeAspect="1"/>
+          </p:cNvPicPr>
+          <p:nvPr/>
+        </p:nvPicPr>
+        <p:blipFill>
+          <a:blip xmlns:r="http://schemas.openxmlformats.org/officeDocument/2006/relationships" xmlns:a="http://schemas.openxmlformats.org/drawingml/2006/main" r:embed="R03fe56279ce74f42"/>
+          <a:stretch xmlns:a="http://schemas.openxmlformats.org/drawingml/2006/main"/>
+        </p:blipFill>
+        <p:spPr>
+          <a:xfrm xmlns:a="http://schemas.openxmlformats.org/drawingml/2006/main">
+            <a:off x="2172053" y="1335087"/>
+            <a:ext cx="7847894" cy="5045075"/>
+          </a:xfrm>
+          <a:prstGeom xmlns:a="http://schemas.openxmlformats.org/drawingml/2006/main" prst="rect">
+            <a:avLst/>
+          </a:prstGeom>
+        </p:spPr>
+      </p:pic>
+    </p:spTree>
+    <p:extLst>
+      <p:ext uri="{BB962C8B-B14F-4D97-AF65-F5344CB8AC3E}">
+        <p14:creationId xmlns:p14="http://schemas.microsoft.com/office/powerpoint/2010/main" val="666536286"/>
+      </p:ext>
+    </p:extLst>
+  </p:cSld>
+</p:sld>
+</file>
+
 <file path=ppt/slides/slide4.xml><?xml version="1.0" encoding="utf-8"?>
 <p:sld xmlns:p="http://schemas.openxmlformats.org/presentationml/2006/main">
   <p:cSld>
@@ -25377,6 +29849,4712 @@
                 <a:cs typeface="Arial"/>
               </a:rPr>
               <a:t>If later blocks retain conditional excess return, the signal has genuine duration rather than inherited history.</a:t>
+            </a:r>
+          </a:p>
+        </p:txBody>
+      </p:sp>
+    </p:spTree>
+    <p:extLst>
+      <p:ext uri="{BB962C8B-B14F-4D97-AF65-F5344CB8AC3E}">
+        <p14:creationId xmlns:p14="http://schemas.microsoft.com/office/powerpoint/2010/main" val="666536286"/>
+      </p:ext>
+    </p:extLst>
+  </p:cSld>
+</p:sld>
+</file>
+
+<file path=ppt/slides/slide40.xml><?xml version="1.0" encoding="utf-8"?>
+<p:sld xmlns:p="http://schemas.openxmlformats.org/presentationml/2006/main">
+  <p:cSld>
+    <p:bg>
+      <p:bgPr>
+        <a:solidFill xmlns:a="http://schemas.openxmlformats.org/drawingml/2006/main">
+          <a:srgbClr val="FFFFFF"/>
+        </a:solidFill>
+      </p:bgPr>
+    </p:bg>
+    <p:spTree>
+      <p:nvGrpSpPr>
+        <p:cNvPr id="1" name=""/>
+        <p:cNvGrpSpPr/>
+        <p:nvPr/>
+      </p:nvGrpSpPr>
+      <p:grpSpPr>
+        <a:xfrm xmlns:a="http://schemas.openxmlformats.org/drawingml/2006/main"/>
+      </p:grpSpPr>
+      <p:sp>
+        <p:nvSpPr>
+          <p:cNvPr id="24" name="section-11">
+            <a:extLst xmlns:a="http://schemas.openxmlformats.org/drawingml/2006/main">
+              <a:ext uri="{FF2B5EF4-FFF2-40B4-BE49-F238E27FC236}">
+                <a16:creationId xmlns:a16="http://schemas.microsoft.com/office/drawing/2014/main" id="{272ED433-B59C-436C-9DFB-4D317B90A13F}"/>
+              </a:ext>
+            </a:extLst>
+          </p:cNvPr>
+          <p:cNvSpPr>
+            <a:spLocks xmlns:a="http://schemas.openxmlformats.org/drawingml/2006/main" noGrp="1"/>
+          </p:cNvSpPr>
+          <p:nvPr/>
+        </p:nvSpPr>
+        <p:spPr>
+          <a:xfrm xmlns:a="http://schemas.openxmlformats.org/drawingml/2006/main">
+            <a:off x="457200" y="228600"/>
+            <a:ext cx="4191000" cy="228600"/>
+          </a:xfrm>
+          <a:prstGeom xmlns:a="http://schemas.openxmlformats.org/drawingml/2006/main" prst="rect">
+            <a:avLst/>
+          </a:prstGeom>
+          <a:noFill xmlns:a="http://schemas.openxmlformats.org/drawingml/2006/main"/>
+          <a:ln xmlns:a="http://schemas.openxmlformats.org/drawingml/2006/main" w="0">
+            <a:noFill/>
+            <a:prstDash val="solid"/>
+          </a:ln>
+        </p:spPr>
+        <p:txBody>
+          <a:bodyPr xmlns:a="http://schemas.openxmlformats.org/drawingml/2006/main" wrap="square" lIns="0" tIns="0" rIns="0" bIns="0" anchor="t">
+            <a:normAutofit fontScale="100000"/>
+          </a:bodyPr>
+          <a:lstStyle xmlns:a="http://schemas.openxmlformats.org/drawingml/2006/main"/>
+          <a:p xmlns:a="http://schemas.openxmlformats.org/drawingml/2006/main">
+            <a:pPr algn="l">
+              <a:buNone/>
+              <a:defRPr sz="1200" b="1">
+                <a:solidFill>
+                  <a:srgbClr val="667384"/>
+                </a:solidFill>
+                <a:latin typeface="Arial"/>
+                <a:ea typeface="Arial"/>
+                <a:cs typeface="Arial"/>
+              </a:defRPr>
+            </a:pPr>
+            <a:r>
+              <a:rPr sz="1200" b="1">
+                <a:solidFill>
+                  <a:srgbClr val="667384"/>
+                </a:solidFill>
+                <a:latin typeface="Arial"/>
+                <a:ea typeface="Arial"/>
+                <a:cs typeface="Arial"/>
+              </a:rPr>
+              <a:t>SECTOR TRANSPORT</a:t>
+            </a:r>
+          </a:p>
+        </p:txBody>
+      </p:sp>
+      <p:sp>
+        <p:nvSpPr>
+          <p:cNvPr id="2" name="title-11">
+            <a:extLst xmlns:a="http://schemas.openxmlformats.org/drawingml/2006/main">
+              <a:ext uri="{FF2B5EF4-FFF2-40B4-BE49-F238E27FC236}">
+                <a16:creationId xmlns:a16="http://schemas.microsoft.com/office/drawing/2014/main" id="{3EC40708-7E00-432C-8ECE-907FA5705292}"/>
+              </a:ext>
+            </a:extLst>
+          </p:cNvPr>
+          <p:cNvSpPr>
+            <a:spLocks xmlns:a="http://schemas.openxmlformats.org/drawingml/2006/main" noGrp="1"/>
+          </p:cNvSpPr>
+          <p:nvPr/>
+        </p:nvSpPr>
+        <p:spPr>
+          <a:xfrm xmlns:a="http://schemas.openxmlformats.org/drawingml/2006/main">
+            <a:off x="457200" y="533400"/>
+            <a:ext cx="11277600" cy="628650"/>
+          </a:xfrm>
+          <a:prstGeom xmlns:a="http://schemas.openxmlformats.org/drawingml/2006/main" prst="rect">
+            <a:avLst/>
+          </a:prstGeom>
+          <a:noFill xmlns:a="http://schemas.openxmlformats.org/drawingml/2006/main"/>
+          <a:ln xmlns:a="http://schemas.openxmlformats.org/drawingml/2006/main" w="0">
+            <a:noFill/>
+            <a:prstDash val="solid"/>
+          </a:ln>
+        </p:spPr>
+        <p:txBody>
+          <a:bodyPr xmlns:a="http://schemas.openxmlformats.org/drawingml/2006/main" wrap="square" lIns="0" tIns="0" rIns="0" bIns="0" anchor="t">
+            <a:normAutofit fontScale="100000"/>
+          </a:bodyPr>
+          <a:lstStyle xmlns:a="http://schemas.openxmlformats.org/drawingml/2006/main"/>
+          <a:p xmlns:a="http://schemas.openxmlformats.org/drawingml/2006/main">
+            <a:pPr algn="l">
+              <a:buNone/>
+              <a:defRPr sz="3525" b="1">
+                <a:solidFill>
+                  <a:srgbClr val="000000"/>
+                </a:solidFill>
+                <a:latin typeface="Arial"/>
+                <a:ea typeface="Arial"/>
+                <a:cs typeface="Arial"/>
+              </a:defRPr>
+            </a:pPr>
+            <a:r>
+              <a:rPr sz="3525" b="1">
+                <a:solidFill>
+                  <a:srgbClr val="000000"/>
+                </a:solidFill>
+                <a:latin typeface="Arial"/>
+                <a:ea typeface="Arial"/>
+                <a:cs typeface="Arial"/>
+              </a:rPr>
+              <a:t>Eight of eleven sector medians favor the veto</a:t>
+            </a:r>
+          </a:p>
+        </p:txBody>
+      </p:sp>
+      <p:sp>
+        <p:nvSpPr>
+          <p:cNvPr id="3" name="">
+            <a:extLst xmlns:a="http://schemas.openxmlformats.org/drawingml/2006/main">
+              <a:ext uri="{FF2B5EF4-FFF2-40B4-BE49-F238E27FC236}">
+                <a16:creationId xmlns:a16="http://schemas.microsoft.com/office/drawing/2014/main" id="{D5CA0FCE-75E8-41EF-A76A-23E9E2120C6A}"/>
+              </a:ext>
+            </a:extLst>
+          </p:cNvPr>
+          <p:cNvSpPr>
+            <a:spLocks xmlns:a="http://schemas.openxmlformats.org/drawingml/2006/main" noGrp="1"/>
+          </p:cNvSpPr>
+          <p:nvPr/>
+        </p:nvSpPr>
+        <p:spPr>
+          <a:xfrm xmlns:a="http://schemas.openxmlformats.org/drawingml/2006/main">
+            <a:off x="457200" y="1200150"/>
+            <a:ext cx="11277600" cy="19050"/>
+          </a:xfrm>
+          <a:prstGeom xmlns:a="http://schemas.openxmlformats.org/drawingml/2006/main" prst="rect">
+            <a:avLst/>
+          </a:prstGeom>
+          <a:solidFill xmlns:a="http://schemas.openxmlformats.org/drawingml/2006/main">
+            <a:srgbClr val="B8BCC4"/>
+          </a:solidFill>
+          <a:ln xmlns:a="http://schemas.openxmlformats.org/drawingml/2006/main" w="0">
+            <a:solidFill>
+              <a:srgbClr val="B8BCC4"/>
+            </a:solidFill>
+            <a:prstDash val="solid"/>
+          </a:ln>
+        </p:spPr>
+      </p:sp>
+      <p:sp>
+        <p:nvSpPr>
+          <p:cNvPr id="4" name="footer-left-11">
+            <a:extLst xmlns:a="http://schemas.openxmlformats.org/drawingml/2006/main">
+              <a:ext uri="{FF2B5EF4-FFF2-40B4-BE49-F238E27FC236}">
+                <a16:creationId xmlns:a16="http://schemas.microsoft.com/office/drawing/2014/main" id="{700DA765-80E0-4197-8700-00D867B86FA2}"/>
+              </a:ext>
+            </a:extLst>
+          </p:cNvPr>
+          <p:cNvSpPr>
+            <a:spLocks xmlns:a="http://schemas.openxmlformats.org/drawingml/2006/main" noGrp="1"/>
+          </p:cNvSpPr>
+          <p:nvPr/>
+        </p:nvSpPr>
+        <p:spPr>
+          <a:xfrm xmlns:a="http://schemas.openxmlformats.org/drawingml/2006/main">
+            <a:off x="457200" y="6515100"/>
+            <a:ext cx="3429000" cy="171450"/>
+          </a:xfrm>
+          <a:prstGeom xmlns:a="http://schemas.openxmlformats.org/drawingml/2006/main" prst="rect">
+            <a:avLst/>
+          </a:prstGeom>
+          <a:noFill xmlns:a="http://schemas.openxmlformats.org/drawingml/2006/main"/>
+          <a:ln xmlns:a="http://schemas.openxmlformats.org/drawingml/2006/main" w="0">
+            <a:noFill/>
+            <a:prstDash val="solid"/>
+          </a:ln>
+        </p:spPr>
+        <p:txBody>
+          <a:bodyPr xmlns:a="http://schemas.openxmlformats.org/drawingml/2006/main" wrap="square" lIns="0" tIns="0" rIns="0" bIns="0" anchor="t">
+            <a:normAutofit fontScale="100000"/>
+          </a:bodyPr>
+          <a:lstStyle xmlns:a="http://schemas.openxmlformats.org/drawingml/2006/main"/>
+          <a:p xmlns:a="http://schemas.openxmlformats.org/drawingml/2006/main">
+            <a:pPr algn="l">
+              <a:buNone/>
+              <a:defRPr sz="825" b="0">
+                <a:solidFill>
+                  <a:srgbClr val="64748B"/>
+                </a:solidFill>
+                <a:latin typeface="Arial"/>
+                <a:ea typeface="Arial"/>
+                <a:cs typeface="Arial"/>
+              </a:defRPr>
+            </a:pPr>
+            <a:r>
+              <a:rPr sz="825" b="0">
+                <a:solidFill>
+                  <a:srgbClr val="64748B"/>
+                </a:solidFill>
+                <a:latin typeface="Arial"/>
+                <a:ea typeface="Arial"/>
+                <a:cs typeface="Arial"/>
+              </a:rPr>
+              <a:t>Return geometry | median asset contrast by sector</a:t>
+            </a:r>
+          </a:p>
+        </p:txBody>
+      </p:sp>
+      <p:sp>
+        <p:nvSpPr>
+          <p:cNvPr id="5" name="footer-number-11">
+            <a:extLst xmlns:a="http://schemas.openxmlformats.org/drawingml/2006/main">
+              <a:ext uri="{FF2B5EF4-FFF2-40B4-BE49-F238E27FC236}">
+                <a16:creationId xmlns:a16="http://schemas.microsoft.com/office/drawing/2014/main" id="{83896276-4112-4532-AF7C-776C67C58B77}"/>
+              </a:ext>
+            </a:extLst>
+          </p:cNvPr>
+          <p:cNvSpPr>
+            <a:spLocks xmlns:a="http://schemas.openxmlformats.org/drawingml/2006/main" noGrp="1"/>
+          </p:cNvSpPr>
+          <p:nvPr/>
+        </p:nvSpPr>
+        <p:spPr>
+          <a:xfrm xmlns:a="http://schemas.openxmlformats.org/drawingml/2006/main">
+            <a:off x="10477500" y="6496050"/>
+            <a:ext cx="1257300" cy="190500"/>
+          </a:xfrm>
+          <a:prstGeom xmlns:a="http://schemas.openxmlformats.org/drawingml/2006/main" prst="rect">
+            <a:avLst/>
+          </a:prstGeom>
+          <a:noFill xmlns:a="http://schemas.openxmlformats.org/drawingml/2006/main"/>
+          <a:ln xmlns:a="http://schemas.openxmlformats.org/drawingml/2006/main" w="0">
+            <a:noFill/>
+            <a:prstDash val="solid"/>
+          </a:ln>
+        </p:spPr>
+        <p:txBody>
+          <a:bodyPr xmlns:a="http://schemas.openxmlformats.org/drawingml/2006/main" wrap="square" lIns="0" tIns="0" rIns="0" bIns="0" anchor="t">
+            <a:normAutofit fontScale="100000"/>
+          </a:bodyPr>
+          <a:lstStyle xmlns:a="http://schemas.openxmlformats.org/drawingml/2006/main"/>
+          <a:p xmlns:a="http://schemas.openxmlformats.org/drawingml/2006/main">
+            <a:pPr algn="r">
+              <a:buNone/>
+              <a:defRPr sz="1050" b="0">
+                <a:solidFill>
+                  <a:srgbClr val="667384"/>
+                </a:solidFill>
+                <a:latin typeface="Arial"/>
+                <a:ea typeface="Arial"/>
+                <a:cs typeface="Arial"/>
+              </a:defRPr>
+            </a:pPr>
+            <a:r>
+              <a:rPr sz="1050" b="0">
+                <a:solidFill>
+                  <a:srgbClr val="667384"/>
+                </a:solidFill>
+                <a:latin typeface="Arial"/>
+                <a:ea typeface="Arial"/>
+                <a:cs typeface="Arial"/>
+              </a:rPr>
+              <a:t>40</a:t>
+            </a:r>
+          </a:p>
+        </p:txBody>
+      </p:sp>
+      <p:pic>
+        <p:nvPicPr>
+          <p:cNvPr id="37" name=""/>
+          <p:cNvPicPr>
+            <a:picLocks xmlns:a="http://schemas.openxmlformats.org/drawingml/2006/main" noChangeAspect="1"/>
+          </p:cNvPicPr>
+          <p:nvPr/>
+        </p:nvPicPr>
+        <p:blipFill>
+          <a:blip xmlns:r="http://schemas.openxmlformats.org/officeDocument/2006/relationships" xmlns:a="http://schemas.openxmlformats.org/drawingml/2006/main" r:embed="Rabb2005687cf431c"/>
+          <a:stretch xmlns:a="http://schemas.openxmlformats.org/drawingml/2006/main"/>
+        </p:blipFill>
+        <p:spPr>
+          <a:xfrm xmlns:a="http://schemas.openxmlformats.org/drawingml/2006/main">
+            <a:off x="1771650" y="1335087"/>
+            <a:ext cx="8648700" cy="5045075"/>
+          </a:xfrm>
+          <a:prstGeom xmlns:a="http://schemas.openxmlformats.org/drawingml/2006/main" prst="rect">
+            <a:avLst/>
+          </a:prstGeom>
+        </p:spPr>
+      </p:pic>
+      <p:pic>
+        <p:nvPicPr>
+          <p:cNvPr id="38" name=""/>
+          <p:cNvPicPr>
+            <a:picLocks xmlns:a="http://schemas.openxmlformats.org/drawingml/2006/main" noChangeAspect="1"/>
+          </p:cNvPicPr>
+          <p:nvPr/>
+        </p:nvPicPr>
+        <p:blipFill>
+          <a:blip xmlns:r="http://schemas.openxmlformats.org/officeDocument/2006/relationships" xmlns:a="http://schemas.openxmlformats.org/drawingml/2006/main" r:embed="R852289cc2f7b4ff4">
+            <a:extLst>
+              <a:ext uri="{96DAC541-7B7A-43D3-8B79-37D633B846F1}">
+                <asvg:svgBlip xmlns:asvg="http://schemas.microsoft.com/office/drawing/2016/SVG/main" r:embed="R71cb06cfda0f481a"/>
+              </a:ext>
+            </a:extLst>
+          </a:blip>
+          <a:stretch xmlns:a="http://schemas.openxmlformats.org/drawingml/2006/main"/>
+        </p:blipFill>
+        <p:spPr>
+          <a:xfrm xmlns:a="http://schemas.openxmlformats.org/drawingml/2006/main">
+            <a:off x="1771650" y="1335087"/>
+            <a:ext cx="8648700" cy="5045075"/>
+          </a:xfrm>
+          <a:prstGeom xmlns:a="http://schemas.openxmlformats.org/drawingml/2006/main" prst="rect">
+            <a:avLst/>
+          </a:prstGeom>
+        </p:spPr>
+      </p:pic>
+      <p:pic>
+        <p:nvPicPr>
+          <p:cNvPr id="39" name=""/>
+          <p:cNvPicPr>
+            <a:picLocks xmlns:a="http://schemas.openxmlformats.org/drawingml/2006/main" noChangeAspect="1"/>
+          </p:cNvPicPr>
+          <p:nvPr/>
+        </p:nvPicPr>
+        <p:blipFill>
+          <a:blip xmlns:r="http://schemas.openxmlformats.org/officeDocument/2006/relationships" xmlns:a="http://schemas.openxmlformats.org/drawingml/2006/main" r:embed="R2c66f777fe564ed7"/>
+          <a:stretch xmlns:a="http://schemas.openxmlformats.org/drawingml/2006/main"/>
+        </p:blipFill>
+        <p:spPr>
+          <a:xfrm xmlns:a="http://schemas.openxmlformats.org/drawingml/2006/main">
+            <a:off x="2172053" y="1335087"/>
+            <a:ext cx="7847894" cy="5045075"/>
+          </a:xfrm>
+          <a:prstGeom xmlns:a="http://schemas.openxmlformats.org/drawingml/2006/main" prst="rect">
+            <a:avLst/>
+          </a:prstGeom>
+        </p:spPr>
+      </p:pic>
+      <p:pic>
+        <p:nvPicPr>
+          <p:cNvPr id="40" name=""/>
+          <p:cNvPicPr>
+            <a:picLocks xmlns:a="http://schemas.openxmlformats.org/drawingml/2006/main" noChangeAspect="1"/>
+          </p:cNvPicPr>
+          <p:nvPr/>
+        </p:nvPicPr>
+        <p:blipFill>
+          <a:blip xmlns:r="http://schemas.openxmlformats.org/officeDocument/2006/relationships" xmlns:a="http://schemas.openxmlformats.org/drawingml/2006/main" r:embed="R6742b8d35f1e44fb">
+            <a:extLst>
+              <a:ext uri="{96DAC541-7B7A-43D3-8B79-37D633B846F1}">
+                <asvg:svgBlip xmlns:asvg="http://schemas.microsoft.com/office/drawing/2016/SVG/main" r:embed="Rb6ea6f231140483a"/>
+              </a:ext>
+            </a:extLst>
+          </a:blip>
+          <a:stretch xmlns:a="http://schemas.openxmlformats.org/drawingml/2006/main"/>
+        </p:blipFill>
+        <p:spPr>
+          <a:xfrm xmlns:a="http://schemas.openxmlformats.org/drawingml/2006/main">
+            <a:off x="1771650" y="1335087"/>
+            <a:ext cx="8648700" cy="5045075"/>
+          </a:xfrm>
+          <a:prstGeom xmlns:a="http://schemas.openxmlformats.org/drawingml/2006/main" prst="rect">
+            <a:avLst/>
+          </a:prstGeom>
+        </p:spPr>
+      </p:pic>
+      <p:pic>
+        <p:nvPicPr>
+          <p:cNvPr id="41" name=""/>
+          <p:cNvPicPr>
+            <a:picLocks xmlns:a="http://schemas.openxmlformats.org/drawingml/2006/main" noChangeAspect="1"/>
+          </p:cNvPicPr>
+          <p:nvPr/>
+        </p:nvPicPr>
+        <p:blipFill>
+          <a:blip xmlns:r="http://schemas.openxmlformats.org/officeDocument/2006/relationships" xmlns:a="http://schemas.openxmlformats.org/drawingml/2006/main" r:embed="R8be76921f1084d30"/>
+          <a:stretch xmlns:a="http://schemas.openxmlformats.org/drawingml/2006/main"/>
+        </p:blipFill>
+        <p:spPr>
+          <a:xfrm xmlns:a="http://schemas.openxmlformats.org/drawingml/2006/main">
+            <a:off x="2312194" y="1335087"/>
+            <a:ext cx="7567613" cy="5045075"/>
+          </a:xfrm>
+          <a:prstGeom xmlns:a="http://schemas.openxmlformats.org/drawingml/2006/main" prst="rect">
+            <a:avLst/>
+          </a:prstGeom>
+        </p:spPr>
+      </p:pic>
+      <p:pic>
+        <p:nvPicPr>
+          <p:cNvPr id="42" name=""/>
+          <p:cNvPicPr>
+            <a:picLocks xmlns:a="http://schemas.openxmlformats.org/drawingml/2006/main" noChangeAspect="1"/>
+          </p:cNvPicPr>
+          <p:nvPr/>
+        </p:nvPicPr>
+        <p:blipFill>
+          <a:blip xmlns:r="http://schemas.openxmlformats.org/officeDocument/2006/relationships" xmlns:a="http://schemas.openxmlformats.org/drawingml/2006/main" r:embed="Rdb4ab0a2c27946d4">
+            <a:extLst>
+              <a:ext uri="{96DAC541-7B7A-43D3-8B79-37D633B846F1}">
+                <asvg:svgBlip xmlns:asvg="http://schemas.microsoft.com/office/drawing/2016/SVG/main" r:embed="R7b33e319a88b4af7"/>
+              </a:ext>
+            </a:extLst>
+          </a:blip>
+          <a:stretch xmlns:a="http://schemas.openxmlformats.org/drawingml/2006/main"/>
+        </p:blipFill>
+        <p:spPr>
+          <a:xfrm xmlns:a="http://schemas.openxmlformats.org/drawingml/2006/main">
+            <a:off x="1771650" y="1335087"/>
+            <a:ext cx="8648700" cy="5045075"/>
+          </a:xfrm>
+          <a:prstGeom xmlns:a="http://schemas.openxmlformats.org/drawingml/2006/main" prst="rect">
+            <a:avLst/>
+          </a:prstGeom>
+        </p:spPr>
+      </p:pic>
+      <p:pic>
+        <p:nvPicPr>
+          <p:cNvPr id="43" name=""/>
+          <p:cNvPicPr>
+            <a:picLocks xmlns:a="http://schemas.openxmlformats.org/drawingml/2006/main" noChangeAspect="1"/>
+          </p:cNvPicPr>
+          <p:nvPr/>
+        </p:nvPicPr>
+        <p:blipFill>
+          <a:blip xmlns:r="http://schemas.openxmlformats.org/officeDocument/2006/relationships" xmlns:a="http://schemas.openxmlformats.org/drawingml/2006/main" r:embed="R7245d09da50346df"/>
+          <a:stretch xmlns:a="http://schemas.openxmlformats.org/drawingml/2006/main"/>
+        </p:blipFill>
+        <p:spPr>
+          <a:xfrm xmlns:a="http://schemas.openxmlformats.org/drawingml/2006/main">
+            <a:off x="1891771" y="1335087"/>
+            <a:ext cx="8408458" cy="5045075"/>
+          </a:xfrm>
+          <a:prstGeom xmlns:a="http://schemas.openxmlformats.org/drawingml/2006/main" prst="rect">
+            <a:avLst/>
+          </a:prstGeom>
+        </p:spPr>
+      </p:pic>
+    </p:spTree>
+    <p:extLst>
+      <p:ext uri="{BB962C8B-B14F-4D97-AF65-F5344CB8AC3E}">
+        <p14:creationId xmlns:p14="http://schemas.microsoft.com/office/powerpoint/2010/main" val="666536286"/>
+      </p:ext>
+    </p:extLst>
+  </p:cSld>
+</p:sld>
+</file>
+
+<file path=ppt/slides/slide41.xml><?xml version="1.0" encoding="utf-8"?>
+<p:sld xmlns:p="http://schemas.openxmlformats.org/presentationml/2006/main">
+  <p:cSld>
+    <p:bg>
+      <p:bgPr>
+        <a:solidFill xmlns:a="http://schemas.openxmlformats.org/drawingml/2006/main">
+          <a:srgbClr val="FFFFFF"/>
+        </a:solidFill>
+      </p:bgPr>
+    </p:bg>
+    <p:spTree>
+      <p:nvGrpSpPr>
+        <p:cNvPr id="1" name=""/>
+        <p:cNvGrpSpPr/>
+        <p:nvPr/>
+      </p:nvGrpSpPr>
+      <p:grpSpPr>
+        <a:xfrm xmlns:a="http://schemas.openxmlformats.org/drawingml/2006/main"/>
+      </p:grpSpPr>
+      <p:sp>
+        <p:nvSpPr>
+          <p:cNvPr id="24" name="section-11">
+            <a:extLst xmlns:a="http://schemas.openxmlformats.org/drawingml/2006/main">
+              <a:ext uri="{FF2B5EF4-FFF2-40B4-BE49-F238E27FC236}">
+                <a16:creationId xmlns:a16="http://schemas.microsoft.com/office/drawing/2014/main" id="{272ED433-B59C-436C-9DFB-4D317B90A13F}"/>
+              </a:ext>
+            </a:extLst>
+          </p:cNvPr>
+          <p:cNvSpPr>
+            <a:spLocks xmlns:a="http://schemas.openxmlformats.org/drawingml/2006/main" noGrp="1"/>
+          </p:cNvSpPr>
+          <p:nvPr/>
+        </p:nvSpPr>
+        <p:spPr>
+          <a:xfrm xmlns:a="http://schemas.openxmlformats.org/drawingml/2006/main">
+            <a:off x="457200" y="228600"/>
+            <a:ext cx="4191000" cy="228600"/>
+          </a:xfrm>
+          <a:prstGeom xmlns:a="http://schemas.openxmlformats.org/drawingml/2006/main" prst="rect">
+            <a:avLst/>
+          </a:prstGeom>
+          <a:noFill xmlns:a="http://schemas.openxmlformats.org/drawingml/2006/main"/>
+          <a:ln xmlns:a="http://schemas.openxmlformats.org/drawingml/2006/main" w="0">
+            <a:noFill/>
+            <a:prstDash val="solid"/>
+          </a:ln>
+        </p:spPr>
+        <p:txBody>
+          <a:bodyPr xmlns:a="http://schemas.openxmlformats.org/drawingml/2006/main" wrap="square" lIns="0" tIns="0" rIns="0" bIns="0" anchor="t">
+            <a:normAutofit fontScale="100000"/>
+          </a:bodyPr>
+          <a:lstStyle xmlns:a="http://schemas.openxmlformats.org/drawingml/2006/main"/>
+          <a:p xmlns:a="http://schemas.openxmlformats.org/drawingml/2006/main">
+            <a:pPr algn="l">
+              <a:buNone/>
+              <a:defRPr sz="1200" b="1">
+                <a:solidFill>
+                  <a:srgbClr val="667384"/>
+                </a:solidFill>
+                <a:latin typeface="Arial"/>
+                <a:ea typeface="Arial"/>
+                <a:cs typeface="Arial"/>
+              </a:defRPr>
+            </a:pPr>
+            <a:r>
+              <a:rPr sz="1200" b="1">
+                <a:solidFill>
+                  <a:srgbClr val="667384"/>
+                </a:solidFill>
+                <a:latin typeface="Arial"/>
+                <a:ea typeface="Arial"/>
+                <a:cs typeface="Arial"/>
+              </a:rPr>
+              <a:t>ASSET TRANSPORT</a:t>
+            </a:r>
+          </a:p>
+        </p:txBody>
+      </p:sp>
+      <p:sp>
+        <p:nvSpPr>
+          <p:cNvPr id="2" name="title-11">
+            <a:extLst xmlns:a="http://schemas.openxmlformats.org/drawingml/2006/main">
+              <a:ext uri="{FF2B5EF4-FFF2-40B4-BE49-F238E27FC236}">
+                <a16:creationId xmlns:a16="http://schemas.microsoft.com/office/drawing/2014/main" id="{3EC40708-7E00-432C-8ECE-907FA5705292}"/>
+              </a:ext>
+            </a:extLst>
+          </p:cNvPr>
+          <p:cNvSpPr>
+            <a:spLocks xmlns:a="http://schemas.openxmlformats.org/drawingml/2006/main" noGrp="1"/>
+          </p:cNvSpPr>
+          <p:nvPr/>
+        </p:nvSpPr>
+        <p:spPr>
+          <a:xfrm xmlns:a="http://schemas.openxmlformats.org/drawingml/2006/main">
+            <a:off x="457200" y="533400"/>
+            <a:ext cx="11277600" cy="628650"/>
+          </a:xfrm>
+          <a:prstGeom xmlns:a="http://schemas.openxmlformats.org/drawingml/2006/main" prst="rect">
+            <a:avLst/>
+          </a:prstGeom>
+          <a:noFill xmlns:a="http://schemas.openxmlformats.org/drawingml/2006/main"/>
+          <a:ln xmlns:a="http://schemas.openxmlformats.org/drawingml/2006/main" w="0">
+            <a:noFill/>
+            <a:prstDash val="solid"/>
+          </a:ln>
+        </p:spPr>
+        <p:txBody>
+          <a:bodyPr xmlns:a="http://schemas.openxmlformats.org/drawingml/2006/main" wrap="square" lIns="0" tIns="0" rIns="0" bIns="0" anchor="t">
+            <a:normAutofit fontScale="100000"/>
+          </a:bodyPr>
+          <a:lstStyle xmlns:a="http://schemas.openxmlformats.org/drawingml/2006/main"/>
+          <a:p xmlns:a="http://schemas.openxmlformats.org/drawingml/2006/main">
+            <a:pPr algn="l">
+              <a:buNone/>
+              <a:defRPr sz="3525" b="1">
+                <a:solidFill>
+                  <a:srgbClr val="000000"/>
+                </a:solidFill>
+                <a:latin typeface="Arial"/>
+                <a:ea typeface="Arial"/>
+                <a:cs typeface="Arial"/>
+              </a:defRPr>
+            </a:pPr>
+            <a:r>
+              <a:rPr sz="3525" b="1">
+                <a:solidFill>
+                  <a:srgbClr val="000000"/>
+                </a:solidFill>
+                <a:latin typeface="Arial"/>
+                <a:ea typeface="Arial"/>
+                <a:cs typeface="Arial"/>
+              </a:rPr>
+              <a:t>Fifty-five of eighty-eight stocks favor the veto</a:t>
+            </a:r>
+          </a:p>
+        </p:txBody>
+      </p:sp>
+      <p:sp>
+        <p:nvSpPr>
+          <p:cNvPr id="3" name="">
+            <a:extLst xmlns:a="http://schemas.openxmlformats.org/drawingml/2006/main">
+              <a:ext uri="{FF2B5EF4-FFF2-40B4-BE49-F238E27FC236}">
+                <a16:creationId xmlns:a16="http://schemas.microsoft.com/office/drawing/2014/main" id="{D5CA0FCE-75E8-41EF-A76A-23E9E2120C6A}"/>
+              </a:ext>
+            </a:extLst>
+          </p:cNvPr>
+          <p:cNvSpPr>
+            <a:spLocks xmlns:a="http://schemas.openxmlformats.org/drawingml/2006/main" noGrp="1"/>
+          </p:cNvSpPr>
+          <p:nvPr/>
+        </p:nvSpPr>
+        <p:spPr>
+          <a:xfrm xmlns:a="http://schemas.openxmlformats.org/drawingml/2006/main">
+            <a:off x="457200" y="1200150"/>
+            <a:ext cx="11277600" cy="19050"/>
+          </a:xfrm>
+          <a:prstGeom xmlns:a="http://schemas.openxmlformats.org/drawingml/2006/main" prst="rect">
+            <a:avLst/>
+          </a:prstGeom>
+          <a:solidFill xmlns:a="http://schemas.openxmlformats.org/drawingml/2006/main">
+            <a:srgbClr val="B8BCC4"/>
+          </a:solidFill>
+          <a:ln xmlns:a="http://schemas.openxmlformats.org/drawingml/2006/main" w="0">
+            <a:solidFill>
+              <a:srgbClr val="B8BCC4"/>
+            </a:solidFill>
+            <a:prstDash val="solid"/>
+          </a:ln>
+        </p:spPr>
+      </p:sp>
+      <p:sp>
+        <p:nvSpPr>
+          <p:cNvPr id="4" name="footer-left-11">
+            <a:extLst xmlns:a="http://schemas.openxmlformats.org/drawingml/2006/main">
+              <a:ext uri="{FF2B5EF4-FFF2-40B4-BE49-F238E27FC236}">
+                <a16:creationId xmlns:a16="http://schemas.microsoft.com/office/drawing/2014/main" id="{700DA765-80E0-4197-8700-00D867B86FA2}"/>
+              </a:ext>
+            </a:extLst>
+          </p:cNvPr>
+          <p:cNvSpPr>
+            <a:spLocks xmlns:a="http://schemas.openxmlformats.org/drawingml/2006/main" noGrp="1"/>
+          </p:cNvSpPr>
+          <p:nvPr/>
+        </p:nvSpPr>
+        <p:spPr>
+          <a:xfrm xmlns:a="http://schemas.openxmlformats.org/drawingml/2006/main">
+            <a:off x="457200" y="6515100"/>
+            <a:ext cx="3429000" cy="171450"/>
+          </a:xfrm>
+          <a:prstGeom xmlns:a="http://schemas.openxmlformats.org/drawingml/2006/main" prst="rect">
+            <a:avLst/>
+          </a:prstGeom>
+          <a:noFill xmlns:a="http://schemas.openxmlformats.org/drawingml/2006/main"/>
+          <a:ln xmlns:a="http://schemas.openxmlformats.org/drawingml/2006/main" w="0">
+            <a:noFill/>
+            <a:prstDash val="solid"/>
+          </a:ln>
+        </p:spPr>
+        <p:txBody>
+          <a:bodyPr xmlns:a="http://schemas.openxmlformats.org/drawingml/2006/main" wrap="square" lIns="0" tIns="0" rIns="0" bIns="0" anchor="t">
+            <a:normAutofit fontScale="100000"/>
+          </a:bodyPr>
+          <a:lstStyle xmlns:a="http://schemas.openxmlformats.org/drawingml/2006/main"/>
+          <a:p xmlns:a="http://schemas.openxmlformats.org/drawingml/2006/main">
+            <a:pPr algn="l">
+              <a:buNone/>
+              <a:defRPr sz="825" b="0">
+                <a:solidFill>
+                  <a:srgbClr val="64748B"/>
+                </a:solidFill>
+                <a:latin typeface="Arial"/>
+                <a:ea typeface="Arial"/>
+                <a:cs typeface="Arial"/>
+              </a:defRPr>
+            </a:pPr>
+            <a:r>
+              <a:rPr sz="825" b="0">
+                <a:solidFill>
+                  <a:srgbClr val="64748B"/>
+                </a:solidFill>
+                <a:latin typeface="Arial"/>
+                <a:ea typeface="Arial"/>
+                <a:cs typeface="Arial"/>
+              </a:rPr>
+              <a:t>Return geometry | per-asset contrast distribution</a:t>
+            </a:r>
+          </a:p>
+        </p:txBody>
+      </p:sp>
+      <p:sp>
+        <p:nvSpPr>
+          <p:cNvPr id="5" name="footer-number-11">
+            <a:extLst xmlns:a="http://schemas.openxmlformats.org/drawingml/2006/main">
+              <a:ext uri="{FF2B5EF4-FFF2-40B4-BE49-F238E27FC236}">
+                <a16:creationId xmlns:a16="http://schemas.microsoft.com/office/drawing/2014/main" id="{83896276-4112-4532-AF7C-776C67C58B77}"/>
+              </a:ext>
+            </a:extLst>
+          </p:cNvPr>
+          <p:cNvSpPr>
+            <a:spLocks xmlns:a="http://schemas.openxmlformats.org/drawingml/2006/main" noGrp="1"/>
+          </p:cNvSpPr>
+          <p:nvPr/>
+        </p:nvSpPr>
+        <p:spPr>
+          <a:xfrm xmlns:a="http://schemas.openxmlformats.org/drawingml/2006/main">
+            <a:off x="10477500" y="6496050"/>
+            <a:ext cx="1257300" cy="190500"/>
+          </a:xfrm>
+          <a:prstGeom xmlns:a="http://schemas.openxmlformats.org/drawingml/2006/main" prst="rect">
+            <a:avLst/>
+          </a:prstGeom>
+          <a:noFill xmlns:a="http://schemas.openxmlformats.org/drawingml/2006/main"/>
+          <a:ln xmlns:a="http://schemas.openxmlformats.org/drawingml/2006/main" w="0">
+            <a:noFill/>
+            <a:prstDash val="solid"/>
+          </a:ln>
+        </p:spPr>
+        <p:txBody>
+          <a:bodyPr xmlns:a="http://schemas.openxmlformats.org/drawingml/2006/main" wrap="square" lIns="0" tIns="0" rIns="0" bIns="0" anchor="t">
+            <a:normAutofit fontScale="100000"/>
+          </a:bodyPr>
+          <a:lstStyle xmlns:a="http://schemas.openxmlformats.org/drawingml/2006/main"/>
+          <a:p xmlns:a="http://schemas.openxmlformats.org/drawingml/2006/main">
+            <a:pPr algn="r">
+              <a:buNone/>
+              <a:defRPr sz="1050" b="0">
+                <a:solidFill>
+                  <a:srgbClr val="667384"/>
+                </a:solidFill>
+                <a:latin typeface="Arial"/>
+                <a:ea typeface="Arial"/>
+                <a:cs typeface="Arial"/>
+              </a:defRPr>
+            </a:pPr>
+            <a:r>
+              <a:rPr sz="1050" b="0">
+                <a:solidFill>
+                  <a:srgbClr val="667384"/>
+                </a:solidFill>
+                <a:latin typeface="Arial"/>
+                <a:ea typeface="Arial"/>
+                <a:cs typeface="Arial"/>
+              </a:rPr>
+              <a:t>41</a:t>
+            </a:r>
+          </a:p>
+        </p:txBody>
+      </p:sp>
+      <p:pic>
+        <p:nvPicPr>
+          <p:cNvPr id="37" name=""/>
+          <p:cNvPicPr>
+            <a:picLocks xmlns:a="http://schemas.openxmlformats.org/drawingml/2006/main" noChangeAspect="1"/>
+          </p:cNvPicPr>
+          <p:nvPr/>
+        </p:nvPicPr>
+        <p:blipFill>
+          <a:blip xmlns:r="http://schemas.openxmlformats.org/officeDocument/2006/relationships" xmlns:a="http://schemas.openxmlformats.org/drawingml/2006/main" r:embed="Re424f938e8a245b8"/>
+          <a:stretch xmlns:a="http://schemas.openxmlformats.org/drawingml/2006/main"/>
+        </p:blipFill>
+        <p:spPr>
+          <a:xfrm xmlns:a="http://schemas.openxmlformats.org/drawingml/2006/main">
+            <a:off x="1771650" y="1335087"/>
+            <a:ext cx="8648700" cy="5045075"/>
+          </a:xfrm>
+          <a:prstGeom xmlns:a="http://schemas.openxmlformats.org/drawingml/2006/main" prst="rect">
+            <a:avLst/>
+          </a:prstGeom>
+        </p:spPr>
+      </p:pic>
+      <p:pic>
+        <p:nvPicPr>
+          <p:cNvPr id="38" name=""/>
+          <p:cNvPicPr>
+            <a:picLocks xmlns:a="http://schemas.openxmlformats.org/drawingml/2006/main" noChangeAspect="1"/>
+          </p:cNvPicPr>
+          <p:nvPr/>
+        </p:nvPicPr>
+        <p:blipFill>
+          <a:blip xmlns:r="http://schemas.openxmlformats.org/officeDocument/2006/relationships" xmlns:a="http://schemas.openxmlformats.org/drawingml/2006/main" r:embed="Rd3f95f25178340df">
+            <a:extLst>
+              <a:ext uri="{96DAC541-7B7A-43D3-8B79-37D633B846F1}">
+                <asvg:svgBlip xmlns:asvg="http://schemas.microsoft.com/office/drawing/2016/SVG/main" r:embed="Rde55cfaddb274580"/>
+              </a:ext>
+            </a:extLst>
+          </a:blip>
+          <a:stretch xmlns:a="http://schemas.openxmlformats.org/drawingml/2006/main"/>
+        </p:blipFill>
+        <p:spPr>
+          <a:xfrm xmlns:a="http://schemas.openxmlformats.org/drawingml/2006/main">
+            <a:off x="1771650" y="1335087"/>
+            <a:ext cx="8648700" cy="5045075"/>
+          </a:xfrm>
+          <a:prstGeom xmlns:a="http://schemas.openxmlformats.org/drawingml/2006/main" prst="rect">
+            <a:avLst/>
+          </a:prstGeom>
+        </p:spPr>
+      </p:pic>
+      <p:pic>
+        <p:nvPicPr>
+          <p:cNvPr id="39" name=""/>
+          <p:cNvPicPr>
+            <a:picLocks xmlns:a="http://schemas.openxmlformats.org/drawingml/2006/main" noChangeAspect="1"/>
+          </p:cNvPicPr>
+          <p:nvPr/>
+        </p:nvPicPr>
+        <p:blipFill>
+          <a:blip xmlns:r="http://schemas.openxmlformats.org/officeDocument/2006/relationships" xmlns:a="http://schemas.openxmlformats.org/drawingml/2006/main" r:embed="R718578b15e954355"/>
+          <a:stretch xmlns:a="http://schemas.openxmlformats.org/drawingml/2006/main"/>
+        </p:blipFill>
+        <p:spPr>
+          <a:xfrm xmlns:a="http://schemas.openxmlformats.org/drawingml/2006/main">
+            <a:off x="2172053" y="1335087"/>
+            <a:ext cx="7847894" cy="5045075"/>
+          </a:xfrm>
+          <a:prstGeom xmlns:a="http://schemas.openxmlformats.org/drawingml/2006/main" prst="rect">
+            <a:avLst/>
+          </a:prstGeom>
+        </p:spPr>
+      </p:pic>
+      <p:pic>
+        <p:nvPicPr>
+          <p:cNvPr id="40" name=""/>
+          <p:cNvPicPr>
+            <a:picLocks xmlns:a="http://schemas.openxmlformats.org/drawingml/2006/main" noChangeAspect="1"/>
+          </p:cNvPicPr>
+          <p:nvPr/>
+        </p:nvPicPr>
+        <p:blipFill>
+          <a:blip xmlns:r="http://schemas.openxmlformats.org/officeDocument/2006/relationships" xmlns:a="http://schemas.openxmlformats.org/drawingml/2006/main" r:embed="Ra639f2c5ef924847">
+            <a:extLst>
+              <a:ext uri="{96DAC541-7B7A-43D3-8B79-37D633B846F1}">
+                <asvg:svgBlip xmlns:asvg="http://schemas.microsoft.com/office/drawing/2016/SVG/main" r:embed="R1984bebce6834a44"/>
+              </a:ext>
+            </a:extLst>
+          </a:blip>
+          <a:stretch xmlns:a="http://schemas.openxmlformats.org/drawingml/2006/main"/>
+        </p:blipFill>
+        <p:spPr>
+          <a:xfrm xmlns:a="http://schemas.openxmlformats.org/drawingml/2006/main">
+            <a:off x="1771650" y="1335087"/>
+            <a:ext cx="8648700" cy="5045075"/>
+          </a:xfrm>
+          <a:prstGeom xmlns:a="http://schemas.openxmlformats.org/drawingml/2006/main" prst="rect">
+            <a:avLst/>
+          </a:prstGeom>
+        </p:spPr>
+      </p:pic>
+      <p:pic>
+        <p:nvPicPr>
+          <p:cNvPr id="41" name=""/>
+          <p:cNvPicPr>
+            <a:picLocks xmlns:a="http://schemas.openxmlformats.org/drawingml/2006/main" noChangeAspect="1"/>
+          </p:cNvPicPr>
+          <p:nvPr/>
+        </p:nvPicPr>
+        <p:blipFill>
+          <a:blip xmlns:r="http://schemas.openxmlformats.org/officeDocument/2006/relationships" xmlns:a="http://schemas.openxmlformats.org/drawingml/2006/main" r:embed="R355d86f625e9465d"/>
+          <a:stretch xmlns:a="http://schemas.openxmlformats.org/drawingml/2006/main"/>
+        </p:blipFill>
+        <p:spPr>
+          <a:xfrm xmlns:a="http://schemas.openxmlformats.org/drawingml/2006/main">
+            <a:off x="2312194" y="1335087"/>
+            <a:ext cx="7567613" cy="5045075"/>
+          </a:xfrm>
+          <a:prstGeom xmlns:a="http://schemas.openxmlformats.org/drawingml/2006/main" prst="rect">
+            <a:avLst/>
+          </a:prstGeom>
+        </p:spPr>
+      </p:pic>
+      <p:pic>
+        <p:nvPicPr>
+          <p:cNvPr id="42" name=""/>
+          <p:cNvPicPr>
+            <a:picLocks xmlns:a="http://schemas.openxmlformats.org/drawingml/2006/main" noChangeAspect="1"/>
+          </p:cNvPicPr>
+          <p:nvPr/>
+        </p:nvPicPr>
+        <p:blipFill>
+          <a:blip xmlns:r="http://schemas.openxmlformats.org/officeDocument/2006/relationships" xmlns:a="http://schemas.openxmlformats.org/drawingml/2006/main" r:embed="Re2fca51c2c384f05">
+            <a:extLst>
+              <a:ext uri="{96DAC541-7B7A-43D3-8B79-37D633B846F1}">
+                <asvg:svgBlip xmlns:asvg="http://schemas.microsoft.com/office/drawing/2016/SVG/main" r:embed="Ra31adf583aeb4ba8"/>
+              </a:ext>
+            </a:extLst>
+          </a:blip>
+          <a:stretch xmlns:a="http://schemas.openxmlformats.org/drawingml/2006/main"/>
+        </p:blipFill>
+        <p:spPr>
+          <a:xfrm xmlns:a="http://schemas.openxmlformats.org/drawingml/2006/main">
+            <a:off x="1771650" y="1335087"/>
+            <a:ext cx="8648700" cy="5045075"/>
+          </a:xfrm>
+          <a:prstGeom xmlns:a="http://schemas.openxmlformats.org/drawingml/2006/main" prst="rect">
+            <a:avLst/>
+          </a:prstGeom>
+        </p:spPr>
+      </p:pic>
+      <p:pic>
+        <p:nvPicPr>
+          <p:cNvPr id="43" name=""/>
+          <p:cNvPicPr>
+            <a:picLocks xmlns:a="http://schemas.openxmlformats.org/drawingml/2006/main" noChangeAspect="1"/>
+          </p:cNvPicPr>
+          <p:nvPr/>
+        </p:nvPicPr>
+        <p:blipFill>
+          <a:blip xmlns:r="http://schemas.openxmlformats.org/officeDocument/2006/relationships" xmlns:a="http://schemas.openxmlformats.org/drawingml/2006/main" r:embed="R5495779ca4c641e2"/>
+          <a:stretch xmlns:a="http://schemas.openxmlformats.org/drawingml/2006/main"/>
+        </p:blipFill>
+        <p:spPr>
+          <a:xfrm xmlns:a="http://schemas.openxmlformats.org/drawingml/2006/main">
+            <a:off x="1847516" y="1335087"/>
+            <a:ext cx="8496968" cy="5045075"/>
+          </a:xfrm>
+          <a:prstGeom xmlns:a="http://schemas.openxmlformats.org/drawingml/2006/main" prst="rect">
+            <a:avLst/>
+          </a:prstGeom>
+        </p:spPr>
+      </p:pic>
+    </p:spTree>
+    <p:extLst>
+      <p:ext uri="{BB962C8B-B14F-4D97-AF65-F5344CB8AC3E}">
+        <p14:creationId xmlns:p14="http://schemas.microsoft.com/office/powerpoint/2010/main" val="666536286"/>
+      </p:ext>
+    </p:extLst>
+  </p:cSld>
+</p:sld>
+</file>
+
+<file path=ppt/slides/slide42.xml><?xml version="1.0" encoding="utf-8"?>
+<p:sld xmlns:p="http://schemas.openxmlformats.org/presentationml/2006/main">
+  <p:cSld>
+    <p:bg>
+      <p:bgPr>
+        <a:solidFill xmlns:a="http://schemas.openxmlformats.org/drawingml/2006/main">
+          <a:srgbClr val="FFFFFF"/>
+        </a:solidFill>
+      </p:bgPr>
+    </p:bg>
+    <p:spTree>
+      <p:nvGrpSpPr>
+        <p:cNvPr id="1" name=""/>
+        <p:cNvGrpSpPr/>
+        <p:nvPr/>
+      </p:nvGrpSpPr>
+      <p:grpSpPr>
+        <a:xfrm xmlns:a="http://schemas.openxmlformats.org/drawingml/2006/main"/>
+      </p:grpSpPr>
+      <p:sp>
+        <p:nvSpPr>
+          <p:cNvPr id="24" name="section-11">
+            <a:extLst xmlns:a="http://schemas.openxmlformats.org/drawingml/2006/main">
+              <a:ext uri="{FF2B5EF4-FFF2-40B4-BE49-F238E27FC236}">
+                <a16:creationId xmlns:a16="http://schemas.microsoft.com/office/drawing/2014/main" id="{272ED433-B59C-436C-9DFB-4D317B90A13F}"/>
+              </a:ext>
+            </a:extLst>
+          </p:cNvPr>
+          <p:cNvSpPr>
+            <a:spLocks xmlns:a="http://schemas.openxmlformats.org/drawingml/2006/main" noGrp="1"/>
+          </p:cNvSpPr>
+          <p:nvPr/>
+        </p:nvSpPr>
+        <p:spPr>
+          <a:xfrm xmlns:a="http://schemas.openxmlformats.org/drawingml/2006/main">
+            <a:off x="457200" y="228600"/>
+            <a:ext cx="4191000" cy="228600"/>
+          </a:xfrm>
+          <a:prstGeom xmlns:a="http://schemas.openxmlformats.org/drawingml/2006/main" prst="rect">
+            <a:avLst/>
+          </a:prstGeom>
+          <a:noFill xmlns:a="http://schemas.openxmlformats.org/drawingml/2006/main"/>
+          <a:ln xmlns:a="http://schemas.openxmlformats.org/drawingml/2006/main" w="0">
+            <a:noFill/>
+            <a:prstDash val="solid"/>
+          </a:ln>
+        </p:spPr>
+        <p:txBody>
+          <a:bodyPr xmlns:a="http://schemas.openxmlformats.org/drawingml/2006/main" wrap="square" lIns="0" tIns="0" rIns="0" bIns="0" anchor="t">
+            <a:normAutofit fontScale="100000"/>
+          </a:bodyPr>
+          <a:lstStyle xmlns:a="http://schemas.openxmlformats.org/drawingml/2006/main"/>
+          <a:p xmlns:a="http://schemas.openxmlformats.org/drawingml/2006/main">
+            <a:pPr algn="l">
+              <a:buNone/>
+              <a:defRPr sz="1200" b="1">
+                <a:solidFill>
+                  <a:srgbClr val="667384"/>
+                </a:solidFill>
+                <a:latin typeface="Arial"/>
+                <a:ea typeface="Arial"/>
+                <a:cs typeface="Arial"/>
+              </a:defRPr>
+            </a:pPr>
+            <a:r>
+              <a:rPr sz="1200" b="1">
+                <a:solidFill>
+                  <a:srgbClr val="667384"/>
+                </a:solidFill>
+                <a:latin typeface="Arial"/>
+                <a:ea typeface="Arial"/>
+                <a:cs typeface="Arial"/>
+              </a:rPr>
+              <a:t>SEVERITY CONTROL</a:t>
+            </a:r>
+          </a:p>
+        </p:txBody>
+      </p:sp>
+      <p:sp>
+        <p:nvSpPr>
+          <p:cNvPr id="2" name="title-11">
+            <a:extLst xmlns:a="http://schemas.openxmlformats.org/drawingml/2006/main">
+              <a:ext uri="{FF2B5EF4-FFF2-40B4-BE49-F238E27FC236}">
+                <a16:creationId xmlns:a16="http://schemas.microsoft.com/office/drawing/2014/main" id="{3EC40708-7E00-432C-8ECE-907FA5705292}"/>
+              </a:ext>
+            </a:extLst>
+          </p:cNvPr>
+          <p:cNvSpPr>
+            <a:spLocks xmlns:a="http://schemas.openxmlformats.org/drawingml/2006/main" noGrp="1"/>
+          </p:cNvSpPr>
+          <p:nvPr/>
+        </p:nvSpPr>
+        <p:spPr>
+          <a:xfrm xmlns:a="http://schemas.openxmlformats.org/drawingml/2006/main">
+            <a:off x="457200" y="533400"/>
+            <a:ext cx="11277600" cy="628650"/>
+          </a:xfrm>
+          <a:prstGeom xmlns:a="http://schemas.openxmlformats.org/drawingml/2006/main" prst="rect">
+            <a:avLst/>
+          </a:prstGeom>
+          <a:noFill xmlns:a="http://schemas.openxmlformats.org/drawingml/2006/main"/>
+          <a:ln xmlns:a="http://schemas.openxmlformats.org/drawingml/2006/main" w="0">
+            <a:noFill/>
+            <a:prstDash val="solid"/>
+          </a:ln>
+        </p:spPr>
+        <p:txBody>
+          <a:bodyPr xmlns:a="http://schemas.openxmlformats.org/drawingml/2006/main" wrap="square" lIns="0" tIns="0" rIns="0" bIns="0" anchor="t">
+            <a:normAutofit fontScale="100000"/>
+          </a:bodyPr>
+          <a:lstStyle xmlns:a="http://schemas.openxmlformats.org/drawingml/2006/main"/>
+          <a:p xmlns:a="http://schemas.openxmlformats.org/drawingml/2006/main">
+            <a:pPr algn="l">
+              <a:buNone/>
+              <a:defRPr sz="3525" b="1">
+                <a:solidFill>
+                  <a:srgbClr val="000000"/>
+                </a:solidFill>
+                <a:latin typeface="Arial"/>
+                <a:ea typeface="Arial"/>
+                <a:cs typeface="Arial"/>
+              </a:defRPr>
+            </a:pPr>
+            <a:r>
+              <a:rPr sz="3525" b="1">
+                <a:solidFill>
+                  <a:srgbClr val="000000"/>
+                </a:solidFill>
+                <a:latin typeface="Arial"/>
+                <a:ea typeface="Arial"/>
+                <a:cs typeface="Arial"/>
+              </a:rPr>
+              <a:t>The gap survives same-asset, closest-loss matching</a:t>
+            </a:r>
+          </a:p>
+        </p:txBody>
+      </p:sp>
+      <p:sp>
+        <p:nvSpPr>
+          <p:cNvPr id="3" name="">
+            <a:extLst xmlns:a="http://schemas.openxmlformats.org/drawingml/2006/main">
+              <a:ext uri="{FF2B5EF4-FFF2-40B4-BE49-F238E27FC236}">
+                <a16:creationId xmlns:a16="http://schemas.microsoft.com/office/drawing/2014/main" id="{D5CA0FCE-75E8-41EF-A76A-23E9E2120C6A}"/>
+              </a:ext>
+            </a:extLst>
+          </p:cNvPr>
+          <p:cNvSpPr>
+            <a:spLocks xmlns:a="http://schemas.openxmlformats.org/drawingml/2006/main" noGrp="1"/>
+          </p:cNvSpPr>
+          <p:nvPr/>
+        </p:nvSpPr>
+        <p:spPr>
+          <a:xfrm xmlns:a="http://schemas.openxmlformats.org/drawingml/2006/main">
+            <a:off x="457200" y="1200150"/>
+            <a:ext cx="11277600" cy="19050"/>
+          </a:xfrm>
+          <a:prstGeom xmlns:a="http://schemas.openxmlformats.org/drawingml/2006/main" prst="rect">
+            <a:avLst/>
+          </a:prstGeom>
+          <a:solidFill xmlns:a="http://schemas.openxmlformats.org/drawingml/2006/main">
+            <a:srgbClr val="B8BCC4"/>
+          </a:solidFill>
+          <a:ln xmlns:a="http://schemas.openxmlformats.org/drawingml/2006/main" w="0">
+            <a:solidFill>
+              <a:srgbClr val="B8BCC4"/>
+            </a:solidFill>
+            <a:prstDash val="solid"/>
+          </a:ln>
+        </p:spPr>
+      </p:sp>
+      <p:sp>
+        <p:nvSpPr>
+          <p:cNvPr id="4" name="footer-left-11">
+            <a:extLst xmlns:a="http://schemas.openxmlformats.org/drawingml/2006/main">
+              <a:ext uri="{FF2B5EF4-FFF2-40B4-BE49-F238E27FC236}">
+                <a16:creationId xmlns:a16="http://schemas.microsoft.com/office/drawing/2014/main" id="{700DA765-80E0-4197-8700-00D867B86FA2}"/>
+              </a:ext>
+            </a:extLst>
+          </p:cNvPr>
+          <p:cNvSpPr>
+            <a:spLocks xmlns:a="http://schemas.openxmlformats.org/drawingml/2006/main" noGrp="1"/>
+          </p:cNvSpPr>
+          <p:nvPr/>
+        </p:nvSpPr>
+        <p:spPr>
+          <a:xfrm xmlns:a="http://schemas.openxmlformats.org/drawingml/2006/main">
+            <a:off x="457200" y="6515100"/>
+            <a:ext cx="3429000" cy="171450"/>
+          </a:xfrm>
+          <a:prstGeom xmlns:a="http://schemas.openxmlformats.org/drawingml/2006/main" prst="rect">
+            <a:avLst/>
+          </a:prstGeom>
+          <a:noFill xmlns:a="http://schemas.openxmlformats.org/drawingml/2006/main"/>
+          <a:ln xmlns:a="http://schemas.openxmlformats.org/drawingml/2006/main" w="0">
+            <a:noFill/>
+            <a:prstDash val="solid"/>
+          </a:ln>
+        </p:spPr>
+        <p:txBody>
+          <a:bodyPr xmlns:a="http://schemas.openxmlformats.org/drawingml/2006/main" wrap="square" lIns="0" tIns="0" rIns="0" bIns="0" anchor="t">
+            <a:normAutofit fontScale="100000"/>
+          </a:bodyPr>
+          <a:lstStyle xmlns:a="http://schemas.openxmlformats.org/drawingml/2006/main"/>
+          <a:p xmlns:a="http://schemas.openxmlformats.org/drawingml/2006/main">
+            <a:pPr algn="l">
+              <a:buNone/>
+              <a:defRPr sz="825" b="0">
+                <a:solidFill>
+                  <a:srgbClr val="64748B"/>
+                </a:solidFill>
+                <a:latin typeface="Arial"/>
+                <a:ea typeface="Arial"/>
+                <a:cs typeface="Arial"/>
+              </a:defRPr>
+            </a:pPr>
+            <a:r>
+              <a:rPr sz="825" b="0">
+                <a:solidFill>
+                  <a:srgbClr val="64748B"/>
+                </a:solidFill>
+                <a:latin typeface="Arial"/>
+                <a:ea typeface="Arial"/>
+                <a:cs typeface="Arial"/>
+              </a:rPr>
+              <a:t>Return geometry | outcome-blind matched pairs</a:t>
+            </a:r>
+          </a:p>
+        </p:txBody>
+      </p:sp>
+      <p:sp>
+        <p:nvSpPr>
+          <p:cNvPr id="5" name="footer-number-11">
+            <a:extLst xmlns:a="http://schemas.openxmlformats.org/drawingml/2006/main">
+              <a:ext uri="{FF2B5EF4-FFF2-40B4-BE49-F238E27FC236}">
+                <a16:creationId xmlns:a16="http://schemas.microsoft.com/office/drawing/2014/main" id="{83896276-4112-4532-AF7C-776C67C58B77}"/>
+              </a:ext>
+            </a:extLst>
+          </p:cNvPr>
+          <p:cNvSpPr>
+            <a:spLocks xmlns:a="http://schemas.openxmlformats.org/drawingml/2006/main" noGrp="1"/>
+          </p:cNvSpPr>
+          <p:nvPr/>
+        </p:nvSpPr>
+        <p:spPr>
+          <a:xfrm xmlns:a="http://schemas.openxmlformats.org/drawingml/2006/main">
+            <a:off x="10477500" y="6496050"/>
+            <a:ext cx="1257300" cy="190500"/>
+          </a:xfrm>
+          <a:prstGeom xmlns:a="http://schemas.openxmlformats.org/drawingml/2006/main" prst="rect">
+            <a:avLst/>
+          </a:prstGeom>
+          <a:noFill xmlns:a="http://schemas.openxmlformats.org/drawingml/2006/main"/>
+          <a:ln xmlns:a="http://schemas.openxmlformats.org/drawingml/2006/main" w="0">
+            <a:noFill/>
+            <a:prstDash val="solid"/>
+          </a:ln>
+        </p:spPr>
+        <p:txBody>
+          <a:bodyPr xmlns:a="http://schemas.openxmlformats.org/drawingml/2006/main" wrap="square" lIns="0" tIns="0" rIns="0" bIns="0" anchor="t">
+            <a:normAutofit fontScale="100000"/>
+          </a:bodyPr>
+          <a:lstStyle xmlns:a="http://schemas.openxmlformats.org/drawingml/2006/main"/>
+          <a:p xmlns:a="http://schemas.openxmlformats.org/drawingml/2006/main">
+            <a:pPr algn="r">
+              <a:buNone/>
+              <a:defRPr sz="1050" b="0">
+                <a:solidFill>
+                  <a:srgbClr val="667384"/>
+                </a:solidFill>
+                <a:latin typeface="Arial"/>
+                <a:ea typeface="Arial"/>
+                <a:cs typeface="Arial"/>
+              </a:defRPr>
+            </a:pPr>
+            <a:r>
+              <a:rPr sz="1050" b="0">
+                <a:solidFill>
+                  <a:srgbClr val="667384"/>
+                </a:solidFill>
+                <a:latin typeface="Arial"/>
+                <a:ea typeface="Arial"/>
+                <a:cs typeface="Arial"/>
+              </a:rPr>
+              <a:t>42</a:t>
+            </a:r>
+          </a:p>
+        </p:txBody>
+      </p:sp>
+      <p:pic>
+        <p:nvPicPr>
+          <p:cNvPr id="37" name=""/>
+          <p:cNvPicPr>
+            <a:picLocks xmlns:a="http://schemas.openxmlformats.org/drawingml/2006/main" noChangeAspect="1"/>
+          </p:cNvPicPr>
+          <p:nvPr/>
+        </p:nvPicPr>
+        <p:blipFill>
+          <a:blip xmlns:r="http://schemas.openxmlformats.org/officeDocument/2006/relationships" xmlns:a="http://schemas.openxmlformats.org/drawingml/2006/main" r:embed="Rf18e2c23cb924ee6"/>
+          <a:stretch xmlns:a="http://schemas.openxmlformats.org/drawingml/2006/main"/>
+        </p:blipFill>
+        <p:spPr>
+          <a:xfrm xmlns:a="http://schemas.openxmlformats.org/drawingml/2006/main">
+            <a:off x="1771650" y="1335087"/>
+            <a:ext cx="8648700" cy="5045075"/>
+          </a:xfrm>
+          <a:prstGeom xmlns:a="http://schemas.openxmlformats.org/drawingml/2006/main" prst="rect">
+            <a:avLst/>
+          </a:prstGeom>
+        </p:spPr>
+      </p:pic>
+      <p:pic>
+        <p:nvPicPr>
+          <p:cNvPr id="38" name=""/>
+          <p:cNvPicPr>
+            <a:picLocks xmlns:a="http://schemas.openxmlformats.org/drawingml/2006/main" noChangeAspect="1"/>
+          </p:cNvPicPr>
+          <p:nvPr/>
+        </p:nvPicPr>
+        <p:blipFill>
+          <a:blip xmlns:r="http://schemas.openxmlformats.org/officeDocument/2006/relationships" xmlns:a="http://schemas.openxmlformats.org/drawingml/2006/main" r:embed="R8f0a165112c745e1">
+            <a:extLst>
+              <a:ext uri="{96DAC541-7B7A-43D3-8B79-37D633B846F1}">
+                <asvg:svgBlip xmlns:asvg="http://schemas.microsoft.com/office/drawing/2016/SVG/main" r:embed="R7501746529e34424"/>
+              </a:ext>
+            </a:extLst>
+          </a:blip>
+          <a:stretch xmlns:a="http://schemas.openxmlformats.org/drawingml/2006/main"/>
+        </p:blipFill>
+        <p:spPr>
+          <a:xfrm xmlns:a="http://schemas.openxmlformats.org/drawingml/2006/main">
+            <a:off x="1771650" y="1335087"/>
+            <a:ext cx="8648700" cy="5045075"/>
+          </a:xfrm>
+          <a:prstGeom xmlns:a="http://schemas.openxmlformats.org/drawingml/2006/main" prst="rect">
+            <a:avLst/>
+          </a:prstGeom>
+        </p:spPr>
+      </p:pic>
+      <p:pic>
+        <p:nvPicPr>
+          <p:cNvPr id="39" name=""/>
+          <p:cNvPicPr>
+            <a:picLocks xmlns:a="http://schemas.openxmlformats.org/drawingml/2006/main" noChangeAspect="1"/>
+          </p:cNvPicPr>
+          <p:nvPr/>
+        </p:nvPicPr>
+        <p:blipFill>
+          <a:blip xmlns:r="http://schemas.openxmlformats.org/officeDocument/2006/relationships" xmlns:a="http://schemas.openxmlformats.org/drawingml/2006/main" r:embed="R9a4844e78b7a4c87"/>
+          <a:stretch xmlns:a="http://schemas.openxmlformats.org/drawingml/2006/main"/>
+        </p:blipFill>
+        <p:spPr>
+          <a:xfrm xmlns:a="http://schemas.openxmlformats.org/drawingml/2006/main">
+            <a:off x="2172053" y="1335087"/>
+            <a:ext cx="7847894" cy="5045075"/>
+          </a:xfrm>
+          <a:prstGeom xmlns:a="http://schemas.openxmlformats.org/drawingml/2006/main" prst="rect">
+            <a:avLst/>
+          </a:prstGeom>
+        </p:spPr>
+      </p:pic>
+      <p:pic>
+        <p:nvPicPr>
+          <p:cNvPr id="40" name=""/>
+          <p:cNvPicPr>
+            <a:picLocks xmlns:a="http://schemas.openxmlformats.org/drawingml/2006/main" noChangeAspect="1"/>
+          </p:cNvPicPr>
+          <p:nvPr/>
+        </p:nvPicPr>
+        <p:blipFill>
+          <a:blip xmlns:r="http://schemas.openxmlformats.org/officeDocument/2006/relationships" xmlns:a="http://schemas.openxmlformats.org/drawingml/2006/main" r:embed="Rd0902a9b8d2d41c7">
+            <a:extLst>
+              <a:ext uri="{96DAC541-7B7A-43D3-8B79-37D633B846F1}">
+                <asvg:svgBlip xmlns:asvg="http://schemas.microsoft.com/office/drawing/2016/SVG/main" r:embed="R086ed1c818614a02"/>
+              </a:ext>
+            </a:extLst>
+          </a:blip>
+          <a:stretch xmlns:a="http://schemas.openxmlformats.org/drawingml/2006/main"/>
+        </p:blipFill>
+        <p:spPr>
+          <a:xfrm xmlns:a="http://schemas.openxmlformats.org/drawingml/2006/main">
+            <a:off x="1771650" y="1335087"/>
+            <a:ext cx="8648700" cy="5045075"/>
+          </a:xfrm>
+          <a:prstGeom xmlns:a="http://schemas.openxmlformats.org/drawingml/2006/main" prst="rect">
+            <a:avLst/>
+          </a:prstGeom>
+        </p:spPr>
+      </p:pic>
+      <p:pic>
+        <p:nvPicPr>
+          <p:cNvPr id="41" name=""/>
+          <p:cNvPicPr>
+            <a:picLocks xmlns:a="http://schemas.openxmlformats.org/drawingml/2006/main" noChangeAspect="1"/>
+          </p:cNvPicPr>
+          <p:nvPr/>
+        </p:nvPicPr>
+        <p:blipFill>
+          <a:blip xmlns:r="http://schemas.openxmlformats.org/officeDocument/2006/relationships" xmlns:a="http://schemas.openxmlformats.org/drawingml/2006/main" r:embed="R67f76a4e70164450"/>
+          <a:stretch xmlns:a="http://schemas.openxmlformats.org/drawingml/2006/main"/>
+        </p:blipFill>
+        <p:spPr>
+          <a:xfrm xmlns:a="http://schemas.openxmlformats.org/drawingml/2006/main">
+            <a:off x="2312194" y="1335087"/>
+            <a:ext cx="7567613" cy="5045075"/>
+          </a:xfrm>
+          <a:prstGeom xmlns:a="http://schemas.openxmlformats.org/drawingml/2006/main" prst="rect">
+            <a:avLst/>
+          </a:prstGeom>
+        </p:spPr>
+      </p:pic>
+      <p:pic>
+        <p:nvPicPr>
+          <p:cNvPr id="42" name=""/>
+          <p:cNvPicPr>
+            <a:picLocks xmlns:a="http://schemas.openxmlformats.org/drawingml/2006/main" noChangeAspect="1"/>
+          </p:cNvPicPr>
+          <p:nvPr/>
+        </p:nvPicPr>
+        <p:blipFill>
+          <a:blip xmlns:r="http://schemas.openxmlformats.org/officeDocument/2006/relationships" xmlns:a="http://schemas.openxmlformats.org/drawingml/2006/main" r:embed="R6c3207310e274a35">
+            <a:extLst>
+              <a:ext uri="{96DAC541-7B7A-43D3-8B79-37D633B846F1}">
+                <asvg:svgBlip xmlns:asvg="http://schemas.microsoft.com/office/drawing/2016/SVG/main" r:embed="Ra0b67382b32e4b8f"/>
+              </a:ext>
+            </a:extLst>
+          </a:blip>
+          <a:stretch xmlns:a="http://schemas.openxmlformats.org/drawingml/2006/main"/>
+        </p:blipFill>
+        <p:spPr>
+          <a:xfrm xmlns:a="http://schemas.openxmlformats.org/drawingml/2006/main">
+            <a:off x="1771650" y="1335087"/>
+            <a:ext cx="8648700" cy="5045075"/>
+          </a:xfrm>
+          <a:prstGeom xmlns:a="http://schemas.openxmlformats.org/drawingml/2006/main" prst="rect">
+            <a:avLst/>
+          </a:prstGeom>
+        </p:spPr>
+      </p:pic>
+      <p:pic>
+        <p:nvPicPr>
+          <p:cNvPr id="43" name=""/>
+          <p:cNvPicPr>
+            <a:picLocks xmlns:a="http://schemas.openxmlformats.org/drawingml/2006/main" noChangeAspect="1"/>
+          </p:cNvPicPr>
+          <p:nvPr/>
+        </p:nvPicPr>
+        <p:blipFill>
+          <a:blip xmlns:r="http://schemas.openxmlformats.org/officeDocument/2006/relationships" xmlns:a="http://schemas.openxmlformats.org/drawingml/2006/main" r:embed="Ra5f2b2548aed4c33"/>
+          <a:stretch xmlns:a="http://schemas.openxmlformats.org/drawingml/2006/main"/>
+        </p:blipFill>
+        <p:spPr>
+          <a:xfrm xmlns:a="http://schemas.openxmlformats.org/drawingml/2006/main">
+            <a:off x="3068955" y="1335087"/>
+            <a:ext cx="6054090" cy="5045075"/>
+          </a:xfrm>
+          <a:prstGeom xmlns:a="http://schemas.openxmlformats.org/drawingml/2006/main" prst="rect">
+            <a:avLst/>
+          </a:prstGeom>
+        </p:spPr>
+      </p:pic>
+    </p:spTree>
+    <p:extLst>
+      <p:ext uri="{BB962C8B-B14F-4D97-AF65-F5344CB8AC3E}">
+        <p14:creationId xmlns:p14="http://schemas.microsoft.com/office/powerpoint/2010/main" val="666536286"/>
+      </p:ext>
+    </p:extLst>
+  </p:cSld>
+</p:sld>
+</file>
+
+<file path=ppt/slides/slide43.xml><?xml version="1.0" encoding="utf-8"?>
+<p:sld xmlns:p="http://schemas.openxmlformats.org/presentationml/2006/main">
+  <p:cSld>
+    <p:bg>
+      <p:bgPr>
+        <a:solidFill xmlns:a="http://schemas.openxmlformats.org/drawingml/2006/main">
+          <a:srgbClr val="FFFFFF"/>
+        </a:solidFill>
+      </p:bgPr>
+    </p:bg>
+    <p:spTree>
+      <p:nvGrpSpPr>
+        <p:cNvPr id="1" name=""/>
+        <p:cNvGrpSpPr/>
+        <p:nvPr/>
+      </p:nvGrpSpPr>
+      <p:grpSpPr>
+        <a:xfrm xmlns:a="http://schemas.openxmlformats.org/drawingml/2006/main"/>
+      </p:grpSpPr>
+      <p:sp>
+        <p:nvSpPr>
+          <p:cNvPr id="24" name="section-11">
+            <a:extLst xmlns:a="http://schemas.openxmlformats.org/drawingml/2006/main">
+              <a:ext uri="{FF2B5EF4-FFF2-40B4-BE49-F238E27FC236}">
+                <a16:creationId xmlns:a16="http://schemas.microsoft.com/office/drawing/2014/main" id="{272ED433-B59C-436C-9DFB-4D317B90A13F}"/>
+              </a:ext>
+            </a:extLst>
+          </p:cNvPr>
+          <p:cNvSpPr>
+            <a:spLocks xmlns:a="http://schemas.openxmlformats.org/drawingml/2006/main" noGrp="1"/>
+          </p:cNvSpPr>
+          <p:nvPr/>
+        </p:nvSpPr>
+        <p:spPr>
+          <a:xfrm xmlns:a="http://schemas.openxmlformats.org/drawingml/2006/main">
+            <a:off x="457200" y="228600"/>
+            <a:ext cx="4191000" cy="228600"/>
+          </a:xfrm>
+          <a:prstGeom xmlns:a="http://schemas.openxmlformats.org/drawingml/2006/main" prst="rect">
+            <a:avLst/>
+          </a:prstGeom>
+          <a:noFill xmlns:a="http://schemas.openxmlformats.org/drawingml/2006/main"/>
+          <a:ln xmlns:a="http://schemas.openxmlformats.org/drawingml/2006/main" w="0">
+            <a:noFill/>
+            <a:prstDash val="solid"/>
+          </a:ln>
+        </p:spPr>
+        <p:txBody>
+          <a:bodyPr xmlns:a="http://schemas.openxmlformats.org/drawingml/2006/main" wrap="square" lIns="0" tIns="0" rIns="0" bIns="0" anchor="t">
+            <a:normAutofit fontScale="100000"/>
+          </a:bodyPr>
+          <a:lstStyle xmlns:a="http://schemas.openxmlformats.org/drawingml/2006/main"/>
+          <a:p xmlns:a="http://schemas.openxmlformats.org/drawingml/2006/main">
+            <a:pPr algn="l">
+              <a:buNone/>
+              <a:defRPr sz="1200" b="1">
+                <a:solidFill>
+                  <a:srgbClr val="667384"/>
+                </a:solidFill>
+                <a:latin typeface="Arial"/>
+                <a:ea typeface="Arial"/>
+                <a:cs typeface="Arial"/>
+              </a:defRPr>
+            </a:pPr>
+            <a:r>
+              <a:rPr sz="1200" b="1">
+                <a:solidFill>
+                  <a:srgbClr val="667384"/>
+                </a:solidFill>
+                <a:latin typeface="Arial"/>
+                <a:ea typeface="Arial"/>
+                <a:cs typeface="Arial"/>
+              </a:rPr>
+              <a:t>COHORT DIAGNOSTIC</a:t>
+            </a:r>
+          </a:p>
+        </p:txBody>
+      </p:sp>
+      <p:sp>
+        <p:nvSpPr>
+          <p:cNvPr id="2" name="title-11">
+            <a:extLst xmlns:a="http://schemas.openxmlformats.org/drawingml/2006/main">
+              <a:ext uri="{FF2B5EF4-FFF2-40B4-BE49-F238E27FC236}">
+                <a16:creationId xmlns:a16="http://schemas.microsoft.com/office/drawing/2014/main" id="{3EC40708-7E00-432C-8ECE-907FA5705292}"/>
+              </a:ext>
+            </a:extLst>
+          </p:cNvPr>
+          <p:cNvSpPr>
+            <a:spLocks xmlns:a="http://schemas.openxmlformats.org/drawingml/2006/main" noGrp="1"/>
+          </p:cNvSpPr>
+          <p:nvPr/>
+        </p:nvSpPr>
+        <p:spPr>
+          <a:xfrm xmlns:a="http://schemas.openxmlformats.org/drawingml/2006/main">
+            <a:off x="457200" y="533400"/>
+            <a:ext cx="11277600" cy="628650"/>
+          </a:xfrm>
+          <a:prstGeom xmlns:a="http://schemas.openxmlformats.org/drawingml/2006/main" prst="rect">
+            <a:avLst/>
+          </a:prstGeom>
+          <a:noFill xmlns:a="http://schemas.openxmlformats.org/drawingml/2006/main"/>
+          <a:ln xmlns:a="http://schemas.openxmlformats.org/drawingml/2006/main" w="0">
+            <a:noFill/>
+            <a:prstDash val="solid"/>
+          </a:ln>
+        </p:spPr>
+        <p:txBody>
+          <a:bodyPr xmlns:a="http://schemas.openxmlformats.org/drawingml/2006/main" wrap="square" lIns="0" tIns="0" rIns="0" bIns="0" anchor="t">
+            <a:normAutofit fontScale="100000"/>
+          </a:bodyPr>
+          <a:lstStyle xmlns:a="http://schemas.openxmlformats.org/drawingml/2006/main"/>
+          <a:p xmlns:a="http://schemas.openxmlformats.org/drawingml/2006/main">
+            <a:pPr algn="l">
+              <a:buNone/>
+              <a:defRPr sz="3525" b="1">
+                <a:solidFill>
+                  <a:srgbClr val="000000"/>
+                </a:solidFill>
+                <a:latin typeface="Arial"/>
+                <a:ea typeface="Arial"/>
+                <a:cs typeface="Arial"/>
+              </a:defRPr>
+            </a:pPr>
+            <a:r>
+              <a:rPr sz="3525" b="1">
+                <a:solidFill>
+                  <a:srgbClr val="000000"/>
+                </a:solidFill>
+                <a:latin typeface="Arial"/>
+                <a:ea typeface="Arial"/>
+                <a:cs typeface="Arial"/>
+              </a:rPr>
+              <a:t>The sign extends beyond the balanced stock core</a:t>
+            </a:r>
+          </a:p>
+        </p:txBody>
+      </p:sp>
+      <p:sp>
+        <p:nvSpPr>
+          <p:cNvPr id="3" name="">
+            <a:extLst xmlns:a="http://schemas.openxmlformats.org/drawingml/2006/main">
+              <a:ext uri="{FF2B5EF4-FFF2-40B4-BE49-F238E27FC236}">
+                <a16:creationId xmlns:a16="http://schemas.microsoft.com/office/drawing/2014/main" id="{D5CA0FCE-75E8-41EF-A76A-23E9E2120C6A}"/>
+              </a:ext>
+            </a:extLst>
+          </p:cNvPr>
+          <p:cNvSpPr>
+            <a:spLocks xmlns:a="http://schemas.openxmlformats.org/drawingml/2006/main" noGrp="1"/>
+          </p:cNvSpPr>
+          <p:nvPr/>
+        </p:nvSpPr>
+        <p:spPr>
+          <a:xfrm xmlns:a="http://schemas.openxmlformats.org/drawingml/2006/main">
+            <a:off x="457200" y="1200150"/>
+            <a:ext cx="11277600" cy="19050"/>
+          </a:xfrm>
+          <a:prstGeom xmlns:a="http://schemas.openxmlformats.org/drawingml/2006/main" prst="rect">
+            <a:avLst/>
+          </a:prstGeom>
+          <a:solidFill xmlns:a="http://schemas.openxmlformats.org/drawingml/2006/main">
+            <a:srgbClr val="B8BCC4"/>
+          </a:solidFill>
+          <a:ln xmlns:a="http://schemas.openxmlformats.org/drawingml/2006/main" w="0">
+            <a:solidFill>
+              <a:srgbClr val="B8BCC4"/>
+            </a:solidFill>
+            <a:prstDash val="solid"/>
+          </a:ln>
+        </p:spPr>
+      </p:sp>
+      <p:sp>
+        <p:nvSpPr>
+          <p:cNvPr id="4" name="footer-left-11">
+            <a:extLst xmlns:a="http://schemas.openxmlformats.org/drawingml/2006/main">
+              <a:ext uri="{FF2B5EF4-FFF2-40B4-BE49-F238E27FC236}">
+                <a16:creationId xmlns:a16="http://schemas.microsoft.com/office/drawing/2014/main" id="{700DA765-80E0-4197-8700-00D867B86FA2}"/>
+              </a:ext>
+            </a:extLst>
+          </p:cNvPr>
+          <p:cNvSpPr>
+            <a:spLocks xmlns:a="http://schemas.openxmlformats.org/drawingml/2006/main" noGrp="1"/>
+          </p:cNvSpPr>
+          <p:nvPr/>
+        </p:nvSpPr>
+        <p:spPr>
+          <a:xfrm xmlns:a="http://schemas.openxmlformats.org/drawingml/2006/main">
+            <a:off x="457200" y="6515100"/>
+            <a:ext cx="3429000" cy="171450"/>
+          </a:xfrm>
+          <a:prstGeom xmlns:a="http://schemas.openxmlformats.org/drawingml/2006/main" prst="rect">
+            <a:avLst/>
+          </a:prstGeom>
+          <a:noFill xmlns:a="http://schemas.openxmlformats.org/drawingml/2006/main"/>
+          <a:ln xmlns:a="http://schemas.openxmlformats.org/drawingml/2006/main" w="0">
+            <a:noFill/>
+            <a:prstDash val="solid"/>
+          </a:ln>
+        </p:spPr>
+        <p:txBody>
+          <a:bodyPr xmlns:a="http://schemas.openxmlformats.org/drawingml/2006/main" wrap="square" lIns="0" tIns="0" rIns="0" bIns="0" anchor="t">
+            <a:normAutofit fontScale="100000"/>
+          </a:bodyPr>
+          <a:lstStyle xmlns:a="http://schemas.openxmlformats.org/drawingml/2006/main"/>
+          <a:p xmlns:a="http://schemas.openxmlformats.org/drawingml/2006/main">
+            <a:pPr algn="l">
+              <a:buNone/>
+              <a:defRPr sz="825" b="0">
+                <a:solidFill>
+                  <a:srgbClr val="64748B"/>
+                </a:solidFill>
+                <a:latin typeface="Arial"/>
+                <a:ea typeface="Arial"/>
+                <a:cs typeface="Arial"/>
+              </a:defRPr>
+            </a:pPr>
+            <a:r>
+              <a:rPr sz="825" b="0">
+                <a:solidFill>
+                  <a:srgbClr val="64748B"/>
+                </a:solidFill>
+                <a:latin typeface="Arial"/>
+                <a:ea typeface="Arial"/>
+                <a:cs typeface="Arial"/>
+              </a:rPr>
+              <a:t>Return geometry | same-era transport only</a:t>
+            </a:r>
+          </a:p>
+        </p:txBody>
+      </p:sp>
+      <p:sp>
+        <p:nvSpPr>
+          <p:cNvPr id="5" name="footer-number-11">
+            <a:extLst xmlns:a="http://schemas.openxmlformats.org/drawingml/2006/main">
+              <a:ext uri="{FF2B5EF4-FFF2-40B4-BE49-F238E27FC236}">
+                <a16:creationId xmlns:a16="http://schemas.microsoft.com/office/drawing/2014/main" id="{83896276-4112-4532-AF7C-776C67C58B77}"/>
+              </a:ext>
+            </a:extLst>
+          </p:cNvPr>
+          <p:cNvSpPr>
+            <a:spLocks xmlns:a="http://schemas.openxmlformats.org/drawingml/2006/main" noGrp="1"/>
+          </p:cNvSpPr>
+          <p:nvPr/>
+        </p:nvSpPr>
+        <p:spPr>
+          <a:xfrm xmlns:a="http://schemas.openxmlformats.org/drawingml/2006/main">
+            <a:off x="10477500" y="6496050"/>
+            <a:ext cx="1257300" cy="190500"/>
+          </a:xfrm>
+          <a:prstGeom xmlns:a="http://schemas.openxmlformats.org/drawingml/2006/main" prst="rect">
+            <a:avLst/>
+          </a:prstGeom>
+          <a:noFill xmlns:a="http://schemas.openxmlformats.org/drawingml/2006/main"/>
+          <a:ln xmlns:a="http://schemas.openxmlformats.org/drawingml/2006/main" w="0">
+            <a:noFill/>
+            <a:prstDash val="solid"/>
+          </a:ln>
+        </p:spPr>
+        <p:txBody>
+          <a:bodyPr xmlns:a="http://schemas.openxmlformats.org/drawingml/2006/main" wrap="square" lIns="0" tIns="0" rIns="0" bIns="0" anchor="t">
+            <a:normAutofit fontScale="100000"/>
+          </a:bodyPr>
+          <a:lstStyle xmlns:a="http://schemas.openxmlformats.org/drawingml/2006/main"/>
+          <a:p xmlns:a="http://schemas.openxmlformats.org/drawingml/2006/main">
+            <a:pPr algn="r">
+              <a:buNone/>
+              <a:defRPr sz="1050" b="0">
+                <a:solidFill>
+                  <a:srgbClr val="667384"/>
+                </a:solidFill>
+                <a:latin typeface="Arial"/>
+                <a:ea typeface="Arial"/>
+                <a:cs typeface="Arial"/>
+              </a:defRPr>
+            </a:pPr>
+            <a:r>
+              <a:rPr sz="1050" b="0">
+                <a:solidFill>
+                  <a:srgbClr val="667384"/>
+                </a:solidFill>
+                <a:latin typeface="Arial"/>
+                <a:ea typeface="Arial"/>
+                <a:cs typeface="Arial"/>
+              </a:rPr>
+              <a:t>43</a:t>
+            </a:r>
+          </a:p>
+        </p:txBody>
+      </p:sp>
+      <p:sp>
+        <p:nvSpPr>
+          <p:cNvPr id="6" name="">
+            <a:extLst xmlns:a="http://schemas.openxmlformats.org/drawingml/2006/main">
+              <a:ext uri="{FF2B5EF4-FFF2-40B4-BE49-F238E27FC236}">
+                <a16:creationId xmlns:a16="http://schemas.microsoft.com/office/drawing/2014/main" id="{10F4BA85-46C5-47BD-BA74-EC806E663D58}"/>
+              </a:ext>
+            </a:extLst>
+          </p:cNvPr>
+          <p:cNvSpPr>
+            <a:spLocks xmlns:a="http://schemas.openxmlformats.org/drawingml/2006/main" noGrp="1"/>
+          </p:cNvSpPr>
+          <p:nvPr/>
+        </p:nvSpPr>
+        <p:spPr>
+          <a:xfrm xmlns:a="http://schemas.openxmlformats.org/drawingml/2006/main">
+            <a:off x="552450" y="1600200"/>
+            <a:ext cx="95250" cy="895350"/>
+          </a:xfrm>
+          <a:prstGeom xmlns:a="http://schemas.openxmlformats.org/drawingml/2006/main" prst="rect">
+            <a:avLst/>
+          </a:prstGeom>
+          <a:solidFill xmlns:a="http://schemas.openxmlformats.org/drawingml/2006/main">
+            <a:srgbClr val="E45756"/>
+          </a:solidFill>
+          <a:ln xmlns:a="http://schemas.openxmlformats.org/drawingml/2006/main" w="0">
+            <a:solidFill>
+              <a:srgbClr val="E45756"/>
+            </a:solidFill>
+            <a:prstDash val="solid"/>
+          </a:ln>
+        </p:spPr>
+      </p:sp>
+      <p:sp>
+        <p:nvSpPr>
+          <p:cNvPr id="7" name="">
+            <a:extLst xmlns:a="http://schemas.openxmlformats.org/drawingml/2006/main">
+              <a:ext uri="{FF2B5EF4-FFF2-40B4-BE49-F238E27FC236}">
+                <a16:creationId xmlns:a16="http://schemas.microsoft.com/office/drawing/2014/main" id="{7EF5B945-9D04-48FA-BA66-96DE813A9715}"/>
+              </a:ext>
+            </a:extLst>
+          </p:cNvPr>
+          <p:cNvSpPr>
+            <a:spLocks xmlns:a="http://schemas.openxmlformats.org/drawingml/2006/main" noGrp="1"/>
+          </p:cNvSpPr>
+          <p:nvPr/>
+        </p:nvSpPr>
+        <p:spPr>
+          <a:xfrm xmlns:a="http://schemas.openxmlformats.org/drawingml/2006/main">
+            <a:off x="876300" y="1581150"/>
+            <a:ext cx="2095500" cy="285750"/>
+          </a:xfrm>
+          <a:prstGeom xmlns:a="http://schemas.openxmlformats.org/drawingml/2006/main" prst="rect">
+            <a:avLst/>
+          </a:prstGeom>
+          <a:noFill xmlns:a="http://schemas.openxmlformats.org/drawingml/2006/main"/>
+          <a:ln xmlns:a="http://schemas.openxmlformats.org/drawingml/2006/main" w="0">
+            <a:noFill/>
+            <a:prstDash val="solid"/>
+          </a:ln>
+        </p:spPr>
+        <p:txBody>
+          <a:bodyPr xmlns:a="http://schemas.openxmlformats.org/drawingml/2006/main" wrap="square" lIns="0" tIns="0" rIns="0" bIns="0" anchor="t">
+            <a:normAutofit fontScale="100000"/>
+          </a:bodyPr>
+          <a:lstStyle xmlns:a="http://schemas.openxmlformats.org/drawingml/2006/main"/>
+          <a:p xmlns:a="http://schemas.openxmlformats.org/drawingml/2006/main">
+            <a:pPr algn="l">
+              <a:buNone/>
+              <a:defRPr sz="1350" b="1">
+                <a:solidFill>
+                  <a:srgbClr val="E45756"/>
+                </a:solidFill>
+                <a:latin typeface="Arial"/>
+                <a:ea typeface="Arial"/>
+                <a:cs typeface="Arial"/>
+              </a:defRPr>
+            </a:pPr>
+            <a:r>
+              <a:rPr sz="1350" b="1">
+                <a:solidFill>
+                  <a:srgbClr val="E45756"/>
+                </a:solidFill>
+                <a:latin typeface="Arial"/>
+                <a:ea typeface="Arial"/>
+                <a:cs typeface="Arial"/>
+              </a:rPr>
+              <a:t>GICS CORE</a:t>
+            </a:r>
+          </a:p>
+        </p:txBody>
+      </p:sp>
+      <p:sp>
+        <p:nvSpPr>
+          <p:cNvPr id="8" name="">
+            <a:extLst xmlns:a="http://schemas.openxmlformats.org/drawingml/2006/main">
+              <a:ext uri="{FF2B5EF4-FFF2-40B4-BE49-F238E27FC236}">
+                <a16:creationId xmlns:a16="http://schemas.microsoft.com/office/drawing/2014/main" id="{655CF75D-5F23-4C7F-BE9C-764036D0B9E8}"/>
+              </a:ext>
+            </a:extLst>
+          </p:cNvPr>
+          <p:cNvSpPr>
+            <a:spLocks xmlns:a="http://schemas.openxmlformats.org/drawingml/2006/main" noGrp="1"/>
+          </p:cNvSpPr>
+          <p:nvPr/>
+        </p:nvSpPr>
+        <p:spPr>
+          <a:xfrm xmlns:a="http://schemas.openxmlformats.org/drawingml/2006/main">
+            <a:off x="3105150" y="1562100"/>
+            <a:ext cx="4762500" cy="419100"/>
+          </a:xfrm>
+          <a:prstGeom xmlns:a="http://schemas.openxmlformats.org/drawingml/2006/main" prst="rect">
+            <a:avLst/>
+          </a:prstGeom>
+          <a:noFill xmlns:a="http://schemas.openxmlformats.org/drawingml/2006/main"/>
+          <a:ln xmlns:a="http://schemas.openxmlformats.org/drawingml/2006/main" w="0">
+            <a:noFill/>
+            <a:prstDash val="solid"/>
+          </a:ln>
+        </p:spPr>
+        <p:txBody>
+          <a:bodyPr xmlns:a="http://schemas.openxmlformats.org/drawingml/2006/main" wrap="square" lIns="0" tIns="0" rIns="0" bIns="0" anchor="t">
+            <a:normAutofit fontScale="100000"/>
+          </a:bodyPr>
+          <a:lstStyle xmlns:a="http://schemas.openxmlformats.org/drawingml/2006/main"/>
+          <a:p xmlns:a="http://schemas.openxmlformats.org/drawingml/2006/main">
+            <a:pPr algn="l">
+              <a:buNone/>
+              <a:defRPr sz="1950" b="1">
+                <a:solidFill>
+                  <a:srgbClr val="273548"/>
+                </a:solidFill>
+                <a:latin typeface="Arial"/>
+                <a:ea typeface="Arial"/>
+                <a:cs typeface="Arial"/>
+              </a:defRPr>
+            </a:pPr>
+            <a:r>
+              <a:rPr sz="1950" b="1">
+                <a:solidFill>
+                  <a:srgbClr val="273548"/>
+                </a:solidFill>
+                <a:latin typeface="Arial"/>
+                <a:ea typeface="Arial"/>
+                <a:cs typeface="Arial"/>
+              </a:rPr>
+              <a:t>-160 bp/trade</a:t>
+            </a:r>
+          </a:p>
+        </p:txBody>
+      </p:sp>
+      <p:sp>
+        <p:nvSpPr>
+          <p:cNvPr id="9" name="">
+            <a:extLst xmlns:a="http://schemas.openxmlformats.org/drawingml/2006/main">
+              <a:ext uri="{FF2B5EF4-FFF2-40B4-BE49-F238E27FC236}">
+                <a16:creationId xmlns:a16="http://schemas.microsoft.com/office/drawing/2014/main" id="{3E0B76F2-4514-4DD8-934B-ABE42A34E950}"/>
+              </a:ext>
+            </a:extLst>
+          </p:cNvPr>
+          <p:cNvSpPr>
+            <a:spLocks xmlns:a="http://schemas.openxmlformats.org/drawingml/2006/main" noGrp="1"/>
+          </p:cNvSpPr>
+          <p:nvPr/>
+        </p:nvSpPr>
+        <p:spPr>
+          <a:xfrm xmlns:a="http://schemas.openxmlformats.org/drawingml/2006/main">
+            <a:off x="8096250" y="1581150"/>
+            <a:ext cx="3333750" cy="704850"/>
+          </a:xfrm>
+          <a:prstGeom xmlns:a="http://schemas.openxmlformats.org/drawingml/2006/main" prst="rect">
+            <a:avLst/>
+          </a:prstGeom>
+          <a:noFill xmlns:a="http://schemas.openxmlformats.org/drawingml/2006/main"/>
+          <a:ln xmlns:a="http://schemas.openxmlformats.org/drawingml/2006/main" w="0">
+            <a:noFill/>
+            <a:prstDash val="solid"/>
+          </a:ln>
+        </p:spPr>
+        <p:txBody>
+          <a:bodyPr xmlns:a="http://schemas.openxmlformats.org/drawingml/2006/main" wrap="square" lIns="0" tIns="0" rIns="0" bIns="0" anchor="t">
+            <a:normAutofit fontScale="100000"/>
+          </a:bodyPr>
+          <a:lstStyle xmlns:a="http://schemas.openxmlformats.org/drawingml/2006/main"/>
+          <a:p xmlns:a="http://schemas.openxmlformats.org/drawingml/2006/main">
+            <a:pPr algn="l">
+              <a:buNone/>
+              <a:defRPr sz="1425" b="0">
+                <a:solidFill>
+                  <a:srgbClr val="667384"/>
+                </a:solidFill>
+                <a:latin typeface="Arial"/>
+                <a:ea typeface="Arial"/>
+                <a:cs typeface="Arial"/>
+              </a:defRPr>
+            </a:pPr>
+            <a:r>
+              <a:rPr sz="1425" b="0">
+                <a:solidFill>
+                  <a:srgbClr val="667384"/>
+                </a:solidFill>
+                <a:latin typeface="Arial"/>
+                <a:ea typeface="Arial"/>
+                <a:cs typeface="Arial"/>
+              </a:rPr>
+              <a:t>62.5% negative breadth</a:t>
+            </a:r>
+          </a:p>
+        </p:txBody>
+      </p:sp>
+      <p:sp>
+        <p:nvSpPr>
+          <p:cNvPr id="10" name="">
+            <a:extLst xmlns:a="http://schemas.openxmlformats.org/drawingml/2006/main">
+              <a:ext uri="{FF2B5EF4-FFF2-40B4-BE49-F238E27FC236}">
+                <a16:creationId xmlns:a16="http://schemas.microsoft.com/office/drawing/2014/main" id="{294777C3-6D2F-4277-840E-7E984FB4554D}"/>
+              </a:ext>
+            </a:extLst>
+          </p:cNvPr>
+          <p:cNvSpPr>
+            <a:spLocks xmlns:a="http://schemas.openxmlformats.org/drawingml/2006/main" noGrp="1"/>
+          </p:cNvSpPr>
+          <p:nvPr/>
+        </p:nvSpPr>
+        <p:spPr>
+          <a:xfrm xmlns:a="http://schemas.openxmlformats.org/drawingml/2006/main">
+            <a:off x="876300" y="2590800"/>
+            <a:ext cx="10553700" cy="9525"/>
+          </a:xfrm>
+          <a:prstGeom xmlns:a="http://schemas.openxmlformats.org/drawingml/2006/main" prst="rect">
+            <a:avLst/>
+          </a:prstGeom>
+          <a:solidFill xmlns:a="http://schemas.openxmlformats.org/drawingml/2006/main">
+            <a:srgbClr val="B8BCC4"/>
+          </a:solidFill>
+          <a:ln xmlns:a="http://schemas.openxmlformats.org/drawingml/2006/main" w="0">
+            <a:solidFill>
+              <a:srgbClr val="B8BCC4"/>
+            </a:solidFill>
+            <a:prstDash val="solid"/>
+          </a:ln>
+        </p:spPr>
+      </p:sp>
+      <p:sp>
+        <p:nvSpPr>
+          <p:cNvPr id="11" name="">
+            <a:extLst xmlns:a="http://schemas.openxmlformats.org/drawingml/2006/main">
+              <a:ext uri="{FF2B5EF4-FFF2-40B4-BE49-F238E27FC236}">
+                <a16:creationId xmlns:a16="http://schemas.microsoft.com/office/drawing/2014/main" id="{F894CF3F-AD63-423C-8F01-64C507896579}"/>
+              </a:ext>
+            </a:extLst>
+          </p:cNvPr>
+          <p:cNvSpPr>
+            <a:spLocks xmlns:a="http://schemas.openxmlformats.org/drawingml/2006/main" noGrp="1"/>
+          </p:cNvSpPr>
+          <p:nvPr/>
+        </p:nvSpPr>
+        <p:spPr>
+          <a:xfrm xmlns:a="http://schemas.openxmlformats.org/drawingml/2006/main">
+            <a:off x="552450" y="2800350"/>
+            <a:ext cx="95250" cy="895350"/>
+          </a:xfrm>
+          <a:prstGeom xmlns:a="http://schemas.openxmlformats.org/drawingml/2006/main" prst="rect">
+            <a:avLst/>
+          </a:prstGeom>
+          <a:solidFill xmlns:a="http://schemas.openxmlformats.org/drawingml/2006/main">
+            <a:srgbClr val="2A9D6F"/>
+          </a:solidFill>
+          <a:ln xmlns:a="http://schemas.openxmlformats.org/drawingml/2006/main" w="0">
+            <a:solidFill>
+              <a:srgbClr val="2A9D6F"/>
+            </a:solidFill>
+            <a:prstDash val="solid"/>
+          </a:ln>
+        </p:spPr>
+      </p:sp>
+      <p:sp>
+        <p:nvSpPr>
+          <p:cNvPr id="12" name="">
+            <a:extLst xmlns:a="http://schemas.openxmlformats.org/drawingml/2006/main">
+              <a:ext uri="{FF2B5EF4-FFF2-40B4-BE49-F238E27FC236}">
+                <a16:creationId xmlns:a16="http://schemas.microsoft.com/office/drawing/2014/main" id="{D3953D03-6A7A-4FEE-B242-02BF0319C169}"/>
+              </a:ext>
+            </a:extLst>
+          </p:cNvPr>
+          <p:cNvSpPr>
+            <a:spLocks xmlns:a="http://schemas.openxmlformats.org/drawingml/2006/main" noGrp="1"/>
+          </p:cNvSpPr>
+          <p:nvPr/>
+        </p:nvSpPr>
+        <p:spPr>
+          <a:xfrm xmlns:a="http://schemas.openxmlformats.org/drawingml/2006/main">
+            <a:off x="876300" y="2781300"/>
+            <a:ext cx="2095500" cy="285750"/>
+          </a:xfrm>
+          <a:prstGeom xmlns:a="http://schemas.openxmlformats.org/drawingml/2006/main" prst="rect">
+            <a:avLst/>
+          </a:prstGeom>
+          <a:noFill xmlns:a="http://schemas.openxmlformats.org/drawingml/2006/main"/>
+          <a:ln xmlns:a="http://schemas.openxmlformats.org/drawingml/2006/main" w="0">
+            <a:noFill/>
+            <a:prstDash val="solid"/>
+          </a:ln>
+        </p:spPr>
+        <p:txBody>
+          <a:bodyPr xmlns:a="http://schemas.openxmlformats.org/drawingml/2006/main" wrap="square" lIns="0" tIns="0" rIns="0" bIns="0" anchor="t">
+            <a:normAutofit fontScale="100000"/>
+          </a:bodyPr>
+          <a:lstStyle xmlns:a="http://schemas.openxmlformats.org/drawingml/2006/main"/>
+          <a:p xmlns:a="http://schemas.openxmlformats.org/drawingml/2006/main">
+            <a:pPr algn="l">
+              <a:buNone/>
+              <a:defRPr sz="1350" b="1">
+                <a:solidFill>
+                  <a:srgbClr val="2A9D6F"/>
+                </a:solidFill>
+                <a:latin typeface="Arial"/>
+                <a:ea typeface="Arial"/>
+                <a:cs typeface="Arial"/>
+              </a:defRPr>
+            </a:pPr>
+            <a:r>
+              <a:rPr sz="1350" b="1">
+                <a:solidFill>
+                  <a:srgbClr val="2A9D6F"/>
+                </a:solidFill>
+                <a:latin typeface="Arial"/>
+                <a:ea typeface="Arial"/>
+                <a:cs typeface="Arial"/>
+              </a:rPr>
+              <a:t>ATTENTION</a:t>
+            </a:r>
+          </a:p>
+        </p:txBody>
+      </p:sp>
+      <p:sp>
+        <p:nvSpPr>
+          <p:cNvPr id="13" name="">
+            <a:extLst xmlns:a="http://schemas.openxmlformats.org/drawingml/2006/main">
+              <a:ext uri="{FF2B5EF4-FFF2-40B4-BE49-F238E27FC236}">
+                <a16:creationId xmlns:a16="http://schemas.microsoft.com/office/drawing/2014/main" id="{52D1DBE8-EAF6-4492-89E7-5C97A3A6A395}"/>
+              </a:ext>
+            </a:extLst>
+          </p:cNvPr>
+          <p:cNvSpPr>
+            <a:spLocks xmlns:a="http://schemas.openxmlformats.org/drawingml/2006/main" noGrp="1"/>
+          </p:cNvSpPr>
+          <p:nvPr/>
+        </p:nvSpPr>
+        <p:spPr>
+          <a:xfrm xmlns:a="http://schemas.openxmlformats.org/drawingml/2006/main">
+            <a:off x="3105150" y="2762250"/>
+            <a:ext cx="4762500" cy="419100"/>
+          </a:xfrm>
+          <a:prstGeom xmlns:a="http://schemas.openxmlformats.org/drawingml/2006/main" prst="rect">
+            <a:avLst/>
+          </a:prstGeom>
+          <a:noFill xmlns:a="http://schemas.openxmlformats.org/drawingml/2006/main"/>
+          <a:ln xmlns:a="http://schemas.openxmlformats.org/drawingml/2006/main" w="0">
+            <a:noFill/>
+            <a:prstDash val="solid"/>
+          </a:ln>
+        </p:spPr>
+        <p:txBody>
+          <a:bodyPr xmlns:a="http://schemas.openxmlformats.org/drawingml/2006/main" wrap="square" lIns="0" tIns="0" rIns="0" bIns="0" anchor="t">
+            <a:normAutofit fontScale="100000"/>
+          </a:bodyPr>
+          <a:lstStyle xmlns:a="http://schemas.openxmlformats.org/drawingml/2006/main"/>
+          <a:p xmlns:a="http://schemas.openxmlformats.org/drawingml/2006/main">
+            <a:pPr algn="l">
+              <a:buNone/>
+              <a:defRPr sz="1950" b="1">
+                <a:solidFill>
+                  <a:srgbClr val="273548"/>
+                </a:solidFill>
+                <a:latin typeface="Arial"/>
+                <a:ea typeface="Arial"/>
+                <a:cs typeface="Arial"/>
+              </a:defRPr>
+            </a:pPr>
+            <a:r>
+              <a:rPr sz="1950" b="1">
+                <a:solidFill>
+                  <a:srgbClr val="273548"/>
+                </a:solidFill>
+                <a:latin typeface="Arial"/>
+                <a:ea typeface="Arial"/>
+                <a:cs typeface="Arial"/>
+              </a:rPr>
+              <a:t>-538 bp/trade</a:t>
+            </a:r>
+          </a:p>
+        </p:txBody>
+      </p:sp>
+      <p:sp>
+        <p:nvSpPr>
+          <p:cNvPr id="14" name="">
+            <a:extLst xmlns:a="http://schemas.openxmlformats.org/drawingml/2006/main">
+              <a:ext uri="{FF2B5EF4-FFF2-40B4-BE49-F238E27FC236}">
+                <a16:creationId xmlns:a16="http://schemas.microsoft.com/office/drawing/2014/main" id="{2CAF0156-C9E6-4210-8A8A-BFEDD044631B}"/>
+              </a:ext>
+            </a:extLst>
+          </p:cNvPr>
+          <p:cNvSpPr>
+            <a:spLocks xmlns:a="http://schemas.openxmlformats.org/drawingml/2006/main" noGrp="1"/>
+          </p:cNvSpPr>
+          <p:nvPr/>
+        </p:nvSpPr>
+        <p:spPr>
+          <a:xfrm xmlns:a="http://schemas.openxmlformats.org/drawingml/2006/main">
+            <a:off x="8096250" y="2781300"/>
+            <a:ext cx="3333750" cy="704850"/>
+          </a:xfrm>
+          <a:prstGeom xmlns:a="http://schemas.openxmlformats.org/drawingml/2006/main" prst="rect">
+            <a:avLst/>
+          </a:prstGeom>
+          <a:noFill xmlns:a="http://schemas.openxmlformats.org/drawingml/2006/main"/>
+          <a:ln xmlns:a="http://schemas.openxmlformats.org/drawingml/2006/main" w="0">
+            <a:noFill/>
+            <a:prstDash val="solid"/>
+          </a:ln>
+        </p:spPr>
+        <p:txBody>
+          <a:bodyPr xmlns:a="http://schemas.openxmlformats.org/drawingml/2006/main" wrap="square" lIns="0" tIns="0" rIns="0" bIns="0" anchor="t">
+            <a:normAutofit fontScale="100000"/>
+          </a:bodyPr>
+          <a:lstStyle xmlns:a="http://schemas.openxmlformats.org/drawingml/2006/main"/>
+          <a:p xmlns:a="http://schemas.openxmlformats.org/drawingml/2006/main">
+            <a:pPr algn="l">
+              <a:buNone/>
+              <a:defRPr sz="1425" b="0">
+                <a:solidFill>
+                  <a:srgbClr val="667384"/>
+                </a:solidFill>
+                <a:latin typeface="Arial"/>
+                <a:ea typeface="Arial"/>
+                <a:cs typeface="Arial"/>
+              </a:defRPr>
+            </a:pPr>
+            <a:r>
+              <a:rPr sz="1425" b="0">
+                <a:solidFill>
+                  <a:srgbClr val="667384"/>
+                </a:solidFill>
+                <a:latin typeface="Arial"/>
+                <a:ea typeface="Arial"/>
+                <a:cs typeface="Arial"/>
+              </a:rPr>
+              <a:t>69.2% negative breadth</a:t>
+            </a:r>
+          </a:p>
+        </p:txBody>
+      </p:sp>
+      <p:sp>
+        <p:nvSpPr>
+          <p:cNvPr id="15" name="">
+            <a:extLst xmlns:a="http://schemas.openxmlformats.org/drawingml/2006/main">
+              <a:ext uri="{FF2B5EF4-FFF2-40B4-BE49-F238E27FC236}">
+                <a16:creationId xmlns:a16="http://schemas.microsoft.com/office/drawing/2014/main" id="{B126165D-5B65-44DB-99BD-15ED33F9B90F}"/>
+              </a:ext>
+            </a:extLst>
+          </p:cNvPr>
+          <p:cNvSpPr>
+            <a:spLocks xmlns:a="http://schemas.openxmlformats.org/drawingml/2006/main" noGrp="1"/>
+          </p:cNvSpPr>
+          <p:nvPr/>
+        </p:nvSpPr>
+        <p:spPr>
+          <a:xfrm xmlns:a="http://schemas.openxmlformats.org/drawingml/2006/main">
+            <a:off x="876300" y="3790950"/>
+            <a:ext cx="10553700" cy="9525"/>
+          </a:xfrm>
+          <a:prstGeom xmlns:a="http://schemas.openxmlformats.org/drawingml/2006/main" prst="rect">
+            <a:avLst/>
+          </a:prstGeom>
+          <a:solidFill xmlns:a="http://schemas.openxmlformats.org/drawingml/2006/main">
+            <a:srgbClr val="B8BCC4"/>
+          </a:solidFill>
+          <a:ln xmlns:a="http://schemas.openxmlformats.org/drawingml/2006/main" w="0">
+            <a:solidFill>
+              <a:srgbClr val="B8BCC4"/>
+            </a:solidFill>
+            <a:prstDash val="solid"/>
+          </a:ln>
+        </p:spPr>
+      </p:sp>
+      <p:sp>
+        <p:nvSpPr>
+          <p:cNvPr id="16" name="">
+            <a:extLst xmlns:a="http://schemas.openxmlformats.org/drawingml/2006/main">
+              <a:ext uri="{FF2B5EF4-FFF2-40B4-BE49-F238E27FC236}">
+                <a16:creationId xmlns:a16="http://schemas.microsoft.com/office/drawing/2014/main" id="{7DC0911F-9587-4B19-84C6-11974DB2A91C}"/>
+              </a:ext>
+            </a:extLst>
+          </p:cNvPr>
+          <p:cNvSpPr>
+            <a:spLocks xmlns:a="http://schemas.openxmlformats.org/drawingml/2006/main" noGrp="1"/>
+          </p:cNvSpPr>
+          <p:nvPr/>
+        </p:nvSpPr>
+        <p:spPr>
+          <a:xfrm xmlns:a="http://schemas.openxmlformats.org/drawingml/2006/main">
+            <a:off x="552450" y="4000500"/>
+            <a:ext cx="95250" cy="895350"/>
+          </a:xfrm>
+          <a:prstGeom xmlns:a="http://schemas.openxmlformats.org/drawingml/2006/main" prst="rect">
+            <a:avLst/>
+          </a:prstGeom>
+          <a:solidFill xmlns:a="http://schemas.openxmlformats.org/drawingml/2006/main">
+            <a:srgbClr val="3D8DFF"/>
+          </a:solidFill>
+          <a:ln xmlns:a="http://schemas.openxmlformats.org/drawingml/2006/main" w="0">
+            <a:solidFill>
+              <a:srgbClr val="3D8DFF"/>
+            </a:solidFill>
+            <a:prstDash val="solid"/>
+          </a:ln>
+        </p:spPr>
+      </p:sp>
+      <p:sp>
+        <p:nvSpPr>
+          <p:cNvPr id="17" name="">
+            <a:extLst xmlns:a="http://schemas.openxmlformats.org/drawingml/2006/main">
+              <a:ext uri="{FF2B5EF4-FFF2-40B4-BE49-F238E27FC236}">
+                <a16:creationId xmlns:a16="http://schemas.microsoft.com/office/drawing/2014/main" id="{DAB53991-F50C-4B95-9F23-DAE86BCEDF3B}"/>
+              </a:ext>
+            </a:extLst>
+          </p:cNvPr>
+          <p:cNvSpPr>
+            <a:spLocks xmlns:a="http://schemas.openxmlformats.org/drawingml/2006/main" noGrp="1"/>
+          </p:cNvSpPr>
+          <p:nvPr/>
+        </p:nvSpPr>
+        <p:spPr>
+          <a:xfrm xmlns:a="http://schemas.openxmlformats.org/drawingml/2006/main">
+            <a:off x="876300" y="3981450"/>
+            <a:ext cx="2095500" cy="285750"/>
+          </a:xfrm>
+          <a:prstGeom xmlns:a="http://schemas.openxmlformats.org/drawingml/2006/main" prst="rect">
+            <a:avLst/>
+          </a:prstGeom>
+          <a:noFill xmlns:a="http://schemas.openxmlformats.org/drawingml/2006/main"/>
+          <a:ln xmlns:a="http://schemas.openxmlformats.org/drawingml/2006/main" w="0">
+            <a:noFill/>
+            <a:prstDash val="solid"/>
+          </a:ln>
+        </p:spPr>
+        <p:txBody>
+          <a:bodyPr xmlns:a="http://schemas.openxmlformats.org/drawingml/2006/main" wrap="square" lIns="0" tIns="0" rIns="0" bIns="0" anchor="t">
+            <a:normAutofit fontScale="100000"/>
+          </a:bodyPr>
+          <a:lstStyle xmlns:a="http://schemas.openxmlformats.org/drawingml/2006/main"/>
+          <a:p xmlns:a="http://schemas.openxmlformats.org/drawingml/2006/main">
+            <a:pPr algn="l">
+              <a:buNone/>
+              <a:defRPr sz="1350" b="1">
+                <a:solidFill>
+                  <a:srgbClr val="3D8DFF"/>
+                </a:solidFill>
+                <a:latin typeface="Arial"/>
+                <a:ea typeface="Arial"/>
+                <a:cs typeface="Arial"/>
+              </a:defRPr>
+            </a:pPr>
+            <a:r>
+              <a:rPr sz="1350" b="1">
+                <a:solidFill>
+                  <a:srgbClr val="3D8DFF"/>
+                </a:solidFill>
+                <a:latin typeface="Arial"/>
+                <a:ea typeface="Arial"/>
+                <a:cs typeface="Arial"/>
+              </a:rPr>
+              <a:t>CONTROLS</a:t>
+            </a:r>
+          </a:p>
+        </p:txBody>
+      </p:sp>
+      <p:sp>
+        <p:nvSpPr>
+          <p:cNvPr id="18" name="">
+            <a:extLst xmlns:a="http://schemas.openxmlformats.org/drawingml/2006/main">
+              <a:ext uri="{FF2B5EF4-FFF2-40B4-BE49-F238E27FC236}">
+                <a16:creationId xmlns:a16="http://schemas.microsoft.com/office/drawing/2014/main" id="{5DFACF3B-08BC-4148-A40A-2004DFB81D71}"/>
+              </a:ext>
+            </a:extLst>
+          </p:cNvPr>
+          <p:cNvSpPr>
+            <a:spLocks xmlns:a="http://schemas.openxmlformats.org/drawingml/2006/main" noGrp="1"/>
+          </p:cNvSpPr>
+          <p:nvPr/>
+        </p:nvSpPr>
+        <p:spPr>
+          <a:xfrm xmlns:a="http://schemas.openxmlformats.org/drawingml/2006/main">
+            <a:off x="3105150" y="3962400"/>
+            <a:ext cx="4762500" cy="419100"/>
+          </a:xfrm>
+          <a:prstGeom xmlns:a="http://schemas.openxmlformats.org/drawingml/2006/main" prst="rect">
+            <a:avLst/>
+          </a:prstGeom>
+          <a:noFill xmlns:a="http://schemas.openxmlformats.org/drawingml/2006/main"/>
+          <a:ln xmlns:a="http://schemas.openxmlformats.org/drawingml/2006/main" w="0">
+            <a:noFill/>
+            <a:prstDash val="solid"/>
+          </a:ln>
+        </p:spPr>
+        <p:txBody>
+          <a:bodyPr xmlns:a="http://schemas.openxmlformats.org/drawingml/2006/main" wrap="square" lIns="0" tIns="0" rIns="0" bIns="0" anchor="t">
+            <a:normAutofit fontScale="100000"/>
+          </a:bodyPr>
+          <a:lstStyle xmlns:a="http://schemas.openxmlformats.org/drawingml/2006/main"/>
+          <a:p xmlns:a="http://schemas.openxmlformats.org/drawingml/2006/main">
+            <a:pPr algn="l">
+              <a:buNone/>
+              <a:defRPr sz="1950" b="1">
+                <a:solidFill>
+                  <a:srgbClr val="273548"/>
+                </a:solidFill>
+                <a:latin typeface="Arial"/>
+                <a:ea typeface="Arial"/>
+                <a:cs typeface="Arial"/>
+              </a:defRPr>
+            </a:pPr>
+            <a:r>
+              <a:rPr sz="1950" b="1">
+                <a:solidFill>
+                  <a:srgbClr val="273548"/>
+                </a:solidFill>
+                <a:latin typeface="Arial"/>
+                <a:ea typeface="Arial"/>
+                <a:cs typeface="Arial"/>
+              </a:rPr>
+              <a:t>ETFs -52 • non-equity -69</a:t>
+            </a:r>
+          </a:p>
+        </p:txBody>
+      </p:sp>
+      <p:sp>
+        <p:nvSpPr>
+          <p:cNvPr id="19" name="">
+            <a:extLst xmlns:a="http://schemas.openxmlformats.org/drawingml/2006/main">
+              <a:ext uri="{FF2B5EF4-FFF2-40B4-BE49-F238E27FC236}">
+                <a16:creationId xmlns:a16="http://schemas.microsoft.com/office/drawing/2014/main" id="{C907D23B-44A2-43C4-9658-4C6E38430BF5}"/>
+              </a:ext>
+            </a:extLst>
+          </p:cNvPr>
+          <p:cNvSpPr>
+            <a:spLocks xmlns:a="http://schemas.openxmlformats.org/drawingml/2006/main" noGrp="1"/>
+          </p:cNvSpPr>
+          <p:nvPr/>
+        </p:nvSpPr>
+        <p:spPr>
+          <a:xfrm xmlns:a="http://schemas.openxmlformats.org/drawingml/2006/main">
+            <a:off x="8096250" y="3981450"/>
+            <a:ext cx="3333750" cy="704850"/>
+          </a:xfrm>
+          <a:prstGeom xmlns:a="http://schemas.openxmlformats.org/drawingml/2006/main" prst="rect">
+            <a:avLst/>
+          </a:prstGeom>
+          <a:noFill xmlns:a="http://schemas.openxmlformats.org/drawingml/2006/main"/>
+          <a:ln xmlns:a="http://schemas.openxmlformats.org/drawingml/2006/main" w="0">
+            <a:noFill/>
+            <a:prstDash val="solid"/>
+          </a:ln>
+        </p:spPr>
+        <p:txBody>
+          <a:bodyPr xmlns:a="http://schemas.openxmlformats.org/drawingml/2006/main" wrap="square" lIns="0" tIns="0" rIns="0" bIns="0" anchor="t">
+            <a:normAutofit fontScale="100000"/>
+          </a:bodyPr>
+          <a:lstStyle xmlns:a="http://schemas.openxmlformats.org/drawingml/2006/main"/>
+          <a:p xmlns:a="http://schemas.openxmlformats.org/drawingml/2006/main">
+            <a:pPr algn="l">
+              <a:buNone/>
+              <a:defRPr sz="1425" b="0">
+                <a:solidFill>
+                  <a:srgbClr val="667384"/>
+                </a:solidFill>
+                <a:latin typeface="Arial"/>
+                <a:ea typeface="Arial"/>
+                <a:cs typeface="Arial"/>
+              </a:defRPr>
+            </a:pPr>
+            <a:r>
+              <a:rPr sz="1425" b="0">
+                <a:solidFill>
+                  <a:srgbClr val="667384"/>
+                </a:solidFill>
+                <a:latin typeface="Arial"/>
+                <a:ea typeface="Arial"/>
+                <a:cs typeface="Arial"/>
+              </a:rPr>
+              <a:t>both 60%+ negative breadth</a:t>
+            </a:r>
+          </a:p>
+        </p:txBody>
+      </p:sp>
+      <p:sp>
+        <p:nvSpPr>
+          <p:cNvPr id="20" name="">
+            <a:extLst xmlns:a="http://schemas.openxmlformats.org/drawingml/2006/main">
+              <a:ext uri="{FF2B5EF4-FFF2-40B4-BE49-F238E27FC236}">
+                <a16:creationId xmlns:a16="http://schemas.microsoft.com/office/drawing/2014/main" id="{8042DFC4-7E22-47E6-8C53-1E63A8411C3A}"/>
+              </a:ext>
+            </a:extLst>
+          </p:cNvPr>
+          <p:cNvSpPr>
+            <a:spLocks xmlns:a="http://schemas.openxmlformats.org/drawingml/2006/main" noGrp="1"/>
+          </p:cNvSpPr>
+          <p:nvPr/>
+        </p:nvSpPr>
+        <p:spPr>
+          <a:xfrm xmlns:a="http://schemas.openxmlformats.org/drawingml/2006/main">
+            <a:off x="876300" y="4991100"/>
+            <a:ext cx="10553700" cy="9525"/>
+          </a:xfrm>
+          <a:prstGeom xmlns:a="http://schemas.openxmlformats.org/drawingml/2006/main" prst="rect">
+            <a:avLst/>
+          </a:prstGeom>
+          <a:solidFill xmlns:a="http://schemas.openxmlformats.org/drawingml/2006/main">
+            <a:srgbClr val="B8BCC4"/>
+          </a:solidFill>
+          <a:ln xmlns:a="http://schemas.openxmlformats.org/drawingml/2006/main" w="0">
+            <a:solidFill>
+              <a:srgbClr val="B8BCC4"/>
+            </a:solidFill>
+            <a:prstDash val="solid"/>
+          </a:ln>
+        </p:spPr>
+      </p:sp>
+      <p:sp>
+        <p:nvSpPr>
+          <p:cNvPr id="21" name="">
+            <a:extLst xmlns:a="http://schemas.openxmlformats.org/drawingml/2006/main">
+              <a:ext uri="{FF2B5EF4-FFF2-40B4-BE49-F238E27FC236}">
+                <a16:creationId xmlns:a16="http://schemas.microsoft.com/office/drawing/2014/main" id="{F4066D54-676B-4D0F-93B6-2152B57E41AF}"/>
+              </a:ext>
+            </a:extLst>
+          </p:cNvPr>
+          <p:cNvSpPr>
+            <a:spLocks xmlns:a="http://schemas.openxmlformats.org/drawingml/2006/main" noGrp="1"/>
+          </p:cNvSpPr>
+          <p:nvPr/>
+        </p:nvSpPr>
+        <p:spPr>
+          <a:xfrm xmlns:a="http://schemas.openxmlformats.org/drawingml/2006/main">
+            <a:off x="552450" y="5353050"/>
+            <a:ext cx="10877550" cy="781050"/>
+          </a:xfrm>
+          <a:prstGeom xmlns:a="http://schemas.openxmlformats.org/drawingml/2006/main" prst="rect">
+            <a:avLst/>
+          </a:prstGeom>
+          <a:solidFill xmlns:a="http://schemas.openxmlformats.org/drawingml/2006/main">
+            <a:srgbClr val="EAF5FB"/>
+          </a:solidFill>
+          <a:ln xmlns:a="http://schemas.openxmlformats.org/drawingml/2006/main" w="0">
+            <a:solidFill>
+              <a:srgbClr val="EAF5FB"/>
+            </a:solidFill>
+            <a:prstDash val="solid"/>
+          </a:ln>
+        </p:spPr>
+      </p:sp>
+      <p:sp>
+        <p:nvSpPr>
+          <p:cNvPr id="22" name="">
+            <a:extLst xmlns:a="http://schemas.openxmlformats.org/drawingml/2006/main">
+              <a:ext uri="{FF2B5EF4-FFF2-40B4-BE49-F238E27FC236}">
+                <a16:creationId xmlns:a16="http://schemas.microsoft.com/office/drawing/2014/main" id="{6E4C79AE-EB98-4B5B-B3D3-11ED0D4C729B}"/>
+              </a:ext>
+            </a:extLst>
+          </p:cNvPr>
+          <p:cNvSpPr>
+            <a:spLocks xmlns:a="http://schemas.openxmlformats.org/drawingml/2006/main" noGrp="1"/>
+          </p:cNvSpPr>
+          <p:nvPr/>
+        </p:nvSpPr>
+        <p:spPr>
+          <a:xfrm xmlns:a="http://schemas.openxmlformats.org/drawingml/2006/main">
+            <a:off x="781050" y="5524500"/>
+            <a:ext cx="2476500" cy="323850"/>
+          </a:xfrm>
+          <a:prstGeom xmlns:a="http://schemas.openxmlformats.org/drawingml/2006/main" prst="rect">
+            <a:avLst/>
+          </a:prstGeom>
+          <a:noFill xmlns:a="http://schemas.openxmlformats.org/drawingml/2006/main"/>
+          <a:ln xmlns:a="http://schemas.openxmlformats.org/drawingml/2006/main" w="0">
+            <a:noFill/>
+            <a:prstDash val="solid"/>
+          </a:ln>
+        </p:spPr>
+        <p:txBody>
+          <a:bodyPr xmlns:a="http://schemas.openxmlformats.org/drawingml/2006/main" wrap="square" lIns="0" tIns="0" rIns="0" bIns="0" anchor="t">
+            <a:normAutofit fontScale="100000"/>
+          </a:bodyPr>
+          <a:lstStyle xmlns:a="http://schemas.openxmlformats.org/drawingml/2006/main"/>
+          <a:p xmlns:a="http://schemas.openxmlformats.org/drawingml/2006/main">
+            <a:pPr algn="l">
+              <a:buNone/>
+              <a:defRPr sz="1725" b="1">
+                <a:solidFill>
+                  <a:srgbClr val="3D8DFF"/>
+                </a:solidFill>
+                <a:latin typeface="Arial"/>
+                <a:ea typeface="Arial"/>
+                <a:cs typeface="Arial"/>
+              </a:defRPr>
+            </a:pPr>
+            <a:r>
+              <a:rPr sz="1725" b="1">
+                <a:solidFill>
+                  <a:srgbClr val="3D8DFF"/>
+                </a:solidFill>
+                <a:latin typeface="Arial"/>
+                <a:ea typeface="Arial"/>
+                <a:cs typeface="Arial"/>
+              </a:rPr>
+              <a:t>Not confirmation</a:t>
+            </a:r>
+          </a:p>
+        </p:txBody>
+      </p:sp>
+      <p:sp>
+        <p:nvSpPr>
+          <p:cNvPr id="23" name="">
+            <a:extLst xmlns:a="http://schemas.openxmlformats.org/drawingml/2006/main">
+              <a:ext uri="{FF2B5EF4-FFF2-40B4-BE49-F238E27FC236}">
+                <a16:creationId xmlns:a16="http://schemas.microsoft.com/office/drawing/2014/main" id="{3320D60E-6067-4236-80ED-A898A863026E}"/>
+              </a:ext>
+            </a:extLst>
+          </p:cNvPr>
+          <p:cNvSpPr>
+            <a:spLocks xmlns:a="http://schemas.openxmlformats.org/drawingml/2006/main" noGrp="1"/>
+          </p:cNvSpPr>
+          <p:nvPr/>
+        </p:nvSpPr>
+        <p:spPr>
+          <a:xfrm xmlns:a="http://schemas.openxmlformats.org/drawingml/2006/main">
+            <a:off x="3333750" y="5486400"/>
+            <a:ext cx="7810500" cy="419100"/>
+          </a:xfrm>
+          <a:prstGeom xmlns:a="http://schemas.openxmlformats.org/drawingml/2006/main" prst="rect">
+            <a:avLst/>
+          </a:prstGeom>
+          <a:noFill xmlns:a="http://schemas.openxmlformats.org/drawingml/2006/main"/>
+          <a:ln xmlns:a="http://schemas.openxmlformats.org/drawingml/2006/main" w="0">
+            <a:noFill/>
+            <a:prstDash val="solid"/>
+          </a:ln>
+        </p:spPr>
+        <p:txBody>
+          <a:bodyPr xmlns:a="http://schemas.openxmlformats.org/drawingml/2006/main" wrap="square" lIns="0" tIns="0" rIns="0" bIns="0" anchor="t">
+            <a:normAutofit fontScale="83760"/>
+          </a:bodyPr>
+          <a:lstStyle xmlns:a="http://schemas.openxmlformats.org/drawingml/2006/main"/>
+          <a:p xmlns:a="http://schemas.openxmlformats.org/drawingml/2006/main">
+            <a:pPr algn="l">
+              <a:buNone/>
+              <a:defRPr sz="1800" b="1">
+                <a:solidFill>
+                  <a:srgbClr val="273548"/>
+                </a:solidFill>
+                <a:latin typeface="Arial"/>
+                <a:ea typeface="Arial"/>
+                <a:cs typeface="Arial"/>
+              </a:defRPr>
+            </a:pPr>
+            <a:r>
+              <a:rPr sz="1800" b="1">
+                <a:solidFill>
+                  <a:srgbClr val="273548"/>
+                </a:solidFill>
+                <a:latin typeface="Arial"/>
+                <a:ea typeface="Arial"/>
+                <a:cs typeface="Arial"/>
+              </a:rPr>
+              <a:t>All four cohorts share the same discovery era and cannot validate temporal transport.</a:t>
+            </a:r>
+          </a:p>
+        </p:txBody>
+      </p:sp>
+    </p:spTree>
+    <p:extLst>
+      <p:ext uri="{BB962C8B-B14F-4D97-AF65-F5344CB8AC3E}">
+        <p14:creationId xmlns:p14="http://schemas.microsoft.com/office/powerpoint/2010/main" val="666536286"/>
+      </p:ext>
+    </p:extLst>
+  </p:cSld>
+</p:sld>
+</file>
+
+<file path=ppt/slides/slide44.xml><?xml version="1.0" encoding="utf-8"?>
+<p:sld xmlns:p="http://schemas.openxmlformats.org/presentationml/2006/main">
+  <p:cSld>
+    <p:bg>
+      <p:bgPr>
+        <a:solidFill xmlns:a="http://schemas.openxmlformats.org/drawingml/2006/main">
+          <a:srgbClr val="FFFFFF"/>
+        </a:solidFill>
+      </p:bgPr>
+    </p:bg>
+    <p:spTree>
+      <p:nvGrpSpPr>
+        <p:cNvPr id="1" name=""/>
+        <p:cNvGrpSpPr/>
+        <p:nvPr/>
+      </p:nvGrpSpPr>
+      <p:grpSpPr>
+        <a:xfrm xmlns:a="http://schemas.openxmlformats.org/drawingml/2006/main"/>
+      </p:grpSpPr>
+      <p:sp>
+        <p:nvSpPr>
+          <p:cNvPr id="24" name="section-11">
+            <a:extLst xmlns:a="http://schemas.openxmlformats.org/drawingml/2006/main">
+              <a:ext uri="{FF2B5EF4-FFF2-40B4-BE49-F238E27FC236}">
+                <a16:creationId xmlns:a16="http://schemas.microsoft.com/office/drawing/2014/main" id="{272ED433-B59C-436C-9DFB-4D317B90A13F}"/>
+              </a:ext>
+            </a:extLst>
+          </p:cNvPr>
+          <p:cNvSpPr>
+            <a:spLocks xmlns:a="http://schemas.openxmlformats.org/drawingml/2006/main" noGrp="1"/>
+          </p:cNvSpPr>
+          <p:nvPr/>
+        </p:nvSpPr>
+        <p:spPr>
+          <a:xfrm xmlns:a="http://schemas.openxmlformats.org/drawingml/2006/main">
+            <a:off x="457200" y="228600"/>
+            <a:ext cx="4191000" cy="228600"/>
+          </a:xfrm>
+          <a:prstGeom xmlns:a="http://schemas.openxmlformats.org/drawingml/2006/main" prst="rect">
+            <a:avLst/>
+          </a:prstGeom>
+          <a:noFill xmlns:a="http://schemas.openxmlformats.org/drawingml/2006/main"/>
+          <a:ln xmlns:a="http://schemas.openxmlformats.org/drawingml/2006/main" w="0">
+            <a:noFill/>
+            <a:prstDash val="solid"/>
+          </a:ln>
+        </p:spPr>
+        <p:txBody>
+          <a:bodyPr xmlns:a="http://schemas.openxmlformats.org/drawingml/2006/main" wrap="square" lIns="0" tIns="0" rIns="0" bIns="0" anchor="t">
+            <a:normAutofit fontScale="100000"/>
+          </a:bodyPr>
+          <a:lstStyle xmlns:a="http://schemas.openxmlformats.org/drawingml/2006/main"/>
+          <a:p xmlns:a="http://schemas.openxmlformats.org/drawingml/2006/main">
+            <a:pPr algn="l">
+              <a:buNone/>
+              <a:defRPr sz="1200" b="1">
+                <a:solidFill>
+                  <a:srgbClr val="667384"/>
+                </a:solidFill>
+                <a:latin typeface="Arial"/>
+                <a:ea typeface="Arial"/>
+                <a:cs typeface="Arial"/>
+              </a:defRPr>
+            </a:pPr>
+            <a:r>
+              <a:rPr sz="1200" b="1">
+                <a:solidFill>
+                  <a:srgbClr val="667384"/>
+                </a:solidFill>
+                <a:latin typeface="Arial"/>
+                <a:ea typeface="Arial"/>
+                <a:cs typeface="Arial"/>
+              </a:rPr>
+              <a:t>CALENDAR STABILITY</a:t>
+            </a:r>
+          </a:p>
+        </p:txBody>
+      </p:sp>
+      <p:sp>
+        <p:nvSpPr>
+          <p:cNvPr id="2" name="title-11">
+            <a:extLst xmlns:a="http://schemas.openxmlformats.org/drawingml/2006/main">
+              <a:ext uri="{FF2B5EF4-FFF2-40B4-BE49-F238E27FC236}">
+                <a16:creationId xmlns:a16="http://schemas.microsoft.com/office/drawing/2014/main" id="{3EC40708-7E00-432C-8ECE-907FA5705292}"/>
+              </a:ext>
+            </a:extLst>
+          </p:cNvPr>
+          <p:cNvSpPr>
+            <a:spLocks xmlns:a="http://schemas.openxmlformats.org/drawingml/2006/main" noGrp="1"/>
+          </p:cNvSpPr>
+          <p:nvPr/>
+        </p:nvSpPr>
+        <p:spPr>
+          <a:xfrm xmlns:a="http://schemas.openxmlformats.org/drawingml/2006/main">
+            <a:off x="457200" y="533400"/>
+            <a:ext cx="11277600" cy="628650"/>
+          </a:xfrm>
+          <a:prstGeom xmlns:a="http://schemas.openxmlformats.org/drawingml/2006/main" prst="rect">
+            <a:avLst/>
+          </a:prstGeom>
+          <a:noFill xmlns:a="http://schemas.openxmlformats.org/drawingml/2006/main"/>
+          <a:ln xmlns:a="http://schemas.openxmlformats.org/drawingml/2006/main" w="0">
+            <a:noFill/>
+            <a:prstDash val="solid"/>
+          </a:ln>
+        </p:spPr>
+        <p:txBody>
+          <a:bodyPr xmlns:a="http://schemas.openxmlformats.org/drawingml/2006/main" wrap="square" lIns="0" tIns="0" rIns="0" bIns="0" anchor="t">
+            <a:normAutofit fontScale="100000"/>
+          </a:bodyPr>
+          <a:lstStyle xmlns:a="http://schemas.openxmlformats.org/drawingml/2006/main"/>
+          <a:p xmlns:a="http://schemas.openxmlformats.org/drawingml/2006/main">
+            <a:pPr algn="l">
+              <a:buNone/>
+              <a:defRPr sz="3525" b="1">
+                <a:solidFill>
+                  <a:srgbClr val="000000"/>
+                </a:solidFill>
+                <a:latin typeface="Arial"/>
+                <a:ea typeface="Arial"/>
+                <a:cs typeface="Arial"/>
+              </a:defRPr>
+            </a:pPr>
+            <a:r>
+              <a:rPr sz="3525" b="1">
+                <a:solidFill>
+                  <a:srgbClr val="000000"/>
+                </a:solidFill>
+                <a:latin typeface="Arial"/>
+                <a:ea typeface="Arial"/>
+                <a:cs typeface="Arial"/>
+              </a:rPr>
+              <a:t>Only three of six years support the veto</a:t>
+            </a:r>
+          </a:p>
+        </p:txBody>
+      </p:sp>
+      <p:sp>
+        <p:nvSpPr>
+          <p:cNvPr id="3" name="">
+            <a:extLst xmlns:a="http://schemas.openxmlformats.org/drawingml/2006/main">
+              <a:ext uri="{FF2B5EF4-FFF2-40B4-BE49-F238E27FC236}">
+                <a16:creationId xmlns:a16="http://schemas.microsoft.com/office/drawing/2014/main" id="{D5CA0FCE-75E8-41EF-A76A-23E9E2120C6A}"/>
+              </a:ext>
+            </a:extLst>
+          </p:cNvPr>
+          <p:cNvSpPr>
+            <a:spLocks xmlns:a="http://schemas.openxmlformats.org/drawingml/2006/main" noGrp="1"/>
+          </p:cNvSpPr>
+          <p:nvPr/>
+        </p:nvSpPr>
+        <p:spPr>
+          <a:xfrm xmlns:a="http://schemas.openxmlformats.org/drawingml/2006/main">
+            <a:off x="457200" y="1200150"/>
+            <a:ext cx="11277600" cy="19050"/>
+          </a:xfrm>
+          <a:prstGeom xmlns:a="http://schemas.openxmlformats.org/drawingml/2006/main" prst="rect">
+            <a:avLst/>
+          </a:prstGeom>
+          <a:solidFill xmlns:a="http://schemas.openxmlformats.org/drawingml/2006/main">
+            <a:srgbClr val="B8BCC4"/>
+          </a:solidFill>
+          <a:ln xmlns:a="http://schemas.openxmlformats.org/drawingml/2006/main" w="0">
+            <a:solidFill>
+              <a:srgbClr val="B8BCC4"/>
+            </a:solidFill>
+            <a:prstDash val="solid"/>
+          </a:ln>
+        </p:spPr>
+      </p:sp>
+      <p:sp>
+        <p:nvSpPr>
+          <p:cNvPr id="4" name="footer-left-11">
+            <a:extLst xmlns:a="http://schemas.openxmlformats.org/drawingml/2006/main">
+              <a:ext uri="{FF2B5EF4-FFF2-40B4-BE49-F238E27FC236}">
+                <a16:creationId xmlns:a16="http://schemas.microsoft.com/office/drawing/2014/main" id="{700DA765-80E0-4197-8700-00D867B86FA2}"/>
+              </a:ext>
+            </a:extLst>
+          </p:cNvPr>
+          <p:cNvSpPr>
+            <a:spLocks xmlns:a="http://schemas.openxmlformats.org/drawingml/2006/main" noGrp="1"/>
+          </p:cNvSpPr>
+          <p:nvPr/>
+        </p:nvSpPr>
+        <p:spPr>
+          <a:xfrm xmlns:a="http://schemas.openxmlformats.org/drawingml/2006/main">
+            <a:off x="457200" y="6515100"/>
+            <a:ext cx="3429000" cy="171450"/>
+          </a:xfrm>
+          <a:prstGeom xmlns:a="http://schemas.openxmlformats.org/drawingml/2006/main" prst="rect">
+            <a:avLst/>
+          </a:prstGeom>
+          <a:noFill xmlns:a="http://schemas.openxmlformats.org/drawingml/2006/main"/>
+          <a:ln xmlns:a="http://schemas.openxmlformats.org/drawingml/2006/main" w="0">
+            <a:noFill/>
+            <a:prstDash val="solid"/>
+          </a:ln>
+        </p:spPr>
+        <p:txBody>
+          <a:bodyPr xmlns:a="http://schemas.openxmlformats.org/drawingml/2006/main" wrap="square" lIns="0" tIns="0" rIns="0" bIns="0" anchor="t">
+            <a:normAutofit fontScale="100000"/>
+          </a:bodyPr>
+          <a:lstStyle xmlns:a="http://schemas.openxmlformats.org/drawingml/2006/main"/>
+          <a:p xmlns:a="http://schemas.openxmlformats.org/drawingml/2006/main">
+            <a:pPr algn="l">
+              <a:buNone/>
+              <a:defRPr sz="825" b="0">
+                <a:solidFill>
+                  <a:srgbClr val="64748B"/>
+                </a:solidFill>
+                <a:latin typeface="Arial"/>
+                <a:ea typeface="Arial"/>
+                <a:cs typeface="Arial"/>
+              </a:defRPr>
+            </a:pPr>
+            <a:r>
+              <a:rPr sz="825" b="0">
+                <a:solidFill>
+                  <a:srgbClr val="64748B"/>
+                </a:solidFill>
+                <a:latin typeface="Arial"/>
+                <a:ea typeface="Arial"/>
+                <a:cs typeface="Arial"/>
+              </a:rPr>
+              <a:t>Return geometry | asset-balanced contrast by signal year</a:t>
+            </a:r>
+          </a:p>
+        </p:txBody>
+      </p:sp>
+      <p:sp>
+        <p:nvSpPr>
+          <p:cNvPr id="5" name="footer-number-11">
+            <a:extLst xmlns:a="http://schemas.openxmlformats.org/drawingml/2006/main">
+              <a:ext uri="{FF2B5EF4-FFF2-40B4-BE49-F238E27FC236}">
+                <a16:creationId xmlns:a16="http://schemas.microsoft.com/office/drawing/2014/main" id="{83896276-4112-4532-AF7C-776C67C58B77}"/>
+              </a:ext>
+            </a:extLst>
+          </p:cNvPr>
+          <p:cNvSpPr>
+            <a:spLocks xmlns:a="http://schemas.openxmlformats.org/drawingml/2006/main" noGrp="1"/>
+          </p:cNvSpPr>
+          <p:nvPr/>
+        </p:nvSpPr>
+        <p:spPr>
+          <a:xfrm xmlns:a="http://schemas.openxmlformats.org/drawingml/2006/main">
+            <a:off x="10477500" y="6496050"/>
+            <a:ext cx="1257300" cy="190500"/>
+          </a:xfrm>
+          <a:prstGeom xmlns:a="http://schemas.openxmlformats.org/drawingml/2006/main" prst="rect">
+            <a:avLst/>
+          </a:prstGeom>
+          <a:noFill xmlns:a="http://schemas.openxmlformats.org/drawingml/2006/main"/>
+          <a:ln xmlns:a="http://schemas.openxmlformats.org/drawingml/2006/main" w="0">
+            <a:noFill/>
+            <a:prstDash val="solid"/>
+          </a:ln>
+        </p:spPr>
+        <p:txBody>
+          <a:bodyPr xmlns:a="http://schemas.openxmlformats.org/drawingml/2006/main" wrap="square" lIns="0" tIns="0" rIns="0" bIns="0" anchor="t">
+            <a:normAutofit fontScale="100000"/>
+          </a:bodyPr>
+          <a:lstStyle xmlns:a="http://schemas.openxmlformats.org/drawingml/2006/main"/>
+          <a:p xmlns:a="http://schemas.openxmlformats.org/drawingml/2006/main">
+            <a:pPr algn="r">
+              <a:buNone/>
+              <a:defRPr sz="1050" b="0">
+                <a:solidFill>
+                  <a:srgbClr val="667384"/>
+                </a:solidFill>
+                <a:latin typeface="Arial"/>
+                <a:ea typeface="Arial"/>
+                <a:cs typeface="Arial"/>
+              </a:defRPr>
+            </a:pPr>
+            <a:r>
+              <a:rPr sz="1050" b="0">
+                <a:solidFill>
+                  <a:srgbClr val="667384"/>
+                </a:solidFill>
+                <a:latin typeface="Arial"/>
+                <a:ea typeface="Arial"/>
+                <a:cs typeface="Arial"/>
+              </a:rPr>
+              <a:t>44</a:t>
+            </a:r>
+          </a:p>
+        </p:txBody>
+      </p:sp>
+      <p:pic>
+        <p:nvPicPr>
+          <p:cNvPr id="37" name=""/>
+          <p:cNvPicPr>
+            <a:picLocks xmlns:a="http://schemas.openxmlformats.org/drawingml/2006/main" noChangeAspect="1"/>
+          </p:cNvPicPr>
+          <p:nvPr/>
+        </p:nvPicPr>
+        <p:blipFill>
+          <a:blip xmlns:r="http://schemas.openxmlformats.org/officeDocument/2006/relationships" xmlns:a="http://schemas.openxmlformats.org/drawingml/2006/main" r:embed="Rd5b27e00b237481b"/>
+          <a:stretch xmlns:a="http://schemas.openxmlformats.org/drawingml/2006/main"/>
+        </p:blipFill>
+        <p:spPr>
+          <a:xfrm xmlns:a="http://schemas.openxmlformats.org/drawingml/2006/main">
+            <a:off x="1771650" y="1335087"/>
+            <a:ext cx="8648700" cy="5045075"/>
+          </a:xfrm>
+          <a:prstGeom xmlns:a="http://schemas.openxmlformats.org/drawingml/2006/main" prst="rect">
+            <a:avLst/>
+          </a:prstGeom>
+        </p:spPr>
+      </p:pic>
+      <p:pic>
+        <p:nvPicPr>
+          <p:cNvPr id="38" name=""/>
+          <p:cNvPicPr>
+            <a:picLocks xmlns:a="http://schemas.openxmlformats.org/drawingml/2006/main" noChangeAspect="1"/>
+          </p:cNvPicPr>
+          <p:nvPr/>
+        </p:nvPicPr>
+        <p:blipFill>
+          <a:blip xmlns:r="http://schemas.openxmlformats.org/officeDocument/2006/relationships" xmlns:a="http://schemas.openxmlformats.org/drawingml/2006/main" r:embed="R4e2b9d3e0b2a43f0">
+            <a:extLst>
+              <a:ext uri="{96DAC541-7B7A-43D3-8B79-37D633B846F1}">
+                <asvg:svgBlip xmlns:asvg="http://schemas.microsoft.com/office/drawing/2016/SVG/main" r:embed="R42b8ee971fcb483f"/>
+              </a:ext>
+            </a:extLst>
+          </a:blip>
+          <a:stretch xmlns:a="http://schemas.openxmlformats.org/drawingml/2006/main"/>
+        </p:blipFill>
+        <p:spPr>
+          <a:xfrm xmlns:a="http://schemas.openxmlformats.org/drawingml/2006/main">
+            <a:off x="1771650" y="1335087"/>
+            <a:ext cx="8648700" cy="5045075"/>
+          </a:xfrm>
+          <a:prstGeom xmlns:a="http://schemas.openxmlformats.org/drawingml/2006/main" prst="rect">
+            <a:avLst/>
+          </a:prstGeom>
+        </p:spPr>
+      </p:pic>
+      <p:pic>
+        <p:nvPicPr>
+          <p:cNvPr id="39" name=""/>
+          <p:cNvPicPr>
+            <a:picLocks xmlns:a="http://schemas.openxmlformats.org/drawingml/2006/main" noChangeAspect="1"/>
+          </p:cNvPicPr>
+          <p:nvPr/>
+        </p:nvPicPr>
+        <p:blipFill>
+          <a:blip xmlns:r="http://schemas.openxmlformats.org/officeDocument/2006/relationships" xmlns:a="http://schemas.openxmlformats.org/drawingml/2006/main" r:embed="Rc3288b001e724e44"/>
+          <a:stretch xmlns:a="http://schemas.openxmlformats.org/drawingml/2006/main"/>
+        </p:blipFill>
+        <p:spPr>
+          <a:xfrm xmlns:a="http://schemas.openxmlformats.org/drawingml/2006/main">
+            <a:off x="2172053" y="1335087"/>
+            <a:ext cx="7847894" cy="5045075"/>
+          </a:xfrm>
+          <a:prstGeom xmlns:a="http://schemas.openxmlformats.org/drawingml/2006/main" prst="rect">
+            <a:avLst/>
+          </a:prstGeom>
+        </p:spPr>
+      </p:pic>
+      <p:pic>
+        <p:nvPicPr>
+          <p:cNvPr id="40" name=""/>
+          <p:cNvPicPr>
+            <a:picLocks xmlns:a="http://schemas.openxmlformats.org/drawingml/2006/main" noChangeAspect="1"/>
+          </p:cNvPicPr>
+          <p:nvPr/>
+        </p:nvPicPr>
+        <p:blipFill>
+          <a:blip xmlns:r="http://schemas.openxmlformats.org/officeDocument/2006/relationships" xmlns:a="http://schemas.openxmlformats.org/drawingml/2006/main" r:embed="Rfb4b899df31e40e0">
+            <a:extLst>
+              <a:ext uri="{96DAC541-7B7A-43D3-8B79-37D633B846F1}">
+                <asvg:svgBlip xmlns:asvg="http://schemas.microsoft.com/office/drawing/2016/SVG/main" r:embed="R689dbbd6aa4d4350"/>
+              </a:ext>
+            </a:extLst>
+          </a:blip>
+          <a:stretch xmlns:a="http://schemas.openxmlformats.org/drawingml/2006/main"/>
+        </p:blipFill>
+        <p:spPr>
+          <a:xfrm xmlns:a="http://schemas.openxmlformats.org/drawingml/2006/main">
+            <a:off x="1771650" y="1335087"/>
+            <a:ext cx="8648700" cy="5045075"/>
+          </a:xfrm>
+          <a:prstGeom xmlns:a="http://schemas.openxmlformats.org/drawingml/2006/main" prst="rect">
+            <a:avLst/>
+          </a:prstGeom>
+        </p:spPr>
+      </p:pic>
+      <p:pic>
+        <p:nvPicPr>
+          <p:cNvPr id="41" name=""/>
+          <p:cNvPicPr>
+            <a:picLocks xmlns:a="http://schemas.openxmlformats.org/drawingml/2006/main" noChangeAspect="1"/>
+          </p:cNvPicPr>
+          <p:nvPr/>
+        </p:nvPicPr>
+        <p:blipFill>
+          <a:blip xmlns:r="http://schemas.openxmlformats.org/officeDocument/2006/relationships" xmlns:a="http://schemas.openxmlformats.org/drawingml/2006/main" r:embed="R433feb3b013f49d0"/>
+          <a:stretch xmlns:a="http://schemas.openxmlformats.org/drawingml/2006/main"/>
+        </p:blipFill>
+        <p:spPr>
+          <a:xfrm xmlns:a="http://schemas.openxmlformats.org/drawingml/2006/main">
+            <a:off x="2312194" y="1335087"/>
+            <a:ext cx="7567613" cy="5045075"/>
+          </a:xfrm>
+          <a:prstGeom xmlns:a="http://schemas.openxmlformats.org/drawingml/2006/main" prst="rect">
+            <a:avLst/>
+          </a:prstGeom>
+        </p:spPr>
+      </p:pic>
+      <p:pic>
+        <p:nvPicPr>
+          <p:cNvPr id="42" name=""/>
+          <p:cNvPicPr>
+            <a:picLocks xmlns:a="http://schemas.openxmlformats.org/drawingml/2006/main" noChangeAspect="1"/>
+          </p:cNvPicPr>
+          <p:nvPr/>
+        </p:nvPicPr>
+        <p:blipFill>
+          <a:blip xmlns:r="http://schemas.openxmlformats.org/officeDocument/2006/relationships" xmlns:a="http://schemas.openxmlformats.org/drawingml/2006/main" r:embed="Rf58ab542fcc948e0">
+            <a:extLst>
+              <a:ext uri="{96DAC541-7B7A-43D3-8B79-37D633B846F1}">
+                <asvg:svgBlip xmlns:asvg="http://schemas.microsoft.com/office/drawing/2016/SVG/main" r:embed="R27c0d2e1bd124681"/>
+              </a:ext>
+            </a:extLst>
+          </a:blip>
+          <a:stretch xmlns:a="http://schemas.openxmlformats.org/drawingml/2006/main"/>
+        </p:blipFill>
+        <p:spPr>
+          <a:xfrm xmlns:a="http://schemas.openxmlformats.org/drawingml/2006/main">
+            <a:off x="1771650" y="1335087"/>
+            <a:ext cx="8648700" cy="5045075"/>
+          </a:xfrm>
+          <a:prstGeom xmlns:a="http://schemas.openxmlformats.org/drawingml/2006/main" prst="rect">
+            <a:avLst/>
+          </a:prstGeom>
+        </p:spPr>
+      </p:pic>
+      <p:pic>
+        <p:nvPicPr>
+          <p:cNvPr id="43" name=""/>
+          <p:cNvPicPr>
+            <a:picLocks xmlns:a="http://schemas.openxmlformats.org/drawingml/2006/main" noChangeAspect="1"/>
+          </p:cNvPicPr>
+          <p:nvPr/>
+        </p:nvPicPr>
+        <p:blipFill>
+          <a:blip xmlns:r="http://schemas.openxmlformats.org/officeDocument/2006/relationships" xmlns:a="http://schemas.openxmlformats.org/drawingml/2006/main" r:embed="R96a5e954fbdc4eeb"/>
+          <a:stretch xmlns:a="http://schemas.openxmlformats.org/drawingml/2006/main"/>
+        </p:blipFill>
+        <p:spPr>
+          <a:xfrm xmlns:a="http://schemas.openxmlformats.org/drawingml/2006/main">
+            <a:off x="2172053" y="1335087"/>
+            <a:ext cx="7847894" cy="5045075"/>
+          </a:xfrm>
+          <a:prstGeom xmlns:a="http://schemas.openxmlformats.org/drawingml/2006/main" prst="rect">
+            <a:avLst/>
+          </a:prstGeom>
+        </p:spPr>
+      </p:pic>
+    </p:spTree>
+    <p:extLst>
+      <p:ext uri="{BB962C8B-B14F-4D97-AF65-F5344CB8AC3E}">
+        <p14:creationId xmlns:p14="http://schemas.microsoft.com/office/powerpoint/2010/main" val="666536286"/>
+      </p:ext>
+    </p:extLst>
+  </p:cSld>
+</p:sld>
+</file>
+
+<file path=ppt/slides/slide45.xml><?xml version="1.0" encoding="utf-8"?>
+<p:sld xmlns:p="http://schemas.openxmlformats.org/presentationml/2006/main">
+  <p:cSld>
+    <p:bg>
+      <p:bgPr>
+        <a:solidFill xmlns:a="http://schemas.openxmlformats.org/drawingml/2006/main">
+          <a:srgbClr val="FFFFFF"/>
+        </a:solidFill>
+      </p:bgPr>
+    </p:bg>
+    <p:spTree>
+      <p:nvGrpSpPr>
+        <p:cNvPr id="1" name=""/>
+        <p:cNvGrpSpPr/>
+        <p:nvPr/>
+      </p:nvGrpSpPr>
+      <p:grpSpPr>
+        <a:xfrm xmlns:a="http://schemas.openxmlformats.org/drawingml/2006/main"/>
+      </p:grpSpPr>
+      <p:sp>
+        <p:nvSpPr>
+          <p:cNvPr id="24" name="section-11">
+            <a:extLst xmlns:a="http://schemas.openxmlformats.org/drawingml/2006/main">
+              <a:ext uri="{FF2B5EF4-FFF2-40B4-BE49-F238E27FC236}">
+                <a16:creationId xmlns:a16="http://schemas.microsoft.com/office/drawing/2014/main" id="{272ED433-B59C-436C-9DFB-4D317B90A13F}"/>
+              </a:ext>
+            </a:extLst>
+          </p:cNvPr>
+          <p:cNvSpPr>
+            <a:spLocks xmlns:a="http://schemas.openxmlformats.org/drawingml/2006/main" noGrp="1"/>
+          </p:cNvSpPr>
+          <p:nvPr/>
+        </p:nvSpPr>
+        <p:spPr>
+          <a:xfrm xmlns:a="http://schemas.openxmlformats.org/drawingml/2006/main">
+            <a:off x="457200" y="228600"/>
+            <a:ext cx="4191000" cy="228600"/>
+          </a:xfrm>
+          <a:prstGeom xmlns:a="http://schemas.openxmlformats.org/drawingml/2006/main" prst="rect">
+            <a:avLst/>
+          </a:prstGeom>
+          <a:noFill xmlns:a="http://schemas.openxmlformats.org/drawingml/2006/main"/>
+          <a:ln xmlns:a="http://schemas.openxmlformats.org/drawingml/2006/main" w="0">
+            <a:noFill/>
+            <a:prstDash val="solid"/>
+          </a:ln>
+        </p:spPr>
+        <p:txBody>
+          <a:bodyPr xmlns:a="http://schemas.openxmlformats.org/drawingml/2006/main" wrap="square" lIns="0" tIns="0" rIns="0" bIns="0" anchor="t">
+            <a:normAutofit fontScale="100000"/>
+          </a:bodyPr>
+          <a:lstStyle xmlns:a="http://schemas.openxmlformats.org/drawingml/2006/main"/>
+          <a:p xmlns:a="http://schemas.openxmlformats.org/drawingml/2006/main">
+            <a:pPr algn="l">
+              <a:buNone/>
+              <a:defRPr sz="1200" b="1">
+                <a:solidFill>
+                  <a:srgbClr val="667384"/>
+                </a:solidFill>
+                <a:latin typeface="Arial"/>
+                <a:ea typeface="Arial"/>
+                <a:cs typeface="Arial"/>
+              </a:defRPr>
+            </a:pPr>
+            <a:r>
+              <a:rPr sz="1200" b="1">
+                <a:solidFill>
+                  <a:srgbClr val="667384"/>
+                </a:solidFill>
+                <a:latin typeface="Arial"/>
+                <a:ea typeface="Arial"/>
+                <a:cs typeface="Arial"/>
+              </a:rPr>
+              <a:t>MATCHED TRADE TAPES</a:t>
+            </a:r>
+          </a:p>
+        </p:txBody>
+      </p:sp>
+      <p:sp>
+        <p:nvSpPr>
+          <p:cNvPr id="2" name="title-11">
+            <a:extLst xmlns:a="http://schemas.openxmlformats.org/drawingml/2006/main">
+              <a:ext uri="{FF2B5EF4-FFF2-40B4-BE49-F238E27FC236}">
+                <a16:creationId xmlns:a16="http://schemas.microsoft.com/office/drawing/2014/main" id="{3EC40708-7E00-432C-8ECE-907FA5705292}"/>
+              </a:ext>
+            </a:extLst>
+          </p:cNvPr>
+          <p:cNvSpPr>
+            <a:spLocks xmlns:a="http://schemas.openxmlformats.org/drawingml/2006/main" noGrp="1"/>
+          </p:cNvSpPr>
+          <p:nvPr/>
+        </p:nvSpPr>
+        <p:spPr>
+          <a:xfrm xmlns:a="http://schemas.openxmlformats.org/drawingml/2006/main">
+            <a:off x="457200" y="533400"/>
+            <a:ext cx="11277600" cy="628650"/>
+          </a:xfrm>
+          <a:prstGeom xmlns:a="http://schemas.openxmlformats.org/drawingml/2006/main" prst="rect">
+            <a:avLst/>
+          </a:prstGeom>
+          <a:noFill xmlns:a="http://schemas.openxmlformats.org/drawingml/2006/main"/>
+          <a:ln xmlns:a="http://schemas.openxmlformats.org/drawingml/2006/main" w="0">
+            <a:noFill/>
+            <a:prstDash val="solid"/>
+          </a:ln>
+        </p:spPr>
+        <p:txBody>
+          <a:bodyPr xmlns:a="http://schemas.openxmlformats.org/drawingml/2006/main" wrap="square" lIns="0" tIns="0" rIns="0" bIns="0" anchor="t">
+            <a:normAutofit fontScale="100000"/>
+          </a:bodyPr>
+          <a:lstStyle xmlns:a="http://schemas.openxmlformats.org/drawingml/2006/main"/>
+          <a:p xmlns:a="http://schemas.openxmlformats.org/drawingml/2006/main">
+            <a:pPr algn="l">
+              <a:buNone/>
+              <a:defRPr sz="3525" b="1">
+                <a:solidFill>
+                  <a:srgbClr val="000000"/>
+                </a:solidFill>
+                <a:latin typeface="Arial"/>
+                <a:ea typeface="Arial"/>
+                <a:cs typeface="Arial"/>
+              </a:defRPr>
+            </a:pPr>
+            <a:r>
+              <a:rPr sz="3525" b="1">
+                <a:solidFill>
+                  <a:srgbClr val="000000"/>
+                </a:solidFill>
+                <a:latin typeface="Arial"/>
+                <a:ea typeface="Arial"/>
+                <a:cs typeface="Arial"/>
+              </a:rPr>
+              <a:t>Similar losses can lead to very different paths</a:t>
+            </a:r>
+          </a:p>
+        </p:txBody>
+      </p:sp>
+      <p:sp>
+        <p:nvSpPr>
+          <p:cNvPr id="3" name="">
+            <a:extLst xmlns:a="http://schemas.openxmlformats.org/drawingml/2006/main">
+              <a:ext uri="{FF2B5EF4-FFF2-40B4-BE49-F238E27FC236}">
+                <a16:creationId xmlns:a16="http://schemas.microsoft.com/office/drawing/2014/main" id="{D5CA0FCE-75E8-41EF-A76A-23E9E2120C6A}"/>
+              </a:ext>
+            </a:extLst>
+          </p:cNvPr>
+          <p:cNvSpPr>
+            <a:spLocks xmlns:a="http://schemas.openxmlformats.org/drawingml/2006/main" noGrp="1"/>
+          </p:cNvSpPr>
+          <p:nvPr/>
+        </p:nvSpPr>
+        <p:spPr>
+          <a:xfrm xmlns:a="http://schemas.openxmlformats.org/drawingml/2006/main">
+            <a:off x="457200" y="1200150"/>
+            <a:ext cx="11277600" cy="19050"/>
+          </a:xfrm>
+          <a:prstGeom xmlns:a="http://schemas.openxmlformats.org/drawingml/2006/main" prst="rect">
+            <a:avLst/>
+          </a:prstGeom>
+          <a:solidFill xmlns:a="http://schemas.openxmlformats.org/drawingml/2006/main">
+            <a:srgbClr val="B8BCC4"/>
+          </a:solidFill>
+          <a:ln xmlns:a="http://schemas.openxmlformats.org/drawingml/2006/main" w="0">
+            <a:solidFill>
+              <a:srgbClr val="B8BCC4"/>
+            </a:solidFill>
+            <a:prstDash val="solid"/>
+          </a:ln>
+        </p:spPr>
+      </p:sp>
+      <p:sp>
+        <p:nvSpPr>
+          <p:cNvPr id="4" name="footer-left-11">
+            <a:extLst xmlns:a="http://schemas.openxmlformats.org/drawingml/2006/main">
+              <a:ext uri="{FF2B5EF4-FFF2-40B4-BE49-F238E27FC236}">
+                <a16:creationId xmlns:a16="http://schemas.microsoft.com/office/drawing/2014/main" id="{700DA765-80E0-4197-8700-00D867B86FA2}"/>
+              </a:ext>
+            </a:extLst>
+          </p:cNvPr>
+          <p:cNvSpPr>
+            <a:spLocks xmlns:a="http://schemas.openxmlformats.org/drawingml/2006/main" noGrp="1"/>
+          </p:cNvSpPr>
+          <p:nvPr/>
+        </p:nvSpPr>
+        <p:spPr>
+          <a:xfrm xmlns:a="http://schemas.openxmlformats.org/drawingml/2006/main">
+            <a:off x="457200" y="6515100"/>
+            <a:ext cx="3429000" cy="171450"/>
+          </a:xfrm>
+          <a:prstGeom xmlns:a="http://schemas.openxmlformats.org/drawingml/2006/main" prst="rect">
+            <a:avLst/>
+          </a:prstGeom>
+          <a:noFill xmlns:a="http://schemas.openxmlformats.org/drawingml/2006/main"/>
+          <a:ln xmlns:a="http://schemas.openxmlformats.org/drawingml/2006/main" w="0">
+            <a:noFill/>
+            <a:prstDash val="solid"/>
+          </a:ln>
+        </p:spPr>
+        <p:txBody>
+          <a:bodyPr xmlns:a="http://schemas.openxmlformats.org/drawingml/2006/main" wrap="square" lIns="0" tIns="0" rIns="0" bIns="0" anchor="t">
+            <a:normAutofit fontScale="100000"/>
+          </a:bodyPr>
+          <a:lstStyle xmlns:a="http://schemas.openxmlformats.org/drawingml/2006/main"/>
+          <a:p xmlns:a="http://schemas.openxmlformats.org/drawingml/2006/main">
+            <a:pPr algn="l">
+              <a:buNone/>
+              <a:defRPr sz="825" b="0">
+                <a:solidFill>
+                  <a:srgbClr val="64748B"/>
+                </a:solidFill>
+                <a:latin typeface="Arial"/>
+                <a:ea typeface="Arial"/>
+                <a:cs typeface="Arial"/>
+              </a:defRPr>
+            </a:pPr>
+            <a:r>
+              <a:rPr sz="825" b="0">
+                <a:solidFill>
+                  <a:srgbClr val="64748B"/>
+                </a:solidFill>
+                <a:latin typeface="Arial"/>
+                <a:ea typeface="Arial"/>
+                <a:cs typeface="Arial"/>
+              </a:rPr>
+              <a:t>Return geometry | examples selected without outcome</a:t>
+            </a:r>
+          </a:p>
+        </p:txBody>
+      </p:sp>
+      <p:sp>
+        <p:nvSpPr>
+          <p:cNvPr id="5" name="footer-number-11">
+            <a:extLst xmlns:a="http://schemas.openxmlformats.org/drawingml/2006/main">
+              <a:ext uri="{FF2B5EF4-FFF2-40B4-BE49-F238E27FC236}">
+                <a16:creationId xmlns:a16="http://schemas.microsoft.com/office/drawing/2014/main" id="{83896276-4112-4532-AF7C-776C67C58B77}"/>
+              </a:ext>
+            </a:extLst>
+          </p:cNvPr>
+          <p:cNvSpPr>
+            <a:spLocks xmlns:a="http://schemas.openxmlformats.org/drawingml/2006/main" noGrp="1"/>
+          </p:cNvSpPr>
+          <p:nvPr/>
+        </p:nvSpPr>
+        <p:spPr>
+          <a:xfrm xmlns:a="http://schemas.openxmlformats.org/drawingml/2006/main">
+            <a:off x="10477500" y="6496050"/>
+            <a:ext cx="1257300" cy="190500"/>
+          </a:xfrm>
+          <a:prstGeom xmlns:a="http://schemas.openxmlformats.org/drawingml/2006/main" prst="rect">
+            <a:avLst/>
+          </a:prstGeom>
+          <a:noFill xmlns:a="http://schemas.openxmlformats.org/drawingml/2006/main"/>
+          <a:ln xmlns:a="http://schemas.openxmlformats.org/drawingml/2006/main" w="0">
+            <a:noFill/>
+            <a:prstDash val="solid"/>
+          </a:ln>
+        </p:spPr>
+        <p:txBody>
+          <a:bodyPr xmlns:a="http://schemas.openxmlformats.org/drawingml/2006/main" wrap="square" lIns="0" tIns="0" rIns="0" bIns="0" anchor="t">
+            <a:normAutofit fontScale="100000"/>
+          </a:bodyPr>
+          <a:lstStyle xmlns:a="http://schemas.openxmlformats.org/drawingml/2006/main"/>
+          <a:p xmlns:a="http://schemas.openxmlformats.org/drawingml/2006/main">
+            <a:pPr algn="r">
+              <a:buNone/>
+              <a:defRPr sz="1050" b="0">
+                <a:solidFill>
+                  <a:srgbClr val="667384"/>
+                </a:solidFill>
+                <a:latin typeface="Arial"/>
+                <a:ea typeface="Arial"/>
+                <a:cs typeface="Arial"/>
+              </a:defRPr>
+            </a:pPr>
+            <a:r>
+              <a:rPr sz="1050" b="0">
+                <a:solidFill>
+                  <a:srgbClr val="667384"/>
+                </a:solidFill>
+                <a:latin typeface="Arial"/>
+                <a:ea typeface="Arial"/>
+                <a:cs typeface="Arial"/>
+              </a:rPr>
+              <a:t>45</a:t>
+            </a:r>
+          </a:p>
+        </p:txBody>
+      </p:sp>
+      <p:pic>
+        <p:nvPicPr>
+          <p:cNvPr id="37" name=""/>
+          <p:cNvPicPr>
+            <a:picLocks xmlns:a="http://schemas.openxmlformats.org/drawingml/2006/main" noChangeAspect="1"/>
+          </p:cNvPicPr>
+          <p:nvPr/>
+        </p:nvPicPr>
+        <p:blipFill>
+          <a:blip xmlns:r="http://schemas.openxmlformats.org/officeDocument/2006/relationships" xmlns:a="http://schemas.openxmlformats.org/drawingml/2006/main" r:embed="Rda83d757a3c34d01"/>
+          <a:stretch xmlns:a="http://schemas.openxmlformats.org/drawingml/2006/main"/>
+        </p:blipFill>
+        <p:spPr>
+          <a:xfrm xmlns:a="http://schemas.openxmlformats.org/drawingml/2006/main">
+            <a:off x="1771650" y="1335087"/>
+            <a:ext cx="8648700" cy="5045075"/>
+          </a:xfrm>
+          <a:prstGeom xmlns:a="http://schemas.openxmlformats.org/drawingml/2006/main" prst="rect">
+            <a:avLst/>
+          </a:prstGeom>
+        </p:spPr>
+      </p:pic>
+      <p:pic>
+        <p:nvPicPr>
+          <p:cNvPr id="38" name=""/>
+          <p:cNvPicPr>
+            <a:picLocks xmlns:a="http://schemas.openxmlformats.org/drawingml/2006/main" noChangeAspect="1"/>
+          </p:cNvPicPr>
+          <p:nvPr/>
+        </p:nvPicPr>
+        <p:blipFill>
+          <a:blip xmlns:r="http://schemas.openxmlformats.org/officeDocument/2006/relationships" xmlns:a="http://schemas.openxmlformats.org/drawingml/2006/main" r:embed="Rd57dde1c1b814925">
+            <a:extLst>
+              <a:ext uri="{96DAC541-7B7A-43D3-8B79-37D633B846F1}">
+                <asvg:svgBlip xmlns:asvg="http://schemas.microsoft.com/office/drawing/2016/SVG/main" r:embed="R5ea2d314d39845ab"/>
+              </a:ext>
+            </a:extLst>
+          </a:blip>
+          <a:stretch xmlns:a="http://schemas.openxmlformats.org/drawingml/2006/main"/>
+        </p:blipFill>
+        <p:spPr>
+          <a:xfrm xmlns:a="http://schemas.openxmlformats.org/drawingml/2006/main">
+            <a:off x="1771650" y="1335087"/>
+            <a:ext cx="8648700" cy="5045075"/>
+          </a:xfrm>
+          <a:prstGeom xmlns:a="http://schemas.openxmlformats.org/drawingml/2006/main" prst="rect">
+            <a:avLst/>
+          </a:prstGeom>
+        </p:spPr>
+      </p:pic>
+      <p:pic>
+        <p:nvPicPr>
+          <p:cNvPr id="39" name=""/>
+          <p:cNvPicPr>
+            <a:picLocks xmlns:a="http://schemas.openxmlformats.org/drawingml/2006/main" noChangeAspect="1"/>
+          </p:cNvPicPr>
+          <p:nvPr/>
+        </p:nvPicPr>
+        <p:blipFill>
+          <a:blip xmlns:r="http://schemas.openxmlformats.org/officeDocument/2006/relationships" xmlns:a="http://schemas.openxmlformats.org/drawingml/2006/main" r:embed="R72f037f8ed504ce6"/>
+          <a:stretch xmlns:a="http://schemas.openxmlformats.org/drawingml/2006/main"/>
+        </p:blipFill>
+        <p:spPr>
+          <a:xfrm xmlns:a="http://schemas.openxmlformats.org/drawingml/2006/main">
+            <a:off x="2172053" y="1335087"/>
+            <a:ext cx="7847894" cy="5045075"/>
+          </a:xfrm>
+          <a:prstGeom xmlns:a="http://schemas.openxmlformats.org/drawingml/2006/main" prst="rect">
+            <a:avLst/>
+          </a:prstGeom>
+        </p:spPr>
+      </p:pic>
+      <p:pic>
+        <p:nvPicPr>
+          <p:cNvPr id="40" name=""/>
+          <p:cNvPicPr>
+            <a:picLocks xmlns:a="http://schemas.openxmlformats.org/drawingml/2006/main" noChangeAspect="1"/>
+          </p:cNvPicPr>
+          <p:nvPr/>
+        </p:nvPicPr>
+        <p:blipFill>
+          <a:blip xmlns:r="http://schemas.openxmlformats.org/officeDocument/2006/relationships" xmlns:a="http://schemas.openxmlformats.org/drawingml/2006/main" r:embed="Rd500053c9b594316">
+            <a:extLst>
+              <a:ext uri="{96DAC541-7B7A-43D3-8B79-37D633B846F1}">
+                <asvg:svgBlip xmlns:asvg="http://schemas.microsoft.com/office/drawing/2016/SVG/main" r:embed="Rd5948157c22a40fc"/>
+              </a:ext>
+            </a:extLst>
+          </a:blip>
+          <a:stretch xmlns:a="http://schemas.openxmlformats.org/drawingml/2006/main"/>
+        </p:blipFill>
+        <p:spPr>
+          <a:xfrm xmlns:a="http://schemas.openxmlformats.org/drawingml/2006/main">
+            <a:off x="1771650" y="1335087"/>
+            <a:ext cx="8648700" cy="5045075"/>
+          </a:xfrm>
+          <a:prstGeom xmlns:a="http://schemas.openxmlformats.org/drawingml/2006/main" prst="rect">
+            <a:avLst/>
+          </a:prstGeom>
+        </p:spPr>
+      </p:pic>
+      <p:pic>
+        <p:nvPicPr>
+          <p:cNvPr id="41" name=""/>
+          <p:cNvPicPr>
+            <a:picLocks xmlns:a="http://schemas.openxmlformats.org/drawingml/2006/main" noChangeAspect="1"/>
+          </p:cNvPicPr>
+          <p:nvPr/>
+        </p:nvPicPr>
+        <p:blipFill>
+          <a:blip xmlns:r="http://schemas.openxmlformats.org/officeDocument/2006/relationships" xmlns:a="http://schemas.openxmlformats.org/drawingml/2006/main" r:embed="R30064daf211d44e1"/>
+          <a:stretch xmlns:a="http://schemas.openxmlformats.org/drawingml/2006/main"/>
+        </p:blipFill>
+        <p:spPr>
+          <a:xfrm xmlns:a="http://schemas.openxmlformats.org/drawingml/2006/main">
+            <a:off x="2312194" y="1335087"/>
+            <a:ext cx="7567613" cy="5045075"/>
+          </a:xfrm>
+          <a:prstGeom xmlns:a="http://schemas.openxmlformats.org/drawingml/2006/main" prst="rect">
+            <a:avLst/>
+          </a:prstGeom>
+        </p:spPr>
+      </p:pic>
+      <p:pic>
+        <p:nvPicPr>
+          <p:cNvPr id="42" name=""/>
+          <p:cNvPicPr>
+            <a:picLocks xmlns:a="http://schemas.openxmlformats.org/drawingml/2006/main" noChangeAspect="1"/>
+          </p:cNvPicPr>
+          <p:nvPr/>
+        </p:nvPicPr>
+        <p:blipFill>
+          <a:blip xmlns:r="http://schemas.openxmlformats.org/officeDocument/2006/relationships" xmlns:a="http://schemas.openxmlformats.org/drawingml/2006/main" r:embed="R48f378b933604074">
+            <a:extLst>
+              <a:ext uri="{96DAC541-7B7A-43D3-8B79-37D633B846F1}">
+                <asvg:svgBlip xmlns:asvg="http://schemas.microsoft.com/office/drawing/2016/SVG/main" r:embed="R340c8f5768c5452b"/>
+              </a:ext>
+            </a:extLst>
+          </a:blip>
+          <a:stretch xmlns:a="http://schemas.openxmlformats.org/drawingml/2006/main"/>
+        </p:blipFill>
+        <p:spPr>
+          <a:xfrm xmlns:a="http://schemas.openxmlformats.org/drawingml/2006/main">
+            <a:off x="1771650" y="1335087"/>
+            <a:ext cx="8648700" cy="5045075"/>
+          </a:xfrm>
+          <a:prstGeom xmlns:a="http://schemas.openxmlformats.org/drawingml/2006/main" prst="rect">
+            <a:avLst/>
+          </a:prstGeom>
+        </p:spPr>
+      </p:pic>
+      <p:pic>
+        <p:nvPicPr>
+          <p:cNvPr id="43" name=""/>
+          <p:cNvPicPr>
+            <a:picLocks xmlns:a="http://schemas.openxmlformats.org/drawingml/2006/main" noChangeAspect="1"/>
+          </p:cNvPicPr>
+          <p:nvPr/>
+        </p:nvPicPr>
+        <p:blipFill>
+          <a:blip xmlns:r="http://schemas.openxmlformats.org/officeDocument/2006/relationships" xmlns:a="http://schemas.openxmlformats.org/drawingml/2006/main" r:embed="R42b3975136dd442e"/>
+          <a:stretch xmlns:a="http://schemas.openxmlformats.org/drawingml/2006/main"/>
+        </p:blipFill>
+        <p:spPr>
+          <a:xfrm xmlns:a="http://schemas.openxmlformats.org/drawingml/2006/main">
+            <a:off x="2312194" y="1335087"/>
+            <a:ext cx="7567613" cy="5045075"/>
+          </a:xfrm>
+          <a:prstGeom xmlns:a="http://schemas.openxmlformats.org/drawingml/2006/main" prst="rect">
+            <a:avLst/>
+          </a:prstGeom>
+        </p:spPr>
+      </p:pic>
+    </p:spTree>
+    <p:extLst>
+      <p:ext uri="{BB962C8B-B14F-4D97-AF65-F5344CB8AC3E}">
+        <p14:creationId xmlns:p14="http://schemas.microsoft.com/office/powerpoint/2010/main" val="666536286"/>
+      </p:ext>
+    </p:extLst>
+  </p:cSld>
+</p:sld>
+</file>
+
+<file path=ppt/slides/slide46.xml><?xml version="1.0" encoding="utf-8"?>
+<p:sld xmlns:p="http://schemas.openxmlformats.org/presentationml/2006/main">
+  <p:cSld>
+    <p:bg>
+      <p:bgPr>
+        <a:solidFill xmlns:a="http://schemas.openxmlformats.org/drawingml/2006/main">
+          <a:srgbClr val="FFFFFF"/>
+        </a:solidFill>
+      </p:bgPr>
+    </p:bg>
+    <p:spTree>
+      <p:nvGrpSpPr>
+        <p:cNvPr id="1" name=""/>
+        <p:cNvGrpSpPr/>
+        <p:nvPr/>
+      </p:nvGrpSpPr>
+      <p:grpSpPr>
+        <a:xfrm xmlns:a="http://schemas.openxmlformats.org/drawingml/2006/main"/>
+      </p:grpSpPr>
+      <p:sp>
+        <p:nvSpPr>
+          <p:cNvPr id="24" name="section-11">
+            <a:extLst xmlns:a="http://schemas.openxmlformats.org/drawingml/2006/main">
+              <a:ext uri="{FF2B5EF4-FFF2-40B4-BE49-F238E27FC236}">
+                <a16:creationId xmlns:a16="http://schemas.microsoft.com/office/drawing/2014/main" id="{272ED433-B59C-436C-9DFB-4D317B90A13F}"/>
+              </a:ext>
+            </a:extLst>
+          </p:cNvPr>
+          <p:cNvSpPr>
+            <a:spLocks xmlns:a="http://schemas.openxmlformats.org/drawingml/2006/main" noGrp="1"/>
+          </p:cNvSpPr>
+          <p:nvPr/>
+        </p:nvSpPr>
+        <p:spPr>
+          <a:xfrm xmlns:a="http://schemas.openxmlformats.org/drawingml/2006/main">
+            <a:off x="457200" y="228600"/>
+            <a:ext cx="4191000" cy="228600"/>
+          </a:xfrm>
+          <a:prstGeom xmlns:a="http://schemas.openxmlformats.org/drawingml/2006/main" prst="rect">
+            <a:avLst/>
+          </a:prstGeom>
+          <a:noFill xmlns:a="http://schemas.openxmlformats.org/drawingml/2006/main"/>
+          <a:ln xmlns:a="http://schemas.openxmlformats.org/drawingml/2006/main" w="0">
+            <a:noFill/>
+            <a:prstDash val="solid"/>
+          </a:ln>
+        </p:spPr>
+        <p:txBody>
+          <a:bodyPr xmlns:a="http://schemas.openxmlformats.org/drawingml/2006/main" wrap="square" lIns="0" tIns="0" rIns="0" bIns="0" anchor="t">
+            <a:normAutofit fontScale="100000"/>
+          </a:bodyPr>
+          <a:lstStyle xmlns:a="http://schemas.openxmlformats.org/drawingml/2006/main"/>
+          <a:p xmlns:a="http://schemas.openxmlformats.org/drawingml/2006/main">
+            <a:pPr algn="l">
+              <a:buNone/>
+              <a:defRPr sz="1200" b="1">
+                <a:solidFill>
+                  <a:srgbClr val="667384"/>
+                </a:solidFill>
+                <a:latin typeface="Arial"/>
+                <a:ea typeface="Arial"/>
+                <a:cs typeface="Arial"/>
+              </a:defRPr>
+            </a:pPr>
+            <a:r>
+              <a:rPr sz="1200" b="1">
+                <a:solidFill>
+                  <a:srgbClr val="667384"/>
+                </a:solidFill>
+                <a:latin typeface="Arial"/>
+                <a:ea typeface="Arial"/>
+                <a:cs typeface="Arial"/>
+              </a:rPr>
+              <a:t>VETO DECISION</a:t>
+            </a:r>
+          </a:p>
+        </p:txBody>
+      </p:sp>
+      <p:sp>
+        <p:nvSpPr>
+          <p:cNvPr id="2" name="title-11">
+            <a:extLst xmlns:a="http://schemas.openxmlformats.org/drawingml/2006/main">
+              <a:ext uri="{FF2B5EF4-FFF2-40B4-BE49-F238E27FC236}">
+                <a16:creationId xmlns:a16="http://schemas.microsoft.com/office/drawing/2014/main" id="{3EC40708-7E00-432C-8ECE-907FA5705292}"/>
+              </a:ext>
+            </a:extLst>
+          </p:cNvPr>
+          <p:cNvSpPr>
+            <a:spLocks xmlns:a="http://schemas.openxmlformats.org/drawingml/2006/main" noGrp="1"/>
+          </p:cNvSpPr>
+          <p:nvPr/>
+        </p:nvSpPr>
+        <p:spPr>
+          <a:xfrm xmlns:a="http://schemas.openxmlformats.org/drawingml/2006/main">
+            <a:off x="457200" y="533400"/>
+            <a:ext cx="11277600" cy="628650"/>
+          </a:xfrm>
+          <a:prstGeom xmlns:a="http://schemas.openxmlformats.org/drawingml/2006/main" prst="rect">
+            <a:avLst/>
+          </a:prstGeom>
+          <a:noFill xmlns:a="http://schemas.openxmlformats.org/drawingml/2006/main"/>
+          <a:ln xmlns:a="http://schemas.openxmlformats.org/drawingml/2006/main" w="0">
+            <a:noFill/>
+            <a:prstDash val="solid"/>
+          </a:ln>
+        </p:spPr>
+        <p:txBody>
+          <a:bodyPr xmlns:a="http://schemas.openxmlformats.org/drawingml/2006/main" wrap="square" lIns="0" tIns="0" rIns="0" bIns="0" anchor="t">
+            <a:normAutofit fontScale="100000"/>
+          </a:bodyPr>
+          <a:lstStyle xmlns:a="http://schemas.openxmlformats.org/drawingml/2006/main"/>
+          <a:p xmlns:a="http://schemas.openxmlformats.org/drawingml/2006/main">
+            <a:pPr algn="l">
+              <a:buNone/>
+              <a:defRPr sz="3525" b="1">
+                <a:solidFill>
+                  <a:srgbClr val="000000"/>
+                </a:solidFill>
+                <a:latin typeface="Arial"/>
+                <a:ea typeface="Arial"/>
+                <a:cs typeface="Arial"/>
+              </a:defRPr>
+            </a:pPr>
+            <a:r>
+              <a:rPr sz="3525" b="1">
+                <a:solidFill>
+                  <a:srgbClr val="000000"/>
+                </a:solidFill>
+                <a:latin typeface="Arial"/>
+                <a:ea typeface="Arial"/>
+                <a:cs typeface="Arial"/>
+              </a:rPr>
+              <a:t>Cross-sectional support meets temporal instability</a:t>
+            </a:r>
+          </a:p>
+        </p:txBody>
+      </p:sp>
+      <p:sp>
+        <p:nvSpPr>
+          <p:cNvPr id="3" name="">
+            <a:extLst xmlns:a="http://schemas.openxmlformats.org/drawingml/2006/main">
+              <a:ext uri="{FF2B5EF4-FFF2-40B4-BE49-F238E27FC236}">
+                <a16:creationId xmlns:a16="http://schemas.microsoft.com/office/drawing/2014/main" id="{D5CA0FCE-75E8-41EF-A76A-23E9E2120C6A}"/>
+              </a:ext>
+            </a:extLst>
+          </p:cNvPr>
+          <p:cNvSpPr>
+            <a:spLocks xmlns:a="http://schemas.openxmlformats.org/drawingml/2006/main" noGrp="1"/>
+          </p:cNvSpPr>
+          <p:nvPr/>
+        </p:nvSpPr>
+        <p:spPr>
+          <a:xfrm xmlns:a="http://schemas.openxmlformats.org/drawingml/2006/main">
+            <a:off x="457200" y="1200150"/>
+            <a:ext cx="11277600" cy="19050"/>
+          </a:xfrm>
+          <a:prstGeom xmlns:a="http://schemas.openxmlformats.org/drawingml/2006/main" prst="rect">
+            <a:avLst/>
+          </a:prstGeom>
+          <a:solidFill xmlns:a="http://schemas.openxmlformats.org/drawingml/2006/main">
+            <a:srgbClr val="B8BCC4"/>
+          </a:solidFill>
+          <a:ln xmlns:a="http://schemas.openxmlformats.org/drawingml/2006/main" w="0">
+            <a:solidFill>
+              <a:srgbClr val="B8BCC4"/>
+            </a:solidFill>
+            <a:prstDash val="solid"/>
+          </a:ln>
+        </p:spPr>
+      </p:sp>
+      <p:sp>
+        <p:nvSpPr>
+          <p:cNvPr id="4" name="footer-left-11">
+            <a:extLst xmlns:a="http://schemas.openxmlformats.org/drawingml/2006/main">
+              <a:ext uri="{FF2B5EF4-FFF2-40B4-BE49-F238E27FC236}">
+                <a16:creationId xmlns:a16="http://schemas.microsoft.com/office/drawing/2014/main" id="{700DA765-80E0-4197-8700-00D867B86FA2}"/>
+              </a:ext>
+            </a:extLst>
+          </p:cNvPr>
+          <p:cNvSpPr>
+            <a:spLocks xmlns:a="http://schemas.openxmlformats.org/drawingml/2006/main" noGrp="1"/>
+          </p:cNvSpPr>
+          <p:nvPr/>
+        </p:nvSpPr>
+        <p:spPr>
+          <a:xfrm xmlns:a="http://schemas.openxmlformats.org/drawingml/2006/main">
+            <a:off x="457200" y="6515100"/>
+            <a:ext cx="3429000" cy="171450"/>
+          </a:xfrm>
+          <a:prstGeom xmlns:a="http://schemas.openxmlformats.org/drawingml/2006/main" prst="rect">
+            <a:avLst/>
+          </a:prstGeom>
+          <a:noFill xmlns:a="http://schemas.openxmlformats.org/drawingml/2006/main"/>
+          <a:ln xmlns:a="http://schemas.openxmlformats.org/drawingml/2006/main" w="0">
+            <a:noFill/>
+            <a:prstDash val="solid"/>
+          </a:ln>
+        </p:spPr>
+        <p:txBody>
+          <a:bodyPr xmlns:a="http://schemas.openxmlformats.org/drawingml/2006/main" wrap="square" lIns="0" tIns="0" rIns="0" bIns="0" anchor="t">
+            <a:normAutofit fontScale="100000"/>
+          </a:bodyPr>
+          <a:lstStyle xmlns:a="http://schemas.openxmlformats.org/drawingml/2006/main"/>
+          <a:p xmlns:a="http://schemas.openxmlformats.org/drawingml/2006/main">
+            <a:pPr algn="l">
+              <a:buNone/>
+              <a:defRPr sz="825" b="0">
+                <a:solidFill>
+                  <a:srgbClr val="64748B"/>
+                </a:solidFill>
+                <a:latin typeface="Arial"/>
+                <a:ea typeface="Arial"/>
+                <a:cs typeface="Arial"/>
+              </a:defRPr>
+            </a:pPr>
+            <a:r>
+              <a:rPr sz="825" b="0">
+                <a:solidFill>
+                  <a:srgbClr val="64748B"/>
+                </a:solidFill>
+                <a:latin typeface="Arial"/>
+                <a:ea typeface="Arial"/>
+                <a:cs typeface="Arial"/>
+              </a:rPr>
+              <a:t>Return geometry | qualified TRAIN stop</a:t>
+            </a:r>
+          </a:p>
+        </p:txBody>
+      </p:sp>
+      <p:sp>
+        <p:nvSpPr>
+          <p:cNvPr id="5" name="footer-number-11">
+            <a:extLst xmlns:a="http://schemas.openxmlformats.org/drawingml/2006/main">
+              <a:ext uri="{FF2B5EF4-FFF2-40B4-BE49-F238E27FC236}">
+                <a16:creationId xmlns:a16="http://schemas.microsoft.com/office/drawing/2014/main" id="{83896276-4112-4532-AF7C-776C67C58B77}"/>
+              </a:ext>
+            </a:extLst>
+          </p:cNvPr>
+          <p:cNvSpPr>
+            <a:spLocks xmlns:a="http://schemas.openxmlformats.org/drawingml/2006/main" noGrp="1"/>
+          </p:cNvSpPr>
+          <p:nvPr/>
+        </p:nvSpPr>
+        <p:spPr>
+          <a:xfrm xmlns:a="http://schemas.openxmlformats.org/drawingml/2006/main">
+            <a:off x="10477500" y="6496050"/>
+            <a:ext cx="1257300" cy="190500"/>
+          </a:xfrm>
+          <a:prstGeom xmlns:a="http://schemas.openxmlformats.org/drawingml/2006/main" prst="rect">
+            <a:avLst/>
+          </a:prstGeom>
+          <a:noFill xmlns:a="http://schemas.openxmlformats.org/drawingml/2006/main"/>
+          <a:ln xmlns:a="http://schemas.openxmlformats.org/drawingml/2006/main" w="0">
+            <a:noFill/>
+            <a:prstDash val="solid"/>
+          </a:ln>
+        </p:spPr>
+        <p:txBody>
+          <a:bodyPr xmlns:a="http://schemas.openxmlformats.org/drawingml/2006/main" wrap="square" lIns="0" tIns="0" rIns="0" bIns="0" anchor="t">
+            <a:normAutofit fontScale="100000"/>
+          </a:bodyPr>
+          <a:lstStyle xmlns:a="http://schemas.openxmlformats.org/drawingml/2006/main"/>
+          <a:p xmlns:a="http://schemas.openxmlformats.org/drawingml/2006/main">
+            <a:pPr algn="r">
+              <a:buNone/>
+              <a:defRPr sz="1050" b="0">
+                <a:solidFill>
+                  <a:srgbClr val="667384"/>
+                </a:solidFill>
+                <a:latin typeface="Arial"/>
+                <a:ea typeface="Arial"/>
+                <a:cs typeface="Arial"/>
+              </a:defRPr>
+            </a:pPr>
+            <a:r>
+              <a:rPr sz="1050" b="0">
+                <a:solidFill>
+                  <a:srgbClr val="667384"/>
+                </a:solidFill>
+                <a:latin typeface="Arial"/>
+                <a:ea typeface="Arial"/>
+                <a:cs typeface="Arial"/>
+              </a:rPr>
+              <a:t>46</a:t>
+            </a:r>
+          </a:p>
+        </p:txBody>
+      </p:sp>
+      <p:sp>
+        <p:nvSpPr>
+          <p:cNvPr id="6" name="">
+            <a:extLst xmlns:a="http://schemas.openxmlformats.org/drawingml/2006/main">
+              <a:ext uri="{FF2B5EF4-FFF2-40B4-BE49-F238E27FC236}">
+                <a16:creationId xmlns:a16="http://schemas.microsoft.com/office/drawing/2014/main" id="{10F4BA85-46C5-47BD-BA74-EC806E663D58}"/>
+              </a:ext>
+            </a:extLst>
+          </p:cNvPr>
+          <p:cNvSpPr>
+            <a:spLocks xmlns:a="http://schemas.openxmlformats.org/drawingml/2006/main" noGrp="1"/>
+          </p:cNvSpPr>
+          <p:nvPr/>
+        </p:nvSpPr>
+        <p:spPr>
+          <a:xfrm xmlns:a="http://schemas.openxmlformats.org/drawingml/2006/main">
+            <a:off x="552450" y="1600200"/>
+            <a:ext cx="95250" cy="895350"/>
+          </a:xfrm>
+          <a:prstGeom xmlns:a="http://schemas.openxmlformats.org/drawingml/2006/main" prst="rect">
+            <a:avLst/>
+          </a:prstGeom>
+          <a:solidFill xmlns:a="http://schemas.openxmlformats.org/drawingml/2006/main">
+            <a:srgbClr val="E45756"/>
+          </a:solidFill>
+          <a:ln xmlns:a="http://schemas.openxmlformats.org/drawingml/2006/main" w="0">
+            <a:solidFill>
+              <a:srgbClr val="E45756"/>
+            </a:solidFill>
+            <a:prstDash val="solid"/>
+          </a:ln>
+        </p:spPr>
+      </p:sp>
+      <p:sp>
+        <p:nvSpPr>
+          <p:cNvPr id="7" name="">
+            <a:extLst xmlns:a="http://schemas.openxmlformats.org/drawingml/2006/main">
+              <a:ext uri="{FF2B5EF4-FFF2-40B4-BE49-F238E27FC236}">
+                <a16:creationId xmlns:a16="http://schemas.microsoft.com/office/drawing/2014/main" id="{7EF5B945-9D04-48FA-BA66-96DE813A9715}"/>
+              </a:ext>
+            </a:extLst>
+          </p:cNvPr>
+          <p:cNvSpPr>
+            <a:spLocks xmlns:a="http://schemas.openxmlformats.org/drawingml/2006/main" noGrp="1"/>
+          </p:cNvSpPr>
+          <p:nvPr/>
+        </p:nvSpPr>
+        <p:spPr>
+          <a:xfrm xmlns:a="http://schemas.openxmlformats.org/drawingml/2006/main">
+            <a:off x="876300" y="1581150"/>
+            <a:ext cx="2095500" cy="285750"/>
+          </a:xfrm>
+          <a:prstGeom xmlns:a="http://schemas.openxmlformats.org/drawingml/2006/main" prst="rect">
+            <a:avLst/>
+          </a:prstGeom>
+          <a:noFill xmlns:a="http://schemas.openxmlformats.org/drawingml/2006/main"/>
+          <a:ln xmlns:a="http://schemas.openxmlformats.org/drawingml/2006/main" w="0">
+            <a:noFill/>
+            <a:prstDash val="solid"/>
+          </a:ln>
+        </p:spPr>
+        <p:txBody>
+          <a:bodyPr xmlns:a="http://schemas.openxmlformats.org/drawingml/2006/main" wrap="square" lIns="0" tIns="0" rIns="0" bIns="0" anchor="t">
+            <a:normAutofit fontScale="100000"/>
+          </a:bodyPr>
+          <a:lstStyle xmlns:a="http://schemas.openxmlformats.org/drawingml/2006/main"/>
+          <a:p xmlns:a="http://schemas.openxmlformats.org/drawingml/2006/main">
+            <a:pPr algn="l">
+              <a:buNone/>
+              <a:defRPr sz="1350" b="1">
+                <a:solidFill>
+                  <a:srgbClr val="E45756"/>
+                </a:solidFill>
+                <a:latin typeface="Arial"/>
+                <a:ea typeface="Arial"/>
+                <a:cs typeface="Arial"/>
+              </a:defRPr>
+            </a:pPr>
+            <a:r>
+              <a:rPr sz="1350" b="1">
+                <a:solidFill>
+                  <a:srgbClr val="E45756"/>
+                </a:solidFill>
+                <a:latin typeface="Arial"/>
+                <a:ea typeface="Arial"/>
+                <a:cs typeface="Arial"/>
+              </a:rPr>
+              <a:t>PASSES</a:t>
+            </a:r>
+          </a:p>
+        </p:txBody>
+      </p:sp>
+      <p:sp>
+        <p:nvSpPr>
+          <p:cNvPr id="8" name="">
+            <a:extLst xmlns:a="http://schemas.openxmlformats.org/drawingml/2006/main">
+              <a:ext uri="{FF2B5EF4-FFF2-40B4-BE49-F238E27FC236}">
+                <a16:creationId xmlns:a16="http://schemas.microsoft.com/office/drawing/2014/main" id="{655CF75D-5F23-4C7F-BE9C-764036D0B9E8}"/>
+              </a:ext>
+            </a:extLst>
+          </p:cNvPr>
+          <p:cNvSpPr>
+            <a:spLocks xmlns:a="http://schemas.openxmlformats.org/drawingml/2006/main" noGrp="1"/>
+          </p:cNvSpPr>
+          <p:nvPr/>
+        </p:nvSpPr>
+        <p:spPr>
+          <a:xfrm xmlns:a="http://schemas.openxmlformats.org/drawingml/2006/main">
+            <a:off x="3105150" y="1562100"/>
+            <a:ext cx="4762500" cy="419100"/>
+          </a:xfrm>
+          <a:prstGeom xmlns:a="http://schemas.openxmlformats.org/drawingml/2006/main" prst="rect">
+            <a:avLst/>
+          </a:prstGeom>
+          <a:noFill xmlns:a="http://schemas.openxmlformats.org/drawingml/2006/main"/>
+          <a:ln xmlns:a="http://schemas.openxmlformats.org/drawingml/2006/main" w="0">
+            <a:noFill/>
+            <a:prstDash val="solid"/>
+          </a:ln>
+        </p:spPr>
+        <p:txBody>
+          <a:bodyPr xmlns:a="http://schemas.openxmlformats.org/drawingml/2006/main" wrap="square" lIns="0" tIns="0" rIns="0" bIns="0" anchor="t">
+            <a:normAutofit fontScale="100000"/>
+          </a:bodyPr>
+          <a:lstStyle xmlns:a="http://schemas.openxmlformats.org/drawingml/2006/main"/>
+          <a:p xmlns:a="http://schemas.openxmlformats.org/drawingml/2006/main">
+            <a:pPr algn="l">
+              <a:buNone/>
+              <a:defRPr sz="1950" b="1">
+                <a:solidFill>
+                  <a:srgbClr val="273548"/>
+                </a:solidFill>
+                <a:latin typeface="Arial"/>
+                <a:ea typeface="Arial"/>
+                <a:cs typeface="Arial"/>
+              </a:defRPr>
+            </a:pPr>
+            <a:r>
+              <a:rPr sz="1950" b="1">
+                <a:solidFill>
+                  <a:srgbClr val="273548"/>
+                </a:solidFill>
+                <a:latin typeface="Arial"/>
+                <a:ea typeface="Arial"/>
+                <a:cs typeface="Arial"/>
+              </a:rPr>
+              <a:t>Seven frozen checks</a:t>
+            </a:r>
+          </a:p>
+        </p:txBody>
+      </p:sp>
+      <p:sp>
+        <p:nvSpPr>
+          <p:cNvPr id="9" name="">
+            <a:extLst xmlns:a="http://schemas.openxmlformats.org/drawingml/2006/main">
+              <a:ext uri="{FF2B5EF4-FFF2-40B4-BE49-F238E27FC236}">
+                <a16:creationId xmlns:a16="http://schemas.microsoft.com/office/drawing/2014/main" id="{3E0B76F2-4514-4DD8-934B-ABE42A34E950}"/>
+              </a:ext>
+            </a:extLst>
+          </p:cNvPr>
+          <p:cNvSpPr>
+            <a:spLocks xmlns:a="http://schemas.openxmlformats.org/drawingml/2006/main" noGrp="1"/>
+          </p:cNvSpPr>
+          <p:nvPr/>
+        </p:nvSpPr>
+        <p:spPr>
+          <a:xfrm xmlns:a="http://schemas.openxmlformats.org/drawingml/2006/main">
+            <a:off x="8096250" y="1581150"/>
+            <a:ext cx="3333750" cy="704850"/>
+          </a:xfrm>
+          <a:prstGeom xmlns:a="http://schemas.openxmlformats.org/drawingml/2006/main" prst="rect">
+            <a:avLst/>
+          </a:prstGeom>
+          <a:noFill xmlns:a="http://schemas.openxmlformats.org/drawingml/2006/main"/>
+          <a:ln xmlns:a="http://schemas.openxmlformats.org/drawingml/2006/main" w="0">
+            <a:noFill/>
+            <a:prstDash val="solid"/>
+          </a:ln>
+        </p:spPr>
+        <p:txBody>
+          <a:bodyPr xmlns:a="http://schemas.openxmlformats.org/drawingml/2006/main" wrap="square" lIns="0" tIns="0" rIns="0" bIns="0" anchor="t">
+            <a:normAutofit fontScale="100000"/>
+          </a:bodyPr>
+          <a:lstStyle xmlns:a="http://schemas.openxmlformats.org/drawingml/2006/main"/>
+          <a:p xmlns:a="http://schemas.openxmlformats.org/drawingml/2006/main">
+            <a:pPr algn="l">
+              <a:buNone/>
+              <a:defRPr sz="1425" b="0">
+                <a:solidFill>
+                  <a:srgbClr val="667384"/>
+                </a:solidFill>
+                <a:latin typeface="Arial"/>
+                <a:ea typeface="Arial"/>
+                <a:cs typeface="Arial"/>
+              </a:defRPr>
+            </a:pPr>
+            <a:r>
+              <a:rPr sz="1425" b="0">
+                <a:solidFill>
+                  <a:srgbClr val="667384"/>
+                </a:solidFill>
+                <a:latin typeface="Arial"/>
+                <a:ea typeface="Arial"/>
+                <a:cs typeface="Arial"/>
+              </a:rPr>
+              <a:t>-160 bp asset-balanced</a:t>
+            </a:r>
+          </a:p>
+        </p:txBody>
+      </p:sp>
+      <p:sp>
+        <p:nvSpPr>
+          <p:cNvPr id="10" name="">
+            <a:extLst xmlns:a="http://schemas.openxmlformats.org/drawingml/2006/main">
+              <a:ext uri="{FF2B5EF4-FFF2-40B4-BE49-F238E27FC236}">
+                <a16:creationId xmlns:a16="http://schemas.microsoft.com/office/drawing/2014/main" id="{294777C3-6D2F-4277-840E-7E984FB4554D}"/>
+              </a:ext>
+            </a:extLst>
+          </p:cNvPr>
+          <p:cNvSpPr>
+            <a:spLocks xmlns:a="http://schemas.openxmlformats.org/drawingml/2006/main" noGrp="1"/>
+          </p:cNvSpPr>
+          <p:nvPr/>
+        </p:nvSpPr>
+        <p:spPr>
+          <a:xfrm xmlns:a="http://schemas.openxmlformats.org/drawingml/2006/main">
+            <a:off x="876300" y="2590800"/>
+            <a:ext cx="10553700" cy="9525"/>
+          </a:xfrm>
+          <a:prstGeom xmlns:a="http://schemas.openxmlformats.org/drawingml/2006/main" prst="rect">
+            <a:avLst/>
+          </a:prstGeom>
+          <a:solidFill xmlns:a="http://schemas.openxmlformats.org/drawingml/2006/main">
+            <a:srgbClr val="B8BCC4"/>
+          </a:solidFill>
+          <a:ln xmlns:a="http://schemas.openxmlformats.org/drawingml/2006/main" w="0">
+            <a:solidFill>
+              <a:srgbClr val="B8BCC4"/>
+            </a:solidFill>
+            <a:prstDash val="solid"/>
+          </a:ln>
+        </p:spPr>
+      </p:sp>
+      <p:sp>
+        <p:nvSpPr>
+          <p:cNvPr id="11" name="">
+            <a:extLst xmlns:a="http://schemas.openxmlformats.org/drawingml/2006/main">
+              <a:ext uri="{FF2B5EF4-FFF2-40B4-BE49-F238E27FC236}">
+                <a16:creationId xmlns:a16="http://schemas.microsoft.com/office/drawing/2014/main" id="{F894CF3F-AD63-423C-8F01-64C507896579}"/>
+              </a:ext>
+            </a:extLst>
+          </p:cNvPr>
+          <p:cNvSpPr>
+            <a:spLocks xmlns:a="http://schemas.openxmlformats.org/drawingml/2006/main" noGrp="1"/>
+          </p:cNvSpPr>
+          <p:nvPr/>
+        </p:nvSpPr>
+        <p:spPr>
+          <a:xfrm xmlns:a="http://schemas.openxmlformats.org/drawingml/2006/main">
+            <a:off x="552450" y="2800350"/>
+            <a:ext cx="95250" cy="895350"/>
+          </a:xfrm>
+          <a:prstGeom xmlns:a="http://schemas.openxmlformats.org/drawingml/2006/main" prst="rect">
+            <a:avLst/>
+          </a:prstGeom>
+          <a:solidFill xmlns:a="http://schemas.openxmlformats.org/drawingml/2006/main">
+            <a:srgbClr val="2A9D6F"/>
+          </a:solidFill>
+          <a:ln xmlns:a="http://schemas.openxmlformats.org/drawingml/2006/main" w="0">
+            <a:solidFill>
+              <a:srgbClr val="2A9D6F"/>
+            </a:solidFill>
+            <a:prstDash val="solid"/>
+          </a:ln>
+        </p:spPr>
+      </p:sp>
+      <p:sp>
+        <p:nvSpPr>
+          <p:cNvPr id="12" name="">
+            <a:extLst xmlns:a="http://schemas.openxmlformats.org/drawingml/2006/main">
+              <a:ext uri="{FF2B5EF4-FFF2-40B4-BE49-F238E27FC236}">
+                <a16:creationId xmlns:a16="http://schemas.microsoft.com/office/drawing/2014/main" id="{D3953D03-6A7A-4FEE-B242-02BF0319C169}"/>
+              </a:ext>
+            </a:extLst>
+          </p:cNvPr>
+          <p:cNvSpPr>
+            <a:spLocks xmlns:a="http://schemas.openxmlformats.org/drawingml/2006/main" noGrp="1"/>
+          </p:cNvSpPr>
+          <p:nvPr/>
+        </p:nvSpPr>
+        <p:spPr>
+          <a:xfrm xmlns:a="http://schemas.openxmlformats.org/drawingml/2006/main">
+            <a:off x="876300" y="2781300"/>
+            <a:ext cx="2095500" cy="285750"/>
+          </a:xfrm>
+          <a:prstGeom xmlns:a="http://schemas.openxmlformats.org/drawingml/2006/main" prst="rect">
+            <a:avLst/>
+          </a:prstGeom>
+          <a:noFill xmlns:a="http://schemas.openxmlformats.org/drawingml/2006/main"/>
+          <a:ln xmlns:a="http://schemas.openxmlformats.org/drawingml/2006/main" w="0">
+            <a:noFill/>
+            <a:prstDash val="solid"/>
+          </a:ln>
+        </p:spPr>
+        <p:txBody>
+          <a:bodyPr xmlns:a="http://schemas.openxmlformats.org/drawingml/2006/main" wrap="square" lIns="0" tIns="0" rIns="0" bIns="0" anchor="t">
+            <a:normAutofit fontScale="100000"/>
+          </a:bodyPr>
+          <a:lstStyle xmlns:a="http://schemas.openxmlformats.org/drawingml/2006/main"/>
+          <a:p xmlns:a="http://schemas.openxmlformats.org/drawingml/2006/main">
+            <a:pPr algn="l">
+              <a:buNone/>
+              <a:defRPr sz="1350" b="1">
+                <a:solidFill>
+                  <a:srgbClr val="2A9D6F"/>
+                </a:solidFill>
+                <a:latin typeface="Arial"/>
+                <a:ea typeface="Arial"/>
+                <a:cs typeface="Arial"/>
+              </a:defRPr>
+            </a:pPr>
+            <a:r>
+              <a:rPr sz="1350" b="1">
+                <a:solidFill>
+                  <a:srgbClr val="2A9D6F"/>
+                </a:solidFill>
+                <a:latin typeface="Arial"/>
+                <a:ea typeface="Arial"/>
+                <a:cs typeface="Arial"/>
+              </a:rPr>
+              <a:t>IMPROVES</a:t>
+            </a:r>
+          </a:p>
+        </p:txBody>
+      </p:sp>
+      <p:sp>
+        <p:nvSpPr>
+          <p:cNvPr id="13" name="">
+            <a:extLst xmlns:a="http://schemas.openxmlformats.org/drawingml/2006/main">
+              <a:ext uri="{FF2B5EF4-FFF2-40B4-BE49-F238E27FC236}">
+                <a16:creationId xmlns:a16="http://schemas.microsoft.com/office/drawing/2014/main" id="{52D1DBE8-EAF6-4492-89E7-5C97A3A6A395}"/>
+              </a:ext>
+            </a:extLst>
+          </p:cNvPr>
+          <p:cNvSpPr>
+            <a:spLocks xmlns:a="http://schemas.openxmlformats.org/drawingml/2006/main" noGrp="1"/>
+          </p:cNvSpPr>
+          <p:nvPr/>
+        </p:nvSpPr>
+        <p:spPr>
+          <a:xfrm xmlns:a="http://schemas.openxmlformats.org/drawingml/2006/main">
+            <a:off x="3105150" y="2762250"/>
+            <a:ext cx="4762500" cy="419100"/>
+          </a:xfrm>
+          <a:prstGeom xmlns:a="http://schemas.openxmlformats.org/drawingml/2006/main" prst="rect">
+            <a:avLst/>
+          </a:prstGeom>
+          <a:noFill xmlns:a="http://schemas.openxmlformats.org/drawingml/2006/main"/>
+          <a:ln xmlns:a="http://schemas.openxmlformats.org/drawingml/2006/main" w="0">
+            <a:noFill/>
+            <a:prstDash val="solid"/>
+          </a:ln>
+        </p:spPr>
+        <p:txBody>
+          <a:bodyPr xmlns:a="http://schemas.openxmlformats.org/drawingml/2006/main" wrap="square" lIns="0" tIns="0" rIns="0" bIns="0" anchor="t">
+            <a:normAutofit fontScale="100000"/>
+          </a:bodyPr>
+          <a:lstStyle xmlns:a="http://schemas.openxmlformats.org/drawingml/2006/main"/>
+          <a:p xmlns:a="http://schemas.openxmlformats.org/drawingml/2006/main">
+            <a:pPr algn="l">
+              <a:buNone/>
+              <a:defRPr sz="1950" b="1">
+                <a:solidFill>
+                  <a:srgbClr val="273548"/>
+                </a:solidFill>
+                <a:latin typeface="Arial"/>
+                <a:ea typeface="Arial"/>
+                <a:cs typeface="Arial"/>
+              </a:defRPr>
+            </a:pPr>
+            <a:r>
+              <a:rPr sz="1950" b="1">
+                <a:solidFill>
+                  <a:srgbClr val="273548"/>
+                </a:solidFill>
+                <a:latin typeface="Arial"/>
+                <a:ea typeface="Arial"/>
+                <a:cs typeface="Arial"/>
+              </a:rPr>
+              <a:t>Retained event mean</a:t>
+            </a:r>
+          </a:p>
+        </p:txBody>
+      </p:sp>
+      <p:sp>
+        <p:nvSpPr>
+          <p:cNvPr id="14" name="">
+            <a:extLst xmlns:a="http://schemas.openxmlformats.org/drawingml/2006/main">
+              <a:ext uri="{FF2B5EF4-FFF2-40B4-BE49-F238E27FC236}">
+                <a16:creationId xmlns:a16="http://schemas.microsoft.com/office/drawing/2014/main" id="{2CAF0156-C9E6-4210-8A8A-BFEDD044631B}"/>
+              </a:ext>
+            </a:extLst>
+          </p:cNvPr>
+          <p:cNvSpPr>
+            <a:spLocks xmlns:a="http://schemas.openxmlformats.org/drawingml/2006/main" noGrp="1"/>
+          </p:cNvSpPr>
+          <p:nvPr/>
+        </p:nvSpPr>
+        <p:spPr>
+          <a:xfrm xmlns:a="http://schemas.openxmlformats.org/drawingml/2006/main">
+            <a:off x="8096250" y="2781300"/>
+            <a:ext cx="3333750" cy="704850"/>
+          </a:xfrm>
+          <a:prstGeom xmlns:a="http://schemas.openxmlformats.org/drawingml/2006/main" prst="rect">
+            <a:avLst/>
+          </a:prstGeom>
+          <a:noFill xmlns:a="http://schemas.openxmlformats.org/drawingml/2006/main"/>
+          <a:ln xmlns:a="http://schemas.openxmlformats.org/drawingml/2006/main" w="0">
+            <a:noFill/>
+            <a:prstDash val="solid"/>
+          </a:ln>
+        </p:spPr>
+        <p:txBody>
+          <a:bodyPr xmlns:a="http://schemas.openxmlformats.org/drawingml/2006/main" wrap="square" lIns="0" tIns="0" rIns="0" bIns="0" anchor="t">
+            <a:normAutofit fontScale="100000"/>
+          </a:bodyPr>
+          <a:lstStyle xmlns:a="http://schemas.openxmlformats.org/drawingml/2006/main"/>
+          <a:p xmlns:a="http://schemas.openxmlformats.org/drawingml/2006/main">
+            <a:pPr algn="l">
+              <a:buNone/>
+              <a:defRPr sz="1425" b="0">
+                <a:solidFill>
+                  <a:srgbClr val="667384"/>
+                </a:solidFill>
+                <a:latin typeface="Arial"/>
+                <a:ea typeface="Arial"/>
+                <a:cs typeface="Arial"/>
+              </a:defRPr>
+            </a:pPr>
+            <a:r>
+              <a:rPr sz="1425" b="0">
+                <a:solidFill>
+                  <a:srgbClr val="667384"/>
+                </a:solidFill>
+                <a:latin typeface="Arial"/>
+                <a:ea typeface="Arial"/>
+                <a:cs typeface="Arial"/>
+              </a:rPr>
+              <a:t>-25 to +41 bp/trade</a:t>
+            </a:r>
+          </a:p>
+        </p:txBody>
+      </p:sp>
+      <p:sp>
+        <p:nvSpPr>
+          <p:cNvPr id="15" name="">
+            <a:extLst xmlns:a="http://schemas.openxmlformats.org/drawingml/2006/main">
+              <a:ext uri="{FF2B5EF4-FFF2-40B4-BE49-F238E27FC236}">
+                <a16:creationId xmlns:a16="http://schemas.microsoft.com/office/drawing/2014/main" id="{B126165D-5B65-44DB-99BD-15ED33F9B90F}"/>
+              </a:ext>
+            </a:extLst>
+          </p:cNvPr>
+          <p:cNvSpPr>
+            <a:spLocks xmlns:a="http://schemas.openxmlformats.org/drawingml/2006/main" noGrp="1"/>
+          </p:cNvSpPr>
+          <p:nvPr/>
+        </p:nvSpPr>
+        <p:spPr>
+          <a:xfrm xmlns:a="http://schemas.openxmlformats.org/drawingml/2006/main">
+            <a:off x="876300" y="3790950"/>
+            <a:ext cx="10553700" cy="9525"/>
+          </a:xfrm>
+          <a:prstGeom xmlns:a="http://schemas.openxmlformats.org/drawingml/2006/main" prst="rect">
+            <a:avLst/>
+          </a:prstGeom>
+          <a:solidFill xmlns:a="http://schemas.openxmlformats.org/drawingml/2006/main">
+            <a:srgbClr val="B8BCC4"/>
+          </a:solidFill>
+          <a:ln xmlns:a="http://schemas.openxmlformats.org/drawingml/2006/main" w="0">
+            <a:solidFill>
+              <a:srgbClr val="B8BCC4"/>
+            </a:solidFill>
+            <a:prstDash val="solid"/>
+          </a:ln>
+        </p:spPr>
+      </p:sp>
+      <p:sp>
+        <p:nvSpPr>
+          <p:cNvPr id="16" name="">
+            <a:extLst xmlns:a="http://schemas.openxmlformats.org/drawingml/2006/main">
+              <a:ext uri="{FF2B5EF4-FFF2-40B4-BE49-F238E27FC236}">
+                <a16:creationId xmlns:a16="http://schemas.microsoft.com/office/drawing/2014/main" id="{7DC0911F-9587-4B19-84C6-11974DB2A91C}"/>
+              </a:ext>
+            </a:extLst>
+          </p:cNvPr>
+          <p:cNvSpPr>
+            <a:spLocks xmlns:a="http://schemas.openxmlformats.org/drawingml/2006/main" noGrp="1"/>
+          </p:cNvSpPr>
+          <p:nvPr/>
+        </p:nvSpPr>
+        <p:spPr>
+          <a:xfrm xmlns:a="http://schemas.openxmlformats.org/drawingml/2006/main">
+            <a:off x="552450" y="4000500"/>
+            <a:ext cx="95250" cy="895350"/>
+          </a:xfrm>
+          <a:prstGeom xmlns:a="http://schemas.openxmlformats.org/drawingml/2006/main" prst="rect">
+            <a:avLst/>
+          </a:prstGeom>
+          <a:solidFill xmlns:a="http://schemas.openxmlformats.org/drawingml/2006/main">
+            <a:srgbClr val="3D8DFF"/>
+          </a:solidFill>
+          <a:ln xmlns:a="http://schemas.openxmlformats.org/drawingml/2006/main" w="0">
+            <a:solidFill>
+              <a:srgbClr val="3D8DFF"/>
+            </a:solidFill>
+            <a:prstDash val="solid"/>
+          </a:ln>
+        </p:spPr>
+      </p:sp>
+      <p:sp>
+        <p:nvSpPr>
+          <p:cNvPr id="17" name="">
+            <a:extLst xmlns:a="http://schemas.openxmlformats.org/drawingml/2006/main">
+              <a:ext uri="{FF2B5EF4-FFF2-40B4-BE49-F238E27FC236}">
+                <a16:creationId xmlns:a16="http://schemas.microsoft.com/office/drawing/2014/main" id="{DAB53991-F50C-4B95-9F23-DAE86BCEDF3B}"/>
+              </a:ext>
+            </a:extLst>
+          </p:cNvPr>
+          <p:cNvSpPr>
+            <a:spLocks xmlns:a="http://schemas.openxmlformats.org/drawingml/2006/main" noGrp="1"/>
+          </p:cNvSpPr>
+          <p:nvPr/>
+        </p:nvSpPr>
+        <p:spPr>
+          <a:xfrm xmlns:a="http://schemas.openxmlformats.org/drawingml/2006/main">
+            <a:off x="876300" y="3981450"/>
+            <a:ext cx="2095500" cy="285750"/>
+          </a:xfrm>
+          <a:prstGeom xmlns:a="http://schemas.openxmlformats.org/drawingml/2006/main" prst="rect">
+            <a:avLst/>
+          </a:prstGeom>
+          <a:noFill xmlns:a="http://schemas.openxmlformats.org/drawingml/2006/main"/>
+          <a:ln xmlns:a="http://schemas.openxmlformats.org/drawingml/2006/main" w="0">
+            <a:noFill/>
+            <a:prstDash val="solid"/>
+          </a:ln>
+        </p:spPr>
+        <p:txBody>
+          <a:bodyPr xmlns:a="http://schemas.openxmlformats.org/drawingml/2006/main" wrap="square" lIns="0" tIns="0" rIns="0" bIns="0" anchor="t">
+            <a:normAutofit fontScale="100000"/>
+          </a:bodyPr>
+          <a:lstStyle xmlns:a="http://schemas.openxmlformats.org/drawingml/2006/main"/>
+          <a:p xmlns:a="http://schemas.openxmlformats.org/drawingml/2006/main">
+            <a:pPr algn="l">
+              <a:buNone/>
+              <a:defRPr sz="1350" b="1">
+                <a:solidFill>
+                  <a:srgbClr val="3D8DFF"/>
+                </a:solidFill>
+                <a:latin typeface="Arial"/>
+                <a:ea typeface="Arial"/>
+                <a:cs typeface="Arial"/>
+              </a:defRPr>
+            </a:pPr>
+            <a:r>
+              <a:rPr sz="1350" b="1">
+                <a:solidFill>
+                  <a:srgbClr val="3D8DFF"/>
+                </a:solidFill>
+                <a:latin typeface="Arial"/>
+                <a:ea typeface="Arial"/>
+                <a:cs typeface="Arial"/>
+              </a:rPr>
+              <a:t>BRAKE</a:t>
+            </a:r>
+          </a:p>
+        </p:txBody>
+      </p:sp>
+      <p:sp>
+        <p:nvSpPr>
+          <p:cNvPr id="18" name="">
+            <a:extLst xmlns:a="http://schemas.openxmlformats.org/drawingml/2006/main">
+              <a:ext uri="{FF2B5EF4-FFF2-40B4-BE49-F238E27FC236}">
+                <a16:creationId xmlns:a16="http://schemas.microsoft.com/office/drawing/2014/main" id="{5DFACF3B-08BC-4148-A40A-2004DFB81D71}"/>
+              </a:ext>
+            </a:extLst>
+          </p:cNvPr>
+          <p:cNvSpPr>
+            <a:spLocks xmlns:a="http://schemas.openxmlformats.org/drawingml/2006/main" noGrp="1"/>
+          </p:cNvSpPr>
+          <p:nvPr/>
+        </p:nvSpPr>
+        <p:spPr>
+          <a:xfrm xmlns:a="http://schemas.openxmlformats.org/drawingml/2006/main">
+            <a:off x="3105150" y="3962400"/>
+            <a:ext cx="4762500" cy="419100"/>
+          </a:xfrm>
+          <a:prstGeom xmlns:a="http://schemas.openxmlformats.org/drawingml/2006/main" prst="rect">
+            <a:avLst/>
+          </a:prstGeom>
+          <a:noFill xmlns:a="http://schemas.openxmlformats.org/drawingml/2006/main"/>
+          <a:ln xmlns:a="http://schemas.openxmlformats.org/drawingml/2006/main" w="0">
+            <a:noFill/>
+            <a:prstDash val="solid"/>
+          </a:ln>
+        </p:spPr>
+        <p:txBody>
+          <a:bodyPr xmlns:a="http://schemas.openxmlformats.org/drawingml/2006/main" wrap="square" lIns="0" tIns="0" rIns="0" bIns="0" anchor="t">
+            <a:normAutofit fontScale="100000"/>
+          </a:bodyPr>
+          <a:lstStyle xmlns:a="http://schemas.openxmlformats.org/drawingml/2006/main"/>
+          <a:p xmlns:a="http://schemas.openxmlformats.org/drawingml/2006/main">
+            <a:pPr algn="l">
+              <a:buNone/>
+              <a:defRPr sz="1950" b="1">
+                <a:solidFill>
+                  <a:srgbClr val="273548"/>
+                </a:solidFill>
+                <a:latin typeface="Arial"/>
+                <a:ea typeface="Arial"/>
+                <a:cs typeface="Arial"/>
+              </a:defRPr>
+            </a:pPr>
+            <a:r>
+              <a:rPr sz="1950" b="1">
+                <a:solidFill>
+                  <a:srgbClr val="273548"/>
+                </a:solidFill>
+                <a:latin typeface="Arial"/>
+                <a:ea typeface="Arial"/>
+                <a:cs typeface="Arial"/>
+              </a:rPr>
+              <a:t>Only 3 of 6 years</a:t>
+            </a:r>
+          </a:p>
+        </p:txBody>
+      </p:sp>
+      <p:sp>
+        <p:nvSpPr>
+          <p:cNvPr id="19" name="">
+            <a:extLst xmlns:a="http://schemas.openxmlformats.org/drawingml/2006/main">
+              <a:ext uri="{FF2B5EF4-FFF2-40B4-BE49-F238E27FC236}">
+                <a16:creationId xmlns:a16="http://schemas.microsoft.com/office/drawing/2014/main" id="{C907D23B-44A2-43C4-9658-4C6E38430BF5}"/>
+              </a:ext>
+            </a:extLst>
+          </p:cNvPr>
+          <p:cNvSpPr>
+            <a:spLocks xmlns:a="http://schemas.openxmlformats.org/drawingml/2006/main" noGrp="1"/>
+          </p:cNvSpPr>
+          <p:nvPr/>
+        </p:nvSpPr>
+        <p:spPr>
+          <a:xfrm xmlns:a="http://schemas.openxmlformats.org/drawingml/2006/main">
+            <a:off x="8096250" y="3981450"/>
+            <a:ext cx="3333750" cy="704850"/>
+          </a:xfrm>
+          <a:prstGeom xmlns:a="http://schemas.openxmlformats.org/drawingml/2006/main" prst="rect">
+            <a:avLst/>
+          </a:prstGeom>
+          <a:noFill xmlns:a="http://schemas.openxmlformats.org/drawingml/2006/main"/>
+          <a:ln xmlns:a="http://schemas.openxmlformats.org/drawingml/2006/main" w="0">
+            <a:noFill/>
+            <a:prstDash val="solid"/>
+          </a:ln>
+        </p:spPr>
+        <p:txBody>
+          <a:bodyPr xmlns:a="http://schemas.openxmlformats.org/drawingml/2006/main" wrap="square" lIns="0" tIns="0" rIns="0" bIns="0" anchor="t">
+            <a:normAutofit fontScale="100000"/>
+          </a:bodyPr>
+          <a:lstStyle xmlns:a="http://schemas.openxmlformats.org/drawingml/2006/main"/>
+          <a:p xmlns:a="http://schemas.openxmlformats.org/drawingml/2006/main">
+            <a:pPr algn="l">
+              <a:buNone/>
+              <a:defRPr sz="1425" b="0">
+                <a:solidFill>
+                  <a:srgbClr val="667384"/>
+                </a:solidFill>
+                <a:latin typeface="Arial"/>
+                <a:ea typeface="Arial"/>
+                <a:cs typeface="Arial"/>
+              </a:defRPr>
+            </a:pPr>
+            <a:r>
+              <a:rPr sz="1425" b="0">
+                <a:solidFill>
+                  <a:srgbClr val="667384"/>
+                </a:solidFill>
+                <a:latin typeface="Arial"/>
+                <a:ea typeface="Arial"/>
+                <a:cs typeface="Arial"/>
+              </a:rPr>
+              <a:t>2023 reverses</a:t>
+            </a:r>
+          </a:p>
+        </p:txBody>
+      </p:sp>
+      <p:sp>
+        <p:nvSpPr>
+          <p:cNvPr id="20" name="">
+            <a:extLst xmlns:a="http://schemas.openxmlformats.org/drawingml/2006/main">
+              <a:ext uri="{FF2B5EF4-FFF2-40B4-BE49-F238E27FC236}">
+                <a16:creationId xmlns:a16="http://schemas.microsoft.com/office/drawing/2014/main" id="{8042DFC4-7E22-47E6-8C53-1E63A8411C3A}"/>
+              </a:ext>
+            </a:extLst>
+          </p:cNvPr>
+          <p:cNvSpPr>
+            <a:spLocks xmlns:a="http://schemas.openxmlformats.org/drawingml/2006/main" noGrp="1"/>
+          </p:cNvSpPr>
+          <p:nvPr/>
+        </p:nvSpPr>
+        <p:spPr>
+          <a:xfrm xmlns:a="http://schemas.openxmlformats.org/drawingml/2006/main">
+            <a:off x="876300" y="4991100"/>
+            <a:ext cx="10553700" cy="9525"/>
+          </a:xfrm>
+          <a:prstGeom xmlns:a="http://schemas.openxmlformats.org/drawingml/2006/main" prst="rect">
+            <a:avLst/>
+          </a:prstGeom>
+          <a:solidFill xmlns:a="http://schemas.openxmlformats.org/drawingml/2006/main">
+            <a:srgbClr val="B8BCC4"/>
+          </a:solidFill>
+          <a:ln xmlns:a="http://schemas.openxmlformats.org/drawingml/2006/main" w="0">
+            <a:solidFill>
+              <a:srgbClr val="B8BCC4"/>
+            </a:solidFill>
+            <a:prstDash val="solid"/>
+          </a:ln>
+        </p:spPr>
+      </p:sp>
+      <p:sp>
+        <p:nvSpPr>
+          <p:cNvPr id="21" name="">
+            <a:extLst xmlns:a="http://schemas.openxmlformats.org/drawingml/2006/main">
+              <a:ext uri="{FF2B5EF4-FFF2-40B4-BE49-F238E27FC236}">
+                <a16:creationId xmlns:a16="http://schemas.microsoft.com/office/drawing/2014/main" id="{F4066D54-676B-4D0F-93B6-2152B57E41AF}"/>
+              </a:ext>
+            </a:extLst>
+          </p:cNvPr>
+          <p:cNvSpPr>
+            <a:spLocks xmlns:a="http://schemas.openxmlformats.org/drawingml/2006/main" noGrp="1"/>
+          </p:cNvSpPr>
+          <p:nvPr/>
+        </p:nvSpPr>
+        <p:spPr>
+          <a:xfrm xmlns:a="http://schemas.openxmlformats.org/drawingml/2006/main">
+            <a:off x="552450" y="5353050"/>
+            <a:ext cx="10877550" cy="781050"/>
+          </a:xfrm>
+          <a:prstGeom xmlns:a="http://schemas.openxmlformats.org/drawingml/2006/main" prst="rect">
+            <a:avLst/>
+          </a:prstGeom>
+          <a:solidFill xmlns:a="http://schemas.openxmlformats.org/drawingml/2006/main">
+            <a:srgbClr val="EAF5FB"/>
+          </a:solidFill>
+          <a:ln xmlns:a="http://schemas.openxmlformats.org/drawingml/2006/main" w="0">
+            <a:solidFill>
+              <a:srgbClr val="EAF5FB"/>
+            </a:solidFill>
+            <a:prstDash val="solid"/>
+          </a:ln>
+        </p:spPr>
+      </p:sp>
+      <p:sp>
+        <p:nvSpPr>
+          <p:cNvPr id="22" name="">
+            <a:extLst xmlns:a="http://schemas.openxmlformats.org/drawingml/2006/main">
+              <a:ext uri="{FF2B5EF4-FFF2-40B4-BE49-F238E27FC236}">
+                <a16:creationId xmlns:a16="http://schemas.microsoft.com/office/drawing/2014/main" id="{6E4C79AE-EB98-4B5B-B3D3-11ED0D4C729B}"/>
+              </a:ext>
+            </a:extLst>
+          </p:cNvPr>
+          <p:cNvSpPr>
+            <a:spLocks xmlns:a="http://schemas.openxmlformats.org/drawingml/2006/main" noGrp="1"/>
+          </p:cNvSpPr>
+          <p:nvPr/>
+        </p:nvSpPr>
+        <p:spPr>
+          <a:xfrm xmlns:a="http://schemas.openxmlformats.org/drawingml/2006/main">
+            <a:off x="781050" y="5524500"/>
+            <a:ext cx="2476500" cy="323850"/>
+          </a:xfrm>
+          <a:prstGeom xmlns:a="http://schemas.openxmlformats.org/drawingml/2006/main" prst="rect">
+            <a:avLst/>
+          </a:prstGeom>
+          <a:noFill xmlns:a="http://schemas.openxmlformats.org/drawingml/2006/main"/>
+          <a:ln xmlns:a="http://schemas.openxmlformats.org/drawingml/2006/main" w="0">
+            <a:noFill/>
+            <a:prstDash val="solid"/>
+          </a:ln>
+        </p:spPr>
+        <p:txBody>
+          <a:bodyPr xmlns:a="http://schemas.openxmlformats.org/drawingml/2006/main" wrap="square" lIns="0" tIns="0" rIns="0" bIns="0" anchor="t">
+            <a:normAutofit fontScale="100000"/>
+          </a:bodyPr>
+          <a:lstStyle xmlns:a="http://schemas.openxmlformats.org/drawingml/2006/main"/>
+          <a:p xmlns:a="http://schemas.openxmlformats.org/drawingml/2006/main">
+            <a:pPr algn="l">
+              <a:buNone/>
+              <a:defRPr sz="1725" b="1">
+                <a:solidFill>
+                  <a:srgbClr val="3D8DFF"/>
+                </a:solidFill>
+                <a:latin typeface="Arial"/>
+                <a:ea typeface="Arial"/>
+                <a:cs typeface="Arial"/>
+              </a:defRPr>
+            </a:pPr>
+            <a:r>
+              <a:rPr sz="1725" b="1">
+                <a:solidFill>
+                  <a:srgbClr val="3D8DFF"/>
+                </a:solidFill>
+                <a:latin typeface="Arial"/>
+                <a:ea typeface="Arial"/>
+                <a:cs typeface="Arial"/>
+              </a:rPr>
+              <a:t>STOP BEFORE OOS</a:t>
+            </a:r>
+          </a:p>
+        </p:txBody>
+      </p:sp>
+      <p:sp>
+        <p:nvSpPr>
+          <p:cNvPr id="23" name="">
+            <a:extLst xmlns:a="http://schemas.openxmlformats.org/drawingml/2006/main">
+              <a:ext uri="{FF2B5EF4-FFF2-40B4-BE49-F238E27FC236}">
+                <a16:creationId xmlns:a16="http://schemas.microsoft.com/office/drawing/2014/main" id="{3320D60E-6067-4236-80ED-A898A863026E}"/>
+              </a:ext>
+            </a:extLst>
+          </p:cNvPr>
+          <p:cNvSpPr>
+            <a:spLocks xmlns:a="http://schemas.openxmlformats.org/drawingml/2006/main" noGrp="1"/>
+          </p:cNvSpPr>
+          <p:nvPr/>
+        </p:nvSpPr>
+        <p:spPr>
+          <a:xfrm xmlns:a="http://schemas.openxmlformats.org/drawingml/2006/main">
+            <a:off x="3333750" y="5486400"/>
+            <a:ext cx="7810500" cy="419100"/>
+          </a:xfrm>
+          <a:prstGeom xmlns:a="http://schemas.openxmlformats.org/drawingml/2006/main" prst="rect">
+            <a:avLst/>
+          </a:prstGeom>
+          <a:noFill xmlns:a="http://schemas.openxmlformats.org/drawingml/2006/main"/>
+          <a:ln xmlns:a="http://schemas.openxmlformats.org/drawingml/2006/main" w="0">
+            <a:noFill/>
+            <a:prstDash val="solid"/>
+          </a:ln>
+        </p:spPr>
+        <p:txBody>
+          <a:bodyPr xmlns:a="http://schemas.openxmlformats.org/drawingml/2006/main" wrap="square" lIns="0" tIns="0" rIns="0" bIns="0" anchor="t">
+            <a:normAutofit fontScale="80481"/>
+          </a:bodyPr>
+          <a:lstStyle xmlns:a="http://schemas.openxmlformats.org/drawingml/2006/main"/>
+          <a:p xmlns:a="http://schemas.openxmlformats.org/drawingml/2006/main">
+            <a:pPr algn="l">
+              <a:buNone/>
+              <a:defRPr sz="1800" b="1">
+                <a:solidFill>
+                  <a:srgbClr val="273548"/>
+                </a:solidFill>
+                <a:latin typeface="Arial"/>
+                <a:ea typeface="Arial"/>
+                <a:cs typeface="Arial"/>
+              </a:defRPr>
+            </a:pPr>
+            <a:r>
+              <a:rPr sz="1800" b="1">
+                <a:solidFill>
+                  <a:srgbClr val="273548"/>
+                </a:solidFill>
+                <a:latin typeface="Arial"/>
+                <a:ea typeface="Arial"/>
+                <a:cs typeface="Arial"/>
+              </a:rPr>
+              <a:t>Do not tune 60%, combine features, select years or sectors, or open post-2023 outcomes.</a:t>
             </a:r>
           </a:p>
         </p:txBody>
